--- a/output/丽水学院_WebSlide制作与演示指南.pptx
+++ b/output/丽水学院_WebSlide制作与演示指南.pptx
@@ -8552,11 +8552,11 @@
             <a:avLst/>
           </a:prstGeom>
           <a:solidFill>
-            <a:srgbClr val="FFFFFF"/>
+            <a:srgbClr val="EDF6F5"/>
           </a:solidFill>
           <a:ln w="12700">
             <a:solidFill>
-              <a:srgbClr val="FFFFFF">
+              <a:srgbClr val="EDF6F5">
                 <a:alpha val="0"/>
               </a:srgbClr>
             </a:solidFill>
@@ -8564,106 +8564,226 @@
           </a:ln>
         </p:spPr>
       </p:sp>
-      <p:pic>
-        <p:nvPicPr>
-          <p:cNvPr id="20" name="Image 1" descr="preencoded.png">    </p:cNvPr>
-          <p:cNvPicPr>
-            <a:picLocks noChangeAspect="1"/>
-          </p:cNvPicPr>
-          <p:nvPr/>
-        </p:nvPicPr>
-        <p:blipFill>
-          <a:blip r:embed="rId2"/>
-          <a:stretch>
-            <a:fillRect/>
-          </a:stretch>
-        </p:blipFill>
-        <p:spPr>
-          <a:xfrm>
-            <a:off x="6416040" y="2072640"/>
-            <a:ext cx="685800" cy="365760"/>
-          </a:xfrm>
-          <a:prstGeom prst="rect">
-            <a:avLst/>
-          </a:prstGeom>
-        </p:spPr>
-      </p:pic>
-      <p:pic>
-        <p:nvPicPr>
-          <p:cNvPr id="21" name="Image 2" descr="preencoded.png">    </p:cNvPr>
-          <p:cNvPicPr>
-            <a:picLocks noChangeAspect="1"/>
-          </p:cNvPicPr>
-          <p:nvPr/>
-        </p:nvPicPr>
-        <p:blipFill>
-          <a:blip r:embed="rId3"/>
-          <a:stretch>
-            <a:fillRect/>
-          </a:stretch>
-        </p:blipFill>
-        <p:spPr>
-          <a:xfrm>
-            <a:off x="6294120" y="2072640"/>
-            <a:ext cx="685800" cy="365760"/>
-          </a:xfrm>
-          <a:prstGeom prst="rect">
-            <a:avLst/>
-          </a:prstGeom>
-        </p:spPr>
-      </p:pic>
-      <p:sp>
-        <p:nvSpPr>
-          <p:cNvPr id="22" name="Text 16"/>
-          <p:cNvSpPr/>
-          <p:nvPr/>
-        </p:nvSpPr>
-        <p:spPr>
-          <a:xfrm>
-            <a:off x="6385560" y="2090499"/>
-            <a:ext cx="254079" cy="330041"/>
-          </a:xfrm>
-          <a:prstGeom prst="rect">
-            <a:avLst/>
-          </a:prstGeom>
-          <a:noFill/>
-          <a:ln/>
-        </p:spPr>
-        <p:txBody>
-          <a:bodyPr wrap="none" lIns="0" tIns="0" rIns="0" bIns="0" rtlCol="0" anchor="ctr"/>
+      <p:sp>
+        <p:nvSpPr>
+          <p:cNvPr id="20" name="Text 16"/>
+          <p:cNvSpPr/>
+          <p:nvPr/>
+        </p:nvSpPr>
+        <p:spPr>
+          <a:xfrm>
+            <a:off x="6294120" y="2026920"/>
+            <a:ext cx="5303520" cy="297180"/>
+          </a:xfrm>
+          <a:prstGeom prst="rect">
+            <a:avLst/>
+          </a:prstGeom>
+          <a:noFill/>
+          <a:ln/>
+        </p:spPr>
+        <p:txBody>
+          <a:bodyPr wrap="square" lIns="0" tIns="0" rIns="0" bIns="0" rtlCol="0" anchor="ctr"/>
           <a:lstStyle/>
           <a:p>
             <a:pPr algn="l" indent="0" marL="0">
               <a:lnSpc>
-                <a:spcPts val="2600"/>
-              </a:lnSpc>
-              <a:buNone/>
-            </a:pPr>
-            <a:r>
-              <a:rPr lang="en-US" sz="2000" b="1" dirty="0">
+                <a:spcPts val="2340"/>
+              </a:lnSpc>
+              <a:buNone/>
+            </a:pPr>
+            <a:r>
+              <a:rPr lang="en-US" sz="1800" b="1" dirty="0">
                 <a:solidFill>
                   <a:srgbClr val="FFFFFF"/>
                 </a:solidFill>
-                <a:latin typeface="Times New Roman" pitchFamily="34" charset="0"/>
-                <a:ea typeface="Times New Roman" pitchFamily="34" charset="-122"/>
-                <a:cs typeface="Times New Roman" pitchFamily="34" charset="-120"/>
-              </a:rPr>
-              <a:t>01</a:t>
-            </a:r>
-            <a:endParaRPr lang="en-US" sz="2000" dirty="0"/>
-          </a:p>
-        </p:txBody>
-      </p:sp>
-      <p:sp>
-        <p:nvSpPr>
-          <p:cNvPr id="23" name="Text 17"/>
-          <p:cNvSpPr/>
-          <p:nvPr/>
-        </p:nvSpPr>
-        <p:spPr>
-          <a:xfrm>
-            <a:off x="7223760" y="2106930"/>
-            <a:ext cx="4373880" cy="297180"/>
+                <a:latin typeface="Microsoft YaHei" pitchFamily="34" charset="0"/>
+                <a:ea typeface="Microsoft YaHei" pitchFamily="34" charset="-122"/>
+                <a:cs typeface="Microsoft YaHei" pitchFamily="34" charset="-120"/>
+              </a:rPr>
+              <a:t>操作路径</a:t>
+            </a:r>
+            <a:endParaRPr lang="en-US" sz="1800" dirty="0"/>
+          </a:p>
+        </p:txBody>
+      </p:sp>
+      <p:sp>
+        <p:nvSpPr>
+          <p:cNvPr id="21" name="Text 17"/>
+          <p:cNvSpPr/>
+          <p:nvPr/>
+        </p:nvSpPr>
+        <p:spPr>
+          <a:xfrm>
+            <a:off x="6294120" y="2522220"/>
+            <a:ext cx="5303520" cy="314920"/>
+          </a:xfrm>
+          <a:prstGeom prst="rect">
+            <a:avLst/>
+          </a:prstGeom>
+          <a:noFill/>
+          <a:ln/>
+        </p:spPr>
+        <p:txBody>
+          <a:bodyPr wrap="square" lIns="0" tIns="0" rIns="0" bIns="0" rtlCol="0" anchor="ctr"/>
+          <a:lstStyle/>
+          <a:p>
+            <a:pPr algn="just" indent="0" marL="0">
+              <a:lnSpc>
+                <a:spcPts val="2480"/>
+              </a:lnSpc>
+              <a:buNone/>
+            </a:pPr>
+            <a:r>
+              <a:rPr lang="en-US" sz="1600" dirty="0">
+                <a:solidFill>
+                  <a:srgbClr val="18383F"/>
+                </a:solidFill>
+                <a:latin typeface="Microsoft YaHei" pitchFamily="34" charset="0"/>
+                <a:ea typeface="Microsoft YaHei" pitchFamily="34" charset="-122"/>
+                <a:cs typeface="Microsoft YaHei" pitchFamily="34" charset="-120"/>
+              </a:rPr>
+              <a:t>双击占位区域打开弹窗；选择本地图片或视频。</a:t>
+            </a:r>
+            <a:endParaRPr lang="en-US" sz="1600" dirty="0"/>
+          </a:p>
+        </p:txBody>
+      </p:sp>
+      <p:sp>
+        <p:nvSpPr>
+          <p:cNvPr id="22" name="Text 18"/>
+          <p:cNvSpPr/>
+          <p:nvPr/>
+        </p:nvSpPr>
+        <p:spPr>
+          <a:xfrm>
+            <a:off x="6294120" y="2913340"/>
+            <a:ext cx="5303520" cy="629841"/>
+          </a:xfrm>
+          <a:prstGeom prst="rect">
+            <a:avLst/>
+          </a:prstGeom>
+          <a:noFill/>
+          <a:ln/>
+        </p:spPr>
+        <p:txBody>
+          <a:bodyPr wrap="square" lIns="0" tIns="0" rIns="0" bIns="0" rtlCol="0" anchor="ctr"/>
+          <a:lstStyle/>
+          <a:p>
+            <a:pPr algn="just" indent="0" marL="0">
+              <a:lnSpc>
+                <a:spcPts val="2480"/>
+              </a:lnSpc>
+              <a:buNone/>
+            </a:pPr>
+            <a:r>
+              <a:rPr lang="en-US" sz="1600" dirty="0">
+                <a:solidFill>
+                  <a:srgbClr val="18383F"/>
+                </a:solidFill>
+                <a:latin typeface="Microsoft YaHei" pitchFamily="34" charset="0"/>
+                <a:ea typeface="Microsoft YaHei" pitchFamily="34" charset="-122"/>
+                <a:cs typeface="Microsoft YaHei" pitchFamily="34" charset="-120"/>
+              </a:rPr>
+              <a:t>从预设或自定义宽高比中选择；用水平、垂直取景调整画面位置。</a:t>
+            </a:r>
+            <a:endParaRPr lang="en-US" sz="1600" dirty="0"/>
+          </a:p>
+        </p:txBody>
+      </p:sp>
+      <p:sp>
+        <p:nvSpPr>
+          <p:cNvPr id="23" name="Text 19"/>
+          <p:cNvSpPr/>
+          <p:nvPr/>
+        </p:nvSpPr>
+        <p:spPr>
+          <a:xfrm>
+            <a:off x="6294120" y="3619381"/>
+            <a:ext cx="5303520" cy="314920"/>
+          </a:xfrm>
+          <a:prstGeom prst="rect">
+            <a:avLst/>
+          </a:prstGeom>
+          <a:noFill/>
+          <a:ln/>
+        </p:spPr>
+        <p:txBody>
+          <a:bodyPr wrap="square" lIns="0" tIns="0" rIns="0" bIns="0" rtlCol="0" anchor="ctr"/>
+          <a:lstStyle/>
+          <a:p>
+            <a:pPr algn="just" indent="0" marL="0">
+              <a:lnSpc>
+                <a:spcPts val="2480"/>
+              </a:lnSpc>
+              <a:buNone/>
+            </a:pPr>
+            <a:r>
+              <a:rPr lang="en-US" sz="1600" dirty="0">
+                <a:solidFill>
+                  <a:srgbClr val="18383F"/>
+                </a:solidFill>
+                <a:latin typeface="Microsoft YaHei" pitchFamily="34" charset="0"/>
+                <a:ea typeface="Microsoft YaHei" pitchFamily="34" charset="-122"/>
+                <a:cs typeface="Microsoft YaHei" pitchFamily="34" charset="-120"/>
+              </a:rPr>
+              <a:t>等比放大突出重点；图注可选标题或标题加说明。</a:t>
+            </a:r>
+            <a:endParaRPr lang="en-US" sz="1600" dirty="0"/>
+          </a:p>
+        </p:txBody>
+      </p:sp>
+      <p:sp>
+        <p:nvSpPr>
+          <p:cNvPr id="24" name="Text 20"/>
+          <p:cNvSpPr/>
+          <p:nvPr/>
+        </p:nvSpPr>
+        <p:spPr>
+          <a:xfrm>
+            <a:off x="6294120" y="4010501"/>
+            <a:ext cx="5303520" cy="314920"/>
+          </a:xfrm>
+          <a:prstGeom prst="rect">
+            <a:avLst/>
+          </a:prstGeom>
+          <a:noFill/>
+          <a:ln/>
+        </p:spPr>
+        <p:txBody>
+          <a:bodyPr wrap="square" lIns="0" tIns="0" rIns="0" bIns="0" rtlCol="0" anchor="ctr"/>
+          <a:lstStyle/>
+          <a:p>
+            <a:pPr algn="just" indent="0" marL="0">
+              <a:lnSpc>
+                <a:spcPts val="2480"/>
+              </a:lnSpc>
+              <a:buNone/>
+            </a:pPr>
+            <a:r>
+              <a:rPr lang="en-US" sz="1600" dirty="0">
+                <a:solidFill>
+                  <a:srgbClr val="18383F"/>
+                </a:solidFill>
+                <a:latin typeface="Microsoft YaHei" pitchFamily="34" charset="0"/>
+                <a:ea typeface="Microsoft YaHei" pitchFamily="34" charset="-122"/>
+                <a:cs typeface="Microsoft YaHei" pitchFamily="34" charset="-120"/>
+              </a:rPr>
+              <a:t>确认图注与画面的间隙；无需图注时关闭图标题。</a:t>
+            </a:r>
+            <a:endParaRPr lang="en-US" sz="1600" dirty="0"/>
+          </a:p>
+        </p:txBody>
+      </p:sp>
+      <p:sp>
+        <p:nvSpPr>
+          <p:cNvPr id="25" name="Text 21"/>
+          <p:cNvSpPr/>
+          <p:nvPr/>
+        </p:nvSpPr>
+        <p:spPr>
+          <a:xfrm>
+            <a:off x="6294120" y="4447342"/>
+            <a:ext cx="5303520" cy="314920"/>
           </a:xfrm>
           <a:prstGeom prst="rect">
             <a:avLst/>
@@ -8677,12 +8797,12 @@
           <a:p>
             <a:pPr algn="l" indent="0" marL="0">
               <a:lnSpc>
-                <a:spcPts val="2340"/>
-              </a:lnSpc>
-              <a:buNone/>
-            </a:pPr>
-            <a:r>
-              <a:rPr lang="en-US" sz="1800" b="1" dirty="0">
+                <a:spcPts val="2480"/>
+              </a:lnSpc>
+              <a:buNone/>
+            </a:pPr>
+            <a:r>
+              <a:rPr lang="en-US" sz="1600" b="1" dirty="0">
                 <a:solidFill>
                   <a:srgbClr val="18383F"/>
                 </a:solidFill>
@@ -8690,68 +8810,41 @@
                 <a:ea typeface="Microsoft YaHei" pitchFamily="34" charset="-122"/>
                 <a:cs typeface="Microsoft YaHei" pitchFamily="34" charset="-120"/>
               </a:rPr>
-              <a:t>操作路径</a:t>
-            </a:r>
-            <a:endParaRPr lang="en-US" sz="1800" dirty="0"/>
-          </a:p>
-        </p:txBody>
-      </p:sp>
-      <p:sp>
-        <p:nvSpPr>
-          <p:cNvPr id="24" name="Shape 18"/>
-          <p:cNvSpPr/>
-          <p:nvPr/>
-        </p:nvSpPr>
-        <p:spPr>
-          <a:xfrm>
-            <a:off x="6294120" y="2430780"/>
-            <a:ext cx="5303520" cy="7620"/>
-          </a:xfrm>
-          <a:prstGeom prst="rect">
-            <a:avLst/>
-          </a:prstGeom>
-          <a:solidFill>
-            <a:srgbClr val="0F6674"/>
-          </a:solidFill>
-          <a:ln w="12700">
-            <a:solidFill>
-              <a:srgbClr val="0F6674">
-                <a:alpha val="0"/>
-              </a:srgbClr>
-            </a:solidFill>
-            <a:prstDash val="solid"/>
-          </a:ln>
-        </p:spPr>
-      </p:sp>
-      <p:sp>
-        <p:nvSpPr>
-          <p:cNvPr id="25" name="Text 19"/>
-          <p:cNvSpPr/>
-          <p:nvPr/>
-        </p:nvSpPr>
-        <p:spPr>
-          <a:xfrm>
-            <a:off x="6294120" y="2537460"/>
-            <a:ext cx="5303520" cy="314920"/>
-          </a:xfrm>
-          <a:prstGeom prst="rect">
-            <a:avLst/>
-          </a:prstGeom>
-          <a:noFill/>
-          <a:ln/>
-        </p:spPr>
-        <p:txBody>
-          <a:bodyPr wrap="square" lIns="0" tIns="0" rIns="0" bIns="0" rtlCol="0" anchor="ctr"/>
-          <a:lstStyle/>
-          <a:p>
-            <a:pPr algn="just" indent="0" marL="0">
-              <a:lnSpc>
-                <a:spcPts val="2480"/>
-              </a:lnSpc>
-              <a:buNone/>
-            </a:pPr>
-            <a:r>
-              <a:rPr lang="en-US" sz="1600" dirty="0">
+              <a:t>保持原始比例，避免单向拉伸</a:t>
+            </a:r>
+            <a:endParaRPr lang="en-US" sz="1600" dirty="0"/>
+          </a:p>
+        </p:txBody>
+      </p:sp>
+      <p:sp>
+        <p:nvSpPr>
+          <p:cNvPr id="26" name="Text 22"/>
+          <p:cNvSpPr/>
+          <p:nvPr/>
+        </p:nvSpPr>
+        <p:spPr>
+          <a:xfrm>
+            <a:off x="6294120" y="4884182"/>
+            <a:ext cx="5303520" cy="248841"/>
+          </a:xfrm>
+          <a:prstGeom prst="rect">
+            <a:avLst/>
+          </a:prstGeom>
+          <a:noFill/>
+          <a:ln/>
+        </p:spPr>
+        <p:txBody>
+          <a:bodyPr wrap="square" lIns="0" tIns="0" rIns="0" bIns="0" rtlCol="0" anchor="ctr"/>
+          <a:lstStyle/>
+          <a:p>
+            <a:pPr algn="l" indent="0" marL="0">
+              <a:lnSpc>
+                <a:spcPts val="1960"/>
+              </a:lnSpc>
+              <a:buNone/>
+            </a:pPr>
+            <a:r>
+              <a:rPr lang="en-US" sz="1400" dirty="0">
                 <a:solidFill>
                   <a:srgbClr val="18383F"/>
                 </a:solidFill>
@@ -8759,148 +8852,22 @@
                 <a:ea typeface="Microsoft YaHei" pitchFamily="34" charset="-122"/>
                 <a:cs typeface="Microsoft YaHei" pitchFamily="34" charset="-120"/>
               </a:rPr>
-              <a:t>双击占位区域打开弹窗；选择本地图片或视频。</a:t>
-            </a:r>
-            <a:endParaRPr lang="en-US" sz="1600" dirty="0"/>
-          </a:p>
-        </p:txBody>
-      </p:sp>
-      <p:sp>
-        <p:nvSpPr>
-          <p:cNvPr id="26" name="Text 20"/>
-          <p:cNvSpPr/>
-          <p:nvPr/>
-        </p:nvSpPr>
-        <p:spPr>
-          <a:xfrm>
-            <a:off x="6294120" y="2928580"/>
-            <a:ext cx="5303520" cy="629841"/>
-          </a:xfrm>
-          <a:prstGeom prst="rect">
-            <a:avLst/>
-          </a:prstGeom>
-          <a:noFill/>
-          <a:ln/>
-        </p:spPr>
-        <p:txBody>
-          <a:bodyPr wrap="square" lIns="0" tIns="0" rIns="0" bIns="0" rtlCol="0" anchor="ctr"/>
-          <a:lstStyle/>
-          <a:p>
-            <a:pPr algn="just" indent="0" marL="0">
-              <a:lnSpc>
-                <a:spcPts val="2480"/>
-              </a:lnSpc>
-              <a:buNone/>
-            </a:pPr>
-            <a:r>
-              <a:rPr lang="en-US" sz="1600" dirty="0">
-                <a:solidFill>
-                  <a:srgbClr val="18383F"/>
-                </a:solidFill>
-                <a:latin typeface="Microsoft YaHei" pitchFamily="34" charset="0"/>
-                <a:ea typeface="Microsoft YaHei" pitchFamily="34" charset="-122"/>
-                <a:cs typeface="Microsoft YaHei" pitchFamily="34" charset="-120"/>
-              </a:rPr>
-              <a:t>从预设或自定义宽高比中选择；用水平、垂直取景调整画面位置。</a:t>
-            </a:r>
-            <a:endParaRPr lang="en-US" sz="1600" dirty="0"/>
-          </a:p>
-        </p:txBody>
-      </p:sp>
-      <p:sp>
-        <p:nvSpPr>
-          <p:cNvPr id="27" name="Text 21"/>
-          <p:cNvSpPr/>
-          <p:nvPr/>
-        </p:nvSpPr>
-        <p:spPr>
-          <a:xfrm>
-            <a:off x="6294120" y="3634621"/>
-            <a:ext cx="5303520" cy="314920"/>
-          </a:xfrm>
-          <a:prstGeom prst="rect">
-            <a:avLst/>
-          </a:prstGeom>
-          <a:noFill/>
-          <a:ln/>
-        </p:spPr>
-        <p:txBody>
-          <a:bodyPr wrap="square" lIns="0" tIns="0" rIns="0" bIns="0" rtlCol="0" anchor="ctr"/>
-          <a:lstStyle/>
-          <a:p>
-            <a:pPr algn="just" indent="0" marL="0">
-              <a:lnSpc>
-                <a:spcPts val="2480"/>
-              </a:lnSpc>
-              <a:buNone/>
-            </a:pPr>
-            <a:r>
-              <a:rPr lang="en-US" sz="1600" dirty="0">
-                <a:solidFill>
-                  <a:srgbClr val="18383F"/>
-                </a:solidFill>
-                <a:latin typeface="Microsoft YaHei" pitchFamily="34" charset="0"/>
-                <a:ea typeface="Microsoft YaHei" pitchFamily="34" charset="-122"/>
-                <a:cs typeface="Microsoft YaHei" pitchFamily="34" charset="-120"/>
-              </a:rPr>
-              <a:t>等比放大突出重点；图注可选标题或标题加说明。</a:t>
-            </a:r>
-            <a:endParaRPr lang="en-US" sz="1600" dirty="0"/>
-          </a:p>
-        </p:txBody>
-      </p:sp>
-      <p:sp>
-        <p:nvSpPr>
-          <p:cNvPr id="28" name="Text 22"/>
-          <p:cNvSpPr/>
-          <p:nvPr/>
-        </p:nvSpPr>
-        <p:spPr>
-          <a:xfrm>
-            <a:off x="6294120" y="4025741"/>
-            <a:ext cx="5303520" cy="314920"/>
-          </a:xfrm>
-          <a:prstGeom prst="rect">
-            <a:avLst/>
-          </a:prstGeom>
-          <a:noFill/>
-          <a:ln/>
-        </p:spPr>
-        <p:txBody>
-          <a:bodyPr wrap="square" lIns="0" tIns="0" rIns="0" bIns="0" rtlCol="0" anchor="ctr"/>
-          <a:lstStyle/>
-          <a:p>
-            <a:pPr algn="just" indent="0" marL="0">
-              <a:lnSpc>
-                <a:spcPts val="2480"/>
-              </a:lnSpc>
-              <a:buNone/>
-            </a:pPr>
-            <a:r>
-              <a:rPr lang="en-US" sz="1600" dirty="0">
-                <a:solidFill>
-                  <a:srgbClr val="18383F"/>
-                </a:solidFill>
-                <a:latin typeface="Microsoft YaHei" pitchFamily="34" charset="0"/>
-                <a:ea typeface="Microsoft YaHei" pitchFamily="34" charset="-122"/>
-                <a:cs typeface="Microsoft YaHei" pitchFamily="34" charset="-120"/>
-              </a:rPr>
-              <a:t>确认图注与画面的间隙；无需图注时关闭图标题。</a:t>
-            </a:r>
-            <a:endParaRPr lang="en-US" sz="1600" dirty="0"/>
-          </a:p>
-        </p:txBody>
-      </p:sp>
-      <p:sp>
-        <p:nvSpPr>
-          <p:cNvPr id="29" name="Text 23"/>
-          <p:cNvSpPr/>
-          <p:nvPr/>
-        </p:nvSpPr>
-        <p:spPr>
-          <a:xfrm>
-            <a:off x="6294120" y="4439722"/>
-            <a:ext cx="5303520" cy="314920"/>
+              <a:t>PDF 显示视频静态帧；PPTX 可内嵌视频。</a:t>
+            </a:r>
+            <a:endParaRPr lang="en-US" sz="1400" dirty="0"/>
+          </a:p>
+        </p:txBody>
+      </p:sp>
+      <p:sp>
+        <p:nvSpPr>
+          <p:cNvPr id="27" name="Text 23"/>
+          <p:cNvSpPr/>
+          <p:nvPr/>
+        </p:nvSpPr>
+        <p:spPr>
+          <a:xfrm>
+            <a:off x="6278880" y="5376863"/>
+            <a:ext cx="5334000" cy="566261"/>
           </a:xfrm>
           <a:prstGeom prst="rect">
             <a:avLst/>
@@ -8914,62 +8881,20 @@
           <a:p>
             <a:pPr algn="l" indent="0" marL="0">
               <a:lnSpc>
-                <a:spcPts val="2480"/>
-              </a:lnSpc>
-              <a:buNone/>
-            </a:pPr>
-            <a:r>
-              <a:rPr lang="en-US" sz="1600" b="1" dirty="0">
-                <a:solidFill>
-                  <a:srgbClr val="18383F"/>
-                </a:solidFill>
-                <a:latin typeface="Microsoft YaHei" pitchFamily="34" charset="0"/>
-                <a:ea typeface="Microsoft YaHei" pitchFamily="34" charset="-122"/>
-                <a:cs typeface="Microsoft YaHei" pitchFamily="34" charset="-120"/>
-              </a:rPr>
-              <a:t>保持原始比例，避免单向拉伸</a:t>
-            </a:r>
-            <a:endParaRPr lang="en-US" sz="1600" dirty="0"/>
-          </a:p>
-        </p:txBody>
-      </p:sp>
-      <p:sp>
-        <p:nvSpPr>
-          <p:cNvPr id="30" name="Text 24"/>
-          <p:cNvSpPr/>
-          <p:nvPr/>
-        </p:nvSpPr>
-        <p:spPr>
-          <a:xfrm>
-            <a:off x="6294120" y="4853702"/>
-            <a:ext cx="5303520" cy="248841"/>
-          </a:xfrm>
-          <a:prstGeom prst="rect">
-            <a:avLst/>
-          </a:prstGeom>
-          <a:noFill/>
-          <a:ln/>
-        </p:spPr>
-        <p:txBody>
-          <a:bodyPr wrap="square" lIns="0" tIns="0" rIns="0" bIns="0" rtlCol="0" anchor="ctr"/>
-          <a:lstStyle/>
-          <a:p>
-            <a:pPr algn="l" indent="0" marL="0">
-              <a:lnSpc>
-                <a:spcPts val="1960"/>
+                <a:spcPts val="2170"/>
               </a:lnSpc>
               <a:buNone/>
             </a:pPr>
             <a:r>
               <a:rPr lang="en-US" sz="1400" dirty="0">
                 <a:solidFill>
-                  <a:srgbClr val="18383F"/>
-                </a:solidFill>
-                <a:latin typeface="Microsoft YaHei" pitchFamily="34" charset="0"/>
-                <a:ea typeface="Microsoft YaHei" pitchFamily="34" charset="-122"/>
-                <a:cs typeface="Microsoft YaHei" pitchFamily="34" charset="-120"/>
-              </a:rPr>
-              <a:t>PDF 显示视频静态帧；PPTX 可内嵌视频。</a:t>
+                  <a:srgbClr val="0F6674"/>
+                </a:solidFill>
+                <a:latin typeface="Microsoft YaHei" pitchFamily="34" charset="0"/>
+                <a:ea typeface="Microsoft YaHei" pitchFamily="34" charset="-122"/>
+                <a:cs typeface="Microsoft YaHei" pitchFamily="34" charset="-120"/>
+              </a:rPr>
+              <a:t>取景检查：保留图中关键标注与坐标；说明裁剪范围，确保不会改变原始证据的含义。</a:t>
             </a:r>
             <a:endParaRPr lang="en-US" sz="1400" dirty="0"/>
           </a:p>
@@ -8977,49 +8902,7 @@
       </p:sp>
       <p:sp>
         <p:nvSpPr>
-          <p:cNvPr id="31" name="Text 25"/>
-          <p:cNvSpPr/>
-          <p:nvPr/>
-        </p:nvSpPr>
-        <p:spPr>
-          <a:xfrm>
-            <a:off x="6431280" y="5362099"/>
-            <a:ext cx="5029200" cy="566261"/>
-          </a:xfrm>
-          <a:prstGeom prst="rect">
-            <a:avLst/>
-          </a:prstGeom>
-          <a:noFill/>
-          <a:ln/>
-        </p:spPr>
-        <p:txBody>
-          <a:bodyPr wrap="square" lIns="0" tIns="0" rIns="0" bIns="0" rtlCol="0" anchor="ctr"/>
-          <a:lstStyle/>
-          <a:p>
-            <a:pPr algn="l" indent="0" marL="0">
-              <a:lnSpc>
-                <a:spcPts val="2170"/>
-              </a:lnSpc>
-              <a:buNone/>
-            </a:pPr>
-            <a:r>
-              <a:rPr lang="en-US" sz="1400" dirty="0">
-                <a:solidFill>
-                  <a:srgbClr val="0F6674"/>
-                </a:solidFill>
-                <a:latin typeface="Microsoft YaHei" pitchFamily="34" charset="0"/>
-                <a:ea typeface="Microsoft YaHei" pitchFamily="34" charset="-122"/>
-                <a:cs typeface="Microsoft YaHei" pitchFamily="34" charset="-120"/>
-              </a:rPr>
-              <a:t>取景检查：保留图中关键标注与坐标；说明裁剪范围，确保不会改变原始证据的含义。</a:t>
-            </a:r>
-            <a:endParaRPr lang="en-US" sz="1400" dirty="0"/>
-          </a:p>
-        </p:txBody>
-      </p:sp>
-      <p:sp>
-        <p:nvSpPr>
-          <p:cNvPr id="32" name="Text 26"/>
+          <p:cNvPr id="28" name="Text 24"/>
           <p:cNvSpPr/>
           <p:nvPr/>
         </p:nvSpPr>
@@ -9061,7 +8944,7 @@
       </p:sp>
       <p:sp>
         <p:nvSpPr>
-          <p:cNvPr id="33" name="Text 27"/>
+          <p:cNvPr id="29" name="Text 25"/>
           <p:cNvSpPr/>
           <p:nvPr/>
         </p:nvSpPr>
@@ -9103,7 +8986,7 @@
       </p:sp>
       <p:sp>
         <p:nvSpPr>
-          <p:cNvPr id="34" name="Text 28"/>
+          <p:cNvPr id="30" name="Text 26"/>
           <p:cNvSpPr/>
           <p:nvPr/>
         </p:nvSpPr>
@@ -9145,7 +9028,7 @@
       </p:sp>
       <p:sp>
         <p:nvSpPr>
-          <p:cNvPr id="35" name="Shape 29"/>
+          <p:cNvPr id="31" name="Shape 27"/>
           <p:cNvSpPr/>
           <p:nvPr/>
         </p:nvSpPr>
@@ -46251,9 +46134,213 @@
           <a:chExt cx="0" cy="0"/>
         </a:xfrm>
       </p:grpSpPr>
+      <p:sp>
+        <p:nvSpPr>
+          <p:cNvPr id="3" name="Shape 0"/>
+          <p:cNvSpPr/>
+          <p:nvPr/>
+        </p:nvSpPr>
+        <p:spPr>
+          <a:xfrm>
+            <a:off x="0" y="0"/>
+            <a:ext cx="9753600" cy="53340"/>
+          </a:xfrm>
+          <a:prstGeom prst="rect">
+            <a:avLst/>
+          </a:prstGeom>
+          <a:solidFill>
+            <a:srgbClr val="0F6674"/>
+          </a:solidFill>
+          <a:ln w="12700">
+            <a:solidFill>
+              <a:srgbClr val="0F6674">
+                <a:alpha val="0"/>
+              </a:srgbClr>
+            </a:solidFill>
+            <a:prstDash val="solid"/>
+          </a:ln>
+        </p:spPr>
+      </p:sp>
+      <p:sp>
+        <p:nvSpPr>
+          <p:cNvPr id="4" name="Shape 1"/>
+          <p:cNvSpPr/>
+          <p:nvPr/>
+        </p:nvSpPr>
+        <p:spPr>
+          <a:xfrm>
+            <a:off x="9753600" y="0"/>
+            <a:ext cx="2438400" cy="53340"/>
+          </a:xfrm>
+          <a:prstGeom prst="rect">
+            <a:avLst/>
+          </a:prstGeom>
+          <a:solidFill>
+            <a:srgbClr val="0F6674"/>
+          </a:solidFill>
+          <a:ln w="12700">
+            <a:solidFill>
+              <a:srgbClr val="0F6674">
+                <a:alpha val="0"/>
+              </a:srgbClr>
+            </a:solidFill>
+            <a:prstDash val="solid"/>
+          </a:ln>
+        </p:spPr>
+      </p:sp>
+      <p:sp>
+        <p:nvSpPr>
+          <p:cNvPr id="5" name="Shape 2"/>
+          <p:cNvSpPr/>
+          <p:nvPr/>
+        </p:nvSpPr>
+        <p:spPr>
+          <a:xfrm>
+            <a:off x="441960" y="259080"/>
+            <a:ext cx="289560" cy="228600"/>
+          </a:xfrm>
+          <a:prstGeom prst="rect">
+            <a:avLst/>
+          </a:prstGeom>
+          <a:solidFill>
+            <a:srgbClr val="EDF6F5"/>
+          </a:solidFill>
+          <a:ln w="12700">
+            <a:solidFill>
+              <a:srgbClr val="EDF6F5">
+                <a:alpha val="0"/>
+              </a:srgbClr>
+            </a:solidFill>
+            <a:prstDash val="solid"/>
+          </a:ln>
+        </p:spPr>
+      </p:sp>
+      <p:sp>
+        <p:nvSpPr>
+          <p:cNvPr id="6" name="Text 3"/>
+          <p:cNvSpPr/>
+          <p:nvPr/>
+        </p:nvSpPr>
+        <p:spPr>
+          <a:xfrm>
+            <a:off x="480060" y="259080"/>
+            <a:ext cx="213360" cy="228600"/>
+          </a:xfrm>
+          <a:prstGeom prst="rect">
+            <a:avLst/>
+          </a:prstGeom>
+          <a:noFill/>
+          <a:ln/>
+        </p:spPr>
+        <p:txBody>
+          <a:bodyPr wrap="none" lIns="0" tIns="0" rIns="0" bIns="0" rtlCol="0" anchor="ctr"/>
+          <a:lstStyle/>
+          <a:p>
+            <a:pPr algn="l" indent="0" marL="0">
+              <a:buNone/>
+            </a:pPr>
+            <a:r>
+              <a:rPr lang="en-US" sz="1200" b="1" dirty="0">
+                <a:solidFill>
+                  <a:srgbClr val="0F6674"/>
+                </a:solidFill>
+                <a:latin typeface="Arial" pitchFamily="34" charset="0"/>
+                <a:ea typeface="Arial" pitchFamily="34" charset="-122"/>
+                <a:cs typeface="Arial" pitchFamily="34" charset="-120"/>
+              </a:rPr>
+              <a:t>01</a:t>
+            </a:r>
+            <a:endParaRPr lang="en-US" sz="1200" dirty="0"/>
+          </a:p>
+        </p:txBody>
+      </p:sp>
+      <p:sp>
+        <p:nvSpPr>
+          <p:cNvPr id="7" name="Text 4"/>
+          <p:cNvSpPr/>
+          <p:nvPr/>
+        </p:nvSpPr>
+        <p:spPr>
+          <a:xfrm>
+            <a:off x="838200" y="235625"/>
+            <a:ext cx="9768840" cy="275511"/>
+          </a:xfrm>
+          <a:prstGeom prst="rect">
+            <a:avLst/>
+          </a:prstGeom>
+          <a:noFill/>
+          <a:ln/>
+        </p:spPr>
+        <p:txBody>
+          <a:bodyPr wrap="none" lIns="0" tIns="0" rIns="0" bIns="0" rtlCol="0" anchor="ctr"/>
+          <a:lstStyle/>
+          <a:p>
+            <a:pPr algn="l" indent="0" marL="0">
+              <a:lnSpc>
+                <a:spcPts val="2170"/>
+              </a:lnSpc>
+              <a:buNone/>
+            </a:pPr>
+            <a:r>
+              <a:rPr lang="en-US" sz="1400" b="1" dirty="0">
+                <a:solidFill>
+                  <a:srgbClr val="0F6674"/>
+                </a:solidFill>
+                <a:latin typeface="Microsoft YaHei" pitchFamily="34" charset="0"/>
+                <a:ea typeface="Microsoft YaHei" pitchFamily="34" charset="-122"/>
+                <a:cs typeface="Microsoft YaHei" pitchFamily="34" charset="-120"/>
+              </a:rPr>
+              <a:t>制作起步</a:t>
+            </a:r>
+            <a:endParaRPr lang="en-US" sz="1400" dirty="0"/>
+          </a:p>
+        </p:txBody>
+      </p:sp>
+      <p:sp>
+        <p:nvSpPr>
+          <p:cNvPr id="8" name="Text 5"/>
+          <p:cNvSpPr/>
+          <p:nvPr/>
+        </p:nvSpPr>
+        <p:spPr>
+          <a:xfrm>
+            <a:off x="441960" y="609600"/>
+            <a:ext cx="10165080" cy="433864"/>
+          </a:xfrm>
+          <a:prstGeom prst="rect">
+            <a:avLst/>
+          </a:prstGeom>
+          <a:noFill/>
+          <a:ln/>
+        </p:spPr>
+        <p:txBody>
+          <a:bodyPr wrap="none" lIns="0" tIns="0" rIns="0" bIns="0" rtlCol="0" anchor="ctr"/>
+          <a:lstStyle/>
+          <a:p>
+            <a:pPr algn="l" indent="0" marL="0">
+              <a:lnSpc>
+                <a:spcPts val="3416"/>
+              </a:lnSpc>
+              <a:buNone/>
+            </a:pPr>
+            <a:r>
+              <a:rPr lang="en-US" sz="2800" b="1" dirty="0">
+                <a:solidFill>
+                  <a:srgbClr val="0F6674"/>
+                </a:solidFill>
+                <a:latin typeface="Microsoft YaHei" pitchFamily="34" charset="0"/>
+                <a:ea typeface="Microsoft YaHei" pitchFamily="34" charset="-122"/>
+                <a:cs typeface="Microsoft YaHei" pitchFamily="34" charset="-120"/>
+              </a:rPr>
+              <a:t>学校概况与办学沿革</a:t>
+            </a:r>
+            <a:endParaRPr lang="en-US" sz="2800" dirty="0"/>
+          </a:p>
+        </p:txBody>
+      </p:sp>
       <p:pic>
         <p:nvPicPr>
-          <p:cNvPr id="3" name="Image 0" descr="preencoded.png">    </p:cNvPr>
+          <p:cNvPr id="9" name="Image 0" descr="preencoded.png">    </p:cNvPr>
           <p:cNvPicPr>
             <a:picLocks noChangeAspect="1"/>
           </p:cNvPicPr>
@@ -46267,8 +46354,8 @@
         </p:blipFill>
         <p:spPr>
           <a:xfrm>
-            <a:off x="0" y="0"/>
-            <a:ext cx="12192000" cy="6858000"/>
+            <a:off x="10835640" y="201930"/>
+            <a:ext cx="914400" cy="914400"/>
           </a:xfrm>
           <a:prstGeom prst="rect">
             <a:avLst/>
@@ -46277,130 +46364,76 @@
       </p:pic>
       <p:sp>
         <p:nvSpPr>
-          <p:cNvPr id="4" name="Text 0"/>
-          <p:cNvSpPr/>
-          <p:nvPr/>
-        </p:nvSpPr>
-        <p:spPr>
-          <a:xfrm>
-            <a:off x="480060" y="259080"/>
-            <a:ext cx="213360" cy="228600"/>
-          </a:xfrm>
-          <a:prstGeom prst="rect">
-            <a:avLst/>
-          </a:prstGeom>
-          <a:noFill/>
-          <a:ln/>
-        </p:spPr>
-        <p:txBody>
-          <a:bodyPr wrap="none" lIns="0" tIns="0" rIns="0" bIns="0" rtlCol="0" anchor="ctr"/>
+          <p:cNvPr id="10" name="Shape 6"/>
+          <p:cNvSpPr/>
+          <p:nvPr/>
+        </p:nvSpPr>
+        <p:spPr>
+          <a:xfrm>
+            <a:off x="441960" y="1264920"/>
+            <a:ext cx="11308080" cy="15240"/>
+          </a:xfrm>
+          <a:prstGeom prst="rect">
+            <a:avLst/>
+          </a:prstGeom>
+          <a:solidFill>
+            <a:srgbClr val="0F6674"/>
+          </a:solidFill>
+          <a:ln w="12700">
+            <a:solidFill>
+              <a:srgbClr val="0F6674">
+                <a:alpha val="0"/>
+              </a:srgbClr>
+            </a:solidFill>
+            <a:prstDash val="solid"/>
+          </a:ln>
+        </p:spPr>
+      </p:sp>
+      <p:sp>
+        <p:nvSpPr>
+          <p:cNvPr id="11" name="Text 7"/>
+          <p:cNvSpPr/>
+          <p:nvPr/>
+        </p:nvSpPr>
+        <p:spPr>
+          <a:xfrm>
+            <a:off x="441960" y="1463040"/>
+            <a:ext cx="11308080" cy="629841"/>
+          </a:xfrm>
+          <a:prstGeom prst="rect">
+            <a:avLst/>
+          </a:prstGeom>
+          <a:noFill/>
+          <a:ln/>
+        </p:spPr>
+        <p:txBody>
+          <a:bodyPr wrap="square" lIns="0" tIns="0" rIns="0" bIns="0" rtlCol="0" anchor="ctr"/>
           <a:lstStyle/>
           <a:p>
             <a:pPr algn="l" indent="0" marL="0">
-              <a:buNone/>
-            </a:pPr>
-            <a:r>
-              <a:rPr lang="en-US" sz="1200" b="1" dirty="0">
-                <a:solidFill>
-                  <a:srgbClr val="0F6674"/>
-                </a:solidFill>
-                <a:latin typeface="Arial" pitchFamily="34" charset="0"/>
-                <a:ea typeface="Arial" pitchFamily="34" charset="-122"/>
-                <a:cs typeface="Arial" pitchFamily="34" charset="-120"/>
-              </a:rPr>
-              <a:t>01</a:t>
-            </a:r>
-            <a:endParaRPr lang="en-US" sz="1200" dirty="0"/>
-          </a:p>
-        </p:txBody>
-      </p:sp>
-      <p:sp>
-        <p:nvSpPr>
-          <p:cNvPr id="5" name="Text 1"/>
-          <p:cNvSpPr/>
-          <p:nvPr/>
-        </p:nvSpPr>
-        <p:spPr>
-          <a:xfrm>
-            <a:off x="838200" y="235625"/>
-            <a:ext cx="9768840" cy="275511"/>
-          </a:xfrm>
-          <a:prstGeom prst="rect">
-            <a:avLst/>
-          </a:prstGeom>
-          <a:noFill/>
-          <a:ln/>
-        </p:spPr>
-        <p:txBody>
-          <a:bodyPr wrap="none" lIns="0" tIns="0" rIns="0" bIns="0" rtlCol="0" anchor="ctr"/>
-          <a:lstStyle/>
-          <a:p>
-            <a:pPr algn="l" indent="0" marL="0">
-              <a:lnSpc>
-                <a:spcPts val="2170"/>
-              </a:lnSpc>
-              <a:buNone/>
-            </a:pPr>
-            <a:r>
-              <a:rPr lang="en-US" sz="1400" b="1" dirty="0">
-                <a:solidFill>
-                  <a:srgbClr val="40647D"/>
-                </a:solidFill>
-                <a:latin typeface="Microsoft YaHei" pitchFamily="34" charset="0"/>
-                <a:ea typeface="Microsoft YaHei" pitchFamily="34" charset="-122"/>
-                <a:cs typeface="Microsoft YaHei" pitchFamily="34" charset="-120"/>
-              </a:rPr>
-              <a:t>制作起步</a:t>
-            </a:r>
-            <a:endParaRPr lang="en-US" sz="1400" dirty="0"/>
-          </a:p>
-        </p:txBody>
-      </p:sp>
-      <p:sp>
-        <p:nvSpPr>
-          <p:cNvPr id="6" name="Text 2"/>
-          <p:cNvSpPr/>
-          <p:nvPr/>
-        </p:nvSpPr>
-        <p:spPr>
-          <a:xfrm>
-            <a:off x="441960" y="609600"/>
-            <a:ext cx="10165080" cy="433864"/>
-          </a:xfrm>
-          <a:prstGeom prst="rect">
-            <a:avLst/>
-          </a:prstGeom>
-          <a:noFill/>
-          <a:ln/>
-        </p:spPr>
-        <p:txBody>
-          <a:bodyPr wrap="none" lIns="0" tIns="0" rIns="0" bIns="0" rtlCol="0" anchor="ctr"/>
-          <a:lstStyle/>
-          <a:p>
-            <a:pPr algn="l" indent="0" marL="0">
-              <a:lnSpc>
-                <a:spcPts val="3416"/>
-              </a:lnSpc>
-              <a:buNone/>
-            </a:pPr>
-            <a:r>
-              <a:rPr lang="en-US" sz="2800" b="1" dirty="0">
-                <a:solidFill>
-                  <a:srgbClr val="0F6674"/>
-                </a:solidFill>
-                <a:latin typeface="Microsoft YaHei" pitchFamily="34" charset="0"/>
-                <a:ea typeface="Microsoft YaHei" pitchFamily="34" charset="-122"/>
-                <a:cs typeface="Microsoft YaHei" pitchFamily="34" charset="-120"/>
-              </a:rPr>
-              <a:t>学校概况与办学沿革</a:t>
-            </a:r>
-            <a:endParaRPr lang="en-US" sz="2800" dirty="0"/>
+              <a:lnSpc>
+                <a:spcPts val="2480"/>
+              </a:lnSpc>
+              <a:buNone/>
+            </a:pPr>
+            <a:r>
+              <a:rPr lang="en-US" sz="1600" dirty="0">
+                <a:solidFill>
+                  <a:srgbClr val="18383F"/>
+                </a:solidFill>
+                <a:latin typeface="Microsoft YaHei" pitchFamily="34" charset="0"/>
+                <a:ea typeface="Microsoft YaHei" pitchFamily="34" charset="-122"/>
+                <a:cs typeface="Microsoft YaHei" pitchFamily="34" charset="-120"/>
+              </a:rPr>
+              <a:t>从处州师范学堂到丽水学院，学校坚持“明德笃行”，在师范教育基础上拓展多学科办学，面向地方需求推进应用型人才培养与科研服务。</a:t>
+            </a:r>
+            <a:endParaRPr lang="en-US" sz="1600" dirty="0"/>
           </a:p>
         </p:txBody>
       </p:sp>
       <p:pic>
         <p:nvPicPr>
-          <p:cNvPr id="7" name="Image 1" descr="preencoded.png">    </p:cNvPr>
+          <p:cNvPr id="12" name="Image 1" descr="preencoded.png">    </p:cNvPr>
           <p:cNvPicPr>
             <a:picLocks noChangeAspect="1"/>
           </p:cNvPicPr>
@@ -46414,8 +46447,8 @@
         </p:blipFill>
         <p:spPr>
           <a:xfrm>
-            <a:off x="10835640" y="201930"/>
-            <a:ext cx="914400" cy="914400"/>
+            <a:off x="441960" y="5730240"/>
+            <a:ext cx="11308080" cy="472440"/>
           </a:xfrm>
           <a:prstGeom prst="rect">
             <a:avLst/>
@@ -46424,55 +46457,67 @@
       </p:pic>
       <p:sp>
         <p:nvSpPr>
-          <p:cNvPr id="8" name="Text 3"/>
-          <p:cNvSpPr/>
-          <p:nvPr/>
-        </p:nvSpPr>
-        <p:spPr>
-          <a:xfrm>
-            <a:off x="441960" y="1463040"/>
-            <a:ext cx="11308080" cy="629841"/>
-          </a:xfrm>
-          <a:prstGeom prst="rect">
-            <a:avLst/>
-          </a:prstGeom>
-          <a:noFill/>
-          <a:ln/>
-        </p:spPr>
-        <p:txBody>
-          <a:bodyPr wrap="square" lIns="0" tIns="0" rIns="0" bIns="0" rtlCol="0" anchor="ctr"/>
-          <a:lstStyle/>
-          <a:p>
-            <a:pPr algn="l" indent="0" marL="0">
-              <a:lnSpc>
-                <a:spcPts val="2480"/>
-              </a:lnSpc>
-              <a:buNone/>
-            </a:pPr>
-            <a:r>
-              <a:rPr lang="en-US" sz="1600" dirty="0">
-                <a:solidFill>
-                  <a:srgbClr val="18383F"/>
-                </a:solidFill>
-                <a:latin typeface="Microsoft YaHei" pitchFamily="34" charset="0"/>
-                <a:ea typeface="Microsoft YaHei" pitchFamily="34" charset="-122"/>
-                <a:cs typeface="Microsoft YaHei" pitchFamily="34" charset="-120"/>
-              </a:rPr>
-              <a:t>从处州师范学堂到丽水学院，学校坚持“明德笃行”，在师范教育基础上拓展多学科办学，面向地方需求推进应用型人才培养与科研服务。</a:t>
-            </a:r>
-            <a:endParaRPr lang="en-US" sz="1600" dirty="0"/>
-          </a:p>
-        </p:txBody>
-      </p:sp>
-      <p:sp>
-        <p:nvSpPr>
-          <p:cNvPr id="9" name="Text 4"/>
-          <p:cNvSpPr/>
-          <p:nvPr/>
-        </p:nvSpPr>
-        <p:spPr>
-          <a:xfrm>
-            <a:off x="807720" y="2306241"/>
+          <p:cNvPr id="13" name="Shape 8"/>
+          <p:cNvSpPr/>
+          <p:nvPr/>
+        </p:nvSpPr>
+        <p:spPr>
+          <a:xfrm>
+            <a:off x="685800" y="2331720"/>
+            <a:ext cx="2613660" cy="3276600"/>
+          </a:xfrm>
+          <a:prstGeom prst="rect">
+            <a:avLst/>
+          </a:prstGeom>
+          <a:solidFill>
+            <a:srgbClr val="EDF6F5"/>
+          </a:solidFill>
+          <a:ln w="12700">
+            <a:solidFill>
+              <a:srgbClr val="EDF6F5">
+                <a:alpha val="0"/>
+              </a:srgbClr>
+            </a:solidFill>
+            <a:prstDash val="solid"/>
+          </a:ln>
+        </p:spPr>
+      </p:sp>
+      <p:sp>
+        <p:nvSpPr>
+          <p:cNvPr id="14" name="Shape 9"/>
+          <p:cNvSpPr/>
+          <p:nvPr/>
+        </p:nvSpPr>
+        <p:spPr>
+          <a:xfrm>
+            <a:off x="685800" y="2331720"/>
+            <a:ext cx="2613660" cy="441960"/>
+          </a:xfrm>
+          <a:prstGeom prst="rect">
+            <a:avLst/>
+          </a:prstGeom>
+          <a:solidFill>
+            <a:srgbClr val="0F6674"/>
+          </a:solidFill>
+          <a:ln w="12700">
+            <a:solidFill>
+              <a:srgbClr val="0F6674">
+                <a:alpha val="0"/>
+              </a:srgbClr>
+            </a:solidFill>
+            <a:prstDash val="solid"/>
+          </a:ln>
+        </p:spPr>
+      </p:sp>
+      <p:sp>
+        <p:nvSpPr>
+          <p:cNvPr id="15" name="Text 10"/>
+          <p:cNvSpPr/>
+          <p:nvPr/>
+        </p:nvSpPr>
+        <p:spPr>
+          <a:xfrm>
+            <a:off x="807720" y="2377440"/>
             <a:ext cx="2369820" cy="350520"/>
           </a:xfrm>
           <a:prstGeom prst="rect">
@@ -46508,7 +46553,7 @@
       </p:sp>
       <p:pic>
         <p:nvPicPr>
-          <p:cNvPr id="10" name="Image 2" descr="preencoded.png">    </p:cNvPr>
+          <p:cNvPr id="16" name="Image 2" descr="preencoded.png">    </p:cNvPr>
           <p:cNvPicPr>
             <a:picLocks noChangeAspect="1"/>
           </p:cNvPicPr>
@@ -46522,8 +46567,8 @@
         </p:blipFill>
         <p:spPr>
           <a:xfrm>
-            <a:off x="807720" y="2824401"/>
-            <a:ext cx="2369820" cy="1127760"/>
+            <a:off x="807720" y="2895600"/>
+            <a:ext cx="2369820" cy="1155978"/>
           </a:xfrm>
           <a:prstGeom prst="rect">
             <a:avLst/>
@@ -46532,14 +46577,14 @@
       </p:pic>
       <p:sp>
         <p:nvSpPr>
-          <p:cNvPr id="11" name="Text 5"/>
-          <p:cNvSpPr/>
-          <p:nvPr/>
-        </p:nvSpPr>
-        <p:spPr>
-          <a:xfrm>
-            <a:off x="807720" y="4150281"/>
-            <a:ext cx="2369820" cy="1381839"/>
+          <p:cNvPr id="17" name="Text 11"/>
+          <p:cNvSpPr/>
+          <p:nvPr/>
+        </p:nvSpPr>
+        <p:spPr>
+          <a:xfrm>
+            <a:off x="807720" y="4173498"/>
+            <a:ext cx="2369820" cy="1343382"/>
           </a:xfrm>
           <a:prstGeom prst="rect">
             <a:avLst/>
@@ -46574,14 +46619,14 @@
       </p:sp>
       <p:sp>
         <p:nvSpPr>
-          <p:cNvPr id="12" name="Text 6"/>
-          <p:cNvSpPr/>
-          <p:nvPr/>
-        </p:nvSpPr>
-        <p:spPr>
-          <a:xfrm>
-            <a:off x="3543300" y="2306241"/>
-            <a:ext cx="2369820" cy="350520"/>
+          <p:cNvPr id="18" name="Text 12"/>
+          <p:cNvSpPr/>
+          <p:nvPr/>
+        </p:nvSpPr>
+        <p:spPr>
+          <a:xfrm>
+            <a:off x="838200" y="5823585"/>
+            <a:ext cx="1371600" cy="285750"/>
           </a:xfrm>
           <a:prstGeom prst="rect">
             <a:avLst/>
@@ -46595,28 +46640,28 @@
           <a:p>
             <a:pPr algn="l" indent="0" marL="0">
               <a:lnSpc>
-                <a:spcPts val="2760"/>
-              </a:lnSpc>
-              <a:buNone/>
-            </a:pPr>
-            <a:r>
-              <a:rPr lang="en-US" sz="2400" b="1" dirty="0">
-                <a:solidFill>
-                  <a:srgbClr val="FFFFFF"/>
-                </a:solidFill>
-                <a:latin typeface="Microsoft YaHei" pitchFamily="34" charset="0"/>
-                <a:ea typeface="Microsoft YaHei" pitchFamily="34" charset="-122"/>
-                <a:cs typeface="Microsoft YaHei" pitchFamily="34" charset="-120"/>
-              </a:rPr>
-              <a:t>1946年</a:t>
-            </a:r>
-            <a:endParaRPr lang="en-US" sz="2400" dirty="0"/>
+                <a:spcPts val="2250"/>
+              </a:lnSpc>
+              <a:buNone/>
+            </a:pPr>
+            <a:r>
+              <a:rPr lang="en-US" sz="1800" b="1" dirty="0">
+                <a:solidFill>
+                  <a:srgbClr val="0F6674"/>
+                </a:solidFill>
+                <a:latin typeface="Microsoft YaHei" pitchFamily="34" charset="0"/>
+                <a:ea typeface="Microsoft YaHei" pitchFamily="34" charset="-122"/>
+                <a:cs typeface="Microsoft YaHei" pitchFamily="34" charset="-120"/>
+              </a:rPr>
+              <a:t>师范薪火初传</a:t>
+            </a:r>
+            <a:endParaRPr lang="en-US" sz="1800" dirty="0"/>
           </a:p>
         </p:txBody>
       </p:sp>
       <p:pic>
         <p:nvPicPr>
-          <p:cNvPr id="13" name="Image 3" descr="preencoded.png">    </p:cNvPr>
+          <p:cNvPr id="19" name="Image 3" descr="preencoded.png">    </p:cNvPr>
           <p:cNvPicPr>
             <a:picLocks noChangeAspect="1"/>
           </p:cNvPicPr>
@@ -46630,101 +46675,17 @@
         </p:blipFill>
         <p:spPr>
           <a:xfrm>
-            <a:off x="3543300" y="2824401"/>
-            <a:ext cx="2369820" cy="1127760"/>
+            <a:off x="670560" y="2331720"/>
+            <a:ext cx="30480" cy="3634740"/>
           </a:xfrm>
           <a:prstGeom prst="rect">
             <a:avLst/>
           </a:prstGeom>
         </p:spPr>
       </p:pic>
-      <p:sp>
-        <p:nvSpPr>
-          <p:cNvPr id="14" name="Text 7"/>
-          <p:cNvSpPr/>
-          <p:nvPr/>
-        </p:nvSpPr>
-        <p:spPr>
-          <a:xfrm>
-            <a:off x="3543300" y="4150281"/>
-            <a:ext cx="2369820" cy="1381839"/>
-          </a:xfrm>
-          <a:prstGeom prst="rect">
-            <a:avLst/>
-          </a:prstGeom>
-          <a:noFill/>
-          <a:ln/>
-        </p:spPr>
-        <p:txBody>
-          <a:bodyPr wrap="square" lIns="0" tIns="0" rIns="0" bIns="0" rtlCol="0" anchor="ctr"/>
-          <a:lstStyle/>
-          <a:p>
-            <a:pPr algn="just" indent="0" marL="0">
-              <a:lnSpc>
-                <a:spcPts val="2100"/>
-              </a:lnSpc>
-              <a:buNone/>
-            </a:pPr>
-            <a:r>
-              <a:rPr lang="en-US" sz="1400" dirty="0">
-                <a:solidFill>
-                  <a:srgbClr val="18383F"/>
-                </a:solidFill>
-                <a:latin typeface="Microsoft YaHei" pitchFamily="34" charset="0"/>
-                <a:ea typeface="Microsoft YaHei" pitchFamily="34" charset="-122"/>
-                <a:cs typeface="Microsoft YaHei" pitchFamily="34" charset="-120"/>
-              </a:rPr>
-              <a:t>抗战胜利后，在云和重建浙江省处州师范学校。此后迁回丽水，在办学条件恢复中延续师范教育传统与人才培养。</a:t>
-            </a:r>
-            <a:endParaRPr lang="en-US" sz="1400" dirty="0"/>
-          </a:p>
-        </p:txBody>
-      </p:sp>
-      <p:sp>
-        <p:nvSpPr>
-          <p:cNvPr id="15" name="Text 8"/>
-          <p:cNvSpPr/>
-          <p:nvPr/>
-        </p:nvSpPr>
-        <p:spPr>
-          <a:xfrm>
-            <a:off x="6278880" y="2306241"/>
-            <a:ext cx="2369820" cy="350520"/>
-          </a:xfrm>
-          <a:prstGeom prst="rect">
-            <a:avLst/>
-          </a:prstGeom>
-          <a:noFill/>
-          <a:ln/>
-        </p:spPr>
-        <p:txBody>
-          <a:bodyPr wrap="square" lIns="0" tIns="0" rIns="0" bIns="0" rtlCol="0" anchor="ctr"/>
-          <a:lstStyle/>
-          <a:p>
-            <a:pPr algn="l" indent="0" marL="0">
-              <a:lnSpc>
-                <a:spcPts val="2760"/>
-              </a:lnSpc>
-              <a:buNone/>
-            </a:pPr>
-            <a:r>
-              <a:rPr lang="en-US" sz="2400" b="1" dirty="0">
-                <a:solidFill>
-                  <a:srgbClr val="FFFFFF"/>
-                </a:solidFill>
-                <a:latin typeface="Microsoft YaHei" pitchFamily="34" charset="0"/>
-                <a:ea typeface="Microsoft YaHei" pitchFamily="34" charset="-122"/>
-                <a:cs typeface="Microsoft YaHei" pitchFamily="34" charset="-120"/>
-              </a:rPr>
-              <a:t>2004年</a:t>
-            </a:r>
-            <a:endParaRPr lang="en-US" sz="2400" dirty="0"/>
-          </a:p>
-        </p:txBody>
-      </p:sp>
       <p:pic>
         <p:nvPicPr>
-          <p:cNvPr id="16" name="Image 4" descr="preencoded.png">    </p:cNvPr>
+          <p:cNvPr id="20" name="Image 4" descr="preencoded.png">    </p:cNvPr>
           <p:cNvPicPr>
             <a:picLocks noChangeAspect="1"/>
           </p:cNvPicPr>
@@ -46738,8 +46699,8 @@
         </p:blipFill>
         <p:spPr>
           <a:xfrm>
-            <a:off x="6278880" y="2824401"/>
-            <a:ext cx="2369820" cy="1127760"/>
+            <a:off x="594360" y="5875020"/>
+            <a:ext cx="182880" cy="182880"/>
           </a:xfrm>
           <a:prstGeom prst="rect">
             <a:avLst/>
@@ -46748,55 +46709,67 @@
       </p:pic>
       <p:sp>
         <p:nvSpPr>
-          <p:cNvPr id="17" name="Text 9"/>
-          <p:cNvSpPr/>
-          <p:nvPr/>
-        </p:nvSpPr>
-        <p:spPr>
-          <a:xfrm>
-            <a:off x="6278880" y="4150281"/>
-            <a:ext cx="2369820" cy="1381839"/>
-          </a:xfrm>
-          <a:prstGeom prst="rect">
-            <a:avLst/>
-          </a:prstGeom>
-          <a:noFill/>
-          <a:ln/>
-        </p:spPr>
-        <p:txBody>
-          <a:bodyPr wrap="square" lIns="0" tIns="0" rIns="0" bIns="0" rtlCol="0" anchor="ctr"/>
-          <a:lstStyle/>
-          <a:p>
-            <a:pPr algn="just" indent="0" marL="0">
-              <a:lnSpc>
-                <a:spcPts val="2100"/>
-              </a:lnSpc>
-              <a:buNone/>
-            </a:pPr>
-            <a:r>
-              <a:rPr lang="en-US" sz="1400" dirty="0">
-                <a:solidFill>
-                  <a:srgbClr val="18383F"/>
-                </a:solidFill>
-                <a:latin typeface="Microsoft YaHei" pitchFamily="34" charset="0"/>
-                <a:ea typeface="Microsoft YaHei" pitchFamily="34" charset="-122"/>
-                <a:cs typeface="Microsoft YaHei" pitchFamily="34" charset="-120"/>
-              </a:rPr>
-              <a:t>经教育部批准，学校升格更名为丽水学院。在原有办学基础上拓展本科教育，逐步形成多学科协调发展的格局。</a:t>
-            </a:r>
-            <a:endParaRPr lang="en-US" sz="1400" dirty="0"/>
-          </a:p>
-        </p:txBody>
-      </p:sp>
-      <p:sp>
-        <p:nvSpPr>
-          <p:cNvPr id="18" name="Text 10"/>
-          <p:cNvSpPr/>
-          <p:nvPr/>
-        </p:nvSpPr>
-        <p:spPr>
-          <a:xfrm>
-            <a:off x="9014460" y="2306241"/>
+          <p:cNvPr id="21" name="Shape 13"/>
+          <p:cNvSpPr/>
+          <p:nvPr/>
+        </p:nvSpPr>
+        <p:spPr>
+          <a:xfrm>
+            <a:off x="3421380" y="2331720"/>
+            <a:ext cx="2613660" cy="3276600"/>
+          </a:xfrm>
+          <a:prstGeom prst="rect">
+            <a:avLst/>
+          </a:prstGeom>
+          <a:solidFill>
+            <a:srgbClr val="EDF6F5"/>
+          </a:solidFill>
+          <a:ln w="12700">
+            <a:solidFill>
+              <a:srgbClr val="EDF6F5">
+                <a:alpha val="0"/>
+              </a:srgbClr>
+            </a:solidFill>
+            <a:prstDash val="solid"/>
+          </a:ln>
+        </p:spPr>
+      </p:sp>
+      <p:sp>
+        <p:nvSpPr>
+          <p:cNvPr id="22" name="Shape 14"/>
+          <p:cNvSpPr/>
+          <p:nvPr/>
+        </p:nvSpPr>
+        <p:spPr>
+          <a:xfrm>
+            <a:off x="3421380" y="2331720"/>
+            <a:ext cx="2613660" cy="441960"/>
+          </a:xfrm>
+          <a:prstGeom prst="rect">
+            <a:avLst/>
+          </a:prstGeom>
+          <a:solidFill>
+            <a:srgbClr val="0F6674"/>
+          </a:solidFill>
+          <a:ln w="12700">
+            <a:solidFill>
+              <a:srgbClr val="0F6674">
+                <a:alpha val="0"/>
+              </a:srgbClr>
+            </a:solidFill>
+            <a:prstDash val="solid"/>
+          </a:ln>
+        </p:spPr>
+      </p:sp>
+      <p:sp>
+        <p:nvSpPr>
+          <p:cNvPr id="23" name="Text 15"/>
+          <p:cNvSpPr/>
+          <p:nvPr/>
+        </p:nvSpPr>
+        <p:spPr>
+          <a:xfrm>
+            <a:off x="3543300" y="2377440"/>
             <a:ext cx="2369820" cy="350520"/>
           </a:xfrm>
           <a:prstGeom prst="rect">
@@ -46824,7 +46797,7 @@
                 <a:ea typeface="Microsoft YaHei" pitchFamily="34" charset="-122"/>
                 <a:cs typeface="Microsoft YaHei" pitchFamily="34" charset="-120"/>
               </a:rPr>
-              <a:t>新时代</a:t>
+              <a:t>1946年</a:t>
             </a:r>
             <a:endParaRPr lang="en-US" sz="2400" dirty="0"/>
           </a:p>
@@ -46832,7 +46805,7 @@
       </p:sp>
       <p:pic>
         <p:nvPicPr>
-          <p:cNvPr id="19" name="Image 5" descr="preencoded.png">    </p:cNvPr>
+          <p:cNvPr id="24" name="Image 5" descr="preencoded.png">    </p:cNvPr>
           <p:cNvPicPr>
             <a:picLocks noChangeAspect="1"/>
           </p:cNvPicPr>
@@ -46846,8 +46819,8 @@
         </p:blipFill>
         <p:spPr>
           <a:xfrm>
-            <a:off x="9014460" y="2824401"/>
-            <a:ext cx="2369820" cy="1127760"/>
+            <a:off x="3543300" y="2895600"/>
+            <a:ext cx="2369820" cy="1155978"/>
           </a:xfrm>
           <a:prstGeom prst="rect">
             <a:avLst/>
@@ -46856,14 +46829,14 @@
       </p:pic>
       <p:sp>
         <p:nvSpPr>
-          <p:cNvPr id="20" name="Text 11"/>
-          <p:cNvSpPr/>
-          <p:nvPr/>
-        </p:nvSpPr>
-        <p:spPr>
-          <a:xfrm>
-            <a:off x="9014460" y="4150281"/>
-            <a:ext cx="2369820" cy="1381839"/>
+          <p:cNvPr id="25" name="Text 16"/>
+          <p:cNvSpPr/>
+          <p:nvPr/>
+        </p:nvSpPr>
+        <p:spPr>
+          <a:xfrm>
+            <a:off x="3543300" y="4173498"/>
+            <a:ext cx="2369820" cy="1343382"/>
           </a:xfrm>
           <a:prstGeom prst="rect">
             <a:avLst/>
@@ -46890,6 +46863,510 @@
                 <a:ea typeface="Microsoft YaHei" pitchFamily="34" charset="-122"/>
                 <a:cs typeface="Microsoft YaHei" pitchFamily="34" charset="-120"/>
               </a:rPr>
+              <a:t>抗战胜利后，在云和重建浙江省处州师范学校。此后迁回丽水，在办学条件恢复中延续师范教育传统与人才培养。</a:t>
+            </a:r>
+            <a:endParaRPr lang="en-US" sz="1400" dirty="0"/>
+          </a:p>
+        </p:txBody>
+      </p:sp>
+      <p:sp>
+        <p:nvSpPr>
+          <p:cNvPr id="26" name="Text 17"/>
+          <p:cNvSpPr/>
+          <p:nvPr/>
+        </p:nvSpPr>
+        <p:spPr>
+          <a:xfrm>
+            <a:off x="3573780" y="5823585"/>
+            <a:ext cx="1371600" cy="285750"/>
+          </a:xfrm>
+          <a:prstGeom prst="rect">
+            <a:avLst/>
+          </a:prstGeom>
+          <a:noFill/>
+          <a:ln/>
+        </p:spPr>
+        <p:txBody>
+          <a:bodyPr wrap="square" lIns="0" tIns="0" rIns="0" bIns="0" rtlCol="0" anchor="ctr"/>
+          <a:lstStyle/>
+          <a:p>
+            <a:pPr algn="l" indent="0" marL="0">
+              <a:lnSpc>
+                <a:spcPts val="2250"/>
+              </a:lnSpc>
+              <a:buNone/>
+            </a:pPr>
+            <a:r>
+              <a:rPr lang="en-US" sz="1800" b="1" dirty="0">
+                <a:solidFill>
+                  <a:srgbClr val="0F6674"/>
+                </a:solidFill>
+                <a:latin typeface="Microsoft YaHei" pitchFamily="34" charset="0"/>
+                <a:ea typeface="Microsoft YaHei" pitchFamily="34" charset="-122"/>
+                <a:cs typeface="Microsoft YaHei" pitchFamily="34" charset="-120"/>
+              </a:rPr>
+              <a:t>重建延续文脉</a:t>
+            </a:r>
+            <a:endParaRPr lang="en-US" sz="1800" dirty="0"/>
+          </a:p>
+        </p:txBody>
+      </p:sp>
+      <p:pic>
+        <p:nvPicPr>
+          <p:cNvPr id="27" name="Image 6" descr="preencoded.png">    </p:cNvPr>
+          <p:cNvPicPr>
+            <a:picLocks noChangeAspect="1"/>
+          </p:cNvPicPr>
+          <p:nvPr/>
+        </p:nvPicPr>
+        <p:blipFill>
+          <a:blip r:embed="rId7"/>
+          <a:stretch>
+            <a:fillRect/>
+          </a:stretch>
+        </p:blipFill>
+        <p:spPr>
+          <a:xfrm>
+            <a:off x="3406140" y="2331720"/>
+            <a:ext cx="30480" cy="3634740"/>
+          </a:xfrm>
+          <a:prstGeom prst="rect">
+            <a:avLst/>
+          </a:prstGeom>
+        </p:spPr>
+      </p:pic>
+      <p:pic>
+        <p:nvPicPr>
+          <p:cNvPr id="28" name="Image 7" descr="preencoded.png">    </p:cNvPr>
+          <p:cNvPicPr>
+            <a:picLocks noChangeAspect="1"/>
+          </p:cNvPicPr>
+          <p:nvPr/>
+        </p:nvPicPr>
+        <p:blipFill>
+          <a:blip r:embed="rId8"/>
+          <a:stretch>
+            <a:fillRect/>
+          </a:stretch>
+        </p:blipFill>
+        <p:spPr>
+          <a:xfrm>
+            <a:off x="3329940" y="5875020"/>
+            <a:ext cx="182880" cy="182880"/>
+          </a:xfrm>
+          <a:prstGeom prst="rect">
+            <a:avLst/>
+          </a:prstGeom>
+        </p:spPr>
+      </p:pic>
+      <p:sp>
+        <p:nvSpPr>
+          <p:cNvPr id="29" name="Shape 18"/>
+          <p:cNvSpPr/>
+          <p:nvPr/>
+        </p:nvSpPr>
+        <p:spPr>
+          <a:xfrm>
+            <a:off x="6156960" y="2331720"/>
+            <a:ext cx="2613660" cy="3276600"/>
+          </a:xfrm>
+          <a:prstGeom prst="rect">
+            <a:avLst/>
+          </a:prstGeom>
+          <a:solidFill>
+            <a:srgbClr val="EDF6F5"/>
+          </a:solidFill>
+          <a:ln w="12700">
+            <a:solidFill>
+              <a:srgbClr val="EDF6F5">
+                <a:alpha val="0"/>
+              </a:srgbClr>
+            </a:solidFill>
+            <a:prstDash val="solid"/>
+          </a:ln>
+        </p:spPr>
+      </p:sp>
+      <p:sp>
+        <p:nvSpPr>
+          <p:cNvPr id="30" name="Shape 19"/>
+          <p:cNvSpPr/>
+          <p:nvPr/>
+        </p:nvSpPr>
+        <p:spPr>
+          <a:xfrm>
+            <a:off x="6156960" y="2331720"/>
+            <a:ext cx="2613660" cy="441960"/>
+          </a:xfrm>
+          <a:prstGeom prst="rect">
+            <a:avLst/>
+          </a:prstGeom>
+          <a:solidFill>
+            <a:srgbClr val="0F6674"/>
+          </a:solidFill>
+          <a:ln w="12700">
+            <a:solidFill>
+              <a:srgbClr val="0F6674">
+                <a:alpha val="0"/>
+              </a:srgbClr>
+            </a:solidFill>
+            <a:prstDash val="solid"/>
+          </a:ln>
+        </p:spPr>
+      </p:sp>
+      <p:sp>
+        <p:nvSpPr>
+          <p:cNvPr id="31" name="Text 20"/>
+          <p:cNvSpPr/>
+          <p:nvPr/>
+        </p:nvSpPr>
+        <p:spPr>
+          <a:xfrm>
+            <a:off x="6278880" y="2377440"/>
+            <a:ext cx="2369820" cy="350520"/>
+          </a:xfrm>
+          <a:prstGeom prst="rect">
+            <a:avLst/>
+          </a:prstGeom>
+          <a:noFill/>
+          <a:ln/>
+        </p:spPr>
+        <p:txBody>
+          <a:bodyPr wrap="square" lIns="0" tIns="0" rIns="0" bIns="0" rtlCol="0" anchor="ctr"/>
+          <a:lstStyle/>
+          <a:p>
+            <a:pPr algn="l" indent="0" marL="0">
+              <a:lnSpc>
+                <a:spcPts val="2760"/>
+              </a:lnSpc>
+              <a:buNone/>
+            </a:pPr>
+            <a:r>
+              <a:rPr lang="en-US" sz="2400" b="1" dirty="0">
+                <a:solidFill>
+                  <a:srgbClr val="FFFFFF"/>
+                </a:solidFill>
+                <a:latin typeface="Microsoft YaHei" pitchFamily="34" charset="0"/>
+                <a:ea typeface="Microsoft YaHei" pitchFamily="34" charset="-122"/>
+                <a:cs typeface="Microsoft YaHei" pitchFamily="34" charset="-120"/>
+              </a:rPr>
+              <a:t>2004年</a:t>
+            </a:r>
+            <a:endParaRPr lang="en-US" sz="2400" dirty="0"/>
+          </a:p>
+        </p:txBody>
+      </p:sp>
+      <p:pic>
+        <p:nvPicPr>
+          <p:cNvPr id="32" name="Image 8" descr="preencoded.png">    </p:cNvPr>
+          <p:cNvPicPr>
+            <a:picLocks noChangeAspect="1"/>
+          </p:cNvPicPr>
+          <p:nvPr/>
+        </p:nvPicPr>
+        <p:blipFill>
+          <a:blip r:embed="rId9"/>
+          <a:stretch>
+            <a:fillRect/>
+          </a:stretch>
+        </p:blipFill>
+        <p:spPr>
+          <a:xfrm>
+            <a:off x="6278880" y="2895600"/>
+            <a:ext cx="2369820" cy="1155978"/>
+          </a:xfrm>
+          <a:prstGeom prst="rect">
+            <a:avLst/>
+          </a:prstGeom>
+        </p:spPr>
+      </p:pic>
+      <p:sp>
+        <p:nvSpPr>
+          <p:cNvPr id="33" name="Text 21"/>
+          <p:cNvSpPr/>
+          <p:nvPr/>
+        </p:nvSpPr>
+        <p:spPr>
+          <a:xfrm>
+            <a:off x="6278880" y="4173498"/>
+            <a:ext cx="2369820" cy="1343382"/>
+          </a:xfrm>
+          <a:prstGeom prst="rect">
+            <a:avLst/>
+          </a:prstGeom>
+          <a:noFill/>
+          <a:ln/>
+        </p:spPr>
+        <p:txBody>
+          <a:bodyPr wrap="square" lIns="0" tIns="0" rIns="0" bIns="0" rtlCol="0" anchor="ctr"/>
+          <a:lstStyle/>
+          <a:p>
+            <a:pPr algn="just" indent="0" marL="0">
+              <a:lnSpc>
+                <a:spcPts val="2100"/>
+              </a:lnSpc>
+              <a:buNone/>
+            </a:pPr>
+            <a:r>
+              <a:rPr lang="en-US" sz="1400" dirty="0">
+                <a:solidFill>
+                  <a:srgbClr val="18383F"/>
+                </a:solidFill>
+                <a:latin typeface="Microsoft YaHei" pitchFamily="34" charset="0"/>
+                <a:ea typeface="Microsoft YaHei" pitchFamily="34" charset="-122"/>
+                <a:cs typeface="Microsoft YaHei" pitchFamily="34" charset="-120"/>
+              </a:rPr>
+              <a:t>经教育部批准，学校升格更名为丽水学院。在原有办学基础上拓展本科教育，逐步形成多学科协调发展的格局。</a:t>
+            </a:r>
+            <a:endParaRPr lang="en-US" sz="1400" dirty="0"/>
+          </a:p>
+        </p:txBody>
+      </p:sp>
+      <p:sp>
+        <p:nvSpPr>
+          <p:cNvPr id="34" name="Text 22"/>
+          <p:cNvSpPr/>
+          <p:nvPr/>
+        </p:nvSpPr>
+        <p:spPr>
+          <a:xfrm>
+            <a:off x="6309360" y="5823585"/>
+            <a:ext cx="1371600" cy="285750"/>
+          </a:xfrm>
+          <a:prstGeom prst="rect">
+            <a:avLst/>
+          </a:prstGeom>
+          <a:noFill/>
+          <a:ln/>
+        </p:spPr>
+        <p:txBody>
+          <a:bodyPr wrap="square" lIns="0" tIns="0" rIns="0" bIns="0" rtlCol="0" anchor="ctr"/>
+          <a:lstStyle/>
+          <a:p>
+            <a:pPr algn="l" indent="0" marL="0">
+              <a:lnSpc>
+                <a:spcPts val="2250"/>
+              </a:lnSpc>
+              <a:buNone/>
+            </a:pPr>
+            <a:r>
+              <a:rPr lang="en-US" sz="1800" b="1" dirty="0">
+                <a:solidFill>
+                  <a:srgbClr val="0F6674"/>
+                </a:solidFill>
+                <a:latin typeface="Microsoft YaHei" pitchFamily="34" charset="0"/>
+                <a:ea typeface="Microsoft YaHei" pitchFamily="34" charset="-122"/>
+                <a:cs typeface="Microsoft YaHei" pitchFamily="34" charset="-120"/>
+              </a:rPr>
+              <a:t>升本拓展格局</a:t>
+            </a:r>
+            <a:endParaRPr lang="en-US" sz="1800" dirty="0"/>
+          </a:p>
+        </p:txBody>
+      </p:sp>
+      <p:pic>
+        <p:nvPicPr>
+          <p:cNvPr id="35" name="Image 9" descr="preencoded.png">    </p:cNvPr>
+          <p:cNvPicPr>
+            <a:picLocks noChangeAspect="1"/>
+          </p:cNvPicPr>
+          <p:nvPr/>
+        </p:nvPicPr>
+        <p:blipFill>
+          <a:blip r:embed="rId10"/>
+          <a:stretch>
+            <a:fillRect/>
+          </a:stretch>
+        </p:blipFill>
+        <p:spPr>
+          <a:xfrm>
+            <a:off x="6141720" y="2331720"/>
+            <a:ext cx="30480" cy="3634740"/>
+          </a:xfrm>
+          <a:prstGeom prst="rect">
+            <a:avLst/>
+          </a:prstGeom>
+        </p:spPr>
+      </p:pic>
+      <p:pic>
+        <p:nvPicPr>
+          <p:cNvPr id="36" name="Image 10" descr="preencoded.png">    </p:cNvPr>
+          <p:cNvPicPr>
+            <a:picLocks noChangeAspect="1"/>
+          </p:cNvPicPr>
+          <p:nvPr/>
+        </p:nvPicPr>
+        <p:blipFill>
+          <a:blip r:embed="rId11"/>
+          <a:stretch>
+            <a:fillRect/>
+          </a:stretch>
+        </p:blipFill>
+        <p:spPr>
+          <a:xfrm>
+            <a:off x="6065520" y="5875020"/>
+            <a:ext cx="182880" cy="182880"/>
+          </a:xfrm>
+          <a:prstGeom prst="rect">
+            <a:avLst/>
+          </a:prstGeom>
+        </p:spPr>
+      </p:pic>
+      <p:sp>
+        <p:nvSpPr>
+          <p:cNvPr id="37" name="Shape 23"/>
+          <p:cNvSpPr/>
+          <p:nvPr/>
+        </p:nvSpPr>
+        <p:spPr>
+          <a:xfrm>
+            <a:off x="8892540" y="2331720"/>
+            <a:ext cx="2613660" cy="3276600"/>
+          </a:xfrm>
+          <a:prstGeom prst="rect">
+            <a:avLst/>
+          </a:prstGeom>
+          <a:solidFill>
+            <a:srgbClr val="EDF6F5"/>
+          </a:solidFill>
+          <a:ln w="12700">
+            <a:solidFill>
+              <a:srgbClr val="EDF6F5">
+                <a:alpha val="0"/>
+              </a:srgbClr>
+            </a:solidFill>
+            <a:prstDash val="solid"/>
+          </a:ln>
+        </p:spPr>
+      </p:sp>
+      <p:sp>
+        <p:nvSpPr>
+          <p:cNvPr id="38" name="Shape 24"/>
+          <p:cNvSpPr/>
+          <p:nvPr/>
+        </p:nvSpPr>
+        <p:spPr>
+          <a:xfrm>
+            <a:off x="8892540" y="2331720"/>
+            <a:ext cx="2613660" cy="441960"/>
+          </a:xfrm>
+          <a:prstGeom prst="rect">
+            <a:avLst/>
+          </a:prstGeom>
+          <a:solidFill>
+            <a:srgbClr val="0F6674"/>
+          </a:solidFill>
+          <a:ln w="12700">
+            <a:solidFill>
+              <a:srgbClr val="0F6674">
+                <a:alpha val="0"/>
+              </a:srgbClr>
+            </a:solidFill>
+            <a:prstDash val="solid"/>
+          </a:ln>
+        </p:spPr>
+      </p:sp>
+      <p:sp>
+        <p:nvSpPr>
+          <p:cNvPr id="39" name="Text 25"/>
+          <p:cNvSpPr/>
+          <p:nvPr/>
+        </p:nvSpPr>
+        <p:spPr>
+          <a:xfrm>
+            <a:off x="9014460" y="2377440"/>
+            <a:ext cx="2369820" cy="350520"/>
+          </a:xfrm>
+          <a:prstGeom prst="rect">
+            <a:avLst/>
+          </a:prstGeom>
+          <a:noFill/>
+          <a:ln/>
+        </p:spPr>
+        <p:txBody>
+          <a:bodyPr wrap="square" lIns="0" tIns="0" rIns="0" bIns="0" rtlCol="0" anchor="ctr"/>
+          <a:lstStyle/>
+          <a:p>
+            <a:pPr algn="l" indent="0" marL="0">
+              <a:lnSpc>
+                <a:spcPts val="2760"/>
+              </a:lnSpc>
+              <a:buNone/>
+            </a:pPr>
+            <a:r>
+              <a:rPr lang="en-US" sz="2400" b="1" dirty="0">
+                <a:solidFill>
+                  <a:srgbClr val="FFFFFF"/>
+                </a:solidFill>
+                <a:latin typeface="Microsoft YaHei" pitchFamily="34" charset="0"/>
+                <a:ea typeface="Microsoft YaHei" pitchFamily="34" charset="-122"/>
+                <a:cs typeface="Microsoft YaHei" pitchFamily="34" charset="-120"/>
+              </a:rPr>
+              <a:t>新时代</a:t>
+            </a:r>
+            <a:endParaRPr lang="en-US" sz="2400" dirty="0"/>
+          </a:p>
+        </p:txBody>
+      </p:sp>
+      <p:pic>
+        <p:nvPicPr>
+          <p:cNvPr id="40" name="Image 11" descr="preencoded.png">    </p:cNvPr>
+          <p:cNvPicPr>
+            <a:picLocks noChangeAspect="1"/>
+          </p:cNvPicPr>
+          <p:nvPr/>
+        </p:nvPicPr>
+        <p:blipFill>
+          <a:blip r:embed="rId12"/>
+          <a:stretch>
+            <a:fillRect/>
+          </a:stretch>
+        </p:blipFill>
+        <p:spPr>
+          <a:xfrm>
+            <a:off x="9014460" y="2895600"/>
+            <a:ext cx="2369820" cy="1155978"/>
+          </a:xfrm>
+          <a:prstGeom prst="rect">
+            <a:avLst/>
+          </a:prstGeom>
+        </p:spPr>
+      </p:pic>
+      <p:sp>
+        <p:nvSpPr>
+          <p:cNvPr id="41" name="Text 26"/>
+          <p:cNvSpPr/>
+          <p:nvPr/>
+        </p:nvSpPr>
+        <p:spPr>
+          <a:xfrm>
+            <a:off x="9014460" y="4173498"/>
+            <a:ext cx="2369820" cy="1343382"/>
+          </a:xfrm>
+          <a:prstGeom prst="rect">
+            <a:avLst/>
+          </a:prstGeom>
+          <a:noFill/>
+          <a:ln/>
+        </p:spPr>
+        <p:txBody>
+          <a:bodyPr wrap="square" lIns="0" tIns="0" rIns="0" bIns="0" rtlCol="0" anchor="ctr"/>
+          <a:lstStyle/>
+          <a:p>
+            <a:pPr algn="just" indent="0" marL="0">
+              <a:lnSpc>
+                <a:spcPts val="2100"/>
+              </a:lnSpc>
+              <a:buNone/>
+            </a:pPr>
+            <a:r>
+              <a:rPr lang="en-US" sz="1400" dirty="0">
+                <a:solidFill>
+                  <a:srgbClr val="18383F"/>
+                </a:solidFill>
+                <a:latin typeface="Microsoft YaHei" pitchFamily="34" charset="0"/>
+                <a:ea typeface="Microsoft YaHei" pitchFamily="34" charset="-122"/>
+                <a:cs typeface="Microsoft YaHei" pitchFamily="34" charset="-120"/>
+              </a:rPr>
               <a:t>坚持应用型办学方向，立足丽水、面向区域发展需要。围绕人才培养与科研服务，推进学科建设与产教协同发展。</a:t>
             </a:r>
             <a:endParaRPr lang="en-US" sz="1400" dirty="0"/>
@@ -46898,13 +47375,13 @@
       </p:sp>
       <p:sp>
         <p:nvSpPr>
-          <p:cNvPr id="21" name="Text 12"/>
-          <p:cNvSpPr/>
-          <p:nvPr/>
-        </p:nvSpPr>
-        <p:spPr>
-          <a:xfrm>
-            <a:off x="838200" y="5808345"/>
+          <p:cNvPr id="42" name="Text 27"/>
+          <p:cNvSpPr/>
+          <p:nvPr/>
+        </p:nvSpPr>
+        <p:spPr>
+          <a:xfrm>
+            <a:off x="9044940" y="5823585"/>
             <a:ext cx="1371600" cy="285750"/>
           </a:xfrm>
           <a:prstGeom prst="rect">
@@ -46926,28 +47403,76 @@
             <a:r>
               <a:rPr lang="en-US" sz="1800" b="1" dirty="0">
                 <a:solidFill>
-                  <a:srgbClr val="18383F"/>
-                </a:solidFill>
-                <a:latin typeface="Microsoft YaHei" pitchFamily="34" charset="0"/>
-                <a:ea typeface="Microsoft YaHei" pitchFamily="34" charset="-122"/>
-                <a:cs typeface="Microsoft YaHei" pitchFamily="34" charset="-120"/>
-              </a:rPr>
-              <a:t>师范薪火初传</a:t>
+                  <a:srgbClr val="0F6674"/>
+                </a:solidFill>
+                <a:latin typeface="Microsoft YaHei" pitchFamily="34" charset="0"/>
+                <a:ea typeface="Microsoft YaHei" pitchFamily="34" charset="-122"/>
+                <a:cs typeface="Microsoft YaHei" pitchFamily="34" charset="-120"/>
+              </a:rPr>
+              <a:t>服务地方发展</a:t>
             </a:r>
             <a:endParaRPr lang="en-US" sz="1800" dirty="0"/>
           </a:p>
         </p:txBody>
       </p:sp>
-      <p:sp>
-        <p:nvSpPr>
-          <p:cNvPr id="22" name="Text 13"/>
-          <p:cNvSpPr/>
-          <p:nvPr/>
-        </p:nvSpPr>
-        <p:spPr>
-          <a:xfrm>
-            <a:off x="3573780" y="5808345"/>
-            <a:ext cx="1371600" cy="285750"/>
+      <p:pic>
+        <p:nvPicPr>
+          <p:cNvPr id="43" name="Image 12" descr="preencoded.png">    </p:cNvPr>
+          <p:cNvPicPr>
+            <a:picLocks noChangeAspect="1"/>
+          </p:cNvPicPr>
+          <p:nvPr/>
+        </p:nvPicPr>
+        <p:blipFill>
+          <a:blip r:embed="rId13"/>
+          <a:stretch>
+            <a:fillRect/>
+          </a:stretch>
+        </p:blipFill>
+        <p:spPr>
+          <a:xfrm>
+            <a:off x="8877300" y="2331720"/>
+            <a:ext cx="30480" cy="3634740"/>
+          </a:xfrm>
+          <a:prstGeom prst="rect">
+            <a:avLst/>
+          </a:prstGeom>
+        </p:spPr>
+      </p:pic>
+      <p:pic>
+        <p:nvPicPr>
+          <p:cNvPr id="44" name="Image 13" descr="preencoded.png">    </p:cNvPr>
+          <p:cNvPicPr>
+            <a:picLocks noChangeAspect="1"/>
+          </p:cNvPicPr>
+          <p:nvPr/>
+        </p:nvPicPr>
+        <p:blipFill>
+          <a:blip r:embed="rId14"/>
+          <a:stretch>
+            <a:fillRect/>
+          </a:stretch>
+        </p:blipFill>
+        <p:spPr>
+          <a:xfrm>
+            <a:off x="8801100" y="5875020"/>
+            <a:ext cx="182880" cy="182880"/>
+          </a:xfrm>
+          <a:prstGeom prst="rect">
+            <a:avLst/>
+          </a:prstGeom>
+        </p:spPr>
+      </p:pic>
+      <p:sp>
+        <p:nvSpPr>
+          <p:cNvPr id="45" name="Text 28"/>
+          <p:cNvSpPr/>
+          <p:nvPr/>
+        </p:nvSpPr>
+        <p:spPr>
+          <a:xfrm>
+            <a:off x="441960" y="6485334"/>
+            <a:ext cx="2971800" cy="181332"/>
           </a:xfrm>
           <a:prstGeom prst="rect">
             <a:avLst/>
@@ -46961,132 +47486,6 @@
           <a:p>
             <a:pPr algn="l" indent="0" marL="0">
               <a:lnSpc>
-                <a:spcPts val="2250"/>
-              </a:lnSpc>
-              <a:buNone/>
-            </a:pPr>
-            <a:r>
-              <a:rPr lang="en-US" sz="1800" b="1" dirty="0">
-                <a:solidFill>
-                  <a:srgbClr val="18383F"/>
-                </a:solidFill>
-                <a:latin typeface="Microsoft YaHei" pitchFamily="34" charset="0"/>
-                <a:ea typeface="Microsoft YaHei" pitchFamily="34" charset="-122"/>
-                <a:cs typeface="Microsoft YaHei" pitchFamily="34" charset="-120"/>
-              </a:rPr>
-              <a:t>重建延续文脉</a:t>
-            </a:r>
-            <a:endParaRPr lang="en-US" sz="1800" dirty="0"/>
-          </a:p>
-        </p:txBody>
-      </p:sp>
-      <p:sp>
-        <p:nvSpPr>
-          <p:cNvPr id="23" name="Text 14"/>
-          <p:cNvSpPr/>
-          <p:nvPr/>
-        </p:nvSpPr>
-        <p:spPr>
-          <a:xfrm>
-            <a:off x="6309360" y="5808345"/>
-            <a:ext cx="1371600" cy="285750"/>
-          </a:xfrm>
-          <a:prstGeom prst="rect">
-            <a:avLst/>
-          </a:prstGeom>
-          <a:noFill/>
-          <a:ln/>
-        </p:spPr>
-        <p:txBody>
-          <a:bodyPr wrap="square" lIns="0" tIns="0" rIns="0" bIns="0" rtlCol="0" anchor="ctr"/>
-          <a:lstStyle/>
-          <a:p>
-            <a:pPr algn="l" indent="0" marL="0">
-              <a:lnSpc>
-                <a:spcPts val="2250"/>
-              </a:lnSpc>
-              <a:buNone/>
-            </a:pPr>
-            <a:r>
-              <a:rPr lang="en-US" sz="1800" b="1" dirty="0">
-                <a:solidFill>
-                  <a:srgbClr val="18383F"/>
-                </a:solidFill>
-                <a:latin typeface="Microsoft YaHei" pitchFamily="34" charset="0"/>
-                <a:ea typeface="Microsoft YaHei" pitchFamily="34" charset="-122"/>
-                <a:cs typeface="Microsoft YaHei" pitchFamily="34" charset="-120"/>
-              </a:rPr>
-              <a:t>升本拓展格局</a:t>
-            </a:r>
-            <a:endParaRPr lang="en-US" sz="1800" dirty="0"/>
-          </a:p>
-        </p:txBody>
-      </p:sp>
-      <p:sp>
-        <p:nvSpPr>
-          <p:cNvPr id="24" name="Text 15"/>
-          <p:cNvSpPr/>
-          <p:nvPr/>
-        </p:nvSpPr>
-        <p:spPr>
-          <a:xfrm>
-            <a:off x="9044940" y="5808345"/>
-            <a:ext cx="1371600" cy="285750"/>
-          </a:xfrm>
-          <a:prstGeom prst="rect">
-            <a:avLst/>
-          </a:prstGeom>
-          <a:noFill/>
-          <a:ln/>
-        </p:spPr>
-        <p:txBody>
-          <a:bodyPr wrap="square" lIns="0" tIns="0" rIns="0" bIns="0" rtlCol="0" anchor="ctr"/>
-          <a:lstStyle/>
-          <a:p>
-            <a:pPr algn="l" indent="0" marL="0">
-              <a:lnSpc>
-                <a:spcPts val="2250"/>
-              </a:lnSpc>
-              <a:buNone/>
-            </a:pPr>
-            <a:r>
-              <a:rPr lang="en-US" sz="1800" b="1" dirty="0">
-                <a:solidFill>
-                  <a:srgbClr val="18383F"/>
-                </a:solidFill>
-                <a:latin typeface="Microsoft YaHei" pitchFamily="34" charset="0"/>
-                <a:ea typeface="Microsoft YaHei" pitchFamily="34" charset="-122"/>
-                <a:cs typeface="Microsoft YaHei" pitchFamily="34" charset="-120"/>
-              </a:rPr>
-              <a:t>服务地方发展</a:t>
-            </a:r>
-            <a:endParaRPr lang="en-US" sz="1800" dirty="0"/>
-          </a:p>
-        </p:txBody>
-      </p:sp>
-      <p:sp>
-        <p:nvSpPr>
-          <p:cNvPr id="25" name="Text 16"/>
-          <p:cNvSpPr/>
-          <p:nvPr/>
-        </p:nvSpPr>
-        <p:spPr>
-          <a:xfrm>
-            <a:off x="441960" y="6489144"/>
-            <a:ext cx="2286000" cy="181332"/>
-          </a:xfrm>
-          <a:prstGeom prst="rect">
-            <a:avLst/>
-          </a:prstGeom>
-          <a:noFill/>
-          <a:ln/>
-        </p:spPr>
-        <p:txBody>
-          <a:bodyPr wrap="square" lIns="0" tIns="0" rIns="0" bIns="0" rtlCol="0" anchor="ctr"/>
-          <a:lstStyle/>
-          <a:p>
-            <a:pPr algn="l" indent="0" marL="0">
-              <a:lnSpc>
                 <a:spcPts val="1428"/>
               </a:lnSpc>
               <a:buNone/>
@@ -47108,16 +47507,16 @@
       </p:sp>
       <p:sp>
         <p:nvSpPr>
-          <p:cNvPr id="26" name="Text 17">
-            <a:hlinkClick r:id="rId7" tooltip=""/>
+          <p:cNvPr id="46" name="Text 29">
+            <a:hlinkClick r:id="rId15" tooltip=""/>
           </p:cNvPr>
           <p:cNvSpPr/>
           <p:nvPr/>
         </p:nvSpPr>
         <p:spPr>
           <a:xfrm>
-            <a:off x="2910840" y="6492478"/>
-            <a:ext cx="8212455" cy="174784"/>
+            <a:off x="3596640" y="6485334"/>
+            <a:ext cx="7534632" cy="181332"/>
           </a:xfrm>
           <a:prstGeom prst="rect">
             <a:avLst/>
@@ -47131,7 +47530,7 @@
           <a:p>
             <a:pPr algn="r" indent="0" marL="0">
               <a:lnSpc>
-                <a:spcPts val="1377"/>
+                <a:spcPts val="1428"/>
               </a:lnSpc>
               <a:buNone/>
             </a:pPr>
@@ -47143,7 +47542,7 @@
                 <a:latin typeface="Microsoft YaHei" pitchFamily="34" charset="0"/>
                 <a:ea typeface="Microsoft YaHei" pitchFamily="34" charset="-122"/>
                 <a:cs typeface="Microsoft YaHei" pitchFamily="34" charset="-120"/>
-                <a:hlinkClick r:id="rId7" invalidUrl="" action="" tgtFrame="" tooltip="" history="1" highlightClick="0" endSnd="0">
+                <a:hlinkClick r:id="rId15" invalidUrl="" action="" tgtFrame="" tooltip="" history="1" highlightClick="0" endSnd="0">
                   <a:extLst>
                     <a:ext uri="{A12FA001-AC4F-418D-AE19-62706E023703}">
                       <ahyp:hlinkClr xmlns:ahyp="http://schemas.microsoft.com/office/drawing/2018/hyperlinkcolor" val="tx"/>
@@ -47159,23 +47558,23 @@
       </p:sp>
       <p:sp>
         <p:nvSpPr>
-          <p:cNvPr id="27" name="Text 18"/>
-          <p:cNvSpPr/>
-          <p:nvPr/>
-        </p:nvSpPr>
-        <p:spPr>
-          <a:xfrm>
-            <a:off x="11306175" y="6489144"/>
-            <a:ext cx="443865" cy="181332"/>
-          </a:xfrm>
-          <a:prstGeom prst="rect">
-            <a:avLst/>
-          </a:prstGeom>
-          <a:noFill/>
-          <a:ln/>
-        </p:spPr>
-        <p:txBody>
-          <a:bodyPr wrap="none" lIns="0" tIns="0" rIns="0" bIns="0" rtlCol="0" anchor="ctr"/>
+          <p:cNvPr id="47" name="Text 30"/>
+          <p:cNvSpPr/>
+          <p:nvPr/>
+        </p:nvSpPr>
+        <p:spPr>
+          <a:xfrm>
+            <a:off x="11314152" y="6485334"/>
+            <a:ext cx="435888" cy="181332"/>
+          </a:xfrm>
+          <a:prstGeom prst="rect">
+            <a:avLst/>
+          </a:prstGeom>
+          <a:noFill/>
+          <a:ln/>
+        </p:spPr>
+        <p:txBody>
+          <a:bodyPr wrap="square" lIns="0" tIns="0" rIns="0" bIns="0" rtlCol="0" anchor="ctr"/>
           <a:lstStyle/>
           <a:p>
             <a:pPr algn="l" indent="0" marL="0">
@@ -47198,6 +47597,33 @@
             <a:endParaRPr lang="en-US" sz="1020" dirty="0"/>
           </a:p>
         </p:txBody>
+      </p:sp>
+      <p:sp>
+        <p:nvSpPr>
+          <p:cNvPr id="48" name="Shape 31"/>
+          <p:cNvSpPr/>
+          <p:nvPr/>
+        </p:nvSpPr>
+        <p:spPr>
+          <a:xfrm>
+            <a:off x="441960" y="6355080"/>
+            <a:ext cx="11308080" cy="7620"/>
+          </a:xfrm>
+          <a:prstGeom prst="rect">
+            <a:avLst/>
+          </a:prstGeom>
+          <a:solidFill>
+            <a:srgbClr val="D8E2E9"/>
+          </a:solidFill>
+          <a:ln w="12700">
+            <a:solidFill>
+              <a:srgbClr val="D8E2E9">
+                <a:alpha val="0"/>
+              </a:srgbClr>
+            </a:solidFill>
+            <a:prstDash val="solid"/>
+          </a:ln>
+        </p:spPr>
       </p:sp>
     </p:spTree>
   </p:cSld>

--- a/output/丽水学院_WebSlide制作与演示指南.pptx
+++ b/output/丽水学院_WebSlide制作与演示指南.pptx
@@ -4227,8 +4227,8 @@
         </p:nvSpPr>
         <p:spPr>
           <a:xfrm>
-            <a:off x="624840" y="2118360"/>
-            <a:ext cx="5151120" cy="297180"/>
+            <a:off x="579120" y="2072640"/>
+            <a:ext cx="5242560" cy="297180"/>
           </a:xfrm>
           <a:prstGeom prst="rect">
             <a:avLst/>
@@ -4269,8 +4269,8 @@
         </p:nvSpPr>
         <p:spPr>
           <a:xfrm>
-            <a:off x="624840" y="2522220"/>
-            <a:ext cx="5151120" cy="314920"/>
+            <a:off x="579120" y="2476500"/>
+            <a:ext cx="5242560" cy="314920"/>
           </a:xfrm>
           <a:prstGeom prst="rect">
             <a:avLst/>
@@ -4311,8 +4311,8 @@
         </p:nvSpPr>
         <p:spPr>
           <a:xfrm>
-            <a:off x="624840" y="2913340"/>
-            <a:ext cx="5151120" cy="314920"/>
+            <a:off x="579120" y="2867620"/>
+            <a:ext cx="5242560" cy="314920"/>
           </a:xfrm>
           <a:prstGeom prst="rect">
             <a:avLst/>
@@ -4353,8 +4353,8 @@
         </p:nvSpPr>
         <p:spPr>
           <a:xfrm>
-            <a:off x="624840" y="3304461"/>
-            <a:ext cx="5151120" cy="314920"/>
+            <a:off x="579120" y="3258741"/>
+            <a:ext cx="5242560" cy="314920"/>
           </a:xfrm>
           <a:prstGeom prst="rect">
             <a:avLst/>
@@ -4422,8 +4422,8 @@
         </p:nvSpPr>
         <p:spPr>
           <a:xfrm>
-            <a:off x="6324600" y="2118360"/>
-            <a:ext cx="5242560" cy="297180"/>
+            <a:off x="6278880" y="2072640"/>
+            <a:ext cx="5334000" cy="297180"/>
           </a:xfrm>
           <a:prstGeom prst="rect">
             <a:avLst/>
@@ -4464,8 +4464,8 @@
         </p:nvSpPr>
         <p:spPr>
           <a:xfrm>
-            <a:off x="6324600" y="2522220"/>
-            <a:ext cx="5242560" cy="314920"/>
+            <a:off x="6278880" y="2476500"/>
+            <a:ext cx="5334000" cy="314920"/>
           </a:xfrm>
           <a:prstGeom prst="rect">
             <a:avLst/>
@@ -4506,8 +4506,8 @@
         </p:nvSpPr>
         <p:spPr>
           <a:xfrm>
-            <a:off x="6324600" y="2913340"/>
-            <a:ext cx="5242560" cy="314920"/>
+            <a:off x="6278880" y="2867620"/>
+            <a:ext cx="5334000" cy="314920"/>
           </a:xfrm>
           <a:prstGeom prst="rect">
             <a:avLst/>
@@ -4548,8 +4548,8 @@
         </p:nvSpPr>
         <p:spPr>
           <a:xfrm>
-            <a:off x="6324600" y="3304461"/>
-            <a:ext cx="5242560" cy="314920"/>
+            <a:off x="6278880" y="3258741"/>
+            <a:ext cx="5334000" cy="314920"/>
           </a:xfrm>
           <a:prstGeom prst="rect">
             <a:avLst/>
@@ -4611,7 +4611,34 @@
       </p:sp>
       <p:sp>
         <p:nvSpPr>
-          <p:cNvPr id="23" name="Text 19"/>
+          <p:cNvPr id="23" name="Shape 19"/>
+          <p:cNvSpPr/>
+          <p:nvPr/>
+        </p:nvSpPr>
+        <p:spPr>
+          <a:xfrm>
+            <a:off x="441960" y="4152900"/>
+            <a:ext cx="5516880" cy="449580"/>
+          </a:xfrm>
+          <a:prstGeom prst="rect">
+            <a:avLst/>
+          </a:prstGeom>
+          <a:solidFill>
+            <a:srgbClr val="0F6674"/>
+          </a:solidFill>
+          <a:ln w="12700">
+            <a:solidFill>
+              <a:srgbClr val="0F6674">
+                <a:alpha val="0"/>
+              </a:srgbClr>
+            </a:solidFill>
+            <a:prstDash val="solid"/>
+          </a:ln>
+        </p:spPr>
+      </p:sp>
+      <p:sp>
+        <p:nvSpPr>
+          <p:cNvPr id="24" name="Text 20"/>
           <p:cNvSpPr/>
           <p:nvPr/>
         </p:nvSpPr>
@@ -4653,7 +4680,7 @@
       </p:sp>
       <p:sp>
         <p:nvSpPr>
-          <p:cNvPr id="24" name="Text 20"/>
+          <p:cNvPr id="25" name="Text 21"/>
           <p:cNvSpPr/>
           <p:nvPr/>
         </p:nvSpPr>
@@ -4695,7 +4722,7 @@
       </p:sp>
       <p:sp>
         <p:nvSpPr>
-          <p:cNvPr id="25" name="Text 21"/>
+          <p:cNvPr id="26" name="Text 22"/>
           <p:cNvSpPr/>
           <p:nvPr/>
         </p:nvSpPr>
@@ -4737,7 +4764,7 @@
       </p:sp>
       <p:sp>
         <p:nvSpPr>
-          <p:cNvPr id="26" name="Text 22"/>
+          <p:cNvPr id="27" name="Text 23"/>
           <p:cNvSpPr/>
           <p:nvPr/>
         </p:nvSpPr>
@@ -4779,7 +4806,7 @@
       </p:sp>
       <p:sp>
         <p:nvSpPr>
-          <p:cNvPr id="27" name="Shape 23"/>
+          <p:cNvPr id="28" name="Shape 24"/>
           <p:cNvSpPr/>
           <p:nvPr/>
         </p:nvSpPr>
@@ -4806,7 +4833,7 @@
       </p:sp>
       <p:sp>
         <p:nvSpPr>
-          <p:cNvPr id="28" name="Text 24"/>
+          <p:cNvPr id="29" name="Text 25"/>
           <p:cNvSpPr/>
           <p:nvPr/>
         </p:nvSpPr>
@@ -4848,7 +4875,7 @@
       </p:sp>
       <p:sp>
         <p:nvSpPr>
-          <p:cNvPr id="29" name="Text 25"/>
+          <p:cNvPr id="30" name="Text 26"/>
           <p:cNvSpPr/>
           <p:nvPr/>
         </p:nvSpPr>
@@ -4890,7 +4917,7 @@
       </p:sp>
       <p:sp>
         <p:nvSpPr>
-          <p:cNvPr id="30" name="Text 26"/>
+          <p:cNvPr id="31" name="Text 27"/>
           <p:cNvSpPr/>
           <p:nvPr/>
         </p:nvSpPr>
@@ -4932,7 +4959,7 @@
       </p:sp>
       <p:sp>
         <p:nvSpPr>
-          <p:cNvPr id="31" name="Text 27"/>
+          <p:cNvPr id="32" name="Text 28"/>
           <p:cNvSpPr/>
           <p:nvPr/>
         </p:nvSpPr>
@@ -4974,7 +5001,7 @@
       </p:sp>
       <p:sp>
         <p:nvSpPr>
-          <p:cNvPr id="32" name="Text 28"/>
+          <p:cNvPr id="33" name="Text 29"/>
           <p:cNvSpPr/>
           <p:nvPr/>
         </p:nvSpPr>
@@ -5016,7 +5043,7 @@
       </p:sp>
       <p:sp>
         <p:nvSpPr>
-          <p:cNvPr id="33" name="Text 29"/>
+          <p:cNvPr id="34" name="Text 30"/>
           <p:cNvSpPr/>
           <p:nvPr/>
         </p:nvSpPr>
@@ -5058,7 +5085,7 @@
       </p:sp>
       <p:sp>
         <p:nvSpPr>
-          <p:cNvPr id="34" name="Text 30"/>
+          <p:cNvPr id="35" name="Text 31"/>
           <p:cNvSpPr/>
           <p:nvPr/>
         </p:nvSpPr>
@@ -5100,7 +5127,7 @@
       </p:sp>
       <p:sp>
         <p:nvSpPr>
-          <p:cNvPr id="35" name="Shape 31"/>
+          <p:cNvPr id="36" name="Shape 32"/>
           <p:cNvSpPr/>
           <p:nvPr/>
         </p:nvSpPr>
@@ -7180,8 +7207,8 @@
         </p:nvSpPr>
         <p:spPr>
           <a:xfrm>
-            <a:off x="624840" y="4418409"/>
-            <a:ext cx="5151120" cy="314920"/>
+            <a:off x="563880" y="4418409"/>
+            <a:ext cx="5273040" cy="314920"/>
           </a:xfrm>
           <a:prstGeom prst="rect">
             <a:avLst/>
@@ -7222,8 +7249,8 @@
         </p:nvSpPr>
         <p:spPr>
           <a:xfrm>
-            <a:off x="624840" y="4809530"/>
-            <a:ext cx="5151120" cy="314920"/>
+            <a:off x="563880" y="4809530"/>
+            <a:ext cx="5273040" cy="314920"/>
           </a:xfrm>
           <a:prstGeom prst="rect">
             <a:avLst/>
@@ -7264,8 +7291,8 @@
         </p:nvSpPr>
         <p:spPr>
           <a:xfrm>
-            <a:off x="624840" y="5200650"/>
-            <a:ext cx="5151120" cy="314920"/>
+            <a:off x="563880" y="5200650"/>
+            <a:ext cx="5273040" cy="314920"/>
           </a:xfrm>
           <a:prstGeom prst="rect">
             <a:avLst/>
@@ -7306,8 +7333,8 @@
         </p:nvSpPr>
         <p:spPr>
           <a:xfrm>
-            <a:off x="624840" y="5591770"/>
-            <a:ext cx="5151120" cy="314920"/>
+            <a:off x="563880" y="5591770"/>
+            <a:ext cx="5273040" cy="314920"/>
           </a:xfrm>
           <a:prstGeom prst="rect">
             <a:avLst/>
@@ -8566,7 +8593,34 @@
       </p:sp>
       <p:sp>
         <p:nvSpPr>
-          <p:cNvPr id="20" name="Text 16"/>
+          <p:cNvPr id="20" name="Shape 16"/>
+          <p:cNvSpPr/>
+          <p:nvPr/>
+        </p:nvSpPr>
+        <p:spPr>
+          <a:xfrm>
+            <a:off x="6141720" y="1950720"/>
+            <a:ext cx="5608320" cy="449580"/>
+          </a:xfrm>
+          <a:prstGeom prst="rect">
+            <a:avLst/>
+          </a:prstGeom>
+          <a:solidFill>
+            <a:srgbClr val="0F6674"/>
+          </a:solidFill>
+          <a:ln w="12700">
+            <a:solidFill>
+              <a:srgbClr val="0F6674">
+                <a:alpha val="0"/>
+              </a:srgbClr>
+            </a:solidFill>
+            <a:prstDash val="solid"/>
+          </a:ln>
+        </p:spPr>
+      </p:sp>
+      <p:sp>
+        <p:nvSpPr>
+          <p:cNvPr id="21" name="Text 17"/>
           <p:cNvSpPr/>
           <p:nvPr/>
         </p:nvSpPr>
@@ -8608,7 +8662,7 @@
       </p:sp>
       <p:sp>
         <p:nvSpPr>
-          <p:cNvPr id="21" name="Text 17"/>
+          <p:cNvPr id="22" name="Text 18"/>
           <p:cNvSpPr/>
           <p:nvPr/>
         </p:nvSpPr>
@@ -8650,7 +8704,7 @@
       </p:sp>
       <p:sp>
         <p:nvSpPr>
-          <p:cNvPr id="22" name="Text 18"/>
+          <p:cNvPr id="23" name="Text 19"/>
           <p:cNvSpPr/>
           <p:nvPr/>
         </p:nvSpPr>
@@ -8692,7 +8746,7 @@
       </p:sp>
       <p:sp>
         <p:nvSpPr>
-          <p:cNvPr id="23" name="Text 19"/>
+          <p:cNvPr id="24" name="Text 20"/>
           <p:cNvSpPr/>
           <p:nvPr/>
         </p:nvSpPr>
@@ -8734,7 +8788,7 @@
       </p:sp>
       <p:sp>
         <p:nvSpPr>
-          <p:cNvPr id="24" name="Text 20"/>
+          <p:cNvPr id="25" name="Text 21"/>
           <p:cNvSpPr/>
           <p:nvPr/>
         </p:nvSpPr>
@@ -8776,7 +8830,7 @@
       </p:sp>
       <p:sp>
         <p:nvSpPr>
-          <p:cNvPr id="25" name="Text 21"/>
+          <p:cNvPr id="26" name="Text 22"/>
           <p:cNvSpPr/>
           <p:nvPr/>
         </p:nvSpPr>
@@ -8818,7 +8872,7 @@
       </p:sp>
       <p:sp>
         <p:nvSpPr>
-          <p:cNvPr id="26" name="Text 22"/>
+          <p:cNvPr id="27" name="Text 23"/>
           <p:cNvSpPr/>
           <p:nvPr/>
         </p:nvSpPr>
@@ -8860,7 +8914,7 @@
       </p:sp>
       <p:sp>
         <p:nvSpPr>
-          <p:cNvPr id="27" name="Text 23"/>
+          <p:cNvPr id="28" name="Text 24"/>
           <p:cNvSpPr/>
           <p:nvPr/>
         </p:nvSpPr>
@@ -8902,7 +8956,7 @@
       </p:sp>
       <p:sp>
         <p:nvSpPr>
-          <p:cNvPr id="28" name="Text 24"/>
+          <p:cNvPr id="29" name="Text 25"/>
           <p:cNvSpPr/>
           <p:nvPr/>
         </p:nvSpPr>
@@ -8944,7 +8998,7 @@
       </p:sp>
       <p:sp>
         <p:nvSpPr>
-          <p:cNvPr id="29" name="Text 25"/>
+          <p:cNvPr id="30" name="Text 26"/>
           <p:cNvSpPr/>
           <p:nvPr/>
         </p:nvSpPr>
@@ -8986,7 +9040,7 @@
       </p:sp>
       <p:sp>
         <p:nvSpPr>
-          <p:cNvPr id="30" name="Text 26"/>
+          <p:cNvPr id="31" name="Text 27"/>
           <p:cNvSpPr/>
           <p:nvPr/>
         </p:nvSpPr>
@@ -9028,7 +9082,7 @@
       </p:sp>
       <p:sp>
         <p:nvSpPr>
-          <p:cNvPr id="31" name="Shape 27"/>
+          <p:cNvPr id="32" name="Shape 28"/>
           <p:cNvSpPr/>
           <p:nvPr/>
         </p:nvSpPr>
@@ -9603,8 +9657,8 @@
         </p:nvSpPr>
         <p:spPr>
           <a:xfrm>
-            <a:off x="624840" y="3840480"/>
-            <a:ext cx="5151120" cy="297180"/>
+            <a:off x="472440" y="3870960"/>
+            <a:ext cx="5455920" cy="297180"/>
           </a:xfrm>
           <a:prstGeom prst="rect">
             <a:avLst/>
@@ -9645,8 +9699,8 @@
         </p:nvSpPr>
         <p:spPr>
           <a:xfrm>
-            <a:off x="624840" y="4244340"/>
-            <a:ext cx="5151120" cy="314920"/>
+            <a:off x="472440" y="4274820"/>
+            <a:ext cx="5455920" cy="314920"/>
           </a:xfrm>
           <a:prstGeom prst="rect">
             <a:avLst/>
@@ -9687,8 +9741,8 @@
         </p:nvSpPr>
         <p:spPr>
           <a:xfrm>
-            <a:off x="624840" y="4635460"/>
-            <a:ext cx="5151120" cy="314920"/>
+            <a:off x="472440" y="4665940"/>
+            <a:ext cx="5455920" cy="314920"/>
           </a:xfrm>
           <a:prstGeom prst="rect">
             <a:avLst/>
@@ -9729,8 +9783,8 @@
         </p:nvSpPr>
         <p:spPr>
           <a:xfrm>
-            <a:off x="624840" y="5026581"/>
-            <a:ext cx="5151120" cy="314920"/>
+            <a:off x="472440" y="5057061"/>
+            <a:ext cx="5455920" cy="314920"/>
           </a:xfrm>
           <a:prstGeom prst="rect">
             <a:avLst/>
@@ -9798,8 +9852,8 @@
         </p:nvSpPr>
         <p:spPr>
           <a:xfrm>
-            <a:off x="6324600" y="3840480"/>
-            <a:ext cx="5242560" cy="297180"/>
+            <a:off x="6172200" y="3870960"/>
+            <a:ext cx="5547360" cy="297180"/>
           </a:xfrm>
           <a:prstGeom prst="rect">
             <a:avLst/>
@@ -9840,8 +9894,8 @@
         </p:nvSpPr>
         <p:spPr>
           <a:xfrm>
-            <a:off x="6324600" y="4244340"/>
-            <a:ext cx="5242560" cy="314920"/>
+            <a:off x="6172200" y="4274820"/>
+            <a:ext cx="5547360" cy="314920"/>
           </a:xfrm>
           <a:prstGeom prst="rect">
             <a:avLst/>
@@ -9882,8 +9936,8 @@
         </p:nvSpPr>
         <p:spPr>
           <a:xfrm>
-            <a:off x="6324600" y="4635460"/>
-            <a:ext cx="5242560" cy="314920"/>
+            <a:off x="6172200" y="4665940"/>
+            <a:ext cx="5547360" cy="314920"/>
           </a:xfrm>
           <a:prstGeom prst="rect">
             <a:avLst/>
@@ -9924,8 +9978,8 @@
         </p:nvSpPr>
         <p:spPr>
           <a:xfrm>
-            <a:off x="6324600" y="5026581"/>
-            <a:ext cx="5242560" cy="314920"/>
+            <a:off x="6172200" y="5057061"/>
+            <a:ext cx="5547360" cy="314920"/>
           </a:xfrm>
           <a:prstGeom prst="rect">
             <a:avLst/>
@@ -9993,17 +10047,17 @@
         </p:nvSpPr>
         <p:spPr>
           <a:xfrm>
-            <a:off x="2236113" y="5791200"/>
-            <a:ext cx="7719774" cy="304800"/>
-          </a:xfrm>
-          <a:prstGeom prst="rect">
-            <a:avLst/>
-          </a:prstGeom>
-          <a:noFill/>
-          <a:ln/>
-        </p:spPr>
-        <p:txBody>
-          <a:bodyPr wrap="square" lIns="0" tIns="0" rIns="0" bIns="0" rtlCol="0" anchor="ctr"/>
+            <a:off x="609600" y="5791200"/>
+            <a:ext cx="10972800" cy="304800"/>
+          </a:xfrm>
+          <a:prstGeom prst="rect">
+            <a:avLst/>
+          </a:prstGeom>
+          <a:noFill/>
+          <a:ln/>
+        </p:spPr>
+        <p:txBody>
+          <a:bodyPr wrap="none" lIns="0" tIns="0" rIns="0" bIns="0" rtlCol="0" anchor="ctr"/>
           <a:lstStyle/>
           <a:p>
             <a:pPr algn="ctr" indent="0" marL="0">
@@ -10679,8 +10733,8 @@
         </p:nvSpPr>
         <p:spPr>
           <a:xfrm>
-            <a:off x="8092440" y="2118360"/>
-            <a:ext cx="3474720" cy="297180"/>
+            <a:off x="8046720" y="2072640"/>
+            <a:ext cx="3566160" cy="297180"/>
           </a:xfrm>
           <a:prstGeom prst="rect">
             <a:avLst/>
@@ -10721,8 +10775,8 @@
         </p:nvSpPr>
         <p:spPr>
           <a:xfrm>
-            <a:off x="8092440" y="2522220"/>
-            <a:ext cx="3474720" cy="629841"/>
+            <a:off x="8046720" y="2476500"/>
+            <a:ext cx="3566160" cy="629841"/>
           </a:xfrm>
           <a:prstGeom prst="rect">
             <a:avLst/>
@@ -10790,8 +10844,8 @@
         </p:nvSpPr>
         <p:spPr>
           <a:xfrm>
-            <a:off x="8092440" y="3525441"/>
-            <a:ext cx="3474720" cy="297180"/>
+            <a:off x="8046720" y="3479721"/>
+            <a:ext cx="3566160" cy="297180"/>
           </a:xfrm>
           <a:prstGeom prst="rect">
             <a:avLst/>
@@ -10832,8 +10886,8 @@
         </p:nvSpPr>
         <p:spPr>
           <a:xfrm>
-            <a:off x="8092440" y="3929301"/>
-            <a:ext cx="3474720" cy="629841"/>
+            <a:off x="8046720" y="3883581"/>
+            <a:ext cx="3566160" cy="629841"/>
           </a:xfrm>
           <a:prstGeom prst="rect">
             <a:avLst/>
@@ -10901,8 +10955,8 @@
         </p:nvSpPr>
         <p:spPr>
           <a:xfrm>
-            <a:off x="8092440" y="4932640"/>
-            <a:ext cx="3474720" cy="297180"/>
+            <a:off x="8046720" y="4886920"/>
+            <a:ext cx="3566160" cy="297180"/>
           </a:xfrm>
           <a:prstGeom prst="rect">
             <a:avLst/>
@@ -10943,8 +10997,8 @@
         </p:nvSpPr>
         <p:spPr>
           <a:xfrm>
-            <a:off x="8092440" y="5336500"/>
-            <a:ext cx="3474720" cy="629841"/>
+            <a:off x="8046720" y="5290780"/>
+            <a:ext cx="3566160" cy="629841"/>
           </a:xfrm>
           <a:prstGeom prst="rect">
             <a:avLst/>
@@ -11773,17 +11827,17 @@
         </p:nvSpPr>
         <p:spPr>
           <a:xfrm>
-            <a:off x="2439233" y="5791200"/>
-            <a:ext cx="7313414" cy="304800"/>
-          </a:xfrm>
-          <a:prstGeom prst="rect">
-            <a:avLst/>
-          </a:prstGeom>
-          <a:noFill/>
-          <a:ln/>
-        </p:spPr>
-        <p:txBody>
-          <a:bodyPr wrap="square" lIns="0" tIns="0" rIns="0" bIns="0" rtlCol="0" anchor="ctr"/>
+            <a:off x="609600" y="5791200"/>
+            <a:ext cx="10972800" cy="304800"/>
+          </a:xfrm>
+          <a:prstGeom prst="rect">
+            <a:avLst/>
+          </a:prstGeom>
+          <a:noFill/>
+          <a:ln/>
+        </p:spPr>
+        <p:txBody>
+          <a:bodyPr wrap="none" lIns="0" tIns="0" rIns="0" bIns="0" rtlCol="0" anchor="ctr"/>
           <a:lstStyle/>
           <a:p>
             <a:pPr algn="ctr" indent="0" marL="0">
@@ -19588,17 +19642,17 @@
         </p:nvSpPr>
         <p:spPr>
           <a:xfrm>
-            <a:off x="2439233" y="5791200"/>
-            <a:ext cx="7313414" cy="304800"/>
-          </a:xfrm>
-          <a:prstGeom prst="rect">
-            <a:avLst/>
-          </a:prstGeom>
-          <a:noFill/>
-          <a:ln/>
-        </p:spPr>
-        <p:txBody>
-          <a:bodyPr wrap="square" lIns="0" tIns="0" rIns="0" bIns="0" rtlCol="0" anchor="ctr"/>
+            <a:off x="609600" y="5791200"/>
+            <a:ext cx="10972800" cy="304800"/>
+          </a:xfrm>
+          <a:prstGeom prst="rect">
+            <a:avLst/>
+          </a:prstGeom>
+          <a:noFill/>
+          <a:ln/>
+        </p:spPr>
+        <p:txBody>
+          <a:bodyPr wrap="none" lIns="0" tIns="0" rIns="0" bIns="0" rtlCol="0" anchor="ctr"/>
           <a:lstStyle/>
           <a:p>
             <a:pPr algn="ctr" indent="0" marL="0">
@@ -21874,7 +21928,34 @@
       </p:sp>
       <p:sp>
         <p:nvSpPr>
-          <p:cNvPr id="13" name="Text 9"/>
+          <p:cNvPr id="13" name="Shape 9"/>
+          <p:cNvSpPr/>
+          <p:nvPr/>
+        </p:nvSpPr>
+        <p:spPr>
+          <a:xfrm>
+            <a:off x="441960" y="1950720"/>
+            <a:ext cx="7284720" cy="449580"/>
+          </a:xfrm>
+          <a:prstGeom prst="rect">
+            <a:avLst/>
+          </a:prstGeom>
+          <a:solidFill>
+            <a:srgbClr val="0F6674"/>
+          </a:solidFill>
+          <a:ln w="12700">
+            <a:solidFill>
+              <a:srgbClr val="0F6674">
+                <a:alpha val="0"/>
+              </a:srgbClr>
+            </a:solidFill>
+            <a:prstDash val="solid"/>
+          </a:ln>
+        </p:spPr>
+      </p:sp>
+      <p:sp>
+        <p:nvSpPr>
+          <p:cNvPr id="14" name="Text 10"/>
           <p:cNvSpPr/>
           <p:nvPr/>
         </p:nvSpPr>
@@ -21916,7 +21997,7 @@
       </p:sp>
       <p:sp>
         <p:nvSpPr>
-          <p:cNvPr id="14" name="Text 10"/>
+          <p:cNvPr id="15" name="Text 11"/>
           <p:cNvSpPr/>
           <p:nvPr/>
         </p:nvSpPr>
@@ -21958,7 +22039,7 @@
       </p:sp>
       <p:sp>
         <p:nvSpPr>
-          <p:cNvPr id="15" name="Text 11"/>
+          <p:cNvPr id="16" name="Text 12"/>
           <p:cNvSpPr/>
           <p:nvPr/>
         </p:nvSpPr>
@@ -22000,7 +22081,7 @@
       </p:sp>
       <p:sp>
         <p:nvSpPr>
-          <p:cNvPr id="16" name="Text 12"/>
+          <p:cNvPr id="17" name="Text 13"/>
           <p:cNvSpPr/>
           <p:nvPr/>
         </p:nvSpPr>
@@ -22042,7 +22123,7 @@
       </p:sp>
       <p:sp>
         <p:nvSpPr>
-          <p:cNvPr id="17" name="Text 13"/>
+          <p:cNvPr id="18" name="Text 14"/>
           <p:cNvSpPr/>
           <p:nvPr/>
         </p:nvSpPr>
@@ -22084,7 +22165,7 @@
       </p:sp>
       <p:sp>
         <p:nvSpPr>
-          <p:cNvPr id="18" name="Text 14"/>
+          <p:cNvPr id="19" name="Text 15"/>
           <p:cNvSpPr/>
           <p:nvPr/>
         </p:nvSpPr>
@@ -22126,7 +22207,7 @@
       </p:sp>
       <p:sp>
         <p:nvSpPr>
-          <p:cNvPr id="19" name="Text 15"/>
+          <p:cNvPr id="20" name="Text 16"/>
           <p:cNvSpPr/>
           <p:nvPr/>
         </p:nvSpPr>
@@ -22168,7 +22249,7 @@
       </p:sp>
       <p:sp>
         <p:nvSpPr>
-          <p:cNvPr id="20" name="Text 16"/>
+          <p:cNvPr id="21" name="Text 17"/>
           <p:cNvSpPr/>
           <p:nvPr/>
         </p:nvSpPr>
@@ -22210,7 +22291,7 @@
       </p:sp>
       <p:sp>
         <p:nvSpPr>
-          <p:cNvPr id="21" name="Text 17"/>
+          <p:cNvPr id="22" name="Text 18"/>
           <p:cNvSpPr/>
           <p:nvPr/>
         </p:nvSpPr>
@@ -22252,7 +22333,7 @@
       </p:sp>
       <p:sp>
         <p:nvSpPr>
-          <p:cNvPr id="22" name="Text 18"/>
+          <p:cNvPr id="23" name="Text 19"/>
           <p:cNvSpPr/>
           <p:nvPr/>
         </p:nvSpPr>
@@ -22294,7 +22375,7 @@
       </p:sp>
       <p:sp>
         <p:nvSpPr>
-          <p:cNvPr id="23" name="Shape 19"/>
+          <p:cNvPr id="24" name="Shape 20"/>
           <p:cNvSpPr/>
           <p:nvPr/>
         </p:nvSpPr>
@@ -22321,14 +22402,14 @@
       </p:sp>
       <p:sp>
         <p:nvSpPr>
-          <p:cNvPr id="24" name="Text 20"/>
-          <p:cNvSpPr/>
-          <p:nvPr/>
-        </p:nvSpPr>
-        <p:spPr>
-          <a:xfrm>
-            <a:off x="8092440" y="2118360"/>
-            <a:ext cx="3474720" cy="297180"/>
+          <p:cNvPr id="25" name="Text 21"/>
+          <p:cNvSpPr/>
+          <p:nvPr/>
+        </p:nvSpPr>
+        <p:spPr>
+          <a:xfrm>
+            <a:off x="8046720" y="2072640"/>
+            <a:ext cx="3566160" cy="297180"/>
           </a:xfrm>
           <a:prstGeom prst="rect">
             <a:avLst/>
@@ -22363,14 +22444,14 @@
       </p:sp>
       <p:sp>
         <p:nvSpPr>
-          <p:cNvPr id="25" name="Text 21"/>
-          <p:cNvSpPr/>
-          <p:nvPr/>
-        </p:nvSpPr>
-        <p:spPr>
-          <a:xfrm>
-            <a:off x="8092440" y="2522220"/>
-            <a:ext cx="3474720" cy="629841"/>
+          <p:cNvPr id="26" name="Text 22"/>
+          <p:cNvSpPr/>
+          <p:nvPr/>
+        </p:nvSpPr>
+        <p:spPr>
+          <a:xfrm>
+            <a:off x="8046720" y="2476500"/>
+            <a:ext cx="3566160" cy="629841"/>
           </a:xfrm>
           <a:prstGeom prst="rect">
             <a:avLst/>
@@ -22405,7 +22486,7 @@
       </p:sp>
       <p:sp>
         <p:nvSpPr>
-          <p:cNvPr id="26" name="Shape 22"/>
+          <p:cNvPr id="27" name="Shape 23"/>
           <p:cNvSpPr/>
           <p:nvPr/>
         </p:nvSpPr>
@@ -22432,14 +22513,14 @@
       </p:sp>
       <p:sp>
         <p:nvSpPr>
-          <p:cNvPr id="27" name="Text 23"/>
-          <p:cNvSpPr/>
-          <p:nvPr/>
-        </p:nvSpPr>
-        <p:spPr>
-          <a:xfrm>
-            <a:off x="8092440" y="3525441"/>
-            <a:ext cx="3474720" cy="297180"/>
+          <p:cNvPr id="28" name="Text 24"/>
+          <p:cNvSpPr/>
+          <p:nvPr/>
+        </p:nvSpPr>
+        <p:spPr>
+          <a:xfrm>
+            <a:off x="8046720" y="3479721"/>
+            <a:ext cx="3566160" cy="297180"/>
           </a:xfrm>
           <a:prstGeom prst="rect">
             <a:avLst/>
@@ -22474,14 +22555,14 @@
       </p:sp>
       <p:sp>
         <p:nvSpPr>
-          <p:cNvPr id="28" name="Text 24"/>
-          <p:cNvSpPr/>
-          <p:nvPr/>
-        </p:nvSpPr>
-        <p:spPr>
-          <a:xfrm>
-            <a:off x="8092440" y="3929301"/>
-            <a:ext cx="3474720" cy="629841"/>
+          <p:cNvPr id="29" name="Text 25"/>
+          <p:cNvSpPr/>
+          <p:nvPr/>
+        </p:nvSpPr>
+        <p:spPr>
+          <a:xfrm>
+            <a:off x="8046720" y="3883581"/>
+            <a:ext cx="3566160" cy="629841"/>
           </a:xfrm>
           <a:prstGeom prst="rect">
             <a:avLst/>
@@ -22516,7 +22597,7 @@
       </p:sp>
       <p:sp>
         <p:nvSpPr>
-          <p:cNvPr id="29" name="Shape 25"/>
+          <p:cNvPr id="30" name="Shape 26"/>
           <p:cNvSpPr/>
           <p:nvPr/>
         </p:nvSpPr>
@@ -22543,14 +22624,14 @@
       </p:sp>
       <p:sp>
         <p:nvSpPr>
-          <p:cNvPr id="30" name="Text 26"/>
-          <p:cNvSpPr/>
-          <p:nvPr/>
-        </p:nvSpPr>
-        <p:spPr>
-          <a:xfrm>
-            <a:off x="8092440" y="4932640"/>
-            <a:ext cx="3474720" cy="297180"/>
+          <p:cNvPr id="31" name="Text 27"/>
+          <p:cNvSpPr/>
+          <p:nvPr/>
+        </p:nvSpPr>
+        <p:spPr>
+          <a:xfrm>
+            <a:off x="8046720" y="4886920"/>
+            <a:ext cx="3566160" cy="297180"/>
           </a:xfrm>
           <a:prstGeom prst="rect">
             <a:avLst/>
@@ -22585,14 +22666,14 @@
       </p:sp>
       <p:sp>
         <p:nvSpPr>
-          <p:cNvPr id="31" name="Text 27"/>
-          <p:cNvSpPr/>
-          <p:nvPr/>
-        </p:nvSpPr>
-        <p:spPr>
-          <a:xfrm>
-            <a:off x="8092440" y="5336500"/>
-            <a:ext cx="3474720" cy="629841"/>
+          <p:cNvPr id="32" name="Text 28"/>
+          <p:cNvSpPr/>
+          <p:nvPr/>
+        </p:nvSpPr>
+        <p:spPr>
+          <a:xfrm>
+            <a:off x="8046720" y="5290780"/>
+            <a:ext cx="3566160" cy="629841"/>
           </a:xfrm>
           <a:prstGeom prst="rect">
             <a:avLst/>
@@ -22627,7 +22708,7 @@
       </p:sp>
       <p:sp>
         <p:nvSpPr>
-          <p:cNvPr id="32" name="Text 28"/>
+          <p:cNvPr id="33" name="Text 29"/>
           <p:cNvSpPr/>
           <p:nvPr/>
         </p:nvSpPr>
@@ -22669,7 +22750,7 @@
       </p:sp>
       <p:sp>
         <p:nvSpPr>
-          <p:cNvPr id="33" name="Text 29"/>
+          <p:cNvPr id="34" name="Text 30"/>
           <p:cNvSpPr/>
           <p:nvPr/>
         </p:nvSpPr>
@@ -22711,7 +22792,7 @@
       </p:sp>
       <p:sp>
         <p:nvSpPr>
-          <p:cNvPr id="34" name="Text 30"/>
+          <p:cNvPr id="35" name="Text 31"/>
           <p:cNvSpPr/>
           <p:nvPr/>
         </p:nvSpPr>
@@ -22753,7 +22834,7 @@
       </p:sp>
       <p:sp>
         <p:nvSpPr>
-          <p:cNvPr id="35" name="Shape 31"/>
+          <p:cNvPr id="36" name="Shape 32"/>
           <p:cNvSpPr/>
           <p:nvPr/>
         </p:nvSpPr>
@@ -23144,8 +23225,8 @@
         </p:nvSpPr>
         <p:spPr>
           <a:xfrm>
-            <a:off x="624840" y="2072640"/>
-            <a:ext cx="5196840" cy="330041"/>
+            <a:off x="579120" y="2072640"/>
+            <a:ext cx="5288280" cy="330041"/>
           </a:xfrm>
           <a:prstGeom prst="rect">
             <a:avLst/>
@@ -23193,8 +23274,8 @@
         </p:nvSpPr>
         <p:spPr>
           <a:xfrm>
-            <a:off x="624840" y="2509361"/>
-            <a:ext cx="5196840" cy="314920"/>
+            <a:off x="579120" y="2509361"/>
+            <a:ext cx="5288280" cy="314920"/>
           </a:xfrm>
           <a:prstGeom prst="rect">
             <a:avLst/>
@@ -23235,8 +23316,8 @@
         </p:nvSpPr>
         <p:spPr>
           <a:xfrm>
-            <a:off x="624840" y="2900482"/>
-            <a:ext cx="5196840" cy="314920"/>
+            <a:off x="579120" y="2900482"/>
+            <a:ext cx="5288280" cy="314920"/>
           </a:xfrm>
           <a:prstGeom prst="rect">
             <a:avLst/>
@@ -23277,8 +23358,8 @@
         </p:nvSpPr>
         <p:spPr>
           <a:xfrm>
-            <a:off x="624840" y="3291602"/>
-            <a:ext cx="5196840" cy="314920"/>
+            <a:off x="579120" y="3291602"/>
+            <a:ext cx="5288280" cy="314920"/>
           </a:xfrm>
           <a:prstGeom prst="rect">
             <a:avLst/>
@@ -23390,8 +23471,8 @@
         </p:nvSpPr>
         <p:spPr>
           <a:xfrm>
-            <a:off x="6370320" y="2072640"/>
-            <a:ext cx="5196840" cy="330041"/>
+            <a:off x="6324600" y="2072640"/>
+            <a:ext cx="5288280" cy="330041"/>
           </a:xfrm>
           <a:prstGeom prst="rect">
             <a:avLst/>
@@ -23439,8 +23520,8 @@
         </p:nvSpPr>
         <p:spPr>
           <a:xfrm>
-            <a:off x="6370320" y="2509361"/>
-            <a:ext cx="5196840" cy="314920"/>
+            <a:off x="6324600" y="2509361"/>
+            <a:ext cx="5288280" cy="314920"/>
           </a:xfrm>
           <a:prstGeom prst="rect">
             <a:avLst/>
@@ -23481,8 +23562,8 @@
         </p:nvSpPr>
         <p:spPr>
           <a:xfrm>
-            <a:off x="6370320" y="2900482"/>
-            <a:ext cx="5196840" cy="314920"/>
+            <a:off x="6324600" y="2900482"/>
+            <a:ext cx="5288280" cy="314920"/>
           </a:xfrm>
           <a:prstGeom prst="rect">
             <a:avLst/>
@@ -23523,8 +23604,8 @@
         </p:nvSpPr>
         <p:spPr>
           <a:xfrm>
-            <a:off x="6370320" y="3291602"/>
-            <a:ext cx="5196840" cy="314920"/>
+            <a:off x="6324600" y="3291602"/>
+            <a:ext cx="5288280" cy="314920"/>
           </a:xfrm>
           <a:prstGeom prst="rect">
             <a:avLst/>
@@ -23636,8 +23717,8 @@
         </p:nvSpPr>
         <p:spPr>
           <a:xfrm>
-            <a:off x="624840" y="4274820"/>
-            <a:ext cx="5196840" cy="330041"/>
+            <a:off x="579120" y="4274820"/>
+            <a:ext cx="5288280" cy="330041"/>
           </a:xfrm>
           <a:prstGeom prst="rect">
             <a:avLst/>
@@ -23685,8 +23766,8 @@
         </p:nvSpPr>
         <p:spPr>
           <a:xfrm>
-            <a:off x="624840" y="4711541"/>
-            <a:ext cx="5196840" cy="314920"/>
+            <a:off x="579120" y="4711541"/>
+            <a:ext cx="5288280" cy="314920"/>
           </a:xfrm>
           <a:prstGeom prst="rect">
             <a:avLst/>
@@ -23727,8 +23808,8 @@
         </p:nvSpPr>
         <p:spPr>
           <a:xfrm>
-            <a:off x="624840" y="5102662"/>
-            <a:ext cx="5196840" cy="314920"/>
+            <a:off x="579120" y="5102662"/>
+            <a:ext cx="5288280" cy="314920"/>
           </a:xfrm>
           <a:prstGeom prst="rect">
             <a:avLst/>
@@ -23769,8 +23850,8 @@
         </p:nvSpPr>
         <p:spPr>
           <a:xfrm>
-            <a:off x="624840" y="5493782"/>
-            <a:ext cx="5196840" cy="314920"/>
+            <a:off x="579120" y="5493782"/>
+            <a:ext cx="5288280" cy="314920"/>
           </a:xfrm>
           <a:prstGeom prst="rect">
             <a:avLst/>
@@ -23882,8 +23963,8 @@
         </p:nvSpPr>
         <p:spPr>
           <a:xfrm>
-            <a:off x="6370320" y="4274820"/>
-            <a:ext cx="5196840" cy="330041"/>
+            <a:off x="6324600" y="4274820"/>
+            <a:ext cx="5288280" cy="330041"/>
           </a:xfrm>
           <a:prstGeom prst="rect">
             <a:avLst/>
@@ -23931,8 +24012,8 @@
         </p:nvSpPr>
         <p:spPr>
           <a:xfrm>
-            <a:off x="6370320" y="4711541"/>
-            <a:ext cx="5196840" cy="314920"/>
+            <a:off x="6324600" y="4711541"/>
+            <a:ext cx="5288280" cy="314920"/>
           </a:xfrm>
           <a:prstGeom prst="rect">
             <a:avLst/>
@@ -23973,8 +24054,8 @@
         </p:nvSpPr>
         <p:spPr>
           <a:xfrm>
-            <a:off x="6370320" y="5102662"/>
-            <a:ext cx="5196840" cy="314920"/>
+            <a:off x="6324600" y="5102662"/>
+            <a:ext cx="5288280" cy="314920"/>
           </a:xfrm>
           <a:prstGeom prst="rect">
             <a:avLst/>
@@ -24015,8 +24096,8 @@
         </p:nvSpPr>
         <p:spPr>
           <a:xfrm>
-            <a:off x="6370320" y="5493782"/>
-            <a:ext cx="5196840" cy="314920"/>
+            <a:off x="6324600" y="5493782"/>
+            <a:ext cx="5288280" cy="314920"/>
           </a:xfrm>
           <a:prstGeom prst="rect">
             <a:avLst/>
@@ -24799,7 +24880,34 @@
       </p:sp>
       <p:sp>
         <p:nvSpPr>
-          <p:cNvPr id="13" name="Text 9"/>
+          <p:cNvPr id="13" name="Shape 9"/>
+          <p:cNvSpPr/>
+          <p:nvPr/>
+        </p:nvSpPr>
+        <p:spPr>
+          <a:xfrm>
+            <a:off x="441960" y="1950720"/>
+            <a:ext cx="3647361" cy="449580"/>
+          </a:xfrm>
+          <a:prstGeom prst="rect">
+            <a:avLst/>
+          </a:prstGeom>
+          <a:solidFill>
+            <a:srgbClr val="0F6674"/>
+          </a:solidFill>
+          <a:ln w="12700">
+            <a:solidFill>
+              <a:srgbClr val="0F6674">
+                <a:alpha val="0"/>
+              </a:srgbClr>
+            </a:solidFill>
+            <a:prstDash val="solid"/>
+          </a:ln>
+        </p:spPr>
+      </p:sp>
+      <p:sp>
+        <p:nvSpPr>
+          <p:cNvPr id="14" name="Text 10"/>
           <p:cNvSpPr/>
           <p:nvPr/>
         </p:nvSpPr>
@@ -24841,7 +24949,7 @@
       </p:sp>
       <p:sp>
         <p:nvSpPr>
-          <p:cNvPr id="14" name="Text 10"/>
+          <p:cNvPr id="15" name="Text 11"/>
           <p:cNvSpPr/>
           <p:nvPr/>
         </p:nvSpPr>
@@ -24883,7 +24991,7 @@
       </p:sp>
       <p:sp>
         <p:nvSpPr>
-          <p:cNvPr id="15" name="Text 11"/>
+          <p:cNvPr id="16" name="Text 12"/>
           <p:cNvSpPr/>
           <p:nvPr/>
         </p:nvSpPr>
@@ -24925,7 +25033,7 @@
       </p:sp>
       <p:sp>
         <p:nvSpPr>
-          <p:cNvPr id="16" name="Text 12"/>
+          <p:cNvPr id="17" name="Text 13"/>
           <p:cNvSpPr/>
           <p:nvPr/>
         </p:nvSpPr>
@@ -24967,7 +25075,7 @@
       </p:sp>
       <p:sp>
         <p:nvSpPr>
-          <p:cNvPr id="17" name="Text 13"/>
+          <p:cNvPr id="18" name="Text 14"/>
           <p:cNvSpPr/>
           <p:nvPr/>
         </p:nvSpPr>
@@ -25009,7 +25117,7 @@
       </p:sp>
       <p:sp>
         <p:nvSpPr>
-          <p:cNvPr id="18" name="Shape 14"/>
+          <p:cNvPr id="19" name="Shape 15"/>
           <p:cNvSpPr/>
           <p:nvPr/>
         </p:nvSpPr>
@@ -25036,7 +25144,34 @@
       </p:sp>
       <p:sp>
         <p:nvSpPr>
-          <p:cNvPr id="19" name="Text 15"/>
+          <p:cNvPr id="20" name="Shape 16"/>
+          <p:cNvSpPr/>
+          <p:nvPr/>
+        </p:nvSpPr>
+        <p:spPr>
+          <a:xfrm>
+            <a:off x="4272201" y="1950720"/>
+            <a:ext cx="3647480" cy="449580"/>
+          </a:xfrm>
+          <a:prstGeom prst="rect">
+            <a:avLst/>
+          </a:prstGeom>
+          <a:solidFill>
+            <a:srgbClr val="0F6674"/>
+          </a:solidFill>
+          <a:ln w="12700">
+            <a:solidFill>
+              <a:srgbClr val="0F6674">
+                <a:alpha val="0"/>
+              </a:srgbClr>
+            </a:solidFill>
+            <a:prstDash val="solid"/>
+          </a:ln>
+        </p:spPr>
+      </p:sp>
+      <p:sp>
+        <p:nvSpPr>
+          <p:cNvPr id="21" name="Text 17"/>
           <p:cNvSpPr/>
           <p:nvPr/>
         </p:nvSpPr>
@@ -25078,7 +25213,7 @@
       </p:sp>
       <p:sp>
         <p:nvSpPr>
-          <p:cNvPr id="20" name="Text 16"/>
+          <p:cNvPr id="22" name="Text 18"/>
           <p:cNvSpPr/>
           <p:nvPr/>
         </p:nvSpPr>
@@ -25120,7 +25255,7 @@
       </p:sp>
       <p:sp>
         <p:nvSpPr>
-          <p:cNvPr id="21" name="Text 17"/>
+          <p:cNvPr id="23" name="Text 19"/>
           <p:cNvSpPr/>
           <p:nvPr/>
         </p:nvSpPr>
@@ -25162,7 +25297,7 @@
       </p:sp>
       <p:sp>
         <p:nvSpPr>
-          <p:cNvPr id="22" name="Text 18"/>
+          <p:cNvPr id="24" name="Text 20"/>
           <p:cNvSpPr/>
           <p:nvPr/>
         </p:nvSpPr>
@@ -25204,7 +25339,7 @@
       </p:sp>
       <p:sp>
         <p:nvSpPr>
-          <p:cNvPr id="23" name="Text 19"/>
+          <p:cNvPr id="25" name="Text 21"/>
           <p:cNvSpPr/>
           <p:nvPr/>
         </p:nvSpPr>
@@ -25246,7 +25381,7 @@
       </p:sp>
       <p:sp>
         <p:nvSpPr>
-          <p:cNvPr id="24" name="Shape 20"/>
+          <p:cNvPr id="26" name="Shape 22"/>
           <p:cNvSpPr/>
           <p:nvPr/>
         </p:nvSpPr>
@@ -25273,7 +25408,34 @@
       </p:sp>
       <p:sp>
         <p:nvSpPr>
-          <p:cNvPr id="25" name="Text 21"/>
+          <p:cNvPr id="27" name="Shape 23"/>
+          <p:cNvSpPr/>
+          <p:nvPr/>
+        </p:nvSpPr>
+        <p:spPr>
+          <a:xfrm>
+            <a:off x="8102560" y="1950720"/>
+            <a:ext cx="3647361" cy="449580"/>
+          </a:xfrm>
+          <a:prstGeom prst="rect">
+            <a:avLst/>
+          </a:prstGeom>
+          <a:solidFill>
+            <a:srgbClr val="0F6674"/>
+          </a:solidFill>
+          <a:ln w="12700">
+            <a:solidFill>
+              <a:srgbClr val="0F6674">
+                <a:alpha val="0"/>
+              </a:srgbClr>
+            </a:solidFill>
+            <a:prstDash val="solid"/>
+          </a:ln>
+        </p:spPr>
+      </p:sp>
+      <p:sp>
+        <p:nvSpPr>
+          <p:cNvPr id="28" name="Text 24"/>
           <p:cNvSpPr/>
           <p:nvPr/>
         </p:nvSpPr>
@@ -25315,7 +25477,7 @@
       </p:sp>
       <p:sp>
         <p:nvSpPr>
-          <p:cNvPr id="26" name="Text 22"/>
+          <p:cNvPr id="29" name="Text 25"/>
           <p:cNvSpPr/>
           <p:nvPr/>
         </p:nvSpPr>
@@ -25357,7 +25519,7 @@
       </p:sp>
       <p:sp>
         <p:nvSpPr>
-          <p:cNvPr id="27" name="Text 23"/>
+          <p:cNvPr id="30" name="Text 26"/>
           <p:cNvSpPr/>
           <p:nvPr/>
         </p:nvSpPr>
@@ -25399,7 +25561,7 @@
       </p:sp>
       <p:sp>
         <p:nvSpPr>
-          <p:cNvPr id="28" name="Text 24"/>
+          <p:cNvPr id="31" name="Text 27"/>
           <p:cNvSpPr/>
           <p:nvPr/>
         </p:nvSpPr>
@@ -25441,7 +25603,7 @@
       </p:sp>
       <p:sp>
         <p:nvSpPr>
-          <p:cNvPr id="29" name="Text 25"/>
+          <p:cNvPr id="32" name="Text 28"/>
           <p:cNvSpPr/>
           <p:nvPr/>
         </p:nvSpPr>
@@ -25483,7 +25645,7 @@
       </p:sp>
       <p:sp>
         <p:nvSpPr>
-          <p:cNvPr id="30" name="Shape 26"/>
+          <p:cNvPr id="33" name="Shape 29"/>
           <p:cNvSpPr/>
           <p:nvPr/>
         </p:nvSpPr>
@@ -25510,23 +25672,23 @@
       </p:sp>
       <p:sp>
         <p:nvSpPr>
-          <p:cNvPr id="31" name="Text 27"/>
-          <p:cNvSpPr/>
-          <p:nvPr/>
-        </p:nvSpPr>
-        <p:spPr>
-          <a:xfrm>
-            <a:off x="2642354" y="5791200"/>
-            <a:ext cx="6907173" cy="304800"/>
-          </a:xfrm>
-          <a:prstGeom prst="rect">
-            <a:avLst/>
-          </a:prstGeom>
-          <a:noFill/>
-          <a:ln/>
-        </p:spPr>
-        <p:txBody>
-          <a:bodyPr wrap="square" lIns="0" tIns="0" rIns="0" bIns="0" rtlCol="0" anchor="ctr"/>
+          <p:cNvPr id="34" name="Text 30"/>
+          <p:cNvSpPr/>
+          <p:nvPr/>
+        </p:nvSpPr>
+        <p:spPr>
+          <a:xfrm>
+            <a:off x="609600" y="5791200"/>
+            <a:ext cx="10972800" cy="304800"/>
+          </a:xfrm>
+          <a:prstGeom prst="rect">
+            <a:avLst/>
+          </a:prstGeom>
+          <a:noFill/>
+          <a:ln/>
+        </p:spPr>
+        <p:txBody>
+          <a:bodyPr wrap="none" lIns="0" tIns="0" rIns="0" bIns="0" rtlCol="0" anchor="ctr"/>
           <a:lstStyle/>
           <a:p>
             <a:pPr algn="ctr" indent="0" marL="0">
@@ -25552,7 +25714,7 @@
       </p:sp>
       <p:sp>
         <p:nvSpPr>
-          <p:cNvPr id="32" name="Text 28"/>
+          <p:cNvPr id="35" name="Text 31"/>
           <p:cNvSpPr/>
           <p:nvPr/>
         </p:nvSpPr>
@@ -25594,7 +25756,7 @@
       </p:sp>
       <p:sp>
         <p:nvSpPr>
-          <p:cNvPr id="33" name="Text 29"/>
+          <p:cNvPr id="36" name="Text 32"/>
           <p:cNvSpPr/>
           <p:nvPr/>
         </p:nvSpPr>
@@ -25636,7 +25798,7 @@
       </p:sp>
       <p:sp>
         <p:nvSpPr>
-          <p:cNvPr id="34" name="Text 30"/>
+          <p:cNvPr id="37" name="Text 33"/>
           <p:cNvSpPr/>
           <p:nvPr/>
         </p:nvSpPr>
@@ -25678,7 +25840,7 @@
       </p:sp>
       <p:sp>
         <p:nvSpPr>
-          <p:cNvPr id="35" name="Shape 31"/>
+          <p:cNvPr id="38" name="Shape 34"/>
           <p:cNvSpPr/>
           <p:nvPr/>
         </p:nvSpPr>
@@ -26604,17 +26766,17 @@
         </p:nvSpPr>
         <p:spPr>
           <a:xfrm>
-            <a:off x="2540794" y="5791200"/>
-            <a:ext cx="7110293" cy="304800"/>
-          </a:xfrm>
-          <a:prstGeom prst="rect">
-            <a:avLst/>
-          </a:prstGeom>
-          <a:noFill/>
-          <a:ln/>
-        </p:spPr>
-        <p:txBody>
-          <a:bodyPr wrap="square" lIns="0" tIns="0" rIns="0" bIns="0" rtlCol="0" anchor="ctr"/>
+            <a:off x="609600" y="5791200"/>
+            <a:ext cx="10972800" cy="304800"/>
+          </a:xfrm>
+          <a:prstGeom prst="rect">
+            <a:avLst/>
+          </a:prstGeom>
+          <a:noFill/>
+          <a:ln/>
+        </p:spPr>
+        <p:txBody>
+          <a:bodyPr wrap="none" lIns="0" tIns="0" rIns="0" bIns="0" rtlCol="0" anchor="ctr"/>
           <a:lstStyle/>
           <a:p>
             <a:pPr algn="ctr" indent="0" marL="0">
@@ -27719,8 +27881,8 @@
         </p:nvSpPr>
         <p:spPr>
           <a:xfrm>
-            <a:off x="624840" y="4983480"/>
-            <a:ext cx="3393400" cy="297180"/>
+            <a:off x="579120" y="4937760"/>
+            <a:ext cx="3484840" cy="297180"/>
           </a:xfrm>
           <a:prstGeom prst="rect">
             <a:avLst/>
@@ -27761,8 +27923,8 @@
         </p:nvSpPr>
         <p:spPr>
           <a:xfrm>
-            <a:off x="624840" y="5387340"/>
-            <a:ext cx="3393400" cy="487680"/>
+            <a:off x="579120" y="5341620"/>
+            <a:ext cx="3484840" cy="487680"/>
           </a:xfrm>
           <a:prstGeom prst="rect">
             <a:avLst/>
@@ -27830,8 +27992,8 @@
         </p:nvSpPr>
         <p:spPr>
           <a:xfrm>
-            <a:off x="4384000" y="4983480"/>
-            <a:ext cx="3393400" cy="297180"/>
+            <a:off x="4338280" y="4937760"/>
+            <a:ext cx="3484840" cy="297180"/>
           </a:xfrm>
           <a:prstGeom prst="rect">
             <a:avLst/>
@@ -27872,8 +28034,8 @@
         </p:nvSpPr>
         <p:spPr>
           <a:xfrm>
-            <a:off x="4384000" y="5387340"/>
-            <a:ext cx="3393400" cy="495776"/>
+            <a:off x="4338280" y="5341620"/>
+            <a:ext cx="3484840" cy="495776"/>
           </a:xfrm>
           <a:prstGeom prst="rect">
             <a:avLst/>
@@ -27941,8 +28103,8 @@
         </p:nvSpPr>
         <p:spPr>
           <a:xfrm>
-            <a:off x="8143161" y="4983480"/>
-            <a:ext cx="3393519" cy="297180"/>
+            <a:off x="8097441" y="4937760"/>
+            <a:ext cx="3484959" cy="297180"/>
           </a:xfrm>
           <a:prstGeom prst="rect">
             <a:avLst/>
@@ -27983,8 +28145,8 @@
         </p:nvSpPr>
         <p:spPr>
           <a:xfrm>
-            <a:off x="8143161" y="5387340"/>
-            <a:ext cx="3393519" cy="487680"/>
+            <a:off x="8097441" y="5341620"/>
+            <a:ext cx="3484959" cy="487680"/>
           </a:xfrm>
           <a:prstGeom prst="rect">
             <a:avLst/>
@@ -28202,9 +28364,213 @@
           <a:chExt cx="0" cy="0"/>
         </a:xfrm>
       </p:grpSpPr>
+      <p:sp>
+        <p:nvSpPr>
+          <p:cNvPr id="3" name="Shape 0"/>
+          <p:cNvSpPr/>
+          <p:nvPr/>
+        </p:nvSpPr>
+        <p:spPr>
+          <a:xfrm>
+            <a:off x="0" y="0"/>
+            <a:ext cx="9753600" cy="53340"/>
+          </a:xfrm>
+          <a:prstGeom prst="rect">
+            <a:avLst/>
+          </a:prstGeom>
+          <a:solidFill>
+            <a:srgbClr val="0F6674"/>
+          </a:solidFill>
+          <a:ln w="12700">
+            <a:solidFill>
+              <a:srgbClr val="0F6674">
+                <a:alpha val="0"/>
+              </a:srgbClr>
+            </a:solidFill>
+            <a:prstDash val="solid"/>
+          </a:ln>
+        </p:spPr>
+      </p:sp>
+      <p:sp>
+        <p:nvSpPr>
+          <p:cNvPr id="4" name="Shape 1"/>
+          <p:cNvSpPr/>
+          <p:nvPr/>
+        </p:nvSpPr>
+        <p:spPr>
+          <a:xfrm>
+            <a:off x="9753600" y="0"/>
+            <a:ext cx="2438400" cy="53340"/>
+          </a:xfrm>
+          <a:prstGeom prst="rect">
+            <a:avLst/>
+          </a:prstGeom>
+          <a:solidFill>
+            <a:srgbClr val="0F6674"/>
+          </a:solidFill>
+          <a:ln w="12700">
+            <a:solidFill>
+              <a:srgbClr val="0F6674">
+                <a:alpha val="0"/>
+              </a:srgbClr>
+            </a:solidFill>
+            <a:prstDash val="solid"/>
+          </a:ln>
+        </p:spPr>
+      </p:sp>
+      <p:sp>
+        <p:nvSpPr>
+          <p:cNvPr id="5" name="Shape 2"/>
+          <p:cNvSpPr/>
+          <p:nvPr/>
+        </p:nvSpPr>
+        <p:spPr>
+          <a:xfrm>
+            <a:off x="441960" y="259080"/>
+            <a:ext cx="289560" cy="228600"/>
+          </a:xfrm>
+          <a:prstGeom prst="rect">
+            <a:avLst/>
+          </a:prstGeom>
+          <a:solidFill>
+            <a:srgbClr val="EDF6F5"/>
+          </a:solidFill>
+          <a:ln w="12700">
+            <a:solidFill>
+              <a:srgbClr val="EDF6F5">
+                <a:alpha val="0"/>
+              </a:srgbClr>
+            </a:solidFill>
+            <a:prstDash val="solid"/>
+          </a:ln>
+        </p:spPr>
+      </p:sp>
+      <p:sp>
+        <p:nvSpPr>
+          <p:cNvPr id="6" name="Text 3"/>
+          <p:cNvSpPr/>
+          <p:nvPr/>
+        </p:nvSpPr>
+        <p:spPr>
+          <a:xfrm>
+            <a:off x="480060" y="259080"/>
+            <a:ext cx="213360" cy="228600"/>
+          </a:xfrm>
+          <a:prstGeom prst="rect">
+            <a:avLst/>
+          </a:prstGeom>
+          <a:noFill/>
+          <a:ln/>
+        </p:spPr>
+        <p:txBody>
+          <a:bodyPr wrap="none" lIns="0" tIns="0" rIns="0" bIns="0" rtlCol="0" anchor="ctr"/>
+          <a:lstStyle/>
+          <a:p>
+            <a:pPr algn="l" indent="0" marL="0">
+              <a:buNone/>
+            </a:pPr>
+            <a:r>
+              <a:rPr lang="en-US" sz="1200" b="1" dirty="0">
+                <a:solidFill>
+                  <a:srgbClr val="0F6674"/>
+                </a:solidFill>
+                <a:latin typeface="Arial" pitchFamily="34" charset="0"/>
+                <a:ea typeface="Arial" pitchFamily="34" charset="-122"/>
+                <a:cs typeface="Arial" pitchFamily="34" charset="-120"/>
+              </a:rPr>
+              <a:t>03</a:t>
+            </a:r>
+            <a:endParaRPr lang="en-US" sz="1200" dirty="0"/>
+          </a:p>
+        </p:txBody>
+      </p:sp>
+      <p:sp>
+        <p:nvSpPr>
+          <p:cNvPr id="7" name="Text 4"/>
+          <p:cNvSpPr/>
+          <p:nvPr/>
+        </p:nvSpPr>
+        <p:spPr>
+          <a:xfrm>
+            <a:off x="838200" y="235625"/>
+            <a:ext cx="9768840" cy="275511"/>
+          </a:xfrm>
+          <a:prstGeom prst="rect">
+            <a:avLst/>
+          </a:prstGeom>
+          <a:noFill/>
+          <a:ln/>
+        </p:spPr>
+        <p:txBody>
+          <a:bodyPr wrap="none" lIns="0" tIns="0" rIns="0" bIns="0" rtlCol="0" anchor="ctr"/>
+          <a:lstStyle/>
+          <a:p>
+            <a:pPr algn="l" indent="0" marL="0">
+              <a:lnSpc>
+                <a:spcPts val="2170"/>
+              </a:lnSpc>
+              <a:buNone/>
+            </a:pPr>
+            <a:r>
+              <a:rPr lang="en-US" sz="1400" b="1" dirty="0">
+                <a:solidFill>
+                  <a:srgbClr val="0F6674"/>
+                </a:solidFill>
+                <a:latin typeface="Microsoft YaHei" pitchFamily="34" charset="0"/>
+                <a:ea typeface="Microsoft YaHei" pitchFamily="34" charset="-122"/>
+                <a:cs typeface="Microsoft YaHei" pitchFamily="34" charset="-120"/>
+              </a:rPr>
+              <a:t>预览与演示</a:t>
+            </a:r>
+            <a:endParaRPr lang="en-US" sz="1400" dirty="0"/>
+          </a:p>
+        </p:txBody>
+      </p:sp>
+      <p:sp>
+        <p:nvSpPr>
+          <p:cNvPr id="8" name="Text 5"/>
+          <p:cNvSpPr/>
+          <p:nvPr/>
+        </p:nvSpPr>
+        <p:spPr>
+          <a:xfrm>
+            <a:off x="441960" y="609600"/>
+            <a:ext cx="10165080" cy="433864"/>
+          </a:xfrm>
+          <a:prstGeom prst="rect">
+            <a:avLst/>
+          </a:prstGeom>
+          <a:noFill/>
+          <a:ln/>
+        </p:spPr>
+        <p:txBody>
+          <a:bodyPr wrap="none" lIns="0" tIns="0" rIns="0" bIns="0" rtlCol="0" anchor="ctr"/>
+          <a:lstStyle/>
+          <a:p>
+            <a:pPr algn="l" indent="0" marL="0">
+              <a:lnSpc>
+                <a:spcPts val="3416"/>
+              </a:lnSpc>
+              <a:buNone/>
+            </a:pPr>
+            <a:r>
+              <a:rPr lang="en-US" sz="2800" b="1" dirty="0">
+                <a:solidFill>
+                  <a:srgbClr val="0F6674"/>
+                </a:solidFill>
+                <a:latin typeface="Microsoft YaHei" pitchFamily="34" charset="0"/>
+                <a:ea typeface="Microsoft YaHei" pitchFamily="34" charset="-122"/>
+                <a:cs typeface="Microsoft YaHei" pitchFamily="34" charset="-120"/>
+              </a:rPr>
+              <a:t>阶段总结与后续计划</a:t>
+            </a:r>
+            <a:endParaRPr lang="en-US" sz="2800" dirty="0"/>
+          </a:p>
+        </p:txBody>
+      </p:sp>
       <p:pic>
         <p:nvPicPr>
-          <p:cNvPr id="3" name="Image 0" descr="preencoded.png">    </p:cNvPr>
+          <p:cNvPr id="9" name="Image 0" descr="preencoded.png">    </p:cNvPr>
           <p:cNvPicPr>
             <a:picLocks noChangeAspect="1"/>
           </p:cNvPicPr>
@@ -28218,8 +28584,8 @@
         </p:blipFill>
         <p:spPr>
           <a:xfrm>
-            <a:off x="0" y="0"/>
-            <a:ext cx="12192000" cy="6858000"/>
+            <a:off x="10835640" y="201930"/>
+            <a:ext cx="914400" cy="914400"/>
           </a:xfrm>
           <a:prstGeom prst="rect">
             <a:avLst/>
@@ -28228,130 +28594,34 @@
       </p:pic>
       <p:sp>
         <p:nvSpPr>
-          <p:cNvPr id="4" name="Text 0"/>
-          <p:cNvSpPr/>
-          <p:nvPr/>
-        </p:nvSpPr>
-        <p:spPr>
-          <a:xfrm>
-            <a:off x="480060" y="259080"/>
-            <a:ext cx="213360" cy="228600"/>
-          </a:xfrm>
-          <a:prstGeom prst="rect">
-            <a:avLst/>
-          </a:prstGeom>
-          <a:noFill/>
-          <a:ln/>
-        </p:spPr>
-        <p:txBody>
-          <a:bodyPr wrap="none" lIns="0" tIns="0" rIns="0" bIns="0" rtlCol="0" anchor="ctr"/>
-          <a:lstStyle/>
-          <a:p>
-            <a:pPr algn="l" indent="0" marL="0">
-              <a:buNone/>
-            </a:pPr>
-            <a:r>
-              <a:rPr lang="en-US" sz="1200" b="1" dirty="0">
-                <a:solidFill>
-                  <a:srgbClr val="0F6674"/>
-                </a:solidFill>
-                <a:latin typeface="Arial" pitchFamily="34" charset="0"/>
-                <a:ea typeface="Arial" pitchFamily="34" charset="-122"/>
-                <a:cs typeface="Arial" pitchFamily="34" charset="-120"/>
-              </a:rPr>
-              <a:t>03</a:t>
-            </a:r>
-            <a:endParaRPr lang="en-US" sz="1200" dirty="0"/>
-          </a:p>
-        </p:txBody>
-      </p:sp>
-      <p:sp>
-        <p:nvSpPr>
-          <p:cNvPr id="5" name="Text 1"/>
-          <p:cNvSpPr/>
-          <p:nvPr/>
-        </p:nvSpPr>
-        <p:spPr>
-          <a:xfrm>
-            <a:off x="838200" y="235625"/>
-            <a:ext cx="9768840" cy="275511"/>
-          </a:xfrm>
-          <a:prstGeom prst="rect">
-            <a:avLst/>
-          </a:prstGeom>
-          <a:noFill/>
-          <a:ln/>
-        </p:spPr>
-        <p:txBody>
-          <a:bodyPr wrap="none" lIns="0" tIns="0" rIns="0" bIns="0" rtlCol="0" anchor="ctr"/>
-          <a:lstStyle/>
-          <a:p>
-            <a:pPr algn="l" indent="0" marL="0">
-              <a:lnSpc>
-                <a:spcPts val="2170"/>
-              </a:lnSpc>
-              <a:buNone/>
-            </a:pPr>
-            <a:r>
-              <a:rPr lang="en-US" sz="1400" b="1" dirty="0">
-                <a:solidFill>
-                  <a:srgbClr val="40647D"/>
-                </a:solidFill>
-                <a:latin typeface="Microsoft YaHei" pitchFamily="34" charset="0"/>
-                <a:ea typeface="Microsoft YaHei" pitchFamily="34" charset="-122"/>
-                <a:cs typeface="Microsoft YaHei" pitchFamily="34" charset="-120"/>
-              </a:rPr>
-              <a:t>预览与演示</a:t>
-            </a:r>
-            <a:endParaRPr lang="en-US" sz="1400" dirty="0"/>
-          </a:p>
-        </p:txBody>
-      </p:sp>
-      <p:sp>
-        <p:nvSpPr>
-          <p:cNvPr id="6" name="Text 2"/>
-          <p:cNvSpPr/>
-          <p:nvPr/>
-        </p:nvSpPr>
-        <p:spPr>
-          <a:xfrm>
-            <a:off x="441960" y="609600"/>
-            <a:ext cx="10165080" cy="433864"/>
-          </a:xfrm>
-          <a:prstGeom prst="rect">
-            <a:avLst/>
-          </a:prstGeom>
-          <a:noFill/>
-          <a:ln/>
-        </p:spPr>
-        <p:txBody>
-          <a:bodyPr wrap="none" lIns="0" tIns="0" rIns="0" bIns="0" rtlCol="0" anchor="ctr"/>
-          <a:lstStyle/>
-          <a:p>
-            <a:pPr algn="l" indent="0" marL="0">
-              <a:lnSpc>
-                <a:spcPts val="3416"/>
-              </a:lnSpc>
-              <a:buNone/>
-            </a:pPr>
-            <a:r>
-              <a:rPr lang="en-US" sz="2800" b="1" dirty="0">
-                <a:solidFill>
-                  <a:srgbClr val="0F6674"/>
-                </a:solidFill>
-                <a:latin typeface="Microsoft YaHei" pitchFamily="34" charset="0"/>
-                <a:ea typeface="Microsoft YaHei" pitchFamily="34" charset="-122"/>
-                <a:cs typeface="Microsoft YaHei" pitchFamily="34" charset="-120"/>
-              </a:rPr>
-              <a:t>阶段总结与后续计划</a:t>
-            </a:r>
-            <a:endParaRPr lang="en-US" sz="2800" dirty="0"/>
-          </a:p>
-        </p:txBody>
-      </p:sp>
-      <p:sp>
-        <p:nvSpPr>
-          <p:cNvPr id="7" name="Text 3"/>
+          <p:cNvPr id="10" name="Shape 6"/>
+          <p:cNvSpPr/>
+          <p:nvPr/>
+        </p:nvSpPr>
+        <p:spPr>
+          <a:xfrm>
+            <a:off x="441960" y="1264920"/>
+            <a:ext cx="11308080" cy="15240"/>
+          </a:xfrm>
+          <a:prstGeom prst="rect">
+            <a:avLst/>
+          </a:prstGeom>
+          <a:solidFill>
+            <a:srgbClr val="0F6674"/>
+          </a:solidFill>
+          <a:ln w="12700">
+            <a:solidFill>
+              <a:srgbClr val="0F6674">
+                <a:alpha val="0"/>
+              </a:srgbClr>
+            </a:solidFill>
+            <a:prstDash val="solid"/>
+          </a:ln>
+        </p:spPr>
+      </p:sp>
+      <p:sp>
+        <p:nvSpPr>
+          <p:cNvPr id="11" name="Text 7"/>
           <p:cNvSpPr/>
           <p:nvPr/>
         </p:nvSpPr>
@@ -28393,14 +28663,14 @@
       </p:sp>
       <p:sp>
         <p:nvSpPr>
-          <p:cNvPr id="8" name="Text 4"/>
-          <p:cNvSpPr/>
-          <p:nvPr/>
-        </p:nvSpPr>
-        <p:spPr>
-          <a:xfrm>
-            <a:off x="441960" y="1945600"/>
-            <a:ext cx="5516880" cy="330041"/>
+          <p:cNvPr id="12" name="Text 8"/>
+          <p:cNvSpPr/>
+          <p:nvPr/>
+        </p:nvSpPr>
+        <p:spPr>
+          <a:xfrm>
+            <a:off x="441960" y="1950720"/>
+            <a:ext cx="5379720" cy="330041"/>
           </a:xfrm>
           <a:prstGeom prst="rect">
             <a:avLst/>
@@ -28435,14 +28705,41 @@
       </p:sp>
       <p:sp>
         <p:nvSpPr>
-          <p:cNvPr id="9" name="Text 5"/>
-          <p:cNvSpPr/>
-          <p:nvPr/>
-        </p:nvSpPr>
-        <p:spPr>
-          <a:xfrm>
-            <a:off x="922020" y="2501503"/>
-            <a:ext cx="4892040" cy="308610"/>
+          <p:cNvPr id="13" name="Shape 9"/>
+          <p:cNvSpPr/>
+          <p:nvPr/>
+        </p:nvSpPr>
+        <p:spPr>
+          <a:xfrm>
+            <a:off x="441960" y="2402681"/>
+            <a:ext cx="5379720" cy="1195507"/>
+          </a:xfrm>
+          <a:prstGeom prst="rect">
+            <a:avLst/>
+          </a:prstGeom>
+          <a:solidFill>
+            <a:srgbClr val="EDF6F5"/>
+          </a:solidFill>
+          <a:ln w="12700">
+            <a:solidFill>
+              <a:srgbClr val="EDF6F5">
+                <a:alpha val="0"/>
+              </a:srgbClr>
+            </a:solidFill>
+            <a:prstDash val="solid"/>
+          </a:ln>
+        </p:spPr>
+      </p:sp>
+      <p:sp>
+        <p:nvSpPr>
+          <p:cNvPr id="14" name="Text 10"/>
+          <p:cNvSpPr/>
+          <p:nvPr/>
+        </p:nvSpPr>
+        <p:spPr>
+          <a:xfrm>
+            <a:off x="579120" y="2524601"/>
+            <a:ext cx="5105400" cy="297180"/>
           </a:xfrm>
           <a:prstGeom prst="rect">
             <a:avLst/>
@@ -28456,7 +28753,7 @@
           <a:p>
             <a:pPr algn="l" indent="0" marL="0">
               <a:lnSpc>
-                <a:spcPts val="2430"/>
+                <a:spcPts val="2340"/>
               </a:lnSpc>
               <a:buNone/>
             </a:pPr>
@@ -28477,14 +28774,83 @@
       </p:sp>
       <p:sp>
         <p:nvSpPr>
-          <p:cNvPr id="10" name="Text 6"/>
-          <p:cNvSpPr/>
-          <p:nvPr/>
-        </p:nvSpPr>
-        <p:spPr>
-          <a:xfrm>
-            <a:off x="922020" y="2871073"/>
-            <a:ext cx="4892040" cy="609600"/>
+          <p:cNvPr id="15" name="Text 11"/>
+          <p:cNvSpPr/>
+          <p:nvPr/>
+        </p:nvSpPr>
+        <p:spPr>
+          <a:xfrm>
+            <a:off x="579120" y="2882741"/>
+            <a:ext cx="5105400" cy="589359"/>
+          </a:xfrm>
+          <a:prstGeom prst="rect">
+            <a:avLst/>
+          </a:prstGeom>
+          <a:noFill/>
+          <a:ln/>
+        </p:spPr>
+        <p:txBody>
+          <a:bodyPr wrap="square" lIns="0" tIns="0" rIns="0" bIns="0" rtlCol="0" anchor="ctr"/>
+          <a:lstStyle/>
+          <a:p>
+            <a:pPr algn="just" indent="0" marL="0">
+              <a:lnSpc>
+                <a:spcPts val="2320"/>
+              </a:lnSpc>
+              <a:buNone/>
+            </a:pPr>
+            <a:r>
+              <a:rPr lang="en-US" sz="1600" dirty="0">
+                <a:solidFill>
+                  <a:srgbClr val="18383F"/>
+                </a:solidFill>
+                <a:latin typeface="Microsoft YaHei" pitchFamily="34" charset="0"/>
+                <a:ea typeface="Microsoft YaHei" pitchFamily="34" charset="-122"/>
+                <a:cs typeface="Microsoft YaHei" pitchFamily="34" charset="-120"/>
+              </a:rPr>
+              <a:t>已实现的方法与完成的实验，注明代码版本、数据范围和记录位置。</a:t>
+            </a:r>
+            <a:endParaRPr lang="en-US" sz="1600" dirty="0"/>
+          </a:p>
+        </p:txBody>
+      </p:sp>
+      <p:sp>
+        <p:nvSpPr>
+          <p:cNvPr id="16" name="Shape 12"/>
+          <p:cNvSpPr/>
+          <p:nvPr/>
+        </p:nvSpPr>
+        <p:spPr>
+          <a:xfrm>
+            <a:off x="441960" y="3689628"/>
+            <a:ext cx="5379720" cy="1195507"/>
+          </a:xfrm>
+          <a:prstGeom prst="rect">
+            <a:avLst/>
+          </a:prstGeom>
+          <a:solidFill>
+            <a:srgbClr val="EDF6F5"/>
+          </a:solidFill>
+          <a:ln w="12700">
+            <a:solidFill>
+              <a:srgbClr val="EDF6F5">
+                <a:alpha val="0"/>
+              </a:srgbClr>
+            </a:solidFill>
+            <a:prstDash val="solid"/>
+          </a:ln>
+        </p:spPr>
+      </p:sp>
+      <p:sp>
+        <p:nvSpPr>
+          <p:cNvPr id="17" name="Text 13"/>
+          <p:cNvSpPr/>
+          <p:nvPr/>
+        </p:nvSpPr>
+        <p:spPr>
+          <a:xfrm>
+            <a:off x="579120" y="3811548"/>
+            <a:ext cx="5105400" cy="297180"/>
           </a:xfrm>
           <a:prstGeom prst="rect">
             <a:avLst/>
@@ -28498,7 +28864,49 @@
           <a:p>
             <a:pPr algn="l" indent="0" marL="0">
               <a:lnSpc>
-                <a:spcPts val="2400"/>
+                <a:spcPts val="2340"/>
+              </a:lnSpc>
+              <a:buNone/>
+            </a:pPr>
+            <a:r>
+              <a:rPr lang="en-US" sz="1800" b="1" dirty="0">
+                <a:solidFill>
+                  <a:srgbClr val="0F6674"/>
+                </a:solidFill>
+                <a:latin typeface="Microsoft YaHei" pitchFamily="34" charset="0"/>
+                <a:ea typeface="Microsoft YaHei" pitchFamily="34" charset="-122"/>
+                <a:cs typeface="Microsoft YaHei" pitchFamily="34" charset="-120"/>
+              </a:rPr>
+              <a:t>证据支持的结论</a:t>
+            </a:r>
+            <a:endParaRPr lang="en-US" sz="1800" dirty="0"/>
+          </a:p>
+        </p:txBody>
+      </p:sp>
+      <p:sp>
+        <p:nvSpPr>
+          <p:cNvPr id="18" name="Text 14"/>
+          <p:cNvSpPr/>
+          <p:nvPr/>
+        </p:nvSpPr>
+        <p:spPr>
+          <a:xfrm>
+            <a:off x="579120" y="4169688"/>
+            <a:ext cx="5105400" cy="589359"/>
+          </a:xfrm>
+          <a:prstGeom prst="rect">
+            <a:avLst/>
+          </a:prstGeom>
+          <a:noFill/>
+          <a:ln/>
+        </p:spPr>
+        <p:txBody>
+          <a:bodyPr wrap="square" lIns="0" tIns="0" rIns="0" bIns="0" rtlCol="0" anchor="ctr"/>
+          <a:lstStyle/>
+          <a:p>
+            <a:pPr algn="just" indent="0" marL="0">
+              <a:lnSpc>
+                <a:spcPts val="2320"/>
               </a:lnSpc>
               <a:buNone/>
             </a:pPr>
@@ -28511,7 +28919,7 @@
                 <a:ea typeface="Microsoft YaHei" pitchFamily="34" charset="-122"/>
                 <a:cs typeface="Microsoft YaHei" pitchFamily="34" charset="-120"/>
               </a:rPr>
-              <a:t>列出已实现的方法与完成的实验，注明代码版本、数据范围和记录位置。</a:t>
+              <a:t>关联对应图表，写明结论适用的场景与条件；初步观察标明尚待复核。</a:t>
             </a:r>
             <a:endParaRPr lang="en-US" sz="1600" dirty="0"/>
           </a:p>
@@ -28519,14 +28927,41 @@
       </p:sp>
       <p:sp>
         <p:nvSpPr>
-          <p:cNvPr id="11" name="Text 7"/>
-          <p:cNvSpPr/>
-          <p:nvPr/>
-        </p:nvSpPr>
-        <p:spPr>
-          <a:xfrm>
-            <a:off x="922020" y="3795236"/>
-            <a:ext cx="4892040" cy="308610"/>
+          <p:cNvPr id="19" name="Shape 15"/>
+          <p:cNvSpPr/>
+          <p:nvPr/>
+        </p:nvSpPr>
+        <p:spPr>
+          <a:xfrm>
+            <a:off x="441960" y="4976574"/>
+            <a:ext cx="5379720" cy="1195626"/>
+          </a:xfrm>
+          <a:prstGeom prst="rect">
+            <a:avLst/>
+          </a:prstGeom>
+          <a:solidFill>
+            <a:srgbClr val="EDF6F5"/>
+          </a:solidFill>
+          <a:ln w="12700">
+            <a:solidFill>
+              <a:srgbClr val="EDF6F5">
+                <a:alpha val="0"/>
+              </a:srgbClr>
+            </a:solidFill>
+            <a:prstDash val="solid"/>
+          </a:ln>
+        </p:spPr>
+      </p:sp>
+      <p:sp>
+        <p:nvSpPr>
+          <p:cNvPr id="20" name="Text 16"/>
+          <p:cNvSpPr/>
+          <p:nvPr/>
+        </p:nvSpPr>
+        <p:spPr>
+          <a:xfrm>
+            <a:off x="579120" y="5098494"/>
+            <a:ext cx="5105400" cy="297180"/>
           </a:xfrm>
           <a:prstGeom prst="rect">
             <a:avLst/>
@@ -28540,7 +28975,7 @@
           <a:p>
             <a:pPr algn="l" indent="0" marL="0">
               <a:lnSpc>
-                <a:spcPts val="2430"/>
+                <a:spcPts val="2340"/>
               </a:lnSpc>
               <a:buNone/>
             </a:pPr>
@@ -28553,7 +28988,7 @@
                 <a:ea typeface="Microsoft YaHei" pitchFamily="34" charset="-122"/>
                 <a:cs typeface="Microsoft YaHei" pitchFamily="34" charset="-120"/>
               </a:rPr>
-              <a:t>证据支持的结论</a:t>
+              <a:t>仍待解决的问题</a:t>
             </a:r>
             <a:endParaRPr lang="en-US" sz="1800" dirty="0"/>
           </a:p>
@@ -28561,14 +28996,56 @@
       </p:sp>
       <p:sp>
         <p:nvSpPr>
-          <p:cNvPr id="12" name="Text 8"/>
-          <p:cNvSpPr/>
-          <p:nvPr/>
-        </p:nvSpPr>
-        <p:spPr>
-          <a:xfrm>
-            <a:off x="922020" y="4164806"/>
-            <a:ext cx="4892040" cy="609600"/>
+          <p:cNvPr id="21" name="Text 17"/>
+          <p:cNvSpPr/>
+          <p:nvPr/>
+        </p:nvSpPr>
+        <p:spPr>
+          <a:xfrm>
+            <a:off x="579120" y="5456634"/>
+            <a:ext cx="5105400" cy="589359"/>
+          </a:xfrm>
+          <a:prstGeom prst="rect">
+            <a:avLst/>
+          </a:prstGeom>
+          <a:noFill/>
+          <a:ln/>
+        </p:spPr>
+        <p:txBody>
+          <a:bodyPr wrap="square" lIns="0" tIns="0" rIns="0" bIns="0" rtlCol="0" anchor="ctr"/>
+          <a:lstStyle/>
+          <a:p>
+            <a:pPr algn="just" indent="0" marL="0">
+              <a:lnSpc>
+                <a:spcPts val="2320"/>
+              </a:lnSpc>
+              <a:buNone/>
+            </a:pPr>
+            <a:r>
+              <a:rPr lang="en-US" sz="1600" dirty="0">
+                <a:solidFill>
+                  <a:srgbClr val="18383F"/>
+                </a:solidFill>
+                <a:latin typeface="Microsoft YaHei" pitchFamily="34" charset="0"/>
+                <a:ea typeface="Microsoft YaHei" pitchFamily="34" charset="-122"/>
+                <a:cs typeface="Microsoft YaHei" pitchFamily="34" charset="-120"/>
+              </a:rPr>
+              <a:t>未覆盖的场景、失败情形及主要限制，说明其对当前判断的影响。</a:t>
+            </a:r>
+            <a:endParaRPr lang="en-US" sz="1600" dirty="0"/>
+          </a:p>
+        </p:txBody>
+      </p:sp>
+      <p:sp>
+        <p:nvSpPr>
+          <p:cNvPr id="22" name="Text 18"/>
+          <p:cNvSpPr/>
+          <p:nvPr/>
+        </p:nvSpPr>
+        <p:spPr>
+          <a:xfrm>
+            <a:off x="6362700" y="1950720"/>
+            <a:ext cx="5387340" cy="330041"/>
           </a:xfrm>
           <a:prstGeom prst="rect">
             <a:avLst/>
@@ -28582,7 +29059,1703 @@
           <a:p>
             <a:pPr algn="l" indent="0" marL="0">
               <a:lnSpc>
-                <a:spcPts val="2400"/>
+                <a:spcPts val="2600"/>
+              </a:lnSpc>
+              <a:buNone/>
+            </a:pPr>
+            <a:r>
+              <a:rPr lang="en-US" sz="2000" b="1" dirty="0">
+                <a:solidFill>
+                  <a:srgbClr val="0F6674"/>
+                </a:solidFill>
+                <a:latin typeface="Microsoft YaHei" pitchFamily="34" charset="0"/>
+                <a:ea typeface="Microsoft YaHei" pitchFamily="34" charset="-122"/>
+                <a:cs typeface="Microsoft YaHei" pitchFamily="34" charset="-120"/>
+              </a:rPr>
+              <a:t>下一步计划</a:t>
+            </a:r>
+            <a:endParaRPr lang="en-US" sz="2000" dirty="0"/>
+          </a:p>
+        </p:txBody>
+      </p:sp>
+      <p:sp>
+        <p:nvSpPr>
+          <p:cNvPr id="23" name="Shape 19"/>
+          <p:cNvSpPr/>
+          <p:nvPr/>
+        </p:nvSpPr>
+        <p:spPr>
+          <a:xfrm>
+            <a:off x="6362700" y="2417921"/>
+            <a:ext cx="1023580" cy="337661"/>
+          </a:xfrm>
+          <a:prstGeom prst="rect">
+            <a:avLst/>
+          </a:prstGeom>
+          <a:solidFill>
+            <a:srgbClr val="0F6674"/>
+          </a:solidFill>
+          <a:ln w="12700">
+            <a:solidFill>
+              <a:srgbClr val="0F6674">
+                <a:alpha val="0"/>
+              </a:srgbClr>
+            </a:solidFill>
+            <a:prstDash val="solid"/>
+          </a:ln>
+        </p:spPr>
+      </p:sp>
+      <p:sp>
+        <p:nvSpPr>
+          <p:cNvPr id="24" name="Shape 20"/>
+          <p:cNvSpPr/>
+          <p:nvPr/>
+        </p:nvSpPr>
+        <p:spPr>
+          <a:xfrm>
+            <a:off x="6362700" y="2747963"/>
+            <a:ext cx="1023580" cy="7620"/>
+          </a:xfrm>
+          <a:prstGeom prst="rect">
+            <a:avLst/>
+          </a:prstGeom>
+          <a:solidFill>
+            <a:srgbClr val="C1D2DE"/>
+          </a:solidFill>
+          <a:ln w="12700">
+            <a:solidFill>
+              <a:srgbClr val="C1D2DE">
+                <a:alpha val="0"/>
+              </a:srgbClr>
+            </a:solidFill>
+            <a:prstDash val="solid"/>
+          </a:ln>
+        </p:spPr>
+      </p:sp>
+      <p:sp>
+        <p:nvSpPr>
+          <p:cNvPr id="25" name="Text 21"/>
+          <p:cNvSpPr/>
+          <p:nvPr/>
+        </p:nvSpPr>
+        <p:spPr>
+          <a:xfrm>
+            <a:off x="6454140" y="2456021"/>
+            <a:ext cx="840700" cy="257651"/>
+          </a:xfrm>
+          <a:prstGeom prst="rect">
+            <a:avLst/>
+          </a:prstGeom>
+          <a:noFill/>
+          <a:ln/>
+        </p:spPr>
+        <p:txBody>
+          <a:bodyPr wrap="square" lIns="0" tIns="0" rIns="0" bIns="0" rtlCol="0" anchor="ctr"/>
+          <a:lstStyle/>
+          <a:p>
+            <a:pPr algn="l" indent="0" marL="0">
+              <a:lnSpc>
+                <a:spcPts val="2030"/>
+              </a:lnSpc>
+              <a:buNone/>
+            </a:pPr>
+            <a:r>
+              <a:rPr lang="en-US" sz="1400" b="1" dirty="0">
+                <a:solidFill>
+                  <a:srgbClr val="FFFFFF"/>
+                </a:solidFill>
+                <a:latin typeface="Microsoft YaHei" pitchFamily="34" charset="0"/>
+                <a:ea typeface="Microsoft YaHei" pitchFamily="34" charset="-122"/>
+                <a:cs typeface="Microsoft YaHei" pitchFamily="34" charset="-120"/>
+              </a:rPr>
+              <a:t>工作阶段</a:t>
+            </a:r>
+            <a:endParaRPr lang="en-US" sz="1400" dirty="0"/>
+          </a:p>
+        </p:txBody>
+      </p:sp>
+      <p:sp>
+        <p:nvSpPr>
+          <p:cNvPr id="26" name="Shape 22"/>
+          <p:cNvSpPr/>
+          <p:nvPr/>
+        </p:nvSpPr>
+        <p:spPr>
+          <a:xfrm>
+            <a:off x="7386280" y="2417921"/>
+            <a:ext cx="1939409" cy="337661"/>
+          </a:xfrm>
+          <a:prstGeom prst="rect">
+            <a:avLst/>
+          </a:prstGeom>
+          <a:solidFill>
+            <a:srgbClr val="0F6674"/>
+          </a:solidFill>
+          <a:ln w="12700">
+            <a:solidFill>
+              <a:srgbClr val="0F6674">
+                <a:alpha val="0"/>
+              </a:srgbClr>
+            </a:solidFill>
+            <a:prstDash val="solid"/>
+          </a:ln>
+        </p:spPr>
+      </p:sp>
+      <p:sp>
+        <p:nvSpPr>
+          <p:cNvPr id="27" name="Shape 23"/>
+          <p:cNvSpPr/>
+          <p:nvPr/>
+        </p:nvSpPr>
+        <p:spPr>
+          <a:xfrm>
+            <a:off x="7386280" y="2747963"/>
+            <a:ext cx="1939409" cy="7620"/>
+          </a:xfrm>
+          <a:prstGeom prst="rect">
+            <a:avLst/>
+          </a:prstGeom>
+          <a:solidFill>
+            <a:srgbClr val="C1D2DE"/>
+          </a:solidFill>
+          <a:ln w="12700">
+            <a:solidFill>
+              <a:srgbClr val="C1D2DE">
+                <a:alpha val="0"/>
+              </a:srgbClr>
+            </a:solidFill>
+            <a:prstDash val="solid"/>
+          </a:ln>
+        </p:spPr>
+      </p:sp>
+      <p:sp>
+        <p:nvSpPr>
+          <p:cNvPr id="28" name="Text 24"/>
+          <p:cNvSpPr/>
+          <p:nvPr/>
+        </p:nvSpPr>
+        <p:spPr>
+          <a:xfrm>
+            <a:off x="7477720" y="2456021"/>
+            <a:ext cx="1756529" cy="257651"/>
+          </a:xfrm>
+          <a:prstGeom prst="rect">
+            <a:avLst/>
+          </a:prstGeom>
+          <a:noFill/>
+          <a:ln/>
+        </p:spPr>
+        <p:txBody>
+          <a:bodyPr wrap="square" lIns="0" tIns="0" rIns="0" bIns="0" rtlCol="0" anchor="ctr"/>
+          <a:lstStyle/>
+          <a:p>
+            <a:pPr algn="l" indent="0" marL="0">
+              <a:lnSpc>
+                <a:spcPts val="2030"/>
+              </a:lnSpc>
+              <a:buNone/>
+            </a:pPr>
+            <a:r>
+              <a:rPr lang="en-US" sz="1400" b="1" dirty="0">
+                <a:solidFill>
+                  <a:srgbClr val="FFFFFF"/>
+                </a:solidFill>
+                <a:latin typeface="Microsoft YaHei" pitchFamily="34" charset="0"/>
+                <a:ea typeface="Microsoft YaHei" pitchFamily="34" charset="-122"/>
+                <a:cs typeface="Microsoft YaHei" pitchFamily="34" charset="-120"/>
+              </a:rPr>
+              <a:t>关键任务</a:t>
+            </a:r>
+            <a:endParaRPr lang="en-US" sz="1400" dirty="0"/>
+          </a:p>
+        </p:txBody>
+      </p:sp>
+      <p:sp>
+        <p:nvSpPr>
+          <p:cNvPr id="29" name="Shape 25"/>
+          <p:cNvSpPr/>
+          <p:nvPr/>
+        </p:nvSpPr>
+        <p:spPr>
+          <a:xfrm>
+            <a:off x="9325689" y="2417921"/>
+            <a:ext cx="2424351" cy="337661"/>
+          </a:xfrm>
+          <a:prstGeom prst="rect">
+            <a:avLst/>
+          </a:prstGeom>
+          <a:solidFill>
+            <a:srgbClr val="0F6674"/>
+          </a:solidFill>
+          <a:ln w="12700">
+            <a:solidFill>
+              <a:srgbClr val="0F6674">
+                <a:alpha val="0"/>
+              </a:srgbClr>
+            </a:solidFill>
+            <a:prstDash val="solid"/>
+          </a:ln>
+        </p:spPr>
+      </p:sp>
+      <p:sp>
+        <p:nvSpPr>
+          <p:cNvPr id="30" name="Shape 26"/>
+          <p:cNvSpPr/>
+          <p:nvPr/>
+        </p:nvSpPr>
+        <p:spPr>
+          <a:xfrm>
+            <a:off x="9325689" y="2747963"/>
+            <a:ext cx="2424351" cy="7620"/>
+          </a:xfrm>
+          <a:prstGeom prst="rect">
+            <a:avLst/>
+          </a:prstGeom>
+          <a:solidFill>
+            <a:srgbClr val="C1D2DE"/>
+          </a:solidFill>
+          <a:ln w="12700">
+            <a:solidFill>
+              <a:srgbClr val="C1D2DE">
+                <a:alpha val="0"/>
+              </a:srgbClr>
+            </a:solidFill>
+            <a:prstDash val="solid"/>
+          </a:ln>
+        </p:spPr>
+      </p:sp>
+      <p:sp>
+        <p:nvSpPr>
+          <p:cNvPr id="31" name="Text 27"/>
+          <p:cNvSpPr/>
+          <p:nvPr/>
+        </p:nvSpPr>
+        <p:spPr>
+          <a:xfrm>
+            <a:off x="9417129" y="2456021"/>
+            <a:ext cx="2241471" cy="257651"/>
+          </a:xfrm>
+          <a:prstGeom prst="rect">
+            <a:avLst/>
+          </a:prstGeom>
+          <a:noFill/>
+          <a:ln/>
+        </p:spPr>
+        <p:txBody>
+          <a:bodyPr wrap="square" lIns="0" tIns="0" rIns="0" bIns="0" rtlCol="0" anchor="ctr"/>
+          <a:lstStyle/>
+          <a:p>
+            <a:pPr algn="l" indent="0" marL="0">
+              <a:lnSpc>
+                <a:spcPts val="2030"/>
+              </a:lnSpc>
+              <a:buNone/>
+            </a:pPr>
+            <a:r>
+              <a:rPr lang="en-US" sz="1400" b="1" dirty="0">
+                <a:solidFill>
+                  <a:srgbClr val="FFFFFF"/>
+                </a:solidFill>
+                <a:latin typeface="Microsoft YaHei" pitchFamily="34" charset="0"/>
+                <a:ea typeface="Microsoft YaHei" pitchFamily="34" charset="-122"/>
+                <a:cs typeface="Microsoft YaHei" pitchFamily="34" charset="-120"/>
+              </a:rPr>
+              <a:t>验收产出</a:t>
+            </a:r>
+            <a:endParaRPr lang="en-US" sz="1400" dirty="0"/>
+          </a:p>
+        </p:txBody>
+      </p:sp>
+      <p:sp>
+        <p:nvSpPr>
+          <p:cNvPr id="32" name="Shape 28"/>
+          <p:cNvSpPr/>
+          <p:nvPr/>
+        </p:nvSpPr>
+        <p:spPr>
+          <a:xfrm>
+            <a:off x="6362700" y="2755583"/>
+            <a:ext cx="1023580" cy="599123"/>
+          </a:xfrm>
+          <a:prstGeom prst="rect">
+            <a:avLst/>
+          </a:prstGeom>
+          <a:solidFill>
+            <a:srgbClr val="FFFFFF"/>
+          </a:solidFill>
+          <a:ln w="12700">
+            <a:solidFill>
+              <a:srgbClr val="FFFFFF">
+                <a:alpha val="0"/>
+              </a:srgbClr>
+            </a:solidFill>
+            <a:prstDash val="solid"/>
+          </a:ln>
+        </p:spPr>
+      </p:sp>
+      <p:sp>
+        <p:nvSpPr>
+          <p:cNvPr id="33" name="Shape 29"/>
+          <p:cNvSpPr/>
+          <p:nvPr/>
+        </p:nvSpPr>
+        <p:spPr>
+          <a:xfrm>
+            <a:off x="6362700" y="3347085"/>
+            <a:ext cx="1023580" cy="7620"/>
+          </a:xfrm>
+          <a:prstGeom prst="rect">
+            <a:avLst/>
+          </a:prstGeom>
+          <a:solidFill>
+            <a:srgbClr val="C1D2DE"/>
+          </a:solidFill>
+          <a:ln w="12700">
+            <a:solidFill>
+              <a:srgbClr val="C1D2DE">
+                <a:alpha val="0"/>
+              </a:srgbClr>
+            </a:solidFill>
+            <a:prstDash val="solid"/>
+          </a:ln>
+        </p:spPr>
+      </p:sp>
+      <p:sp>
+        <p:nvSpPr>
+          <p:cNvPr id="34" name="Text 30"/>
+          <p:cNvSpPr/>
+          <p:nvPr/>
+        </p:nvSpPr>
+        <p:spPr>
+          <a:xfrm>
+            <a:off x="6454140" y="2926318"/>
+            <a:ext cx="840700" cy="257651"/>
+          </a:xfrm>
+          <a:prstGeom prst="rect">
+            <a:avLst/>
+          </a:prstGeom>
+          <a:noFill/>
+          <a:ln/>
+        </p:spPr>
+        <p:txBody>
+          <a:bodyPr wrap="square" lIns="0" tIns="0" rIns="0" bIns="0" rtlCol="0" anchor="ctr"/>
+          <a:lstStyle/>
+          <a:p>
+            <a:pPr algn="l" indent="0" marL="0">
+              <a:lnSpc>
+                <a:spcPts val="2030"/>
+              </a:lnSpc>
+              <a:buNone/>
+            </a:pPr>
+            <a:r>
+              <a:rPr lang="en-US" sz="1400" b="1" dirty="0">
+                <a:solidFill>
+                  <a:srgbClr val="18383F"/>
+                </a:solidFill>
+                <a:latin typeface="Microsoft YaHei" pitchFamily="34" charset="0"/>
+                <a:ea typeface="Microsoft YaHei" pitchFamily="34" charset="-122"/>
+                <a:cs typeface="Microsoft YaHei" pitchFamily="34" charset="-120"/>
+              </a:rPr>
+              <a:t>近期</a:t>
+            </a:r>
+            <a:endParaRPr lang="en-US" sz="1400" dirty="0"/>
+          </a:p>
+        </p:txBody>
+      </p:sp>
+      <p:sp>
+        <p:nvSpPr>
+          <p:cNvPr id="35" name="Shape 31"/>
+          <p:cNvSpPr/>
+          <p:nvPr/>
+        </p:nvSpPr>
+        <p:spPr>
+          <a:xfrm>
+            <a:off x="7386280" y="2755583"/>
+            <a:ext cx="1939409" cy="599123"/>
+          </a:xfrm>
+          <a:prstGeom prst="rect">
+            <a:avLst/>
+          </a:prstGeom>
+          <a:solidFill>
+            <a:srgbClr val="FFFFFF"/>
+          </a:solidFill>
+          <a:ln w="12700">
+            <a:solidFill>
+              <a:srgbClr val="FFFFFF">
+                <a:alpha val="0"/>
+              </a:srgbClr>
+            </a:solidFill>
+            <a:prstDash val="solid"/>
+          </a:ln>
+        </p:spPr>
+      </p:sp>
+      <p:sp>
+        <p:nvSpPr>
+          <p:cNvPr id="36" name="Shape 32"/>
+          <p:cNvSpPr/>
+          <p:nvPr/>
+        </p:nvSpPr>
+        <p:spPr>
+          <a:xfrm>
+            <a:off x="7386280" y="3347085"/>
+            <a:ext cx="1939409" cy="7620"/>
+          </a:xfrm>
+          <a:prstGeom prst="rect">
+            <a:avLst/>
+          </a:prstGeom>
+          <a:solidFill>
+            <a:srgbClr val="C1D2DE"/>
+          </a:solidFill>
+          <a:ln w="12700">
+            <a:solidFill>
+              <a:srgbClr val="C1D2DE">
+                <a:alpha val="0"/>
+              </a:srgbClr>
+            </a:solidFill>
+            <a:prstDash val="solid"/>
+          </a:ln>
+        </p:spPr>
+      </p:sp>
+      <p:sp>
+        <p:nvSpPr>
+          <p:cNvPr id="37" name="Text 33"/>
+          <p:cNvSpPr/>
+          <p:nvPr/>
+        </p:nvSpPr>
+        <p:spPr>
+          <a:xfrm>
+            <a:off x="7477720" y="2797493"/>
+            <a:ext cx="1756529" cy="515303"/>
+          </a:xfrm>
+          <a:prstGeom prst="rect">
+            <a:avLst/>
+          </a:prstGeom>
+          <a:noFill/>
+          <a:ln/>
+        </p:spPr>
+        <p:txBody>
+          <a:bodyPr wrap="square" lIns="0" tIns="0" rIns="0" bIns="0" rtlCol="0" anchor="ctr"/>
+          <a:lstStyle/>
+          <a:p>
+            <a:pPr algn="l" indent="0" marL="0">
+              <a:lnSpc>
+                <a:spcPts val="2030"/>
+              </a:lnSpc>
+              <a:buNone/>
+            </a:pPr>
+            <a:r>
+              <a:rPr lang="en-US" sz="1400" dirty="0">
+                <a:solidFill>
+                  <a:srgbClr val="18383F"/>
+                </a:solidFill>
+                <a:latin typeface="Microsoft YaHei" pitchFamily="34" charset="0"/>
+                <a:ea typeface="Microsoft YaHei" pitchFamily="34" charset="-122"/>
+                <a:cs typeface="Microsoft YaHei" pitchFamily="34" charset="-120"/>
+              </a:rPr>
+              <a:t>统一实验设置</a:t>
+            </a:r>
+            <a:endParaRPr lang="en-US" sz="1400" dirty="0"/>
+          </a:p>
+          <a:p>
+            <a:pPr algn="l" indent="0" marL="0">
+              <a:lnSpc>
+                <a:spcPts val="2030"/>
+              </a:lnSpc>
+              <a:buNone/>
+            </a:pPr>
+            <a:r>
+              <a:rPr lang="en-US" sz="1400" dirty="0">
+                <a:solidFill>
+                  <a:srgbClr val="18383F"/>
+                </a:solidFill>
+                <a:latin typeface="Microsoft YaHei" pitchFamily="34" charset="0"/>
+                <a:ea typeface="Microsoft YaHei" pitchFamily="34" charset="-122"/>
+                <a:cs typeface="Microsoft YaHei" pitchFamily="34" charset="-120"/>
+              </a:rPr>
+              <a:t>固定数据划分</a:t>
+            </a:r>
+            <a:endParaRPr lang="en-US" sz="1400" dirty="0"/>
+          </a:p>
+        </p:txBody>
+      </p:sp>
+      <p:sp>
+        <p:nvSpPr>
+          <p:cNvPr id="38" name="Shape 34"/>
+          <p:cNvSpPr/>
+          <p:nvPr/>
+        </p:nvSpPr>
+        <p:spPr>
+          <a:xfrm>
+            <a:off x="9325689" y="2755583"/>
+            <a:ext cx="2424351" cy="599123"/>
+          </a:xfrm>
+          <a:prstGeom prst="rect">
+            <a:avLst/>
+          </a:prstGeom>
+          <a:solidFill>
+            <a:srgbClr val="FFFFFF"/>
+          </a:solidFill>
+          <a:ln w="12700">
+            <a:solidFill>
+              <a:srgbClr val="FFFFFF">
+                <a:alpha val="0"/>
+              </a:srgbClr>
+            </a:solidFill>
+            <a:prstDash val="solid"/>
+          </a:ln>
+        </p:spPr>
+      </p:sp>
+      <p:sp>
+        <p:nvSpPr>
+          <p:cNvPr id="39" name="Shape 35"/>
+          <p:cNvSpPr/>
+          <p:nvPr/>
+        </p:nvSpPr>
+        <p:spPr>
+          <a:xfrm>
+            <a:off x="9325689" y="3347085"/>
+            <a:ext cx="2424351" cy="7620"/>
+          </a:xfrm>
+          <a:prstGeom prst="rect">
+            <a:avLst/>
+          </a:prstGeom>
+          <a:solidFill>
+            <a:srgbClr val="C1D2DE"/>
+          </a:solidFill>
+          <a:ln w="12700">
+            <a:solidFill>
+              <a:srgbClr val="C1D2DE">
+                <a:alpha val="0"/>
+              </a:srgbClr>
+            </a:solidFill>
+            <a:prstDash val="solid"/>
+          </a:ln>
+        </p:spPr>
+      </p:sp>
+      <p:sp>
+        <p:nvSpPr>
+          <p:cNvPr id="40" name="Text 36"/>
+          <p:cNvSpPr/>
+          <p:nvPr/>
+        </p:nvSpPr>
+        <p:spPr>
+          <a:xfrm>
+            <a:off x="9417129" y="2797493"/>
+            <a:ext cx="2241471" cy="515303"/>
+          </a:xfrm>
+          <a:prstGeom prst="rect">
+            <a:avLst/>
+          </a:prstGeom>
+          <a:noFill/>
+          <a:ln/>
+        </p:spPr>
+        <p:txBody>
+          <a:bodyPr wrap="square" lIns="0" tIns="0" rIns="0" bIns="0" rtlCol="0" anchor="ctr"/>
+          <a:lstStyle/>
+          <a:p>
+            <a:pPr algn="l" indent="0" marL="0">
+              <a:lnSpc>
+                <a:spcPts val="2030"/>
+              </a:lnSpc>
+              <a:buNone/>
+            </a:pPr>
+            <a:r>
+              <a:rPr lang="en-US" sz="1400" dirty="0">
+                <a:solidFill>
+                  <a:srgbClr val="18383F"/>
+                </a:solidFill>
+                <a:latin typeface="Microsoft YaHei" pitchFamily="34" charset="0"/>
+                <a:ea typeface="Microsoft YaHei" pitchFamily="34" charset="-122"/>
+                <a:cs typeface="Microsoft YaHei" pitchFamily="34" charset="-120"/>
+              </a:rPr>
+              <a:t>参数清单、数据版本</a:t>
+            </a:r>
+            <a:endParaRPr lang="en-US" sz="1400" dirty="0"/>
+          </a:p>
+          <a:p>
+            <a:pPr algn="l" indent="0" marL="0">
+              <a:lnSpc>
+                <a:spcPts val="2030"/>
+              </a:lnSpc>
+              <a:buNone/>
+            </a:pPr>
+            <a:r>
+              <a:rPr lang="en-US" sz="1400" dirty="0">
+                <a:solidFill>
+                  <a:srgbClr val="18383F"/>
+                </a:solidFill>
+                <a:latin typeface="Microsoft YaHei" pitchFamily="34" charset="0"/>
+                <a:ea typeface="Microsoft YaHei" pitchFamily="34" charset="-122"/>
+                <a:cs typeface="Microsoft YaHei" pitchFamily="34" charset="-120"/>
+              </a:rPr>
+              <a:t>及可复现脚本</a:t>
+            </a:r>
+            <a:endParaRPr lang="en-US" sz="1400" dirty="0"/>
+          </a:p>
+        </p:txBody>
+      </p:sp>
+      <p:sp>
+        <p:nvSpPr>
+          <p:cNvPr id="41" name="Shape 37"/>
+          <p:cNvSpPr/>
+          <p:nvPr/>
+        </p:nvSpPr>
+        <p:spPr>
+          <a:xfrm>
+            <a:off x="6362700" y="3354705"/>
+            <a:ext cx="1023580" cy="599123"/>
+          </a:xfrm>
+          <a:prstGeom prst="rect">
+            <a:avLst/>
+          </a:prstGeom>
+          <a:solidFill>
+            <a:srgbClr val="EDF6F5"/>
+          </a:solidFill>
+          <a:ln w="12700">
+            <a:solidFill>
+              <a:srgbClr val="EDF6F5">
+                <a:alpha val="0"/>
+              </a:srgbClr>
+            </a:solidFill>
+            <a:prstDash val="solid"/>
+          </a:ln>
+        </p:spPr>
+      </p:sp>
+      <p:sp>
+        <p:nvSpPr>
+          <p:cNvPr id="42" name="Shape 38"/>
+          <p:cNvSpPr/>
+          <p:nvPr/>
+        </p:nvSpPr>
+        <p:spPr>
+          <a:xfrm>
+            <a:off x="6362700" y="3946208"/>
+            <a:ext cx="1023580" cy="7620"/>
+          </a:xfrm>
+          <a:prstGeom prst="rect">
+            <a:avLst/>
+          </a:prstGeom>
+          <a:solidFill>
+            <a:srgbClr val="C1D2DE"/>
+          </a:solidFill>
+          <a:ln w="12700">
+            <a:solidFill>
+              <a:srgbClr val="C1D2DE">
+                <a:alpha val="0"/>
+              </a:srgbClr>
+            </a:solidFill>
+            <a:prstDash val="solid"/>
+          </a:ln>
+        </p:spPr>
+      </p:sp>
+      <p:sp>
+        <p:nvSpPr>
+          <p:cNvPr id="43" name="Text 39"/>
+          <p:cNvSpPr/>
+          <p:nvPr/>
+        </p:nvSpPr>
+        <p:spPr>
+          <a:xfrm>
+            <a:off x="6454140" y="3525441"/>
+            <a:ext cx="840700" cy="257651"/>
+          </a:xfrm>
+          <a:prstGeom prst="rect">
+            <a:avLst/>
+          </a:prstGeom>
+          <a:noFill/>
+          <a:ln/>
+        </p:spPr>
+        <p:txBody>
+          <a:bodyPr wrap="square" lIns="0" tIns="0" rIns="0" bIns="0" rtlCol="0" anchor="ctr"/>
+          <a:lstStyle/>
+          <a:p>
+            <a:pPr algn="l" indent="0" marL="0">
+              <a:lnSpc>
+                <a:spcPts val="2030"/>
+              </a:lnSpc>
+              <a:buNone/>
+            </a:pPr>
+            <a:r>
+              <a:rPr lang="en-US" sz="1400" b="1" dirty="0">
+                <a:solidFill>
+                  <a:srgbClr val="18383F"/>
+                </a:solidFill>
+                <a:latin typeface="Microsoft YaHei" pitchFamily="34" charset="0"/>
+                <a:ea typeface="Microsoft YaHei" pitchFamily="34" charset="-122"/>
+                <a:cs typeface="Microsoft YaHei" pitchFamily="34" charset="-120"/>
+              </a:rPr>
+              <a:t>随后</a:t>
+            </a:r>
+            <a:endParaRPr lang="en-US" sz="1400" dirty="0"/>
+          </a:p>
+        </p:txBody>
+      </p:sp>
+      <p:sp>
+        <p:nvSpPr>
+          <p:cNvPr id="44" name="Shape 40"/>
+          <p:cNvSpPr/>
+          <p:nvPr/>
+        </p:nvSpPr>
+        <p:spPr>
+          <a:xfrm>
+            <a:off x="7386280" y="3354705"/>
+            <a:ext cx="1939409" cy="599123"/>
+          </a:xfrm>
+          <a:prstGeom prst="rect">
+            <a:avLst/>
+          </a:prstGeom>
+          <a:solidFill>
+            <a:srgbClr val="EDF6F5"/>
+          </a:solidFill>
+          <a:ln w="12700">
+            <a:solidFill>
+              <a:srgbClr val="EDF6F5">
+                <a:alpha val="0"/>
+              </a:srgbClr>
+            </a:solidFill>
+            <a:prstDash val="solid"/>
+          </a:ln>
+        </p:spPr>
+      </p:sp>
+      <p:sp>
+        <p:nvSpPr>
+          <p:cNvPr id="45" name="Shape 41"/>
+          <p:cNvSpPr/>
+          <p:nvPr/>
+        </p:nvSpPr>
+        <p:spPr>
+          <a:xfrm>
+            <a:off x="7386280" y="3946208"/>
+            <a:ext cx="1939409" cy="7620"/>
+          </a:xfrm>
+          <a:prstGeom prst="rect">
+            <a:avLst/>
+          </a:prstGeom>
+          <a:solidFill>
+            <a:srgbClr val="C1D2DE"/>
+          </a:solidFill>
+          <a:ln w="12700">
+            <a:solidFill>
+              <a:srgbClr val="C1D2DE">
+                <a:alpha val="0"/>
+              </a:srgbClr>
+            </a:solidFill>
+            <a:prstDash val="solid"/>
+          </a:ln>
+        </p:spPr>
+      </p:sp>
+      <p:sp>
+        <p:nvSpPr>
+          <p:cNvPr id="46" name="Text 42"/>
+          <p:cNvSpPr/>
+          <p:nvPr/>
+        </p:nvSpPr>
+        <p:spPr>
+          <a:xfrm>
+            <a:off x="7477720" y="3396615"/>
+            <a:ext cx="1756529" cy="515303"/>
+          </a:xfrm>
+          <a:prstGeom prst="rect">
+            <a:avLst/>
+          </a:prstGeom>
+          <a:noFill/>
+          <a:ln/>
+        </p:spPr>
+        <p:txBody>
+          <a:bodyPr wrap="square" lIns="0" tIns="0" rIns="0" bIns="0" rtlCol="0" anchor="ctr"/>
+          <a:lstStyle/>
+          <a:p>
+            <a:pPr algn="l" indent="0" marL="0">
+              <a:lnSpc>
+                <a:spcPts val="2030"/>
+              </a:lnSpc>
+              <a:buNone/>
+            </a:pPr>
+            <a:r>
+              <a:rPr lang="en-US" sz="1400" dirty="0">
+                <a:solidFill>
+                  <a:srgbClr val="18383F"/>
+                </a:solidFill>
+                <a:latin typeface="Microsoft YaHei" pitchFamily="34" charset="0"/>
+                <a:ea typeface="Microsoft YaHei" pitchFamily="34" charset="-122"/>
+                <a:cs typeface="Microsoft YaHei" pitchFamily="34" charset="-120"/>
+              </a:rPr>
+              <a:t>补充对照实验</a:t>
+            </a:r>
+            <a:endParaRPr lang="en-US" sz="1400" dirty="0"/>
+          </a:p>
+          <a:p>
+            <a:pPr algn="l" indent="0" marL="0">
+              <a:lnSpc>
+                <a:spcPts val="2030"/>
+              </a:lnSpc>
+              <a:buNone/>
+            </a:pPr>
+            <a:r>
+              <a:rPr lang="en-US" sz="1400" dirty="0">
+                <a:solidFill>
+                  <a:srgbClr val="18383F"/>
+                </a:solidFill>
+                <a:latin typeface="Microsoft YaHei" pitchFamily="34" charset="0"/>
+                <a:ea typeface="Microsoft YaHei" pitchFamily="34" charset="-122"/>
+                <a:cs typeface="Microsoft YaHei" pitchFamily="34" charset="-120"/>
+              </a:rPr>
+              <a:t>开展关键消融</a:t>
+            </a:r>
+            <a:endParaRPr lang="en-US" sz="1400" dirty="0"/>
+          </a:p>
+        </p:txBody>
+      </p:sp>
+      <p:sp>
+        <p:nvSpPr>
+          <p:cNvPr id="47" name="Shape 43"/>
+          <p:cNvSpPr/>
+          <p:nvPr/>
+        </p:nvSpPr>
+        <p:spPr>
+          <a:xfrm>
+            <a:off x="9325689" y="3354705"/>
+            <a:ext cx="2424351" cy="599123"/>
+          </a:xfrm>
+          <a:prstGeom prst="rect">
+            <a:avLst/>
+          </a:prstGeom>
+          <a:solidFill>
+            <a:srgbClr val="EDF6F5"/>
+          </a:solidFill>
+          <a:ln w="12700">
+            <a:solidFill>
+              <a:srgbClr val="EDF6F5">
+                <a:alpha val="0"/>
+              </a:srgbClr>
+            </a:solidFill>
+            <a:prstDash val="solid"/>
+          </a:ln>
+        </p:spPr>
+      </p:sp>
+      <p:sp>
+        <p:nvSpPr>
+          <p:cNvPr id="48" name="Shape 44"/>
+          <p:cNvSpPr/>
+          <p:nvPr/>
+        </p:nvSpPr>
+        <p:spPr>
+          <a:xfrm>
+            <a:off x="9325689" y="3946208"/>
+            <a:ext cx="2424351" cy="7620"/>
+          </a:xfrm>
+          <a:prstGeom prst="rect">
+            <a:avLst/>
+          </a:prstGeom>
+          <a:solidFill>
+            <a:srgbClr val="C1D2DE"/>
+          </a:solidFill>
+          <a:ln w="12700">
+            <a:solidFill>
+              <a:srgbClr val="C1D2DE">
+                <a:alpha val="0"/>
+              </a:srgbClr>
+            </a:solidFill>
+            <a:prstDash val="solid"/>
+          </a:ln>
+        </p:spPr>
+      </p:sp>
+      <p:sp>
+        <p:nvSpPr>
+          <p:cNvPr id="49" name="Text 45"/>
+          <p:cNvSpPr/>
+          <p:nvPr/>
+        </p:nvSpPr>
+        <p:spPr>
+          <a:xfrm>
+            <a:off x="9417129" y="3396615"/>
+            <a:ext cx="2241471" cy="515303"/>
+          </a:xfrm>
+          <a:prstGeom prst="rect">
+            <a:avLst/>
+          </a:prstGeom>
+          <a:noFill/>
+          <a:ln/>
+        </p:spPr>
+        <p:txBody>
+          <a:bodyPr wrap="square" lIns="0" tIns="0" rIns="0" bIns="0" rtlCol="0" anchor="ctr"/>
+          <a:lstStyle/>
+          <a:p>
+            <a:pPr algn="l" indent="0" marL="0">
+              <a:lnSpc>
+                <a:spcPts val="2030"/>
+              </a:lnSpc>
+              <a:buNone/>
+            </a:pPr>
+            <a:r>
+              <a:rPr lang="en-US" sz="1400" dirty="0">
+                <a:solidFill>
+                  <a:srgbClr val="18383F"/>
+                </a:solidFill>
+                <a:latin typeface="Microsoft YaHei" pitchFamily="34" charset="0"/>
+                <a:ea typeface="Microsoft YaHei" pitchFamily="34" charset="-122"/>
+                <a:cs typeface="Microsoft YaHei" pitchFamily="34" charset="-120"/>
+              </a:rPr>
+              <a:t>均值 ± 标准差</a:t>
+            </a:r>
+            <a:endParaRPr lang="en-US" sz="1400" dirty="0"/>
+          </a:p>
+          <a:p>
+            <a:pPr algn="l" indent="0" marL="0">
+              <a:lnSpc>
+                <a:spcPts val="2030"/>
+              </a:lnSpc>
+              <a:buNone/>
+            </a:pPr>
+            <a:r>
+              <a:rPr lang="en-US" sz="1400" dirty="0">
+                <a:solidFill>
+                  <a:srgbClr val="18383F"/>
+                </a:solidFill>
+                <a:latin typeface="Microsoft YaHei" pitchFamily="34" charset="0"/>
+                <a:ea typeface="Microsoft YaHei" pitchFamily="34" charset="-122"/>
+                <a:cs typeface="Microsoft YaHei" pitchFamily="34" charset="-120"/>
+              </a:rPr>
+              <a:t>重复次数及日志</a:t>
+            </a:r>
+            <a:endParaRPr lang="en-US" sz="1400" dirty="0"/>
+          </a:p>
+        </p:txBody>
+      </p:sp>
+      <p:sp>
+        <p:nvSpPr>
+          <p:cNvPr id="50" name="Shape 46"/>
+          <p:cNvSpPr/>
+          <p:nvPr/>
+        </p:nvSpPr>
+        <p:spPr>
+          <a:xfrm>
+            <a:off x="6362700" y="3953828"/>
+            <a:ext cx="1023580" cy="599123"/>
+          </a:xfrm>
+          <a:prstGeom prst="rect">
+            <a:avLst/>
+          </a:prstGeom>
+          <a:solidFill>
+            <a:srgbClr val="FFFFFF"/>
+          </a:solidFill>
+          <a:ln w="12700">
+            <a:solidFill>
+              <a:srgbClr val="FFFFFF">
+                <a:alpha val="0"/>
+              </a:srgbClr>
+            </a:solidFill>
+            <a:prstDash val="solid"/>
+          </a:ln>
+        </p:spPr>
+      </p:sp>
+      <p:sp>
+        <p:nvSpPr>
+          <p:cNvPr id="51" name="Shape 47"/>
+          <p:cNvSpPr/>
+          <p:nvPr/>
+        </p:nvSpPr>
+        <p:spPr>
+          <a:xfrm>
+            <a:off x="6362700" y="4545330"/>
+            <a:ext cx="1023580" cy="7620"/>
+          </a:xfrm>
+          <a:prstGeom prst="rect">
+            <a:avLst/>
+          </a:prstGeom>
+          <a:solidFill>
+            <a:srgbClr val="C1D2DE"/>
+          </a:solidFill>
+          <a:ln w="12700">
+            <a:solidFill>
+              <a:srgbClr val="C1D2DE">
+                <a:alpha val="0"/>
+              </a:srgbClr>
+            </a:solidFill>
+            <a:prstDash val="solid"/>
+          </a:ln>
+        </p:spPr>
+      </p:sp>
+      <p:sp>
+        <p:nvSpPr>
+          <p:cNvPr id="52" name="Text 48"/>
+          <p:cNvSpPr/>
+          <p:nvPr/>
+        </p:nvSpPr>
+        <p:spPr>
+          <a:xfrm>
+            <a:off x="6454140" y="4124563"/>
+            <a:ext cx="840700" cy="257651"/>
+          </a:xfrm>
+          <a:prstGeom prst="rect">
+            <a:avLst/>
+          </a:prstGeom>
+          <a:noFill/>
+          <a:ln/>
+        </p:spPr>
+        <p:txBody>
+          <a:bodyPr wrap="square" lIns="0" tIns="0" rIns="0" bIns="0" rtlCol="0" anchor="ctr"/>
+          <a:lstStyle/>
+          <a:p>
+            <a:pPr algn="l" indent="0" marL="0">
+              <a:lnSpc>
+                <a:spcPts val="2030"/>
+              </a:lnSpc>
+              <a:buNone/>
+            </a:pPr>
+            <a:r>
+              <a:rPr lang="en-US" sz="1400" b="1" dirty="0">
+                <a:solidFill>
+                  <a:srgbClr val="18383F"/>
+                </a:solidFill>
+                <a:latin typeface="Microsoft YaHei" pitchFamily="34" charset="0"/>
+                <a:ea typeface="Microsoft YaHei" pitchFamily="34" charset="-122"/>
+                <a:cs typeface="Microsoft YaHei" pitchFamily="34" charset="-120"/>
+              </a:rPr>
+              <a:t>并行</a:t>
+            </a:r>
+            <a:endParaRPr lang="en-US" sz="1400" dirty="0"/>
+          </a:p>
+        </p:txBody>
+      </p:sp>
+      <p:sp>
+        <p:nvSpPr>
+          <p:cNvPr id="53" name="Shape 49"/>
+          <p:cNvSpPr/>
+          <p:nvPr/>
+        </p:nvSpPr>
+        <p:spPr>
+          <a:xfrm>
+            <a:off x="7386280" y="3953828"/>
+            <a:ext cx="1939409" cy="599123"/>
+          </a:xfrm>
+          <a:prstGeom prst="rect">
+            <a:avLst/>
+          </a:prstGeom>
+          <a:solidFill>
+            <a:srgbClr val="FFFFFF"/>
+          </a:solidFill>
+          <a:ln w="12700">
+            <a:solidFill>
+              <a:srgbClr val="FFFFFF">
+                <a:alpha val="0"/>
+              </a:srgbClr>
+            </a:solidFill>
+            <a:prstDash val="solid"/>
+          </a:ln>
+        </p:spPr>
+      </p:sp>
+      <p:sp>
+        <p:nvSpPr>
+          <p:cNvPr id="54" name="Shape 50"/>
+          <p:cNvSpPr/>
+          <p:nvPr/>
+        </p:nvSpPr>
+        <p:spPr>
+          <a:xfrm>
+            <a:off x="7386280" y="4545330"/>
+            <a:ext cx="1939409" cy="7620"/>
+          </a:xfrm>
+          <a:prstGeom prst="rect">
+            <a:avLst/>
+          </a:prstGeom>
+          <a:solidFill>
+            <a:srgbClr val="C1D2DE"/>
+          </a:solidFill>
+          <a:ln w="12700">
+            <a:solidFill>
+              <a:srgbClr val="C1D2DE">
+                <a:alpha val="0"/>
+              </a:srgbClr>
+            </a:solidFill>
+            <a:prstDash val="solid"/>
+          </a:ln>
+        </p:spPr>
+      </p:sp>
+      <p:sp>
+        <p:nvSpPr>
+          <p:cNvPr id="55" name="Text 51"/>
+          <p:cNvSpPr/>
+          <p:nvPr/>
+        </p:nvSpPr>
+        <p:spPr>
+          <a:xfrm>
+            <a:off x="7477720" y="3995738"/>
+            <a:ext cx="1756529" cy="515303"/>
+          </a:xfrm>
+          <a:prstGeom prst="rect">
+            <a:avLst/>
+          </a:prstGeom>
+          <a:noFill/>
+          <a:ln/>
+        </p:spPr>
+        <p:txBody>
+          <a:bodyPr wrap="square" lIns="0" tIns="0" rIns="0" bIns="0" rtlCol="0" anchor="ctr"/>
+          <a:lstStyle/>
+          <a:p>
+            <a:pPr algn="l" indent="0" marL="0">
+              <a:lnSpc>
+                <a:spcPts val="2030"/>
+              </a:lnSpc>
+              <a:buNone/>
+            </a:pPr>
+            <a:r>
+              <a:rPr lang="en-US" sz="1400" dirty="0">
+                <a:solidFill>
+                  <a:srgbClr val="18383F"/>
+                </a:solidFill>
+                <a:latin typeface="Microsoft YaHei" pitchFamily="34" charset="0"/>
+                <a:ea typeface="Microsoft YaHei" pitchFamily="34" charset="-122"/>
+                <a:cs typeface="Microsoft YaHei" pitchFamily="34" charset="-120"/>
+              </a:rPr>
+              <a:t>分析异常结果</a:t>
+            </a:r>
+            <a:endParaRPr lang="en-US" sz="1400" dirty="0"/>
+          </a:p>
+          <a:p>
+            <a:pPr algn="l" indent="0" marL="0">
+              <a:lnSpc>
+                <a:spcPts val="2030"/>
+              </a:lnSpc>
+              <a:buNone/>
+            </a:pPr>
+            <a:r>
+              <a:rPr lang="en-US" sz="1400" dirty="0">
+                <a:solidFill>
+                  <a:srgbClr val="18383F"/>
+                </a:solidFill>
+                <a:latin typeface="Microsoft YaHei" pitchFamily="34" charset="0"/>
+                <a:ea typeface="Microsoft YaHei" pitchFamily="34" charset="-122"/>
+                <a:cs typeface="Microsoft YaHei" pitchFamily="34" charset="-120"/>
+              </a:rPr>
+              <a:t>归纳失败案例</a:t>
+            </a:r>
+            <a:endParaRPr lang="en-US" sz="1400" dirty="0"/>
+          </a:p>
+        </p:txBody>
+      </p:sp>
+      <p:sp>
+        <p:nvSpPr>
+          <p:cNvPr id="56" name="Shape 52"/>
+          <p:cNvSpPr/>
+          <p:nvPr/>
+        </p:nvSpPr>
+        <p:spPr>
+          <a:xfrm>
+            <a:off x="9325689" y="3953828"/>
+            <a:ext cx="2424351" cy="599123"/>
+          </a:xfrm>
+          <a:prstGeom prst="rect">
+            <a:avLst/>
+          </a:prstGeom>
+          <a:solidFill>
+            <a:srgbClr val="FFFFFF"/>
+          </a:solidFill>
+          <a:ln w="12700">
+            <a:solidFill>
+              <a:srgbClr val="FFFFFF">
+                <a:alpha val="0"/>
+              </a:srgbClr>
+            </a:solidFill>
+            <a:prstDash val="solid"/>
+          </a:ln>
+        </p:spPr>
+      </p:sp>
+      <p:sp>
+        <p:nvSpPr>
+          <p:cNvPr id="57" name="Shape 53"/>
+          <p:cNvSpPr/>
+          <p:nvPr/>
+        </p:nvSpPr>
+        <p:spPr>
+          <a:xfrm>
+            <a:off x="9325689" y="4545330"/>
+            <a:ext cx="2424351" cy="7620"/>
+          </a:xfrm>
+          <a:prstGeom prst="rect">
+            <a:avLst/>
+          </a:prstGeom>
+          <a:solidFill>
+            <a:srgbClr val="C1D2DE"/>
+          </a:solidFill>
+          <a:ln w="12700">
+            <a:solidFill>
+              <a:srgbClr val="C1D2DE">
+                <a:alpha val="0"/>
+              </a:srgbClr>
+            </a:solidFill>
+            <a:prstDash val="solid"/>
+          </a:ln>
+        </p:spPr>
+      </p:sp>
+      <p:sp>
+        <p:nvSpPr>
+          <p:cNvPr id="58" name="Text 54"/>
+          <p:cNvSpPr/>
+          <p:nvPr/>
+        </p:nvSpPr>
+        <p:spPr>
+          <a:xfrm>
+            <a:off x="9417129" y="3995738"/>
+            <a:ext cx="2241471" cy="515303"/>
+          </a:xfrm>
+          <a:prstGeom prst="rect">
+            <a:avLst/>
+          </a:prstGeom>
+          <a:noFill/>
+          <a:ln/>
+        </p:spPr>
+        <p:txBody>
+          <a:bodyPr wrap="square" lIns="0" tIns="0" rIns="0" bIns="0" rtlCol="0" anchor="ctr"/>
+          <a:lstStyle/>
+          <a:p>
+            <a:pPr algn="l" indent="0" marL="0">
+              <a:lnSpc>
+                <a:spcPts val="2030"/>
+              </a:lnSpc>
+              <a:buNone/>
+            </a:pPr>
+            <a:r>
+              <a:rPr lang="en-US" sz="1400" dirty="0">
+                <a:solidFill>
+                  <a:srgbClr val="18383F"/>
+                </a:solidFill>
+                <a:latin typeface="Microsoft YaHei" pitchFamily="34" charset="0"/>
+                <a:ea typeface="Microsoft YaHei" pitchFamily="34" charset="-122"/>
+                <a:cs typeface="Microsoft YaHei" pitchFamily="34" charset="-120"/>
+              </a:rPr>
+              <a:t>差异解释与边界条件</a:t>
+            </a:r>
+            <a:endParaRPr lang="en-US" sz="1400" dirty="0"/>
+          </a:p>
+          <a:p>
+            <a:pPr algn="l" indent="0" marL="0">
+              <a:lnSpc>
+                <a:spcPts val="2030"/>
+              </a:lnSpc>
+              <a:buNone/>
+            </a:pPr>
+            <a:r>
+              <a:rPr lang="en-US" sz="1400" dirty="0">
+                <a:solidFill>
+                  <a:srgbClr val="18383F"/>
+                </a:solidFill>
+                <a:latin typeface="Microsoft YaHei" pitchFamily="34" charset="0"/>
+                <a:ea typeface="Microsoft YaHei" pitchFamily="34" charset="-122"/>
+                <a:cs typeface="Microsoft YaHei" pitchFamily="34" charset="-120"/>
+              </a:rPr>
+              <a:t>典型样例定位</a:t>
+            </a:r>
+            <a:endParaRPr lang="en-US" sz="1400" dirty="0"/>
+          </a:p>
+        </p:txBody>
+      </p:sp>
+      <p:sp>
+        <p:nvSpPr>
+          <p:cNvPr id="59" name="Shape 55"/>
+          <p:cNvSpPr/>
+          <p:nvPr/>
+        </p:nvSpPr>
+        <p:spPr>
+          <a:xfrm>
+            <a:off x="6362700" y="4552950"/>
+            <a:ext cx="1023580" cy="599123"/>
+          </a:xfrm>
+          <a:prstGeom prst="rect">
+            <a:avLst/>
+          </a:prstGeom>
+          <a:solidFill>
+            <a:srgbClr val="EDF6F5"/>
+          </a:solidFill>
+          <a:ln w="12700">
+            <a:solidFill>
+              <a:srgbClr val="EDF6F5">
+                <a:alpha val="0"/>
+              </a:srgbClr>
+            </a:solidFill>
+            <a:prstDash val="solid"/>
+          </a:ln>
+        </p:spPr>
+      </p:sp>
+      <p:sp>
+        <p:nvSpPr>
+          <p:cNvPr id="60" name="Shape 56"/>
+          <p:cNvSpPr/>
+          <p:nvPr/>
+        </p:nvSpPr>
+        <p:spPr>
+          <a:xfrm>
+            <a:off x="6362700" y="5144453"/>
+            <a:ext cx="1023580" cy="7620"/>
+          </a:xfrm>
+          <a:prstGeom prst="rect">
+            <a:avLst/>
+          </a:prstGeom>
+          <a:solidFill>
+            <a:srgbClr val="C1D2DE"/>
+          </a:solidFill>
+          <a:ln w="12700">
+            <a:solidFill>
+              <a:srgbClr val="C1D2DE">
+                <a:alpha val="0"/>
+              </a:srgbClr>
+            </a:solidFill>
+            <a:prstDash val="solid"/>
+          </a:ln>
+        </p:spPr>
+      </p:sp>
+      <p:sp>
+        <p:nvSpPr>
+          <p:cNvPr id="61" name="Text 57"/>
+          <p:cNvSpPr/>
+          <p:nvPr/>
+        </p:nvSpPr>
+        <p:spPr>
+          <a:xfrm>
+            <a:off x="6454140" y="4723686"/>
+            <a:ext cx="840700" cy="257651"/>
+          </a:xfrm>
+          <a:prstGeom prst="rect">
+            <a:avLst/>
+          </a:prstGeom>
+          <a:noFill/>
+          <a:ln/>
+        </p:spPr>
+        <p:txBody>
+          <a:bodyPr wrap="square" lIns="0" tIns="0" rIns="0" bIns="0" rtlCol="0" anchor="ctr"/>
+          <a:lstStyle/>
+          <a:p>
+            <a:pPr algn="l" indent="0" marL="0">
+              <a:lnSpc>
+                <a:spcPts val="2030"/>
+              </a:lnSpc>
+              <a:buNone/>
+            </a:pPr>
+            <a:r>
+              <a:rPr lang="en-US" sz="1400" b="1" dirty="0">
+                <a:solidFill>
+                  <a:srgbClr val="18383F"/>
+                </a:solidFill>
+                <a:latin typeface="Microsoft YaHei" pitchFamily="34" charset="0"/>
+                <a:ea typeface="Microsoft YaHei" pitchFamily="34" charset="-122"/>
+                <a:cs typeface="Microsoft YaHei" pitchFamily="34" charset="-120"/>
+              </a:rPr>
+              <a:t>下次汇报</a:t>
+            </a:r>
+            <a:endParaRPr lang="en-US" sz="1400" dirty="0"/>
+          </a:p>
+        </p:txBody>
+      </p:sp>
+      <p:sp>
+        <p:nvSpPr>
+          <p:cNvPr id="62" name="Shape 58"/>
+          <p:cNvSpPr/>
+          <p:nvPr/>
+        </p:nvSpPr>
+        <p:spPr>
+          <a:xfrm>
+            <a:off x="7386280" y="4552950"/>
+            <a:ext cx="1939409" cy="599123"/>
+          </a:xfrm>
+          <a:prstGeom prst="rect">
+            <a:avLst/>
+          </a:prstGeom>
+          <a:solidFill>
+            <a:srgbClr val="EDF6F5"/>
+          </a:solidFill>
+          <a:ln w="12700">
+            <a:solidFill>
+              <a:srgbClr val="EDF6F5">
+                <a:alpha val="0"/>
+              </a:srgbClr>
+            </a:solidFill>
+            <a:prstDash val="solid"/>
+          </a:ln>
+        </p:spPr>
+      </p:sp>
+      <p:sp>
+        <p:nvSpPr>
+          <p:cNvPr id="63" name="Shape 59"/>
+          <p:cNvSpPr/>
+          <p:nvPr/>
+        </p:nvSpPr>
+        <p:spPr>
+          <a:xfrm>
+            <a:off x="7386280" y="5144453"/>
+            <a:ext cx="1939409" cy="7620"/>
+          </a:xfrm>
+          <a:prstGeom prst="rect">
+            <a:avLst/>
+          </a:prstGeom>
+          <a:solidFill>
+            <a:srgbClr val="C1D2DE"/>
+          </a:solidFill>
+          <a:ln w="12700">
+            <a:solidFill>
+              <a:srgbClr val="C1D2DE">
+                <a:alpha val="0"/>
+              </a:srgbClr>
+            </a:solidFill>
+            <a:prstDash val="solid"/>
+          </a:ln>
+        </p:spPr>
+      </p:sp>
+      <p:sp>
+        <p:nvSpPr>
+          <p:cNvPr id="64" name="Text 60"/>
+          <p:cNvSpPr/>
+          <p:nvPr/>
+        </p:nvSpPr>
+        <p:spPr>
+          <a:xfrm>
+            <a:off x="7477720" y="4594860"/>
+            <a:ext cx="1756529" cy="515303"/>
+          </a:xfrm>
+          <a:prstGeom prst="rect">
+            <a:avLst/>
+          </a:prstGeom>
+          <a:noFill/>
+          <a:ln/>
+        </p:spPr>
+        <p:txBody>
+          <a:bodyPr wrap="square" lIns="0" tIns="0" rIns="0" bIns="0" rtlCol="0" anchor="ctr"/>
+          <a:lstStyle/>
+          <a:p>
+            <a:pPr algn="l" indent="0" marL="0">
+              <a:lnSpc>
+                <a:spcPts val="2030"/>
+              </a:lnSpc>
+              <a:buNone/>
+            </a:pPr>
+            <a:r>
+              <a:rPr lang="en-US" sz="1400" dirty="0">
+                <a:solidFill>
+                  <a:srgbClr val="18383F"/>
+                </a:solidFill>
+                <a:latin typeface="Microsoft YaHei" pitchFamily="34" charset="0"/>
+                <a:ea typeface="Microsoft YaHei" pitchFamily="34" charset="-122"/>
+                <a:cs typeface="Microsoft YaHei" pitchFamily="34" charset="-120"/>
+              </a:rPr>
+              <a:t>汇总新增证据</a:t>
+            </a:r>
+            <a:endParaRPr lang="en-US" sz="1400" dirty="0"/>
+          </a:p>
+          <a:p>
+            <a:pPr algn="l" indent="0" marL="0">
+              <a:lnSpc>
+                <a:spcPts val="2030"/>
+              </a:lnSpc>
+              <a:buNone/>
+            </a:pPr>
+            <a:r>
+              <a:rPr lang="en-US" sz="1400" dirty="0">
+                <a:solidFill>
+                  <a:srgbClr val="18383F"/>
+                </a:solidFill>
+                <a:latin typeface="Microsoft YaHei" pitchFamily="34" charset="0"/>
+                <a:ea typeface="Microsoft YaHei" pitchFamily="34" charset="-122"/>
+                <a:cs typeface="Microsoft YaHei" pitchFamily="34" charset="-120"/>
+              </a:rPr>
+              <a:t>逐项回应问题</a:t>
+            </a:r>
+            <a:endParaRPr lang="en-US" sz="1400" dirty="0"/>
+          </a:p>
+        </p:txBody>
+      </p:sp>
+      <p:sp>
+        <p:nvSpPr>
+          <p:cNvPr id="65" name="Shape 61"/>
+          <p:cNvSpPr/>
+          <p:nvPr/>
+        </p:nvSpPr>
+        <p:spPr>
+          <a:xfrm>
+            <a:off x="9325689" y="4552950"/>
+            <a:ext cx="2424351" cy="599123"/>
+          </a:xfrm>
+          <a:prstGeom prst="rect">
+            <a:avLst/>
+          </a:prstGeom>
+          <a:solidFill>
+            <a:srgbClr val="EDF6F5"/>
+          </a:solidFill>
+          <a:ln w="12700">
+            <a:solidFill>
+              <a:srgbClr val="EDF6F5">
+                <a:alpha val="0"/>
+              </a:srgbClr>
+            </a:solidFill>
+            <a:prstDash val="solid"/>
+          </a:ln>
+        </p:spPr>
+      </p:sp>
+      <p:sp>
+        <p:nvSpPr>
+          <p:cNvPr id="66" name="Shape 62"/>
+          <p:cNvSpPr/>
+          <p:nvPr/>
+        </p:nvSpPr>
+        <p:spPr>
+          <a:xfrm>
+            <a:off x="9325689" y="5144453"/>
+            <a:ext cx="2424351" cy="7620"/>
+          </a:xfrm>
+          <a:prstGeom prst="rect">
+            <a:avLst/>
+          </a:prstGeom>
+          <a:solidFill>
+            <a:srgbClr val="C1D2DE"/>
+          </a:solidFill>
+          <a:ln w="12700">
+            <a:solidFill>
+              <a:srgbClr val="C1D2DE">
+                <a:alpha val="0"/>
+              </a:srgbClr>
+            </a:solidFill>
+            <a:prstDash val="solid"/>
+          </a:ln>
+        </p:spPr>
+      </p:sp>
+      <p:sp>
+        <p:nvSpPr>
+          <p:cNvPr id="67" name="Text 63"/>
+          <p:cNvSpPr/>
+          <p:nvPr/>
+        </p:nvSpPr>
+        <p:spPr>
+          <a:xfrm>
+            <a:off x="9417129" y="4594860"/>
+            <a:ext cx="2241471" cy="515303"/>
+          </a:xfrm>
+          <a:prstGeom prst="rect">
+            <a:avLst/>
+          </a:prstGeom>
+          <a:noFill/>
+          <a:ln/>
+        </p:spPr>
+        <p:txBody>
+          <a:bodyPr wrap="square" lIns="0" tIns="0" rIns="0" bIns="0" rtlCol="0" anchor="ctr"/>
+          <a:lstStyle/>
+          <a:p>
+            <a:pPr algn="l" indent="0" marL="0">
+              <a:lnSpc>
+                <a:spcPts val="2030"/>
+              </a:lnSpc>
+              <a:buNone/>
+            </a:pPr>
+            <a:r>
+              <a:rPr lang="en-US" sz="1400" dirty="0">
+                <a:solidFill>
+                  <a:srgbClr val="18383F"/>
+                </a:solidFill>
+                <a:latin typeface="Microsoft YaHei" pitchFamily="34" charset="0"/>
+                <a:ea typeface="Microsoft YaHei" pitchFamily="34" charset="-122"/>
+                <a:cs typeface="Microsoft YaHei" pitchFamily="34" charset="-120"/>
+              </a:rPr>
+              <a:t>更新图表与问题清单</a:t>
+            </a:r>
+            <a:endParaRPr lang="en-US" sz="1400" dirty="0"/>
+          </a:p>
+          <a:p>
+            <a:pPr algn="l" indent="0" marL="0">
+              <a:lnSpc>
+                <a:spcPts val="2030"/>
+              </a:lnSpc>
+              <a:buNone/>
+            </a:pPr>
+            <a:r>
+              <a:rPr lang="en-US" sz="1400" dirty="0">
+                <a:solidFill>
+                  <a:srgbClr val="18383F"/>
+                </a:solidFill>
+                <a:latin typeface="Microsoft YaHei" pitchFamily="34" charset="0"/>
+                <a:ea typeface="Microsoft YaHei" pitchFamily="34" charset="-122"/>
+                <a:cs typeface="Microsoft YaHei" pitchFamily="34" charset="-120"/>
+              </a:rPr>
+              <a:t>修订研究结论</a:t>
+            </a:r>
+            <a:endParaRPr lang="en-US" sz="1400" dirty="0"/>
+          </a:p>
+        </p:txBody>
+      </p:sp>
+      <p:sp>
+        <p:nvSpPr>
+          <p:cNvPr id="68" name="Shape 64"/>
+          <p:cNvSpPr/>
+          <p:nvPr/>
+        </p:nvSpPr>
+        <p:spPr>
+          <a:xfrm>
+            <a:off x="6355080" y="5273040"/>
+            <a:ext cx="5394960" cy="899160"/>
+          </a:xfrm>
+          <a:prstGeom prst="rect">
+            <a:avLst/>
+          </a:prstGeom>
+          <a:solidFill>
+            <a:srgbClr val="EDF6F5"/>
+          </a:solidFill>
+          <a:ln w="12700">
+            <a:solidFill>
+              <a:srgbClr val="EDF6F5">
+                <a:alpha val="0"/>
+              </a:srgbClr>
+            </a:solidFill>
+            <a:prstDash val="solid"/>
+          </a:ln>
+        </p:spPr>
+      </p:sp>
+      <p:sp>
+        <p:nvSpPr>
+          <p:cNvPr id="69" name="Shape 65"/>
+          <p:cNvSpPr/>
+          <p:nvPr/>
+        </p:nvSpPr>
+        <p:spPr>
+          <a:xfrm>
+            <a:off x="6355080" y="5273040"/>
+            <a:ext cx="45720" cy="899160"/>
+          </a:xfrm>
+          <a:prstGeom prst="rect">
+            <a:avLst/>
+          </a:prstGeom>
+          <a:solidFill>
+            <a:srgbClr val="0F6674"/>
+          </a:solidFill>
+          <a:ln w="12700">
+            <a:solidFill>
+              <a:srgbClr val="0F6674">
+                <a:alpha val="0"/>
+              </a:srgbClr>
+            </a:solidFill>
+            <a:prstDash val="solid"/>
+          </a:ln>
+        </p:spPr>
+      </p:sp>
+      <p:sp>
+        <p:nvSpPr>
+          <p:cNvPr id="70" name="Text 66"/>
+          <p:cNvSpPr/>
+          <p:nvPr/>
+        </p:nvSpPr>
+        <p:spPr>
+          <a:xfrm>
+            <a:off x="6477000" y="5389840"/>
+            <a:ext cx="5151120" cy="294680"/>
+          </a:xfrm>
+          <a:prstGeom prst="rect">
+            <a:avLst/>
+          </a:prstGeom>
+          <a:noFill/>
+          <a:ln/>
+        </p:spPr>
+        <p:txBody>
+          <a:bodyPr wrap="square" lIns="0" tIns="0" rIns="0" bIns="0" rtlCol="0" anchor="ctr"/>
+          <a:lstStyle/>
+          <a:p>
+            <a:pPr algn="just" indent="0" marL="0">
+              <a:lnSpc>
+                <a:spcPts val="2320"/>
               </a:lnSpc>
               <a:buNone/>
             </a:pPr>
@@ -28595,7 +30768,7 @@
                 <a:ea typeface="Microsoft YaHei" pitchFamily="34" charset="-122"/>
                 <a:cs typeface="Microsoft YaHei" pitchFamily="34" charset="-120"/>
               </a:rPr>
-              <a:t>关联对应图表，写明结论适用的场景与条件；初步观察需标明尚待复核。</a:t>
+              <a:t>本次讨论：确认实验优先级和验收标准。</a:t>
             </a:r>
             <a:endParaRPr lang="en-US" sz="1600" dirty="0"/>
           </a:p>
@@ -28603,14 +30776,56 @@
       </p:sp>
       <p:sp>
         <p:nvSpPr>
-          <p:cNvPr id="13" name="Text 9"/>
-          <p:cNvSpPr/>
-          <p:nvPr/>
-        </p:nvSpPr>
-        <p:spPr>
-          <a:xfrm>
-            <a:off x="922020" y="5088969"/>
-            <a:ext cx="4892040" cy="308610"/>
+          <p:cNvPr id="71" name="Text 67"/>
+          <p:cNvSpPr/>
+          <p:nvPr/>
+        </p:nvSpPr>
+        <p:spPr>
+          <a:xfrm>
+            <a:off x="6477000" y="5760720"/>
+            <a:ext cx="5151120" cy="294680"/>
+          </a:xfrm>
+          <a:prstGeom prst="rect">
+            <a:avLst/>
+          </a:prstGeom>
+          <a:noFill/>
+          <a:ln/>
+        </p:spPr>
+        <p:txBody>
+          <a:bodyPr wrap="square" lIns="0" tIns="0" rIns="0" bIns="0" rtlCol="0" anchor="ctr"/>
+          <a:lstStyle/>
+          <a:p>
+            <a:pPr algn="just" indent="0" marL="0">
+              <a:lnSpc>
+                <a:spcPts val="2320"/>
+              </a:lnSpc>
+              <a:buNone/>
+            </a:pPr>
+            <a:r>
+              <a:rPr lang="en-US" sz="1600" dirty="0">
+                <a:solidFill>
+                  <a:srgbClr val="18383F"/>
+                </a:solidFill>
+                <a:latin typeface="Microsoft YaHei" pitchFamily="34" charset="0"/>
+                <a:ea typeface="Microsoft YaHei" pitchFamily="34" charset="-122"/>
+                <a:cs typeface="Microsoft YaHei" pitchFamily="34" charset="-120"/>
+              </a:rPr>
+              <a:t>各阶段时间按实际进展填写。</a:t>
+            </a:r>
+            <a:endParaRPr lang="en-US" sz="1600" dirty="0"/>
+          </a:p>
+        </p:txBody>
+      </p:sp>
+      <p:sp>
+        <p:nvSpPr>
+          <p:cNvPr id="72" name="Text 68"/>
+          <p:cNvSpPr/>
+          <p:nvPr/>
+        </p:nvSpPr>
+        <p:spPr>
+          <a:xfrm>
+            <a:off x="441960" y="6485334"/>
+            <a:ext cx="2971800" cy="181332"/>
           </a:xfrm>
           <a:prstGeom prst="rect">
             <a:avLst/>
@@ -28624,35 +30839,77 @@
           <a:p>
             <a:pPr algn="l" indent="0" marL="0">
               <a:lnSpc>
-                <a:spcPts val="2430"/>
-              </a:lnSpc>
-              <a:buNone/>
-            </a:pPr>
-            <a:r>
-              <a:rPr lang="en-US" sz="1800" b="1" dirty="0">
-                <a:solidFill>
-                  <a:srgbClr val="0F6674"/>
-                </a:solidFill>
-                <a:latin typeface="Microsoft YaHei" pitchFamily="34" charset="0"/>
-                <a:ea typeface="Microsoft YaHei" pitchFamily="34" charset="-122"/>
-                <a:cs typeface="Microsoft YaHei" pitchFamily="34" charset="-120"/>
-              </a:rPr>
-              <a:t>仍待解决的问题</a:t>
-            </a:r>
-            <a:endParaRPr lang="en-US" sz="1800" dirty="0"/>
-          </a:p>
-        </p:txBody>
-      </p:sp>
-      <p:sp>
-        <p:nvSpPr>
-          <p:cNvPr id="14" name="Text 10"/>
-          <p:cNvSpPr/>
-          <p:nvPr/>
-        </p:nvSpPr>
-        <p:spPr>
-          <a:xfrm>
-            <a:off x="922020" y="5458539"/>
-            <a:ext cx="4892040" cy="609600"/>
+                <a:spcPts val="1428"/>
+              </a:lnSpc>
+              <a:buNone/>
+            </a:pPr>
+            <a:r>
+              <a:rPr lang="en-US" sz="1020" dirty="0">
+                <a:solidFill>
+                  <a:srgbClr val="617B8B"/>
+                </a:solidFill>
+                <a:latin typeface="Microsoft YaHei" pitchFamily="34" charset="0"/>
+                <a:ea typeface="Microsoft YaHei" pitchFamily="34" charset="-122"/>
+                <a:cs typeface="Microsoft YaHei" pitchFamily="34" charset="-120"/>
+              </a:rPr>
+              <a:t>丽水学院 · 科研汇报模板</a:t>
+            </a:r>
+            <a:endParaRPr lang="en-US" sz="1020" dirty="0"/>
+          </a:p>
+        </p:txBody>
+      </p:sp>
+      <p:sp>
+        <p:nvSpPr>
+          <p:cNvPr id="73" name="Text 69"/>
+          <p:cNvSpPr/>
+          <p:nvPr/>
+        </p:nvSpPr>
+        <p:spPr>
+          <a:xfrm>
+            <a:off x="3596640" y="6485334"/>
+            <a:ext cx="7534632" cy="181332"/>
+          </a:xfrm>
+          <a:prstGeom prst="rect">
+            <a:avLst/>
+          </a:prstGeom>
+          <a:noFill/>
+          <a:ln/>
+        </p:spPr>
+        <p:txBody>
+          <a:bodyPr wrap="square" lIns="0" tIns="0" rIns="0" bIns="0" rtlCol="0" anchor="ctr"/>
+          <a:lstStyle/>
+          <a:p>
+            <a:pPr algn="r" indent="0" marL="0">
+              <a:lnSpc>
+                <a:spcPts val="1428"/>
+              </a:lnSpc>
+              <a:buNone/>
+            </a:pPr>
+            <a:r>
+              <a:rPr lang="en-US" sz="1020" dirty="0">
+                <a:solidFill>
+                  <a:srgbClr val="617B8B"/>
+                </a:solidFill>
+                <a:latin typeface="Microsoft YaHei" pitchFamily="34" charset="0"/>
+                <a:ea typeface="Microsoft YaHei" pitchFamily="34" charset="-122"/>
+                <a:cs typeface="Microsoft YaHei" pitchFamily="34" charset="-120"/>
+              </a:rPr>
+              <a:t>阶段总结与任务安排示例，以实际工作记录为准</a:t>
+            </a:r>
+            <a:endParaRPr lang="en-US" sz="1020" dirty="0"/>
+          </a:p>
+        </p:txBody>
+      </p:sp>
+      <p:sp>
+        <p:nvSpPr>
+          <p:cNvPr id="74" name="Text 70"/>
+          <p:cNvSpPr/>
+          <p:nvPr/>
+        </p:nvSpPr>
+        <p:spPr>
+          <a:xfrm>
+            <a:off x="11314152" y="6485334"/>
+            <a:ext cx="435888" cy="181332"/>
           </a:xfrm>
           <a:prstGeom prst="rect">
             <a:avLst/>
@@ -28666,848 +30923,6 @@
           <a:p>
             <a:pPr algn="l" indent="0" marL="0">
               <a:lnSpc>
-                <a:spcPts val="2400"/>
-              </a:lnSpc>
-              <a:buNone/>
-            </a:pPr>
-            <a:r>
-              <a:rPr lang="en-US" sz="1600" dirty="0">
-                <a:solidFill>
-                  <a:srgbClr val="18383F"/>
-                </a:solidFill>
-                <a:latin typeface="Microsoft YaHei" pitchFamily="34" charset="0"/>
-                <a:ea typeface="Microsoft YaHei" pitchFamily="34" charset="-122"/>
-                <a:cs typeface="Microsoft YaHei" pitchFamily="34" charset="-120"/>
-              </a:rPr>
-              <a:t>指出未覆盖的场景、失败情形及主要限制，说明其对当前判断的影响。</a:t>
-            </a:r>
-            <a:endParaRPr lang="en-US" sz="1600" dirty="0"/>
-          </a:p>
-        </p:txBody>
-      </p:sp>
-      <p:sp>
-        <p:nvSpPr>
-          <p:cNvPr id="15" name="Text 11"/>
-          <p:cNvSpPr/>
-          <p:nvPr/>
-        </p:nvSpPr>
-        <p:spPr>
-          <a:xfrm>
-            <a:off x="6499860" y="1945600"/>
-            <a:ext cx="5250180" cy="330041"/>
-          </a:xfrm>
-          <a:prstGeom prst="rect">
-            <a:avLst/>
-          </a:prstGeom>
-          <a:noFill/>
-          <a:ln/>
-        </p:spPr>
-        <p:txBody>
-          <a:bodyPr wrap="square" lIns="0" tIns="0" rIns="0" bIns="0" rtlCol="0" anchor="ctr"/>
-          <a:lstStyle/>
-          <a:p>
-            <a:pPr algn="l" indent="0" marL="0">
-              <a:lnSpc>
-                <a:spcPts val="2600"/>
-              </a:lnSpc>
-              <a:buNone/>
-            </a:pPr>
-            <a:r>
-              <a:rPr lang="en-US" sz="2000" b="1" dirty="0">
-                <a:solidFill>
-                  <a:srgbClr val="0F6674"/>
-                </a:solidFill>
-                <a:latin typeface="Microsoft YaHei" pitchFamily="34" charset="0"/>
-                <a:ea typeface="Microsoft YaHei" pitchFamily="34" charset="-122"/>
-                <a:cs typeface="Microsoft YaHei" pitchFamily="34" charset="-120"/>
-              </a:rPr>
-              <a:t>下一步计划</a:t>
-            </a:r>
-            <a:endParaRPr lang="en-US" sz="2000" dirty="0"/>
-          </a:p>
-        </p:txBody>
-      </p:sp>
-      <p:sp>
-        <p:nvSpPr>
-          <p:cNvPr id="16" name="Text 12"/>
-          <p:cNvSpPr/>
-          <p:nvPr/>
-        </p:nvSpPr>
-        <p:spPr>
-          <a:xfrm>
-            <a:off x="6591300" y="2841903"/>
-            <a:ext cx="814626" cy="522923"/>
-          </a:xfrm>
-          <a:prstGeom prst="rect">
-            <a:avLst/>
-          </a:prstGeom>
-          <a:noFill/>
-          <a:ln/>
-        </p:spPr>
-        <p:txBody>
-          <a:bodyPr wrap="square" lIns="0" tIns="0" rIns="0" bIns="0" rtlCol="0" anchor="ctr"/>
-          <a:lstStyle/>
-          <a:p>
-            <a:pPr algn="l" indent="0" marL="0">
-              <a:lnSpc>
-                <a:spcPts val="2030"/>
-              </a:lnSpc>
-              <a:buNone/>
-            </a:pPr>
-            <a:r>
-              <a:rPr lang="en-US" sz="1400" b="1" dirty="0">
-                <a:solidFill>
-                  <a:srgbClr val="18383F"/>
-                </a:solidFill>
-                <a:latin typeface="Microsoft YaHei" pitchFamily="34" charset="0"/>
-                <a:ea typeface="Microsoft YaHei" pitchFamily="34" charset="-122"/>
-                <a:cs typeface="Microsoft YaHei" pitchFamily="34" charset="-120"/>
-              </a:rPr>
-              <a:t>近期</a:t>
-            </a:r>
-            <a:endParaRPr lang="en-US" sz="1400" dirty="0"/>
-          </a:p>
-        </p:txBody>
-      </p:sp>
-      <p:sp>
-        <p:nvSpPr>
-          <p:cNvPr id="17" name="Text 13"/>
-          <p:cNvSpPr/>
-          <p:nvPr/>
-        </p:nvSpPr>
-        <p:spPr>
-          <a:xfrm>
-            <a:off x="7588806" y="2841903"/>
-            <a:ext cx="1707118" cy="522923"/>
-          </a:xfrm>
-          <a:prstGeom prst="rect">
-            <a:avLst/>
-          </a:prstGeom>
-          <a:noFill/>
-          <a:ln/>
-        </p:spPr>
-        <p:txBody>
-          <a:bodyPr wrap="square" lIns="0" tIns="0" rIns="0" bIns="0" rtlCol="0" anchor="ctr"/>
-          <a:lstStyle/>
-          <a:p>
-            <a:pPr algn="l" indent="0" marL="0">
-              <a:lnSpc>
-                <a:spcPts val="2030"/>
-              </a:lnSpc>
-              <a:buNone/>
-            </a:pPr>
-            <a:r>
-              <a:rPr lang="en-US" sz="1400" dirty="0">
-                <a:solidFill>
-                  <a:srgbClr val="18383F"/>
-                </a:solidFill>
-                <a:latin typeface="Microsoft YaHei" pitchFamily="34" charset="0"/>
-                <a:ea typeface="Microsoft YaHei" pitchFamily="34" charset="-122"/>
-                <a:cs typeface="Microsoft YaHei" pitchFamily="34" charset="-120"/>
-              </a:rPr>
-              <a:t>统一实验设置</a:t>
-            </a:r>
-            <a:endParaRPr lang="en-US" sz="1400" dirty="0"/>
-          </a:p>
-          <a:p>
-            <a:pPr algn="l" indent="0" marL="0">
-              <a:lnSpc>
-                <a:spcPts val="2030"/>
-              </a:lnSpc>
-              <a:buNone/>
-            </a:pPr>
-            <a:r>
-              <a:rPr lang="en-US" sz="1400" dirty="0">
-                <a:solidFill>
-                  <a:srgbClr val="18383F"/>
-                </a:solidFill>
-                <a:latin typeface="Microsoft YaHei" pitchFamily="34" charset="0"/>
-                <a:ea typeface="Microsoft YaHei" pitchFamily="34" charset="-122"/>
-                <a:cs typeface="Microsoft YaHei" pitchFamily="34" charset="-120"/>
-              </a:rPr>
-              <a:t>固定数据划分</a:t>
-            </a:r>
-            <a:endParaRPr lang="en-US" sz="1400" dirty="0"/>
-          </a:p>
-        </p:txBody>
-      </p:sp>
-      <p:sp>
-        <p:nvSpPr>
-          <p:cNvPr id="18" name="Text 14"/>
-          <p:cNvSpPr/>
-          <p:nvPr/>
-        </p:nvSpPr>
-        <p:spPr>
-          <a:xfrm>
-            <a:off x="9478804" y="2841903"/>
-            <a:ext cx="2179796" cy="522923"/>
-          </a:xfrm>
-          <a:prstGeom prst="rect">
-            <a:avLst/>
-          </a:prstGeom>
-          <a:noFill/>
-          <a:ln/>
-        </p:spPr>
-        <p:txBody>
-          <a:bodyPr wrap="square" lIns="0" tIns="0" rIns="0" bIns="0" rtlCol="0" anchor="ctr"/>
-          <a:lstStyle/>
-          <a:p>
-            <a:pPr algn="l" indent="0" marL="0">
-              <a:lnSpc>
-                <a:spcPts val="2030"/>
-              </a:lnSpc>
-              <a:buNone/>
-            </a:pPr>
-            <a:r>
-              <a:rPr lang="en-US" sz="1400" dirty="0">
-                <a:solidFill>
-                  <a:srgbClr val="18383F"/>
-                </a:solidFill>
-                <a:latin typeface="Microsoft YaHei" pitchFamily="34" charset="0"/>
-                <a:ea typeface="Microsoft YaHei" pitchFamily="34" charset="-122"/>
-                <a:cs typeface="Microsoft YaHei" pitchFamily="34" charset="-120"/>
-              </a:rPr>
-              <a:t>参数清单、数据版本</a:t>
-            </a:r>
-            <a:endParaRPr lang="en-US" sz="1400" dirty="0"/>
-          </a:p>
-          <a:p>
-            <a:pPr algn="l" indent="0" marL="0">
-              <a:lnSpc>
-                <a:spcPts val="2030"/>
-              </a:lnSpc>
-              <a:buNone/>
-            </a:pPr>
-            <a:r>
-              <a:rPr lang="en-US" sz="1400" dirty="0">
-                <a:solidFill>
-                  <a:srgbClr val="18383F"/>
-                </a:solidFill>
-                <a:latin typeface="Microsoft YaHei" pitchFamily="34" charset="0"/>
-                <a:ea typeface="Microsoft YaHei" pitchFamily="34" charset="-122"/>
-                <a:cs typeface="Microsoft YaHei" pitchFamily="34" charset="-120"/>
-              </a:rPr>
-              <a:t>及可复现的实验脚本</a:t>
-            </a:r>
-            <a:endParaRPr lang="en-US" sz="1400" dirty="0"/>
-          </a:p>
-        </p:txBody>
-      </p:sp>
-      <p:sp>
-        <p:nvSpPr>
-          <p:cNvPr id="19" name="Text 15"/>
-          <p:cNvSpPr/>
-          <p:nvPr/>
-        </p:nvSpPr>
-        <p:spPr>
-          <a:xfrm>
-            <a:off x="6591300" y="3486745"/>
-            <a:ext cx="814626" cy="522923"/>
-          </a:xfrm>
-          <a:prstGeom prst="rect">
-            <a:avLst/>
-          </a:prstGeom>
-          <a:noFill/>
-          <a:ln/>
-        </p:spPr>
-        <p:txBody>
-          <a:bodyPr wrap="square" lIns="0" tIns="0" rIns="0" bIns="0" rtlCol="0" anchor="ctr"/>
-          <a:lstStyle/>
-          <a:p>
-            <a:pPr algn="l" indent="0" marL="0">
-              <a:lnSpc>
-                <a:spcPts val="2030"/>
-              </a:lnSpc>
-              <a:buNone/>
-            </a:pPr>
-            <a:r>
-              <a:rPr lang="en-US" sz="1400" b="1" dirty="0">
-                <a:solidFill>
-                  <a:srgbClr val="18383F"/>
-                </a:solidFill>
-                <a:latin typeface="Microsoft YaHei" pitchFamily="34" charset="0"/>
-                <a:ea typeface="Microsoft YaHei" pitchFamily="34" charset="-122"/>
-                <a:cs typeface="Microsoft YaHei" pitchFamily="34" charset="-120"/>
-              </a:rPr>
-              <a:t>随后</a:t>
-            </a:r>
-            <a:endParaRPr lang="en-US" sz="1400" dirty="0"/>
-          </a:p>
-        </p:txBody>
-      </p:sp>
-      <p:sp>
-        <p:nvSpPr>
-          <p:cNvPr id="20" name="Text 16"/>
-          <p:cNvSpPr/>
-          <p:nvPr/>
-        </p:nvSpPr>
-        <p:spPr>
-          <a:xfrm>
-            <a:off x="7588806" y="3486745"/>
-            <a:ext cx="1707118" cy="522923"/>
-          </a:xfrm>
-          <a:prstGeom prst="rect">
-            <a:avLst/>
-          </a:prstGeom>
-          <a:noFill/>
-          <a:ln/>
-        </p:spPr>
-        <p:txBody>
-          <a:bodyPr wrap="square" lIns="0" tIns="0" rIns="0" bIns="0" rtlCol="0" anchor="ctr"/>
-          <a:lstStyle/>
-          <a:p>
-            <a:pPr algn="l" indent="0" marL="0">
-              <a:lnSpc>
-                <a:spcPts val="2030"/>
-              </a:lnSpc>
-              <a:buNone/>
-            </a:pPr>
-            <a:r>
-              <a:rPr lang="en-US" sz="1400" dirty="0">
-                <a:solidFill>
-                  <a:srgbClr val="18383F"/>
-                </a:solidFill>
-                <a:latin typeface="Microsoft YaHei" pitchFamily="34" charset="0"/>
-                <a:ea typeface="Microsoft YaHei" pitchFamily="34" charset="-122"/>
-                <a:cs typeface="Microsoft YaHei" pitchFamily="34" charset="-120"/>
-              </a:rPr>
-              <a:t>补充对照实验</a:t>
-            </a:r>
-            <a:endParaRPr lang="en-US" sz="1400" dirty="0"/>
-          </a:p>
-          <a:p>
-            <a:pPr algn="l" indent="0" marL="0">
-              <a:lnSpc>
-                <a:spcPts val="2030"/>
-              </a:lnSpc>
-              <a:buNone/>
-            </a:pPr>
-            <a:r>
-              <a:rPr lang="en-US" sz="1400" dirty="0">
-                <a:solidFill>
-                  <a:srgbClr val="18383F"/>
-                </a:solidFill>
-                <a:latin typeface="Microsoft YaHei" pitchFamily="34" charset="0"/>
-                <a:ea typeface="Microsoft YaHei" pitchFamily="34" charset="-122"/>
-                <a:cs typeface="Microsoft YaHei" pitchFamily="34" charset="-120"/>
-              </a:rPr>
-              <a:t>开展关键消融</a:t>
-            </a:r>
-            <a:endParaRPr lang="en-US" sz="1400" dirty="0"/>
-          </a:p>
-        </p:txBody>
-      </p:sp>
-      <p:sp>
-        <p:nvSpPr>
-          <p:cNvPr id="21" name="Text 17"/>
-          <p:cNvSpPr/>
-          <p:nvPr/>
-        </p:nvSpPr>
-        <p:spPr>
-          <a:xfrm>
-            <a:off x="9478804" y="3486745"/>
-            <a:ext cx="2179796" cy="522923"/>
-          </a:xfrm>
-          <a:prstGeom prst="rect">
-            <a:avLst/>
-          </a:prstGeom>
-          <a:noFill/>
-          <a:ln/>
-        </p:spPr>
-        <p:txBody>
-          <a:bodyPr wrap="square" lIns="0" tIns="0" rIns="0" bIns="0" rtlCol="0" anchor="ctr"/>
-          <a:lstStyle/>
-          <a:p>
-            <a:pPr algn="l" indent="0" marL="0">
-              <a:lnSpc>
-                <a:spcPts val="2030"/>
-              </a:lnSpc>
-              <a:buNone/>
-            </a:pPr>
-            <a:r>
-              <a:rPr lang="en-US" sz="1400" dirty="0">
-                <a:solidFill>
-                  <a:srgbClr val="18383F"/>
-                </a:solidFill>
-                <a:latin typeface="Microsoft YaHei" pitchFamily="34" charset="0"/>
-                <a:ea typeface="Microsoft YaHei" pitchFamily="34" charset="-122"/>
-                <a:cs typeface="Microsoft YaHei" pitchFamily="34" charset="-120"/>
-              </a:rPr>
-              <a:t>均值 ± 标准差</a:t>
-            </a:r>
-            <a:endParaRPr lang="en-US" sz="1400" dirty="0"/>
-          </a:p>
-          <a:p>
-            <a:pPr algn="l" indent="0" marL="0">
-              <a:lnSpc>
-                <a:spcPts val="2030"/>
-              </a:lnSpc>
-              <a:buNone/>
-            </a:pPr>
-            <a:r>
-              <a:rPr lang="en-US" sz="1400" dirty="0">
-                <a:solidFill>
-                  <a:srgbClr val="18383F"/>
-                </a:solidFill>
-                <a:latin typeface="Microsoft YaHei" pitchFamily="34" charset="0"/>
-                <a:ea typeface="Microsoft YaHei" pitchFamily="34" charset="-122"/>
-                <a:cs typeface="Microsoft YaHei" pitchFamily="34" charset="-120"/>
-              </a:rPr>
-              <a:t>重复次数及原始日志</a:t>
-            </a:r>
-            <a:endParaRPr lang="en-US" sz="1400" dirty="0"/>
-          </a:p>
-        </p:txBody>
-      </p:sp>
-      <p:sp>
-        <p:nvSpPr>
-          <p:cNvPr id="22" name="Text 18"/>
-          <p:cNvSpPr/>
-          <p:nvPr/>
-        </p:nvSpPr>
-        <p:spPr>
-          <a:xfrm>
-            <a:off x="6591300" y="4131588"/>
-            <a:ext cx="814626" cy="522923"/>
-          </a:xfrm>
-          <a:prstGeom prst="rect">
-            <a:avLst/>
-          </a:prstGeom>
-          <a:noFill/>
-          <a:ln/>
-        </p:spPr>
-        <p:txBody>
-          <a:bodyPr wrap="square" lIns="0" tIns="0" rIns="0" bIns="0" rtlCol="0" anchor="ctr"/>
-          <a:lstStyle/>
-          <a:p>
-            <a:pPr algn="l" indent="0" marL="0">
-              <a:lnSpc>
-                <a:spcPts val="2030"/>
-              </a:lnSpc>
-              <a:buNone/>
-            </a:pPr>
-            <a:r>
-              <a:rPr lang="en-US" sz="1400" b="1" dirty="0">
-                <a:solidFill>
-                  <a:srgbClr val="18383F"/>
-                </a:solidFill>
-                <a:latin typeface="Microsoft YaHei" pitchFamily="34" charset="0"/>
-                <a:ea typeface="Microsoft YaHei" pitchFamily="34" charset="-122"/>
-                <a:cs typeface="Microsoft YaHei" pitchFamily="34" charset="-120"/>
-              </a:rPr>
-              <a:t>并行</a:t>
-            </a:r>
-            <a:endParaRPr lang="en-US" sz="1400" dirty="0"/>
-          </a:p>
-        </p:txBody>
-      </p:sp>
-      <p:sp>
-        <p:nvSpPr>
-          <p:cNvPr id="23" name="Text 19"/>
-          <p:cNvSpPr/>
-          <p:nvPr/>
-        </p:nvSpPr>
-        <p:spPr>
-          <a:xfrm>
-            <a:off x="7588806" y="4131588"/>
-            <a:ext cx="1707118" cy="522923"/>
-          </a:xfrm>
-          <a:prstGeom prst="rect">
-            <a:avLst/>
-          </a:prstGeom>
-          <a:noFill/>
-          <a:ln/>
-        </p:spPr>
-        <p:txBody>
-          <a:bodyPr wrap="square" lIns="0" tIns="0" rIns="0" bIns="0" rtlCol="0" anchor="ctr"/>
-          <a:lstStyle/>
-          <a:p>
-            <a:pPr algn="l" indent="0" marL="0">
-              <a:lnSpc>
-                <a:spcPts val="2030"/>
-              </a:lnSpc>
-              <a:buNone/>
-            </a:pPr>
-            <a:r>
-              <a:rPr lang="en-US" sz="1400" dirty="0">
-                <a:solidFill>
-                  <a:srgbClr val="18383F"/>
-                </a:solidFill>
-                <a:latin typeface="Microsoft YaHei" pitchFamily="34" charset="0"/>
-                <a:ea typeface="Microsoft YaHei" pitchFamily="34" charset="-122"/>
-                <a:cs typeface="Microsoft YaHei" pitchFamily="34" charset="-120"/>
-              </a:rPr>
-              <a:t>分析异常结果</a:t>
-            </a:r>
-            <a:endParaRPr lang="en-US" sz="1400" dirty="0"/>
-          </a:p>
-          <a:p>
-            <a:pPr algn="l" indent="0" marL="0">
-              <a:lnSpc>
-                <a:spcPts val="2030"/>
-              </a:lnSpc>
-              <a:buNone/>
-            </a:pPr>
-            <a:r>
-              <a:rPr lang="en-US" sz="1400" dirty="0">
-                <a:solidFill>
-                  <a:srgbClr val="18383F"/>
-                </a:solidFill>
-                <a:latin typeface="Microsoft YaHei" pitchFamily="34" charset="0"/>
-                <a:ea typeface="Microsoft YaHei" pitchFamily="34" charset="-122"/>
-                <a:cs typeface="Microsoft YaHei" pitchFamily="34" charset="-120"/>
-              </a:rPr>
-              <a:t>归纳失败案例</a:t>
-            </a:r>
-            <a:endParaRPr lang="en-US" sz="1400" dirty="0"/>
-          </a:p>
-        </p:txBody>
-      </p:sp>
-      <p:sp>
-        <p:nvSpPr>
-          <p:cNvPr id="24" name="Text 20"/>
-          <p:cNvSpPr/>
-          <p:nvPr/>
-        </p:nvSpPr>
-        <p:spPr>
-          <a:xfrm>
-            <a:off x="9478804" y="4131588"/>
-            <a:ext cx="2179796" cy="522923"/>
-          </a:xfrm>
-          <a:prstGeom prst="rect">
-            <a:avLst/>
-          </a:prstGeom>
-          <a:noFill/>
-          <a:ln/>
-        </p:spPr>
-        <p:txBody>
-          <a:bodyPr wrap="square" lIns="0" tIns="0" rIns="0" bIns="0" rtlCol="0" anchor="ctr"/>
-          <a:lstStyle/>
-          <a:p>
-            <a:pPr algn="l" indent="0" marL="0">
-              <a:lnSpc>
-                <a:spcPts val="2030"/>
-              </a:lnSpc>
-              <a:buNone/>
-            </a:pPr>
-            <a:r>
-              <a:rPr lang="en-US" sz="1400" dirty="0">
-                <a:solidFill>
-                  <a:srgbClr val="18383F"/>
-                </a:solidFill>
-                <a:latin typeface="Microsoft YaHei" pitchFamily="34" charset="0"/>
-                <a:ea typeface="Microsoft YaHei" pitchFamily="34" charset="-122"/>
-                <a:cs typeface="Microsoft YaHei" pitchFamily="34" charset="-120"/>
-              </a:rPr>
-              <a:t>差异解释与边界条件</a:t>
-            </a:r>
-            <a:endParaRPr lang="en-US" sz="1400" dirty="0"/>
-          </a:p>
-          <a:p>
-            <a:pPr algn="l" indent="0" marL="0">
-              <a:lnSpc>
-                <a:spcPts val="2030"/>
-              </a:lnSpc>
-              <a:buNone/>
-            </a:pPr>
-            <a:r>
-              <a:rPr lang="en-US" sz="1400" dirty="0">
-                <a:solidFill>
-                  <a:srgbClr val="18383F"/>
-                </a:solidFill>
-                <a:latin typeface="Microsoft YaHei" pitchFamily="34" charset="0"/>
-                <a:ea typeface="Microsoft YaHei" pitchFamily="34" charset="-122"/>
-                <a:cs typeface="Microsoft YaHei" pitchFamily="34" charset="-120"/>
-              </a:rPr>
-              <a:t>可定位的典型样例</a:t>
-            </a:r>
-            <a:endParaRPr lang="en-US" sz="1400" dirty="0"/>
-          </a:p>
-        </p:txBody>
-      </p:sp>
-      <p:sp>
-        <p:nvSpPr>
-          <p:cNvPr id="25" name="Text 21"/>
-          <p:cNvSpPr/>
-          <p:nvPr/>
-        </p:nvSpPr>
-        <p:spPr>
-          <a:xfrm>
-            <a:off x="6591300" y="4776430"/>
-            <a:ext cx="814626" cy="522923"/>
-          </a:xfrm>
-          <a:prstGeom prst="rect">
-            <a:avLst/>
-          </a:prstGeom>
-          <a:noFill/>
-          <a:ln/>
-        </p:spPr>
-        <p:txBody>
-          <a:bodyPr wrap="square" lIns="0" tIns="0" rIns="0" bIns="0" rtlCol="0" anchor="ctr"/>
-          <a:lstStyle/>
-          <a:p>
-            <a:pPr algn="l" indent="0" marL="0">
-              <a:lnSpc>
-                <a:spcPts val="2030"/>
-              </a:lnSpc>
-              <a:buNone/>
-            </a:pPr>
-            <a:r>
-              <a:rPr lang="en-US" sz="1400" b="1" dirty="0">
-                <a:solidFill>
-                  <a:srgbClr val="18383F"/>
-                </a:solidFill>
-                <a:latin typeface="Microsoft YaHei" pitchFamily="34" charset="0"/>
-                <a:ea typeface="Microsoft YaHei" pitchFamily="34" charset="-122"/>
-                <a:cs typeface="Microsoft YaHei" pitchFamily="34" charset="-120"/>
-              </a:rPr>
-              <a:t>下次汇报</a:t>
-            </a:r>
-            <a:endParaRPr lang="en-US" sz="1400" dirty="0"/>
-          </a:p>
-        </p:txBody>
-      </p:sp>
-      <p:sp>
-        <p:nvSpPr>
-          <p:cNvPr id="26" name="Text 22"/>
-          <p:cNvSpPr/>
-          <p:nvPr/>
-        </p:nvSpPr>
-        <p:spPr>
-          <a:xfrm>
-            <a:off x="7588806" y="4776430"/>
-            <a:ext cx="1707118" cy="522923"/>
-          </a:xfrm>
-          <a:prstGeom prst="rect">
-            <a:avLst/>
-          </a:prstGeom>
-          <a:noFill/>
-          <a:ln/>
-        </p:spPr>
-        <p:txBody>
-          <a:bodyPr wrap="square" lIns="0" tIns="0" rIns="0" bIns="0" rtlCol="0" anchor="ctr"/>
-          <a:lstStyle/>
-          <a:p>
-            <a:pPr algn="l" indent="0" marL="0">
-              <a:lnSpc>
-                <a:spcPts val="2030"/>
-              </a:lnSpc>
-              <a:buNone/>
-            </a:pPr>
-            <a:r>
-              <a:rPr lang="en-US" sz="1400" dirty="0">
-                <a:solidFill>
-                  <a:srgbClr val="18383F"/>
-                </a:solidFill>
-                <a:latin typeface="Microsoft YaHei" pitchFamily="34" charset="0"/>
-                <a:ea typeface="Microsoft YaHei" pitchFamily="34" charset="-122"/>
-                <a:cs typeface="Microsoft YaHei" pitchFamily="34" charset="-120"/>
-              </a:rPr>
-              <a:t>汇总新增证据</a:t>
-            </a:r>
-            <a:endParaRPr lang="en-US" sz="1400" dirty="0"/>
-          </a:p>
-          <a:p>
-            <a:pPr algn="l" indent="0" marL="0">
-              <a:lnSpc>
-                <a:spcPts val="2030"/>
-              </a:lnSpc>
-              <a:buNone/>
-            </a:pPr>
-            <a:r>
-              <a:rPr lang="en-US" sz="1400" dirty="0">
-                <a:solidFill>
-                  <a:srgbClr val="18383F"/>
-                </a:solidFill>
-                <a:latin typeface="Microsoft YaHei" pitchFamily="34" charset="0"/>
-                <a:ea typeface="Microsoft YaHei" pitchFamily="34" charset="-122"/>
-                <a:cs typeface="Microsoft YaHei" pitchFamily="34" charset="-120"/>
-              </a:rPr>
-              <a:t>逐项回应问题</a:t>
-            </a:r>
-            <a:endParaRPr lang="en-US" sz="1400" dirty="0"/>
-          </a:p>
-        </p:txBody>
-      </p:sp>
-      <p:sp>
-        <p:nvSpPr>
-          <p:cNvPr id="27" name="Text 23"/>
-          <p:cNvSpPr/>
-          <p:nvPr/>
-        </p:nvSpPr>
-        <p:spPr>
-          <a:xfrm>
-            <a:off x="9478804" y="4776430"/>
-            <a:ext cx="2179796" cy="522923"/>
-          </a:xfrm>
-          <a:prstGeom prst="rect">
-            <a:avLst/>
-          </a:prstGeom>
-          <a:noFill/>
-          <a:ln/>
-        </p:spPr>
-        <p:txBody>
-          <a:bodyPr wrap="square" lIns="0" tIns="0" rIns="0" bIns="0" rtlCol="0" anchor="ctr"/>
-          <a:lstStyle/>
-          <a:p>
-            <a:pPr algn="l" indent="0" marL="0">
-              <a:lnSpc>
-                <a:spcPts val="2030"/>
-              </a:lnSpc>
-              <a:buNone/>
-            </a:pPr>
-            <a:r>
-              <a:rPr lang="en-US" sz="1400" dirty="0">
-                <a:solidFill>
-                  <a:srgbClr val="18383F"/>
-                </a:solidFill>
-                <a:latin typeface="Microsoft YaHei" pitchFamily="34" charset="0"/>
-                <a:ea typeface="Microsoft YaHei" pitchFamily="34" charset="-122"/>
-                <a:cs typeface="Microsoft YaHei" pitchFamily="34" charset="-120"/>
-              </a:rPr>
-              <a:t>更新图表与问题清单</a:t>
-            </a:r>
-            <a:endParaRPr lang="en-US" sz="1400" dirty="0"/>
-          </a:p>
-          <a:p>
-            <a:pPr algn="l" indent="0" marL="0">
-              <a:lnSpc>
-                <a:spcPts val="2030"/>
-              </a:lnSpc>
-              <a:buNone/>
-            </a:pPr>
-            <a:r>
-              <a:rPr lang="en-US" sz="1400" dirty="0">
-                <a:solidFill>
-                  <a:srgbClr val="18383F"/>
-                </a:solidFill>
-                <a:latin typeface="Microsoft YaHei" pitchFamily="34" charset="0"/>
-                <a:ea typeface="Microsoft YaHei" pitchFamily="34" charset="-122"/>
-                <a:cs typeface="Microsoft YaHei" pitchFamily="34" charset="-120"/>
-              </a:rPr>
-              <a:t>逐项修订研究结论</a:t>
-            </a:r>
-            <a:endParaRPr lang="en-US" sz="1400" dirty="0"/>
-          </a:p>
-        </p:txBody>
-      </p:sp>
-      <p:sp>
-        <p:nvSpPr>
-          <p:cNvPr id="28" name="Text 24"/>
-          <p:cNvSpPr/>
-          <p:nvPr/>
-        </p:nvSpPr>
-        <p:spPr>
-          <a:xfrm>
-            <a:off x="6621780" y="5623560"/>
-            <a:ext cx="5006340" cy="457200"/>
-          </a:xfrm>
-          <a:prstGeom prst="rect">
-            <a:avLst/>
-          </a:prstGeom>
-          <a:noFill/>
-          <a:ln/>
-        </p:spPr>
-        <p:txBody>
-          <a:bodyPr wrap="square" lIns="0" tIns="0" rIns="0" bIns="0" rtlCol="0" anchor="ctr"/>
-          <a:lstStyle/>
-          <a:p>
-            <a:pPr algn="l" indent="0" marL="0">
-              <a:lnSpc>
-                <a:spcPts val="1800"/>
-              </a:lnSpc>
-              <a:buNone/>
-            </a:pPr>
-            <a:r>
-              <a:rPr lang="en-US" sz="1200" b="1" dirty="0">
-                <a:solidFill>
-                  <a:srgbClr val="18383F"/>
-                </a:solidFill>
-                <a:latin typeface="Microsoft YaHei" pitchFamily="34" charset="0"/>
-                <a:ea typeface="Microsoft YaHei" pitchFamily="34" charset="-122"/>
-                <a:cs typeface="Microsoft YaHei" pitchFamily="34" charset="-120"/>
-              </a:rPr>
-              <a:t>本次讨论：</a:t>
-            </a:r>
-            <a:pPr algn="l" indent="0" marL="0">
-              <a:lnSpc>
-                <a:spcPts val="1800"/>
-              </a:lnSpc>
-              <a:buNone/>
-            </a:pPr>
-            <a:r>
-              <a:rPr lang="en-US" sz="1200" dirty="0">
-                <a:solidFill>
-                  <a:srgbClr val="18383F"/>
-                </a:solidFill>
-                <a:latin typeface="Microsoft YaHei" pitchFamily="34" charset="0"/>
-                <a:ea typeface="Microsoft YaHei" pitchFamily="34" charset="-122"/>
-                <a:cs typeface="Microsoft YaHei" pitchFamily="34" charset="-120"/>
-              </a:rPr>
-              <a:t>确认实验优先级和验收标准。</a:t>
-            </a:r>
-            <a:pPr algn="l" indent="0" marL="0">
-              <a:lnSpc>
-                <a:spcPts val="1800"/>
-              </a:lnSpc>
-              <a:buNone/>
-            </a:pPr>
-            <a:r>
-              <a:rPr lang="en-US" sz="1200" dirty="0">
-                <a:solidFill>
-                  <a:srgbClr val="18383F"/>
-                </a:solidFill>
-                <a:latin typeface="Microsoft YaHei" pitchFamily="34" charset="0"/>
-                <a:ea typeface="Microsoft YaHei" pitchFamily="34" charset="-122"/>
-                <a:cs typeface="Microsoft YaHei" pitchFamily="34" charset="-120"/>
-              </a:rPr>
-              <a:t>
-</a:t>
-            </a:r>
-            <a:pPr algn="l" indent="0" marL="0">
-              <a:lnSpc>
-                <a:spcPts val="1800"/>
-              </a:lnSpc>
-              <a:buNone/>
-            </a:pPr>
-            <a:r>
-              <a:rPr lang="en-US" sz="1200" dirty="0">
-                <a:solidFill>
-                  <a:srgbClr val="18383F"/>
-                </a:solidFill>
-                <a:latin typeface="Microsoft YaHei" pitchFamily="34" charset="0"/>
-                <a:ea typeface="Microsoft YaHei" pitchFamily="34" charset="-122"/>
-                <a:cs typeface="Microsoft YaHei" pitchFamily="34" charset="-120"/>
-              </a:rPr>
-              <a:t>各阶段时间按实际进展填写。</a:t>
-            </a:r>
-            <a:endParaRPr lang="en-US" sz="1200" dirty="0"/>
-          </a:p>
-        </p:txBody>
-      </p:sp>
-      <p:sp>
-        <p:nvSpPr>
-          <p:cNvPr id="29" name="Text 25"/>
-          <p:cNvSpPr/>
-          <p:nvPr/>
-        </p:nvSpPr>
-        <p:spPr>
-          <a:xfrm>
-            <a:off x="441960" y="6489144"/>
-            <a:ext cx="2286000" cy="181332"/>
-          </a:xfrm>
-          <a:prstGeom prst="rect">
-            <a:avLst/>
-          </a:prstGeom>
-          <a:noFill/>
-          <a:ln/>
-        </p:spPr>
-        <p:txBody>
-          <a:bodyPr wrap="square" lIns="0" tIns="0" rIns="0" bIns="0" rtlCol="0" anchor="ctr"/>
-          <a:lstStyle/>
-          <a:p>
-            <a:pPr algn="l" indent="0" marL="0">
-              <a:lnSpc>
                 <a:spcPts val="1428"/>
               </a:lnSpc>
               <a:buNone/>
@@ -29521,7 +30936,7 @@
                 <a:ea typeface="Microsoft YaHei" pitchFamily="34" charset="-122"/>
                 <a:cs typeface="Microsoft YaHei" pitchFamily="34" charset="-120"/>
               </a:rPr>
-              <a:t>丽水学院 · 科研汇报模板</a:t>
+              <a:t>24 / 30</a:t>
             </a:r>
             <a:endParaRPr lang="en-US" sz="1020" dirty="0"/>
           </a:p>
@@ -29529,87 +30944,30 @@
       </p:sp>
       <p:sp>
         <p:nvSpPr>
-          <p:cNvPr id="30" name="Text 26"/>
-          <p:cNvSpPr/>
-          <p:nvPr/>
-        </p:nvSpPr>
-        <p:spPr>
-          <a:xfrm>
-            <a:off x="2910840" y="6492478"/>
-            <a:ext cx="8212455" cy="174784"/>
-          </a:xfrm>
-          <a:prstGeom prst="rect">
-            <a:avLst/>
-          </a:prstGeom>
-          <a:noFill/>
-          <a:ln/>
-        </p:spPr>
-        <p:txBody>
-          <a:bodyPr wrap="square" lIns="0" tIns="0" rIns="0" bIns="0" rtlCol="0" anchor="ctr"/>
-          <a:lstStyle/>
-          <a:p>
-            <a:pPr algn="r" indent="0" marL="0">
-              <a:lnSpc>
-                <a:spcPts val="1377"/>
-              </a:lnSpc>
-              <a:buNone/>
-            </a:pPr>
-            <a:r>
-              <a:rPr lang="en-US" sz="1020" dirty="0">
-                <a:solidFill>
-                  <a:srgbClr val="617B8B"/>
-                </a:solidFill>
-                <a:latin typeface="Microsoft YaHei" pitchFamily="34" charset="0"/>
-                <a:ea typeface="Microsoft YaHei" pitchFamily="34" charset="-122"/>
-                <a:cs typeface="Microsoft YaHei" pitchFamily="34" charset="-120"/>
-              </a:rPr>
-              <a:t>阶段总结与任务安排示例，以实际工作记录为准</a:t>
-            </a:r>
-            <a:endParaRPr lang="en-US" sz="1020" dirty="0"/>
-          </a:p>
-        </p:txBody>
-      </p:sp>
-      <p:sp>
-        <p:nvSpPr>
-          <p:cNvPr id="31" name="Text 27"/>
-          <p:cNvSpPr/>
-          <p:nvPr/>
-        </p:nvSpPr>
-        <p:spPr>
-          <a:xfrm>
-            <a:off x="11306175" y="6489144"/>
-            <a:ext cx="443865" cy="181332"/>
-          </a:xfrm>
-          <a:prstGeom prst="rect">
-            <a:avLst/>
-          </a:prstGeom>
-          <a:noFill/>
-          <a:ln/>
-        </p:spPr>
-        <p:txBody>
-          <a:bodyPr wrap="none" lIns="0" tIns="0" rIns="0" bIns="0" rtlCol="0" anchor="ctr"/>
-          <a:lstStyle/>
-          <a:p>
-            <a:pPr algn="l" indent="0" marL="0">
-              <a:lnSpc>
-                <a:spcPts val="1428"/>
-              </a:lnSpc>
-              <a:buNone/>
-            </a:pPr>
-            <a:r>
-              <a:rPr lang="en-US" sz="1020" dirty="0">
-                <a:solidFill>
-                  <a:srgbClr val="617B8B"/>
-                </a:solidFill>
-                <a:latin typeface="Microsoft YaHei" pitchFamily="34" charset="0"/>
-                <a:ea typeface="Microsoft YaHei" pitchFamily="34" charset="-122"/>
-                <a:cs typeface="Microsoft YaHei" pitchFamily="34" charset="-120"/>
-              </a:rPr>
-              <a:t>24 / 30</a:t>
-            </a:r>
-            <a:endParaRPr lang="en-US" sz="1020" dirty="0"/>
-          </a:p>
-        </p:txBody>
+          <p:cNvPr id="75" name="Shape 71"/>
+          <p:cNvSpPr/>
+          <p:nvPr/>
+        </p:nvSpPr>
+        <p:spPr>
+          <a:xfrm>
+            <a:off x="441960" y="6355080"/>
+            <a:ext cx="11308080" cy="7620"/>
+          </a:xfrm>
+          <a:prstGeom prst="rect">
+            <a:avLst/>
+          </a:prstGeom>
+          <a:solidFill>
+            <a:srgbClr val="D8E2E9"/>
+          </a:solidFill>
+          <a:ln w="12700">
+            <a:solidFill>
+              <a:srgbClr val="D8E2E9">
+                <a:alpha val="0"/>
+              </a:srgbClr>
+            </a:solidFill>
+            <a:prstDash val="solid"/>
+          </a:ln>
+        </p:spPr>
       </p:sp>
     </p:spTree>
   </p:cSld>
@@ -30988,17 +32346,17 @@
         </p:nvSpPr>
         <p:spPr>
           <a:xfrm>
-            <a:off x="2540794" y="5791200"/>
-            <a:ext cx="7110293" cy="304800"/>
-          </a:xfrm>
-          <a:prstGeom prst="rect">
-            <a:avLst/>
-          </a:prstGeom>
-          <a:noFill/>
-          <a:ln/>
-        </p:spPr>
-        <p:txBody>
-          <a:bodyPr wrap="square" lIns="0" tIns="0" rIns="0" bIns="0" rtlCol="0" anchor="ctr"/>
+            <a:off x="609600" y="5791200"/>
+            <a:ext cx="10972800" cy="304800"/>
+          </a:xfrm>
+          <a:prstGeom prst="rect">
+            <a:avLst/>
+          </a:prstGeom>
+          <a:noFill/>
+          <a:ln/>
+        </p:spPr>
+        <p:txBody>
+          <a:bodyPr wrap="none" lIns="0" tIns="0" rIns="0" bIns="0" rtlCol="0" anchor="ctr"/>
           <a:lstStyle/>
           <a:p>
             <a:pPr algn="ctr" indent="0" marL="0">
@@ -31539,8 +32897,8 @@
         </p:nvSpPr>
         <p:spPr>
           <a:xfrm>
-            <a:off x="624840" y="2118360"/>
-            <a:ext cx="3281601" cy="297180"/>
+            <a:off x="579120" y="2072640"/>
+            <a:ext cx="3373041" cy="297180"/>
           </a:xfrm>
           <a:prstGeom prst="rect">
             <a:avLst/>
@@ -31581,8 +32939,8 @@
         </p:nvSpPr>
         <p:spPr>
           <a:xfrm>
-            <a:off x="624840" y="2522220"/>
-            <a:ext cx="3281601" cy="314920"/>
+            <a:off x="579120" y="2476500"/>
+            <a:ext cx="3373041" cy="314920"/>
           </a:xfrm>
           <a:prstGeom prst="rect">
             <a:avLst/>
@@ -31623,8 +32981,8 @@
         </p:nvSpPr>
         <p:spPr>
           <a:xfrm>
-            <a:off x="624840" y="2913340"/>
-            <a:ext cx="3281601" cy="314920"/>
+            <a:off x="579120" y="2867620"/>
+            <a:ext cx="3373041" cy="314920"/>
           </a:xfrm>
           <a:prstGeom prst="rect">
             <a:avLst/>
@@ -31665,8 +33023,8 @@
         </p:nvSpPr>
         <p:spPr>
           <a:xfrm>
-            <a:off x="624840" y="3304461"/>
-            <a:ext cx="3281601" cy="629841"/>
+            <a:off x="579120" y="3258741"/>
+            <a:ext cx="3373041" cy="629841"/>
           </a:xfrm>
           <a:prstGeom prst="rect">
             <a:avLst/>
@@ -31707,8 +33065,8 @@
         </p:nvSpPr>
         <p:spPr>
           <a:xfrm>
-            <a:off x="624840" y="4010501"/>
-            <a:ext cx="3281601" cy="314920"/>
+            <a:off x="579120" y="3964781"/>
+            <a:ext cx="3373041" cy="314920"/>
           </a:xfrm>
           <a:prstGeom prst="rect">
             <a:avLst/>
@@ -31776,8 +33134,8 @@
         </p:nvSpPr>
         <p:spPr>
           <a:xfrm>
-            <a:off x="4455081" y="2118360"/>
-            <a:ext cx="3281720" cy="297180"/>
+            <a:off x="4409361" y="2072640"/>
+            <a:ext cx="3373160" cy="297180"/>
           </a:xfrm>
           <a:prstGeom prst="rect">
             <a:avLst/>
@@ -31818,8 +33176,8 @@
         </p:nvSpPr>
         <p:spPr>
           <a:xfrm>
-            <a:off x="4455081" y="2522220"/>
-            <a:ext cx="3281720" cy="314920"/>
+            <a:off x="4409361" y="2476500"/>
+            <a:ext cx="3373160" cy="314920"/>
           </a:xfrm>
           <a:prstGeom prst="rect">
             <a:avLst/>
@@ -31860,8 +33218,8 @@
         </p:nvSpPr>
         <p:spPr>
           <a:xfrm>
-            <a:off x="4455081" y="2913340"/>
-            <a:ext cx="3281720" cy="314920"/>
+            <a:off x="4409361" y="2867620"/>
+            <a:ext cx="3373160" cy="314920"/>
           </a:xfrm>
           <a:prstGeom prst="rect">
             <a:avLst/>
@@ -31902,8 +33260,8 @@
         </p:nvSpPr>
         <p:spPr>
           <a:xfrm>
-            <a:off x="4455081" y="3304461"/>
-            <a:ext cx="3281720" cy="314920"/>
+            <a:off x="4409361" y="3258741"/>
+            <a:ext cx="3373160" cy="314920"/>
           </a:xfrm>
           <a:prstGeom prst="rect">
             <a:avLst/>
@@ -31944,8 +33302,8 @@
         </p:nvSpPr>
         <p:spPr>
           <a:xfrm>
-            <a:off x="4455081" y="3695581"/>
-            <a:ext cx="3281720" cy="314920"/>
+            <a:off x="4409361" y="3649861"/>
+            <a:ext cx="3373160" cy="314920"/>
           </a:xfrm>
           <a:prstGeom prst="rect">
             <a:avLst/>
@@ -32013,8 +33371,8 @@
         </p:nvSpPr>
         <p:spPr>
           <a:xfrm>
-            <a:off x="8285440" y="2118360"/>
-            <a:ext cx="3281601" cy="297180"/>
+            <a:off x="8239720" y="2072640"/>
+            <a:ext cx="3373041" cy="297180"/>
           </a:xfrm>
           <a:prstGeom prst="rect">
             <a:avLst/>
@@ -32055,8 +33413,8 @@
         </p:nvSpPr>
         <p:spPr>
           <a:xfrm>
-            <a:off x="8285440" y="2522220"/>
-            <a:ext cx="3281601" cy="314920"/>
+            <a:off x="8239720" y="2476500"/>
+            <a:ext cx="3373041" cy="314920"/>
           </a:xfrm>
           <a:prstGeom prst="rect">
             <a:avLst/>
@@ -32097,8 +33455,8 @@
         </p:nvSpPr>
         <p:spPr>
           <a:xfrm>
-            <a:off x="8285440" y="2913340"/>
-            <a:ext cx="3281601" cy="314920"/>
+            <a:off x="8239720" y="2867620"/>
+            <a:ext cx="3373041" cy="314920"/>
           </a:xfrm>
           <a:prstGeom prst="rect">
             <a:avLst/>
@@ -32139,8 +33497,8 @@
         </p:nvSpPr>
         <p:spPr>
           <a:xfrm>
-            <a:off x="8285440" y="3304461"/>
-            <a:ext cx="3281601" cy="314920"/>
+            <a:off x="8239720" y="3258741"/>
+            <a:ext cx="3373041" cy="314920"/>
           </a:xfrm>
           <a:prstGeom prst="rect">
             <a:avLst/>
@@ -32181,8 +33539,8 @@
         </p:nvSpPr>
         <p:spPr>
           <a:xfrm>
-            <a:off x="8285440" y="3695581"/>
-            <a:ext cx="3281601" cy="314920"/>
+            <a:off x="8239720" y="3649861"/>
+            <a:ext cx="3373041" cy="314920"/>
           </a:xfrm>
           <a:prstGeom prst="rect">
             <a:avLst/>
@@ -32637,17 +33995,17 @@
         </p:nvSpPr>
         <p:spPr>
           <a:xfrm>
-            <a:off x="2236113" y="5791200"/>
-            <a:ext cx="7719774" cy="304800"/>
-          </a:xfrm>
-          <a:prstGeom prst="rect">
-            <a:avLst/>
-          </a:prstGeom>
-          <a:noFill/>
-          <a:ln/>
-        </p:spPr>
-        <p:txBody>
-          <a:bodyPr wrap="square" lIns="0" tIns="0" rIns="0" bIns="0" rtlCol="0" anchor="ctr"/>
+            <a:off x="609600" y="5791200"/>
+            <a:ext cx="10972800" cy="304800"/>
+          </a:xfrm>
+          <a:prstGeom prst="rect">
+            <a:avLst/>
+          </a:prstGeom>
+          <a:noFill/>
+          <a:ln/>
+        </p:spPr>
+        <p:txBody>
+          <a:bodyPr wrap="none" lIns="0" tIns="0" rIns="0" bIns="0" rtlCol="0" anchor="ctr"/>
           <a:lstStyle/>
           <a:p>
             <a:pPr algn="ctr" indent="0" marL="0">
@@ -34118,9 +35476,213 @@
           <a:chExt cx="0" cy="0"/>
         </a:xfrm>
       </p:grpSpPr>
+      <p:sp>
+        <p:nvSpPr>
+          <p:cNvPr id="2" name="Shape 0"/>
+          <p:cNvSpPr/>
+          <p:nvPr/>
+        </p:nvSpPr>
+        <p:spPr>
+          <a:xfrm>
+            <a:off x="0" y="0"/>
+            <a:ext cx="9753600" cy="53340"/>
+          </a:xfrm>
+          <a:prstGeom prst="rect">
+            <a:avLst/>
+          </a:prstGeom>
+          <a:solidFill>
+            <a:srgbClr val="0F6674"/>
+          </a:solidFill>
+          <a:ln w="12700">
+            <a:solidFill>
+              <a:srgbClr val="0F6674">
+                <a:alpha val="0"/>
+              </a:srgbClr>
+            </a:solidFill>
+            <a:prstDash val="solid"/>
+          </a:ln>
+        </p:spPr>
+      </p:sp>
+      <p:sp>
+        <p:nvSpPr>
+          <p:cNvPr id="3" name="Shape 1"/>
+          <p:cNvSpPr/>
+          <p:nvPr/>
+        </p:nvSpPr>
+        <p:spPr>
+          <a:xfrm>
+            <a:off x="9753600" y="0"/>
+            <a:ext cx="2438400" cy="53340"/>
+          </a:xfrm>
+          <a:prstGeom prst="rect">
+            <a:avLst/>
+          </a:prstGeom>
+          <a:solidFill>
+            <a:srgbClr val="0F6674"/>
+          </a:solidFill>
+          <a:ln w="12700">
+            <a:solidFill>
+              <a:srgbClr val="0F6674">
+                <a:alpha val="0"/>
+              </a:srgbClr>
+            </a:solidFill>
+            <a:prstDash val="solid"/>
+          </a:ln>
+        </p:spPr>
+      </p:sp>
+      <p:sp>
+        <p:nvSpPr>
+          <p:cNvPr id="4" name="Shape 2"/>
+          <p:cNvSpPr/>
+          <p:nvPr/>
+        </p:nvSpPr>
+        <p:spPr>
+          <a:xfrm>
+            <a:off x="441960" y="259080"/>
+            <a:ext cx="381000" cy="228600"/>
+          </a:xfrm>
+          <a:prstGeom prst="rect">
+            <a:avLst/>
+          </a:prstGeom>
+          <a:solidFill>
+            <a:srgbClr val="EDF6F5"/>
+          </a:solidFill>
+          <a:ln w="12700">
+            <a:solidFill>
+              <a:srgbClr val="EDF6F5">
+                <a:alpha val="0"/>
+              </a:srgbClr>
+            </a:solidFill>
+            <a:prstDash val="solid"/>
+          </a:ln>
+        </p:spPr>
+      </p:sp>
+      <p:sp>
+        <p:nvSpPr>
+          <p:cNvPr id="5" name="Text 3"/>
+          <p:cNvSpPr/>
+          <p:nvPr/>
+        </p:nvSpPr>
+        <p:spPr>
+          <a:xfrm>
+            <a:off x="480060" y="259080"/>
+            <a:ext cx="304800" cy="228600"/>
+          </a:xfrm>
+          <a:prstGeom prst="rect">
+            <a:avLst/>
+          </a:prstGeom>
+          <a:noFill/>
+          <a:ln/>
+        </p:spPr>
+        <p:txBody>
+          <a:bodyPr wrap="none" lIns="0" tIns="0" rIns="0" bIns="0" rtlCol="0" anchor="ctr"/>
+          <a:lstStyle/>
+          <a:p>
+            <a:pPr algn="l" indent="0" marL="0">
+              <a:buNone/>
+            </a:pPr>
+            <a:r>
+              <a:rPr lang="en-US" sz="1200" b="1" dirty="0">
+                <a:solidFill>
+                  <a:srgbClr val="0F6674"/>
+                </a:solidFill>
+                <a:latin typeface="Arial" pitchFamily="34" charset="0"/>
+                <a:ea typeface="Arial" pitchFamily="34" charset="-122"/>
+                <a:cs typeface="Arial" pitchFamily="34" charset="-120"/>
+              </a:rPr>
+              <a:t>附录</a:t>
+            </a:r>
+            <a:endParaRPr lang="en-US" sz="1200" dirty="0"/>
+          </a:p>
+        </p:txBody>
+      </p:sp>
+      <p:sp>
+        <p:nvSpPr>
+          <p:cNvPr id="6" name="Text 4"/>
+          <p:cNvSpPr/>
+          <p:nvPr/>
+        </p:nvSpPr>
+        <p:spPr>
+          <a:xfrm>
+            <a:off x="929640" y="235625"/>
+            <a:ext cx="9677400" cy="275511"/>
+          </a:xfrm>
+          <a:prstGeom prst="rect">
+            <a:avLst/>
+          </a:prstGeom>
+          <a:noFill/>
+          <a:ln/>
+        </p:spPr>
+        <p:txBody>
+          <a:bodyPr wrap="none" lIns="0" tIns="0" rIns="0" bIns="0" rtlCol="0" anchor="ctr"/>
+          <a:lstStyle/>
+          <a:p>
+            <a:pPr algn="l" indent="0" marL="0">
+              <a:lnSpc>
+                <a:spcPts val="2170"/>
+              </a:lnSpc>
+              <a:buNone/>
+            </a:pPr>
+            <a:r>
+              <a:rPr lang="en-US" sz="1400" b="1" dirty="0">
+                <a:solidFill>
+                  <a:srgbClr val="0F6674"/>
+                </a:solidFill>
+                <a:latin typeface="Microsoft YaHei" pitchFamily="34" charset="0"/>
+                <a:ea typeface="Microsoft YaHei" pitchFamily="34" charset="-122"/>
+                <a:cs typeface="Microsoft YaHei" pitchFamily="34" charset="-120"/>
+              </a:rPr>
+              <a:t>参考与作者</a:t>
+            </a:r>
+            <a:endParaRPr lang="en-US" sz="1400" dirty="0"/>
+          </a:p>
+        </p:txBody>
+      </p:sp>
+      <p:sp>
+        <p:nvSpPr>
+          <p:cNvPr id="7" name="Text 5"/>
+          <p:cNvSpPr/>
+          <p:nvPr/>
+        </p:nvSpPr>
+        <p:spPr>
+          <a:xfrm>
+            <a:off x="441960" y="609600"/>
+            <a:ext cx="10165080" cy="433864"/>
+          </a:xfrm>
+          <a:prstGeom prst="rect">
+            <a:avLst/>
+          </a:prstGeom>
+          <a:noFill/>
+          <a:ln/>
+        </p:spPr>
+        <p:txBody>
+          <a:bodyPr wrap="none" lIns="0" tIns="0" rIns="0" bIns="0" rtlCol="0" anchor="ctr"/>
+          <a:lstStyle/>
+          <a:p>
+            <a:pPr algn="l" indent="0" marL="0">
+              <a:lnSpc>
+                <a:spcPts val="3416"/>
+              </a:lnSpc>
+              <a:buNone/>
+            </a:pPr>
+            <a:r>
+              <a:rPr lang="en-US" sz="2800" b="1" dirty="0">
+                <a:solidFill>
+                  <a:srgbClr val="0F6674"/>
+                </a:solidFill>
+                <a:latin typeface="Microsoft YaHei" pitchFamily="34" charset="0"/>
+                <a:ea typeface="Microsoft YaHei" pitchFamily="34" charset="-122"/>
+                <a:cs typeface="Microsoft YaHei" pitchFamily="34" charset="-120"/>
+              </a:rPr>
+              <a:t>作者简介</a:t>
+            </a:r>
+            <a:endParaRPr lang="en-US" sz="2800" dirty="0"/>
+          </a:p>
+        </p:txBody>
+      </p:sp>
       <p:pic>
         <p:nvPicPr>
-          <p:cNvPr id="2" name="Image 0" descr="preencoded.png">    </p:cNvPr>
+          <p:cNvPr id="8" name="Image 0" descr="preencoded.png">    </p:cNvPr>
           <p:cNvPicPr>
             <a:picLocks noChangeAspect="1"/>
           </p:cNvPicPr>
@@ -34134,8 +35696,8 @@
         </p:blipFill>
         <p:spPr>
           <a:xfrm>
-            <a:off x="0" y="0"/>
-            <a:ext cx="12192000" cy="6858000"/>
+            <a:off x="10835640" y="201930"/>
+            <a:ext cx="914400" cy="914400"/>
           </a:xfrm>
           <a:prstGeom prst="rect">
             <a:avLst/>
@@ -34144,130 +35706,59 @@
       </p:pic>
       <p:sp>
         <p:nvSpPr>
-          <p:cNvPr id="3" name="Text 0"/>
-          <p:cNvSpPr/>
-          <p:nvPr/>
-        </p:nvSpPr>
-        <p:spPr>
-          <a:xfrm>
-            <a:off x="518160" y="259080"/>
-            <a:ext cx="304800" cy="228600"/>
-          </a:xfrm>
-          <a:prstGeom prst="rect">
-            <a:avLst/>
-          </a:prstGeom>
-          <a:noFill/>
-          <a:ln/>
-        </p:spPr>
-        <p:txBody>
-          <a:bodyPr wrap="none" lIns="0" tIns="0" rIns="0" bIns="0" rtlCol="0" anchor="ctr"/>
-          <a:lstStyle/>
-          <a:p>
-            <a:pPr algn="l" indent="0" marL="0">
-              <a:buNone/>
-            </a:pPr>
-            <a:r>
-              <a:rPr lang="en-US" sz="1200" b="1" dirty="0">
-                <a:solidFill>
-                  <a:srgbClr val="0F6674"/>
-                </a:solidFill>
-                <a:latin typeface="Microsoft YaHei" pitchFamily="34" charset="0"/>
-                <a:ea typeface="Microsoft YaHei" pitchFamily="34" charset="-122"/>
-                <a:cs typeface="Microsoft YaHei" pitchFamily="34" charset="-120"/>
-              </a:rPr>
-              <a:t>附录</a:t>
-            </a:r>
-            <a:endParaRPr lang="en-US" sz="1200" dirty="0"/>
-          </a:p>
-        </p:txBody>
-      </p:sp>
-      <p:sp>
-        <p:nvSpPr>
-          <p:cNvPr id="4" name="Text 1"/>
-          <p:cNvSpPr/>
-          <p:nvPr/>
-        </p:nvSpPr>
-        <p:spPr>
-          <a:xfrm>
-            <a:off x="1005840" y="235625"/>
-            <a:ext cx="9601200" cy="275511"/>
-          </a:xfrm>
-          <a:prstGeom prst="rect">
-            <a:avLst/>
-          </a:prstGeom>
-          <a:noFill/>
-          <a:ln/>
-        </p:spPr>
-        <p:txBody>
-          <a:bodyPr wrap="none" lIns="0" tIns="0" rIns="0" bIns="0" rtlCol="0" anchor="ctr"/>
-          <a:lstStyle/>
-          <a:p>
-            <a:pPr algn="l" indent="0" marL="0">
-              <a:lnSpc>
-                <a:spcPts val="2170"/>
-              </a:lnSpc>
-              <a:buNone/>
-            </a:pPr>
-            <a:r>
-              <a:rPr lang="en-US" sz="1400" b="1" dirty="0">
-                <a:solidFill>
-                  <a:srgbClr val="40647D"/>
-                </a:solidFill>
-                <a:latin typeface="Microsoft YaHei" pitchFamily="34" charset="0"/>
-                <a:ea typeface="Microsoft YaHei" pitchFamily="34" charset="-122"/>
-                <a:cs typeface="Microsoft YaHei" pitchFamily="34" charset="-120"/>
-              </a:rPr>
-              <a:t>参考与作者</a:t>
-            </a:r>
-            <a:endParaRPr lang="en-US" sz="1400" dirty="0"/>
-          </a:p>
-        </p:txBody>
-      </p:sp>
-      <p:sp>
-        <p:nvSpPr>
-          <p:cNvPr id="5" name="Text 2"/>
-          <p:cNvSpPr/>
-          <p:nvPr/>
-        </p:nvSpPr>
-        <p:spPr>
-          <a:xfrm>
-            <a:off x="441960" y="609600"/>
-            <a:ext cx="10165080" cy="433864"/>
-          </a:xfrm>
-          <a:prstGeom prst="rect">
-            <a:avLst/>
-          </a:prstGeom>
-          <a:noFill/>
-          <a:ln/>
-        </p:spPr>
-        <p:txBody>
-          <a:bodyPr wrap="none" lIns="0" tIns="0" rIns="0" bIns="0" rtlCol="0" anchor="ctr"/>
-          <a:lstStyle/>
-          <a:p>
-            <a:pPr algn="l" indent="0" marL="0">
-              <a:lnSpc>
-                <a:spcPts val="3416"/>
-              </a:lnSpc>
-              <a:buNone/>
-            </a:pPr>
-            <a:r>
-              <a:rPr lang="en-US" sz="2800" b="1" dirty="0">
-                <a:solidFill>
-                  <a:srgbClr val="0F6674"/>
-                </a:solidFill>
-                <a:latin typeface="Microsoft YaHei" pitchFamily="34" charset="0"/>
-                <a:ea typeface="Microsoft YaHei" pitchFamily="34" charset="-122"/>
-                <a:cs typeface="Microsoft YaHei" pitchFamily="34" charset="-120"/>
-              </a:rPr>
-              <a:t>作者简介</a:t>
-            </a:r>
-            <a:endParaRPr lang="en-US" sz="2800" dirty="0"/>
-          </a:p>
-        </p:txBody>
+          <p:cNvPr id="9" name="Shape 6"/>
+          <p:cNvSpPr/>
+          <p:nvPr/>
+        </p:nvSpPr>
+        <p:spPr>
+          <a:xfrm>
+            <a:off x="441960" y="1264920"/>
+            <a:ext cx="11308080" cy="15240"/>
+          </a:xfrm>
+          <a:prstGeom prst="rect">
+            <a:avLst/>
+          </a:prstGeom>
+          <a:solidFill>
+            <a:srgbClr val="0F6674"/>
+          </a:solidFill>
+          <a:ln w="12700">
+            <a:solidFill>
+              <a:srgbClr val="0F6674">
+                <a:alpha val="0"/>
+              </a:srgbClr>
+            </a:solidFill>
+            <a:prstDash val="solid"/>
+          </a:ln>
+        </p:spPr>
+      </p:sp>
+      <p:sp>
+        <p:nvSpPr>
+          <p:cNvPr id="10" name="Shape 7"/>
+          <p:cNvSpPr/>
+          <p:nvPr/>
+        </p:nvSpPr>
+        <p:spPr>
+          <a:xfrm>
+            <a:off x="441960" y="1463040"/>
+            <a:ext cx="2590800" cy="4770120"/>
+          </a:xfrm>
+          <a:prstGeom prst="rect">
+            <a:avLst/>
+          </a:prstGeom>
+          <a:solidFill>
+            <a:srgbClr val="F1F7FB"/>
+          </a:solidFill>
+          <a:ln w="7620">
+            <a:solidFill>
+              <a:srgbClr val="DFEBF3"/>
+            </a:solidFill>
+            <a:prstDash val="solid"/>
+          </a:ln>
+        </p:spPr>
       </p:sp>
       <p:pic>
         <p:nvPicPr>
-          <p:cNvPr id="6" name="Image 1" descr="preencoded.png">    </p:cNvPr>
+          <p:cNvPr id="11" name="Image 1" descr="preencoded.png">    </p:cNvPr>
           <p:cNvPicPr>
             <a:picLocks noChangeAspect="1"/>
           </p:cNvPicPr>
@@ -34281,30 +35772,6 @@
         </p:blipFill>
         <p:spPr>
           <a:xfrm>
-            <a:off x="10835640" y="201930"/>
-            <a:ext cx="914400" cy="914400"/>
-          </a:xfrm>
-          <a:prstGeom prst="rect">
-            <a:avLst/>
-          </a:prstGeom>
-        </p:spPr>
-      </p:pic>
-      <p:pic>
-        <p:nvPicPr>
-          <p:cNvPr id="7" name="Image 2" descr="preencoded.png">    </p:cNvPr>
-          <p:cNvPicPr>
-            <a:picLocks noChangeAspect="1"/>
-          </p:cNvPicPr>
-          <p:nvPr/>
-        </p:nvPicPr>
-        <p:blipFill>
-          <a:blip r:embed="rId3"/>
-          <a:stretch>
-            <a:fillRect/>
-          </a:stretch>
-        </p:blipFill>
-        <p:spPr>
-          <a:xfrm>
             <a:off x="990600" y="1653540"/>
             <a:ext cx="1493520" cy="1676400"/>
           </a:xfrm>
@@ -34315,7 +35782,7 @@
       </p:pic>
       <p:sp>
         <p:nvSpPr>
-          <p:cNvPr id="8" name="Text 3"/>
+          <p:cNvPr id="12" name="Text 8"/>
           <p:cNvSpPr/>
           <p:nvPr/>
         </p:nvSpPr>
@@ -34357,7 +35824,7 @@
       </p:sp>
       <p:sp>
         <p:nvSpPr>
-          <p:cNvPr id="9" name="Text 4"/>
+          <p:cNvPr id="13" name="Text 9"/>
           <p:cNvSpPr/>
           <p:nvPr/>
         </p:nvSpPr>
@@ -34399,7 +35866,7 @@
       </p:sp>
       <p:sp>
         <p:nvSpPr>
-          <p:cNvPr id="10" name="Text 5"/>
+          <p:cNvPr id="14" name="Text 10"/>
           <p:cNvSpPr/>
           <p:nvPr/>
         </p:nvSpPr>
@@ -34461,7 +35928,7 @@
       </p:sp>
       <p:sp>
         <p:nvSpPr>
-          <p:cNvPr id="11" name="Text 6"/>
+          <p:cNvPr id="15" name="Text 11"/>
           <p:cNvSpPr/>
           <p:nvPr/>
         </p:nvSpPr>
@@ -34503,13 +35970,13 @@
       </p:sp>
       <p:sp>
         <p:nvSpPr>
-          <p:cNvPr id="12" name="Text 7"/>
-          <p:cNvSpPr/>
-          <p:nvPr/>
-        </p:nvSpPr>
-        <p:spPr>
-          <a:xfrm>
-            <a:off x="601980" y="5486400"/>
+          <p:cNvPr id="16" name="Text 12"/>
+          <p:cNvSpPr/>
+          <p:nvPr/>
+        </p:nvSpPr>
+        <p:spPr>
+          <a:xfrm>
+            <a:off x="601980" y="5547360"/>
             <a:ext cx="1074420" cy="342900"/>
           </a:xfrm>
           <a:prstGeom prst="rect">
@@ -34545,13 +36012,13 @@
       </p:sp>
       <p:sp>
         <p:nvSpPr>
-          <p:cNvPr id="13" name="Text 8"/>
-          <p:cNvSpPr/>
-          <p:nvPr/>
-        </p:nvSpPr>
-        <p:spPr>
-          <a:xfrm>
-            <a:off x="601980" y="5859780"/>
+          <p:cNvPr id="17" name="Text 13"/>
+          <p:cNvSpPr/>
+          <p:nvPr/>
+        </p:nvSpPr>
+        <p:spPr>
+          <a:xfrm>
+            <a:off x="601980" y="5920740"/>
             <a:ext cx="1074420" cy="213360"/>
           </a:xfrm>
           <a:prstGeom prst="rect">
@@ -34587,13 +36054,13 @@
       </p:sp>
       <p:sp>
         <p:nvSpPr>
-          <p:cNvPr id="14" name="Text 9"/>
-          <p:cNvSpPr/>
-          <p:nvPr/>
-        </p:nvSpPr>
-        <p:spPr>
-          <a:xfrm>
-            <a:off x="1798320" y="5486400"/>
+          <p:cNvPr id="18" name="Text 14"/>
+          <p:cNvSpPr/>
+          <p:nvPr/>
+        </p:nvSpPr>
+        <p:spPr>
+          <a:xfrm>
+            <a:off x="1798320" y="5547360"/>
             <a:ext cx="1074420" cy="342900"/>
           </a:xfrm>
           <a:prstGeom prst="rect">
@@ -34629,13 +36096,13 @@
       </p:sp>
       <p:sp>
         <p:nvSpPr>
-          <p:cNvPr id="15" name="Text 10"/>
-          <p:cNvSpPr/>
-          <p:nvPr/>
-        </p:nvSpPr>
-        <p:spPr>
-          <a:xfrm>
-            <a:off x="1798320" y="5859780"/>
+          <p:cNvPr id="19" name="Text 15"/>
+          <p:cNvSpPr/>
+          <p:nvPr/>
+        </p:nvSpPr>
+        <p:spPr>
+          <a:xfrm>
+            <a:off x="1798320" y="5920740"/>
             <a:ext cx="1074420" cy="213360"/>
           </a:xfrm>
           <a:prstGeom prst="rect">
@@ -34671,7 +36138,61 @@
       </p:sp>
       <p:sp>
         <p:nvSpPr>
-          <p:cNvPr id="16" name="Text 11"/>
+          <p:cNvPr id="20" name="Shape 16"/>
+          <p:cNvSpPr/>
+          <p:nvPr/>
+        </p:nvSpPr>
+        <p:spPr>
+          <a:xfrm>
+            <a:off x="3276600" y="1463040"/>
+            <a:ext cx="8473440" cy="1680686"/>
+          </a:xfrm>
+          <a:prstGeom prst="rect">
+            <a:avLst/>
+          </a:prstGeom>
+          <a:solidFill>
+            <a:srgbClr val="FFFFFF">
+              <a:alpha val="0"/>
+            </a:srgbClr>
+          </a:solidFill>
+          <a:ln w="7620">
+            <a:solidFill>
+              <a:srgbClr val="CFDDE6"/>
+            </a:solidFill>
+            <a:prstDash val="solid"/>
+          </a:ln>
+        </p:spPr>
+      </p:sp>
+      <p:sp>
+        <p:nvSpPr>
+          <p:cNvPr id="21" name="Shape 17"/>
+          <p:cNvSpPr/>
+          <p:nvPr/>
+        </p:nvSpPr>
+        <p:spPr>
+          <a:xfrm>
+            <a:off x="3284220" y="1470660"/>
+            <a:ext cx="8458200" cy="400050"/>
+          </a:xfrm>
+          <a:prstGeom prst="rect">
+            <a:avLst/>
+          </a:prstGeom>
+          <a:solidFill>
+            <a:srgbClr val="0F6674"/>
+          </a:solidFill>
+          <a:ln w="12700">
+            <a:solidFill>
+              <a:srgbClr val="0F6674">
+                <a:alpha val="0"/>
+              </a:srgbClr>
+            </a:solidFill>
+            <a:prstDash val="solid"/>
+          </a:ln>
+        </p:spPr>
+      </p:sp>
+      <p:sp>
+        <p:nvSpPr>
+          <p:cNvPr id="22" name="Text 18"/>
           <p:cNvSpPr/>
           <p:nvPr/>
         </p:nvSpPr>
@@ -34713,14 +36234,68 @@
       </p:sp>
       <p:sp>
         <p:nvSpPr>
-          <p:cNvPr id="17" name="Text 12"/>
-          <p:cNvSpPr/>
-          <p:nvPr/>
-        </p:nvSpPr>
-        <p:spPr>
-          <a:xfrm>
-            <a:off x="3375660" y="2253020"/>
-            <a:ext cx="1677829" cy="224790"/>
+          <p:cNvPr id="23" name="Shape 19"/>
+          <p:cNvSpPr/>
+          <p:nvPr/>
+        </p:nvSpPr>
+        <p:spPr>
+          <a:xfrm>
+            <a:off x="3284220" y="1870710"/>
+            <a:ext cx="2768560" cy="332661"/>
+          </a:xfrm>
+          <a:prstGeom prst="rect">
+            <a:avLst/>
+          </a:prstGeom>
+          <a:solidFill>
+            <a:srgbClr val="FFFFFF"/>
+          </a:solidFill>
+          <a:ln w="12700">
+            <a:solidFill>
+              <a:srgbClr val="FFFFFF">
+                <a:alpha val="0"/>
+              </a:srgbClr>
+            </a:solidFill>
+            <a:prstDash val="solid"/>
+          </a:ln>
+        </p:spPr>
+      </p:sp>
+      <p:sp>
+        <p:nvSpPr>
+          <p:cNvPr id="24" name="Shape 20"/>
+          <p:cNvSpPr/>
+          <p:nvPr/>
+        </p:nvSpPr>
+        <p:spPr>
+          <a:xfrm>
+            <a:off x="3284220" y="2188131"/>
+            <a:ext cx="2768560" cy="15240"/>
+          </a:xfrm>
+          <a:prstGeom prst="rect">
+            <a:avLst/>
+          </a:prstGeom>
+          <a:solidFill>
+            <a:srgbClr val="0F6674"/>
+          </a:solidFill>
+          <a:ln w="12700">
+            <a:solidFill>
+              <a:srgbClr val="0F6674">
+                <a:alpha val="0"/>
+              </a:srgbClr>
+            </a:solidFill>
+            <a:prstDash val="solid"/>
+          </a:ln>
+        </p:spPr>
+      </p:sp>
+      <p:sp>
+        <p:nvSpPr>
+          <p:cNvPr id="25" name="Text 21"/>
+          <p:cNvSpPr/>
+          <p:nvPr/>
+        </p:nvSpPr>
+        <p:spPr>
+          <a:xfrm>
+            <a:off x="3375660" y="1896070"/>
+            <a:ext cx="2585680" cy="274320"/>
           </a:xfrm>
           <a:prstGeom prst="rect">
             <a:avLst/>
@@ -34734,12 +36309,273 @@
           <a:p>
             <a:pPr algn="ctr" indent="0" marL="0">
               <a:lnSpc>
-                <a:spcPts val="1740"/>
-              </a:lnSpc>
-              <a:buNone/>
-            </a:pPr>
-            <a:r>
-              <a:rPr lang="en-US" sz="1200" dirty="0">
+                <a:spcPts val="2160"/>
+              </a:lnSpc>
+              <a:buNone/>
+            </a:pPr>
+            <a:r>
+              <a:rPr lang="en-US" sz="1600" b="1" dirty="0">
+                <a:solidFill>
+                  <a:srgbClr val="0F6674"/>
+                </a:solidFill>
+                <a:latin typeface="Microsoft YaHei" pitchFamily="34" charset="0"/>
+                <a:ea typeface="Microsoft YaHei" pitchFamily="34" charset="-122"/>
+                <a:cs typeface="Microsoft YaHei" pitchFamily="34" charset="-120"/>
+              </a:rPr>
+              <a:t>起止时间</a:t>
+            </a:r>
+            <a:endParaRPr lang="en-US" sz="1600" dirty="0"/>
+          </a:p>
+        </p:txBody>
+      </p:sp>
+      <p:sp>
+        <p:nvSpPr>
+          <p:cNvPr id="26" name="Shape 22"/>
+          <p:cNvSpPr/>
+          <p:nvPr/>
+        </p:nvSpPr>
+        <p:spPr>
+          <a:xfrm>
+            <a:off x="6128980" y="1870710"/>
+            <a:ext cx="2768560" cy="332661"/>
+          </a:xfrm>
+          <a:prstGeom prst="rect">
+            <a:avLst/>
+          </a:prstGeom>
+          <a:solidFill>
+            <a:srgbClr val="FFFFFF"/>
+          </a:solidFill>
+          <a:ln w="12700">
+            <a:solidFill>
+              <a:srgbClr val="FFFFFF">
+                <a:alpha val="0"/>
+              </a:srgbClr>
+            </a:solidFill>
+            <a:prstDash val="solid"/>
+          </a:ln>
+        </p:spPr>
+      </p:sp>
+      <p:sp>
+        <p:nvSpPr>
+          <p:cNvPr id="27" name="Shape 23"/>
+          <p:cNvSpPr/>
+          <p:nvPr/>
+        </p:nvSpPr>
+        <p:spPr>
+          <a:xfrm>
+            <a:off x="6128980" y="2188131"/>
+            <a:ext cx="2768560" cy="15240"/>
+          </a:xfrm>
+          <a:prstGeom prst="rect">
+            <a:avLst/>
+          </a:prstGeom>
+          <a:solidFill>
+            <a:srgbClr val="0F6674"/>
+          </a:solidFill>
+          <a:ln w="12700">
+            <a:solidFill>
+              <a:srgbClr val="0F6674">
+                <a:alpha val="0"/>
+              </a:srgbClr>
+            </a:solidFill>
+            <a:prstDash val="solid"/>
+          </a:ln>
+        </p:spPr>
+      </p:sp>
+      <p:sp>
+        <p:nvSpPr>
+          <p:cNvPr id="28" name="Text 24"/>
+          <p:cNvSpPr/>
+          <p:nvPr/>
+        </p:nvSpPr>
+        <p:spPr>
+          <a:xfrm>
+            <a:off x="6220420" y="1896070"/>
+            <a:ext cx="2585680" cy="274320"/>
+          </a:xfrm>
+          <a:prstGeom prst="rect">
+            <a:avLst/>
+          </a:prstGeom>
+          <a:noFill/>
+          <a:ln/>
+        </p:spPr>
+        <p:txBody>
+          <a:bodyPr wrap="square" lIns="0" tIns="0" rIns="0" bIns="0" rtlCol="0" anchor="ctr"/>
+          <a:lstStyle/>
+          <a:p>
+            <a:pPr algn="ctr" indent="0" marL="0">
+              <a:lnSpc>
+                <a:spcPts val="2160"/>
+              </a:lnSpc>
+              <a:buNone/>
+            </a:pPr>
+            <a:r>
+              <a:rPr lang="en-US" sz="1600" b="1" dirty="0">
+                <a:solidFill>
+                  <a:srgbClr val="0F6674"/>
+                </a:solidFill>
+                <a:latin typeface="Microsoft YaHei" pitchFamily="34" charset="0"/>
+                <a:ea typeface="Microsoft YaHei" pitchFamily="34" charset="-122"/>
+                <a:cs typeface="Microsoft YaHei" pitchFamily="34" charset="-120"/>
+              </a:rPr>
+              <a:t>学校／工作单位</a:t>
+            </a:r>
+            <a:endParaRPr lang="en-US" sz="1600" dirty="0"/>
+          </a:p>
+        </p:txBody>
+      </p:sp>
+      <p:sp>
+        <p:nvSpPr>
+          <p:cNvPr id="29" name="Shape 25"/>
+          <p:cNvSpPr/>
+          <p:nvPr/>
+        </p:nvSpPr>
+        <p:spPr>
+          <a:xfrm>
+            <a:off x="8973741" y="1870710"/>
+            <a:ext cx="2768679" cy="332661"/>
+          </a:xfrm>
+          <a:prstGeom prst="rect">
+            <a:avLst/>
+          </a:prstGeom>
+          <a:solidFill>
+            <a:srgbClr val="FFFFFF"/>
+          </a:solidFill>
+          <a:ln w="12700">
+            <a:solidFill>
+              <a:srgbClr val="FFFFFF">
+                <a:alpha val="0"/>
+              </a:srgbClr>
+            </a:solidFill>
+            <a:prstDash val="solid"/>
+          </a:ln>
+        </p:spPr>
+      </p:sp>
+      <p:sp>
+        <p:nvSpPr>
+          <p:cNvPr id="30" name="Shape 26"/>
+          <p:cNvSpPr/>
+          <p:nvPr/>
+        </p:nvSpPr>
+        <p:spPr>
+          <a:xfrm>
+            <a:off x="8973741" y="2188131"/>
+            <a:ext cx="2768679" cy="15240"/>
+          </a:xfrm>
+          <a:prstGeom prst="rect">
+            <a:avLst/>
+          </a:prstGeom>
+          <a:solidFill>
+            <a:srgbClr val="0F6674"/>
+          </a:solidFill>
+          <a:ln w="12700">
+            <a:solidFill>
+              <a:srgbClr val="0F6674">
+                <a:alpha val="0"/>
+              </a:srgbClr>
+            </a:solidFill>
+            <a:prstDash val="solid"/>
+          </a:ln>
+        </p:spPr>
+      </p:sp>
+      <p:sp>
+        <p:nvSpPr>
+          <p:cNvPr id="31" name="Text 27"/>
+          <p:cNvSpPr/>
+          <p:nvPr/>
+        </p:nvSpPr>
+        <p:spPr>
+          <a:xfrm>
+            <a:off x="9065181" y="1896070"/>
+            <a:ext cx="2585799" cy="274320"/>
+          </a:xfrm>
+          <a:prstGeom prst="rect">
+            <a:avLst/>
+          </a:prstGeom>
+          <a:noFill/>
+          <a:ln/>
+        </p:spPr>
+        <p:txBody>
+          <a:bodyPr wrap="square" lIns="0" tIns="0" rIns="0" bIns="0" rtlCol="0" anchor="ctr"/>
+          <a:lstStyle/>
+          <a:p>
+            <a:pPr algn="ctr" indent="0" marL="0">
+              <a:lnSpc>
+                <a:spcPts val="2160"/>
+              </a:lnSpc>
+              <a:buNone/>
+            </a:pPr>
+            <a:r>
+              <a:rPr lang="en-US" sz="1600" b="1" dirty="0">
+                <a:solidFill>
+                  <a:srgbClr val="0F6674"/>
+                </a:solidFill>
+                <a:latin typeface="Microsoft YaHei" pitchFamily="34" charset="0"/>
+                <a:ea typeface="Microsoft YaHei" pitchFamily="34" charset="-122"/>
+                <a:cs typeface="Microsoft YaHei" pitchFamily="34" charset="-120"/>
+              </a:rPr>
+              <a:t>学位／专业／职务</a:t>
+            </a:r>
+            <a:endParaRPr lang="en-US" sz="1600" dirty="0"/>
+          </a:p>
+        </p:txBody>
+      </p:sp>
+      <p:sp>
+        <p:nvSpPr>
+          <p:cNvPr id="32" name="Shape 28"/>
+          <p:cNvSpPr/>
+          <p:nvPr/>
+        </p:nvSpPr>
+        <p:spPr>
+          <a:xfrm>
+            <a:off x="3284220" y="2203371"/>
+            <a:ext cx="2768560" cy="315992"/>
+          </a:xfrm>
+          <a:prstGeom prst="rect">
+            <a:avLst/>
+          </a:prstGeom>
+          <a:solidFill>
+            <a:srgbClr val="FFFFFF"/>
+          </a:solidFill>
+          <a:ln w="12700">
+            <a:solidFill>
+              <a:srgbClr val="FFFFFF">
+                <a:alpha val="0"/>
+              </a:srgbClr>
+            </a:solidFill>
+            <a:prstDash val="solid"/>
+          </a:ln>
+        </p:spPr>
+      </p:sp>
+      <p:sp>
+        <p:nvSpPr>
+          <p:cNvPr id="33" name="Text 29"/>
+          <p:cNvSpPr/>
+          <p:nvPr/>
+        </p:nvSpPr>
+        <p:spPr>
+          <a:xfrm>
+            <a:off x="3375660" y="2236351"/>
+            <a:ext cx="2585680" cy="257651"/>
+          </a:xfrm>
+          <a:prstGeom prst="rect">
+            <a:avLst/>
+          </a:prstGeom>
+          <a:noFill/>
+          <a:ln/>
+        </p:spPr>
+        <p:txBody>
+          <a:bodyPr wrap="square" lIns="0" tIns="0" rIns="0" bIns="0" rtlCol="0" anchor="ctr"/>
+          <a:lstStyle/>
+          <a:p>
+            <a:pPr algn="ctr" indent="0" marL="0">
+              <a:lnSpc>
+                <a:spcPts val="2030"/>
+              </a:lnSpc>
+              <a:buNone/>
+            </a:pPr>
+            <a:r>
+              <a:rPr lang="en-US" sz="1400" dirty="0">
                 <a:solidFill>
                   <a:srgbClr val="18383F"/>
                 </a:solidFill>
@@ -34749,20 +36585,47 @@
               </a:rPr>
               <a:t>20XX—20XX</a:t>
             </a:r>
-            <a:endParaRPr lang="en-US" sz="1200" dirty="0"/>
-          </a:p>
-        </p:txBody>
-      </p:sp>
-      <p:sp>
-        <p:nvSpPr>
-          <p:cNvPr id="18" name="Text 13"/>
-          <p:cNvSpPr/>
-          <p:nvPr/>
-        </p:nvSpPr>
-        <p:spPr>
-          <a:xfrm>
-            <a:off x="5312569" y="2253020"/>
-            <a:ext cx="3200400" cy="224790"/>
+            <a:endParaRPr lang="en-US" sz="1400" dirty="0"/>
+          </a:p>
+        </p:txBody>
+      </p:sp>
+      <p:sp>
+        <p:nvSpPr>
+          <p:cNvPr id="34" name="Shape 30"/>
+          <p:cNvSpPr/>
+          <p:nvPr/>
+        </p:nvSpPr>
+        <p:spPr>
+          <a:xfrm>
+            <a:off x="6128980" y="2203371"/>
+            <a:ext cx="2768560" cy="315992"/>
+          </a:xfrm>
+          <a:prstGeom prst="rect">
+            <a:avLst/>
+          </a:prstGeom>
+          <a:solidFill>
+            <a:srgbClr val="FFFFFF"/>
+          </a:solidFill>
+          <a:ln w="12700">
+            <a:solidFill>
+              <a:srgbClr val="FFFFFF">
+                <a:alpha val="0"/>
+              </a:srgbClr>
+            </a:solidFill>
+            <a:prstDash val="solid"/>
+          </a:ln>
+        </p:spPr>
+      </p:sp>
+      <p:sp>
+        <p:nvSpPr>
+          <p:cNvPr id="35" name="Text 31"/>
+          <p:cNvSpPr/>
+          <p:nvPr/>
+        </p:nvSpPr>
+        <p:spPr>
+          <a:xfrm>
+            <a:off x="6220420" y="2236351"/>
+            <a:ext cx="2585680" cy="257651"/>
           </a:xfrm>
           <a:prstGeom prst="rect">
             <a:avLst/>
@@ -34776,12 +36639,12 @@
           <a:p>
             <a:pPr algn="ctr" indent="0" marL="0">
               <a:lnSpc>
-                <a:spcPts val="1740"/>
-              </a:lnSpc>
-              <a:buNone/>
-            </a:pPr>
-            <a:r>
-              <a:rPr lang="en-US" sz="1200" dirty="0">
+                <a:spcPts val="2030"/>
+              </a:lnSpc>
+              <a:buNone/>
+            </a:pPr>
+            <a:r>
+              <a:rPr lang="en-US" sz="1400" dirty="0">
                 <a:solidFill>
                   <a:srgbClr val="18383F"/>
                 </a:solidFill>
@@ -34791,20 +36654,47 @@
               </a:rPr>
               <a:t>学校及院系</a:t>
             </a:r>
-            <a:endParaRPr lang="en-US" sz="1200" dirty="0"/>
-          </a:p>
-        </p:txBody>
-      </p:sp>
-      <p:sp>
-        <p:nvSpPr>
-          <p:cNvPr id="19" name="Text 14"/>
-          <p:cNvSpPr/>
-          <p:nvPr/>
-        </p:nvSpPr>
-        <p:spPr>
-          <a:xfrm>
-            <a:off x="8772049" y="2253020"/>
-            <a:ext cx="2878931" cy="224790"/>
+            <a:endParaRPr lang="en-US" sz="1400" dirty="0"/>
+          </a:p>
+        </p:txBody>
+      </p:sp>
+      <p:sp>
+        <p:nvSpPr>
+          <p:cNvPr id="36" name="Shape 32"/>
+          <p:cNvSpPr/>
+          <p:nvPr/>
+        </p:nvSpPr>
+        <p:spPr>
+          <a:xfrm>
+            <a:off x="8973741" y="2203371"/>
+            <a:ext cx="2768679" cy="315992"/>
+          </a:xfrm>
+          <a:prstGeom prst="rect">
+            <a:avLst/>
+          </a:prstGeom>
+          <a:solidFill>
+            <a:srgbClr val="FFFFFF"/>
+          </a:solidFill>
+          <a:ln w="12700">
+            <a:solidFill>
+              <a:srgbClr val="FFFFFF">
+                <a:alpha val="0"/>
+              </a:srgbClr>
+            </a:solidFill>
+            <a:prstDash val="solid"/>
+          </a:ln>
+        </p:spPr>
+      </p:sp>
+      <p:sp>
+        <p:nvSpPr>
+          <p:cNvPr id="37" name="Text 33"/>
+          <p:cNvSpPr/>
+          <p:nvPr/>
+        </p:nvSpPr>
+        <p:spPr>
+          <a:xfrm>
+            <a:off x="9065181" y="2236351"/>
+            <a:ext cx="2585799" cy="257651"/>
           </a:xfrm>
           <a:prstGeom prst="rect">
             <a:avLst/>
@@ -34818,12 +36708,12 @@
           <a:p>
             <a:pPr algn="ctr" indent="0" marL="0">
               <a:lnSpc>
-                <a:spcPts val="1740"/>
-              </a:lnSpc>
-              <a:buNone/>
-            </a:pPr>
-            <a:r>
-              <a:rPr lang="en-US" sz="1200" dirty="0">
+                <a:spcPts val="2030"/>
+              </a:lnSpc>
+              <a:buNone/>
+            </a:pPr>
+            <a:r>
+              <a:rPr lang="en-US" sz="1400" dirty="0">
                 <a:solidFill>
                   <a:srgbClr val="18383F"/>
                 </a:solidFill>
@@ -34833,20 +36723,47 @@
               </a:rPr>
               <a:t>学位与专业</a:t>
             </a:r>
-            <a:endParaRPr lang="en-US" sz="1200" dirty="0"/>
-          </a:p>
-        </p:txBody>
-      </p:sp>
-      <p:sp>
-        <p:nvSpPr>
-          <p:cNvPr id="20" name="Text 15"/>
-          <p:cNvSpPr/>
-          <p:nvPr/>
-        </p:nvSpPr>
-        <p:spPr>
-          <a:xfrm>
-            <a:off x="3375660" y="2554010"/>
-            <a:ext cx="1677829" cy="220980"/>
+            <a:endParaRPr lang="en-US" sz="1400" dirty="0"/>
+          </a:p>
+        </p:txBody>
+      </p:sp>
+      <p:sp>
+        <p:nvSpPr>
+          <p:cNvPr id="38" name="Shape 34"/>
+          <p:cNvSpPr/>
+          <p:nvPr/>
+        </p:nvSpPr>
+        <p:spPr>
+          <a:xfrm>
+            <a:off x="3284220" y="2519363"/>
+            <a:ext cx="2768560" cy="308372"/>
+          </a:xfrm>
+          <a:prstGeom prst="rect">
+            <a:avLst/>
+          </a:prstGeom>
+          <a:solidFill>
+            <a:srgbClr val="FFFFFF"/>
+          </a:solidFill>
+          <a:ln w="12700">
+            <a:solidFill>
+              <a:srgbClr val="FFFFFF">
+                <a:alpha val="0"/>
+              </a:srgbClr>
+            </a:solidFill>
+            <a:prstDash val="solid"/>
+          </a:ln>
+        </p:spPr>
+      </p:sp>
+      <p:sp>
+        <p:nvSpPr>
+          <p:cNvPr id="39" name="Text 35"/>
+          <p:cNvSpPr/>
+          <p:nvPr/>
+        </p:nvSpPr>
+        <p:spPr>
+          <a:xfrm>
+            <a:off x="3375660" y="2544723"/>
+            <a:ext cx="2585680" cy="257651"/>
           </a:xfrm>
           <a:prstGeom prst="rect">
             <a:avLst/>
@@ -34860,12 +36777,12 @@
           <a:p>
             <a:pPr algn="ctr" indent="0" marL="0">
               <a:lnSpc>
-                <a:spcPts val="1740"/>
-              </a:lnSpc>
-              <a:buNone/>
-            </a:pPr>
-            <a:r>
-              <a:rPr lang="en-US" sz="1200" dirty="0">
+                <a:spcPts val="2030"/>
+              </a:lnSpc>
+              <a:buNone/>
+            </a:pPr>
+            <a:r>
+              <a:rPr lang="en-US" sz="1400" dirty="0">
                 <a:solidFill>
                   <a:srgbClr val="18383F"/>
                 </a:solidFill>
@@ -34875,20 +36792,47 @@
               </a:rPr>
               <a:t>20XX—20XX</a:t>
             </a:r>
-            <a:endParaRPr lang="en-US" sz="1200" dirty="0"/>
-          </a:p>
-        </p:txBody>
-      </p:sp>
-      <p:sp>
-        <p:nvSpPr>
-          <p:cNvPr id="21" name="Text 16"/>
-          <p:cNvSpPr/>
-          <p:nvPr/>
-        </p:nvSpPr>
-        <p:spPr>
-          <a:xfrm>
-            <a:off x="5312569" y="2554010"/>
-            <a:ext cx="3200400" cy="220980"/>
+            <a:endParaRPr lang="en-US" sz="1400" dirty="0"/>
+          </a:p>
+        </p:txBody>
+      </p:sp>
+      <p:sp>
+        <p:nvSpPr>
+          <p:cNvPr id="40" name="Shape 36"/>
+          <p:cNvSpPr/>
+          <p:nvPr/>
+        </p:nvSpPr>
+        <p:spPr>
+          <a:xfrm>
+            <a:off x="6128980" y="2519363"/>
+            <a:ext cx="2768560" cy="308372"/>
+          </a:xfrm>
+          <a:prstGeom prst="rect">
+            <a:avLst/>
+          </a:prstGeom>
+          <a:solidFill>
+            <a:srgbClr val="FFFFFF"/>
+          </a:solidFill>
+          <a:ln w="12700">
+            <a:solidFill>
+              <a:srgbClr val="FFFFFF">
+                <a:alpha val="0"/>
+              </a:srgbClr>
+            </a:solidFill>
+            <a:prstDash val="solid"/>
+          </a:ln>
+        </p:spPr>
+      </p:sp>
+      <p:sp>
+        <p:nvSpPr>
+          <p:cNvPr id="41" name="Text 37"/>
+          <p:cNvSpPr/>
+          <p:nvPr/>
+        </p:nvSpPr>
+        <p:spPr>
+          <a:xfrm>
+            <a:off x="6220420" y="2544723"/>
+            <a:ext cx="2585680" cy="257651"/>
           </a:xfrm>
           <a:prstGeom prst="rect">
             <a:avLst/>
@@ -34902,12 +36846,12 @@
           <a:p>
             <a:pPr algn="ctr" indent="0" marL="0">
               <a:lnSpc>
-                <a:spcPts val="1740"/>
-              </a:lnSpc>
-              <a:buNone/>
-            </a:pPr>
-            <a:r>
-              <a:rPr lang="en-US" sz="1200" dirty="0">
+                <a:spcPts val="2030"/>
+              </a:lnSpc>
+              <a:buNone/>
+            </a:pPr>
+            <a:r>
+              <a:rPr lang="en-US" sz="1400" dirty="0">
                 <a:solidFill>
                   <a:srgbClr val="18383F"/>
                 </a:solidFill>
@@ -34917,20 +36861,47 @@
               </a:rPr>
               <a:t>研究机构／工作单位</a:t>
             </a:r>
-            <a:endParaRPr lang="en-US" sz="1200" dirty="0"/>
-          </a:p>
-        </p:txBody>
-      </p:sp>
-      <p:sp>
-        <p:nvSpPr>
-          <p:cNvPr id="22" name="Text 17"/>
-          <p:cNvSpPr/>
-          <p:nvPr/>
-        </p:nvSpPr>
-        <p:spPr>
-          <a:xfrm>
-            <a:off x="8772049" y="2554010"/>
-            <a:ext cx="2878931" cy="220980"/>
+            <a:endParaRPr lang="en-US" sz="1400" dirty="0"/>
+          </a:p>
+        </p:txBody>
+      </p:sp>
+      <p:sp>
+        <p:nvSpPr>
+          <p:cNvPr id="42" name="Shape 38"/>
+          <p:cNvSpPr/>
+          <p:nvPr/>
+        </p:nvSpPr>
+        <p:spPr>
+          <a:xfrm>
+            <a:off x="8973741" y="2519363"/>
+            <a:ext cx="2768679" cy="308372"/>
+          </a:xfrm>
+          <a:prstGeom prst="rect">
+            <a:avLst/>
+          </a:prstGeom>
+          <a:solidFill>
+            <a:srgbClr val="FFFFFF"/>
+          </a:solidFill>
+          <a:ln w="12700">
+            <a:solidFill>
+              <a:srgbClr val="FFFFFF">
+                <a:alpha val="0"/>
+              </a:srgbClr>
+            </a:solidFill>
+            <a:prstDash val="solid"/>
+          </a:ln>
+        </p:spPr>
+      </p:sp>
+      <p:sp>
+        <p:nvSpPr>
+          <p:cNvPr id="43" name="Text 39"/>
+          <p:cNvSpPr/>
+          <p:nvPr/>
+        </p:nvSpPr>
+        <p:spPr>
+          <a:xfrm>
+            <a:off x="9065181" y="2544723"/>
+            <a:ext cx="2585799" cy="257651"/>
           </a:xfrm>
           <a:prstGeom prst="rect">
             <a:avLst/>
@@ -34944,12 +36915,12 @@
           <a:p>
             <a:pPr algn="ctr" indent="0" marL="0">
               <a:lnSpc>
-                <a:spcPts val="1740"/>
-              </a:lnSpc>
-              <a:buNone/>
-            </a:pPr>
-            <a:r>
-              <a:rPr lang="en-US" sz="1200" dirty="0">
+                <a:spcPts val="2030"/>
+              </a:lnSpc>
+              <a:buNone/>
+            </a:pPr>
+            <a:r>
+              <a:rPr lang="en-US" sz="1400" dirty="0">
                 <a:solidFill>
                   <a:srgbClr val="18383F"/>
                 </a:solidFill>
@@ -34959,20 +36930,47 @@
               </a:rPr>
               <a:t>科研岗位</a:t>
             </a:r>
-            <a:endParaRPr lang="en-US" sz="1200" dirty="0"/>
-          </a:p>
-        </p:txBody>
-      </p:sp>
-      <p:sp>
-        <p:nvSpPr>
-          <p:cNvPr id="23" name="Text 18"/>
-          <p:cNvSpPr/>
-          <p:nvPr/>
-        </p:nvSpPr>
-        <p:spPr>
-          <a:xfrm>
-            <a:off x="3375660" y="2851190"/>
-            <a:ext cx="1677829" cy="220980"/>
+            <a:endParaRPr lang="en-US" sz="1400" dirty="0"/>
+          </a:p>
+        </p:txBody>
+      </p:sp>
+      <p:sp>
+        <p:nvSpPr>
+          <p:cNvPr id="44" name="Shape 40"/>
+          <p:cNvSpPr/>
+          <p:nvPr/>
+        </p:nvSpPr>
+        <p:spPr>
+          <a:xfrm>
+            <a:off x="3284220" y="2827734"/>
+            <a:ext cx="2768560" cy="308372"/>
+          </a:xfrm>
+          <a:prstGeom prst="rect">
+            <a:avLst/>
+          </a:prstGeom>
+          <a:solidFill>
+            <a:srgbClr val="FFFFFF"/>
+          </a:solidFill>
+          <a:ln w="12700">
+            <a:solidFill>
+              <a:srgbClr val="FFFFFF">
+                <a:alpha val="0"/>
+              </a:srgbClr>
+            </a:solidFill>
+            <a:prstDash val="solid"/>
+          </a:ln>
+        </p:spPr>
+      </p:sp>
+      <p:sp>
+        <p:nvSpPr>
+          <p:cNvPr id="45" name="Text 41"/>
+          <p:cNvSpPr/>
+          <p:nvPr/>
+        </p:nvSpPr>
+        <p:spPr>
+          <a:xfrm>
+            <a:off x="3375660" y="2853095"/>
+            <a:ext cx="2585680" cy="257651"/>
           </a:xfrm>
           <a:prstGeom prst="rect">
             <a:avLst/>
@@ -34986,12 +36984,12 @@
           <a:p>
             <a:pPr algn="ctr" indent="0" marL="0">
               <a:lnSpc>
-                <a:spcPts val="1740"/>
-              </a:lnSpc>
-              <a:buNone/>
-            </a:pPr>
-            <a:r>
-              <a:rPr lang="en-US" sz="1200" dirty="0">
+                <a:spcPts val="2030"/>
+              </a:lnSpc>
+              <a:buNone/>
+            </a:pPr>
+            <a:r>
+              <a:rPr lang="en-US" sz="1400" dirty="0">
                 <a:solidFill>
                   <a:srgbClr val="18383F"/>
                 </a:solidFill>
@@ -35001,20 +36999,47 @@
               </a:rPr>
               <a:t>20XX—至今</a:t>
             </a:r>
-            <a:endParaRPr lang="en-US" sz="1200" dirty="0"/>
-          </a:p>
-        </p:txBody>
-      </p:sp>
-      <p:sp>
-        <p:nvSpPr>
-          <p:cNvPr id="24" name="Text 19"/>
-          <p:cNvSpPr/>
-          <p:nvPr/>
-        </p:nvSpPr>
-        <p:spPr>
-          <a:xfrm>
-            <a:off x="5312569" y="2851190"/>
-            <a:ext cx="3200400" cy="220980"/>
+            <a:endParaRPr lang="en-US" sz="1400" dirty="0"/>
+          </a:p>
+        </p:txBody>
+      </p:sp>
+      <p:sp>
+        <p:nvSpPr>
+          <p:cNvPr id="46" name="Shape 42"/>
+          <p:cNvSpPr/>
+          <p:nvPr/>
+        </p:nvSpPr>
+        <p:spPr>
+          <a:xfrm>
+            <a:off x="6128980" y="2827734"/>
+            <a:ext cx="2768560" cy="308372"/>
+          </a:xfrm>
+          <a:prstGeom prst="rect">
+            <a:avLst/>
+          </a:prstGeom>
+          <a:solidFill>
+            <a:srgbClr val="FFFFFF"/>
+          </a:solidFill>
+          <a:ln w="12700">
+            <a:solidFill>
+              <a:srgbClr val="FFFFFF">
+                <a:alpha val="0"/>
+              </a:srgbClr>
+            </a:solidFill>
+            <a:prstDash val="solid"/>
+          </a:ln>
+        </p:spPr>
+      </p:sp>
+      <p:sp>
+        <p:nvSpPr>
+          <p:cNvPr id="47" name="Text 43"/>
+          <p:cNvSpPr/>
+          <p:nvPr/>
+        </p:nvSpPr>
+        <p:spPr>
+          <a:xfrm>
+            <a:off x="6220420" y="2853095"/>
+            <a:ext cx="2585680" cy="257651"/>
           </a:xfrm>
           <a:prstGeom prst="rect">
             <a:avLst/>
@@ -35028,12 +37053,12 @@
           <a:p>
             <a:pPr algn="ctr" indent="0" marL="0">
               <a:lnSpc>
-                <a:spcPts val="1740"/>
-              </a:lnSpc>
-              <a:buNone/>
-            </a:pPr>
-            <a:r>
-              <a:rPr lang="en-US" sz="1200" dirty="0">
+                <a:spcPts val="2030"/>
+              </a:lnSpc>
+              <a:buNone/>
+            </a:pPr>
+            <a:r>
+              <a:rPr lang="en-US" sz="1400" dirty="0">
                 <a:solidFill>
                   <a:srgbClr val="18383F"/>
                 </a:solidFill>
@@ -35043,20 +37068,47 @@
               </a:rPr>
               <a:t>现工作单位</a:t>
             </a:r>
-            <a:endParaRPr lang="en-US" sz="1200" dirty="0"/>
-          </a:p>
-        </p:txBody>
-      </p:sp>
-      <p:sp>
-        <p:nvSpPr>
-          <p:cNvPr id="25" name="Text 20"/>
-          <p:cNvSpPr/>
-          <p:nvPr/>
-        </p:nvSpPr>
-        <p:spPr>
-          <a:xfrm>
-            <a:off x="8772049" y="2851190"/>
-            <a:ext cx="2878931" cy="220980"/>
+            <a:endParaRPr lang="en-US" sz="1400" dirty="0"/>
+          </a:p>
+        </p:txBody>
+      </p:sp>
+      <p:sp>
+        <p:nvSpPr>
+          <p:cNvPr id="48" name="Shape 44"/>
+          <p:cNvSpPr/>
+          <p:nvPr/>
+        </p:nvSpPr>
+        <p:spPr>
+          <a:xfrm>
+            <a:off x="8973741" y="2827734"/>
+            <a:ext cx="2768679" cy="308372"/>
+          </a:xfrm>
+          <a:prstGeom prst="rect">
+            <a:avLst/>
+          </a:prstGeom>
+          <a:solidFill>
+            <a:srgbClr val="FFFFFF"/>
+          </a:solidFill>
+          <a:ln w="12700">
+            <a:solidFill>
+              <a:srgbClr val="FFFFFF">
+                <a:alpha val="0"/>
+              </a:srgbClr>
+            </a:solidFill>
+            <a:prstDash val="solid"/>
+          </a:ln>
+        </p:spPr>
+      </p:sp>
+      <p:sp>
+        <p:nvSpPr>
+          <p:cNvPr id="49" name="Text 45"/>
+          <p:cNvSpPr/>
+          <p:nvPr/>
+        </p:nvSpPr>
+        <p:spPr>
+          <a:xfrm>
+            <a:off x="9065181" y="2853095"/>
+            <a:ext cx="2585799" cy="257651"/>
           </a:xfrm>
           <a:prstGeom prst="rect">
             <a:avLst/>
@@ -35070,12 +37122,12 @@
           <a:p>
             <a:pPr algn="ctr" indent="0" marL="0">
               <a:lnSpc>
-                <a:spcPts val="1740"/>
-              </a:lnSpc>
-              <a:buNone/>
-            </a:pPr>
-            <a:r>
-              <a:rPr lang="en-US" sz="1200" dirty="0">
+                <a:spcPts val="2030"/>
+              </a:lnSpc>
+              <a:buNone/>
+            </a:pPr>
+            <a:r>
+              <a:rPr lang="en-US" sz="1400" dirty="0">
                 <a:solidFill>
                   <a:srgbClr val="18383F"/>
                 </a:solidFill>
@@ -35085,19 +37137,73 @@
               </a:rPr>
               <a:t>现任职务</a:t>
             </a:r>
-            <a:endParaRPr lang="en-US" sz="1200" dirty="0"/>
-          </a:p>
-        </p:txBody>
-      </p:sp>
-      <p:sp>
-        <p:nvSpPr>
-          <p:cNvPr id="26" name="Text 21"/>
-          <p:cNvSpPr/>
-          <p:nvPr/>
-        </p:nvSpPr>
-        <p:spPr>
-          <a:xfrm>
-            <a:off x="3406140" y="3293150"/>
+            <a:endParaRPr lang="en-US" sz="1400" dirty="0"/>
+          </a:p>
+        </p:txBody>
+      </p:sp>
+      <p:sp>
+        <p:nvSpPr>
+          <p:cNvPr id="50" name="Shape 46"/>
+          <p:cNvSpPr/>
+          <p:nvPr/>
+        </p:nvSpPr>
+        <p:spPr>
+          <a:xfrm>
+            <a:off x="3276600" y="3276600"/>
+            <a:ext cx="8473440" cy="1364933"/>
+          </a:xfrm>
+          <a:prstGeom prst="rect">
+            <a:avLst/>
+          </a:prstGeom>
+          <a:solidFill>
+            <a:srgbClr val="FFFFFF">
+              <a:alpha val="0"/>
+            </a:srgbClr>
+          </a:solidFill>
+          <a:ln w="7620">
+            <a:solidFill>
+              <a:srgbClr val="CFDDE6"/>
+            </a:solidFill>
+            <a:prstDash val="solid"/>
+          </a:ln>
+        </p:spPr>
+      </p:sp>
+      <p:sp>
+        <p:nvSpPr>
+          <p:cNvPr id="51" name="Shape 47"/>
+          <p:cNvSpPr/>
+          <p:nvPr/>
+        </p:nvSpPr>
+        <p:spPr>
+          <a:xfrm>
+            <a:off x="3284220" y="3284220"/>
+            <a:ext cx="8458200" cy="400050"/>
+          </a:xfrm>
+          <a:prstGeom prst="rect">
+            <a:avLst/>
+          </a:prstGeom>
+          <a:solidFill>
+            <a:srgbClr val="0F6674"/>
+          </a:solidFill>
+          <a:ln w="12700">
+            <a:solidFill>
+              <a:srgbClr val="0F6674">
+                <a:alpha val="0"/>
+              </a:srgbClr>
+            </a:solidFill>
+            <a:prstDash val="solid"/>
+          </a:ln>
+        </p:spPr>
+      </p:sp>
+      <p:sp>
+        <p:nvSpPr>
+          <p:cNvPr id="52" name="Text 48"/>
+          <p:cNvSpPr/>
+          <p:nvPr/>
+        </p:nvSpPr>
+        <p:spPr>
+          <a:xfrm>
+            <a:off x="3406140" y="3329940"/>
             <a:ext cx="8214360" cy="308610"/>
           </a:xfrm>
           <a:prstGeom prst="rect">
@@ -35133,14 +37239,41 @@
       </p:sp>
       <p:sp>
         <p:nvSpPr>
-          <p:cNvPr id="27" name="Text 22"/>
-          <p:cNvSpPr/>
-          <p:nvPr/>
-        </p:nvSpPr>
-        <p:spPr>
-          <a:xfrm>
-            <a:off x="3406140" y="3738920"/>
-            <a:ext cx="4015740" cy="239911"/>
+          <p:cNvPr id="53" name="Shape 49"/>
+          <p:cNvSpPr/>
+          <p:nvPr/>
+        </p:nvSpPr>
+        <p:spPr>
+          <a:xfrm>
+            <a:off x="3284220" y="3684270"/>
+            <a:ext cx="4229100" cy="350520"/>
+          </a:xfrm>
+          <a:prstGeom prst="rect">
+            <a:avLst/>
+          </a:prstGeom>
+          <a:solidFill>
+            <a:srgbClr val="FFFFFF"/>
+          </a:solidFill>
+          <a:ln w="12700">
+            <a:solidFill>
+              <a:srgbClr val="FFFFFF">
+                <a:alpha val="0"/>
+              </a:srgbClr>
+            </a:solidFill>
+            <a:prstDash val="solid"/>
+          </a:ln>
+        </p:spPr>
+      </p:sp>
+      <p:sp>
+        <p:nvSpPr>
+          <p:cNvPr id="54" name="Text 50"/>
+          <p:cNvSpPr/>
+          <p:nvPr/>
+        </p:nvSpPr>
+        <p:spPr>
+          <a:xfrm>
+            <a:off x="3406140" y="3729990"/>
+            <a:ext cx="3985260" cy="274320"/>
           </a:xfrm>
           <a:prstGeom prst="rect">
             <a:avLst/>
@@ -35154,12 +37287,12 @@
           <a:p>
             <a:pPr algn="l" indent="0" marL="0">
               <a:lnSpc>
-                <a:spcPts val="1890"/>
-              </a:lnSpc>
-              <a:buNone/>
-            </a:pPr>
-            <a:r>
-              <a:rPr lang="en-US" sz="1400" b="1" dirty="0">
+                <a:spcPts val="2160"/>
+              </a:lnSpc>
+              <a:buNone/>
+            </a:pPr>
+            <a:r>
+              <a:rPr lang="en-US" sz="1600" b="1" dirty="0">
                 <a:solidFill>
                   <a:srgbClr val="0F6674"/>
                 </a:solidFill>
@@ -35169,20 +37302,185 @@
               </a:rPr>
               <a:t>学术任职</a:t>
             </a:r>
+            <a:endParaRPr lang="en-US" sz="1600" dirty="0"/>
+          </a:p>
+        </p:txBody>
+      </p:sp>
+      <p:sp>
+        <p:nvSpPr>
+          <p:cNvPr id="55" name="Shape 51"/>
+          <p:cNvSpPr/>
+          <p:nvPr/>
+        </p:nvSpPr>
+        <p:spPr>
+          <a:xfrm>
+            <a:off x="7513320" y="3684270"/>
+            <a:ext cx="4229100" cy="350520"/>
+          </a:xfrm>
+          <a:prstGeom prst="rect">
+            <a:avLst/>
+          </a:prstGeom>
+          <a:solidFill>
+            <a:srgbClr val="FFFFFF"/>
+          </a:solidFill>
+          <a:ln w="12700">
+            <a:solidFill>
+              <a:srgbClr val="FFFFFF">
+                <a:alpha val="0"/>
+              </a:srgbClr>
+            </a:solidFill>
+            <a:prstDash val="solid"/>
+          </a:ln>
+        </p:spPr>
+      </p:sp>
+      <p:sp>
+        <p:nvSpPr>
+          <p:cNvPr id="56" name="Text 52"/>
+          <p:cNvSpPr/>
+          <p:nvPr/>
+        </p:nvSpPr>
+        <p:spPr>
+          <a:xfrm>
+            <a:off x="7635240" y="3729990"/>
+            <a:ext cx="3985260" cy="274320"/>
+          </a:xfrm>
+          <a:prstGeom prst="rect">
+            <a:avLst/>
+          </a:prstGeom>
+          <a:noFill/>
+          <a:ln/>
+        </p:spPr>
+        <p:txBody>
+          <a:bodyPr wrap="square" lIns="0" tIns="0" rIns="0" bIns="0" rtlCol="0" anchor="ctr"/>
+          <a:lstStyle/>
+          <a:p>
+            <a:pPr algn="l" indent="0" marL="0">
+              <a:lnSpc>
+                <a:spcPts val="2160"/>
+              </a:lnSpc>
+              <a:buNone/>
+            </a:pPr>
+            <a:r>
+              <a:rPr lang="en-US" sz="1600" b="1" dirty="0">
+                <a:solidFill>
+                  <a:srgbClr val="0F6674"/>
+                </a:solidFill>
+                <a:latin typeface="Microsoft YaHei" pitchFamily="34" charset="0"/>
+                <a:ea typeface="Microsoft YaHei" pitchFamily="34" charset="-122"/>
+                <a:cs typeface="Microsoft YaHei" pitchFamily="34" charset="-120"/>
+              </a:rPr>
+              <a:t>代表性项目与奖项</a:t>
+            </a:r>
+            <a:endParaRPr lang="en-US" sz="1600" dirty="0"/>
+          </a:p>
+        </p:txBody>
+      </p:sp>
+      <p:sp>
+        <p:nvSpPr>
+          <p:cNvPr id="57" name="Shape 53"/>
+          <p:cNvSpPr/>
+          <p:nvPr/>
+        </p:nvSpPr>
+        <p:spPr>
+          <a:xfrm>
+            <a:off x="3284220" y="4034790"/>
+            <a:ext cx="4229100" cy="299561"/>
+          </a:xfrm>
+          <a:prstGeom prst="rect">
+            <a:avLst/>
+          </a:prstGeom>
+          <a:solidFill>
+            <a:srgbClr val="FFFFFF"/>
+          </a:solidFill>
+          <a:ln w="12700">
+            <a:solidFill>
+              <a:srgbClr val="FFFFFF">
+                <a:alpha val="0"/>
+              </a:srgbClr>
+            </a:solidFill>
+            <a:prstDash val="solid"/>
+          </a:ln>
+        </p:spPr>
+      </p:sp>
+      <p:sp>
+        <p:nvSpPr>
+          <p:cNvPr id="58" name="Text 54"/>
+          <p:cNvSpPr/>
+          <p:nvPr/>
+        </p:nvSpPr>
+        <p:spPr>
+          <a:xfrm>
+            <a:off x="3406140" y="4060150"/>
+            <a:ext cx="3985260" cy="248841"/>
+          </a:xfrm>
+          <a:prstGeom prst="rect">
+            <a:avLst/>
+          </a:prstGeom>
+          <a:noFill/>
+          <a:ln/>
+        </p:spPr>
+        <p:txBody>
+          <a:bodyPr wrap="square" lIns="0" tIns="0" rIns="0" bIns="0" rtlCol="0" anchor="ctr"/>
+          <a:lstStyle/>
+          <a:p>
+            <a:pPr algn="l" indent="0" marL="0">
+              <a:lnSpc>
+                <a:spcPts val="1960"/>
+              </a:lnSpc>
+              <a:buNone/>
+            </a:pPr>
+            <a:r>
+              <a:rPr lang="en-US" sz="1400" dirty="0">
+                <a:solidFill>
+                  <a:srgbClr val="18383F"/>
+                </a:solidFill>
+                <a:latin typeface="Microsoft YaHei" pitchFamily="34" charset="0"/>
+                <a:ea typeface="Microsoft YaHei" pitchFamily="34" charset="-122"/>
+                <a:cs typeface="Microsoft YaHei" pitchFamily="34" charset="-120"/>
+              </a:rPr>
+              <a:t>学术组织／期刊：职务</a:t>
+            </a:r>
             <a:endParaRPr lang="en-US" sz="1400" dirty="0"/>
           </a:p>
         </p:txBody>
       </p:sp>
       <p:sp>
         <p:nvSpPr>
-          <p:cNvPr id="28" name="Text 23"/>
-          <p:cNvSpPr/>
-          <p:nvPr/>
-        </p:nvSpPr>
-        <p:spPr>
-          <a:xfrm>
-            <a:off x="3634740" y="4024551"/>
-            <a:ext cx="3787140" cy="213360"/>
+          <p:cNvPr id="59" name="Shape 55"/>
+          <p:cNvSpPr/>
+          <p:nvPr/>
+        </p:nvSpPr>
+        <p:spPr>
+          <a:xfrm>
+            <a:off x="7513320" y="4034790"/>
+            <a:ext cx="4229100" cy="299561"/>
+          </a:xfrm>
+          <a:prstGeom prst="rect">
+            <a:avLst/>
+          </a:prstGeom>
+          <a:solidFill>
+            <a:srgbClr val="FFFFFF"/>
+          </a:solidFill>
+          <a:ln w="12700">
+            <a:solidFill>
+              <a:srgbClr val="FFFFFF">
+                <a:alpha val="0"/>
+              </a:srgbClr>
+            </a:solidFill>
+            <a:prstDash val="solid"/>
+          </a:ln>
+        </p:spPr>
+      </p:sp>
+      <p:sp>
+        <p:nvSpPr>
+          <p:cNvPr id="60" name="Text 56"/>
+          <p:cNvSpPr/>
+          <p:nvPr/>
+        </p:nvSpPr>
+        <p:spPr>
+          <a:xfrm>
+            <a:off x="7635240" y="4060150"/>
+            <a:ext cx="3985260" cy="248841"/>
           </a:xfrm>
           <a:prstGeom prst="rect">
             <a:avLst/>
@@ -35196,12 +37494,12 @@
           <a:p>
             <a:pPr algn="l" indent="0" marL="0">
               <a:lnSpc>
-                <a:spcPts val="1680"/>
-              </a:lnSpc>
-              <a:buNone/>
-            </a:pPr>
-            <a:r>
-              <a:rPr lang="en-US" sz="1200" dirty="0">
+                <a:spcPts val="1960"/>
+              </a:lnSpc>
+              <a:buNone/>
+            </a:pPr>
+            <a:r>
+              <a:rPr lang="en-US" sz="1400" dirty="0">
                 <a:solidFill>
                   <a:srgbClr val="18383F"/>
                 </a:solidFill>
@@ -35209,22 +37507,49 @@
                 <a:ea typeface="Microsoft YaHei" pitchFamily="34" charset="-122"/>
                 <a:cs typeface="Microsoft YaHei" pitchFamily="34" charset="-120"/>
               </a:rPr>
-              <a:t>•　学术组织／期刊：职务</a:t>
-            </a:r>
-            <a:endParaRPr lang="en-US" sz="1200" dirty="0"/>
-          </a:p>
-        </p:txBody>
-      </p:sp>
-      <p:sp>
-        <p:nvSpPr>
-          <p:cNvPr id="29" name="Text 24"/>
-          <p:cNvSpPr/>
-          <p:nvPr/>
-        </p:nvSpPr>
-        <p:spPr>
-          <a:xfrm>
-            <a:off x="3634740" y="4298871"/>
-            <a:ext cx="3787140" cy="213360"/>
+              <a:t>项目：名称、本人角色</a:t>
+            </a:r>
+            <a:endParaRPr lang="en-US" sz="1400" dirty="0"/>
+          </a:p>
+        </p:txBody>
+      </p:sp>
+      <p:sp>
+        <p:nvSpPr>
+          <p:cNvPr id="61" name="Shape 57"/>
+          <p:cNvSpPr/>
+          <p:nvPr/>
+        </p:nvSpPr>
+        <p:spPr>
+          <a:xfrm>
+            <a:off x="3284220" y="4334351"/>
+            <a:ext cx="4229100" cy="299561"/>
+          </a:xfrm>
+          <a:prstGeom prst="rect">
+            <a:avLst/>
+          </a:prstGeom>
+          <a:solidFill>
+            <a:srgbClr val="FFFFFF"/>
+          </a:solidFill>
+          <a:ln w="12700">
+            <a:solidFill>
+              <a:srgbClr val="FFFFFF">
+                <a:alpha val="0"/>
+              </a:srgbClr>
+            </a:solidFill>
+            <a:prstDash val="solid"/>
+          </a:ln>
+        </p:spPr>
+      </p:sp>
+      <p:sp>
+        <p:nvSpPr>
+          <p:cNvPr id="62" name="Text 58"/>
+          <p:cNvSpPr/>
+          <p:nvPr/>
+        </p:nvSpPr>
+        <p:spPr>
+          <a:xfrm>
+            <a:off x="3406140" y="4359712"/>
+            <a:ext cx="3985260" cy="248841"/>
           </a:xfrm>
           <a:prstGeom prst="rect">
             <a:avLst/>
@@ -35238,12 +37563,12 @@
           <a:p>
             <a:pPr algn="l" indent="0" marL="0">
               <a:lnSpc>
-                <a:spcPts val="1680"/>
-              </a:lnSpc>
-              <a:buNone/>
-            </a:pPr>
-            <a:r>
-              <a:rPr lang="en-US" sz="1200" dirty="0">
+                <a:spcPts val="1960"/>
+              </a:lnSpc>
+              <a:buNone/>
+            </a:pPr>
+            <a:r>
+              <a:rPr lang="en-US" sz="1400" dirty="0">
                 <a:solidFill>
                   <a:srgbClr val="18383F"/>
                 </a:solidFill>
@@ -35251,22 +37576,49 @@
                 <a:ea typeface="Microsoft YaHei" pitchFamily="34" charset="-122"/>
                 <a:cs typeface="Microsoft YaHei" pitchFamily="34" charset="-120"/>
               </a:rPr>
-              <a:t>•　任期／服务事项：时间</a:t>
-            </a:r>
-            <a:endParaRPr lang="en-US" sz="1200" dirty="0"/>
-          </a:p>
-        </p:txBody>
-      </p:sp>
-      <p:sp>
-        <p:nvSpPr>
-          <p:cNvPr id="30" name="Text 25"/>
-          <p:cNvSpPr/>
-          <p:nvPr/>
-        </p:nvSpPr>
-        <p:spPr>
-          <a:xfrm>
-            <a:off x="7604760" y="3738920"/>
-            <a:ext cx="4015740" cy="239911"/>
+              <a:t>任期／服务事项：时间</a:t>
+            </a:r>
+            <a:endParaRPr lang="en-US" sz="1400" dirty="0"/>
+          </a:p>
+        </p:txBody>
+      </p:sp>
+      <p:sp>
+        <p:nvSpPr>
+          <p:cNvPr id="63" name="Shape 59"/>
+          <p:cNvSpPr/>
+          <p:nvPr/>
+        </p:nvSpPr>
+        <p:spPr>
+          <a:xfrm>
+            <a:off x="7513320" y="4334351"/>
+            <a:ext cx="4229100" cy="299561"/>
+          </a:xfrm>
+          <a:prstGeom prst="rect">
+            <a:avLst/>
+          </a:prstGeom>
+          <a:solidFill>
+            <a:srgbClr val="FFFFFF"/>
+          </a:solidFill>
+          <a:ln w="12700">
+            <a:solidFill>
+              <a:srgbClr val="FFFFFF">
+                <a:alpha val="0"/>
+              </a:srgbClr>
+            </a:solidFill>
+            <a:prstDash val="solid"/>
+          </a:ln>
+        </p:spPr>
+      </p:sp>
+      <p:sp>
+        <p:nvSpPr>
+          <p:cNvPr id="64" name="Text 60"/>
+          <p:cNvSpPr/>
+          <p:nvPr/>
+        </p:nvSpPr>
+        <p:spPr>
+          <a:xfrm>
+            <a:off x="7635240" y="4359712"/>
+            <a:ext cx="3985260" cy="248841"/>
           </a:xfrm>
           <a:prstGeom prst="rect">
             <a:avLst/>
@@ -35280,12 +37632,177 @@
           <a:p>
             <a:pPr algn="l" indent="0" marL="0">
               <a:lnSpc>
-                <a:spcPts val="1890"/>
-              </a:lnSpc>
-              <a:buNone/>
-            </a:pPr>
-            <a:r>
-              <a:rPr lang="en-US" sz="1400" b="1" dirty="0">
+                <a:spcPts val="1960"/>
+              </a:lnSpc>
+              <a:buNone/>
+            </a:pPr>
+            <a:r>
+              <a:rPr lang="en-US" sz="1400" dirty="0">
+                <a:solidFill>
+                  <a:srgbClr val="18383F"/>
+                </a:solidFill>
+                <a:latin typeface="Microsoft YaHei" pitchFamily="34" charset="0"/>
+                <a:ea typeface="Microsoft YaHei" pitchFamily="34" charset="-122"/>
+                <a:cs typeface="Microsoft YaHei" pitchFamily="34" charset="-120"/>
+              </a:rPr>
+              <a:t>奖项：名称、年份／排名</a:t>
+            </a:r>
+            <a:endParaRPr lang="en-US" sz="1400" dirty="0"/>
+          </a:p>
+        </p:txBody>
+      </p:sp>
+      <p:sp>
+        <p:nvSpPr>
+          <p:cNvPr id="65" name="Shape 61"/>
+          <p:cNvSpPr/>
+          <p:nvPr/>
+        </p:nvSpPr>
+        <p:spPr>
+          <a:xfrm>
+            <a:off x="3276600" y="4763453"/>
+            <a:ext cx="8473440" cy="1469708"/>
+          </a:xfrm>
+          <a:prstGeom prst="rect">
+            <a:avLst/>
+          </a:prstGeom>
+          <a:solidFill>
+            <a:srgbClr val="FFFFFF">
+              <a:alpha val="0"/>
+            </a:srgbClr>
+          </a:solidFill>
+          <a:ln w="7620">
+            <a:solidFill>
+              <a:srgbClr val="CFDDE6"/>
+            </a:solidFill>
+            <a:prstDash val="solid"/>
+          </a:ln>
+        </p:spPr>
+      </p:sp>
+      <p:sp>
+        <p:nvSpPr>
+          <p:cNvPr id="66" name="Shape 62"/>
+          <p:cNvSpPr/>
+          <p:nvPr/>
+        </p:nvSpPr>
+        <p:spPr>
+          <a:xfrm>
+            <a:off x="3284220" y="4771073"/>
+            <a:ext cx="8458200" cy="400050"/>
+          </a:xfrm>
+          <a:prstGeom prst="rect">
+            <a:avLst/>
+          </a:prstGeom>
+          <a:solidFill>
+            <a:srgbClr val="0F6674"/>
+          </a:solidFill>
+          <a:ln w="12700">
+            <a:solidFill>
+              <a:srgbClr val="0F6674">
+                <a:alpha val="0"/>
+              </a:srgbClr>
+            </a:solidFill>
+            <a:prstDash val="solid"/>
+          </a:ln>
+        </p:spPr>
+      </p:sp>
+      <p:sp>
+        <p:nvSpPr>
+          <p:cNvPr id="67" name="Text 63"/>
+          <p:cNvSpPr/>
+          <p:nvPr/>
+        </p:nvSpPr>
+        <p:spPr>
+          <a:xfrm>
+            <a:off x="3406140" y="4816793"/>
+            <a:ext cx="8214360" cy="308610"/>
+          </a:xfrm>
+          <a:prstGeom prst="rect">
+            <a:avLst/>
+          </a:prstGeom>
+          <a:noFill/>
+          <a:ln/>
+        </p:spPr>
+        <p:txBody>
+          <a:bodyPr wrap="square" lIns="0" tIns="0" rIns="0" bIns="0" rtlCol="0" anchor="ctr"/>
+          <a:lstStyle/>
+          <a:p>
+            <a:pPr algn="l" indent="0" marL="0">
+              <a:lnSpc>
+                <a:spcPts val="2430"/>
+              </a:lnSpc>
+              <a:buNone/>
+            </a:pPr>
+            <a:r>
+              <a:rPr lang="en-US" sz="1800" b="1" dirty="0">
+                <a:solidFill>
+                  <a:srgbClr val="FFFFFF"/>
+                </a:solidFill>
+                <a:latin typeface="Microsoft YaHei" pitchFamily="34" charset="0"/>
+                <a:ea typeface="Microsoft YaHei" pitchFamily="34" charset="-122"/>
+                <a:cs typeface="Microsoft YaHei" pitchFamily="34" charset="-120"/>
+              </a:rPr>
+              <a:t>主要研究方向</a:t>
+            </a:r>
+            <a:endParaRPr lang="en-US" sz="1800" dirty="0"/>
+          </a:p>
+        </p:txBody>
+      </p:sp>
+      <p:sp>
+        <p:nvSpPr>
+          <p:cNvPr id="68" name="Shape 64"/>
+          <p:cNvSpPr/>
+          <p:nvPr/>
+        </p:nvSpPr>
+        <p:spPr>
+          <a:xfrm>
+            <a:off x="3284220" y="5171123"/>
+            <a:ext cx="2819400" cy="382905"/>
+          </a:xfrm>
+          <a:prstGeom prst="rect">
+            <a:avLst/>
+          </a:prstGeom>
+          <a:solidFill>
+            <a:srgbClr val="FFFFFF"/>
+          </a:solidFill>
+          <a:ln w="12700">
+            <a:solidFill>
+              <a:srgbClr val="FFFFFF">
+                <a:alpha val="0"/>
+              </a:srgbClr>
+            </a:solidFill>
+            <a:prstDash val="solid"/>
+          </a:ln>
+        </p:spPr>
+      </p:sp>
+      <p:sp>
+        <p:nvSpPr>
+          <p:cNvPr id="69" name="Text 65"/>
+          <p:cNvSpPr/>
+          <p:nvPr/>
+        </p:nvSpPr>
+        <p:spPr>
+          <a:xfrm>
+            <a:off x="3406140" y="5216843"/>
+            <a:ext cx="2575560" cy="274320"/>
+          </a:xfrm>
+          <a:prstGeom prst="rect">
+            <a:avLst/>
+          </a:prstGeom>
+          <a:noFill/>
+          <a:ln/>
+        </p:spPr>
+        <p:txBody>
+          <a:bodyPr wrap="square" lIns="0" tIns="0" rIns="0" bIns="0" rtlCol="0" anchor="ctr"/>
+          <a:lstStyle/>
+          <a:p>
+            <a:pPr algn="l" indent="0" marL="0">
+              <a:lnSpc>
+                <a:spcPts val="2160"/>
+              </a:lnSpc>
+              <a:buNone/>
+            </a:pPr>
+            <a:r>
+              <a:rPr lang="en-US" sz="1600" b="1" dirty="0">
                 <a:solidFill>
                   <a:srgbClr val="0F6674"/>
                 </a:solidFill>
@@ -35293,41 +37810,226 @@
                 <a:ea typeface="Microsoft YaHei" pitchFamily="34" charset="-122"/>
                 <a:cs typeface="Microsoft YaHei" pitchFamily="34" charset="-120"/>
               </a:rPr>
-              <a:t>代表性项目与奖项</a:t>
+              <a:t>研究方向一</a:t>
+            </a:r>
+            <a:endParaRPr lang="en-US" sz="1600" dirty="0"/>
+          </a:p>
+        </p:txBody>
+      </p:sp>
+      <p:sp>
+        <p:nvSpPr>
+          <p:cNvPr id="70" name="Shape 66"/>
+          <p:cNvSpPr/>
+          <p:nvPr/>
+        </p:nvSpPr>
+        <p:spPr>
+          <a:xfrm>
+            <a:off x="6103620" y="5171123"/>
+            <a:ext cx="2819400" cy="382905"/>
+          </a:xfrm>
+          <a:prstGeom prst="rect">
+            <a:avLst/>
+          </a:prstGeom>
+          <a:solidFill>
+            <a:srgbClr val="FFFFFF"/>
+          </a:solidFill>
+          <a:ln w="12700">
+            <a:solidFill>
+              <a:srgbClr val="FFFFFF">
+                <a:alpha val="0"/>
+              </a:srgbClr>
+            </a:solidFill>
+            <a:prstDash val="solid"/>
+          </a:ln>
+        </p:spPr>
+      </p:sp>
+      <p:sp>
+        <p:nvSpPr>
+          <p:cNvPr id="71" name="Text 67"/>
+          <p:cNvSpPr/>
+          <p:nvPr/>
+        </p:nvSpPr>
+        <p:spPr>
+          <a:xfrm>
+            <a:off x="6225540" y="5216843"/>
+            <a:ext cx="2575560" cy="274320"/>
+          </a:xfrm>
+          <a:prstGeom prst="rect">
+            <a:avLst/>
+          </a:prstGeom>
+          <a:noFill/>
+          <a:ln/>
+        </p:spPr>
+        <p:txBody>
+          <a:bodyPr wrap="square" lIns="0" tIns="0" rIns="0" bIns="0" rtlCol="0" anchor="ctr"/>
+          <a:lstStyle/>
+          <a:p>
+            <a:pPr algn="l" indent="0" marL="0">
+              <a:lnSpc>
+                <a:spcPts val="2160"/>
+              </a:lnSpc>
+              <a:buNone/>
+            </a:pPr>
+            <a:r>
+              <a:rPr lang="en-US" sz="1600" b="1" dirty="0">
+                <a:solidFill>
+                  <a:srgbClr val="0F6674"/>
+                </a:solidFill>
+                <a:latin typeface="Microsoft YaHei" pitchFamily="34" charset="0"/>
+                <a:ea typeface="Microsoft YaHei" pitchFamily="34" charset="-122"/>
+                <a:cs typeface="Microsoft YaHei" pitchFamily="34" charset="-120"/>
+              </a:rPr>
+              <a:t>研究方向二</a:t>
+            </a:r>
+            <a:endParaRPr lang="en-US" sz="1600" dirty="0"/>
+          </a:p>
+        </p:txBody>
+      </p:sp>
+      <p:sp>
+        <p:nvSpPr>
+          <p:cNvPr id="72" name="Shape 68"/>
+          <p:cNvSpPr/>
+          <p:nvPr/>
+        </p:nvSpPr>
+        <p:spPr>
+          <a:xfrm>
+            <a:off x="8923020" y="5171123"/>
+            <a:ext cx="2819400" cy="382905"/>
+          </a:xfrm>
+          <a:prstGeom prst="rect">
+            <a:avLst/>
+          </a:prstGeom>
+          <a:solidFill>
+            <a:srgbClr val="FFFFFF"/>
+          </a:solidFill>
+          <a:ln w="12700">
+            <a:solidFill>
+              <a:srgbClr val="FFFFFF">
+                <a:alpha val="0"/>
+              </a:srgbClr>
+            </a:solidFill>
+            <a:prstDash val="solid"/>
+          </a:ln>
+        </p:spPr>
+      </p:sp>
+      <p:sp>
+        <p:nvSpPr>
+          <p:cNvPr id="73" name="Text 69"/>
+          <p:cNvSpPr/>
+          <p:nvPr/>
+        </p:nvSpPr>
+        <p:spPr>
+          <a:xfrm>
+            <a:off x="9044940" y="5216843"/>
+            <a:ext cx="2575560" cy="274320"/>
+          </a:xfrm>
+          <a:prstGeom prst="rect">
+            <a:avLst/>
+          </a:prstGeom>
+          <a:noFill/>
+          <a:ln/>
+        </p:spPr>
+        <p:txBody>
+          <a:bodyPr wrap="square" lIns="0" tIns="0" rIns="0" bIns="0" rtlCol="0" anchor="ctr"/>
+          <a:lstStyle/>
+          <a:p>
+            <a:pPr algn="l" indent="0" marL="0">
+              <a:lnSpc>
+                <a:spcPts val="2160"/>
+              </a:lnSpc>
+              <a:buNone/>
+            </a:pPr>
+            <a:r>
+              <a:rPr lang="en-US" sz="1600" b="1" dirty="0">
+                <a:solidFill>
+                  <a:srgbClr val="0F6674"/>
+                </a:solidFill>
+                <a:latin typeface="Microsoft YaHei" pitchFamily="34" charset="0"/>
+                <a:ea typeface="Microsoft YaHei" pitchFamily="34" charset="-122"/>
+                <a:cs typeface="Microsoft YaHei" pitchFamily="34" charset="-120"/>
+              </a:rPr>
+              <a:t>研究方向三</a:t>
+            </a:r>
+            <a:endParaRPr lang="en-US" sz="1600" dirty="0"/>
+          </a:p>
+        </p:txBody>
+      </p:sp>
+      <p:sp>
+        <p:nvSpPr>
+          <p:cNvPr id="74" name="Shape 70"/>
+          <p:cNvSpPr/>
+          <p:nvPr/>
+        </p:nvSpPr>
+        <p:spPr>
+          <a:xfrm>
+            <a:off x="3284220" y="5554028"/>
+            <a:ext cx="2819400" cy="671513"/>
+          </a:xfrm>
+          <a:prstGeom prst="rect">
+            <a:avLst/>
+          </a:prstGeom>
+          <a:solidFill>
+            <a:srgbClr val="FFFFFF"/>
+          </a:solidFill>
+          <a:ln w="12700">
+            <a:solidFill>
+              <a:srgbClr val="FFFFFF">
+                <a:alpha val="0"/>
+              </a:srgbClr>
+            </a:solidFill>
+            <a:prstDash val="solid"/>
+          </a:ln>
+        </p:spPr>
+      </p:sp>
+      <p:sp>
+        <p:nvSpPr>
+          <p:cNvPr id="75" name="Text 71"/>
+          <p:cNvSpPr/>
+          <p:nvPr/>
+        </p:nvSpPr>
+        <p:spPr>
+          <a:xfrm>
+            <a:off x="3406140" y="5636419"/>
+            <a:ext cx="2575560" cy="497681"/>
+          </a:xfrm>
+          <a:prstGeom prst="rect">
+            <a:avLst/>
+          </a:prstGeom>
+          <a:noFill/>
+          <a:ln/>
+        </p:spPr>
+        <p:txBody>
+          <a:bodyPr wrap="square" lIns="0" tIns="0" rIns="0" bIns="0" rtlCol="0" anchor="ctr"/>
+          <a:lstStyle/>
+          <a:p>
+            <a:pPr algn="l" indent="0" marL="0">
+              <a:lnSpc>
+                <a:spcPts val="1960"/>
+              </a:lnSpc>
+              <a:buNone/>
+            </a:pPr>
+            <a:r>
+              <a:rPr lang="en-US" sz="1400" dirty="0">
+                <a:solidFill>
+                  <a:srgbClr val="18383F"/>
+                </a:solidFill>
+                <a:latin typeface="Microsoft YaHei" pitchFamily="34" charset="0"/>
+                <a:ea typeface="Microsoft YaHei" pitchFamily="34" charset="-122"/>
+                <a:cs typeface="Microsoft YaHei" pitchFamily="34" charset="-120"/>
+              </a:rPr>
+              <a:t>研究对象：</a:t>
             </a:r>
             <a:endParaRPr lang="en-US" sz="1400" dirty="0"/>
           </a:p>
-        </p:txBody>
-      </p:sp>
-      <p:sp>
-        <p:nvSpPr>
-          <p:cNvPr id="31" name="Text 26"/>
-          <p:cNvSpPr/>
-          <p:nvPr/>
-        </p:nvSpPr>
-        <p:spPr>
-          <a:xfrm>
-            <a:off x="7833360" y="4024551"/>
-            <a:ext cx="3787140" cy="213360"/>
-          </a:xfrm>
-          <a:prstGeom prst="rect">
-            <a:avLst/>
-          </a:prstGeom>
-          <a:noFill/>
-          <a:ln/>
-        </p:spPr>
-        <p:txBody>
-          <a:bodyPr wrap="square" lIns="0" tIns="0" rIns="0" bIns="0" rtlCol="0" anchor="ctr"/>
-          <a:lstStyle/>
           <a:p>
             <a:pPr algn="l" indent="0" marL="0">
               <a:lnSpc>
-                <a:spcPts val="1680"/>
-              </a:lnSpc>
-              <a:buNone/>
-            </a:pPr>
-            <a:r>
-              <a:rPr lang="en-US" sz="1200" dirty="0">
+                <a:spcPts val="1960"/>
+              </a:lnSpc>
+              <a:buNone/>
+            </a:pPr>
+            <a:r>
+              <a:rPr lang="en-US" sz="1400" dirty="0">
                 <a:solidFill>
                   <a:srgbClr val="18383F"/>
                 </a:solidFill>
@@ -35335,22 +38037,49 @@
                 <a:ea typeface="Microsoft YaHei" pitchFamily="34" charset="-122"/>
                 <a:cs typeface="Microsoft YaHei" pitchFamily="34" charset="-120"/>
               </a:rPr>
-              <a:t>•　项目：名称、本人角色</a:t>
-            </a:r>
-            <a:endParaRPr lang="en-US" sz="1200" dirty="0"/>
-          </a:p>
-        </p:txBody>
-      </p:sp>
-      <p:sp>
-        <p:nvSpPr>
-          <p:cNvPr id="32" name="Text 27"/>
-          <p:cNvSpPr/>
-          <p:nvPr/>
-        </p:nvSpPr>
-        <p:spPr>
-          <a:xfrm>
-            <a:off x="7833360" y="4298871"/>
-            <a:ext cx="3787140" cy="213360"/>
+              <a:t>核心问题：</a:t>
+            </a:r>
+            <a:endParaRPr lang="en-US" sz="1400" dirty="0"/>
+          </a:p>
+        </p:txBody>
+      </p:sp>
+      <p:sp>
+        <p:nvSpPr>
+          <p:cNvPr id="76" name="Shape 72"/>
+          <p:cNvSpPr/>
+          <p:nvPr/>
+        </p:nvSpPr>
+        <p:spPr>
+          <a:xfrm>
+            <a:off x="6103620" y="5554028"/>
+            <a:ext cx="2819400" cy="671513"/>
+          </a:xfrm>
+          <a:prstGeom prst="rect">
+            <a:avLst/>
+          </a:prstGeom>
+          <a:solidFill>
+            <a:srgbClr val="FFFFFF"/>
+          </a:solidFill>
+          <a:ln w="12700">
+            <a:solidFill>
+              <a:srgbClr val="FFFFFF">
+                <a:alpha val="0"/>
+              </a:srgbClr>
+            </a:solidFill>
+            <a:prstDash val="solid"/>
+          </a:ln>
+        </p:spPr>
+      </p:sp>
+      <p:sp>
+        <p:nvSpPr>
+          <p:cNvPr id="77" name="Text 73"/>
+          <p:cNvSpPr/>
+          <p:nvPr/>
+        </p:nvSpPr>
+        <p:spPr>
+          <a:xfrm>
+            <a:off x="6225540" y="5636419"/>
+            <a:ext cx="2575560" cy="497681"/>
           </a:xfrm>
           <a:prstGeom prst="rect">
             <a:avLst/>
@@ -35364,12 +38093,12 @@
           <a:p>
             <a:pPr algn="l" indent="0" marL="0">
               <a:lnSpc>
-                <a:spcPts val="1680"/>
-              </a:lnSpc>
-              <a:buNone/>
-            </a:pPr>
-            <a:r>
-              <a:rPr lang="en-US" sz="1200" dirty="0">
+                <a:spcPts val="1960"/>
+              </a:lnSpc>
+              <a:buNone/>
+            </a:pPr>
+            <a:r>
+              <a:rPr lang="en-US" sz="1400" dirty="0">
                 <a:solidFill>
                   <a:srgbClr val="18383F"/>
                 </a:solidFill>
@@ -35377,64 +38106,69 @@
                 <a:ea typeface="Microsoft YaHei" pitchFamily="34" charset="-122"/>
                 <a:cs typeface="Microsoft YaHei" pitchFamily="34" charset="-120"/>
               </a:rPr>
-              <a:t>•　奖项：名称、年份／排名</a:t>
-            </a:r>
-            <a:endParaRPr lang="en-US" sz="1200" dirty="0"/>
-          </a:p>
-        </p:txBody>
-      </p:sp>
-      <p:sp>
-        <p:nvSpPr>
-          <p:cNvPr id="33" name="Text 28"/>
-          <p:cNvSpPr/>
-          <p:nvPr/>
-        </p:nvSpPr>
-        <p:spPr>
-          <a:xfrm>
-            <a:off x="3406140" y="4786551"/>
-            <a:ext cx="8214360" cy="308610"/>
-          </a:xfrm>
-          <a:prstGeom prst="rect">
-            <a:avLst/>
-          </a:prstGeom>
-          <a:noFill/>
-          <a:ln/>
-        </p:spPr>
-        <p:txBody>
-          <a:bodyPr wrap="square" lIns="0" tIns="0" rIns="0" bIns="0" rtlCol="0" anchor="ctr"/>
-          <a:lstStyle/>
+              <a:t>主要方法：</a:t>
+            </a:r>
+            <a:endParaRPr lang="en-US" sz="1400" dirty="0"/>
+          </a:p>
           <a:p>
             <a:pPr algn="l" indent="0" marL="0">
               <a:lnSpc>
-                <a:spcPts val="2430"/>
-              </a:lnSpc>
-              <a:buNone/>
-            </a:pPr>
-            <a:r>
-              <a:rPr lang="en-US" sz="1800" b="1" dirty="0">
-                <a:solidFill>
-                  <a:srgbClr val="FFFFFF"/>
-                </a:solidFill>
-                <a:latin typeface="Microsoft YaHei" pitchFamily="34" charset="0"/>
-                <a:ea typeface="Microsoft YaHei" pitchFamily="34" charset="-122"/>
-                <a:cs typeface="Microsoft YaHei" pitchFamily="34" charset="-120"/>
-              </a:rPr>
-              <a:t>主要研究方向</a:t>
-            </a:r>
-            <a:endParaRPr lang="en-US" sz="1800" dirty="0"/>
-          </a:p>
-        </p:txBody>
-      </p:sp>
-      <p:sp>
-        <p:nvSpPr>
-          <p:cNvPr id="34" name="Text 29"/>
-          <p:cNvSpPr/>
-          <p:nvPr/>
-        </p:nvSpPr>
-        <p:spPr>
-          <a:xfrm>
-            <a:off x="3406140" y="5232321"/>
-            <a:ext cx="2636520" cy="239911"/>
+                <a:spcPts val="1960"/>
+              </a:lnSpc>
+              <a:buNone/>
+            </a:pPr>
+            <a:r>
+              <a:rPr lang="en-US" sz="1400" dirty="0">
+                <a:solidFill>
+                  <a:srgbClr val="18383F"/>
+                </a:solidFill>
+                <a:latin typeface="Microsoft YaHei" pitchFamily="34" charset="0"/>
+                <a:ea typeface="Microsoft YaHei" pitchFamily="34" charset="-122"/>
+                <a:cs typeface="Microsoft YaHei" pitchFamily="34" charset="-120"/>
+              </a:rPr>
+              <a:t>技术特点：</a:t>
+            </a:r>
+            <a:endParaRPr lang="en-US" sz="1400" dirty="0"/>
+          </a:p>
+        </p:txBody>
+      </p:sp>
+      <p:sp>
+        <p:nvSpPr>
+          <p:cNvPr id="78" name="Shape 74"/>
+          <p:cNvSpPr/>
+          <p:nvPr/>
+        </p:nvSpPr>
+        <p:spPr>
+          <a:xfrm>
+            <a:off x="8923020" y="5554028"/>
+            <a:ext cx="2819400" cy="671513"/>
+          </a:xfrm>
+          <a:prstGeom prst="rect">
+            <a:avLst/>
+          </a:prstGeom>
+          <a:solidFill>
+            <a:srgbClr val="FFFFFF"/>
+          </a:solidFill>
+          <a:ln w="12700">
+            <a:solidFill>
+              <a:srgbClr val="FFFFFF">
+                <a:alpha val="0"/>
+              </a:srgbClr>
+            </a:solidFill>
+            <a:prstDash val="solid"/>
+          </a:ln>
+        </p:spPr>
+      </p:sp>
+      <p:sp>
+        <p:nvSpPr>
+          <p:cNvPr id="79" name="Text 75"/>
+          <p:cNvSpPr/>
+          <p:nvPr/>
+        </p:nvSpPr>
+        <p:spPr>
+          <a:xfrm>
+            <a:off x="9044940" y="5636419"/>
+            <a:ext cx="2575560" cy="497681"/>
           </a:xfrm>
           <a:prstGeom prst="rect">
             <a:avLst/>
@@ -35448,54 +38182,32 @@
           <a:p>
             <a:pPr algn="l" indent="0" marL="0">
               <a:lnSpc>
-                <a:spcPts val="1890"/>
-              </a:lnSpc>
-              <a:buNone/>
-            </a:pPr>
-            <a:r>
-              <a:rPr lang="en-US" sz="1400" b="1" dirty="0">
-                <a:solidFill>
-                  <a:srgbClr val="0F6674"/>
-                </a:solidFill>
-                <a:latin typeface="Microsoft YaHei" pitchFamily="34" charset="0"/>
-                <a:ea typeface="Microsoft YaHei" pitchFamily="34" charset="-122"/>
-                <a:cs typeface="Microsoft YaHei" pitchFamily="34" charset="-120"/>
-              </a:rPr>
-              <a:t>研究方向一</a:t>
+                <a:spcPts val="1960"/>
+              </a:lnSpc>
+              <a:buNone/>
+            </a:pPr>
+            <a:r>
+              <a:rPr lang="en-US" sz="1400" dirty="0">
+                <a:solidFill>
+                  <a:srgbClr val="18383F"/>
+                </a:solidFill>
+                <a:latin typeface="Microsoft YaHei" pitchFamily="34" charset="0"/>
+                <a:ea typeface="Microsoft YaHei" pitchFamily="34" charset="-122"/>
+                <a:cs typeface="Microsoft YaHei" pitchFamily="34" charset="-120"/>
+              </a:rPr>
+              <a:t>应用场景：</a:t>
             </a:r>
             <a:endParaRPr lang="en-US" sz="1400" dirty="0"/>
           </a:p>
-        </p:txBody>
-      </p:sp>
-      <p:sp>
-        <p:nvSpPr>
-          <p:cNvPr id="35" name="Text 30"/>
-          <p:cNvSpPr/>
-          <p:nvPr/>
-        </p:nvSpPr>
-        <p:spPr>
-          <a:xfrm>
-            <a:off x="3634740" y="5585460"/>
-            <a:ext cx="2407920" cy="213360"/>
-          </a:xfrm>
-          <a:prstGeom prst="rect">
-            <a:avLst/>
-          </a:prstGeom>
-          <a:noFill/>
-          <a:ln/>
-        </p:spPr>
-        <p:txBody>
-          <a:bodyPr wrap="square" lIns="0" tIns="0" rIns="0" bIns="0" rtlCol="0" anchor="ctr"/>
-          <a:lstStyle/>
           <a:p>
             <a:pPr algn="l" indent="0" marL="0">
               <a:lnSpc>
-                <a:spcPts val="1680"/>
-              </a:lnSpc>
-              <a:buNone/>
-            </a:pPr>
-            <a:r>
-              <a:rPr lang="en-US" sz="1200" dirty="0">
+                <a:spcPts val="1960"/>
+              </a:lnSpc>
+              <a:buNone/>
+            </a:pPr>
+            <a:r>
+              <a:rPr lang="en-US" sz="1400" dirty="0">
                 <a:solidFill>
                   <a:srgbClr val="18383F"/>
                 </a:solidFill>
@@ -35503,22 +38215,22 @@
                 <a:ea typeface="Microsoft YaHei" pitchFamily="34" charset="-122"/>
                 <a:cs typeface="Microsoft YaHei" pitchFamily="34" charset="-120"/>
               </a:rPr>
-              <a:t>•　研究对象：</a:t>
-            </a:r>
-            <a:endParaRPr lang="en-US" sz="1200" dirty="0"/>
-          </a:p>
-        </p:txBody>
-      </p:sp>
-      <p:sp>
-        <p:nvSpPr>
-          <p:cNvPr id="36" name="Text 31"/>
-          <p:cNvSpPr/>
-          <p:nvPr/>
-        </p:nvSpPr>
-        <p:spPr>
-          <a:xfrm>
-            <a:off x="3634740" y="5859780"/>
-            <a:ext cx="2407920" cy="213360"/>
+              <a:t>研究目标：</a:t>
+            </a:r>
+            <a:endParaRPr lang="en-US" sz="1400" dirty="0"/>
+          </a:p>
+        </p:txBody>
+      </p:sp>
+      <p:sp>
+        <p:nvSpPr>
+          <p:cNvPr id="80" name="Text 76"/>
+          <p:cNvSpPr/>
+          <p:nvPr/>
+        </p:nvSpPr>
+        <p:spPr>
+          <a:xfrm>
+            <a:off x="441960" y="6485334"/>
+            <a:ext cx="2971800" cy="181332"/>
           </a:xfrm>
           <a:prstGeom prst="rect">
             <a:avLst/>
@@ -35532,35 +38244,77 @@
           <a:p>
             <a:pPr algn="l" indent="0" marL="0">
               <a:lnSpc>
-                <a:spcPts val="1680"/>
-              </a:lnSpc>
-              <a:buNone/>
-            </a:pPr>
-            <a:r>
-              <a:rPr lang="en-US" sz="1200" dirty="0">
-                <a:solidFill>
-                  <a:srgbClr val="18383F"/>
-                </a:solidFill>
-                <a:latin typeface="Microsoft YaHei" pitchFamily="34" charset="0"/>
-                <a:ea typeface="Microsoft YaHei" pitchFamily="34" charset="-122"/>
-                <a:cs typeface="Microsoft YaHei" pitchFamily="34" charset="-120"/>
-              </a:rPr>
-              <a:t>•　核心问题：</a:t>
-            </a:r>
-            <a:endParaRPr lang="en-US" sz="1200" dirty="0"/>
-          </a:p>
-        </p:txBody>
-      </p:sp>
-      <p:sp>
-        <p:nvSpPr>
-          <p:cNvPr id="37" name="Text 32"/>
-          <p:cNvSpPr/>
-          <p:nvPr/>
-        </p:nvSpPr>
-        <p:spPr>
-          <a:xfrm>
-            <a:off x="6195060" y="5232321"/>
-            <a:ext cx="2636520" cy="239911"/>
+                <a:spcPts val="1428"/>
+              </a:lnSpc>
+              <a:buNone/>
+            </a:pPr>
+            <a:r>
+              <a:rPr lang="en-US" sz="1020" dirty="0">
+                <a:solidFill>
+                  <a:srgbClr val="617B8B"/>
+                </a:solidFill>
+                <a:latin typeface="Microsoft YaHei" pitchFamily="34" charset="0"/>
+                <a:ea typeface="Microsoft YaHei" pitchFamily="34" charset="-122"/>
+                <a:cs typeface="Microsoft YaHei" pitchFamily="34" charset="-120"/>
+              </a:rPr>
+              <a:t>丽水学院 · 科研汇报示例</a:t>
+            </a:r>
+            <a:endParaRPr lang="en-US" sz="1020" dirty="0"/>
+          </a:p>
+        </p:txBody>
+      </p:sp>
+      <p:sp>
+        <p:nvSpPr>
+          <p:cNvPr id="81" name="Text 77"/>
+          <p:cNvSpPr/>
+          <p:nvPr/>
+        </p:nvSpPr>
+        <p:spPr>
+          <a:xfrm>
+            <a:off x="3596640" y="6485334"/>
+            <a:ext cx="7534632" cy="181332"/>
+          </a:xfrm>
+          <a:prstGeom prst="rect">
+            <a:avLst/>
+          </a:prstGeom>
+          <a:noFill/>
+          <a:ln/>
+        </p:spPr>
+        <p:txBody>
+          <a:bodyPr wrap="square" lIns="0" tIns="0" rIns="0" bIns="0" rtlCol="0" anchor="ctr"/>
+          <a:lstStyle/>
+          <a:p>
+            <a:pPr algn="r" indent="0" marL="0">
+              <a:lnSpc>
+                <a:spcPts val="1428"/>
+              </a:lnSpc>
+              <a:buNone/>
+            </a:pPr>
+            <a:r>
+              <a:rPr lang="en-US" sz="1020" dirty="0">
+                <a:solidFill>
+                  <a:srgbClr val="617B8B"/>
+                </a:solidFill>
+                <a:latin typeface="Microsoft YaHei" pitchFamily="34" charset="0"/>
+                <a:ea typeface="Microsoft YaHei" pitchFamily="34" charset="-122"/>
+                <a:cs typeface="Microsoft YaHei" pitchFamily="34" charset="-120"/>
+              </a:rPr>
+              <a:t>作者信息占位示例；请以本人简历与可核实成果为准</a:t>
+            </a:r>
+            <a:endParaRPr lang="en-US" sz="1020" dirty="0"/>
+          </a:p>
+        </p:txBody>
+      </p:sp>
+      <p:sp>
+        <p:nvSpPr>
+          <p:cNvPr id="82" name="Text 78"/>
+          <p:cNvSpPr/>
+          <p:nvPr/>
+        </p:nvSpPr>
+        <p:spPr>
+          <a:xfrm>
+            <a:off x="11314152" y="6485334"/>
+            <a:ext cx="435888" cy="181332"/>
           </a:xfrm>
           <a:prstGeom prst="rect">
             <a:avLst/>
@@ -35574,258 +38328,6 @@
           <a:p>
             <a:pPr algn="l" indent="0" marL="0">
               <a:lnSpc>
-                <a:spcPts val="1890"/>
-              </a:lnSpc>
-              <a:buNone/>
-            </a:pPr>
-            <a:r>
-              <a:rPr lang="en-US" sz="1400" b="1" dirty="0">
-                <a:solidFill>
-                  <a:srgbClr val="0F6674"/>
-                </a:solidFill>
-                <a:latin typeface="Microsoft YaHei" pitchFamily="34" charset="0"/>
-                <a:ea typeface="Microsoft YaHei" pitchFamily="34" charset="-122"/>
-                <a:cs typeface="Microsoft YaHei" pitchFamily="34" charset="-120"/>
-              </a:rPr>
-              <a:t>研究方向二</a:t>
-            </a:r>
-            <a:endParaRPr lang="en-US" sz="1400" dirty="0"/>
-          </a:p>
-        </p:txBody>
-      </p:sp>
-      <p:sp>
-        <p:nvSpPr>
-          <p:cNvPr id="38" name="Text 33"/>
-          <p:cNvSpPr/>
-          <p:nvPr/>
-        </p:nvSpPr>
-        <p:spPr>
-          <a:xfrm>
-            <a:off x="6423660" y="5585460"/>
-            <a:ext cx="2407920" cy="213360"/>
-          </a:xfrm>
-          <a:prstGeom prst="rect">
-            <a:avLst/>
-          </a:prstGeom>
-          <a:noFill/>
-          <a:ln/>
-        </p:spPr>
-        <p:txBody>
-          <a:bodyPr wrap="square" lIns="0" tIns="0" rIns="0" bIns="0" rtlCol="0" anchor="ctr"/>
-          <a:lstStyle/>
-          <a:p>
-            <a:pPr algn="l" indent="0" marL="0">
-              <a:lnSpc>
-                <a:spcPts val="1680"/>
-              </a:lnSpc>
-              <a:buNone/>
-            </a:pPr>
-            <a:r>
-              <a:rPr lang="en-US" sz="1200" dirty="0">
-                <a:solidFill>
-                  <a:srgbClr val="18383F"/>
-                </a:solidFill>
-                <a:latin typeface="Microsoft YaHei" pitchFamily="34" charset="0"/>
-                <a:ea typeface="Microsoft YaHei" pitchFamily="34" charset="-122"/>
-                <a:cs typeface="Microsoft YaHei" pitchFamily="34" charset="-120"/>
-              </a:rPr>
-              <a:t>•　主要方法：</a:t>
-            </a:r>
-            <a:endParaRPr lang="en-US" sz="1200" dirty="0"/>
-          </a:p>
-        </p:txBody>
-      </p:sp>
-      <p:sp>
-        <p:nvSpPr>
-          <p:cNvPr id="39" name="Text 34"/>
-          <p:cNvSpPr/>
-          <p:nvPr/>
-        </p:nvSpPr>
-        <p:spPr>
-          <a:xfrm>
-            <a:off x="6423660" y="5859780"/>
-            <a:ext cx="2407920" cy="213360"/>
-          </a:xfrm>
-          <a:prstGeom prst="rect">
-            <a:avLst/>
-          </a:prstGeom>
-          <a:noFill/>
-          <a:ln/>
-        </p:spPr>
-        <p:txBody>
-          <a:bodyPr wrap="square" lIns="0" tIns="0" rIns="0" bIns="0" rtlCol="0" anchor="ctr"/>
-          <a:lstStyle/>
-          <a:p>
-            <a:pPr algn="l" indent="0" marL="0">
-              <a:lnSpc>
-                <a:spcPts val="1680"/>
-              </a:lnSpc>
-              <a:buNone/>
-            </a:pPr>
-            <a:r>
-              <a:rPr lang="en-US" sz="1200" dirty="0">
-                <a:solidFill>
-                  <a:srgbClr val="18383F"/>
-                </a:solidFill>
-                <a:latin typeface="Microsoft YaHei" pitchFamily="34" charset="0"/>
-                <a:ea typeface="Microsoft YaHei" pitchFamily="34" charset="-122"/>
-                <a:cs typeface="Microsoft YaHei" pitchFamily="34" charset="-120"/>
-              </a:rPr>
-              <a:t>•　技术特点：</a:t>
-            </a:r>
-            <a:endParaRPr lang="en-US" sz="1200" dirty="0"/>
-          </a:p>
-        </p:txBody>
-      </p:sp>
-      <p:sp>
-        <p:nvSpPr>
-          <p:cNvPr id="40" name="Text 35"/>
-          <p:cNvSpPr/>
-          <p:nvPr/>
-        </p:nvSpPr>
-        <p:spPr>
-          <a:xfrm>
-            <a:off x="8983980" y="5232321"/>
-            <a:ext cx="2636520" cy="239911"/>
-          </a:xfrm>
-          <a:prstGeom prst="rect">
-            <a:avLst/>
-          </a:prstGeom>
-          <a:noFill/>
-          <a:ln/>
-        </p:spPr>
-        <p:txBody>
-          <a:bodyPr wrap="square" lIns="0" tIns="0" rIns="0" bIns="0" rtlCol="0" anchor="ctr"/>
-          <a:lstStyle/>
-          <a:p>
-            <a:pPr algn="l" indent="0" marL="0">
-              <a:lnSpc>
-                <a:spcPts val="1890"/>
-              </a:lnSpc>
-              <a:buNone/>
-            </a:pPr>
-            <a:r>
-              <a:rPr lang="en-US" sz="1400" b="1" dirty="0">
-                <a:solidFill>
-                  <a:srgbClr val="0F6674"/>
-                </a:solidFill>
-                <a:latin typeface="Microsoft YaHei" pitchFamily="34" charset="0"/>
-                <a:ea typeface="Microsoft YaHei" pitchFamily="34" charset="-122"/>
-                <a:cs typeface="Microsoft YaHei" pitchFamily="34" charset="-120"/>
-              </a:rPr>
-              <a:t>研究方向三</a:t>
-            </a:r>
-            <a:endParaRPr lang="en-US" sz="1400" dirty="0"/>
-          </a:p>
-        </p:txBody>
-      </p:sp>
-      <p:sp>
-        <p:nvSpPr>
-          <p:cNvPr id="41" name="Text 36"/>
-          <p:cNvSpPr/>
-          <p:nvPr/>
-        </p:nvSpPr>
-        <p:spPr>
-          <a:xfrm>
-            <a:off x="9212580" y="5585460"/>
-            <a:ext cx="2407920" cy="213360"/>
-          </a:xfrm>
-          <a:prstGeom prst="rect">
-            <a:avLst/>
-          </a:prstGeom>
-          <a:noFill/>
-          <a:ln/>
-        </p:spPr>
-        <p:txBody>
-          <a:bodyPr wrap="square" lIns="0" tIns="0" rIns="0" bIns="0" rtlCol="0" anchor="ctr"/>
-          <a:lstStyle/>
-          <a:p>
-            <a:pPr algn="l" indent="0" marL="0">
-              <a:lnSpc>
-                <a:spcPts val="1680"/>
-              </a:lnSpc>
-              <a:buNone/>
-            </a:pPr>
-            <a:r>
-              <a:rPr lang="en-US" sz="1200" dirty="0">
-                <a:solidFill>
-                  <a:srgbClr val="18383F"/>
-                </a:solidFill>
-                <a:latin typeface="Microsoft YaHei" pitchFamily="34" charset="0"/>
-                <a:ea typeface="Microsoft YaHei" pitchFamily="34" charset="-122"/>
-                <a:cs typeface="Microsoft YaHei" pitchFamily="34" charset="-120"/>
-              </a:rPr>
-              <a:t>•　应用场景：</a:t>
-            </a:r>
-            <a:endParaRPr lang="en-US" sz="1200" dirty="0"/>
-          </a:p>
-        </p:txBody>
-      </p:sp>
-      <p:sp>
-        <p:nvSpPr>
-          <p:cNvPr id="42" name="Text 37"/>
-          <p:cNvSpPr/>
-          <p:nvPr/>
-        </p:nvSpPr>
-        <p:spPr>
-          <a:xfrm>
-            <a:off x="9212580" y="5859780"/>
-            <a:ext cx="2407920" cy="213360"/>
-          </a:xfrm>
-          <a:prstGeom prst="rect">
-            <a:avLst/>
-          </a:prstGeom>
-          <a:noFill/>
-          <a:ln/>
-        </p:spPr>
-        <p:txBody>
-          <a:bodyPr wrap="square" lIns="0" tIns="0" rIns="0" bIns="0" rtlCol="0" anchor="ctr"/>
-          <a:lstStyle/>
-          <a:p>
-            <a:pPr algn="l" indent="0" marL="0">
-              <a:lnSpc>
-                <a:spcPts val="1680"/>
-              </a:lnSpc>
-              <a:buNone/>
-            </a:pPr>
-            <a:r>
-              <a:rPr lang="en-US" sz="1200" dirty="0">
-                <a:solidFill>
-                  <a:srgbClr val="18383F"/>
-                </a:solidFill>
-                <a:latin typeface="Microsoft YaHei" pitchFamily="34" charset="0"/>
-                <a:ea typeface="Microsoft YaHei" pitchFamily="34" charset="-122"/>
-                <a:cs typeface="Microsoft YaHei" pitchFamily="34" charset="-120"/>
-              </a:rPr>
-              <a:t>•　研究目标：</a:t>
-            </a:r>
-            <a:endParaRPr lang="en-US" sz="1200" dirty="0"/>
-          </a:p>
-        </p:txBody>
-      </p:sp>
-      <p:sp>
-        <p:nvSpPr>
-          <p:cNvPr id="43" name="Text 38"/>
-          <p:cNvSpPr/>
-          <p:nvPr/>
-        </p:nvSpPr>
-        <p:spPr>
-          <a:xfrm>
-            <a:off x="441960" y="6489144"/>
-            <a:ext cx="2286000" cy="181332"/>
-          </a:xfrm>
-          <a:prstGeom prst="rect">
-            <a:avLst/>
-          </a:prstGeom>
-          <a:noFill/>
-          <a:ln/>
-        </p:spPr>
-        <p:txBody>
-          <a:bodyPr wrap="square" lIns="0" tIns="0" rIns="0" bIns="0" rtlCol="0" anchor="ctr"/>
-          <a:lstStyle/>
-          <a:p>
-            <a:pPr algn="l" indent="0" marL="0">
-              <a:lnSpc>
                 <a:spcPts val="1428"/>
               </a:lnSpc>
               <a:buNone/>
@@ -35839,7 +38341,7 @@
                 <a:ea typeface="Microsoft YaHei" pitchFamily="34" charset="-122"/>
                 <a:cs typeface="Microsoft YaHei" pitchFamily="34" charset="-120"/>
               </a:rPr>
-              <a:t>丽水学院 · 科研汇报示例</a:t>
+              <a:t>29 / 30</a:t>
             </a:r>
             <a:endParaRPr lang="en-US" sz="1020" dirty="0"/>
           </a:p>
@@ -35847,87 +38349,30 @@
       </p:sp>
       <p:sp>
         <p:nvSpPr>
-          <p:cNvPr id="44" name="Text 39"/>
-          <p:cNvSpPr/>
-          <p:nvPr/>
-        </p:nvSpPr>
-        <p:spPr>
-          <a:xfrm>
-            <a:off x="2910840" y="6492478"/>
-            <a:ext cx="8212455" cy="174784"/>
-          </a:xfrm>
-          <a:prstGeom prst="rect">
-            <a:avLst/>
-          </a:prstGeom>
-          <a:noFill/>
-          <a:ln/>
-        </p:spPr>
-        <p:txBody>
-          <a:bodyPr wrap="square" lIns="0" tIns="0" rIns="0" bIns="0" rtlCol="0" anchor="ctr"/>
-          <a:lstStyle/>
-          <a:p>
-            <a:pPr algn="r" indent="0" marL="0">
-              <a:lnSpc>
-                <a:spcPts val="1377"/>
-              </a:lnSpc>
-              <a:buNone/>
-            </a:pPr>
-            <a:r>
-              <a:rPr lang="en-US" sz="1020" dirty="0">
-                <a:solidFill>
-                  <a:srgbClr val="617B8B"/>
-                </a:solidFill>
-                <a:latin typeface="Microsoft YaHei" pitchFamily="34" charset="0"/>
-                <a:ea typeface="Microsoft YaHei" pitchFamily="34" charset="-122"/>
-                <a:cs typeface="Microsoft YaHei" pitchFamily="34" charset="-120"/>
-              </a:rPr>
-              <a:t>作者信息占位示例；请以本人简历与可核实成果为准</a:t>
-            </a:r>
-            <a:endParaRPr lang="en-US" sz="1020" dirty="0"/>
-          </a:p>
-        </p:txBody>
-      </p:sp>
-      <p:sp>
-        <p:nvSpPr>
-          <p:cNvPr id="45" name="Text 40"/>
-          <p:cNvSpPr/>
-          <p:nvPr/>
-        </p:nvSpPr>
-        <p:spPr>
-          <a:xfrm>
-            <a:off x="11306175" y="6489144"/>
-            <a:ext cx="443865" cy="181332"/>
-          </a:xfrm>
-          <a:prstGeom prst="rect">
-            <a:avLst/>
-          </a:prstGeom>
-          <a:noFill/>
-          <a:ln/>
-        </p:spPr>
-        <p:txBody>
-          <a:bodyPr wrap="none" lIns="0" tIns="0" rIns="0" bIns="0" rtlCol="0" anchor="ctr"/>
-          <a:lstStyle/>
-          <a:p>
-            <a:pPr algn="l" indent="0" marL="0">
-              <a:lnSpc>
-                <a:spcPts val="1428"/>
-              </a:lnSpc>
-              <a:buNone/>
-            </a:pPr>
-            <a:r>
-              <a:rPr lang="en-US" sz="1020" dirty="0">
-                <a:solidFill>
-                  <a:srgbClr val="617B8B"/>
-                </a:solidFill>
-                <a:latin typeface="Microsoft YaHei" pitchFamily="34" charset="0"/>
-                <a:ea typeface="Microsoft YaHei" pitchFamily="34" charset="-122"/>
-                <a:cs typeface="Microsoft YaHei" pitchFamily="34" charset="-120"/>
-              </a:rPr>
-              <a:t>29 / 30</a:t>
-            </a:r>
-            <a:endParaRPr lang="en-US" sz="1020" dirty="0"/>
-          </a:p>
-        </p:txBody>
+          <p:cNvPr id="83" name="Shape 79"/>
+          <p:cNvSpPr/>
+          <p:nvPr/>
+        </p:nvSpPr>
+        <p:spPr>
+          <a:xfrm>
+            <a:off x="441960" y="6355080"/>
+            <a:ext cx="11308080" cy="7620"/>
+          </a:xfrm>
+          <a:prstGeom prst="rect">
+            <a:avLst/>
+          </a:prstGeom>
+          <a:solidFill>
+            <a:srgbClr val="D8E2E9"/>
+          </a:solidFill>
+          <a:ln w="12700">
+            <a:solidFill>
+              <a:srgbClr val="D8E2E9">
+                <a:alpha val="0"/>
+              </a:srgbClr>
+            </a:solidFill>
+            <a:prstDash val="solid"/>
+          </a:ln>
+        </p:spPr>
       </p:sp>
     </p:spTree>
   </p:cSld>
@@ -42479,8 +44924,8 @@
         </p:nvSpPr>
         <p:spPr>
           <a:xfrm>
-            <a:off x="7360920" y="2118360"/>
-            <a:ext cx="4206240" cy="297180"/>
+            <a:off x="7315200" y="2072640"/>
+            <a:ext cx="4297680" cy="297180"/>
           </a:xfrm>
           <a:prstGeom prst="rect">
             <a:avLst/>
@@ -42521,8 +44966,8 @@
         </p:nvSpPr>
         <p:spPr>
           <a:xfrm>
-            <a:off x="7360920" y="2522220"/>
-            <a:ext cx="4206240" cy="629841"/>
+            <a:off x="7315200" y="2476500"/>
+            <a:ext cx="4297680" cy="629841"/>
           </a:xfrm>
           <a:prstGeom prst="rect">
             <a:avLst/>
@@ -42590,8 +45035,8 @@
         </p:nvSpPr>
         <p:spPr>
           <a:xfrm>
-            <a:off x="7360920" y="3525441"/>
-            <a:ext cx="4206240" cy="297180"/>
+            <a:off x="7315200" y="3479721"/>
+            <a:ext cx="4297680" cy="297180"/>
           </a:xfrm>
           <a:prstGeom prst="rect">
             <a:avLst/>
@@ -42632,8 +45077,8 @@
         </p:nvSpPr>
         <p:spPr>
           <a:xfrm>
-            <a:off x="7360920" y="3929301"/>
-            <a:ext cx="4206240" cy="629841"/>
+            <a:off x="7315200" y="3883581"/>
+            <a:ext cx="4297680" cy="629841"/>
           </a:xfrm>
           <a:prstGeom prst="rect">
             <a:avLst/>
@@ -42701,8 +45146,8 @@
         </p:nvSpPr>
         <p:spPr>
           <a:xfrm>
-            <a:off x="7360920" y="4932640"/>
-            <a:ext cx="4206240" cy="297180"/>
+            <a:off x="7315200" y="4886920"/>
+            <a:ext cx="4297680" cy="297180"/>
           </a:xfrm>
           <a:prstGeom prst="rect">
             <a:avLst/>
@@ -42743,8 +45188,8 @@
         </p:nvSpPr>
         <p:spPr>
           <a:xfrm>
-            <a:off x="7360920" y="5336500"/>
-            <a:ext cx="4206240" cy="629841"/>
+            <a:off x="7315200" y="5290780"/>
+            <a:ext cx="4297680" cy="629841"/>
           </a:xfrm>
           <a:prstGeom prst="rect">
             <a:avLst/>
@@ -43885,8 +46330,8 @@
         </p:nvSpPr>
         <p:spPr>
           <a:xfrm>
-            <a:off x="624840" y="5024080"/>
-            <a:ext cx="5181600" cy="314920"/>
+            <a:off x="563880" y="5024080"/>
+            <a:ext cx="5303520" cy="314920"/>
           </a:xfrm>
           <a:prstGeom prst="rect">
             <a:avLst/>
@@ -43981,8 +46426,8 @@
         </p:nvSpPr>
         <p:spPr>
           <a:xfrm>
-            <a:off x="6355080" y="5024080"/>
-            <a:ext cx="5181600" cy="314920"/>
+            <a:off x="6294120" y="5024080"/>
+            <a:ext cx="5303520" cy="314920"/>
           </a:xfrm>
           <a:prstGeom prst="rect">
             <a:avLst/>
@@ -44050,17 +46495,17 @@
         </p:nvSpPr>
         <p:spPr>
           <a:xfrm>
-            <a:off x="2642354" y="5791200"/>
-            <a:ext cx="6907173" cy="304800"/>
-          </a:xfrm>
-          <a:prstGeom prst="rect">
-            <a:avLst/>
-          </a:prstGeom>
-          <a:noFill/>
-          <a:ln/>
-        </p:spPr>
-        <p:txBody>
-          <a:bodyPr wrap="square" lIns="0" tIns="0" rIns="0" bIns="0" rtlCol="0" anchor="ctr"/>
+            <a:off x="609600" y="5791200"/>
+            <a:ext cx="10972800" cy="304800"/>
+          </a:xfrm>
+          <a:prstGeom prst="rect">
+            <a:avLst/>
+          </a:prstGeom>
+          <a:noFill/>
+          <a:ln/>
+        </p:spPr>
+        <p:txBody>
+          <a:bodyPr wrap="none" lIns="0" tIns="0" rIns="0" bIns="0" rtlCol="0" anchor="ctr"/>
           <a:lstStyle/>
           <a:p>
             <a:pPr algn="ctr" indent="0" marL="0">
@@ -45915,17 +48360,17 @@
         </p:nvSpPr>
         <p:spPr>
           <a:xfrm>
-            <a:off x="2305169" y="5791200"/>
-            <a:ext cx="7581543" cy="304800"/>
-          </a:xfrm>
-          <a:prstGeom prst="rect">
-            <a:avLst/>
-          </a:prstGeom>
-          <a:noFill/>
-          <a:ln/>
-        </p:spPr>
-        <p:txBody>
-          <a:bodyPr wrap="square" lIns="0" tIns="0" rIns="0" bIns="0" rtlCol="0" anchor="ctr"/>
+            <a:off x="609600" y="5791200"/>
+            <a:ext cx="10972800" cy="304800"/>
+          </a:xfrm>
+          <a:prstGeom prst="rect">
+            <a:avLst/>
+          </a:prstGeom>
+          <a:noFill/>
+          <a:ln/>
+        </p:spPr>
+        <p:txBody>
+          <a:bodyPr wrap="none" lIns="0" tIns="0" rIns="0" bIns="0" rtlCol="0" anchor="ctr"/>
           <a:lstStyle/>
           <a:p>
             <a:pPr algn="ctr" indent="0" marL="0">

--- a/output/丽水学院_WebSlide制作与演示指南.pptx
+++ b/output/丽水学院_WebSlide制作与演示指南.pptx
@@ -3525,7 +3525,7 @@
           <a:ln/>
         </p:spPr>
         <p:txBody>
-          <a:bodyPr wrap="none" lIns="0" tIns="0" rIns="0" bIns="0" rtlCol="0" anchor="ctr"/>
+          <a:bodyPr wrap="none" lIns="0" tIns="0" rIns="0" bIns="0" rtlCol="0" anchor="t"/>
           <a:lstStyle/>
           <a:p>
             <a:pPr algn="ctr" indent="0" marL="0" eaLnBrk="1" latinLnBrk="0" hangingPunct="1">
@@ -3587,7 +3587,7 @@
           <a:ln/>
         </p:spPr>
         <p:txBody>
-          <a:bodyPr wrap="none" lIns="0" tIns="0" rIns="0" bIns="0" rtlCol="0" anchor="ctr"/>
+          <a:bodyPr wrap="none" lIns="0" tIns="0" rIns="0" bIns="0" rtlCol="0" anchor="t"/>
           <a:lstStyle/>
           <a:p>
             <a:pPr algn="ctr" indent="0" marL="0" eaLnBrk="1" latinLnBrk="0" hangingPunct="1">
@@ -3629,7 +3629,7 @@
           <a:ln/>
         </p:spPr>
         <p:txBody>
-          <a:bodyPr wrap="none" lIns="0" tIns="0" rIns="0" bIns="0" rtlCol="0" anchor="ctr"/>
+          <a:bodyPr wrap="none" lIns="0" tIns="0" rIns="0" bIns="0" rtlCol="0" anchor="t"/>
           <a:lstStyle/>
           <a:p>
             <a:pPr algn="just" indent="0" marL="0" eaLnBrk="1" latinLnBrk="0" hangingPunct="1">
@@ -3671,7 +3671,7 @@
           <a:ln/>
         </p:spPr>
         <p:txBody>
-          <a:bodyPr wrap="none" lIns="0" tIns="0" rIns="0" bIns="0" rtlCol="0" anchor="ctr"/>
+          <a:bodyPr wrap="none" lIns="0" tIns="0" rIns="0" bIns="0" rtlCol="0" anchor="t"/>
           <a:lstStyle/>
           <a:p>
             <a:pPr algn="l" indent="0" marL="0" eaLnBrk="1" latinLnBrk="0" hangingPunct="1">
@@ -3713,7 +3713,7 @@
           <a:ln/>
         </p:spPr>
         <p:txBody>
-          <a:bodyPr wrap="none" lIns="0" tIns="0" rIns="0" bIns="0" rtlCol="0" anchor="ctr"/>
+          <a:bodyPr wrap="none" lIns="0" tIns="0" rIns="0" bIns="0" rtlCol="0" anchor="t"/>
           <a:lstStyle/>
           <a:p>
             <a:pPr algn="just" indent="0" marL="0" eaLnBrk="1" latinLnBrk="0" hangingPunct="1">
@@ -3755,7 +3755,7 @@
           <a:ln/>
         </p:spPr>
         <p:txBody>
-          <a:bodyPr wrap="none" lIns="0" tIns="0" rIns="0" bIns="0" rtlCol="0" anchor="ctr"/>
+          <a:bodyPr wrap="none" lIns="0" tIns="0" rIns="0" bIns="0" rtlCol="0" anchor="t"/>
           <a:lstStyle/>
           <a:p>
             <a:pPr algn="l" indent="0" marL="0" eaLnBrk="1" latinLnBrk="0" hangingPunct="1">
@@ -3797,7 +3797,7 @@
           <a:ln/>
         </p:spPr>
         <p:txBody>
-          <a:bodyPr wrap="none" lIns="0" tIns="0" rIns="0" bIns="0" rtlCol="0" anchor="ctr"/>
+          <a:bodyPr wrap="none" lIns="0" tIns="0" rIns="0" bIns="0" rtlCol="0" anchor="t"/>
           <a:lstStyle/>
           <a:p>
             <a:pPr algn="just" indent="0" marL="0" eaLnBrk="1" latinLnBrk="0" hangingPunct="1">
@@ -3839,7 +3839,7 @@
           <a:ln/>
         </p:spPr>
         <p:txBody>
-          <a:bodyPr wrap="none" lIns="0" tIns="0" rIns="0" bIns="0" rtlCol="0" anchor="ctr"/>
+          <a:bodyPr wrap="none" lIns="0" tIns="0" rIns="0" bIns="0" rtlCol="0" anchor="t"/>
           <a:lstStyle/>
           <a:p>
             <a:pPr algn="l" indent="0" marL="0" eaLnBrk="1" latinLnBrk="0" hangingPunct="1">
@@ -3994,7 +3994,7 @@
           <a:ln/>
         </p:spPr>
         <p:txBody>
-          <a:bodyPr wrap="none" lIns="0" tIns="0" rIns="0" bIns="0" rtlCol="0" anchor="ctr"/>
+          <a:bodyPr wrap="none" lIns="0" tIns="0" rIns="0" bIns="0" rtlCol="0" anchor="t"/>
           <a:lstStyle/>
           <a:p>
             <a:pPr algn="l" indent="0" marL="0" eaLnBrk="1" latinLnBrk="0" hangingPunct="1">
@@ -4033,7 +4033,7 @@
           <a:ln/>
         </p:spPr>
         <p:txBody>
-          <a:bodyPr wrap="none" lIns="0" tIns="0" rIns="0" bIns="0" rtlCol="0" anchor="ctr"/>
+          <a:bodyPr wrap="none" lIns="0" tIns="0" rIns="0" bIns="0" rtlCol="0" anchor="t"/>
           <a:lstStyle/>
           <a:p>
             <a:pPr algn="l" indent="0" marL="0" eaLnBrk="1" latinLnBrk="0" hangingPunct="1">
@@ -4075,7 +4075,7 @@
           <a:ln/>
         </p:spPr>
         <p:txBody>
-          <a:bodyPr wrap="none" lIns="0" tIns="0" rIns="0" bIns="0" rtlCol="0" anchor="ctr"/>
+          <a:bodyPr wrap="none" lIns="0" tIns="0" rIns="0" bIns="0" rtlCol="0" anchor="t"/>
           <a:lstStyle/>
           <a:p>
             <a:pPr algn="l" indent="0" marL="0" eaLnBrk="1" latinLnBrk="0" hangingPunct="1">
@@ -4168,7 +4168,7 @@
           <a:ln/>
         </p:spPr>
         <p:txBody>
-          <a:bodyPr wrap="none" lIns="0" tIns="0" rIns="0" bIns="0" rtlCol="0" anchor="ctr"/>
+          <a:bodyPr wrap="none" lIns="0" tIns="0" rIns="0" bIns="0" rtlCol="0" anchor="t"/>
           <a:lstStyle/>
           <a:p>
             <a:pPr algn="l" indent="0" marL="0" eaLnBrk="1" latinLnBrk="0" hangingPunct="1">
@@ -4237,7 +4237,7 @@
           <a:ln/>
         </p:spPr>
         <p:txBody>
-          <a:bodyPr wrap="none" lIns="0" tIns="0" rIns="0" bIns="0" rtlCol="0" anchor="ctr"/>
+          <a:bodyPr wrap="none" lIns="0" tIns="0" rIns="0" bIns="0" rtlCol="0" anchor="t"/>
           <a:lstStyle/>
           <a:p>
             <a:pPr algn="l" indent="0" marL="0" eaLnBrk="1" latinLnBrk="0" hangingPunct="1">
@@ -4279,7 +4279,7 @@
           <a:ln/>
         </p:spPr>
         <p:txBody>
-          <a:bodyPr wrap="none" lIns="0" tIns="0" rIns="0" bIns="0" rtlCol="0" anchor="ctr"/>
+          <a:bodyPr wrap="none" lIns="0" tIns="0" rIns="0" bIns="0" rtlCol="0" anchor="t"/>
           <a:lstStyle/>
           <a:p>
             <a:pPr algn="just" marL="243840" indent="-243840" eaLnBrk="1" latinLnBrk="0" hangingPunct="1">
@@ -4322,7 +4322,7 @@
           <a:ln/>
         </p:spPr>
         <p:txBody>
-          <a:bodyPr wrap="none" lIns="0" tIns="0" rIns="0" bIns="0" rtlCol="0" anchor="ctr"/>
+          <a:bodyPr wrap="none" lIns="0" tIns="0" rIns="0" bIns="0" rtlCol="0" anchor="t"/>
           <a:lstStyle/>
           <a:p>
             <a:pPr algn="just" marL="243840" indent="-243840" eaLnBrk="1" latinLnBrk="0" hangingPunct="1">
@@ -4365,7 +4365,7 @@
           <a:ln/>
         </p:spPr>
         <p:txBody>
-          <a:bodyPr wrap="none" lIns="0" tIns="0" rIns="0" bIns="0" rtlCol="0" anchor="ctr"/>
+          <a:bodyPr wrap="none" lIns="0" tIns="0" rIns="0" bIns="0" rtlCol="0" anchor="t"/>
           <a:lstStyle/>
           <a:p>
             <a:pPr algn="just" marL="243840" indent="-243840" eaLnBrk="1" latinLnBrk="0" hangingPunct="1">
@@ -4435,7 +4435,7 @@
           <a:ln/>
         </p:spPr>
         <p:txBody>
-          <a:bodyPr wrap="none" lIns="0" tIns="0" rIns="0" bIns="0" rtlCol="0" anchor="ctr"/>
+          <a:bodyPr wrap="none" lIns="0" tIns="0" rIns="0" bIns="0" rtlCol="0" anchor="t"/>
           <a:lstStyle/>
           <a:p>
             <a:pPr algn="l" indent="0" marL="0" eaLnBrk="1" latinLnBrk="0" hangingPunct="1">
@@ -4477,7 +4477,7 @@
           <a:ln/>
         </p:spPr>
         <p:txBody>
-          <a:bodyPr wrap="none" lIns="0" tIns="0" rIns="0" bIns="0" rtlCol="0" anchor="ctr"/>
+          <a:bodyPr wrap="none" lIns="0" tIns="0" rIns="0" bIns="0" rtlCol="0" anchor="t"/>
           <a:lstStyle/>
           <a:p>
             <a:pPr algn="just" marL="243840" indent="-243840" eaLnBrk="1" latinLnBrk="0" hangingPunct="1">
@@ -4520,7 +4520,7 @@
           <a:ln/>
         </p:spPr>
         <p:txBody>
-          <a:bodyPr wrap="none" lIns="0" tIns="0" rIns="0" bIns="0" rtlCol="0" anchor="ctr"/>
+          <a:bodyPr wrap="none" lIns="0" tIns="0" rIns="0" bIns="0" rtlCol="0" anchor="t"/>
           <a:lstStyle/>
           <a:p>
             <a:pPr algn="just" marL="243840" indent="-243840" eaLnBrk="1" latinLnBrk="0" hangingPunct="1">
@@ -4563,7 +4563,7 @@
           <a:ln/>
         </p:spPr>
         <p:txBody>
-          <a:bodyPr wrap="none" lIns="0" tIns="0" rIns="0" bIns="0" rtlCol="0" anchor="ctr"/>
+          <a:bodyPr wrap="none" lIns="0" tIns="0" rIns="0" bIns="0" rtlCol="0" anchor="t"/>
           <a:lstStyle/>
           <a:p>
             <a:pPr algn="just" marL="243840" indent="-243840" eaLnBrk="1" latinLnBrk="0" hangingPunct="1">
@@ -4660,7 +4660,7 @@
           <a:ln/>
         </p:spPr>
         <p:txBody>
-          <a:bodyPr wrap="none" lIns="0" tIns="0" rIns="0" bIns="0" rtlCol="0" anchor="ctr"/>
+          <a:bodyPr wrap="none" lIns="0" tIns="0" rIns="0" bIns="0" rtlCol="0" anchor="t"/>
           <a:lstStyle/>
           <a:p>
             <a:pPr algn="l" indent="0" marL="0" eaLnBrk="1" latinLnBrk="0" hangingPunct="1">
@@ -4702,7 +4702,7 @@
           <a:ln/>
         </p:spPr>
         <p:txBody>
-          <a:bodyPr wrap="none" lIns="0" tIns="0" rIns="0" bIns="0" rtlCol="0" anchor="ctr"/>
+          <a:bodyPr wrap="none" lIns="0" tIns="0" rIns="0" bIns="0" rtlCol="0" anchor="t"/>
           <a:lstStyle/>
           <a:p>
             <a:pPr algn="just" marL="243840" indent="-243840" eaLnBrk="1" latinLnBrk="0" hangingPunct="1">
@@ -4745,7 +4745,7 @@
           <a:ln/>
         </p:spPr>
         <p:txBody>
-          <a:bodyPr wrap="none" lIns="0" tIns="0" rIns="0" bIns="0" rtlCol="0" anchor="ctr"/>
+          <a:bodyPr wrap="none" lIns="0" tIns="0" rIns="0" bIns="0" rtlCol="0" anchor="t"/>
           <a:lstStyle/>
           <a:p>
             <a:pPr algn="just" marL="243840" indent="-243840" eaLnBrk="1" latinLnBrk="0" hangingPunct="1">
@@ -4788,7 +4788,7 @@
           <a:ln/>
         </p:spPr>
         <p:txBody>
-          <a:bodyPr wrap="none" lIns="0" tIns="0" rIns="0" bIns="0" rtlCol="0" anchor="ctr"/>
+          <a:bodyPr wrap="none" lIns="0" tIns="0" rIns="0" bIns="0" rtlCol="0" anchor="t"/>
           <a:lstStyle/>
           <a:p>
             <a:pPr algn="just" marL="243840" indent="-243840" eaLnBrk="1" latinLnBrk="0" hangingPunct="1">
@@ -4858,7 +4858,7 @@
           <a:ln/>
         </p:spPr>
         <p:txBody>
-          <a:bodyPr wrap="none" lIns="0" tIns="0" rIns="0" bIns="0" rtlCol="0" anchor="ctr"/>
+          <a:bodyPr wrap="none" lIns="0" tIns="0" rIns="0" bIns="0" rtlCol="0" anchor="t"/>
           <a:lstStyle/>
           <a:p>
             <a:pPr algn="l" indent="0" marL="0" eaLnBrk="1" latinLnBrk="0" hangingPunct="1">
@@ -4900,7 +4900,7 @@
           <a:ln/>
         </p:spPr>
         <p:txBody>
-          <a:bodyPr wrap="none" lIns="0" tIns="0" rIns="0" bIns="0" rtlCol="0" anchor="ctr"/>
+          <a:bodyPr wrap="none" lIns="0" tIns="0" rIns="0" bIns="0" rtlCol="0" anchor="t"/>
           <a:lstStyle/>
           <a:p>
             <a:pPr algn="just" marL="243840" indent="-243840" eaLnBrk="1" latinLnBrk="0" hangingPunct="1">
@@ -4943,7 +4943,7 @@
           <a:ln/>
         </p:spPr>
         <p:txBody>
-          <a:bodyPr wrap="none" lIns="0" tIns="0" rIns="0" bIns="0" rtlCol="0" anchor="ctr"/>
+          <a:bodyPr wrap="none" lIns="0" tIns="0" rIns="0" bIns="0" rtlCol="0" anchor="t"/>
           <a:lstStyle/>
           <a:p>
             <a:pPr algn="just" marL="243840" indent="-243840" eaLnBrk="1" latinLnBrk="0" hangingPunct="1">
@@ -4986,7 +4986,7 @@
           <a:ln/>
         </p:spPr>
         <p:txBody>
-          <a:bodyPr wrap="none" lIns="0" tIns="0" rIns="0" bIns="0" rtlCol="0" anchor="ctr"/>
+          <a:bodyPr wrap="none" lIns="0" tIns="0" rIns="0" bIns="0" rtlCol="0" anchor="t"/>
           <a:lstStyle/>
           <a:p>
             <a:pPr algn="just" marL="243840" indent="-243840" eaLnBrk="1" latinLnBrk="0" hangingPunct="1">
@@ -5029,7 +5029,7 @@
           <a:ln/>
         </p:spPr>
         <p:txBody>
-          <a:bodyPr wrap="none" lIns="0" tIns="0" rIns="0" bIns="0" rtlCol="0" anchor="ctr"/>
+          <a:bodyPr wrap="none" lIns="0" tIns="0" rIns="0" bIns="0" rtlCol="0" anchor="t"/>
           <a:lstStyle/>
           <a:p>
             <a:pPr algn="l" indent="0" marL="0" eaLnBrk="1" latinLnBrk="0" hangingPunct="1">
@@ -5071,7 +5071,7 @@
           <a:ln/>
         </p:spPr>
         <p:txBody>
-          <a:bodyPr wrap="none" lIns="0" tIns="0" rIns="0" bIns="0" rtlCol="0" anchor="ctr"/>
+          <a:bodyPr wrap="none" lIns="0" tIns="0" rIns="0" bIns="0" rtlCol="0" anchor="t"/>
           <a:lstStyle/>
           <a:p>
             <a:pPr algn="r" indent="0" marL="0" eaLnBrk="1" latinLnBrk="0" hangingPunct="1">
@@ -5113,7 +5113,7 @@
           <a:ln/>
         </p:spPr>
         <p:txBody>
-          <a:bodyPr wrap="none" lIns="0" tIns="0" rIns="0" bIns="0" rtlCol="0" anchor="ctr"/>
+          <a:bodyPr wrap="none" lIns="0" tIns="0" rIns="0" bIns="0" rtlCol="0" anchor="t"/>
           <a:lstStyle/>
           <a:p>
             <a:pPr algn="l" indent="0" marL="0" eaLnBrk="1" latinLnBrk="0" hangingPunct="1">
@@ -5295,7 +5295,7 @@
           <a:ln/>
         </p:spPr>
         <p:txBody>
-          <a:bodyPr wrap="none" lIns="0" tIns="0" rIns="0" bIns="0" rtlCol="0" anchor="ctr"/>
+          <a:bodyPr wrap="none" lIns="0" tIns="0" rIns="0" bIns="0" rtlCol="0" anchor="t"/>
           <a:lstStyle/>
           <a:p>
             <a:pPr algn="l" indent="0" marL="0" eaLnBrk="1" latinLnBrk="0" hangingPunct="1">
@@ -5334,7 +5334,7 @@
           <a:ln/>
         </p:spPr>
         <p:txBody>
-          <a:bodyPr wrap="none" lIns="0" tIns="0" rIns="0" bIns="0" rtlCol="0" anchor="ctr"/>
+          <a:bodyPr wrap="none" lIns="0" tIns="0" rIns="0" bIns="0" rtlCol="0" anchor="t"/>
           <a:lstStyle/>
           <a:p>
             <a:pPr algn="l" indent="0" marL="0" eaLnBrk="1" latinLnBrk="0" hangingPunct="1">
@@ -5376,7 +5376,7 @@
           <a:ln/>
         </p:spPr>
         <p:txBody>
-          <a:bodyPr wrap="none" lIns="0" tIns="0" rIns="0" bIns="0" rtlCol="0" anchor="ctr"/>
+          <a:bodyPr wrap="none" lIns="0" tIns="0" rIns="0" bIns="0" rtlCol="0" anchor="t"/>
           <a:lstStyle/>
           <a:p>
             <a:pPr algn="l" indent="0" marL="0" eaLnBrk="1" latinLnBrk="0" hangingPunct="1">
@@ -5469,7 +5469,7 @@
           <a:ln/>
         </p:spPr>
         <p:txBody>
-          <a:bodyPr wrap="none" lIns="0" tIns="0" rIns="0" bIns="0" rtlCol="0" anchor="ctr"/>
+          <a:bodyPr wrap="none" lIns="0" tIns="0" rIns="0" bIns="0" rtlCol="0" anchor="t"/>
           <a:lstStyle/>
           <a:p>
             <a:pPr algn="l" indent="0" marL="0" eaLnBrk="1" latinLnBrk="0" hangingPunct="1">
@@ -5583,7 +5583,7 @@
           <a:ln/>
         </p:spPr>
         <p:txBody>
-          <a:bodyPr wrap="none" lIns="0" tIns="0" rIns="0" bIns="0" rtlCol="0" anchor="ctr"/>
+          <a:bodyPr wrap="none" lIns="0" tIns="0" rIns="0" bIns="0" rtlCol="0" anchor="t"/>
           <a:lstStyle/>
           <a:p>
             <a:pPr algn="ctr" indent="0" marL="0" eaLnBrk="1" latinLnBrk="0" hangingPunct="1">
@@ -5625,7 +5625,7 @@
           <a:ln/>
         </p:spPr>
         <p:txBody>
-          <a:bodyPr wrap="none" lIns="0" tIns="0" rIns="0" bIns="0" rtlCol="0" anchor="ctr"/>
+          <a:bodyPr wrap="none" lIns="0" tIns="0" rIns="0" bIns="0" rtlCol="0" anchor="t"/>
           <a:lstStyle/>
           <a:p>
             <a:pPr algn="just" marL="243840" indent="-243840" eaLnBrk="1" latinLnBrk="0" hangingPunct="1">
@@ -5668,7 +5668,7 @@
           <a:ln/>
         </p:spPr>
         <p:txBody>
-          <a:bodyPr wrap="none" lIns="0" tIns="0" rIns="0" bIns="0" rtlCol="0" anchor="ctr"/>
+          <a:bodyPr wrap="none" lIns="0" tIns="0" rIns="0" bIns="0" rtlCol="0" anchor="t"/>
           <a:lstStyle/>
           <a:p>
             <a:pPr algn="just" marL="243840" indent="-243840" eaLnBrk="1" latinLnBrk="0" hangingPunct="1">
@@ -5711,7 +5711,7 @@
           <a:ln/>
         </p:spPr>
         <p:txBody>
-          <a:bodyPr wrap="none" lIns="0" tIns="0" rIns="0" bIns="0" rtlCol="0" anchor="ctr"/>
+          <a:bodyPr wrap="none" lIns="0" tIns="0" rIns="0" bIns="0" rtlCol="0" anchor="t"/>
           <a:lstStyle/>
           <a:p>
             <a:pPr algn="just" marL="243840" indent="-243840" eaLnBrk="1" latinLnBrk="0" hangingPunct="1">
@@ -5805,7 +5805,7 @@
           <a:ln/>
         </p:spPr>
         <p:txBody>
-          <a:bodyPr wrap="none" lIns="0" tIns="0" rIns="0" bIns="0" rtlCol="0" anchor="ctr"/>
+          <a:bodyPr wrap="none" lIns="0" tIns="0" rIns="0" bIns="0" rtlCol="0" anchor="t"/>
           <a:lstStyle/>
           <a:p>
             <a:pPr algn="ctr" indent="0" marL="0" eaLnBrk="1" latinLnBrk="0" hangingPunct="1">
@@ -5847,7 +5847,7 @@
           <a:ln/>
         </p:spPr>
         <p:txBody>
-          <a:bodyPr wrap="none" lIns="0" tIns="0" rIns="0" bIns="0" rtlCol="0" anchor="ctr"/>
+          <a:bodyPr wrap="none" lIns="0" tIns="0" rIns="0" bIns="0" rtlCol="0" anchor="t"/>
           <a:lstStyle/>
           <a:p>
             <a:pPr algn="just" marL="243840" indent="-243840" eaLnBrk="1" latinLnBrk="0" hangingPunct="1">
@@ -5890,7 +5890,7 @@
           <a:ln/>
         </p:spPr>
         <p:txBody>
-          <a:bodyPr wrap="none" lIns="0" tIns="0" rIns="0" bIns="0" rtlCol="0" anchor="ctr"/>
+          <a:bodyPr wrap="none" lIns="0" tIns="0" rIns="0" bIns="0" rtlCol="0" anchor="t"/>
           <a:lstStyle/>
           <a:p>
             <a:pPr algn="just" marL="243840" indent="-243840" eaLnBrk="1" latinLnBrk="0" hangingPunct="1">
@@ -5933,7 +5933,7 @@
           <a:ln/>
         </p:spPr>
         <p:txBody>
-          <a:bodyPr wrap="none" lIns="0" tIns="0" rIns="0" bIns="0" rtlCol="0" anchor="ctr"/>
+          <a:bodyPr wrap="none" lIns="0" tIns="0" rIns="0" bIns="0" rtlCol="0" anchor="t"/>
           <a:lstStyle/>
           <a:p>
             <a:pPr algn="just" marL="243840" indent="-243840" eaLnBrk="1" latinLnBrk="0" hangingPunct="1">
@@ -6024,7 +6024,7 @@
           <a:ln/>
         </p:spPr>
         <p:txBody>
-          <a:bodyPr wrap="none" lIns="0" tIns="0" rIns="0" bIns="0" rtlCol="0" anchor="ctr"/>
+          <a:bodyPr wrap="none" lIns="0" tIns="0" rIns="0" bIns="0" rtlCol="0" anchor="t"/>
           <a:lstStyle/>
           <a:p>
             <a:pPr algn="ctr" indent="0" marL="0" eaLnBrk="1" latinLnBrk="0" hangingPunct="1">
@@ -6066,7 +6066,7 @@
           <a:ln/>
         </p:spPr>
         <p:txBody>
-          <a:bodyPr wrap="none" lIns="0" tIns="0" rIns="0" bIns="0" rtlCol="0" anchor="ctr"/>
+          <a:bodyPr wrap="none" lIns="0" tIns="0" rIns="0" bIns="0" rtlCol="0" anchor="t"/>
           <a:lstStyle/>
           <a:p>
             <a:pPr algn="just" marL="243840" indent="-243840" eaLnBrk="1" latinLnBrk="0" hangingPunct="1">
@@ -6109,7 +6109,7 @@
           <a:ln/>
         </p:spPr>
         <p:txBody>
-          <a:bodyPr wrap="none" lIns="0" tIns="0" rIns="0" bIns="0" rtlCol="0" anchor="ctr"/>
+          <a:bodyPr wrap="none" lIns="0" tIns="0" rIns="0" bIns="0" rtlCol="0" anchor="t"/>
           <a:lstStyle/>
           <a:p>
             <a:pPr algn="just" marL="243840" indent="-243840" eaLnBrk="1" latinLnBrk="0" hangingPunct="1">
@@ -6152,7 +6152,7 @@
           <a:ln/>
         </p:spPr>
         <p:txBody>
-          <a:bodyPr wrap="none" lIns="0" tIns="0" rIns="0" bIns="0" rtlCol="0" anchor="ctr"/>
+          <a:bodyPr wrap="none" lIns="0" tIns="0" rIns="0" bIns="0" rtlCol="0" anchor="t"/>
           <a:lstStyle/>
           <a:p>
             <a:pPr algn="just" marL="243840" indent="-243840" eaLnBrk="1" latinLnBrk="0" hangingPunct="1">
@@ -6270,7 +6270,7 @@
           <a:ln/>
         </p:spPr>
         <p:txBody>
-          <a:bodyPr wrap="none" lIns="0" tIns="0" rIns="0" bIns="0" rtlCol="0" anchor="ctr"/>
+          <a:bodyPr wrap="none" lIns="0" tIns="0" rIns="0" bIns="0" rtlCol="0" anchor="t"/>
           <a:lstStyle/>
           <a:p>
             <a:pPr algn="l" indent="0" marL="0" eaLnBrk="1" latinLnBrk="0" hangingPunct="1">
@@ -6312,7 +6312,7 @@
           <a:ln/>
         </p:spPr>
         <p:txBody>
-          <a:bodyPr wrap="none" lIns="0" tIns="0" rIns="0" bIns="0" rtlCol="0" anchor="ctr"/>
+          <a:bodyPr wrap="none" lIns="0" tIns="0" rIns="0" bIns="0" rtlCol="0" anchor="t"/>
           <a:lstStyle/>
           <a:p>
             <a:pPr algn="l" indent="0" marL="0" eaLnBrk="1" latinLnBrk="0" hangingPunct="1">
@@ -6381,7 +6381,7 @@
           <a:ln/>
         </p:spPr>
         <p:txBody>
-          <a:bodyPr wrap="none" lIns="0" tIns="0" rIns="0" bIns="0" rtlCol="0" anchor="ctr"/>
+          <a:bodyPr wrap="none" lIns="0" tIns="0" rIns="0" bIns="0" rtlCol="0" anchor="t"/>
           <a:lstStyle/>
           <a:p>
             <a:pPr algn="just" marL="243840" indent="-243840" eaLnBrk="1" latinLnBrk="0" hangingPunct="1">
@@ -6424,7 +6424,7 @@
           <a:ln/>
         </p:spPr>
         <p:txBody>
-          <a:bodyPr wrap="none" lIns="0" tIns="0" rIns="0" bIns="0" rtlCol="0" anchor="ctr"/>
+          <a:bodyPr wrap="none" lIns="0" tIns="0" rIns="0" bIns="0" rtlCol="0" anchor="t"/>
           <a:lstStyle/>
           <a:p>
             <a:pPr algn="just" marL="243840" indent="-243840" eaLnBrk="1" latinLnBrk="0" hangingPunct="1">
@@ -6467,7 +6467,7 @@
           <a:ln/>
         </p:spPr>
         <p:txBody>
-          <a:bodyPr wrap="none" lIns="0" tIns="0" rIns="0" bIns="0" rtlCol="0" anchor="ctr"/>
+          <a:bodyPr wrap="none" lIns="0" tIns="0" rIns="0" bIns="0" rtlCol="0" anchor="t"/>
           <a:lstStyle/>
           <a:p>
             <a:pPr algn="just" marL="243840" indent="-243840" eaLnBrk="1" latinLnBrk="0" hangingPunct="1">
@@ -6510,7 +6510,7 @@
           <a:ln/>
         </p:spPr>
         <p:txBody>
-          <a:bodyPr wrap="none" lIns="0" tIns="0" rIns="0" bIns="0" rtlCol="0" anchor="ctr"/>
+          <a:bodyPr wrap="none" lIns="0" tIns="0" rIns="0" bIns="0" rtlCol="0" anchor="t"/>
           <a:lstStyle/>
           <a:p>
             <a:pPr algn="l" indent="0" marL="0" eaLnBrk="1" latinLnBrk="0" hangingPunct="1">
@@ -6552,7 +6552,7 @@
           <a:ln/>
         </p:spPr>
         <p:txBody>
-          <a:bodyPr wrap="none" lIns="0" tIns="0" rIns="0" bIns="0" rtlCol="0" anchor="ctr"/>
+          <a:bodyPr wrap="none" lIns="0" tIns="0" rIns="0" bIns="0" rtlCol="0" anchor="t"/>
           <a:lstStyle/>
           <a:p>
             <a:pPr algn="r" indent="0" marL="0" eaLnBrk="1" latinLnBrk="0" hangingPunct="1">
@@ -6594,7 +6594,7 @@
           <a:ln/>
         </p:spPr>
         <p:txBody>
-          <a:bodyPr wrap="none" lIns="0" tIns="0" rIns="0" bIns="0" rtlCol="0" anchor="ctr"/>
+          <a:bodyPr wrap="none" lIns="0" tIns="0" rIns="0" bIns="0" rtlCol="0" anchor="t"/>
           <a:lstStyle/>
           <a:p>
             <a:pPr algn="l" indent="0" marL="0" eaLnBrk="1" latinLnBrk="0" hangingPunct="1">
@@ -6776,7 +6776,7 @@
           <a:ln/>
         </p:spPr>
         <p:txBody>
-          <a:bodyPr wrap="none" lIns="0" tIns="0" rIns="0" bIns="0" rtlCol="0" anchor="ctr"/>
+          <a:bodyPr wrap="none" lIns="0" tIns="0" rIns="0" bIns="0" rtlCol="0" anchor="t"/>
           <a:lstStyle/>
           <a:p>
             <a:pPr algn="l" indent="0" marL="0" eaLnBrk="1" latinLnBrk="0" hangingPunct="1">
@@ -6815,7 +6815,7 @@
           <a:ln/>
         </p:spPr>
         <p:txBody>
-          <a:bodyPr wrap="none" lIns="0" tIns="0" rIns="0" bIns="0" rtlCol="0" anchor="ctr"/>
+          <a:bodyPr wrap="none" lIns="0" tIns="0" rIns="0" bIns="0" rtlCol="0" anchor="t"/>
           <a:lstStyle/>
           <a:p>
             <a:pPr algn="l" indent="0" marL="0" eaLnBrk="1" latinLnBrk="0" hangingPunct="1">
@@ -6857,7 +6857,7 @@
           <a:ln/>
         </p:spPr>
         <p:txBody>
-          <a:bodyPr wrap="none" lIns="0" tIns="0" rIns="0" bIns="0" rtlCol="0" anchor="ctr"/>
+          <a:bodyPr wrap="none" lIns="0" tIns="0" rIns="0" bIns="0" rtlCol="0" anchor="t"/>
           <a:lstStyle/>
           <a:p>
             <a:pPr algn="l" indent="0" marL="0" eaLnBrk="1" latinLnBrk="0" hangingPunct="1">
@@ -6950,7 +6950,7 @@
           <a:ln/>
         </p:spPr>
         <p:txBody>
-          <a:bodyPr wrap="none" lIns="0" tIns="0" rIns="0" bIns="0" rtlCol="0" anchor="ctr"/>
+          <a:bodyPr wrap="none" lIns="0" tIns="0" rIns="0" bIns="0" rtlCol="0" anchor="t"/>
           <a:lstStyle/>
           <a:p>
             <a:pPr algn="l" indent="0" marL="0" eaLnBrk="1" latinLnBrk="0" hangingPunct="1">
@@ -7019,7 +7019,7 @@
           <a:ln/>
         </p:spPr>
         <p:txBody>
-          <a:bodyPr wrap="none" lIns="0" tIns="0" rIns="0" bIns="0" rtlCol="0" anchor="ctr"/>
+          <a:bodyPr wrap="none" lIns="0" tIns="0" rIns="0" bIns="0" rtlCol="0" anchor="t"/>
           <a:lstStyle/>
           <a:p>
             <a:pPr algn="l" indent="0" marL="0" eaLnBrk="1" latinLnBrk="0" hangingPunct="1">
@@ -7061,7 +7061,7 @@
           <a:ln/>
         </p:spPr>
         <p:txBody>
-          <a:bodyPr wrap="none" lIns="0" tIns="0" rIns="0" bIns="0" rtlCol="0" anchor="ctr"/>
+          <a:bodyPr wrap="none" lIns="0" tIns="0" rIns="0" bIns="0" rtlCol="0" anchor="t"/>
           <a:lstStyle/>
           <a:p>
             <a:pPr algn="just" marL="243840" indent="-243840" eaLnBrk="1" latinLnBrk="0" hangingPunct="1">
@@ -7104,7 +7104,7 @@
           <a:ln/>
         </p:spPr>
         <p:txBody>
-          <a:bodyPr wrap="none" lIns="0" tIns="0" rIns="0" bIns="0" rtlCol="0" anchor="ctr"/>
+          <a:bodyPr wrap="none" lIns="0" tIns="0" rIns="0" bIns="0" rtlCol="0" anchor="t"/>
           <a:lstStyle/>
           <a:p>
             <a:pPr algn="just" marL="243840" indent="-243840" eaLnBrk="1" latinLnBrk="0" hangingPunct="1">
@@ -7147,7 +7147,7 @@
           <a:ln/>
         </p:spPr>
         <p:txBody>
-          <a:bodyPr wrap="none" lIns="0" tIns="0" rIns="0" bIns="0" rtlCol="0" anchor="ctr"/>
+          <a:bodyPr wrap="none" lIns="0" tIns="0" rIns="0" bIns="0" rtlCol="0" anchor="t"/>
           <a:lstStyle/>
           <a:p>
             <a:pPr algn="just" marL="243840" indent="-243840" eaLnBrk="1" latinLnBrk="0" hangingPunct="1">
@@ -7244,7 +7244,7 @@
           <a:ln/>
         </p:spPr>
         <p:txBody>
-          <a:bodyPr wrap="none" lIns="0" tIns="0" rIns="0" bIns="0" rtlCol="0" anchor="ctr"/>
+          <a:bodyPr wrap="none" lIns="0" tIns="0" rIns="0" bIns="0" rtlCol="0" anchor="t"/>
           <a:lstStyle/>
           <a:p>
             <a:pPr algn="just" indent="0" marL="0" eaLnBrk="1" latinLnBrk="0" hangingPunct="1">
@@ -7286,7 +7286,7 @@
           <a:ln/>
         </p:spPr>
         <p:txBody>
-          <a:bodyPr wrap="none" lIns="0" tIns="0" rIns="0" bIns="0" rtlCol="0" anchor="ctr"/>
+          <a:bodyPr wrap="none" lIns="0" tIns="0" rIns="0" bIns="0" rtlCol="0" anchor="t"/>
           <a:lstStyle/>
           <a:p>
             <a:pPr algn="just" indent="0" marL="0" eaLnBrk="1" latinLnBrk="0" hangingPunct="1">
@@ -7328,7 +7328,7 @@
           <a:ln/>
         </p:spPr>
         <p:txBody>
-          <a:bodyPr wrap="none" lIns="0" tIns="0" rIns="0" bIns="0" rtlCol="0" anchor="ctr"/>
+          <a:bodyPr wrap="none" lIns="0" tIns="0" rIns="0" bIns="0" rtlCol="0" anchor="t"/>
           <a:lstStyle/>
           <a:p>
             <a:pPr algn="just" indent="0" marL="0" eaLnBrk="1" latinLnBrk="0" hangingPunct="1">
@@ -7370,7 +7370,7 @@
           <a:ln/>
         </p:spPr>
         <p:txBody>
-          <a:bodyPr wrap="none" lIns="0" tIns="0" rIns="0" bIns="0" rtlCol="0" anchor="ctr"/>
+          <a:bodyPr wrap="none" lIns="0" tIns="0" rIns="0" bIns="0" rtlCol="0" anchor="t"/>
           <a:lstStyle/>
           <a:p>
             <a:pPr algn="just" indent="0" marL="0" eaLnBrk="1" latinLnBrk="0" hangingPunct="1">
@@ -7460,7 +7460,7 @@
           <a:ln/>
         </p:spPr>
         <p:txBody>
-          <a:bodyPr wrap="none" lIns="0" tIns="0" rIns="0" bIns="0" rtlCol="0" anchor="ctr"/>
+          <a:bodyPr wrap="none" lIns="0" tIns="0" rIns="0" bIns="0" rtlCol="0" anchor="t"/>
           <a:lstStyle/>
           <a:p>
             <a:pPr algn="ctr" indent="0" marL="0" eaLnBrk="1" latinLnBrk="0" hangingPunct="1">
@@ -7502,7 +7502,7 @@
           <a:ln/>
         </p:spPr>
         <p:txBody>
-          <a:bodyPr wrap="none" lIns="0" tIns="0" rIns="0" bIns="0" rtlCol="0" anchor="ctr"/>
+          <a:bodyPr wrap="none" lIns="0" tIns="0" rIns="0" bIns="0" rtlCol="0" anchor="t"/>
           <a:lstStyle/>
           <a:p>
             <a:pPr algn="l" indent="0" marL="0" eaLnBrk="1" latinLnBrk="0" hangingPunct="1">
@@ -7544,7 +7544,7 @@
           <a:ln/>
         </p:spPr>
         <p:txBody>
-          <a:bodyPr wrap="none" lIns="0" tIns="0" rIns="0" bIns="0" rtlCol="0" anchor="ctr"/>
+          <a:bodyPr wrap="none" lIns="0" tIns="0" rIns="0" bIns="0" rtlCol="0" anchor="t"/>
           <a:lstStyle/>
           <a:p>
             <a:pPr algn="just" marL="243840" indent="-243840" eaLnBrk="1" latinLnBrk="0" hangingPunct="1">
@@ -7587,7 +7587,7 @@
           <a:ln/>
         </p:spPr>
         <p:txBody>
-          <a:bodyPr wrap="none" lIns="0" tIns="0" rIns="0" bIns="0" rtlCol="0" anchor="ctr"/>
+          <a:bodyPr wrap="none" lIns="0" tIns="0" rIns="0" bIns="0" rtlCol="0" anchor="t"/>
           <a:lstStyle/>
           <a:p>
             <a:pPr algn="just" marL="243840" indent="-243840" eaLnBrk="1" latinLnBrk="0" hangingPunct="1">
@@ -7630,7 +7630,7 @@
           <a:ln/>
         </p:spPr>
         <p:txBody>
-          <a:bodyPr wrap="none" lIns="0" tIns="0" rIns="0" bIns="0" rtlCol="0" anchor="ctr"/>
+          <a:bodyPr wrap="none" lIns="0" tIns="0" rIns="0" bIns="0" rtlCol="0" anchor="t"/>
           <a:lstStyle/>
           <a:p>
             <a:pPr algn="just" marL="243840" indent="-243840" eaLnBrk="1" latinLnBrk="0" hangingPunct="1">
@@ -7700,7 +7700,7 @@
           <a:ln/>
         </p:spPr>
         <p:txBody>
-          <a:bodyPr wrap="none" lIns="0" tIns="0" rIns="0" bIns="0" rtlCol="0" anchor="ctr"/>
+          <a:bodyPr wrap="none" lIns="0" tIns="0" rIns="0" bIns="0" rtlCol="0" anchor="t"/>
           <a:lstStyle/>
           <a:p>
             <a:pPr algn="l" indent="0" marL="0" eaLnBrk="1" latinLnBrk="0" hangingPunct="1">
@@ -7742,7 +7742,7 @@
           <a:ln/>
         </p:spPr>
         <p:txBody>
-          <a:bodyPr wrap="none" lIns="0" tIns="0" rIns="0" bIns="0" rtlCol="0" anchor="ctr"/>
+          <a:bodyPr wrap="none" lIns="0" tIns="0" rIns="0" bIns="0" rtlCol="0" anchor="t"/>
           <a:lstStyle/>
           <a:p>
             <a:pPr algn="just" marL="243840" indent="-243840" eaLnBrk="1" latinLnBrk="0" hangingPunct="1">
@@ -7785,7 +7785,7 @@
           <a:ln/>
         </p:spPr>
         <p:txBody>
-          <a:bodyPr wrap="none" lIns="0" tIns="0" rIns="0" bIns="0" rtlCol="0" anchor="ctr"/>
+          <a:bodyPr wrap="none" lIns="0" tIns="0" rIns="0" bIns="0" rtlCol="0" anchor="t"/>
           <a:lstStyle/>
           <a:p>
             <a:pPr algn="just" marL="243840" indent="-243840" eaLnBrk="1" latinLnBrk="0" hangingPunct="1">
@@ -7828,7 +7828,7 @@
           <a:ln/>
         </p:spPr>
         <p:txBody>
-          <a:bodyPr wrap="none" lIns="0" tIns="0" rIns="0" bIns="0" rtlCol="0" anchor="ctr"/>
+          <a:bodyPr wrap="none" lIns="0" tIns="0" rIns="0" bIns="0" rtlCol="0" anchor="t"/>
           <a:lstStyle/>
           <a:p>
             <a:pPr algn="just" marL="243840" indent="-243840" eaLnBrk="1" latinLnBrk="0" hangingPunct="1">
@@ -7871,7 +7871,7 @@
           <a:ln/>
         </p:spPr>
         <p:txBody>
-          <a:bodyPr wrap="none" lIns="0" tIns="0" rIns="0" bIns="0" rtlCol="0" anchor="ctr"/>
+          <a:bodyPr wrap="none" lIns="0" tIns="0" rIns="0" bIns="0" rtlCol="0" anchor="t"/>
           <a:lstStyle/>
           <a:p>
             <a:pPr algn="l" indent="0" marL="0" eaLnBrk="1" latinLnBrk="0" hangingPunct="1">
@@ -7913,7 +7913,7 @@
           <a:ln/>
         </p:spPr>
         <p:txBody>
-          <a:bodyPr wrap="none" lIns="0" tIns="0" rIns="0" bIns="0" rtlCol="0" anchor="ctr"/>
+          <a:bodyPr wrap="none" lIns="0" tIns="0" rIns="0" bIns="0" rtlCol="0" anchor="t"/>
           <a:lstStyle/>
           <a:p>
             <a:pPr algn="r" indent="0" marL="0" eaLnBrk="1" latinLnBrk="0" hangingPunct="1">
@@ -7955,7 +7955,7 @@
           <a:ln/>
         </p:spPr>
         <p:txBody>
-          <a:bodyPr wrap="none" lIns="0" tIns="0" rIns="0" bIns="0" rtlCol="0" anchor="ctr"/>
+          <a:bodyPr wrap="none" lIns="0" tIns="0" rIns="0" bIns="0" rtlCol="0" anchor="t"/>
           <a:lstStyle/>
           <a:p>
             <a:pPr algn="l" indent="0" marL="0" eaLnBrk="1" latinLnBrk="0" hangingPunct="1">
@@ -8137,7 +8137,7 @@
           <a:ln/>
         </p:spPr>
         <p:txBody>
-          <a:bodyPr wrap="none" lIns="0" tIns="0" rIns="0" bIns="0" rtlCol="0" anchor="ctr"/>
+          <a:bodyPr wrap="none" lIns="0" tIns="0" rIns="0" bIns="0" rtlCol="0" anchor="t"/>
           <a:lstStyle/>
           <a:p>
             <a:pPr algn="l" indent="0" marL="0" eaLnBrk="1" latinLnBrk="0" hangingPunct="1">
@@ -8176,7 +8176,7 @@
           <a:ln/>
         </p:spPr>
         <p:txBody>
-          <a:bodyPr wrap="none" lIns="0" tIns="0" rIns="0" bIns="0" rtlCol="0" anchor="ctr"/>
+          <a:bodyPr wrap="none" lIns="0" tIns="0" rIns="0" bIns="0" rtlCol="0" anchor="t"/>
           <a:lstStyle/>
           <a:p>
             <a:pPr algn="l" indent="0" marL="0" eaLnBrk="1" latinLnBrk="0" hangingPunct="1">
@@ -8218,7 +8218,7 @@
           <a:ln/>
         </p:spPr>
         <p:txBody>
-          <a:bodyPr wrap="none" lIns="0" tIns="0" rIns="0" bIns="0" rtlCol="0" anchor="ctr"/>
+          <a:bodyPr wrap="none" lIns="0" tIns="0" rIns="0" bIns="0" rtlCol="0" anchor="t"/>
           <a:lstStyle/>
           <a:p>
             <a:pPr algn="l" indent="0" marL="0" eaLnBrk="1" latinLnBrk="0" hangingPunct="1">
@@ -8311,7 +8311,7 @@
           <a:ln/>
         </p:spPr>
         <p:txBody>
-          <a:bodyPr wrap="none" lIns="0" tIns="0" rIns="0" bIns="0" rtlCol="0" anchor="ctr"/>
+          <a:bodyPr wrap="none" lIns="0" tIns="0" rIns="0" bIns="0" rtlCol="0" anchor="t"/>
           <a:lstStyle/>
           <a:p>
             <a:pPr algn="l" indent="0" marL="0" eaLnBrk="1" latinLnBrk="0" hangingPunct="1">
@@ -8405,7 +8405,7 @@
           <a:ln/>
         </p:spPr>
         <p:txBody>
-          <a:bodyPr wrap="none" lIns="0" tIns="0" rIns="0" bIns="0" rtlCol="0" anchor="ctr"/>
+          <a:bodyPr wrap="none" lIns="0" tIns="0" rIns="0" bIns="0" rtlCol="0" anchor="t"/>
           <a:lstStyle/>
           <a:p>
             <a:pPr algn="l" indent="0" marL="0" eaLnBrk="1" latinLnBrk="0" hangingPunct="1">
@@ -8447,7 +8447,7 @@
           <a:ln/>
         </p:spPr>
         <p:txBody>
-          <a:bodyPr wrap="none" lIns="0" tIns="0" rIns="0" bIns="0" rtlCol="0" anchor="ctr"/>
+          <a:bodyPr wrap="none" lIns="0" tIns="0" rIns="0" bIns="0" rtlCol="0" anchor="t"/>
           <a:lstStyle/>
           <a:p>
             <a:pPr algn="l" indent="0" marL="0" eaLnBrk="1" latinLnBrk="0" hangingPunct="1">
@@ -8489,7 +8489,7 @@
           <a:ln/>
         </p:spPr>
         <p:txBody>
-          <a:bodyPr wrap="none" lIns="0" tIns="0" rIns="0" bIns="0" rtlCol="0" anchor="ctr"/>
+          <a:bodyPr wrap="none" lIns="0" tIns="0" rIns="0" bIns="0" rtlCol="0" anchor="t"/>
           <a:lstStyle/>
           <a:p>
             <a:pPr algn="l" indent="0" marL="0" eaLnBrk="1" latinLnBrk="0" hangingPunct="1">
@@ -8531,7 +8531,7 @@
           <a:ln/>
         </p:spPr>
         <p:txBody>
-          <a:bodyPr wrap="none" lIns="0" tIns="0" rIns="0" bIns="0" rtlCol="0" anchor="ctr"/>
+          <a:bodyPr wrap="none" lIns="0" tIns="0" rIns="0" bIns="0" rtlCol="0" anchor="t"/>
           <a:lstStyle/>
           <a:p>
             <a:pPr algn="l" indent="0" marL="0" eaLnBrk="1" latinLnBrk="0" hangingPunct="1">
@@ -8573,7 +8573,7 @@
           <a:ln/>
         </p:spPr>
         <p:txBody>
-          <a:bodyPr wrap="none" lIns="0" tIns="0" rIns="0" bIns="0" rtlCol="0" anchor="ctr"/>
+          <a:bodyPr wrap="none" lIns="0" tIns="0" rIns="0" bIns="0" rtlCol="0" anchor="t"/>
           <a:lstStyle/>
           <a:p>
             <a:pPr algn="l" indent="0" marL="0" eaLnBrk="1" latinLnBrk="0" hangingPunct="1">
@@ -8669,7 +8669,7 @@
           <a:ln/>
         </p:spPr>
         <p:txBody>
-          <a:bodyPr wrap="none" lIns="0" tIns="0" rIns="0" bIns="0" rtlCol="0" anchor="ctr"/>
+          <a:bodyPr wrap="none" lIns="0" tIns="0" rIns="0" bIns="0" rtlCol="0" anchor="t"/>
           <a:lstStyle/>
           <a:p>
             <a:pPr algn="l" indent="0" marL="0" eaLnBrk="1" latinLnBrk="0" hangingPunct="1">
@@ -8711,7 +8711,7 @@
           <a:ln/>
         </p:spPr>
         <p:txBody>
-          <a:bodyPr wrap="none" lIns="0" tIns="0" rIns="0" bIns="0" rtlCol="0" anchor="ctr"/>
+          <a:bodyPr wrap="none" lIns="0" tIns="0" rIns="0" bIns="0" rtlCol="0" anchor="t"/>
           <a:lstStyle/>
           <a:p>
             <a:pPr algn="just" marL="243840" indent="-243840" eaLnBrk="1" latinLnBrk="0" hangingPunct="1">
@@ -8754,7 +8754,7 @@
           <a:ln/>
         </p:spPr>
         <p:txBody>
-          <a:bodyPr wrap="square" lIns="0" tIns="0" rIns="0" bIns="0" rtlCol="0" anchor="ctr"/>
+          <a:bodyPr wrap="square" lIns="0" tIns="0" rIns="0" bIns="0" rtlCol="0" anchor="t"/>
           <a:lstStyle/>
           <a:p>
             <a:pPr algn="just" marL="243840" indent="-243840" eaLnBrk="1" latinLnBrk="0" hangingPunct="1">
@@ -8797,7 +8797,7 @@
           <a:ln/>
         </p:spPr>
         <p:txBody>
-          <a:bodyPr wrap="none" lIns="0" tIns="0" rIns="0" bIns="0" rtlCol="0" anchor="ctr"/>
+          <a:bodyPr wrap="none" lIns="0" tIns="0" rIns="0" bIns="0" rtlCol="0" anchor="t"/>
           <a:lstStyle/>
           <a:p>
             <a:pPr algn="just" marL="243840" indent="-243840" eaLnBrk="1" latinLnBrk="0" hangingPunct="1">
@@ -8840,7 +8840,7 @@
           <a:ln/>
         </p:spPr>
         <p:txBody>
-          <a:bodyPr wrap="none" lIns="0" tIns="0" rIns="0" bIns="0" rtlCol="0" anchor="ctr"/>
+          <a:bodyPr wrap="none" lIns="0" tIns="0" rIns="0" bIns="0" rtlCol="0" anchor="t"/>
           <a:lstStyle/>
           <a:p>
             <a:pPr algn="just" marL="243840" indent="-243840" eaLnBrk="1" latinLnBrk="0" hangingPunct="1">
@@ -8883,7 +8883,7 @@
           <a:ln/>
         </p:spPr>
         <p:txBody>
-          <a:bodyPr wrap="none" lIns="0" tIns="0" rIns="0" bIns="0" rtlCol="0" anchor="ctr"/>
+          <a:bodyPr wrap="none" lIns="0" tIns="0" rIns="0" bIns="0" rtlCol="0" anchor="t"/>
           <a:lstStyle/>
           <a:p>
             <a:pPr algn="l" indent="0" marL="0" eaLnBrk="1" latinLnBrk="0" hangingPunct="1">
@@ -8925,7 +8925,7 @@
           <a:ln/>
         </p:spPr>
         <p:txBody>
-          <a:bodyPr wrap="none" lIns="0" tIns="0" rIns="0" bIns="0" rtlCol="0" anchor="ctr"/>
+          <a:bodyPr wrap="none" lIns="0" tIns="0" rIns="0" bIns="0" rtlCol="0" anchor="t"/>
           <a:lstStyle/>
           <a:p>
             <a:pPr algn="l" indent="0" marL="0" eaLnBrk="1" latinLnBrk="0" hangingPunct="1">
@@ -8967,7 +8967,7 @@
           <a:ln/>
         </p:spPr>
         <p:txBody>
-          <a:bodyPr wrap="square" lIns="0" tIns="0" rIns="0" bIns="0" rtlCol="0" anchor="ctr"/>
+          <a:bodyPr wrap="square" lIns="0" tIns="0" rIns="0" bIns="0" rtlCol="0" anchor="t"/>
           <a:lstStyle/>
           <a:p>
             <a:pPr algn="l" indent="0" marL="0" eaLnBrk="1" latinLnBrk="0" hangingPunct="1">
@@ -9009,7 +9009,7 @@
           <a:ln/>
         </p:spPr>
         <p:txBody>
-          <a:bodyPr wrap="none" lIns="0" tIns="0" rIns="0" bIns="0" rtlCol="0" anchor="ctr"/>
+          <a:bodyPr wrap="none" lIns="0" tIns="0" rIns="0" bIns="0" rtlCol="0" anchor="t"/>
           <a:lstStyle/>
           <a:p>
             <a:pPr algn="l" indent="0" marL="0" eaLnBrk="1" latinLnBrk="0" hangingPunct="1">
@@ -9051,7 +9051,7 @@
           <a:ln/>
         </p:spPr>
         <p:txBody>
-          <a:bodyPr wrap="none" lIns="0" tIns="0" rIns="0" bIns="0" rtlCol="0" anchor="ctr"/>
+          <a:bodyPr wrap="none" lIns="0" tIns="0" rIns="0" bIns="0" rtlCol="0" anchor="t"/>
           <a:lstStyle/>
           <a:p>
             <a:pPr algn="r" indent="0" marL="0" eaLnBrk="1" latinLnBrk="0" hangingPunct="1">
@@ -9093,7 +9093,7 @@
           <a:ln/>
         </p:spPr>
         <p:txBody>
-          <a:bodyPr wrap="none" lIns="0" tIns="0" rIns="0" bIns="0" rtlCol="0" anchor="ctr"/>
+          <a:bodyPr wrap="none" lIns="0" tIns="0" rIns="0" bIns="0" rtlCol="0" anchor="t"/>
           <a:lstStyle/>
           <a:p>
             <a:pPr algn="l" indent="0" marL="0" eaLnBrk="1" latinLnBrk="0" hangingPunct="1">
@@ -9275,7 +9275,7 @@
           <a:ln/>
         </p:spPr>
         <p:txBody>
-          <a:bodyPr wrap="none" lIns="0" tIns="0" rIns="0" bIns="0" rtlCol="0" anchor="ctr"/>
+          <a:bodyPr wrap="none" lIns="0" tIns="0" rIns="0" bIns="0" rtlCol="0" anchor="t"/>
           <a:lstStyle/>
           <a:p>
             <a:pPr algn="l" indent="0" marL="0" eaLnBrk="1" latinLnBrk="0" hangingPunct="1">
@@ -9314,7 +9314,7 @@
           <a:ln/>
         </p:spPr>
         <p:txBody>
-          <a:bodyPr wrap="none" lIns="0" tIns="0" rIns="0" bIns="0" rtlCol="0" anchor="ctr"/>
+          <a:bodyPr wrap="none" lIns="0" tIns="0" rIns="0" bIns="0" rtlCol="0" anchor="t"/>
           <a:lstStyle/>
           <a:p>
             <a:pPr algn="l" indent="0" marL="0" eaLnBrk="1" latinLnBrk="0" hangingPunct="1">
@@ -9356,7 +9356,7 @@
           <a:ln/>
         </p:spPr>
         <p:txBody>
-          <a:bodyPr wrap="none" lIns="0" tIns="0" rIns="0" bIns="0" rtlCol="0" anchor="ctr"/>
+          <a:bodyPr wrap="none" lIns="0" tIns="0" rIns="0" bIns="0" rtlCol="0" anchor="t"/>
           <a:lstStyle/>
           <a:p>
             <a:pPr algn="l" indent="0" marL="0" eaLnBrk="1" latinLnBrk="0" hangingPunct="1">
@@ -9449,7 +9449,7 @@
           <a:ln/>
         </p:spPr>
         <p:txBody>
-          <a:bodyPr wrap="none" lIns="0" tIns="0" rIns="0" bIns="0" rtlCol="0" anchor="ctr"/>
+          <a:bodyPr wrap="none" lIns="0" tIns="0" rIns="0" bIns="0" rtlCol="0" anchor="t"/>
           <a:lstStyle/>
           <a:p>
             <a:pPr algn="l" indent="0" marL="0" eaLnBrk="1" latinLnBrk="0" hangingPunct="1">
@@ -9542,7 +9542,7 @@
           <a:ln/>
         </p:spPr>
         <p:txBody>
-          <a:bodyPr wrap="none" lIns="0" tIns="0" rIns="0" bIns="0" rtlCol="0" anchor="ctr"/>
+          <a:bodyPr wrap="none" lIns="0" tIns="0" rIns="0" bIns="0" rtlCol="0" anchor="t"/>
           <a:lstStyle/>
           <a:p>
             <a:pPr algn="l" indent="0" marL="0" eaLnBrk="1" latinLnBrk="0" hangingPunct="1">
@@ -9635,7 +9635,7 @@
           <a:ln/>
         </p:spPr>
         <p:txBody>
-          <a:bodyPr wrap="none" lIns="0" tIns="0" rIns="0" bIns="0" rtlCol="0" anchor="ctr"/>
+          <a:bodyPr wrap="none" lIns="0" tIns="0" rIns="0" bIns="0" rtlCol="0" anchor="t"/>
           <a:lstStyle/>
           <a:p>
             <a:pPr algn="l" indent="0" marL="0" eaLnBrk="1" latinLnBrk="0" hangingPunct="1">
@@ -9704,7 +9704,7 @@
           <a:ln/>
         </p:spPr>
         <p:txBody>
-          <a:bodyPr wrap="none" lIns="0" tIns="0" rIns="0" bIns="0" rtlCol="0" anchor="ctr"/>
+          <a:bodyPr wrap="none" lIns="0" tIns="0" rIns="0" bIns="0" rtlCol="0" anchor="t"/>
           <a:lstStyle/>
           <a:p>
             <a:pPr algn="l" indent="0" marL="0" eaLnBrk="1" latinLnBrk="0" hangingPunct="1">
@@ -9746,7 +9746,7 @@
           <a:ln/>
         </p:spPr>
         <p:txBody>
-          <a:bodyPr wrap="none" lIns="0" tIns="0" rIns="0" bIns="0" rtlCol="0" anchor="ctr"/>
+          <a:bodyPr wrap="none" lIns="0" tIns="0" rIns="0" bIns="0" rtlCol="0" anchor="t"/>
           <a:lstStyle/>
           <a:p>
             <a:pPr algn="just" marL="243840" indent="-243840" eaLnBrk="1" latinLnBrk="0" hangingPunct="1">
@@ -9789,7 +9789,7 @@
           <a:ln/>
         </p:spPr>
         <p:txBody>
-          <a:bodyPr wrap="none" lIns="0" tIns="0" rIns="0" bIns="0" rtlCol="0" anchor="ctr"/>
+          <a:bodyPr wrap="none" lIns="0" tIns="0" rIns="0" bIns="0" rtlCol="0" anchor="t"/>
           <a:lstStyle/>
           <a:p>
             <a:pPr algn="just" marL="243840" indent="-243840" eaLnBrk="1" latinLnBrk="0" hangingPunct="1">
@@ -9832,7 +9832,7 @@
           <a:ln/>
         </p:spPr>
         <p:txBody>
-          <a:bodyPr wrap="none" lIns="0" tIns="0" rIns="0" bIns="0" rtlCol="0" anchor="ctr"/>
+          <a:bodyPr wrap="none" lIns="0" tIns="0" rIns="0" bIns="0" rtlCol="0" anchor="t"/>
           <a:lstStyle/>
           <a:p>
             <a:pPr algn="just" marL="243840" indent="-243840" eaLnBrk="1" latinLnBrk="0" hangingPunct="1">
@@ -9902,7 +9902,7 @@
           <a:ln/>
         </p:spPr>
         <p:txBody>
-          <a:bodyPr wrap="none" lIns="0" tIns="0" rIns="0" bIns="0" rtlCol="0" anchor="ctr"/>
+          <a:bodyPr wrap="none" lIns="0" tIns="0" rIns="0" bIns="0" rtlCol="0" anchor="t"/>
           <a:lstStyle/>
           <a:p>
             <a:pPr algn="l" indent="0" marL="0" eaLnBrk="1" latinLnBrk="0" hangingPunct="1">
@@ -9944,7 +9944,7 @@
           <a:ln/>
         </p:spPr>
         <p:txBody>
-          <a:bodyPr wrap="none" lIns="0" tIns="0" rIns="0" bIns="0" rtlCol="0" anchor="ctr"/>
+          <a:bodyPr wrap="none" lIns="0" tIns="0" rIns="0" bIns="0" rtlCol="0" anchor="t"/>
           <a:lstStyle/>
           <a:p>
             <a:pPr algn="just" marL="243840" indent="-243840" eaLnBrk="1" latinLnBrk="0" hangingPunct="1">
@@ -9987,7 +9987,7 @@
           <a:ln/>
         </p:spPr>
         <p:txBody>
-          <a:bodyPr wrap="none" lIns="0" tIns="0" rIns="0" bIns="0" rtlCol="0" anchor="ctr"/>
+          <a:bodyPr wrap="none" lIns="0" tIns="0" rIns="0" bIns="0" rtlCol="0" anchor="t"/>
           <a:lstStyle/>
           <a:p>
             <a:pPr algn="just" marL="243840" indent="-243840" eaLnBrk="1" latinLnBrk="0" hangingPunct="1">
@@ -10030,7 +10030,7 @@
           <a:ln/>
         </p:spPr>
         <p:txBody>
-          <a:bodyPr wrap="none" lIns="0" tIns="0" rIns="0" bIns="0" rtlCol="0" anchor="ctr"/>
+          <a:bodyPr wrap="none" lIns="0" tIns="0" rIns="0" bIns="0" rtlCol="0" anchor="t"/>
           <a:lstStyle/>
           <a:p>
             <a:pPr algn="just" marL="243840" indent="-243840" eaLnBrk="1" latinLnBrk="0" hangingPunct="1">
@@ -10100,7 +10100,7 @@
           <a:ln/>
         </p:spPr>
         <p:txBody>
-          <a:bodyPr wrap="none" lIns="0" tIns="0" rIns="0" bIns="0" rtlCol="0" anchor="ctr"/>
+          <a:bodyPr wrap="none" lIns="0" tIns="0" rIns="0" bIns="0" rtlCol="0" anchor="t"/>
           <a:lstStyle/>
           <a:p>
             <a:pPr algn="ctr" indent="0" marL="0" eaLnBrk="1" latinLnBrk="0" hangingPunct="1">
@@ -10142,7 +10142,7 @@
           <a:ln/>
         </p:spPr>
         <p:txBody>
-          <a:bodyPr wrap="none" lIns="0" tIns="0" rIns="0" bIns="0" rtlCol="0" anchor="ctr"/>
+          <a:bodyPr wrap="none" lIns="0" tIns="0" rIns="0" bIns="0" rtlCol="0" anchor="t"/>
           <a:lstStyle/>
           <a:p>
             <a:pPr algn="l" indent="0" marL="0" eaLnBrk="1" latinLnBrk="0" hangingPunct="1">
@@ -10184,7 +10184,7 @@
           <a:ln/>
         </p:spPr>
         <p:txBody>
-          <a:bodyPr wrap="none" lIns="0" tIns="0" rIns="0" bIns="0" rtlCol="0" anchor="ctr"/>
+          <a:bodyPr wrap="none" lIns="0" tIns="0" rIns="0" bIns="0" rtlCol="0" anchor="t"/>
           <a:lstStyle/>
           <a:p>
             <a:pPr algn="r" indent="0" marL="0" eaLnBrk="1" latinLnBrk="0" hangingPunct="1">
@@ -10226,7 +10226,7 @@
           <a:ln/>
         </p:spPr>
         <p:txBody>
-          <a:bodyPr wrap="none" lIns="0" tIns="0" rIns="0" bIns="0" rtlCol="0" anchor="ctr"/>
+          <a:bodyPr wrap="none" lIns="0" tIns="0" rIns="0" bIns="0" rtlCol="0" anchor="t"/>
           <a:lstStyle/>
           <a:p>
             <a:pPr algn="l" indent="0" marL="0" eaLnBrk="1" latinLnBrk="0" hangingPunct="1">
@@ -10408,7 +10408,7 @@
           <a:ln/>
         </p:spPr>
         <p:txBody>
-          <a:bodyPr wrap="none" lIns="0" tIns="0" rIns="0" bIns="0" rtlCol="0" anchor="ctr"/>
+          <a:bodyPr wrap="none" lIns="0" tIns="0" rIns="0" bIns="0" rtlCol="0" anchor="t"/>
           <a:lstStyle/>
           <a:p>
             <a:pPr algn="l" indent="0" marL="0" eaLnBrk="1" latinLnBrk="0" hangingPunct="1">
@@ -10447,7 +10447,7 @@
           <a:ln/>
         </p:spPr>
         <p:txBody>
-          <a:bodyPr wrap="none" lIns="0" tIns="0" rIns="0" bIns="0" rtlCol="0" anchor="ctr"/>
+          <a:bodyPr wrap="none" lIns="0" tIns="0" rIns="0" bIns="0" rtlCol="0" anchor="t"/>
           <a:lstStyle/>
           <a:p>
             <a:pPr algn="l" indent="0" marL="0" eaLnBrk="1" latinLnBrk="0" hangingPunct="1">
@@ -10489,7 +10489,7 @@
           <a:ln/>
         </p:spPr>
         <p:txBody>
-          <a:bodyPr wrap="none" lIns="0" tIns="0" rIns="0" bIns="0" rtlCol="0" anchor="ctr"/>
+          <a:bodyPr wrap="none" lIns="0" tIns="0" rIns="0" bIns="0" rtlCol="0" anchor="t"/>
           <a:lstStyle/>
           <a:p>
             <a:pPr algn="l" indent="0" marL="0" eaLnBrk="1" latinLnBrk="0" hangingPunct="1">
@@ -10582,7 +10582,7 @@
           <a:ln/>
         </p:spPr>
         <p:txBody>
-          <a:bodyPr wrap="none" lIns="0" tIns="0" rIns="0" bIns="0" rtlCol="0" anchor="ctr"/>
+          <a:bodyPr wrap="none" lIns="0" tIns="0" rIns="0" bIns="0" rtlCol="0" anchor="t"/>
           <a:lstStyle/>
           <a:p>
             <a:pPr algn="l" indent="0" marL="0" eaLnBrk="1" latinLnBrk="0" hangingPunct="1">
@@ -10675,7 +10675,7 @@
           <a:ln/>
         </p:spPr>
         <p:txBody>
-          <a:bodyPr wrap="none" lIns="0" tIns="0" rIns="0" bIns="0" rtlCol="0" anchor="ctr"/>
+          <a:bodyPr wrap="none" lIns="0" tIns="0" rIns="0" bIns="0" rtlCol="0" anchor="t"/>
           <a:lstStyle/>
           <a:p>
             <a:pPr algn="l" indent="0" marL="0" eaLnBrk="1" latinLnBrk="0" hangingPunct="1">
@@ -10717,7 +10717,7 @@
           <a:ln/>
         </p:spPr>
         <p:txBody>
-          <a:bodyPr wrap="none" lIns="0" tIns="0" rIns="0" bIns="0" rtlCol="0" anchor="ctr"/>
+          <a:bodyPr wrap="none" lIns="0" tIns="0" rIns="0" bIns="0" rtlCol="0" anchor="t"/>
           <a:lstStyle/>
           <a:p>
             <a:pPr algn="l" indent="0" marL="0" eaLnBrk="1" latinLnBrk="0" hangingPunct="1">
@@ -10786,7 +10786,7 @@
           <a:ln/>
         </p:spPr>
         <p:txBody>
-          <a:bodyPr wrap="none" lIns="0" tIns="0" rIns="0" bIns="0" rtlCol="0" anchor="ctr"/>
+          <a:bodyPr wrap="none" lIns="0" tIns="0" rIns="0" bIns="0" rtlCol="0" anchor="t"/>
           <a:lstStyle/>
           <a:p>
             <a:pPr algn="l" indent="0" marL="0" eaLnBrk="1" latinLnBrk="0" hangingPunct="1">
@@ -10828,7 +10828,7 @@
           <a:ln/>
         </p:spPr>
         <p:txBody>
-          <a:bodyPr wrap="square" lIns="0" tIns="0" rIns="0" bIns="0" rtlCol="0" anchor="ctr"/>
+          <a:bodyPr wrap="square" lIns="0" tIns="0" rIns="0" bIns="0" rtlCol="0" anchor="t"/>
           <a:lstStyle/>
           <a:p>
             <a:pPr algn="just" indent="0" marL="0" eaLnBrk="1" latinLnBrk="0" hangingPunct="1">
@@ -10897,7 +10897,7 @@
           <a:ln/>
         </p:spPr>
         <p:txBody>
-          <a:bodyPr wrap="none" lIns="0" tIns="0" rIns="0" bIns="0" rtlCol="0" anchor="ctr"/>
+          <a:bodyPr wrap="none" lIns="0" tIns="0" rIns="0" bIns="0" rtlCol="0" anchor="t"/>
           <a:lstStyle/>
           <a:p>
             <a:pPr algn="l" indent="0" marL="0" eaLnBrk="1" latinLnBrk="0" hangingPunct="1">
@@ -10939,7 +10939,7 @@
           <a:ln/>
         </p:spPr>
         <p:txBody>
-          <a:bodyPr wrap="square" lIns="0" tIns="0" rIns="0" bIns="0" rtlCol="0" anchor="ctr"/>
+          <a:bodyPr wrap="square" lIns="0" tIns="0" rIns="0" bIns="0" rtlCol="0" anchor="t"/>
           <a:lstStyle/>
           <a:p>
             <a:pPr algn="just" indent="0" marL="0" eaLnBrk="1" latinLnBrk="0" hangingPunct="1">
@@ -11008,7 +11008,7 @@
           <a:ln/>
         </p:spPr>
         <p:txBody>
-          <a:bodyPr wrap="none" lIns="0" tIns="0" rIns="0" bIns="0" rtlCol="0" anchor="ctr"/>
+          <a:bodyPr wrap="none" lIns="0" tIns="0" rIns="0" bIns="0" rtlCol="0" anchor="t"/>
           <a:lstStyle/>
           <a:p>
             <a:pPr algn="l" indent="0" marL="0" eaLnBrk="1" latinLnBrk="0" hangingPunct="1">
@@ -11050,7 +11050,7 @@
           <a:ln/>
         </p:spPr>
         <p:txBody>
-          <a:bodyPr wrap="square" lIns="0" tIns="0" rIns="0" bIns="0" rtlCol="0" anchor="ctr"/>
+          <a:bodyPr wrap="square" lIns="0" tIns="0" rIns="0" bIns="0" rtlCol="0" anchor="t"/>
           <a:lstStyle/>
           <a:p>
             <a:pPr algn="just" indent="0" marL="0" eaLnBrk="1" latinLnBrk="0" hangingPunct="1">
@@ -11092,7 +11092,7 @@
           <a:ln/>
         </p:spPr>
         <p:txBody>
-          <a:bodyPr wrap="none" lIns="0" tIns="0" rIns="0" bIns="0" rtlCol="0" anchor="ctr"/>
+          <a:bodyPr wrap="none" lIns="0" tIns="0" rIns="0" bIns="0" rtlCol="0" anchor="t"/>
           <a:lstStyle/>
           <a:p>
             <a:pPr algn="l" indent="0" marL="0" eaLnBrk="1" latinLnBrk="0" hangingPunct="1">
@@ -11136,7 +11136,7 @@
           <a:ln/>
         </p:spPr>
         <p:txBody>
-          <a:bodyPr wrap="none" lIns="0" tIns="0" rIns="0" bIns="0" rtlCol="0" anchor="ctr"/>
+          <a:bodyPr wrap="none" lIns="0" tIns="0" rIns="0" bIns="0" rtlCol="0" anchor="t"/>
           <a:lstStyle/>
           <a:p>
             <a:pPr algn="r" indent="0" marL="0" eaLnBrk="1" latinLnBrk="0" hangingPunct="1">
@@ -11185,7 +11185,7 @@
           <a:ln/>
         </p:spPr>
         <p:txBody>
-          <a:bodyPr wrap="none" lIns="0" tIns="0" rIns="0" bIns="0" rtlCol="0" anchor="ctr"/>
+          <a:bodyPr wrap="none" lIns="0" tIns="0" rIns="0" bIns="0" rtlCol="0" anchor="t"/>
           <a:lstStyle/>
           <a:p>
             <a:pPr algn="l" indent="0" marL="0" eaLnBrk="1" latinLnBrk="0" hangingPunct="1">
@@ -11367,7 +11367,7 @@
           <a:ln/>
         </p:spPr>
         <p:txBody>
-          <a:bodyPr wrap="none" lIns="0" tIns="0" rIns="0" bIns="0" rtlCol="0" anchor="ctr"/>
+          <a:bodyPr wrap="none" lIns="0" tIns="0" rIns="0" bIns="0" rtlCol="0" anchor="t"/>
           <a:lstStyle/>
           <a:p>
             <a:pPr algn="l" indent="0" marL="0" eaLnBrk="1" latinLnBrk="0" hangingPunct="1">
@@ -11406,7 +11406,7 @@
           <a:ln/>
         </p:spPr>
         <p:txBody>
-          <a:bodyPr wrap="none" lIns="0" tIns="0" rIns="0" bIns="0" rtlCol="0" anchor="ctr"/>
+          <a:bodyPr wrap="none" lIns="0" tIns="0" rIns="0" bIns="0" rtlCol="0" anchor="t"/>
           <a:lstStyle/>
           <a:p>
             <a:pPr algn="l" indent="0" marL="0" eaLnBrk="1" latinLnBrk="0" hangingPunct="1">
@@ -11448,7 +11448,7 @@
           <a:ln/>
         </p:spPr>
         <p:txBody>
-          <a:bodyPr wrap="none" lIns="0" tIns="0" rIns="0" bIns="0" rtlCol="0" anchor="ctr"/>
+          <a:bodyPr wrap="none" lIns="0" tIns="0" rIns="0" bIns="0" rtlCol="0" anchor="t"/>
           <a:lstStyle/>
           <a:p>
             <a:pPr algn="l" indent="0" marL="0" eaLnBrk="1" latinLnBrk="0" hangingPunct="1">
@@ -11541,7 +11541,7 @@
           <a:ln/>
         </p:spPr>
         <p:txBody>
-          <a:bodyPr wrap="none" lIns="0" tIns="0" rIns="0" bIns="0" rtlCol="0" anchor="ctr"/>
+          <a:bodyPr wrap="none" lIns="0" tIns="0" rIns="0" bIns="0" rtlCol="0" anchor="t"/>
           <a:lstStyle/>
           <a:p>
             <a:pPr algn="l" indent="0" marL="0" eaLnBrk="1" latinLnBrk="0" hangingPunct="1">
@@ -11634,7 +11634,7 @@
           <a:ln/>
         </p:spPr>
         <p:txBody>
-          <a:bodyPr wrap="none" lIns="0" tIns="0" rIns="0" bIns="0" rtlCol="0" anchor="ctr"/>
+          <a:bodyPr wrap="none" lIns="0" tIns="0" rIns="0" bIns="0" rtlCol="0" anchor="t"/>
           <a:lstStyle/>
           <a:p>
             <a:pPr algn="l" indent="0" marL="0" eaLnBrk="1" latinLnBrk="0" hangingPunct="1">
@@ -11676,7 +11676,7 @@
           <a:ln/>
         </p:spPr>
         <p:txBody>
-          <a:bodyPr wrap="none" lIns="0" tIns="0" rIns="0" bIns="0" rtlCol="0" anchor="ctr"/>
+          <a:bodyPr wrap="none" lIns="0" tIns="0" rIns="0" bIns="0" rtlCol="0" anchor="t"/>
           <a:lstStyle/>
           <a:p>
             <a:pPr algn="l" indent="0" marL="0" eaLnBrk="1" latinLnBrk="0" hangingPunct="1">
@@ -11769,7 +11769,7 @@
           <a:ln/>
         </p:spPr>
         <p:txBody>
-          <a:bodyPr wrap="none" lIns="0" tIns="0" rIns="0" bIns="0" rtlCol="0" anchor="ctr"/>
+          <a:bodyPr wrap="none" lIns="0" tIns="0" rIns="0" bIns="0" rtlCol="0" anchor="t"/>
           <a:lstStyle/>
           <a:p>
             <a:pPr algn="l" indent="0" marL="0" eaLnBrk="1" latinLnBrk="0" hangingPunct="1">
@@ -11811,7 +11811,7 @@
           <a:ln/>
         </p:spPr>
         <p:txBody>
-          <a:bodyPr wrap="none" lIns="0" tIns="0" rIns="0" bIns="0" rtlCol="0" anchor="ctr"/>
+          <a:bodyPr wrap="none" lIns="0" tIns="0" rIns="0" bIns="0" rtlCol="0" anchor="t"/>
           <a:lstStyle/>
           <a:p>
             <a:pPr algn="l" indent="0" marL="0" eaLnBrk="1" latinLnBrk="0" hangingPunct="1">
@@ -11880,7 +11880,7 @@
           <a:ln/>
         </p:spPr>
         <p:txBody>
-          <a:bodyPr wrap="none" lIns="0" tIns="0" rIns="0" bIns="0" rtlCol="0" anchor="ctr"/>
+          <a:bodyPr wrap="none" lIns="0" tIns="0" rIns="0" bIns="0" rtlCol="0" anchor="t"/>
           <a:lstStyle/>
           <a:p>
             <a:pPr algn="ctr" indent="0" marL="0" eaLnBrk="1" latinLnBrk="0" hangingPunct="1">
@@ -11922,7 +11922,7 @@
           <a:ln/>
         </p:spPr>
         <p:txBody>
-          <a:bodyPr wrap="none" lIns="0" tIns="0" rIns="0" bIns="0" rtlCol="0" anchor="ctr"/>
+          <a:bodyPr wrap="none" lIns="0" tIns="0" rIns="0" bIns="0" rtlCol="0" anchor="t"/>
           <a:lstStyle/>
           <a:p>
             <a:pPr algn="l" indent="0" marL="0" eaLnBrk="1" latinLnBrk="0" hangingPunct="1">
@@ -11966,7 +11966,7 @@
           <a:ln/>
         </p:spPr>
         <p:txBody>
-          <a:bodyPr wrap="none" lIns="0" tIns="0" rIns="0" bIns="0" rtlCol="0" anchor="ctr"/>
+          <a:bodyPr wrap="none" lIns="0" tIns="0" rIns="0" bIns="0" rtlCol="0" anchor="t"/>
           <a:lstStyle/>
           <a:p>
             <a:pPr algn="r" indent="0" marL="0" eaLnBrk="1" latinLnBrk="0" hangingPunct="1">
@@ -12015,7 +12015,7 @@
           <a:ln/>
         </p:spPr>
         <p:txBody>
-          <a:bodyPr wrap="none" lIns="0" tIns="0" rIns="0" bIns="0" rtlCol="0" anchor="ctr"/>
+          <a:bodyPr wrap="none" lIns="0" tIns="0" rIns="0" bIns="0" rtlCol="0" anchor="t"/>
           <a:lstStyle/>
           <a:p>
             <a:pPr algn="l" indent="0" marL="0" eaLnBrk="1" latinLnBrk="0" hangingPunct="1">
@@ -12197,7 +12197,7 @@
           <a:ln/>
         </p:spPr>
         <p:txBody>
-          <a:bodyPr wrap="none" lIns="0" tIns="0" rIns="0" bIns="0" rtlCol="0" anchor="ctr"/>
+          <a:bodyPr wrap="none" lIns="0" tIns="0" rIns="0" bIns="0" rtlCol="0" anchor="t"/>
           <a:lstStyle/>
           <a:p>
             <a:pPr algn="l" indent="0" marL="0" eaLnBrk="1" latinLnBrk="0" hangingPunct="1">
@@ -12236,7 +12236,7 @@
           <a:ln/>
         </p:spPr>
         <p:txBody>
-          <a:bodyPr wrap="none" lIns="0" tIns="0" rIns="0" bIns="0" rtlCol="0" anchor="ctr"/>
+          <a:bodyPr wrap="none" lIns="0" tIns="0" rIns="0" bIns="0" rtlCol="0" anchor="t"/>
           <a:lstStyle/>
           <a:p>
             <a:pPr algn="l" indent="0" marL="0" eaLnBrk="1" latinLnBrk="0" hangingPunct="1">
@@ -12278,7 +12278,7 @@
           <a:ln/>
         </p:spPr>
         <p:txBody>
-          <a:bodyPr wrap="none" lIns="0" tIns="0" rIns="0" bIns="0" rtlCol="0" anchor="ctr"/>
+          <a:bodyPr wrap="none" lIns="0" tIns="0" rIns="0" bIns="0" rtlCol="0" anchor="t"/>
           <a:lstStyle/>
           <a:p>
             <a:pPr algn="l" indent="0" marL="0" eaLnBrk="1" latinLnBrk="0" hangingPunct="1">
@@ -12371,7 +12371,7 @@
           <a:ln/>
         </p:spPr>
         <p:txBody>
-          <a:bodyPr wrap="none" lIns="0" tIns="0" rIns="0" bIns="0" rtlCol="0" anchor="ctr"/>
+          <a:bodyPr wrap="none" lIns="0" tIns="0" rIns="0" bIns="0" rtlCol="0" anchor="t"/>
           <a:lstStyle/>
           <a:p>
             <a:pPr algn="l" indent="0" marL="0" eaLnBrk="1" latinLnBrk="0" hangingPunct="1">
@@ -12494,7 +12494,7 @@
           <a:ln/>
         </p:spPr>
         <p:txBody>
-          <a:bodyPr wrap="none" lIns="0" tIns="0" rIns="0" bIns="0" rtlCol="0" anchor="ctr"/>
+          <a:bodyPr wrap="none" lIns="0" tIns="0" rIns="0" bIns="0" rtlCol="0" anchor="t"/>
           <a:lstStyle/>
           <a:p>
             <a:pPr algn="l" indent="0" marL="0" eaLnBrk="1" latinLnBrk="0" hangingPunct="1">
@@ -12617,7 +12617,7 @@
           <a:ln/>
         </p:spPr>
         <p:txBody>
-          <a:bodyPr wrap="none" lIns="0" tIns="0" rIns="0" bIns="0" rtlCol="0" anchor="ctr"/>
+          <a:bodyPr wrap="none" lIns="0" tIns="0" rIns="0" bIns="0" rtlCol="0" anchor="t"/>
           <a:lstStyle/>
           <a:p>
             <a:pPr algn="ctr" indent="0" marL="0" eaLnBrk="1" latinLnBrk="0" hangingPunct="1">
@@ -12740,7 +12740,7 @@
           <a:ln/>
         </p:spPr>
         <p:txBody>
-          <a:bodyPr wrap="none" lIns="0" tIns="0" rIns="0" bIns="0" rtlCol="0" anchor="ctr"/>
+          <a:bodyPr wrap="none" lIns="0" tIns="0" rIns="0" bIns="0" rtlCol="0" anchor="t"/>
           <a:lstStyle/>
           <a:p>
             <a:pPr algn="ctr" indent="0" marL="0" eaLnBrk="1" latinLnBrk="0" hangingPunct="1">
@@ -12863,7 +12863,7 @@
           <a:ln/>
         </p:spPr>
         <p:txBody>
-          <a:bodyPr wrap="none" lIns="0" tIns="0" rIns="0" bIns="0" rtlCol="0" anchor="ctr"/>
+          <a:bodyPr wrap="none" lIns="0" tIns="0" rIns="0" bIns="0" rtlCol="0" anchor="t"/>
           <a:lstStyle/>
           <a:p>
             <a:pPr algn="ctr" indent="0" marL="0" eaLnBrk="1" latinLnBrk="0" hangingPunct="1">
@@ -12959,7 +12959,7 @@
           <a:ln/>
         </p:spPr>
         <p:txBody>
-          <a:bodyPr wrap="none" lIns="0" tIns="0" rIns="0" bIns="0" rtlCol="0" anchor="ctr"/>
+          <a:bodyPr wrap="none" lIns="0" tIns="0" rIns="0" bIns="0" rtlCol="0" anchor="t"/>
           <a:lstStyle/>
           <a:p>
             <a:pPr algn="l" indent="0" marL="0" eaLnBrk="1" latinLnBrk="0" hangingPunct="1">
@@ -13082,7 +13082,7 @@
           <a:ln/>
         </p:spPr>
         <p:txBody>
-          <a:bodyPr wrap="none" lIns="0" tIns="0" rIns="0" bIns="0" rtlCol="0" anchor="ctr"/>
+          <a:bodyPr wrap="none" lIns="0" tIns="0" rIns="0" bIns="0" rtlCol="0" anchor="t"/>
           <a:lstStyle/>
           <a:p>
             <a:pPr algn="ctr" indent="0" marL="0" eaLnBrk="1" latinLnBrk="0" hangingPunct="1">
@@ -13178,7 +13178,7 @@
           <a:ln/>
         </p:spPr>
         <p:txBody>
-          <a:bodyPr wrap="none" lIns="0" tIns="0" rIns="0" bIns="0" rtlCol="0" anchor="ctr"/>
+          <a:bodyPr wrap="none" lIns="0" tIns="0" rIns="0" bIns="0" rtlCol="0" anchor="t"/>
           <a:lstStyle/>
           <a:p>
             <a:pPr algn="ctr" indent="0" marL="0" eaLnBrk="1" latinLnBrk="0" hangingPunct="1">
@@ -13301,7 +13301,7 @@
           <a:ln/>
         </p:spPr>
         <p:txBody>
-          <a:bodyPr wrap="none" lIns="0" tIns="0" rIns="0" bIns="0" rtlCol="0" anchor="ctr"/>
+          <a:bodyPr wrap="none" lIns="0" tIns="0" rIns="0" bIns="0" rtlCol="0" anchor="t"/>
           <a:lstStyle/>
           <a:p>
             <a:pPr algn="ctr" indent="0" marL="0" eaLnBrk="1" latinLnBrk="0" hangingPunct="1">
@@ -13397,7 +13397,7 @@
           <a:ln/>
         </p:spPr>
         <p:txBody>
-          <a:bodyPr wrap="none" lIns="0" tIns="0" rIns="0" bIns="0" rtlCol="0" anchor="ctr"/>
+          <a:bodyPr wrap="none" lIns="0" tIns="0" rIns="0" bIns="0" rtlCol="0" anchor="t"/>
           <a:lstStyle/>
           <a:p>
             <a:pPr algn="ctr" indent="0" marL="0" eaLnBrk="1" latinLnBrk="0" hangingPunct="1">
@@ -13520,7 +13520,7 @@
           <a:ln/>
         </p:spPr>
         <p:txBody>
-          <a:bodyPr wrap="none" lIns="0" tIns="0" rIns="0" bIns="0" rtlCol="0" anchor="ctr"/>
+          <a:bodyPr wrap="none" lIns="0" tIns="0" rIns="0" bIns="0" rtlCol="0" anchor="t"/>
           <a:lstStyle/>
           <a:p>
             <a:pPr algn="ctr" indent="0" marL="0" eaLnBrk="1" latinLnBrk="0" hangingPunct="1">
@@ -13643,7 +13643,7 @@
           <a:ln/>
         </p:spPr>
         <p:txBody>
-          <a:bodyPr wrap="none" lIns="0" tIns="0" rIns="0" bIns="0" rtlCol="0" anchor="ctr"/>
+          <a:bodyPr wrap="none" lIns="0" tIns="0" rIns="0" bIns="0" rtlCol="0" anchor="t"/>
           <a:lstStyle/>
           <a:p>
             <a:pPr algn="l" indent="0" marL="0" eaLnBrk="1" latinLnBrk="0" hangingPunct="1">
@@ -13739,7 +13739,7 @@
           <a:ln/>
         </p:spPr>
         <p:txBody>
-          <a:bodyPr wrap="none" lIns="0" tIns="0" rIns="0" bIns="0" rtlCol="0" anchor="ctr"/>
+          <a:bodyPr wrap="none" lIns="0" tIns="0" rIns="0" bIns="0" rtlCol="0" anchor="t"/>
           <a:lstStyle/>
           <a:p>
             <a:pPr algn="ctr" indent="0" marL="0" eaLnBrk="1" latinLnBrk="0" hangingPunct="1">
@@ -13862,7 +13862,7 @@
           <a:ln/>
         </p:spPr>
         <p:txBody>
-          <a:bodyPr wrap="none" lIns="0" tIns="0" rIns="0" bIns="0" rtlCol="0" anchor="ctr"/>
+          <a:bodyPr wrap="none" lIns="0" tIns="0" rIns="0" bIns="0" rtlCol="0" anchor="t"/>
           <a:lstStyle/>
           <a:p>
             <a:pPr algn="ctr" indent="0" marL="0" eaLnBrk="1" latinLnBrk="0" hangingPunct="1">
@@ -13958,7 +13958,7 @@
           <a:ln/>
         </p:spPr>
         <p:txBody>
-          <a:bodyPr wrap="none" lIns="0" tIns="0" rIns="0" bIns="0" rtlCol="0" anchor="ctr"/>
+          <a:bodyPr wrap="none" lIns="0" tIns="0" rIns="0" bIns="0" rtlCol="0" anchor="t"/>
           <a:lstStyle/>
           <a:p>
             <a:pPr algn="ctr" indent="0" marL="0" eaLnBrk="1" latinLnBrk="0" hangingPunct="1">
@@ -14081,7 +14081,7 @@
           <a:ln/>
         </p:spPr>
         <p:txBody>
-          <a:bodyPr wrap="none" lIns="0" tIns="0" rIns="0" bIns="0" rtlCol="0" anchor="ctr"/>
+          <a:bodyPr wrap="none" lIns="0" tIns="0" rIns="0" bIns="0" rtlCol="0" anchor="t"/>
           <a:lstStyle/>
           <a:p>
             <a:pPr algn="ctr" indent="0" marL="0" eaLnBrk="1" latinLnBrk="0" hangingPunct="1">
@@ -14177,7 +14177,7 @@
           <a:ln/>
         </p:spPr>
         <p:txBody>
-          <a:bodyPr wrap="none" lIns="0" tIns="0" rIns="0" bIns="0" rtlCol="0" anchor="ctr"/>
+          <a:bodyPr wrap="none" lIns="0" tIns="0" rIns="0" bIns="0" rtlCol="0" anchor="t"/>
           <a:lstStyle/>
           <a:p>
             <a:pPr algn="ctr" indent="0" marL="0" eaLnBrk="1" latinLnBrk="0" hangingPunct="1">
@@ -14273,7 +14273,7 @@
           <a:ln/>
         </p:spPr>
         <p:txBody>
-          <a:bodyPr wrap="none" lIns="0" tIns="0" rIns="0" bIns="0" rtlCol="0" anchor="ctr"/>
+          <a:bodyPr wrap="none" lIns="0" tIns="0" rIns="0" bIns="0" rtlCol="0" anchor="t"/>
           <a:lstStyle/>
           <a:p>
             <a:pPr algn="ctr" indent="0" marL="0" eaLnBrk="1" latinLnBrk="0" hangingPunct="1">
@@ -14396,7 +14396,7 @@
           <a:ln/>
         </p:spPr>
         <p:txBody>
-          <a:bodyPr wrap="none" lIns="0" tIns="0" rIns="0" bIns="0" rtlCol="0" anchor="ctr"/>
+          <a:bodyPr wrap="none" lIns="0" tIns="0" rIns="0" bIns="0" rtlCol="0" anchor="t"/>
           <a:lstStyle/>
           <a:p>
             <a:pPr algn="l" indent="0" marL="0" eaLnBrk="1" latinLnBrk="0" hangingPunct="1">
@@ -14492,7 +14492,7 @@
           <a:ln/>
         </p:spPr>
         <p:txBody>
-          <a:bodyPr wrap="none" lIns="0" tIns="0" rIns="0" bIns="0" rtlCol="0" anchor="ctr"/>
+          <a:bodyPr wrap="none" lIns="0" tIns="0" rIns="0" bIns="0" rtlCol="0" anchor="t"/>
           <a:lstStyle/>
           <a:p>
             <a:pPr algn="ctr" indent="0" marL="0" eaLnBrk="1" latinLnBrk="0" hangingPunct="1">
@@ -14615,7 +14615,7 @@
           <a:ln/>
         </p:spPr>
         <p:txBody>
-          <a:bodyPr wrap="none" lIns="0" tIns="0" rIns="0" bIns="0" rtlCol="0" anchor="ctr"/>
+          <a:bodyPr wrap="none" lIns="0" tIns="0" rIns="0" bIns="0" rtlCol="0" anchor="t"/>
           <a:lstStyle/>
           <a:p>
             <a:pPr algn="ctr" indent="0" marL="0" eaLnBrk="1" latinLnBrk="0" hangingPunct="1">
@@ -14711,7 +14711,7 @@
           <a:ln/>
         </p:spPr>
         <p:txBody>
-          <a:bodyPr wrap="none" lIns="0" tIns="0" rIns="0" bIns="0" rtlCol="0" anchor="ctr"/>
+          <a:bodyPr wrap="none" lIns="0" tIns="0" rIns="0" bIns="0" rtlCol="0" anchor="t"/>
           <a:lstStyle/>
           <a:p>
             <a:pPr algn="ctr" indent="0" marL="0" eaLnBrk="1" latinLnBrk="0" hangingPunct="1">
@@ -14834,7 +14834,7 @@
           <a:ln/>
         </p:spPr>
         <p:txBody>
-          <a:bodyPr wrap="none" lIns="0" tIns="0" rIns="0" bIns="0" rtlCol="0" anchor="ctr"/>
+          <a:bodyPr wrap="none" lIns="0" tIns="0" rIns="0" bIns="0" rtlCol="0" anchor="t"/>
           <a:lstStyle/>
           <a:p>
             <a:pPr algn="ctr" indent="0" marL="0" eaLnBrk="1" latinLnBrk="0" hangingPunct="1">
@@ -14930,7 +14930,7 @@
           <a:ln/>
         </p:spPr>
         <p:txBody>
-          <a:bodyPr wrap="none" lIns="0" tIns="0" rIns="0" bIns="0" rtlCol="0" anchor="ctr"/>
+          <a:bodyPr wrap="none" lIns="0" tIns="0" rIns="0" bIns="0" rtlCol="0" anchor="t"/>
           <a:lstStyle/>
           <a:p>
             <a:pPr algn="ctr" indent="0" marL="0" eaLnBrk="1" latinLnBrk="0" hangingPunct="1">
@@ -15026,7 +15026,7 @@
           <a:ln/>
         </p:spPr>
         <p:txBody>
-          <a:bodyPr wrap="none" lIns="0" tIns="0" rIns="0" bIns="0" rtlCol="0" anchor="ctr"/>
+          <a:bodyPr wrap="none" lIns="0" tIns="0" rIns="0" bIns="0" rtlCol="0" anchor="t"/>
           <a:lstStyle/>
           <a:p>
             <a:pPr algn="ctr" indent="0" marL="0" eaLnBrk="1" latinLnBrk="0" hangingPunct="1">
@@ -15149,7 +15149,7 @@
           <a:ln/>
         </p:spPr>
         <p:txBody>
-          <a:bodyPr wrap="none" lIns="0" tIns="0" rIns="0" bIns="0" rtlCol="0" anchor="ctr"/>
+          <a:bodyPr wrap="none" lIns="0" tIns="0" rIns="0" bIns="0" rtlCol="0" anchor="t"/>
           <a:lstStyle/>
           <a:p>
             <a:pPr algn="l" indent="0" marL="0" eaLnBrk="1" latinLnBrk="0" hangingPunct="1">
@@ -15245,7 +15245,7 @@
           <a:ln/>
         </p:spPr>
         <p:txBody>
-          <a:bodyPr wrap="none" lIns="0" tIns="0" rIns="0" bIns="0" rtlCol="0" anchor="ctr"/>
+          <a:bodyPr wrap="none" lIns="0" tIns="0" rIns="0" bIns="0" rtlCol="0" anchor="t"/>
           <a:lstStyle/>
           <a:p>
             <a:pPr algn="ctr" indent="0" marL="0" eaLnBrk="1" latinLnBrk="0" hangingPunct="1">
@@ -15368,7 +15368,7 @@
           <a:ln/>
         </p:spPr>
         <p:txBody>
-          <a:bodyPr wrap="none" lIns="0" tIns="0" rIns="0" bIns="0" rtlCol="0" anchor="ctr"/>
+          <a:bodyPr wrap="none" lIns="0" tIns="0" rIns="0" bIns="0" rtlCol="0" anchor="t"/>
           <a:lstStyle/>
           <a:p>
             <a:pPr algn="ctr" indent="0" marL="0" eaLnBrk="1" latinLnBrk="0" hangingPunct="1">
@@ -15464,7 +15464,7 @@
           <a:ln/>
         </p:spPr>
         <p:txBody>
-          <a:bodyPr wrap="none" lIns="0" tIns="0" rIns="0" bIns="0" rtlCol="0" anchor="ctr"/>
+          <a:bodyPr wrap="none" lIns="0" tIns="0" rIns="0" bIns="0" rtlCol="0" anchor="t"/>
           <a:lstStyle/>
           <a:p>
             <a:pPr algn="ctr" indent="0" marL="0" eaLnBrk="1" latinLnBrk="0" hangingPunct="1">
@@ -15587,7 +15587,7 @@
           <a:ln/>
         </p:spPr>
         <p:txBody>
-          <a:bodyPr wrap="none" lIns="0" tIns="0" rIns="0" bIns="0" rtlCol="0" anchor="ctr"/>
+          <a:bodyPr wrap="none" lIns="0" tIns="0" rIns="0" bIns="0" rtlCol="0" anchor="t"/>
           <a:lstStyle/>
           <a:p>
             <a:pPr algn="ctr" indent="0" marL="0" eaLnBrk="1" latinLnBrk="0" hangingPunct="1">
@@ -15683,7 +15683,7 @@
           <a:ln/>
         </p:spPr>
         <p:txBody>
-          <a:bodyPr wrap="none" lIns="0" tIns="0" rIns="0" bIns="0" rtlCol="0" anchor="ctr"/>
+          <a:bodyPr wrap="none" lIns="0" tIns="0" rIns="0" bIns="0" rtlCol="0" anchor="t"/>
           <a:lstStyle/>
           <a:p>
             <a:pPr algn="ctr" indent="0" marL="0" eaLnBrk="1" latinLnBrk="0" hangingPunct="1">
@@ -15779,7 +15779,7 @@
           <a:ln/>
         </p:spPr>
         <p:txBody>
-          <a:bodyPr wrap="none" lIns="0" tIns="0" rIns="0" bIns="0" rtlCol="0" anchor="ctr"/>
+          <a:bodyPr wrap="none" lIns="0" tIns="0" rIns="0" bIns="0" rtlCol="0" anchor="t"/>
           <a:lstStyle/>
           <a:p>
             <a:pPr algn="ctr" indent="0" marL="0" eaLnBrk="1" latinLnBrk="0" hangingPunct="1">
@@ -15902,7 +15902,7 @@
           <a:ln/>
         </p:spPr>
         <p:txBody>
-          <a:bodyPr wrap="none" lIns="0" tIns="0" rIns="0" bIns="0" rtlCol="0" anchor="ctr"/>
+          <a:bodyPr wrap="none" lIns="0" tIns="0" rIns="0" bIns="0" rtlCol="0" anchor="t"/>
           <a:lstStyle/>
           <a:p>
             <a:pPr algn="l" indent="0" marL="0" eaLnBrk="1" latinLnBrk="0" hangingPunct="1">
@@ -15998,7 +15998,7 @@
           <a:ln/>
         </p:spPr>
         <p:txBody>
-          <a:bodyPr wrap="none" lIns="0" tIns="0" rIns="0" bIns="0" rtlCol="0" anchor="ctr"/>
+          <a:bodyPr wrap="none" lIns="0" tIns="0" rIns="0" bIns="0" rtlCol="0" anchor="t"/>
           <a:lstStyle/>
           <a:p>
             <a:pPr algn="ctr" indent="0" marL="0" eaLnBrk="1" latinLnBrk="0" hangingPunct="1">
@@ -16121,7 +16121,7 @@
           <a:ln/>
         </p:spPr>
         <p:txBody>
-          <a:bodyPr wrap="none" lIns="0" tIns="0" rIns="0" bIns="0" rtlCol="0" anchor="ctr"/>
+          <a:bodyPr wrap="none" lIns="0" tIns="0" rIns="0" bIns="0" rtlCol="0" anchor="t"/>
           <a:lstStyle/>
           <a:p>
             <a:pPr algn="ctr" indent="0" marL="0" eaLnBrk="1" latinLnBrk="0" hangingPunct="1">
@@ -16217,7 +16217,7 @@
           <a:ln/>
         </p:spPr>
         <p:txBody>
-          <a:bodyPr wrap="none" lIns="0" tIns="0" rIns="0" bIns="0" rtlCol="0" anchor="ctr"/>
+          <a:bodyPr wrap="none" lIns="0" tIns="0" rIns="0" bIns="0" rtlCol="0" anchor="t"/>
           <a:lstStyle/>
           <a:p>
             <a:pPr algn="ctr" indent="0" marL="0" eaLnBrk="1" latinLnBrk="0" hangingPunct="1">
@@ -16340,7 +16340,7 @@
           <a:ln/>
         </p:spPr>
         <p:txBody>
-          <a:bodyPr wrap="none" lIns="0" tIns="0" rIns="0" bIns="0" rtlCol="0" anchor="ctr"/>
+          <a:bodyPr wrap="none" lIns="0" tIns="0" rIns="0" bIns="0" rtlCol="0" anchor="t"/>
           <a:lstStyle/>
           <a:p>
             <a:pPr algn="ctr" indent="0" marL="0" eaLnBrk="1" latinLnBrk="0" hangingPunct="1">
@@ -16436,7 +16436,7 @@
           <a:ln/>
         </p:spPr>
         <p:txBody>
-          <a:bodyPr wrap="none" lIns="0" tIns="0" rIns="0" bIns="0" rtlCol="0" anchor="ctr"/>
+          <a:bodyPr wrap="none" lIns="0" tIns="0" rIns="0" bIns="0" rtlCol="0" anchor="t"/>
           <a:lstStyle/>
           <a:p>
             <a:pPr algn="ctr" indent="0" marL="0" eaLnBrk="1" latinLnBrk="0" hangingPunct="1">
@@ -16532,7 +16532,7 @@
           <a:ln/>
         </p:spPr>
         <p:txBody>
-          <a:bodyPr wrap="none" lIns="0" tIns="0" rIns="0" bIns="0" rtlCol="0" anchor="ctr"/>
+          <a:bodyPr wrap="none" lIns="0" tIns="0" rIns="0" bIns="0" rtlCol="0" anchor="t"/>
           <a:lstStyle/>
           <a:p>
             <a:pPr algn="ctr" indent="0" marL="0" eaLnBrk="1" latinLnBrk="0" hangingPunct="1">
@@ -16655,7 +16655,7 @@
           <a:ln/>
         </p:spPr>
         <p:txBody>
-          <a:bodyPr wrap="none" lIns="0" tIns="0" rIns="0" bIns="0" rtlCol="0" anchor="ctr"/>
+          <a:bodyPr wrap="none" lIns="0" tIns="0" rIns="0" bIns="0" rtlCol="0" anchor="t"/>
           <a:lstStyle/>
           <a:p>
             <a:pPr algn="l" indent="0" marL="0" eaLnBrk="1" latinLnBrk="0" hangingPunct="1">
@@ -16751,7 +16751,7 @@
           <a:ln/>
         </p:spPr>
         <p:txBody>
-          <a:bodyPr wrap="none" lIns="0" tIns="0" rIns="0" bIns="0" rtlCol="0" anchor="ctr"/>
+          <a:bodyPr wrap="none" lIns="0" tIns="0" rIns="0" bIns="0" rtlCol="0" anchor="t"/>
           <a:lstStyle/>
           <a:p>
             <a:pPr algn="ctr" indent="0" marL="0" eaLnBrk="1" latinLnBrk="0" hangingPunct="1">
@@ -16874,7 +16874,7 @@
           <a:ln/>
         </p:spPr>
         <p:txBody>
-          <a:bodyPr wrap="none" lIns="0" tIns="0" rIns="0" bIns="0" rtlCol="0" anchor="ctr"/>
+          <a:bodyPr wrap="none" lIns="0" tIns="0" rIns="0" bIns="0" rtlCol="0" anchor="t"/>
           <a:lstStyle/>
           <a:p>
             <a:pPr algn="ctr" indent="0" marL="0" eaLnBrk="1" latinLnBrk="0" hangingPunct="1">
@@ -16970,7 +16970,7 @@
           <a:ln/>
         </p:spPr>
         <p:txBody>
-          <a:bodyPr wrap="none" lIns="0" tIns="0" rIns="0" bIns="0" rtlCol="0" anchor="ctr"/>
+          <a:bodyPr wrap="none" lIns="0" tIns="0" rIns="0" bIns="0" rtlCol="0" anchor="t"/>
           <a:lstStyle/>
           <a:p>
             <a:pPr algn="ctr" indent="0" marL="0" eaLnBrk="1" latinLnBrk="0" hangingPunct="1">
@@ -17093,7 +17093,7 @@
           <a:ln/>
         </p:spPr>
         <p:txBody>
-          <a:bodyPr wrap="none" lIns="0" tIns="0" rIns="0" bIns="0" rtlCol="0" anchor="ctr"/>
+          <a:bodyPr wrap="none" lIns="0" tIns="0" rIns="0" bIns="0" rtlCol="0" anchor="t"/>
           <a:lstStyle/>
           <a:p>
             <a:pPr algn="ctr" indent="0" marL="0" eaLnBrk="1" latinLnBrk="0" hangingPunct="1">
@@ -17189,7 +17189,7 @@
           <a:ln/>
         </p:spPr>
         <p:txBody>
-          <a:bodyPr wrap="none" lIns="0" tIns="0" rIns="0" bIns="0" rtlCol="0" anchor="ctr"/>
+          <a:bodyPr wrap="none" lIns="0" tIns="0" rIns="0" bIns="0" rtlCol="0" anchor="t"/>
           <a:lstStyle/>
           <a:p>
             <a:pPr algn="ctr" indent="0" marL="0" eaLnBrk="1" latinLnBrk="0" hangingPunct="1">
@@ -17285,7 +17285,7 @@
           <a:ln/>
         </p:spPr>
         <p:txBody>
-          <a:bodyPr wrap="none" lIns="0" tIns="0" rIns="0" bIns="0" rtlCol="0" anchor="ctr"/>
+          <a:bodyPr wrap="none" lIns="0" tIns="0" rIns="0" bIns="0" rtlCol="0" anchor="t"/>
           <a:lstStyle/>
           <a:p>
             <a:pPr algn="ctr" indent="0" marL="0" eaLnBrk="1" latinLnBrk="0" hangingPunct="1">
@@ -17408,7 +17408,7 @@
           <a:ln/>
         </p:spPr>
         <p:txBody>
-          <a:bodyPr wrap="none" lIns="0" tIns="0" rIns="0" bIns="0" rtlCol="0" anchor="ctr"/>
+          <a:bodyPr wrap="none" lIns="0" tIns="0" rIns="0" bIns="0" rtlCol="0" anchor="t"/>
           <a:lstStyle/>
           <a:p>
             <a:pPr algn="l" indent="0" marL="0" eaLnBrk="1" latinLnBrk="0" hangingPunct="1">
@@ -17504,7 +17504,7 @@
           <a:ln/>
         </p:spPr>
         <p:txBody>
-          <a:bodyPr wrap="none" lIns="0" tIns="0" rIns="0" bIns="0" rtlCol="0" anchor="ctr"/>
+          <a:bodyPr wrap="none" lIns="0" tIns="0" rIns="0" bIns="0" rtlCol="0" anchor="t"/>
           <a:lstStyle/>
           <a:p>
             <a:pPr algn="ctr" indent="0" marL="0" eaLnBrk="1" latinLnBrk="0" hangingPunct="1">
@@ -17627,7 +17627,7 @@
           <a:ln/>
         </p:spPr>
         <p:txBody>
-          <a:bodyPr wrap="none" lIns="0" tIns="0" rIns="0" bIns="0" rtlCol="0" anchor="ctr"/>
+          <a:bodyPr wrap="none" lIns="0" tIns="0" rIns="0" bIns="0" rtlCol="0" anchor="t"/>
           <a:lstStyle/>
           <a:p>
             <a:pPr algn="ctr" indent="0" marL="0" eaLnBrk="1" latinLnBrk="0" hangingPunct="1">
@@ -17723,7 +17723,7 @@
           <a:ln/>
         </p:spPr>
         <p:txBody>
-          <a:bodyPr wrap="none" lIns="0" tIns="0" rIns="0" bIns="0" rtlCol="0" anchor="ctr"/>
+          <a:bodyPr wrap="none" lIns="0" tIns="0" rIns="0" bIns="0" rtlCol="0" anchor="t"/>
           <a:lstStyle/>
           <a:p>
             <a:pPr algn="ctr" indent="0" marL="0" eaLnBrk="1" latinLnBrk="0" hangingPunct="1">
@@ -17846,7 +17846,7 @@
           <a:ln/>
         </p:spPr>
         <p:txBody>
-          <a:bodyPr wrap="none" lIns="0" tIns="0" rIns="0" bIns="0" rtlCol="0" anchor="ctr"/>
+          <a:bodyPr wrap="none" lIns="0" tIns="0" rIns="0" bIns="0" rtlCol="0" anchor="t"/>
           <a:lstStyle/>
           <a:p>
             <a:pPr algn="ctr" indent="0" marL="0" eaLnBrk="1" latinLnBrk="0" hangingPunct="1">
@@ -17942,7 +17942,7 @@
           <a:ln/>
         </p:spPr>
         <p:txBody>
-          <a:bodyPr wrap="none" lIns="0" tIns="0" rIns="0" bIns="0" rtlCol="0" anchor="ctr"/>
+          <a:bodyPr wrap="none" lIns="0" tIns="0" rIns="0" bIns="0" rtlCol="0" anchor="t"/>
           <a:lstStyle/>
           <a:p>
             <a:pPr algn="ctr" indent="0" marL="0" eaLnBrk="1" latinLnBrk="0" hangingPunct="1">
@@ -18038,7 +18038,7 @@
           <a:ln/>
         </p:spPr>
         <p:txBody>
-          <a:bodyPr wrap="none" lIns="0" tIns="0" rIns="0" bIns="0" rtlCol="0" anchor="ctr"/>
+          <a:bodyPr wrap="none" lIns="0" tIns="0" rIns="0" bIns="0" rtlCol="0" anchor="t"/>
           <a:lstStyle/>
           <a:p>
             <a:pPr algn="ctr" indent="0" marL="0" eaLnBrk="1" latinLnBrk="0" hangingPunct="1">
@@ -18161,7 +18161,7 @@
           <a:ln/>
         </p:spPr>
         <p:txBody>
-          <a:bodyPr wrap="none" lIns="0" tIns="0" rIns="0" bIns="0" rtlCol="0" anchor="ctr"/>
+          <a:bodyPr wrap="none" lIns="0" tIns="0" rIns="0" bIns="0" rtlCol="0" anchor="t"/>
           <a:lstStyle/>
           <a:p>
             <a:pPr algn="l" indent="0" marL="0" eaLnBrk="1" latinLnBrk="0" hangingPunct="1">
@@ -18257,7 +18257,7 @@
           <a:ln/>
         </p:spPr>
         <p:txBody>
-          <a:bodyPr wrap="none" lIns="0" tIns="0" rIns="0" bIns="0" rtlCol="0" anchor="ctr"/>
+          <a:bodyPr wrap="none" lIns="0" tIns="0" rIns="0" bIns="0" rtlCol="0" anchor="t"/>
           <a:lstStyle/>
           <a:p>
             <a:pPr algn="ctr" indent="0" marL="0" eaLnBrk="1" latinLnBrk="0" hangingPunct="1">
@@ -18380,7 +18380,7 @@
           <a:ln/>
         </p:spPr>
         <p:txBody>
-          <a:bodyPr wrap="none" lIns="0" tIns="0" rIns="0" bIns="0" rtlCol="0" anchor="ctr"/>
+          <a:bodyPr wrap="none" lIns="0" tIns="0" rIns="0" bIns="0" rtlCol="0" anchor="t"/>
           <a:lstStyle/>
           <a:p>
             <a:pPr algn="ctr" indent="0" marL="0" eaLnBrk="1" latinLnBrk="0" hangingPunct="1">
@@ -18476,7 +18476,7 @@
           <a:ln/>
         </p:spPr>
         <p:txBody>
-          <a:bodyPr wrap="none" lIns="0" tIns="0" rIns="0" bIns="0" rtlCol="0" anchor="ctr"/>
+          <a:bodyPr wrap="none" lIns="0" tIns="0" rIns="0" bIns="0" rtlCol="0" anchor="t"/>
           <a:lstStyle/>
           <a:p>
             <a:pPr algn="ctr" indent="0" marL="0" eaLnBrk="1" latinLnBrk="0" hangingPunct="1">
@@ -18599,7 +18599,7 @@
           <a:ln/>
         </p:spPr>
         <p:txBody>
-          <a:bodyPr wrap="none" lIns="0" tIns="0" rIns="0" bIns="0" rtlCol="0" anchor="ctr"/>
+          <a:bodyPr wrap="none" lIns="0" tIns="0" rIns="0" bIns="0" rtlCol="0" anchor="t"/>
           <a:lstStyle/>
           <a:p>
             <a:pPr algn="ctr" indent="0" marL="0" eaLnBrk="1" latinLnBrk="0" hangingPunct="1">
@@ -18695,7 +18695,7 @@
           <a:ln/>
         </p:spPr>
         <p:txBody>
-          <a:bodyPr wrap="none" lIns="0" tIns="0" rIns="0" bIns="0" rtlCol="0" anchor="ctr"/>
+          <a:bodyPr wrap="none" lIns="0" tIns="0" rIns="0" bIns="0" rtlCol="0" anchor="t"/>
           <a:lstStyle/>
           <a:p>
             <a:pPr algn="ctr" indent="0" marL="0" eaLnBrk="1" latinLnBrk="0" hangingPunct="1">
@@ -18791,7 +18791,7 @@
           <a:ln/>
         </p:spPr>
         <p:txBody>
-          <a:bodyPr wrap="none" lIns="0" tIns="0" rIns="0" bIns="0" rtlCol="0" anchor="ctr"/>
+          <a:bodyPr wrap="none" lIns="0" tIns="0" rIns="0" bIns="0" rtlCol="0" anchor="t"/>
           <a:lstStyle/>
           <a:p>
             <a:pPr algn="ctr" indent="0" marL="0" eaLnBrk="1" latinLnBrk="0" hangingPunct="1">
@@ -18914,7 +18914,7 @@
           <a:ln/>
         </p:spPr>
         <p:txBody>
-          <a:bodyPr wrap="none" lIns="0" tIns="0" rIns="0" bIns="0" rtlCol="0" anchor="ctr"/>
+          <a:bodyPr wrap="none" lIns="0" tIns="0" rIns="0" bIns="0" rtlCol="0" anchor="t"/>
           <a:lstStyle/>
           <a:p>
             <a:pPr algn="l" indent="0" marL="0" eaLnBrk="1" latinLnBrk="0" hangingPunct="1">
@@ -19010,7 +19010,7 @@
           <a:ln/>
         </p:spPr>
         <p:txBody>
-          <a:bodyPr wrap="none" lIns="0" tIns="0" rIns="0" bIns="0" rtlCol="0" anchor="ctr"/>
+          <a:bodyPr wrap="none" lIns="0" tIns="0" rIns="0" bIns="0" rtlCol="0" anchor="t"/>
           <a:lstStyle/>
           <a:p>
             <a:pPr algn="ctr" indent="0" marL="0" eaLnBrk="1" latinLnBrk="0" hangingPunct="1">
@@ -19133,7 +19133,7 @@
           <a:ln/>
         </p:spPr>
         <p:txBody>
-          <a:bodyPr wrap="none" lIns="0" tIns="0" rIns="0" bIns="0" rtlCol="0" anchor="ctr"/>
+          <a:bodyPr wrap="none" lIns="0" tIns="0" rIns="0" bIns="0" rtlCol="0" anchor="t"/>
           <a:lstStyle/>
           <a:p>
             <a:pPr algn="ctr" indent="0" marL="0" eaLnBrk="1" latinLnBrk="0" hangingPunct="1">
@@ -19229,7 +19229,7 @@
           <a:ln/>
         </p:spPr>
         <p:txBody>
-          <a:bodyPr wrap="none" lIns="0" tIns="0" rIns="0" bIns="0" rtlCol="0" anchor="ctr"/>
+          <a:bodyPr wrap="none" lIns="0" tIns="0" rIns="0" bIns="0" rtlCol="0" anchor="t"/>
           <a:lstStyle/>
           <a:p>
             <a:pPr algn="ctr" indent="0" marL="0" eaLnBrk="1" latinLnBrk="0" hangingPunct="1">
@@ -19352,7 +19352,7 @@
           <a:ln/>
         </p:spPr>
         <p:txBody>
-          <a:bodyPr wrap="none" lIns="0" tIns="0" rIns="0" bIns="0" rtlCol="0" anchor="ctr"/>
+          <a:bodyPr wrap="none" lIns="0" tIns="0" rIns="0" bIns="0" rtlCol="0" anchor="t"/>
           <a:lstStyle/>
           <a:p>
             <a:pPr algn="ctr" indent="0" marL="0" eaLnBrk="1" latinLnBrk="0" hangingPunct="1">
@@ -19448,7 +19448,7 @@
           <a:ln/>
         </p:spPr>
         <p:txBody>
-          <a:bodyPr wrap="none" lIns="0" tIns="0" rIns="0" bIns="0" rtlCol="0" anchor="ctr"/>
+          <a:bodyPr wrap="none" lIns="0" tIns="0" rIns="0" bIns="0" rtlCol="0" anchor="t"/>
           <a:lstStyle/>
           <a:p>
             <a:pPr algn="ctr" indent="0" marL="0" eaLnBrk="1" latinLnBrk="0" hangingPunct="1">
@@ -19544,7 +19544,7 @@
           <a:ln/>
         </p:spPr>
         <p:txBody>
-          <a:bodyPr wrap="none" lIns="0" tIns="0" rIns="0" bIns="0" rtlCol="0" anchor="ctr"/>
+          <a:bodyPr wrap="none" lIns="0" tIns="0" rIns="0" bIns="0" rtlCol="0" anchor="t"/>
           <a:lstStyle/>
           <a:p>
             <a:pPr algn="ctr" indent="0" marL="0" eaLnBrk="1" latinLnBrk="0" hangingPunct="1">
@@ -19586,7 +19586,7 @@
           <a:ln/>
         </p:spPr>
         <p:txBody>
-          <a:bodyPr wrap="square" lIns="0" tIns="0" rIns="0" bIns="0" rtlCol="0" anchor="ctr"/>
+          <a:bodyPr wrap="square" lIns="0" tIns="0" rIns="0" bIns="0" rtlCol="0" anchor="t"/>
           <a:lstStyle/>
           <a:p>
             <a:pPr algn="l" indent="0" marL="0" eaLnBrk="1" latinLnBrk="0" hangingPunct="1">
@@ -19695,7 +19695,7 @@
           <a:ln/>
         </p:spPr>
         <p:txBody>
-          <a:bodyPr wrap="none" lIns="0" tIns="0" rIns="0" bIns="0" rtlCol="0" anchor="ctr"/>
+          <a:bodyPr wrap="none" lIns="0" tIns="0" rIns="0" bIns="0" rtlCol="0" anchor="t"/>
           <a:lstStyle/>
           <a:p>
             <a:pPr algn="ctr" indent="0" marL="0" eaLnBrk="1" latinLnBrk="0" hangingPunct="1">
@@ -19737,7 +19737,7 @@
           <a:ln/>
         </p:spPr>
         <p:txBody>
-          <a:bodyPr wrap="none" lIns="0" tIns="0" rIns="0" bIns="0" rtlCol="0" anchor="ctr"/>
+          <a:bodyPr wrap="none" lIns="0" tIns="0" rIns="0" bIns="0" rtlCol="0" anchor="t"/>
           <a:lstStyle/>
           <a:p>
             <a:pPr algn="l" indent="0" marL="0" eaLnBrk="1" latinLnBrk="0" hangingPunct="1">
@@ -19779,7 +19779,7 @@
           <a:ln/>
         </p:spPr>
         <p:txBody>
-          <a:bodyPr wrap="none" lIns="0" tIns="0" rIns="0" bIns="0" rtlCol="0" anchor="ctr"/>
+          <a:bodyPr wrap="none" lIns="0" tIns="0" rIns="0" bIns="0" rtlCol="0" anchor="t"/>
           <a:lstStyle/>
           <a:p>
             <a:pPr algn="r" indent="0" marL="0" eaLnBrk="1" latinLnBrk="0" hangingPunct="1">
@@ -19821,7 +19821,7 @@
           <a:ln/>
         </p:spPr>
         <p:txBody>
-          <a:bodyPr wrap="none" lIns="0" tIns="0" rIns="0" bIns="0" rtlCol="0" anchor="ctr"/>
+          <a:bodyPr wrap="none" lIns="0" tIns="0" rIns="0" bIns="0" rtlCol="0" anchor="t"/>
           <a:lstStyle/>
           <a:p>
             <a:pPr algn="l" indent="0" marL="0" eaLnBrk="1" latinLnBrk="0" hangingPunct="1">
@@ -19946,7 +19946,7 @@
           <a:ln/>
         </p:spPr>
         <p:txBody>
-          <a:bodyPr wrap="none" lIns="0" tIns="0" rIns="0" bIns="0" rtlCol="0" anchor="ctr"/>
+          <a:bodyPr wrap="none" lIns="0" tIns="0" rIns="0" bIns="0" rtlCol="0" anchor="t"/>
           <a:lstStyle/>
           <a:p>
             <a:pPr algn="l" indent="0" marL="0" eaLnBrk="1" latinLnBrk="0" hangingPunct="1">
@@ -19985,7 +19985,7 @@
           <a:ln/>
         </p:spPr>
         <p:txBody>
-          <a:bodyPr wrap="none" lIns="0" tIns="0" rIns="0" bIns="0" rtlCol="0" anchor="ctr"/>
+          <a:bodyPr wrap="none" lIns="0" tIns="0" rIns="0" bIns="0" rtlCol="0" anchor="t"/>
           <a:lstStyle/>
           <a:p>
             <a:pPr algn="l" indent="0" marL="0" eaLnBrk="1" latinLnBrk="0" hangingPunct="1">
@@ -20027,7 +20027,7 @@
           <a:ln/>
         </p:spPr>
         <p:txBody>
-          <a:bodyPr wrap="none" lIns="0" tIns="0" rIns="0" bIns="0" rtlCol="0" anchor="ctr"/>
+          <a:bodyPr wrap="none" lIns="0" tIns="0" rIns="0" bIns="0" rtlCol="0" anchor="t"/>
           <a:lstStyle/>
           <a:p>
             <a:pPr algn="l" indent="0" marL="0" eaLnBrk="1" latinLnBrk="0" hangingPunct="1">
@@ -20093,7 +20093,7 @@
           <a:ln/>
         </p:spPr>
         <p:txBody>
-          <a:bodyPr wrap="none" lIns="0" tIns="0" rIns="0" bIns="0" rtlCol="0" anchor="ctr"/>
+          <a:bodyPr wrap="none" lIns="0" tIns="0" rIns="0" bIns="0" rtlCol="0" anchor="t"/>
           <a:lstStyle/>
           <a:p>
             <a:pPr algn="l" indent="0" marL="0" eaLnBrk="1" latinLnBrk="0" hangingPunct="1">
@@ -20135,7 +20135,7 @@
           <a:ln/>
         </p:spPr>
         <p:txBody>
-          <a:bodyPr wrap="none" lIns="0" tIns="0" rIns="0" bIns="0" rtlCol="0" anchor="ctr"/>
+          <a:bodyPr wrap="none" lIns="0" tIns="0" rIns="0" bIns="0" rtlCol="0" anchor="t"/>
           <a:lstStyle/>
           <a:p>
             <a:pPr algn="l" indent="0" marL="0" eaLnBrk="1" latinLnBrk="0" hangingPunct="1">
@@ -20201,7 +20201,7 @@
           <a:ln/>
         </p:spPr>
         <p:txBody>
-          <a:bodyPr wrap="square" lIns="0" tIns="0" rIns="0" bIns="0" rtlCol="0" anchor="ctr"/>
+          <a:bodyPr wrap="square" lIns="0" tIns="0" rIns="0" bIns="0" rtlCol="0" anchor="t"/>
           <a:lstStyle/>
           <a:p>
             <a:pPr algn="l" indent="0" marL="0" eaLnBrk="1" latinLnBrk="0" hangingPunct="1">
@@ -20263,7 +20263,7 @@
           <a:ln/>
         </p:spPr>
         <p:txBody>
-          <a:bodyPr wrap="none" lIns="0" tIns="0" rIns="0" bIns="0" rtlCol="0" anchor="ctr"/>
+          <a:bodyPr wrap="none" lIns="0" tIns="0" rIns="0" bIns="0" rtlCol="0" anchor="t"/>
           <a:lstStyle/>
           <a:p>
             <a:pPr algn="l" indent="0" marL="0" eaLnBrk="1" latinLnBrk="0" hangingPunct="1">
@@ -20329,7 +20329,7 @@
           <a:ln/>
         </p:spPr>
         <p:txBody>
-          <a:bodyPr wrap="square" lIns="0" tIns="0" rIns="0" bIns="0" rtlCol="0" anchor="ctr"/>
+          <a:bodyPr wrap="square" lIns="0" tIns="0" rIns="0" bIns="0" rtlCol="0" anchor="t"/>
           <a:lstStyle/>
           <a:p>
             <a:pPr algn="l" indent="0" marL="0" eaLnBrk="1" latinLnBrk="0" hangingPunct="1">
@@ -20416,7 +20416,7 @@
           <a:ln/>
         </p:spPr>
         <p:txBody>
-          <a:bodyPr wrap="none" lIns="0" tIns="0" rIns="0" bIns="0" rtlCol="0" anchor="ctr"/>
+          <a:bodyPr wrap="none" lIns="0" tIns="0" rIns="0" bIns="0" rtlCol="0" anchor="t"/>
           <a:lstStyle/>
           <a:p>
             <a:pPr algn="l" indent="0" marL="0" eaLnBrk="1" latinLnBrk="0" hangingPunct="1">
@@ -20482,7 +20482,7 @@
           <a:ln/>
         </p:spPr>
         <p:txBody>
-          <a:bodyPr wrap="none" lIns="0" tIns="0" rIns="0" bIns="0" rtlCol="0" anchor="ctr"/>
+          <a:bodyPr wrap="none" lIns="0" tIns="0" rIns="0" bIns="0" rtlCol="0" anchor="t"/>
           <a:lstStyle/>
           <a:p>
             <a:pPr algn="l" indent="0" marL="0" eaLnBrk="1" latinLnBrk="0" hangingPunct="1">
@@ -20548,7 +20548,7 @@
           <a:ln/>
         </p:spPr>
         <p:txBody>
-          <a:bodyPr wrap="none" lIns="0" tIns="0" rIns="0" bIns="0" rtlCol="0" anchor="ctr"/>
+          <a:bodyPr wrap="none" lIns="0" tIns="0" rIns="0" bIns="0" rtlCol="0" anchor="t"/>
           <a:lstStyle/>
           <a:p>
             <a:pPr algn="l" indent="0" marL="0" eaLnBrk="1" latinLnBrk="0" hangingPunct="1">
@@ -20636,7 +20636,7 @@
           <a:ln/>
         </p:spPr>
         <p:txBody>
-          <a:bodyPr wrap="none" lIns="0" tIns="0" rIns="0" bIns="0" rtlCol="0" anchor="ctr"/>
+          <a:bodyPr wrap="none" lIns="0" tIns="0" rIns="0" bIns="0" rtlCol="0" anchor="t"/>
           <a:lstStyle/>
           <a:p>
             <a:pPr algn="l" indent="0" marL="0" eaLnBrk="1" latinLnBrk="0" hangingPunct="1">
@@ -20702,7 +20702,7 @@
           <a:ln/>
         </p:spPr>
         <p:txBody>
-          <a:bodyPr wrap="none" lIns="0" tIns="0" rIns="0" bIns="0" rtlCol="0" anchor="ctr"/>
+          <a:bodyPr wrap="none" lIns="0" tIns="0" rIns="0" bIns="0" rtlCol="0" anchor="t"/>
           <a:lstStyle/>
           <a:p>
             <a:pPr algn="l" indent="0" marL="0" eaLnBrk="1" latinLnBrk="0" hangingPunct="1">
@@ -20790,7 +20790,7 @@
           <a:ln/>
         </p:spPr>
         <p:txBody>
-          <a:bodyPr wrap="none" lIns="0" tIns="0" rIns="0" bIns="0" rtlCol="0" anchor="ctr"/>
+          <a:bodyPr wrap="none" lIns="0" tIns="0" rIns="0" bIns="0" rtlCol="0" anchor="t"/>
           <a:lstStyle/>
           <a:p>
             <a:pPr algn="l" indent="0" marL="0" eaLnBrk="1" latinLnBrk="0" hangingPunct="1">
@@ -20878,7 +20878,7 @@
           <a:ln/>
         </p:spPr>
         <p:txBody>
-          <a:bodyPr wrap="none" lIns="0" tIns="0" rIns="0" bIns="0" rtlCol="0" anchor="ctr"/>
+          <a:bodyPr wrap="none" lIns="0" tIns="0" rIns="0" bIns="0" rtlCol="0" anchor="t"/>
           <a:lstStyle/>
           <a:p>
             <a:pPr algn="l" indent="0" marL="0" eaLnBrk="1" latinLnBrk="0" hangingPunct="1">
@@ -20920,7 +20920,7 @@
           <a:ln/>
         </p:spPr>
         <p:txBody>
-          <a:bodyPr wrap="none" lIns="0" tIns="0" rIns="0" bIns="0" rtlCol="0" anchor="ctr"/>
+          <a:bodyPr wrap="none" lIns="0" tIns="0" rIns="0" bIns="0" rtlCol="0" anchor="t"/>
           <a:lstStyle/>
           <a:p>
             <a:pPr algn="l" indent="0" marL="0" eaLnBrk="1" latinLnBrk="0" hangingPunct="1">
@@ -20962,7 +20962,7 @@
           <a:ln/>
         </p:spPr>
         <p:txBody>
-          <a:bodyPr wrap="none" lIns="0" tIns="0" rIns="0" bIns="0" rtlCol="0" anchor="ctr"/>
+          <a:bodyPr wrap="none" lIns="0" tIns="0" rIns="0" bIns="0" rtlCol="0" anchor="t"/>
           <a:lstStyle/>
           <a:p>
             <a:pPr algn="l" indent="0" marL="0" eaLnBrk="1" latinLnBrk="0" hangingPunct="1">
@@ -21028,7 +21028,7 @@
           <a:ln/>
         </p:spPr>
         <p:txBody>
-          <a:bodyPr wrap="none" lIns="0" tIns="0" rIns="0" bIns="0" rtlCol="0" anchor="ctr"/>
+          <a:bodyPr wrap="none" lIns="0" tIns="0" rIns="0" bIns="0" rtlCol="0" anchor="t"/>
           <a:lstStyle/>
           <a:p>
             <a:pPr algn="l" indent="0" marL="0" eaLnBrk="1" latinLnBrk="0" hangingPunct="1">
@@ -21070,7 +21070,7 @@
           <a:ln/>
         </p:spPr>
         <p:txBody>
-          <a:bodyPr wrap="none" lIns="0" tIns="0" rIns="0" bIns="0" rtlCol="0" anchor="ctr"/>
+          <a:bodyPr wrap="none" lIns="0" tIns="0" rIns="0" bIns="0" rtlCol="0" anchor="t"/>
           <a:lstStyle/>
           <a:p>
             <a:pPr algn="l" indent="0" marL="0" eaLnBrk="1" latinLnBrk="0" hangingPunct="1">
@@ -21136,7 +21136,7 @@
           <a:ln/>
         </p:spPr>
         <p:txBody>
-          <a:bodyPr wrap="none" lIns="0" tIns="0" rIns="0" bIns="0" rtlCol="0" anchor="ctr"/>
+          <a:bodyPr wrap="none" lIns="0" tIns="0" rIns="0" bIns="0" rtlCol="0" anchor="t"/>
           <a:lstStyle/>
           <a:p>
             <a:pPr algn="l" indent="0" marL="0" eaLnBrk="1" latinLnBrk="0" hangingPunct="1">
@@ -21178,7 +21178,7 @@
           <a:ln/>
         </p:spPr>
         <p:txBody>
-          <a:bodyPr wrap="none" lIns="0" tIns="0" rIns="0" bIns="0" rtlCol="0" anchor="ctr"/>
+          <a:bodyPr wrap="none" lIns="0" tIns="0" rIns="0" bIns="0" rtlCol="0" anchor="t"/>
           <a:lstStyle/>
           <a:p>
             <a:pPr algn="l" indent="0" marL="0" eaLnBrk="1" latinLnBrk="0" hangingPunct="1">
@@ -21244,7 +21244,7 @@
           <a:ln/>
         </p:spPr>
         <p:txBody>
-          <a:bodyPr wrap="none" lIns="0" tIns="0" rIns="0" bIns="0" rtlCol="0" anchor="ctr"/>
+          <a:bodyPr wrap="none" lIns="0" tIns="0" rIns="0" bIns="0" rtlCol="0" anchor="t"/>
           <a:lstStyle/>
           <a:p>
             <a:pPr algn="l" indent="0" marL="0" eaLnBrk="1" latinLnBrk="0" hangingPunct="1">
@@ -21286,7 +21286,7 @@
           <a:ln/>
         </p:spPr>
         <p:txBody>
-          <a:bodyPr wrap="none" lIns="0" tIns="0" rIns="0" bIns="0" rtlCol="0" anchor="ctr"/>
+          <a:bodyPr wrap="none" lIns="0" tIns="0" rIns="0" bIns="0" rtlCol="0" anchor="t"/>
           <a:lstStyle/>
           <a:p>
             <a:pPr algn="l" indent="0" marL="0" eaLnBrk="1" latinLnBrk="0" hangingPunct="1">
@@ -21352,7 +21352,7 @@
           <a:ln/>
         </p:spPr>
         <p:txBody>
-          <a:bodyPr wrap="none" lIns="0" tIns="0" rIns="0" bIns="0" rtlCol="0" anchor="ctr"/>
+          <a:bodyPr wrap="none" lIns="0" tIns="0" rIns="0" bIns="0" rtlCol="0" anchor="t"/>
           <a:lstStyle/>
           <a:p>
             <a:pPr algn="l" indent="0" marL="0" eaLnBrk="1" latinLnBrk="0" hangingPunct="1">
@@ -21394,7 +21394,7 @@
           <a:ln/>
         </p:spPr>
         <p:txBody>
-          <a:bodyPr wrap="none" lIns="0" tIns="0" rIns="0" bIns="0" rtlCol="0" anchor="ctr"/>
+          <a:bodyPr wrap="none" lIns="0" tIns="0" rIns="0" bIns="0" rtlCol="0" anchor="t"/>
           <a:lstStyle/>
           <a:p>
             <a:pPr algn="l" indent="0" marL="0" eaLnBrk="1" latinLnBrk="0" hangingPunct="1">
@@ -21436,7 +21436,7 @@
           <a:ln/>
         </p:spPr>
         <p:txBody>
-          <a:bodyPr wrap="none" lIns="0" tIns="0" rIns="0" bIns="0" rtlCol="0" anchor="ctr"/>
+          <a:bodyPr wrap="none" lIns="0" tIns="0" rIns="0" bIns="0" rtlCol="0" anchor="t"/>
           <a:lstStyle/>
           <a:p>
             <a:pPr algn="l" indent="0" marL="0" eaLnBrk="1" latinLnBrk="0" hangingPunct="1">
@@ -21480,7 +21480,7 @@
           <a:ln/>
         </p:spPr>
         <p:txBody>
-          <a:bodyPr wrap="none" lIns="0" tIns="0" rIns="0" bIns="0" rtlCol="0" anchor="ctr"/>
+          <a:bodyPr wrap="none" lIns="0" tIns="0" rIns="0" bIns="0" rtlCol="0" anchor="t"/>
           <a:lstStyle/>
           <a:p>
             <a:pPr algn="r" indent="0" marL="0" eaLnBrk="1" latinLnBrk="0" hangingPunct="1">
@@ -21529,7 +21529,7 @@
           <a:ln/>
         </p:spPr>
         <p:txBody>
-          <a:bodyPr wrap="none" lIns="0" tIns="0" rIns="0" bIns="0" rtlCol="0" anchor="ctr"/>
+          <a:bodyPr wrap="none" lIns="0" tIns="0" rIns="0" bIns="0" rtlCol="0" anchor="t"/>
           <a:lstStyle/>
           <a:p>
             <a:pPr algn="l" indent="0" marL="0" eaLnBrk="1" latinLnBrk="0" hangingPunct="1">
@@ -21706,7 +21706,7 @@
           <a:ln/>
         </p:spPr>
         <p:txBody>
-          <a:bodyPr wrap="none" lIns="0" tIns="0" rIns="0" bIns="0" rtlCol="0" anchor="ctr"/>
+          <a:bodyPr wrap="none" lIns="0" tIns="0" rIns="0" bIns="0" rtlCol="0" anchor="t"/>
           <a:lstStyle/>
           <a:p>
             <a:pPr algn="l" indent="0" marL="0" eaLnBrk="1" latinLnBrk="0" hangingPunct="1">
@@ -21745,7 +21745,7 @@
           <a:ln/>
         </p:spPr>
         <p:txBody>
-          <a:bodyPr wrap="none" lIns="0" tIns="0" rIns="0" bIns="0" rtlCol="0" anchor="ctr"/>
+          <a:bodyPr wrap="none" lIns="0" tIns="0" rIns="0" bIns="0" rtlCol="0" anchor="t"/>
           <a:lstStyle/>
           <a:p>
             <a:pPr algn="l" indent="0" marL="0" eaLnBrk="1" latinLnBrk="0" hangingPunct="1">
@@ -21787,7 +21787,7 @@
           <a:ln/>
         </p:spPr>
         <p:txBody>
-          <a:bodyPr wrap="none" lIns="0" tIns="0" rIns="0" bIns="0" rtlCol="0" anchor="ctr"/>
+          <a:bodyPr wrap="none" lIns="0" tIns="0" rIns="0" bIns="0" rtlCol="0" anchor="t"/>
           <a:lstStyle/>
           <a:p>
             <a:pPr algn="l" indent="0" marL="0" eaLnBrk="1" latinLnBrk="0" hangingPunct="1">
@@ -21880,7 +21880,7 @@
           <a:ln/>
         </p:spPr>
         <p:txBody>
-          <a:bodyPr wrap="none" lIns="0" tIns="0" rIns="0" bIns="0" rtlCol="0" anchor="ctr"/>
+          <a:bodyPr wrap="none" lIns="0" tIns="0" rIns="0" bIns="0" rtlCol="0" anchor="t"/>
           <a:lstStyle/>
           <a:p>
             <a:pPr algn="l" indent="0" marL="0" eaLnBrk="1" latinLnBrk="0" hangingPunct="1">
@@ -21976,7 +21976,7 @@
           <a:ln/>
         </p:spPr>
         <p:txBody>
-          <a:bodyPr wrap="none" lIns="0" tIns="0" rIns="0" bIns="0" rtlCol="0" anchor="ctr"/>
+          <a:bodyPr wrap="none" lIns="0" tIns="0" rIns="0" bIns="0" rtlCol="0" anchor="t"/>
           <a:lstStyle/>
           <a:p>
             <a:pPr algn="l" indent="0" marL="0" eaLnBrk="1" latinLnBrk="0" hangingPunct="1">
@@ -22018,7 +22018,7 @@
           <a:ln/>
         </p:spPr>
         <p:txBody>
-          <a:bodyPr wrap="none" lIns="0" tIns="0" rIns="0" bIns="0" rtlCol="0" anchor="ctr"/>
+          <a:bodyPr wrap="none" lIns="0" tIns="0" rIns="0" bIns="0" rtlCol="0" anchor="t"/>
           <a:lstStyle/>
           <a:p>
             <a:pPr algn="l" indent="0" marL="0" eaLnBrk="1" latinLnBrk="0" hangingPunct="1">
@@ -22060,7 +22060,7 @@
           <a:ln/>
         </p:spPr>
         <p:txBody>
-          <a:bodyPr wrap="none" lIns="0" tIns="0" rIns="0" bIns="0" rtlCol="0" anchor="ctr"/>
+          <a:bodyPr wrap="none" lIns="0" tIns="0" rIns="0" bIns="0" rtlCol="0" anchor="t"/>
           <a:lstStyle/>
           <a:p>
             <a:pPr algn="l" indent="0" marL="0" eaLnBrk="1" latinLnBrk="0" hangingPunct="1">
@@ -22102,7 +22102,7 @@
           <a:ln/>
         </p:spPr>
         <p:txBody>
-          <a:bodyPr wrap="none" lIns="0" tIns="0" rIns="0" bIns="0" rtlCol="0" anchor="ctr"/>
+          <a:bodyPr wrap="none" lIns="0" tIns="0" rIns="0" bIns="0" rtlCol="0" anchor="t"/>
           <a:lstStyle/>
           <a:p>
             <a:pPr algn="l" indent="0" marL="0" eaLnBrk="1" latinLnBrk="0" hangingPunct="1">
@@ -22144,7 +22144,7 @@
           <a:ln/>
         </p:spPr>
         <p:txBody>
-          <a:bodyPr wrap="none" lIns="0" tIns="0" rIns="0" bIns="0" rtlCol="0" anchor="ctr"/>
+          <a:bodyPr wrap="none" lIns="0" tIns="0" rIns="0" bIns="0" rtlCol="0" anchor="t"/>
           <a:lstStyle/>
           <a:p>
             <a:pPr algn="l" indent="0" marL="0" eaLnBrk="1" latinLnBrk="0" hangingPunct="1">
@@ -22186,7 +22186,7 @@
           <a:ln/>
         </p:spPr>
         <p:txBody>
-          <a:bodyPr wrap="none" lIns="0" tIns="0" rIns="0" bIns="0" rtlCol="0" anchor="ctr"/>
+          <a:bodyPr wrap="none" lIns="0" tIns="0" rIns="0" bIns="0" rtlCol="0" anchor="t"/>
           <a:lstStyle/>
           <a:p>
             <a:pPr algn="l" indent="0" marL="0" eaLnBrk="1" latinLnBrk="0" hangingPunct="1">
@@ -22228,7 +22228,7 @@
           <a:ln/>
         </p:spPr>
         <p:txBody>
-          <a:bodyPr wrap="none" lIns="0" tIns="0" rIns="0" bIns="0" rtlCol="0" anchor="ctr"/>
+          <a:bodyPr wrap="none" lIns="0" tIns="0" rIns="0" bIns="0" rtlCol="0" anchor="t"/>
           <a:lstStyle/>
           <a:p>
             <a:pPr algn="l" indent="0" marL="0" eaLnBrk="1" latinLnBrk="0" hangingPunct="1">
@@ -22270,7 +22270,7 @@
           <a:ln/>
         </p:spPr>
         <p:txBody>
-          <a:bodyPr wrap="none" lIns="0" tIns="0" rIns="0" bIns="0" rtlCol="0" anchor="ctr"/>
+          <a:bodyPr wrap="none" lIns="0" tIns="0" rIns="0" bIns="0" rtlCol="0" anchor="t"/>
           <a:lstStyle/>
           <a:p>
             <a:pPr algn="l" indent="0" marL="0" eaLnBrk="1" latinLnBrk="0" hangingPunct="1">
@@ -22312,7 +22312,7 @@
           <a:ln/>
         </p:spPr>
         <p:txBody>
-          <a:bodyPr wrap="none" lIns="0" tIns="0" rIns="0" bIns="0" rtlCol="0" anchor="ctr"/>
+          <a:bodyPr wrap="none" lIns="0" tIns="0" rIns="0" bIns="0" rtlCol="0" anchor="t"/>
           <a:lstStyle/>
           <a:p>
             <a:pPr algn="l" indent="0" marL="0" eaLnBrk="1" latinLnBrk="0" hangingPunct="1">
@@ -22354,7 +22354,7 @@
           <a:ln/>
         </p:spPr>
         <p:txBody>
-          <a:bodyPr wrap="none" lIns="0" tIns="0" rIns="0" bIns="0" rtlCol="0" anchor="ctr"/>
+          <a:bodyPr wrap="none" lIns="0" tIns="0" rIns="0" bIns="0" rtlCol="0" anchor="t"/>
           <a:lstStyle/>
           <a:p>
             <a:pPr algn="l" indent="0" marL="0" eaLnBrk="1" latinLnBrk="0" hangingPunct="1">
@@ -22423,7 +22423,7 @@
           <a:ln/>
         </p:spPr>
         <p:txBody>
-          <a:bodyPr wrap="none" lIns="0" tIns="0" rIns="0" bIns="0" rtlCol="0" anchor="ctr"/>
+          <a:bodyPr wrap="none" lIns="0" tIns="0" rIns="0" bIns="0" rtlCol="0" anchor="t"/>
           <a:lstStyle/>
           <a:p>
             <a:pPr algn="l" indent="0" marL="0" eaLnBrk="1" latinLnBrk="0" hangingPunct="1">
@@ -22465,7 +22465,7 @@
           <a:ln/>
         </p:spPr>
         <p:txBody>
-          <a:bodyPr wrap="square" lIns="0" tIns="0" rIns="0" bIns="0" rtlCol="0" anchor="ctr"/>
+          <a:bodyPr wrap="square" lIns="0" tIns="0" rIns="0" bIns="0" rtlCol="0" anchor="t"/>
           <a:lstStyle/>
           <a:p>
             <a:pPr algn="just" indent="0" marL="0" eaLnBrk="1" latinLnBrk="0" hangingPunct="1">
@@ -22534,7 +22534,7 @@
           <a:ln/>
         </p:spPr>
         <p:txBody>
-          <a:bodyPr wrap="none" lIns="0" tIns="0" rIns="0" bIns="0" rtlCol="0" anchor="ctr"/>
+          <a:bodyPr wrap="none" lIns="0" tIns="0" rIns="0" bIns="0" rtlCol="0" anchor="t"/>
           <a:lstStyle/>
           <a:p>
             <a:pPr algn="l" indent="0" marL="0" eaLnBrk="1" latinLnBrk="0" hangingPunct="1">
@@ -22576,7 +22576,7 @@
           <a:ln/>
         </p:spPr>
         <p:txBody>
-          <a:bodyPr wrap="square" lIns="0" tIns="0" rIns="0" bIns="0" rtlCol="0" anchor="ctr"/>
+          <a:bodyPr wrap="square" lIns="0" tIns="0" rIns="0" bIns="0" rtlCol="0" anchor="t"/>
           <a:lstStyle/>
           <a:p>
             <a:pPr algn="just" indent="0" marL="0" eaLnBrk="1" latinLnBrk="0" hangingPunct="1">
@@ -22645,7 +22645,7 @@
           <a:ln/>
         </p:spPr>
         <p:txBody>
-          <a:bodyPr wrap="none" lIns="0" tIns="0" rIns="0" bIns="0" rtlCol="0" anchor="ctr"/>
+          <a:bodyPr wrap="none" lIns="0" tIns="0" rIns="0" bIns="0" rtlCol="0" anchor="t"/>
           <a:lstStyle/>
           <a:p>
             <a:pPr algn="l" indent="0" marL="0" eaLnBrk="1" latinLnBrk="0" hangingPunct="1">
@@ -22687,7 +22687,7 @@
           <a:ln/>
         </p:spPr>
         <p:txBody>
-          <a:bodyPr wrap="square" lIns="0" tIns="0" rIns="0" bIns="0" rtlCol="0" anchor="ctr"/>
+          <a:bodyPr wrap="square" lIns="0" tIns="0" rIns="0" bIns="0" rtlCol="0" anchor="t"/>
           <a:lstStyle/>
           <a:p>
             <a:pPr algn="just" indent="0" marL="0" eaLnBrk="1" latinLnBrk="0" hangingPunct="1">
@@ -22729,7 +22729,7 @@
           <a:ln/>
         </p:spPr>
         <p:txBody>
-          <a:bodyPr wrap="none" lIns="0" tIns="0" rIns="0" bIns="0" rtlCol="0" anchor="ctr"/>
+          <a:bodyPr wrap="none" lIns="0" tIns="0" rIns="0" bIns="0" rtlCol="0" anchor="t"/>
           <a:lstStyle/>
           <a:p>
             <a:pPr algn="l" indent="0" marL="0" eaLnBrk="1" latinLnBrk="0" hangingPunct="1">
@@ -22771,7 +22771,7 @@
           <a:ln/>
         </p:spPr>
         <p:txBody>
-          <a:bodyPr wrap="none" lIns="0" tIns="0" rIns="0" bIns="0" rtlCol="0" anchor="ctr"/>
+          <a:bodyPr wrap="none" lIns="0" tIns="0" rIns="0" bIns="0" rtlCol="0" anchor="t"/>
           <a:lstStyle/>
           <a:p>
             <a:pPr algn="r" indent="0" marL="0" eaLnBrk="1" latinLnBrk="0" hangingPunct="1">
@@ -22813,7 +22813,7 @@
           <a:ln/>
         </p:spPr>
         <p:txBody>
-          <a:bodyPr wrap="none" lIns="0" tIns="0" rIns="0" bIns="0" rtlCol="0" anchor="ctr"/>
+          <a:bodyPr wrap="none" lIns="0" tIns="0" rIns="0" bIns="0" rtlCol="0" anchor="t"/>
           <a:lstStyle/>
           <a:p>
             <a:pPr algn="l" indent="0" marL="0" eaLnBrk="1" latinLnBrk="0" hangingPunct="1">
@@ -22995,7 +22995,7 @@
           <a:ln/>
         </p:spPr>
         <p:txBody>
-          <a:bodyPr wrap="none" lIns="0" tIns="0" rIns="0" bIns="0" rtlCol="0" anchor="ctr"/>
+          <a:bodyPr wrap="none" lIns="0" tIns="0" rIns="0" bIns="0" rtlCol="0" anchor="t"/>
           <a:lstStyle/>
           <a:p>
             <a:pPr algn="l" indent="0" marL="0" eaLnBrk="1" latinLnBrk="0" hangingPunct="1">
@@ -23034,7 +23034,7 @@
           <a:ln/>
         </p:spPr>
         <p:txBody>
-          <a:bodyPr wrap="none" lIns="0" tIns="0" rIns="0" bIns="0" rtlCol="0" anchor="ctr"/>
+          <a:bodyPr wrap="none" lIns="0" tIns="0" rIns="0" bIns="0" rtlCol="0" anchor="t"/>
           <a:lstStyle/>
           <a:p>
             <a:pPr algn="l" indent="0" marL="0" eaLnBrk="1" latinLnBrk="0" hangingPunct="1">
@@ -23076,7 +23076,7 @@
           <a:ln/>
         </p:spPr>
         <p:txBody>
-          <a:bodyPr wrap="none" lIns="0" tIns="0" rIns="0" bIns="0" rtlCol="0" anchor="ctr"/>
+          <a:bodyPr wrap="none" lIns="0" tIns="0" rIns="0" bIns="0" rtlCol="0" anchor="t"/>
           <a:lstStyle/>
           <a:p>
             <a:pPr algn="l" indent="0" marL="0" eaLnBrk="1" latinLnBrk="0" hangingPunct="1">
@@ -23169,7 +23169,7 @@
           <a:ln/>
         </p:spPr>
         <p:txBody>
-          <a:bodyPr wrap="none" lIns="0" tIns="0" rIns="0" bIns="0" rtlCol="0" anchor="ctr"/>
+          <a:bodyPr wrap="none" lIns="0" tIns="0" rIns="0" bIns="0" rtlCol="0" anchor="t"/>
           <a:lstStyle/>
           <a:p>
             <a:pPr algn="l" indent="0" marL="0" eaLnBrk="1" latinLnBrk="0" hangingPunct="1">
@@ -23240,7 +23240,7 @@
           <a:ln/>
         </p:spPr>
         <p:txBody>
-          <a:bodyPr wrap="none" lIns="0" tIns="0" rIns="0" bIns="0" rtlCol="0" anchor="ctr"/>
+          <a:bodyPr wrap="none" lIns="0" tIns="0" rIns="0" bIns="0" rtlCol="0" anchor="t"/>
           <a:lstStyle/>
           <a:p>
             <a:pPr algn="l" indent="0" marL="0" eaLnBrk="1" latinLnBrk="0" hangingPunct="1">
@@ -23289,7 +23289,7 @@
           <a:ln/>
         </p:spPr>
         <p:txBody>
-          <a:bodyPr wrap="none" lIns="0" tIns="0" rIns="0" bIns="0" rtlCol="0" anchor="ctr"/>
+          <a:bodyPr wrap="none" lIns="0" tIns="0" rIns="0" bIns="0" rtlCol="0" anchor="t"/>
           <a:lstStyle/>
           <a:p>
             <a:pPr algn="just" marL="243840" indent="-243840" eaLnBrk="1" latinLnBrk="0" hangingPunct="1">
@@ -23332,7 +23332,7 @@
           <a:ln/>
         </p:spPr>
         <p:txBody>
-          <a:bodyPr wrap="none" lIns="0" tIns="0" rIns="0" bIns="0" rtlCol="0" anchor="ctr"/>
+          <a:bodyPr wrap="none" lIns="0" tIns="0" rIns="0" bIns="0" rtlCol="0" anchor="t"/>
           <a:lstStyle/>
           <a:p>
             <a:pPr algn="just" marL="243840" indent="-243840" eaLnBrk="1" latinLnBrk="0" hangingPunct="1">
@@ -23375,7 +23375,7 @@
           <a:ln/>
         </p:spPr>
         <p:txBody>
-          <a:bodyPr wrap="none" lIns="0" tIns="0" rIns="0" bIns="0" rtlCol="0" anchor="ctr"/>
+          <a:bodyPr wrap="none" lIns="0" tIns="0" rIns="0" bIns="0" rtlCol="0" anchor="t"/>
           <a:lstStyle/>
           <a:p>
             <a:pPr algn="just" marL="243840" indent="-243840" eaLnBrk="1" latinLnBrk="0" hangingPunct="1">
@@ -23418,7 +23418,7 @@
           <a:ln/>
         </p:spPr>
         <p:txBody>
-          <a:bodyPr wrap="none" lIns="0" tIns="0" rIns="0" bIns="0" rtlCol="0" anchor="ctr"/>
+          <a:bodyPr wrap="none" lIns="0" tIns="0" rIns="0" bIns="0" rtlCol="0" anchor="t"/>
           <a:lstStyle/>
           <a:p>
             <a:pPr algn="l" indent="0" marL="0" eaLnBrk="1" latinLnBrk="0" hangingPunct="1">
@@ -23489,7 +23489,7 @@
           <a:ln/>
         </p:spPr>
         <p:txBody>
-          <a:bodyPr wrap="none" lIns="0" tIns="0" rIns="0" bIns="0" rtlCol="0" anchor="ctr"/>
+          <a:bodyPr wrap="none" lIns="0" tIns="0" rIns="0" bIns="0" rtlCol="0" anchor="t"/>
           <a:lstStyle/>
           <a:p>
             <a:pPr algn="l" indent="0" marL="0" eaLnBrk="1" latinLnBrk="0" hangingPunct="1">
@@ -23538,7 +23538,7 @@
           <a:ln/>
         </p:spPr>
         <p:txBody>
-          <a:bodyPr wrap="none" lIns="0" tIns="0" rIns="0" bIns="0" rtlCol="0" anchor="ctr"/>
+          <a:bodyPr wrap="none" lIns="0" tIns="0" rIns="0" bIns="0" rtlCol="0" anchor="t"/>
           <a:lstStyle/>
           <a:p>
             <a:pPr algn="just" marL="243840" indent="-243840" eaLnBrk="1" latinLnBrk="0" hangingPunct="1">
@@ -23581,7 +23581,7 @@
           <a:ln/>
         </p:spPr>
         <p:txBody>
-          <a:bodyPr wrap="none" lIns="0" tIns="0" rIns="0" bIns="0" rtlCol="0" anchor="ctr"/>
+          <a:bodyPr wrap="none" lIns="0" tIns="0" rIns="0" bIns="0" rtlCol="0" anchor="t"/>
           <a:lstStyle/>
           <a:p>
             <a:pPr algn="just" marL="243840" indent="-243840" eaLnBrk="1" latinLnBrk="0" hangingPunct="1">
@@ -23624,7 +23624,7 @@
           <a:ln/>
         </p:spPr>
         <p:txBody>
-          <a:bodyPr wrap="none" lIns="0" tIns="0" rIns="0" bIns="0" rtlCol="0" anchor="ctr"/>
+          <a:bodyPr wrap="none" lIns="0" tIns="0" rIns="0" bIns="0" rtlCol="0" anchor="t"/>
           <a:lstStyle/>
           <a:p>
             <a:pPr algn="just" marL="243840" indent="-243840" eaLnBrk="1" latinLnBrk="0" hangingPunct="1">
@@ -23667,7 +23667,7 @@
           <a:ln/>
         </p:spPr>
         <p:txBody>
-          <a:bodyPr wrap="none" lIns="0" tIns="0" rIns="0" bIns="0" rtlCol="0" anchor="ctr"/>
+          <a:bodyPr wrap="none" lIns="0" tIns="0" rIns="0" bIns="0" rtlCol="0" anchor="t"/>
           <a:lstStyle/>
           <a:p>
             <a:pPr algn="l" indent="0" marL="0" eaLnBrk="1" latinLnBrk="0" hangingPunct="1">
@@ -23738,7 +23738,7 @@
           <a:ln/>
         </p:spPr>
         <p:txBody>
-          <a:bodyPr wrap="none" lIns="0" tIns="0" rIns="0" bIns="0" rtlCol="0" anchor="ctr"/>
+          <a:bodyPr wrap="none" lIns="0" tIns="0" rIns="0" bIns="0" rtlCol="0" anchor="t"/>
           <a:lstStyle/>
           <a:p>
             <a:pPr algn="l" indent="0" marL="0" eaLnBrk="1" latinLnBrk="0" hangingPunct="1">
@@ -23787,7 +23787,7 @@
           <a:ln/>
         </p:spPr>
         <p:txBody>
-          <a:bodyPr wrap="none" lIns="0" tIns="0" rIns="0" bIns="0" rtlCol="0" anchor="ctr"/>
+          <a:bodyPr wrap="none" lIns="0" tIns="0" rIns="0" bIns="0" rtlCol="0" anchor="t"/>
           <a:lstStyle/>
           <a:p>
             <a:pPr algn="just" marL="243840" indent="-243840" eaLnBrk="1" latinLnBrk="0" hangingPunct="1">
@@ -23830,7 +23830,7 @@
           <a:ln/>
         </p:spPr>
         <p:txBody>
-          <a:bodyPr wrap="none" lIns="0" tIns="0" rIns="0" bIns="0" rtlCol="0" anchor="ctr"/>
+          <a:bodyPr wrap="none" lIns="0" tIns="0" rIns="0" bIns="0" rtlCol="0" anchor="t"/>
           <a:lstStyle/>
           <a:p>
             <a:pPr algn="just" marL="243840" indent="-243840" eaLnBrk="1" latinLnBrk="0" hangingPunct="1">
@@ -23873,7 +23873,7 @@
           <a:ln/>
         </p:spPr>
         <p:txBody>
-          <a:bodyPr wrap="none" lIns="0" tIns="0" rIns="0" bIns="0" rtlCol="0" anchor="ctr"/>
+          <a:bodyPr wrap="none" lIns="0" tIns="0" rIns="0" bIns="0" rtlCol="0" anchor="t"/>
           <a:lstStyle/>
           <a:p>
             <a:pPr algn="just" marL="243840" indent="-243840" eaLnBrk="1" latinLnBrk="0" hangingPunct="1">
@@ -23916,7 +23916,7 @@
           <a:ln/>
         </p:spPr>
         <p:txBody>
-          <a:bodyPr wrap="none" lIns="0" tIns="0" rIns="0" bIns="0" rtlCol="0" anchor="ctr"/>
+          <a:bodyPr wrap="none" lIns="0" tIns="0" rIns="0" bIns="0" rtlCol="0" anchor="t"/>
           <a:lstStyle/>
           <a:p>
             <a:pPr algn="l" indent="0" marL="0" eaLnBrk="1" latinLnBrk="0" hangingPunct="1">
@@ -23987,7 +23987,7 @@
           <a:ln/>
         </p:spPr>
         <p:txBody>
-          <a:bodyPr wrap="none" lIns="0" tIns="0" rIns="0" bIns="0" rtlCol="0" anchor="ctr"/>
+          <a:bodyPr wrap="none" lIns="0" tIns="0" rIns="0" bIns="0" rtlCol="0" anchor="t"/>
           <a:lstStyle/>
           <a:p>
             <a:pPr algn="l" indent="0" marL="0" eaLnBrk="1" latinLnBrk="0" hangingPunct="1">
@@ -24036,7 +24036,7 @@
           <a:ln/>
         </p:spPr>
         <p:txBody>
-          <a:bodyPr wrap="none" lIns="0" tIns="0" rIns="0" bIns="0" rtlCol="0" anchor="ctr"/>
+          <a:bodyPr wrap="none" lIns="0" tIns="0" rIns="0" bIns="0" rtlCol="0" anchor="t"/>
           <a:lstStyle/>
           <a:p>
             <a:pPr algn="just" marL="243840" indent="-243840" eaLnBrk="1" latinLnBrk="0" hangingPunct="1">
@@ -24079,7 +24079,7 @@
           <a:ln/>
         </p:spPr>
         <p:txBody>
-          <a:bodyPr wrap="none" lIns="0" tIns="0" rIns="0" bIns="0" rtlCol="0" anchor="ctr"/>
+          <a:bodyPr wrap="none" lIns="0" tIns="0" rIns="0" bIns="0" rtlCol="0" anchor="t"/>
           <a:lstStyle/>
           <a:p>
             <a:pPr algn="just" marL="243840" indent="-243840" eaLnBrk="1" latinLnBrk="0" hangingPunct="1">
@@ -24122,7 +24122,7 @@
           <a:ln/>
         </p:spPr>
         <p:txBody>
-          <a:bodyPr wrap="none" lIns="0" tIns="0" rIns="0" bIns="0" rtlCol="0" anchor="ctr"/>
+          <a:bodyPr wrap="none" lIns="0" tIns="0" rIns="0" bIns="0" rtlCol="0" anchor="t"/>
           <a:lstStyle/>
           <a:p>
             <a:pPr algn="just" marL="243840" indent="-243840" eaLnBrk="1" latinLnBrk="0" hangingPunct="1">
@@ -24165,7 +24165,7 @@
           <a:ln/>
         </p:spPr>
         <p:txBody>
-          <a:bodyPr wrap="none" lIns="0" tIns="0" rIns="0" bIns="0" rtlCol="0" anchor="ctr"/>
+          <a:bodyPr wrap="none" lIns="0" tIns="0" rIns="0" bIns="0" rtlCol="0" anchor="t"/>
           <a:lstStyle/>
           <a:p>
             <a:pPr algn="l" indent="0" marL="0" eaLnBrk="1" latinLnBrk="0" hangingPunct="1">
@@ -24207,7 +24207,7 @@
           <a:ln/>
         </p:spPr>
         <p:txBody>
-          <a:bodyPr wrap="none" lIns="0" tIns="0" rIns="0" bIns="0" rtlCol="0" anchor="ctr"/>
+          <a:bodyPr wrap="none" lIns="0" tIns="0" rIns="0" bIns="0" rtlCol="0" anchor="t"/>
           <a:lstStyle/>
           <a:p>
             <a:pPr algn="l" indent="0" marL="0" eaLnBrk="1" latinLnBrk="0" hangingPunct="1">
@@ -24249,7 +24249,7 @@
           <a:ln/>
         </p:spPr>
         <p:txBody>
-          <a:bodyPr wrap="none" lIns="0" tIns="0" rIns="0" bIns="0" rtlCol="0" anchor="ctr"/>
+          <a:bodyPr wrap="none" lIns="0" tIns="0" rIns="0" bIns="0" rtlCol="0" anchor="t"/>
           <a:lstStyle/>
           <a:p>
             <a:pPr algn="l" indent="0" marL="0" eaLnBrk="1" latinLnBrk="0" hangingPunct="1">
@@ -24404,7 +24404,7 @@
           <a:ln/>
         </p:spPr>
         <p:txBody>
-          <a:bodyPr wrap="none" lIns="0" tIns="0" rIns="0" bIns="0" rtlCol="0" anchor="ctr"/>
+          <a:bodyPr wrap="none" lIns="0" tIns="0" rIns="0" bIns="0" rtlCol="0" anchor="t"/>
           <a:lstStyle/>
           <a:p>
             <a:pPr algn="ctr" indent="0" marL="0" eaLnBrk="1" latinLnBrk="0" hangingPunct="1">
@@ -24473,7 +24473,7 @@
           <a:ln/>
         </p:spPr>
         <p:txBody>
-          <a:bodyPr wrap="none" lIns="0" tIns="0" rIns="0" bIns="0" rtlCol="0" anchor="ctr"/>
+          <a:bodyPr wrap="none" lIns="0" tIns="0" rIns="0" bIns="0" rtlCol="0" anchor="t"/>
           <a:lstStyle/>
           <a:p>
             <a:pPr algn="ctr" indent="0" marL="0" eaLnBrk="1" latinLnBrk="0" hangingPunct="1">
@@ -24515,7 +24515,7 @@
           <a:ln/>
         </p:spPr>
         <p:txBody>
-          <a:bodyPr wrap="none" lIns="0" tIns="0" rIns="0" bIns="0" rtlCol="0" anchor="ctr"/>
+          <a:bodyPr wrap="none" lIns="0" tIns="0" rIns="0" bIns="0" rtlCol="0" anchor="t"/>
           <a:lstStyle/>
           <a:p>
             <a:pPr algn="ctr" indent="0" marL="0" eaLnBrk="1" latinLnBrk="0" hangingPunct="1">
@@ -24670,7 +24670,7 @@
           <a:ln/>
         </p:spPr>
         <p:txBody>
-          <a:bodyPr wrap="none" lIns="0" tIns="0" rIns="0" bIns="0" rtlCol="0" anchor="ctr"/>
+          <a:bodyPr wrap="none" lIns="0" tIns="0" rIns="0" bIns="0" rtlCol="0" anchor="t"/>
           <a:lstStyle/>
           <a:p>
             <a:pPr algn="l" indent="0" marL="0" eaLnBrk="1" latinLnBrk="0" hangingPunct="1">
@@ -24709,7 +24709,7 @@
           <a:ln/>
         </p:spPr>
         <p:txBody>
-          <a:bodyPr wrap="none" lIns="0" tIns="0" rIns="0" bIns="0" rtlCol="0" anchor="ctr"/>
+          <a:bodyPr wrap="none" lIns="0" tIns="0" rIns="0" bIns="0" rtlCol="0" anchor="t"/>
           <a:lstStyle/>
           <a:p>
             <a:pPr algn="l" indent="0" marL="0" eaLnBrk="1" latinLnBrk="0" hangingPunct="1">
@@ -24751,7 +24751,7 @@
           <a:ln/>
         </p:spPr>
         <p:txBody>
-          <a:bodyPr wrap="none" lIns="0" tIns="0" rIns="0" bIns="0" rtlCol="0" anchor="ctr"/>
+          <a:bodyPr wrap="none" lIns="0" tIns="0" rIns="0" bIns="0" rtlCol="0" anchor="t"/>
           <a:lstStyle/>
           <a:p>
             <a:pPr algn="l" indent="0" marL="0" eaLnBrk="1" latinLnBrk="0" hangingPunct="1">
@@ -24844,7 +24844,7 @@
           <a:ln/>
         </p:spPr>
         <p:txBody>
-          <a:bodyPr wrap="none" lIns="0" tIns="0" rIns="0" bIns="0" rtlCol="0" anchor="ctr"/>
+          <a:bodyPr wrap="none" lIns="0" tIns="0" rIns="0" bIns="0" rtlCol="0" anchor="t"/>
           <a:lstStyle/>
           <a:p>
             <a:pPr algn="l" indent="0" marL="0" eaLnBrk="1" latinLnBrk="0" hangingPunct="1">
@@ -24940,7 +24940,7 @@
           <a:ln/>
         </p:spPr>
         <p:txBody>
-          <a:bodyPr wrap="none" lIns="0" tIns="0" rIns="0" bIns="0" rtlCol="0" anchor="ctr"/>
+          <a:bodyPr wrap="none" lIns="0" tIns="0" rIns="0" bIns="0" rtlCol="0" anchor="t"/>
           <a:lstStyle/>
           <a:p>
             <a:pPr algn="l" indent="0" marL="0" eaLnBrk="1" latinLnBrk="0" hangingPunct="1">
@@ -24982,7 +24982,7 @@
           <a:ln/>
         </p:spPr>
         <p:txBody>
-          <a:bodyPr wrap="square" lIns="0" tIns="0" rIns="0" bIns="0" rtlCol="0" anchor="ctr"/>
+          <a:bodyPr wrap="square" lIns="0" tIns="0" rIns="0" bIns="0" rtlCol="0" anchor="t"/>
           <a:lstStyle/>
           <a:p>
             <a:pPr algn="just" marL="243840" indent="-243840" eaLnBrk="1" latinLnBrk="0" hangingPunct="1">
@@ -25025,7 +25025,7 @@
           <a:ln/>
         </p:spPr>
         <p:txBody>
-          <a:bodyPr wrap="square" lIns="0" tIns="0" rIns="0" bIns="0" rtlCol="0" anchor="ctr"/>
+          <a:bodyPr wrap="square" lIns="0" tIns="0" rIns="0" bIns="0" rtlCol="0" anchor="t"/>
           <a:lstStyle/>
           <a:p>
             <a:pPr algn="just" marL="243840" indent="-243840" eaLnBrk="1" latinLnBrk="0" hangingPunct="1">
@@ -25068,7 +25068,7 @@
           <a:ln/>
         </p:spPr>
         <p:txBody>
-          <a:bodyPr wrap="square" lIns="0" tIns="0" rIns="0" bIns="0" rtlCol="0" anchor="ctr"/>
+          <a:bodyPr wrap="square" lIns="0" tIns="0" rIns="0" bIns="0" rtlCol="0" anchor="t"/>
           <a:lstStyle/>
           <a:p>
             <a:pPr algn="just" marL="243840" indent="-243840" eaLnBrk="1" latinLnBrk="0" hangingPunct="1">
@@ -25111,7 +25111,7 @@
           <a:ln/>
         </p:spPr>
         <p:txBody>
-          <a:bodyPr wrap="square" lIns="0" tIns="0" rIns="0" bIns="0" rtlCol="0" anchor="ctr"/>
+          <a:bodyPr wrap="square" lIns="0" tIns="0" rIns="0" bIns="0" rtlCol="0" anchor="t"/>
           <a:lstStyle/>
           <a:p>
             <a:pPr algn="just" marL="243840" indent="-243840" eaLnBrk="1" latinLnBrk="0" hangingPunct="1">
@@ -25208,7 +25208,7 @@
           <a:ln/>
         </p:spPr>
         <p:txBody>
-          <a:bodyPr wrap="none" lIns="0" tIns="0" rIns="0" bIns="0" rtlCol="0" anchor="ctr"/>
+          <a:bodyPr wrap="none" lIns="0" tIns="0" rIns="0" bIns="0" rtlCol="0" anchor="t"/>
           <a:lstStyle/>
           <a:p>
             <a:pPr algn="l" indent="0" marL="0" eaLnBrk="1" latinLnBrk="0" hangingPunct="1">
@@ -25250,7 +25250,7 @@
           <a:ln/>
         </p:spPr>
         <p:txBody>
-          <a:bodyPr wrap="square" lIns="0" tIns="0" rIns="0" bIns="0" rtlCol="0" anchor="ctr"/>
+          <a:bodyPr wrap="square" lIns="0" tIns="0" rIns="0" bIns="0" rtlCol="0" anchor="t"/>
           <a:lstStyle/>
           <a:p>
             <a:pPr algn="just" marL="243840" indent="-243840" eaLnBrk="1" latinLnBrk="0" hangingPunct="1">
@@ -25293,7 +25293,7 @@
           <a:ln/>
         </p:spPr>
         <p:txBody>
-          <a:bodyPr wrap="square" lIns="0" tIns="0" rIns="0" bIns="0" rtlCol="0" anchor="ctr"/>
+          <a:bodyPr wrap="square" lIns="0" tIns="0" rIns="0" bIns="0" rtlCol="0" anchor="t"/>
           <a:lstStyle/>
           <a:p>
             <a:pPr algn="just" marL="243840" indent="-243840" eaLnBrk="1" latinLnBrk="0" hangingPunct="1">
@@ -25336,7 +25336,7 @@
           <a:ln/>
         </p:spPr>
         <p:txBody>
-          <a:bodyPr wrap="square" lIns="0" tIns="0" rIns="0" bIns="0" rtlCol="0" anchor="ctr"/>
+          <a:bodyPr wrap="square" lIns="0" tIns="0" rIns="0" bIns="0" rtlCol="0" anchor="t"/>
           <a:lstStyle/>
           <a:p>
             <a:pPr algn="just" marL="243840" indent="-243840" eaLnBrk="1" latinLnBrk="0" hangingPunct="1">
@@ -25379,7 +25379,7 @@
           <a:ln/>
         </p:spPr>
         <p:txBody>
-          <a:bodyPr wrap="square" lIns="0" tIns="0" rIns="0" bIns="0" rtlCol="0" anchor="ctr"/>
+          <a:bodyPr wrap="square" lIns="0" tIns="0" rIns="0" bIns="0" rtlCol="0" anchor="t"/>
           <a:lstStyle/>
           <a:p>
             <a:pPr algn="just" marL="243840" indent="-243840" eaLnBrk="1" latinLnBrk="0" hangingPunct="1">
@@ -25476,7 +25476,7 @@
           <a:ln/>
         </p:spPr>
         <p:txBody>
-          <a:bodyPr wrap="none" lIns="0" tIns="0" rIns="0" bIns="0" rtlCol="0" anchor="ctr"/>
+          <a:bodyPr wrap="none" lIns="0" tIns="0" rIns="0" bIns="0" rtlCol="0" anchor="t"/>
           <a:lstStyle/>
           <a:p>
             <a:pPr algn="l" indent="0" marL="0" eaLnBrk="1" latinLnBrk="0" hangingPunct="1">
@@ -25518,7 +25518,7 @@
           <a:ln/>
         </p:spPr>
         <p:txBody>
-          <a:bodyPr wrap="square" lIns="0" tIns="0" rIns="0" bIns="0" rtlCol="0" anchor="ctr"/>
+          <a:bodyPr wrap="square" lIns="0" tIns="0" rIns="0" bIns="0" rtlCol="0" anchor="t"/>
           <a:lstStyle/>
           <a:p>
             <a:pPr algn="just" marL="243840" indent="-243840" eaLnBrk="1" latinLnBrk="0" hangingPunct="1">
@@ -25561,7 +25561,7 @@
           <a:ln/>
         </p:spPr>
         <p:txBody>
-          <a:bodyPr wrap="square" lIns="0" tIns="0" rIns="0" bIns="0" rtlCol="0" anchor="ctr"/>
+          <a:bodyPr wrap="square" lIns="0" tIns="0" rIns="0" bIns="0" rtlCol="0" anchor="t"/>
           <a:lstStyle/>
           <a:p>
             <a:pPr algn="just" marL="243840" indent="-243840" eaLnBrk="1" latinLnBrk="0" hangingPunct="1">
@@ -25604,7 +25604,7 @@
           <a:ln/>
         </p:spPr>
         <p:txBody>
-          <a:bodyPr wrap="square" lIns="0" tIns="0" rIns="0" bIns="0" rtlCol="0" anchor="ctr"/>
+          <a:bodyPr wrap="square" lIns="0" tIns="0" rIns="0" bIns="0" rtlCol="0" anchor="t"/>
           <a:lstStyle/>
           <a:p>
             <a:pPr algn="just" marL="243840" indent="-243840" eaLnBrk="1" latinLnBrk="0" hangingPunct="1">
@@ -25647,7 +25647,7 @@
           <a:ln/>
         </p:spPr>
         <p:txBody>
-          <a:bodyPr wrap="square" lIns="0" tIns="0" rIns="0" bIns="0" rtlCol="0" anchor="ctr"/>
+          <a:bodyPr wrap="square" lIns="0" tIns="0" rIns="0" bIns="0" rtlCol="0" anchor="t"/>
           <a:lstStyle/>
           <a:p>
             <a:pPr algn="just" marL="243840" indent="-243840" eaLnBrk="1" latinLnBrk="0" hangingPunct="1">
@@ -25717,7 +25717,7 @@
           <a:ln/>
         </p:spPr>
         <p:txBody>
-          <a:bodyPr wrap="none" lIns="0" tIns="0" rIns="0" bIns="0" rtlCol="0" anchor="ctr"/>
+          <a:bodyPr wrap="none" lIns="0" tIns="0" rIns="0" bIns="0" rtlCol="0" anchor="t"/>
           <a:lstStyle/>
           <a:p>
             <a:pPr algn="ctr" indent="0" marL="0" eaLnBrk="1" latinLnBrk="0" hangingPunct="1">
@@ -25759,7 +25759,7 @@
           <a:ln/>
         </p:spPr>
         <p:txBody>
-          <a:bodyPr wrap="none" lIns="0" tIns="0" rIns="0" bIns="0" rtlCol="0" anchor="ctr"/>
+          <a:bodyPr wrap="none" lIns="0" tIns="0" rIns="0" bIns="0" rtlCol="0" anchor="t"/>
           <a:lstStyle/>
           <a:p>
             <a:pPr algn="l" indent="0" marL="0" eaLnBrk="1" latinLnBrk="0" hangingPunct="1">
@@ -25801,7 +25801,7 @@
           <a:ln/>
         </p:spPr>
         <p:txBody>
-          <a:bodyPr wrap="none" lIns="0" tIns="0" rIns="0" bIns="0" rtlCol="0" anchor="ctr"/>
+          <a:bodyPr wrap="none" lIns="0" tIns="0" rIns="0" bIns="0" rtlCol="0" anchor="t"/>
           <a:lstStyle/>
           <a:p>
             <a:pPr algn="r" indent="0" marL="0" eaLnBrk="1" latinLnBrk="0" hangingPunct="1">
@@ -25843,7 +25843,7 @@
           <a:ln/>
         </p:spPr>
         <p:txBody>
-          <a:bodyPr wrap="none" lIns="0" tIns="0" rIns="0" bIns="0" rtlCol="0" anchor="ctr"/>
+          <a:bodyPr wrap="none" lIns="0" tIns="0" rIns="0" bIns="0" rtlCol="0" anchor="t"/>
           <a:lstStyle/>
           <a:p>
             <a:pPr algn="l" indent="0" marL="0" eaLnBrk="1" latinLnBrk="0" hangingPunct="1">
@@ -26025,7 +26025,7 @@
           <a:ln/>
         </p:spPr>
         <p:txBody>
-          <a:bodyPr wrap="none" lIns="0" tIns="0" rIns="0" bIns="0" rtlCol="0" anchor="ctr"/>
+          <a:bodyPr wrap="none" lIns="0" tIns="0" rIns="0" bIns="0" rtlCol="0" anchor="t"/>
           <a:lstStyle/>
           <a:p>
             <a:pPr algn="l" indent="0" marL="0" eaLnBrk="1" latinLnBrk="0" hangingPunct="1">
@@ -26064,7 +26064,7 @@
           <a:ln/>
         </p:spPr>
         <p:txBody>
-          <a:bodyPr wrap="none" lIns="0" tIns="0" rIns="0" bIns="0" rtlCol="0" anchor="ctr"/>
+          <a:bodyPr wrap="none" lIns="0" tIns="0" rIns="0" bIns="0" rtlCol="0" anchor="t"/>
           <a:lstStyle/>
           <a:p>
             <a:pPr algn="l" indent="0" marL="0" eaLnBrk="1" latinLnBrk="0" hangingPunct="1">
@@ -26106,7 +26106,7 @@
           <a:ln/>
         </p:spPr>
         <p:txBody>
-          <a:bodyPr wrap="none" lIns="0" tIns="0" rIns="0" bIns="0" rtlCol="0" anchor="ctr"/>
+          <a:bodyPr wrap="none" lIns="0" tIns="0" rIns="0" bIns="0" rtlCol="0" anchor="t"/>
           <a:lstStyle/>
           <a:p>
             <a:pPr algn="l" indent="0" marL="0" eaLnBrk="1" latinLnBrk="0" hangingPunct="1">
@@ -26199,7 +26199,7 @@
           <a:ln/>
         </p:spPr>
         <p:txBody>
-          <a:bodyPr wrap="none" lIns="0" tIns="0" rIns="0" bIns="0" rtlCol="0" anchor="ctr"/>
+          <a:bodyPr wrap="none" lIns="0" tIns="0" rIns="0" bIns="0" rtlCol="0" anchor="t"/>
           <a:lstStyle/>
           <a:p>
             <a:pPr algn="l" indent="0" marL="0" eaLnBrk="1" latinLnBrk="0" hangingPunct="1">
@@ -26289,7 +26289,7 @@
           <a:ln/>
         </p:spPr>
         <p:txBody>
-          <a:bodyPr wrap="none" lIns="0" tIns="0" rIns="0" bIns="0" rtlCol="0" anchor="ctr"/>
+          <a:bodyPr wrap="none" lIns="0" tIns="0" rIns="0" bIns="0" rtlCol="0" anchor="t"/>
           <a:lstStyle/>
           <a:p>
             <a:pPr algn="ctr" indent="0" marL="0" eaLnBrk="1" latinLnBrk="0" hangingPunct="1">
@@ -26331,7 +26331,7 @@
           <a:ln/>
         </p:spPr>
         <p:txBody>
-          <a:bodyPr wrap="none" lIns="0" tIns="0" rIns="0" bIns="0" rtlCol="0" anchor="ctr"/>
+          <a:bodyPr wrap="none" lIns="0" tIns="0" rIns="0" bIns="0" rtlCol="0" anchor="t"/>
           <a:lstStyle/>
           <a:p>
             <a:pPr algn="l" indent="0" marL="0" eaLnBrk="1" latinLnBrk="0" hangingPunct="1">
@@ -26373,7 +26373,7 @@
           <a:ln/>
         </p:spPr>
         <p:txBody>
-          <a:bodyPr wrap="square" lIns="0" tIns="0" rIns="0" bIns="0" rtlCol="0" anchor="ctr"/>
+          <a:bodyPr wrap="square" lIns="0" tIns="0" rIns="0" bIns="0" rtlCol="0" anchor="t"/>
           <a:lstStyle/>
           <a:p>
             <a:pPr algn="just" marL="243840" indent="-243840" eaLnBrk="1" latinLnBrk="0" hangingPunct="1">
@@ -26416,7 +26416,7 @@
           <a:ln/>
         </p:spPr>
         <p:txBody>
-          <a:bodyPr wrap="none" lIns="0" tIns="0" rIns="0" bIns="0" rtlCol="0" anchor="ctr"/>
+          <a:bodyPr wrap="none" lIns="0" tIns="0" rIns="0" bIns="0" rtlCol="0" anchor="t"/>
           <a:lstStyle/>
           <a:p>
             <a:pPr algn="just" marL="243840" indent="-243840" eaLnBrk="1" latinLnBrk="0" hangingPunct="1">
@@ -26459,7 +26459,7 @@
           <a:ln/>
         </p:spPr>
         <p:txBody>
-          <a:bodyPr wrap="square" lIns="0" tIns="0" rIns="0" bIns="0" rtlCol="0" anchor="ctr"/>
+          <a:bodyPr wrap="square" lIns="0" tIns="0" rIns="0" bIns="0" rtlCol="0" anchor="t"/>
           <a:lstStyle/>
           <a:p>
             <a:pPr algn="just" marL="243840" indent="-243840" eaLnBrk="1" latinLnBrk="0" hangingPunct="1">
@@ -26502,7 +26502,7 @@
           <a:ln/>
         </p:spPr>
         <p:txBody>
-          <a:bodyPr wrap="none" lIns="0" tIns="0" rIns="0" bIns="0" rtlCol="0" anchor="ctr"/>
+          <a:bodyPr wrap="none" lIns="0" tIns="0" rIns="0" bIns="0" rtlCol="0" anchor="t"/>
           <a:lstStyle/>
           <a:p>
             <a:pPr algn="just" marL="243840" indent="-243840" eaLnBrk="1" latinLnBrk="0" hangingPunct="1">
@@ -26572,7 +26572,7 @@
           <a:ln/>
         </p:spPr>
         <p:txBody>
-          <a:bodyPr wrap="none" lIns="0" tIns="0" rIns="0" bIns="0" rtlCol="0" anchor="ctr"/>
+          <a:bodyPr wrap="none" lIns="0" tIns="0" rIns="0" bIns="0" rtlCol="0" anchor="t"/>
           <a:lstStyle/>
           <a:p>
             <a:pPr algn="l" indent="0" marL="0" eaLnBrk="1" latinLnBrk="0" hangingPunct="1">
@@ -26614,7 +26614,7 @@
           <a:ln/>
         </p:spPr>
         <p:txBody>
-          <a:bodyPr wrap="none" lIns="0" tIns="0" rIns="0" bIns="0" rtlCol="0" anchor="ctr"/>
+          <a:bodyPr wrap="none" lIns="0" tIns="0" rIns="0" bIns="0" rtlCol="0" anchor="t"/>
           <a:lstStyle/>
           <a:p>
             <a:pPr algn="just" marL="243840" indent="-243840" eaLnBrk="1" latinLnBrk="0" hangingPunct="1">
@@ -26657,7 +26657,7 @@
           <a:ln/>
         </p:spPr>
         <p:txBody>
-          <a:bodyPr wrap="none" lIns="0" tIns="0" rIns="0" bIns="0" rtlCol="0" anchor="ctr"/>
+          <a:bodyPr wrap="none" lIns="0" tIns="0" rIns="0" bIns="0" rtlCol="0" anchor="t"/>
           <a:lstStyle/>
           <a:p>
             <a:pPr algn="just" marL="243840" indent="-243840" eaLnBrk="1" latinLnBrk="0" hangingPunct="1">
@@ -26700,7 +26700,7 @@
           <a:ln/>
         </p:spPr>
         <p:txBody>
-          <a:bodyPr wrap="none" lIns="0" tIns="0" rIns="0" bIns="0" rtlCol="0" anchor="ctr"/>
+          <a:bodyPr wrap="none" lIns="0" tIns="0" rIns="0" bIns="0" rtlCol="0" anchor="t"/>
           <a:lstStyle/>
           <a:p>
             <a:pPr algn="just" marL="243840" indent="-243840" eaLnBrk="1" latinLnBrk="0" hangingPunct="1">
@@ -26743,7 +26743,7 @@
           <a:ln/>
         </p:spPr>
         <p:txBody>
-          <a:bodyPr wrap="none" lIns="0" tIns="0" rIns="0" bIns="0" rtlCol="0" anchor="ctr"/>
+          <a:bodyPr wrap="none" lIns="0" tIns="0" rIns="0" bIns="0" rtlCol="0" anchor="t"/>
           <a:lstStyle/>
           <a:p>
             <a:pPr algn="just" marL="243840" indent="-243840" eaLnBrk="1" latinLnBrk="0" hangingPunct="1">
@@ -26813,7 +26813,7 @@
           <a:ln/>
         </p:spPr>
         <p:txBody>
-          <a:bodyPr wrap="none" lIns="0" tIns="0" rIns="0" bIns="0" rtlCol="0" anchor="ctr"/>
+          <a:bodyPr wrap="none" lIns="0" tIns="0" rIns="0" bIns="0" rtlCol="0" anchor="t"/>
           <a:lstStyle/>
           <a:p>
             <a:pPr algn="ctr" indent="0" marL="0" eaLnBrk="1" latinLnBrk="0" hangingPunct="1">
@@ -26855,7 +26855,7 @@
           <a:ln/>
         </p:spPr>
         <p:txBody>
-          <a:bodyPr wrap="none" lIns="0" tIns="0" rIns="0" bIns="0" rtlCol="0" anchor="ctr"/>
+          <a:bodyPr wrap="none" lIns="0" tIns="0" rIns="0" bIns="0" rtlCol="0" anchor="t"/>
           <a:lstStyle/>
           <a:p>
             <a:pPr algn="l" indent="0" marL="0" eaLnBrk="1" latinLnBrk="0" hangingPunct="1">
@@ -26897,7 +26897,7 @@
           <a:ln/>
         </p:spPr>
         <p:txBody>
-          <a:bodyPr wrap="none" lIns="0" tIns="0" rIns="0" bIns="0" rtlCol="0" anchor="ctr"/>
+          <a:bodyPr wrap="none" lIns="0" tIns="0" rIns="0" bIns="0" rtlCol="0" anchor="t"/>
           <a:lstStyle/>
           <a:p>
             <a:pPr algn="r" indent="0" marL="0" eaLnBrk="1" latinLnBrk="0" hangingPunct="1">
@@ -26939,7 +26939,7 @@
           <a:ln/>
         </p:spPr>
         <p:txBody>
-          <a:bodyPr wrap="none" lIns="0" tIns="0" rIns="0" bIns="0" rtlCol="0" anchor="ctr"/>
+          <a:bodyPr wrap="none" lIns="0" tIns="0" rIns="0" bIns="0" rtlCol="0" anchor="t"/>
           <a:lstStyle/>
           <a:p>
             <a:pPr algn="l" indent="0" marL="0" eaLnBrk="1" latinLnBrk="0" hangingPunct="1">
@@ -27121,7 +27121,7 @@
           <a:ln/>
         </p:spPr>
         <p:txBody>
-          <a:bodyPr wrap="none" lIns="0" tIns="0" rIns="0" bIns="0" rtlCol="0" anchor="ctr"/>
+          <a:bodyPr wrap="none" lIns="0" tIns="0" rIns="0" bIns="0" rtlCol="0" anchor="t"/>
           <a:lstStyle/>
           <a:p>
             <a:pPr algn="l" indent="0" marL="0" eaLnBrk="1" latinLnBrk="0" hangingPunct="1">
@@ -27160,7 +27160,7 @@
           <a:ln/>
         </p:spPr>
         <p:txBody>
-          <a:bodyPr wrap="none" lIns="0" tIns="0" rIns="0" bIns="0" rtlCol="0" anchor="ctr"/>
+          <a:bodyPr wrap="none" lIns="0" tIns="0" rIns="0" bIns="0" rtlCol="0" anchor="t"/>
           <a:lstStyle/>
           <a:p>
             <a:pPr algn="l" indent="0" marL="0" eaLnBrk="1" latinLnBrk="0" hangingPunct="1">
@@ -27202,7 +27202,7 @@
           <a:ln/>
         </p:spPr>
         <p:txBody>
-          <a:bodyPr wrap="none" lIns="0" tIns="0" rIns="0" bIns="0" rtlCol="0" anchor="ctr"/>
+          <a:bodyPr wrap="none" lIns="0" tIns="0" rIns="0" bIns="0" rtlCol="0" anchor="t"/>
           <a:lstStyle/>
           <a:p>
             <a:pPr algn="l" indent="0" marL="0" eaLnBrk="1" latinLnBrk="0" hangingPunct="1">
@@ -27295,7 +27295,7 @@
           <a:ln/>
         </p:spPr>
         <p:txBody>
-          <a:bodyPr wrap="none" lIns="0" tIns="0" rIns="0" bIns="0" rtlCol="0" anchor="ctr"/>
+          <a:bodyPr wrap="none" lIns="0" tIns="0" rIns="0" bIns="0" rtlCol="0" anchor="t"/>
           <a:lstStyle/>
           <a:p>
             <a:pPr algn="l" indent="0" marL="0" eaLnBrk="1" latinLnBrk="0" hangingPunct="1">
@@ -27409,7 +27409,7 @@
           <a:ln/>
         </p:spPr>
         <p:txBody>
-          <a:bodyPr wrap="none" lIns="0" tIns="0" rIns="0" bIns="0" rtlCol="0" anchor="ctr"/>
+          <a:bodyPr wrap="none" lIns="0" tIns="0" rIns="0" bIns="0" rtlCol="0" anchor="t"/>
           <a:lstStyle/>
           <a:p>
             <a:pPr algn="ctr" indent="0" marL="0" eaLnBrk="1" latinLnBrk="0" hangingPunct="1">
@@ -27451,7 +27451,7 @@
           <a:ln/>
         </p:spPr>
         <p:txBody>
-          <a:bodyPr wrap="none" lIns="0" tIns="0" rIns="0" bIns="0" rtlCol="0" anchor="ctr"/>
+          <a:bodyPr wrap="none" lIns="0" tIns="0" rIns="0" bIns="0" rtlCol="0" anchor="t"/>
           <a:lstStyle/>
           <a:p>
             <a:pPr algn="just" marL="243840" indent="-243840" eaLnBrk="1" latinLnBrk="0" hangingPunct="1">
@@ -27494,7 +27494,7 @@
           <a:ln/>
         </p:spPr>
         <p:txBody>
-          <a:bodyPr wrap="none" lIns="0" tIns="0" rIns="0" bIns="0" rtlCol="0" anchor="ctr"/>
+          <a:bodyPr wrap="none" lIns="0" tIns="0" rIns="0" bIns="0" rtlCol="0" anchor="t"/>
           <a:lstStyle/>
           <a:p>
             <a:pPr algn="just" marL="243840" indent="-243840" eaLnBrk="1" latinLnBrk="0" hangingPunct="1">
@@ -27537,7 +27537,7 @@
           <a:ln/>
         </p:spPr>
         <p:txBody>
-          <a:bodyPr wrap="none" lIns="0" tIns="0" rIns="0" bIns="0" rtlCol="0" anchor="ctr"/>
+          <a:bodyPr wrap="none" lIns="0" tIns="0" rIns="0" bIns="0" rtlCol="0" anchor="t"/>
           <a:lstStyle/>
           <a:p>
             <a:pPr algn="just" marL="243840" indent="-243840" eaLnBrk="1" latinLnBrk="0" hangingPunct="1">
@@ -27580,7 +27580,7 @@
           <a:ln/>
         </p:spPr>
         <p:txBody>
-          <a:bodyPr wrap="none" lIns="0" tIns="0" rIns="0" bIns="0" rtlCol="0" anchor="ctr"/>
+          <a:bodyPr wrap="none" lIns="0" tIns="0" rIns="0" bIns="0" rtlCol="0" anchor="t"/>
           <a:lstStyle/>
           <a:p>
             <a:pPr algn="just" marL="243840" indent="-243840" eaLnBrk="1" latinLnBrk="0" hangingPunct="1">
@@ -27695,7 +27695,7 @@
           <a:ln/>
         </p:spPr>
         <p:txBody>
-          <a:bodyPr wrap="none" lIns="0" tIns="0" rIns="0" bIns="0" rtlCol="0" anchor="ctr"/>
+          <a:bodyPr wrap="none" lIns="0" tIns="0" rIns="0" bIns="0" rtlCol="0" anchor="t"/>
           <a:lstStyle/>
           <a:p>
             <a:pPr algn="ctr" indent="0" marL="0" eaLnBrk="1" latinLnBrk="0" hangingPunct="1">
@@ -27737,7 +27737,7 @@
           <a:ln/>
         </p:spPr>
         <p:txBody>
-          <a:bodyPr wrap="square" lIns="0" tIns="0" rIns="0" bIns="0" rtlCol="0" anchor="ctr"/>
+          <a:bodyPr wrap="square" lIns="0" tIns="0" rIns="0" bIns="0" rtlCol="0" anchor="t"/>
           <a:lstStyle/>
           <a:p>
             <a:pPr algn="just" marL="243840" indent="-243840" eaLnBrk="1" latinLnBrk="0" hangingPunct="1">
@@ -27780,7 +27780,7 @@
           <a:ln/>
         </p:spPr>
         <p:txBody>
-          <a:bodyPr wrap="none" lIns="0" tIns="0" rIns="0" bIns="0" rtlCol="0" anchor="ctr"/>
+          <a:bodyPr wrap="none" lIns="0" tIns="0" rIns="0" bIns="0" rtlCol="0" anchor="t"/>
           <a:lstStyle/>
           <a:p>
             <a:pPr algn="just" marL="243840" indent="-243840" eaLnBrk="1" latinLnBrk="0" hangingPunct="1">
@@ -27823,7 +27823,7 @@
           <a:ln/>
         </p:spPr>
         <p:txBody>
-          <a:bodyPr wrap="none" lIns="0" tIns="0" rIns="0" bIns="0" rtlCol="0" anchor="ctr"/>
+          <a:bodyPr wrap="none" lIns="0" tIns="0" rIns="0" bIns="0" rtlCol="0" anchor="t"/>
           <a:lstStyle/>
           <a:p>
             <a:pPr algn="just" marL="243840" indent="-243840" eaLnBrk="1" latinLnBrk="0" hangingPunct="1">
@@ -27866,7 +27866,7 @@
           <a:ln/>
         </p:spPr>
         <p:txBody>
-          <a:bodyPr wrap="none" lIns="0" tIns="0" rIns="0" bIns="0" rtlCol="0" anchor="ctr"/>
+          <a:bodyPr wrap="none" lIns="0" tIns="0" rIns="0" bIns="0" rtlCol="0" anchor="t"/>
           <a:lstStyle/>
           <a:p>
             <a:pPr algn="just" marL="243840" indent="-243840" eaLnBrk="1" latinLnBrk="0" hangingPunct="1">
@@ -27936,7 +27936,7 @@
           <a:ln/>
         </p:spPr>
         <p:txBody>
-          <a:bodyPr wrap="none" lIns="0" tIns="0" rIns="0" bIns="0" rtlCol="0" anchor="ctr"/>
+          <a:bodyPr wrap="none" lIns="0" tIns="0" rIns="0" bIns="0" rtlCol="0" anchor="t"/>
           <a:lstStyle/>
           <a:p>
             <a:pPr algn="l" indent="0" marL="0" eaLnBrk="1" latinLnBrk="0" hangingPunct="1">
@@ -27978,7 +27978,7 @@
           <a:ln/>
         </p:spPr>
         <p:txBody>
-          <a:bodyPr wrap="square" lIns="0" tIns="0" rIns="0" bIns="0" rtlCol="0" anchor="ctr"/>
+          <a:bodyPr wrap="square" lIns="0" tIns="0" rIns="0" bIns="0" rtlCol="0" anchor="t"/>
           <a:lstStyle/>
           <a:p>
             <a:pPr algn="just" indent="0" marL="0" eaLnBrk="1" latinLnBrk="0" hangingPunct="1">
@@ -28047,7 +28047,7 @@
           <a:ln/>
         </p:spPr>
         <p:txBody>
-          <a:bodyPr wrap="none" lIns="0" tIns="0" rIns="0" bIns="0" rtlCol="0" anchor="ctr"/>
+          <a:bodyPr wrap="none" lIns="0" tIns="0" rIns="0" bIns="0" rtlCol="0" anchor="t"/>
           <a:lstStyle/>
           <a:p>
             <a:pPr algn="l" indent="0" marL="0" eaLnBrk="1" latinLnBrk="0" hangingPunct="1">
@@ -28089,7 +28089,7 @@
           <a:ln/>
         </p:spPr>
         <p:txBody>
-          <a:bodyPr wrap="square" lIns="0" tIns="0" rIns="0" bIns="0" rtlCol="0" anchor="ctr"/>
+          <a:bodyPr wrap="square" lIns="0" tIns="0" rIns="0" bIns="0" rtlCol="0" anchor="t"/>
           <a:lstStyle/>
           <a:p>
             <a:pPr algn="just" indent="0" marL="0" eaLnBrk="1" latinLnBrk="0" hangingPunct="1">
@@ -28158,7 +28158,7 @@
           <a:ln/>
         </p:spPr>
         <p:txBody>
-          <a:bodyPr wrap="none" lIns="0" tIns="0" rIns="0" bIns="0" rtlCol="0" anchor="ctr"/>
+          <a:bodyPr wrap="none" lIns="0" tIns="0" rIns="0" bIns="0" rtlCol="0" anchor="t"/>
           <a:lstStyle/>
           <a:p>
             <a:pPr algn="l" indent="0" marL="0" eaLnBrk="1" latinLnBrk="0" hangingPunct="1">
@@ -28200,7 +28200,7 @@
           <a:ln/>
         </p:spPr>
         <p:txBody>
-          <a:bodyPr wrap="square" lIns="0" tIns="0" rIns="0" bIns="0" rtlCol="0" anchor="ctr"/>
+          <a:bodyPr wrap="square" lIns="0" tIns="0" rIns="0" bIns="0" rtlCol="0" anchor="t"/>
           <a:lstStyle/>
           <a:p>
             <a:pPr algn="just" indent="0" marL="0" eaLnBrk="1" latinLnBrk="0" hangingPunct="1">
@@ -28242,7 +28242,7 @@
           <a:ln/>
         </p:spPr>
         <p:txBody>
-          <a:bodyPr wrap="none" lIns="0" tIns="0" rIns="0" bIns="0" rtlCol="0" anchor="ctr"/>
+          <a:bodyPr wrap="none" lIns="0" tIns="0" rIns="0" bIns="0" rtlCol="0" anchor="t"/>
           <a:lstStyle/>
           <a:p>
             <a:pPr algn="l" indent="0" marL="0" eaLnBrk="1" latinLnBrk="0" hangingPunct="1">
@@ -28284,7 +28284,7 @@
           <a:ln/>
         </p:spPr>
         <p:txBody>
-          <a:bodyPr wrap="none" lIns="0" tIns="0" rIns="0" bIns="0" rtlCol="0" anchor="ctr"/>
+          <a:bodyPr wrap="none" lIns="0" tIns="0" rIns="0" bIns="0" rtlCol="0" anchor="t"/>
           <a:lstStyle/>
           <a:p>
             <a:pPr algn="r" indent="0" marL="0" eaLnBrk="1" latinLnBrk="0" hangingPunct="1">
@@ -28326,7 +28326,7 @@
           <a:ln/>
         </p:spPr>
         <p:txBody>
-          <a:bodyPr wrap="none" lIns="0" tIns="0" rIns="0" bIns="0" rtlCol="0" anchor="ctr"/>
+          <a:bodyPr wrap="none" lIns="0" tIns="0" rIns="0" bIns="0" rtlCol="0" anchor="t"/>
           <a:lstStyle/>
           <a:p>
             <a:pPr algn="l" indent="0" marL="0" eaLnBrk="1" latinLnBrk="0" hangingPunct="1">
@@ -28508,7 +28508,7 @@
           <a:ln/>
         </p:spPr>
         <p:txBody>
-          <a:bodyPr wrap="none" lIns="0" tIns="0" rIns="0" bIns="0" rtlCol="0" anchor="ctr"/>
+          <a:bodyPr wrap="none" lIns="0" tIns="0" rIns="0" bIns="0" rtlCol="0" anchor="t"/>
           <a:lstStyle/>
           <a:p>
             <a:pPr algn="l" indent="0" marL="0" eaLnBrk="1" latinLnBrk="0" hangingPunct="1">
@@ -28547,7 +28547,7 @@
           <a:ln/>
         </p:spPr>
         <p:txBody>
-          <a:bodyPr wrap="none" lIns="0" tIns="0" rIns="0" bIns="0" rtlCol="0" anchor="ctr"/>
+          <a:bodyPr wrap="none" lIns="0" tIns="0" rIns="0" bIns="0" rtlCol="0" anchor="t"/>
           <a:lstStyle/>
           <a:p>
             <a:pPr algn="l" indent="0" marL="0" eaLnBrk="1" latinLnBrk="0" hangingPunct="1">
@@ -28589,7 +28589,7 @@
           <a:ln/>
         </p:spPr>
         <p:txBody>
-          <a:bodyPr wrap="none" lIns="0" tIns="0" rIns="0" bIns="0" rtlCol="0" anchor="ctr"/>
+          <a:bodyPr wrap="none" lIns="0" tIns="0" rIns="0" bIns="0" rtlCol="0" anchor="t"/>
           <a:lstStyle/>
           <a:p>
             <a:pPr algn="l" indent="0" marL="0" eaLnBrk="1" latinLnBrk="0" hangingPunct="1">
@@ -28682,7 +28682,7 @@
           <a:ln/>
         </p:spPr>
         <p:txBody>
-          <a:bodyPr wrap="none" lIns="0" tIns="0" rIns="0" bIns="0" rtlCol="0" anchor="ctr"/>
+          <a:bodyPr wrap="none" lIns="0" tIns="0" rIns="0" bIns="0" rtlCol="0" anchor="t"/>
           <a:lstStyle/>
           <a:p>
             <a:pPr algn="l" indent="0" marL="0" eaLnBrk="1" latinLnBrk="0" hangingPunct="1">
@@ -28724,7 +28724,7 @@
           <a:ln/>
         </p:spPr>
         <p:txBody>
-          <a:bodyPr wrap="none" lIns="0" tIns="0" rIns="0" bIns="0" rtlCol="0" anchor="ctr"/>
+          <a:bodyPr wrap="none" lIns="0" tIns="0" rIns="0" bIns="0" rtlCol="0" anchor="t"/>
           <a:lstStyle/>
           <a:p>
             <a:pPr algn="l" indent="0" marL="0" eaLnBrk="1" latinLnBrk="0" hangingPunct="1">
@@ -28793,7 +28793,7 @@
           <a:ln/>
         </p:spPr>
         <p:txBody>
-          <a:bodyPr wrap="none" lIns="0" tIns="0" rIns="0" bIns="0" rtlCol="0" anchor="ctr"/>
+          <a:bodyPr wrap="none" lIns="0" tIns="0" rIns="0" bIns="0" rtlCol="0" anchor="t"/>
           <a:lstStyle/>
           <a:p>
             <a:pPr algn="l" indent="0" marL="0" eaLnBrk="1" latinLnBrk="0" hangingPunct="1">
@@ -28835,7 +28835,7 @@
           <a:ln/>
         </p:spPr>
         <p:txBody>
-          <a:bodyPr wrap="square" lIns="0" tIns="0" rIns="0" bIns="0" rtlCol="0" anchor="ctr"/>
+          <a:bodyPr wrap="square" lIns="0" tIns="0" rIns="0" bIns="0" rtlCol="0" anchor="t"/>
           <a:lstStyle/>
           <a:p>
             <a:pPr algn="just" indent="0" marL="0" eaLnBrk="1" latinLnBrk="0" hangingPunct="1">
@@ -28904,7 +28904,7 @@
           <a:ln/>
         </p:spPr>
         <p:txBody>
-          <a:bodyPr wrap="none" lIns="0" tIns="0" rIns="0" bIns="0" rtlCol="0" anchor="ctr"/>
+          <a:bodyPr wrap="none" lIns="0" tIns="0" rIns="0" bIns="0" rtlCol="0" anchor="t"/>
           <a:lstStyle/>
           <a:p>
             <a:pPr algn="l" indent="0" marL="0" eaLnBrk="1" latinLnBrk="0" hangingPunct="1">
@@ -28946,7 +28946,7 @@
           <a:ln/>
         </p:spPr>
         <p:txBody>
-          <a:bodyPr wrap="square" lIns="0" tIns="0" rIns="0" bIns="0" rtlCol="0" anchor="ctr"/>
+          <a:bodyPr wrap="square" lIns="0" tIns="0" rIns="0" bIns="0" rtlCol="0" anchor="t"/>
           <a:lstStyle/>
           <a:p>
             <a:pPr algn="just" indent="0" marL="0" eaLnBrk="1" latinLnBrk="0" hangingPunct="1">
@@ -29015,7 +29015,7 @@
           <a:ln/>
         </p:spPr>
         <p:txBody>
-          <a:bodyPr wrap="none" lIns="0" tIns="0" rIns="0" bIns="0" rtlCol="0" anchor="ctr"/>
+          <a:bodyPr wrap="none" lIns="0" tIns="0" rIns="0" bIns="0" rtlCol="0" anchor="t"/>
           <a:lstStyle/>
           <a:p>
             <a:pPr algn="l" indent="0" marL="0" eaLnBrk="1" latinLnBrk="0" hangingPunct="1">
@@ -29057,7 +29057,7 @@
           <a:ln/>
         </p:spPr>
         <p:txBody>
-          <a:bodyPr wrap="square" lIns="0" tIns="0" rIns="0" bIns="0" rtlCol="0" anchor="ctr"/>
+          <a:bodyPr wrap="square" lIns="0" tIns="0" rIns="0" bIns="0" rtlCol="0" anchor="t"/>
           <a:lstStyle/>
           <a:p>
             <a:pPr algn="just" indent="0" marL="0" eaLnBrk="1" latinLnBrk="0" hangingPunct="1">
@@ -29099,7 +29099,7 @@
           <a:ln/>
         </p:spPr>
         <p:txBody>
-          <a:bodyPr wrap="none" lIns="0" tIns="0" rIns="0" bIns="0" rtlCol="0" anchor="ctr"/>
+          <a:bodyPr wrap="none" lIns="0" tIns="0" rIns="0" bIns="0" rtlCol="0" anchor="t"/>
           <a:lstStyle/>
           <a:p>
             <a:pPr algn="l" indent="0" marL="0" eaLnBrk="1" latinLnBrk="0" hangingPunct="1">
@@ -29195,7 +29195,7 @@
           <a:ln/>
         </p:spPr>
         <p:txBody>
-          <a:bodyPr wrap="none" lIns="0" tIns="0" rIns="0" bIns="0" rtlCol="0" anchor="ctr"/>
+          <a:bodyPr wrap="none" lIns="0" tIns="0" rIns="0" bIns="0" rtlCol="0" anchor="t"/>
           <a:lstStyle/>
           <a:p>
             <a:pPr algn="l" indent="0" marL="0" eaLnBrk="1" latinLnBrk="0" hangingPunct="1">
@@ -29291,7 +29291,7 @@
           <a:ln/>
         </p:spPr>
         <p:txBody>
-          <a:bodyPr wrap="none" lIns="0" tIns="0" rIns="0" bIns="0" rtlCol="0" anchor="ctr"/>
+          <a:bodyPr wrap="none" lIns="0" tIns="0" rIns="0" bIns="0" rtlCol="0" anchor="t"/>
           <a:lstStyle/>
           <a:p>
             <a:pPr algn="l" indent="0" marL="0" eaLnBrk="1" latinLnBrk="0" hangingPunct="1">
@@ -29387,7 +29387,7 @@
           <a:ln/>
         </p:spPr>
         <p:txBody>
-          <a:bodyPr wrap="none" lIns="0" tIns="0" rIns="0" bIns="0" rtlCol="0" anchor="ctr"/>
+          <a:bodyPr wrap="none" lIns="0" tIns="0" rIns="0" bIns="0" rtlCol="0" anchor="t"/>
           <a:lstStyle/>
           <a:p>
             <a:pPr algn="l" indent="0" marL="0" eaLnBrk="1" latinLnBrk="0" hangingPunct="1">
@@ -29483,7 +29483,7 @@
           <a:ln/>
         </p:spPr>
         <p:txBody>
-          <a:bodyPr wrap="none" lIns="0" tIns="0" rIns="0" bIns="0" rtlCol="0" anchor="ctr"/>
+          <a:bodyPr wrap="none" lIns="0" tIns="0" rIns="0" bIns="0" rtlCol="0" anchor="t"/>
           <a:lstStyle/>
           <a:p>
             <a:pPr algn="l" indent="0" marL="0" eaLnBrk="1" latinLnBrk="0" hangingPunct="1">
@@ -29579,7 +29579,7 @@
           <a:ln/>
         </p:spPr>
         <p:txBody>
-          <a:bodyPr wrap="square" lIns="0" tIns="0" rIns="0" bIns="0" rtlCol="0" anchor="ctr"/>
+          <a:bodyPr wrap="square" lIns="0" tIns="0" rIns="0" bIns="0" rtlCol="0" anchor="t"/>
           <a:lstStyle/>
           <a:p>
             <a:pPr algn="l" indent="0" marL="0" eaLnBrk="1" latinLnBrk="0" hangingPunct="1">
@@ -29695,7 +29695,7 @@
           <a:ln/>
         </p:spPr>
         <p:txBody>
-          <a:bodyPr wrap="square" lIns="0" tIns="0" rIns="0" bIns="0" rtlCol="0" anchor="ctr"/>
+          <a:bodyPr wrap="square" lIns="0" tIns="0" rIns="0" bIns="0" rtlCol="0" anchor="t"/>
           <a:lstStyle/>
           <a:p>
             <a:pPr algn="l" indent="0" marL="0" eaLnBrk="1" latinLnBrk="0" hangingPunct="1">
@@ -29811,7 +29811,7 @@
           <a:ln/>
         </p:spPr>
         <p:txBody>
-          <a:bodyPr wrap="none" lIns="0" tIns="0" rIns="0" bIns="0" rtlCol="0" anchor="ctr"/>
+          <a:bodyPr wrap="none" lIns="0" tIns="0" rIns="0" bIns="0" rtlCol="0" anchor="t"/>
           <a:lstStyle/>
           <a:p>
             <a:pPr algn="l" indent="0" marL="0" eaLnBrk="1" latinLnBrk="0" hangingPunct="1">
@@ -29907,7 +29907,7 @@
           <a:ln/>
         </p:spPr>
         <p:txBody>
-          <a:bodyPr wrap="square" lIns="0" tIns="0" rIns="0" bIns="0" rtlCol="0" anchor="ctr"/>
+          <a:bodyPr wrap="square" lIns="0" tIns="0" rIns="0" bIns="0" rtlCol="0" anchor="t"/>
           <a:lstStyle/>
           <a:p>
             <a:pPr algn="l" indent="0" marL="0" eaLnBrk="1" latinLnBrk="0" hangingPunct="1">
@@ -30023,7 +30023,7 @@
           <a:ln/>
         </p:spPr>
         <p:txBody>
-          <a:bodyPr wrap="square" lIns="0" tIns="0" rIns="0" bIns="0" rtlCol="0" anchor="ctr"/>
+          <a:bodyPr wrap="square" lIns="0" tIns="0" rIns="0" bIns="0" rtlCol="0" anchor="t"/>
           <a:lstStyle/>
           <a:p>
             <a:pPr algn="l" indent="0" marL="0" eaLnBrk="1" latinLnBrk="0" hangingPunct="1">
@@ -30139,7 +30139,7 @@
           <a:ln/>
         </p:spPr>
         <p:txBody>
-          <a:bodyPr wrap="none" lIns="0" tIns="0" rIns="0" bIns="0" rtlCol="0" anchor="ctr"/>
+          <a:bodyPr wrap="none" lIns="0" tIns="0" rIns="0" bIns="0" rtlCol="0" anchor="t"/>
           <a:lstStyle/>
           <a:p>
             <a:pPr algn="l" indent="0" marL="0" eaLnBrk="1" latinLnBrk="0" hangingPunct="1">
@@ -30235,7 +30235,7 @@
           <a:ln/>
         </p:spPr>
         <p:txBody>
-          <a:bodyPr wrap="square" lIns="0" tIns="0" rIns="0" bIns="0" rtlCol="0" anchor="ctr"/>
+          <a:bodyPr wrap="square" lIns="0" tIns="0" rIns="0" bIns="0" rtlCol="0" anchor="t"/>
           <a:lstStyle/>
           <a:p>
             <a:pPr algn="l" indent="0" marL="0" eaLnBrk="1" latinLnBrk="0" hangingPunct="1">
@@ -30351,7 +30351,7 @@
           <a:ln/>
         </p:spPr>
         <p:txBody>
-          <a:bodyPr wrap="square" lIns="0" tIns="0" rIns="0" bIns="0" rtlCol="0" anchor="ctr"/>
+          <a:bodyPr wrap="square" lIns="0" tIns="0" rIns="0" bIns="0" rtlCol="0" anchor="t"/>
           <a:lstStyle/>
           <a:p>
             <a:pPr algn="l" indent="0" marL="0" eaLnBrk="1" latinLnBrk="0" hangingPunct="1">
@@ -30467,7 +30467,7 @@
           <a:ln/>
         </p:spPr>
         <p:txBody>
-          <a:bodyPr wrap="none" lIns="0" tIns="0" rIns="0" bIns="0" rtlCol="0" anchor="ctr"/>
+          <a:bodyPr wrap="none" lIns="0" tIns="0" rIns="0" bIns="0" rtlCol="0" anchor="t"/>
           <a:lstStyle/>
           <a:p>
             <a:pPr algn="l" indent="0" marL="0" eaLnBrk="1" latinLnBrk="0" hangingPunct="1">
@@ -30563,7 +30563,7 @@
           <a:ln/>
         </p:spPr>
         <p:txBody>
-          <a:bodyPr wrap="square" lIns="0" tIns="0" rIns="0" bIns="0" rtlCol="0" anchor="ctr"/>
+          <a:bodyPr wrap="square" lIns="0" tIns="0" rIns="0" bIns="0" rtlCol="0" anchor="t"/>
           <a:lstStyle/>
           <a:p>
             <a:pPr algn="l" indent="0" marL="0" eaLnBrk="1" latinLnBrk="0" hangingPunct="1">
@@ -30679,7 +30679,7 @@
           <a:ln/>
         </p:spPr>
         <p:txBody>
-          <a:bodyPr wrap="square" lIns="0" tIns="0" rIns="0" bIns="0" rtlCol="0" anchor="ctr"/>
+          <a:bodyPr wrap="square" lIns="0" tIns="0" rIns="0" bIns="0" rtlCol="0" anchor="t"/>
           <a:lstStyle/>
           <a:p>
             <a:pPr algn="l" indent="0" marL="0" eaLnBrk="1" latinLnBrk="0" hangingPunct="1">
@@ -30795,7 +30795,7 @@
           <a:ln/>
         </p:spPr>
         <p:txBody>
-          <a:bodyPr wrap="none" lIns="0" tIns="0" rIns="0" bIns="0" rtlCol="0" anchor="ctr"/>
+          <a:bodyPr wrap="none" lIns="0" tIns="0" rIns="0" bIns="0" rtlCol="0" anchor="t"/>
           <a:lstStyle/>
           <a:p>
             <a:pPr algn="just" indent="0" marL="0" eaLnBrk="1" latinLnBrk="0" hangingPunct="1">
@@ -30837,7 +30837,7 @@
           <a:ln/>
         </p:spPr>
         <p:txBody>
-          <a:bodyPr wrap="none" lIns="0" tIns="0" rIns="0" bIns="0" rtlCol="0" anchor="ctr"/>
+          <a:bodyPr wrap="none" lIns="0" tIns="0" rIns="0" bIns="0" rtlCol="0" anchor="t"/>
           <a:lstStyle/>
           <a:p>
             <a:pPr algn="just" indent="0" marL="0" eaLnBrk="1" latinLnBrk="0" hangingPunct="1">
@@ -30879,7 +30879,7 @@
           <a:ln/>
         </p:spPr>
         <p:txBody>
-          <a:bodyPr wrap="none" lIns="0" tIns="0" rIns="0" bIns="0" rtlCol="0" anchor="ctr"/>
+          <a:bodyPr wrap="none" lIns="0" tIns="0" rIns="0" bIns="0" rtlCol="0" anchor="t"/>
           <a:lstStyle/>
           <a:p>
             <a:pPr algn="l" indent="0" marL="0" eaLnBrk="1" latinLnBrk="0" hangingPunct="1">
@@ -30921,7 +30921,7 @@
           <a:ln/>
         </p:spPr>
         <p:txBody>
-          <a:bodyPr wrap="none" lIns="0" tIns="0" rIns="0" bIns="0" rtlCol="0" anchor="ctr"/>
+          <a:bodyPr wrap="none" lIns="0" tIns="0" rIns="0" bIns="0" rtlCol="0" anchor="t"/>
           <a:lstStyle/>
           <a:p>
             <a:pPr algn="r" indent="0" marL="0" eaLnBrk="1" latinLnBrk="0" hangingPunct="1">
@@ -30963,7 +30963,7 @@
           <a:ln/>
         </p:spPr>
         <p:txBody>
-          <a:bodyPr wrap="none" lIns="0" tIns="0" rIns="0" bIns="0" rtlCol="0" anchor="ctr"/>
+          <a:bodyPr wrap="none" lIns="0" tIns="0" rIns="0" bIns="0" rtlCol="0" anchor="t"/>
           <a:lstStyle/>
           <a:p>
             <a:pPr algn="l" indent="0" marL="0" eaLnBrk="1" latinLnBrk="0" hangingPunct="1">
@@ -31118,7 +31118,7 @@
           <a:ln/>
         </p:spPr>
         <p:txBody>
-          <a:bodyPr wrap="none" lIns="0" tIns="0" rIns="0" bIns="0" rtlCol="0" anchor="ctr"/>
+          <a:bodyPr wrap="none" lIns="0" tIns="0" rIns="0" bIns="0" rtlCol="0" anchor="t"/>
           <a:lstStyle/>
           <a:p>
             <a:pPr algn="ctr" indent="0" marL="0" eaLnBrk="1" latinLnBrk="0" hangingPunct="1">
@@ -31187,7 +31187,7 @@
           <a:ln/>
         </p:spPr>
         <p:txBody>
-          <a:bodyPr wrap="none" lIns="0" tIns="0" rIns="0" bIns="0" rtlCol="0" anchor="ctr"/>
+          <a:bodyPr wrap="none" lIns="0" tIns="0" rIns="0" bIns="0" rtlCol="0" anchor="t"/>
           <a:lstStyle/>
           <a:p>
             <a:pPr algn="ctr" indent="0" marL="0" eaLnBrk="1" latinLnBrk="0" hangingPunct="1">
@@ -31229,7 +31229,7 @@
           <a:ln/>
         </p:spPr>
         <p:txBody>
-          <a:bodyPr wrap="none" lIns="0" tIns="0" rIns="0" bIns="0" rtlCol="0" anchor="ctr"/>
+          <a:bodyPr wrap="none" lIns="0" tIns="0" rIns="0" bIns="0" rtlCol="0" anchor="t"/>
           <a:lstStyle/>
           <a:p>
             <a:pPr algn="ctr" indent="0" marL="0" eaLnBrk="1" latinLnBrk="0" hangingPunct="1">
@@ -31384,7 +31384,7 @@
           <a:ln/>
         </p:spPr>
         <p:txBody>
-          <a:bodyPr wrap="none" lIns="0" tIns="0" rIns="0" bIns="0" rtlCol="0" anchor="ctr"/>
+          <a:bodyPr wrap="none" lIns="0" tIns="0" rIns="0" bIns="0" rtlCol="0" anchor="t"/>
           <a:lstStyle/>
           <a:p>
             <a:pPr algn="l" indent="0" marL="0" eaLnBrk="1" latinLnBrk="0" hangingPunct="1">
@@ -31423,7 +31423,7 @@
           <a:ln/>
         </p:spPr>
         <p:txBody>
-          <a:bodyPr wrap="none" lIns="0" tIns="0" rIns="0" bIns="0" rtlCol="0" anchor="ctr"/>
+          <a:bodyPr wrap="none" lIns="0" tIns="0" rIns="0" bIns="0" rtlCol="0" anchor="t"/>
           <a:lstStyle/>
           <a:p>
             <a:pPr algn="l" indent="0" marL="0" eaLnBrk="1" latinLnBrk="0" hangingPunct="1">
@@ -31465,7 +31465,7 @@
           <a:ln/>
         </p:spPr>
         <p:txBody>
-          <a:bodyPr wrap="none" lIns="0" tIns="0" rIns="0" bIns="0" rtlCol="0" anchor="ctr"/>
+          <a:bodyPr wrap="none" lIns="0" tIns="0" rIns="0" bIns="0" rtlCol="0" anchor="t"/>
           <a:lstStyle/>
           <a:p>
             <a:pPr algn="l" indent="0" marL="0" eaLnBrk="1" latinLnBrk="0" hangingPunct="1">
@@ -31558,7 +31558,7 @@
           <a:ln/>
         </p:spPr>
         <p:txBody>
-          <a:bodyPr wrap="none" lIns="0" tIns="0" rIns="0" bIns="0" rtlCol="0" anchor="ctr"/>
+          <a:bodyPr wrap="none" lIns="0" tIns="0" rIns="0" bIns="0" rtlCol="0" anchor="t"/>
           <a:lstStyle/>
           <a:p>
             <a:pPr algn="l" indent="0" marL="0" eaLnBrk="1" latinLnBrk="0" hangingPunct="1">
@@ -31648,7 +31648,7 @@
           <a:ln/>
         </p:spPr>
         <p:txBody>
-          <a:bodyPr wrap="none" lIns="0" tIns="0" rIns="0" bIns="0" rtlCol="0" anchor="ctr"/>
+          <a:bodyPr wrap="none" lIns="0" tIns="0" rIns="0" bIns="0" rtlCol="0" anchor="t"/>
           <a:lstStyle/>
           <a:p>
             <a:pPr algn="ctr" indent="0" marL="0" eaLnBrk="1" latinLnBrk="0" hangingPunct="1">
@@ -31690,7 +31690,7 @@
           <a:ln/>
         </p:spPr>
         <p:txBody>
-          <a:bodyPr wrap="square" lIns="0" tIns="0" rIns="0" bIns="0" rtlCol="0" anchor="ctr"/>
+          <a:bodyPr wrap="square" lIns="0" tIns="0" rIns="0" bIns="0" rtlCol="0" anchor="t"/>
           <a:lstStyle/>
           <a:p>
             <a:pPr algn="just" marL="243840" indent="-243840" eaLnBrk="1" latinLnBrk="0" hangingPunct="1">
@@ -31733,7 +31733,7 @@
           <a:ln/>
         </p:spPr>
         <p:txBody>
-          <a:bodyPr wrap="square" lIns="0" tIns="0" rIns="0" bIns="0" rtlCol="0" anchor="ctr"/>
+          <a:bodyPr wrap="square" lIns="0" tIns="0" rIns="0" bIns="0" rtlCol="0" anchor="t"/>
           <a:lstStyle/>
           <a:p>
             <a:pPr algn="just" marL="243840" indent="-243840" eaLnBrk="1" latinLnBrk="0" hangingPunct="1">
@@ -31776,7 +31776,7 @@
           <a:ln/>
         </p:spPr>
         <p:txBody>
-          <a:bodyPr wrap="square" lIns="0" tIns="0" rIns="0" bIns="0" rtlCol="0" anchor="ctr"/>
+          <a:bodyPr wrap="square" lIns="0" tIns="0" rIns="0" bIns="0" rtlCol="0" anchor="t"/>
           <a:lstStyle/>
           <a:p>
             <a:pPr algn="just" marL="243840" indent="-243840" eaLnBrk="1" latinLnBrk="0" hangingPunct="1">
@@ -31819,7 +31819,7 @@
           <a:ln/>
         </p:spPr>
         <p:txBody>
-          <a:bodyPr wrap="none" lIns="0" tIns="0" rIns="0" bIns="0" rtlCol="0" anchor="ctr"/>
+          <a:bodyPr wrap="none" lIns="0" tIns="0" rIns="0" bIns="0" rtlCol="0" anchor="t"/>
           <a:lstStyle/>
           <a:p>
             <a:pPr algn="just" marL="243840" indent="-243840" eaLnBrk="1" latinLnBrk="0" hangingPunct="1">
@@ -31910,7 +31910,7 @@
           <a:ln/>
         </p:spPr>
         <p:txBody>
-          <a:bodyPr wrap="none" lIns="0" tIns="0" rIns="0" bIns="0" rtlCol="0" anchor="ctr"/>
+          <a:bodyPr wrap="none" lIns="0" tIns="0" rIns="0" bIns="0" rtlCol="0" anchor="t"/>
           <a:lstStyle/>
           <a:p>
             <a:pPr algn="ctr" indent="0" marL="0" eaLnBrk="1" latinLnBrk="0" hangingPunct="1">
@@ -31952,7 +31952,7 @@
           <a:ln/>
         </p:spPr>
         <p:txBody>
-          <a:bodyPr wrap="square" lIns="0" tIns="0" rIns="0" bIns="0" rtlCol="0" anchor="ctr"/>
+          <a:bodyPr wrap="square" lIns="0" tIns="0" rIns="0" bIns="0" rtlCol="0" anchor="t"/>
           <a:lstStyle/>
           <a:p>
             <a:pPr algn="just" marL="243840" indent="-243840" eaLnBrk="1" latinLnBrk="0" hangingPunct="1">
@@ -31995,7 +31995,7 @@
           <a:ln/>
         </p:spPr>
         <p:txBody>
-          <a:bodyPr wrap="square" lIns="0" tIns="0" rIns="0" bIns="0" rtlCol="0" anchor="ctr"/>
+          <a:bodyPr wrap="square" lIns="0" tIns="0" rIns="0" bIns="0" rtlCol="0" anchor="t"/>
           <a:lstStyle/>
           <a:p>
             <a:pPr algn="just" marL="243840" indent="-243840" eaLnBrk="1" latinLnBrk="0" hangingPunct="1">
@@ -32038,7 +32038,7 @@
           <a:ln/>
         </p:spPr>
         <p:txBody>
-          <a:bodyPr wrap="square" lIns="0" tIns="0" rIns="0" bIns="0" rtlCol="0" anchor="ctr"/>
+          <a:bodyPr wrap="square" lIns="0" tIns="0" rIns="0" bIns="0" rtlCol="0" anchor="t"/>
           <a:lstStyle/>
           <a:p>
             <a:pPr algn="just" marL="243840" indent="-243840" eaLnBrk="1" latinLnBrk="0" hangingPunct="1">
@@ -32081,7 +32081,7 @@
           <a:ln/>
         </p:spPr>
         <p:txBody>
-          <a:bodyPr wrap="none" lIns="0" tIns="0" rIns="0" bIns="0" rtlCol="0" anchor="ctr"/>
+          <a:bodyPr wrap="none" lIns="0" tIns="0" rIns="0" bIns="0" rtlCol="0" anchor="t"/>
           <a:lstStyle/>
           <a:p>
             <a:pPr algn="just" marL="243840" indent="-243840" eaLnBrk="1" latinLnBrk="0" hangingPunct="1">
@@ -32172,7 +32172,7 @@
           <a:ln/>
         </p:spPr>
         <p:txBody>
-          <a:bodyPr wrap="none" lIns="0" tIns="0" rIns="0" bIns="0" rtlCol="0" anchor="ctr"/>
+          <a:bodyPr wrap="none" lIns="0" tIns="0" rIns="0" bIns="0" rtlCol="0" anchor="t"/>
           <a:lstStyle/>
           <a:p>
             <a:pPr algn="ctr" indent="0" marL="0" eaLnBrk="1" latinLnBrk="0" hangingPunct="1">
@@ -32214,7 +32214,7 @@
           <a:ln/>
         </p:spPr>
         <p:txBody>
-          <a:bodyPr wrap="square" lIns="0" tIns="0" rIns="0" bIns="0" rtlCol="0" anchor="ctr"/>
+          <a:bodyPr wrap="square" lIns="0" tIns="0" rIns="0" bIns="0" rtlCol="0" anchor="t"/>
           <a:lstStyle/>
           <a:p>
             <a:pPr algn="just" marL="243840" indent="-243840" eaLnBrk="1" latinLnBrk="0" hangingPunct="1">
@@ -32257,7 +32257,7 @@
           <a:ln/>
         </p:spPr>
         <p:txBody>
-          <a:bodyPr wrap="square" lIns="0" tIns="0" rIns="0" bIns="0" rtlCol="0" anchor="ctr"/>
+          <a:bodyPr wrap="square" lIns="0" tIns="0" rIns="0" bIns="0" rtlCol="0" anchor="t"/>
           <a:lstStyle/>
           <a:p>
             <a:pPr algn="just" marL="243840" indent="-243840" eaLnBrk="1" latinLnBrk="0" hangingPunct="1">
@@ -32300,7 +32300,7 @@
           <a:ln/>
         </p:spPr>
         <p:txBody>
-          <a:bodyPr wrap="square" lIns="0" tIns="0" rIns="0" bIns="0" rtlCol="0" anchor="ctr"/>
+          <a:bodyPr wrap="square" lIns="0" tIns="0" rIns="0" bIns="0" rtlCol="0" anchor="t"/>
           <a:lstStyle/>
           <a:p>
             <a:pPr algn="just" marL="243840" indent="-243840" eaLnBrk="1" latinLnBrk="0" hangingPunct="1">
@@ -32343,7 +32343,7 @@
           <a:ln/>
         </p:spPr>
         <p:txBody>
-          <a:bodyPr wrap="none" lIns="0" tIns="0" rIns="0" bIns="0" rtlCol="0" anchor="ctr"/>
+          <a:bodyPr wrap="none" lIns="0" tIns="0" rIns="0" bIns="0" rtlCol="0" anchor="t"/>
           <a:lstStyle/>
           <a:p>
             <a:pPr algn="just" marL="243840" indent="-243840" eaLnBrk="1" latinLnBrk="0" hangingPunct="1">
@@ -32413,7 +32413,7 @@
           <a:ln/>
         </p:spPr>
         <p:txBody>
-          <a:bodyPr wrap="none" lIns="0" tIns="0" rIns="0" bIns="0" rtlCol="0" anchor="ctr"/>
+          <a:bodyPr wrap="none" lIns="0" tIns="0" rIns="0" bIns="0" rtlCol="0" anchor="t"/>
           <a:lstStyle/>
           <a:p>
             <a:pPr algn="ctr" indent="0" marL="0" eaLnBrk="1" latinLnBrk="0" hangingPunct="1">
@@ -32455,7 +32455,7 @@
           <a:ln/>
         </p:spPr>
         <p:txBody>
-          <a:bodyPr wrap="none" lIns="0" tIns="0" rIns="0" bIns="0" rtlCol="0" anchor="ctr"/>
+          <a:bodyPr wrap="none" lIns="0" tIns="0" rIns="0" bIns="0" rtlCol="0" anchor="t"/>
           <a:lstStyle/>
           <a:p>
             <a:pPr algn="l" indent="0" marL="0" eaLnBrk="1" latinLnBrk="0" hangingPunct="1">
@@ -32497,7 +32497,7 @@
           <a:ln/>
         </p:spPr>
         <p:txBody>
-          <a:bodyPr wrap="none" lIns="0" tIns="0" rIns="0" bIns="0" rtlCol="0" anchor="ctr"/>
+          <a:bodyPr wrap="none" lIns="0" tIns="0" rIns="0" bIns="0" rtlCol="0" anchor="t"/>
           <a:lstStyle/>
           <a:p>
             <a:pPr algn="r" indent="0" marL="0" eaLnBrk="1" latinLnBrk="0" hangingPunct="1">
@@ -32539,7 +32539,7 @@
           <a:ln/>
         </p:spPr>
         <p:txBody>
-          <a:bodyPr wrap="none" lIns="0" tIns="0" rIns="0" bIns="0" rtlCol="0" anchor="ctr"/>
+          <a:bodyPr wrap="none" lIns="0" tIns="0" rIns="0" bIns="0" rtlCol="0" anchor="t"/>
           <a:lstStyle/>
           <a:p>
             <a:pPr algn="l" indent="0" marL="0" eaLnBrk="1" latinLnBrk="0" hangingPunct="1">
@@ -32721,7 +32721,7 @@
           <a:ln/>
         </p:spPr>
         <p:txBody>
-          <a:bodyPr wrap="none" lIns="0" tIns="0" rIns="0" bIns="0" rtlCol="0" anchor="ctr"/>
+          <a:bodyPr wrap="none" lIns="0" tIns="0" rIns="0" bIns="0" rtlCol="0" anchor="t"/>
           <a:lstStyle/>
           <a:p>
             <a:pPr algn="l" indent="0" marL="0" eaLnBrk="1" latinLnBrk="0" hangingPunct="1">
@@ -32760,7 +32760,7 @@
           <a:ln/>
         </p:spPr>
         <p:txBody>
-          <a:bodyPr wrap="none" lIns="0" tIns="0" rIns="0" bIns="0" rtlCol="0" anchor="ctr"/>
+          <a:bodyPr wrap="none" lIns="0" tIns="0" rIns="0" bIns="0" rtlCol="0" anchor="t"/>
           <a:lstStyle/>
           <a:p>
             <a:pPr algn="l" indent="0" marL="0" eaLnBrk="1" latinLnBrk="0" hangingPunct="1">
@@ -32802,7 +32802,7 @@
           <a:ln/>
         </p:spPr>
         <p:txBody>
-          <a:bodyPr wrap="none" lIns="0" tIns="0" rIns="0" bIns="0" rtlCol="0" anchor="ctr"/>
+          <a:bodyPr wrap="none" lIns="0" tIns="0" rIns="0" bIns="0" rtlCol="0" anchor="t"/>
           <a:lstStyle/>
           <a:p>
             <a:pPr algn="l" indent="0" marL="0" eaLnBrk="1" latinLnBrk="0" hangingPunct="1">
@@ -32895,7 +32895,7 @@
           <a:ln/>
         </p:spPr>
         <p:txBody>
-          <a:bodyPr wrap="none" lIns="0" tIns="0" rIns="0" bIns="0" rtlCol="0" anchor="ctr"/>
+          <a:bodyPr wrap="none" lIns="0" tIns="0" rIns="0" bIns="0" rtlCol="0" anchor="t"/>
           <a:lstStyle/>
           <a:p>
             <a:pPr algn="l" indent="0" marL="0" eaLnBrk="1" latinLnBrk="0" hangingPunct="1">
@@ -32964,7 +32964,7 @@
           <a:ln/>
         </p:spPr>
         <p:txBody>
-          <a:bodyPr wrap="none" lIns="0" tIns="0" rIns="0" bIns="0" rtlCol="0" anchor="ctr"/>
+          <a:bodyPr wrap="none" lIns="0" tIns="0" rIns="0" bIns="0" rtlCol="0" anchor="t"/>
           <a:lstStyle/>
           <a:p>
             <a:pPr algn="l" indent="0" marL="0" eaLnBrk="1" latinLnBrk="0" hangingPunct="1">
@@ -33006,7 +33006,7 @@
           <a:ln/>
         </p:spPr>
         <p:txBody>
-          <a:bodyPr wrap="none" lIns="0" tIns="0" rIns="0" bIns="0" rtlCol="0" anchor="ctr"/>
+          <a:bodyPr wrap="none" lIns="0" tIns="0" rIns="0" bIns="0" rtlCol="0" anchor="t"/>
           <a:lstStyle/>
           <a:p>
             <a:pPr algn="just" marL="243840" indent="-243840" eaLnBrk="1" latinLnBrk="0" hangingPunct="1">
@@ -33049,7 +33049,7 @@
           <a:ln/>
         </p:spPr>
         <p:txBody>
-          <a:bodyPr wrap="none" lIns="0" tIns="0" rIns="0" bIns="0" rtlCol="0" anchor="ctr"/>
+          <a:bodyPr wrap="none" lIns="0" tIns="0" rIns="0" bIns="0" rtlCol="0" anchor="t"/>
           <a:lstStyle/>
           <a:p>
             <a:pPr algn="just" marL="243840" indent="-243840" eaLnBrk="1" latinLnBrk="0" hangingPunct="1">
@@ -33092,7 +33092,7 @@
           <a:ln/>
         </p:spPr>
         <p:txBody>
-          <a:bodyPr wrap="square" lIns="0" tIns="0" rIns="0" bIns="0" rtlCol="0" anchor="ctr"/>
+          <a:bodyPr wrap="square" lIns="0" tIns="0" rIns="0" bIns="0" rtlCol="0" anchor="t"/>
           <a:lstStyle/>
           <a:p>
             <a:pPr algn="just" marL="243840" indent="-243840" eaLnBrk="1" latinLnBrk="0" hangingPunct="1">
@@ -33135,7 +33135,7 @@
           <a:ln/>
         </p:spPr>
         <p:txBody>
-          <a:bodyPr wrap="none" lIns="0" tIns="0" rIns="0" bIns="0" rtlCol="0" anchor="ctr"/>
+          <a:bodyPr wrap="none" lIns="0" tIns="0" rIns="0" bIns="0" rtlCol="0" anchor="t"/>
           <a:lstStyle/>
           <a:p>
             <a:pPr algn="just" marL="243840" indent="-243840" eaLnBrk="1" latinLnBrk="0" hangingPunct="1">
@@ -33205,7 +33205,7 @@
           <a:ln/>
         </p:spPr>
         <p:txBody>
-          <a:bodyPr wrap="none" lIns="0" tIns="0" rIns="0" bIns="0" rtlCol="0" anchor="ctr"/>
+          <a:bodyPr wrap="none" lIns="0" tIns="0" rIns="0" bIns="0" rtlCol="0" anchor="t"/>
           <a:lstStyle/>
           <a:p>
             <a:pPr algn="l" indent="0" marL="0" eaLnBrk="1" latinLnBrk="0" hangingPunct="1">
@@ -33247,7 +33247,7 @@
           <a:ln/>
         </p:spPr>
         <p:txBody>
-          <a:bodyPr wrap="none" lIns="0" tIns="0" rIns="0" bIns="0" rtlCol="0" anchor="ctr"/>
+          <a:bodyPr wrap="none" lIns="0" tIns="0" rIns="0" bIns="0" rtlCol="0" anchor="t"/>
           <a:lstStyle/>
           <a:p>
             <a:pPr algn="just" marL="243840" indent="-243840" eaLnBrk="1" latinLnBrk="0" hangingPunct="1">
@@ -33290,7 +33290,7 @@
           <a:ln/>
         </p:spPr>
         <p:txBody>
-          <a:bodyPr wrap="none" lIns="0" tIns="0" rIns="0" bIns="0" rtlCol="0" anchor="ctr"/>
+          <a:bodyPr wrap="none" lIns="0" tIns="0" rIns="0" bIns="0" rtlCol="0" anchor="t"/>
           <a:lstStyle/>
           <a:p>
             <a:pPr algn="just" marL="243840" indent="-243840" eaLnBrk="1" latinLnBrk="0" hangingPunct="1">
@@ -33333,7 +33333,7 @@
           <a:ln/>
         </p:spPr>
         <p:txBody>
-          <a:bodyPr wrap="none" lIns="0" tIns="0" rIns="0" bIns="0" rtlCol="0" anchor="ctr"/>
+          <a:bodyPr wrap="none" lIns="0" tIns="0" rIns="0" bIns="0" rtlCol="0" anchor="t"/>
           <a:lstStyle/>
           <a:p>
             <a:pPr algn="just" marL="243840" indent="-243840" eaLnBrk="1" latinLnBrk="0" hangingPunct="1">
@@ -33376,7 +33376,7 @@
           <a:ln/>
         </p:spPr>
         <p:txBody>
-          <a:bodyPr wrap="none" lIns="0" tIns="0" rIns="0" bIns="0" rtlCol="0" anchor="ctr"/>
+          <a:bodyPr wrap="none" lIns="0" tIns="0" rIns="0" bIns="0" rtlCol="0" anchor="t"/>
           <a:lstStyle/>
           <a:p>
             <a:pPr algn="just" marL="243840" indent="-243840" eaLnBrk="1" latinLnBrk="0" hangingPunct="1">
@@ -33446,7 +33446,7 @@
           <a:ln/>
         </p:spPr>
         <p:txBody>
-          <a:bodyPr wrap="none" lIns="0" tIns="0" rIns="0" bIns="0" rtlCol="0" anchor="ctr"/>
+          <a:bodyPr wrap="none" lIns="0" tIns="0" rIns="0" bIns="0" rtlCol="0" anchor="t"/>
           <a:lstStyle/>
           <a:p>
             <a:pPr algn="l" indent="0" marL="0" eaLnBrk="1" latinLnBrk="0" hangingPunct="1">
@@ -33488,7 +33488,7 @@
           <a:ln/>
         </p:spPr>
         <p:txBody>
-          <a:bodyPr wrap="none" lIns="0" tIns="0" rIns="0" bIns="0" rtlCol="0" anchor="ctr"/>
+          <a:bodyPr wrap="none" lIns="0" tIns="0" rIns="0" bIns="0" rtlCol="0" anchor="t"/>
           <a:lstStyle/>
           <a:p>
             <a:pPr algn="just" marL="243840" indent="-243840" eaLnBrk="1" latinLnBrk="0" hangingPunct="1">
@@ -33531,7 +33531,7 @@
           <a:ln/>
         </p:spPr>
         <p:txBody>
-          <a:bodyPr wrap="none" lIns="0" tIns="0" rIns="0" bIns="0" rtlCol="0" anchor="ctr"/>
+          <a:bodyPr wrap="none" lIns="0" tIns="0" rIns="0" bIns="0" rtlCol="0" anchor="t"/>
           <a:lstStyle/>
           <a:p>
             <a:pPr algn="just" marL="243840" indent="-243840" eaLnBrk="1" latinLnBrk="0" hangingPunct="1">
@@ -33574,7 +33574,7 @@
           <a:ln/>
         </p:spPr>
         <p:txBody>
-          <a:bodyPr wrap="none" lIns="0" tIns="0" rIns="0" bIns="0" rtlCol="0" anchor="ctr"/>
+          <a:bodyPr wrap="none" lIns="0" tIns="0" rIns="0" bIns="0" rtlCol="0" anchor="t"/>
           <a:lstStyle/>
           <a:p>
             <a:pPr algn="just" marL="243840" indent="-243840" eaLnBrk="1" latinLnBrk="0" hangingPunct="1">
@@ -33617,7 +33617,7 @@
           <a:ln/>
         </p:spPr>
         <p:txBody>
-          <a:bodyPr wrap="none" lIns="0" tIns="0" rIns="0" bIns="0" rtlCol="0" anchor="ctr"/>
+          <a:bodyPr wrap="none" lIns="0" tIns="0" rIns="0" bIns="0" rtlCol="0" anchor="t"/>
           <a:lstStyle/>
           <a:p>
             <a:pPr algn="just" marL="243840" indent="-243840" eaLnBrk="1" latinLnBrk="0" hangingPunct="1">
@@ -33687,7 +33687,7 @@
           <a:ln/>
         </p:spPr>
         <p:txBody>
-          <a:bodyPr wrap="none" lIns="0" tIns="0" rIns="0" bIns="0" rtlCol="0" anchor="ctr"/>
+          <a:bodyPr wrap="none" lIns="0" tIns="0" rIns="0" bIns="0" rtlCol="0" anchor="t"/>
           <a:lstStyle/>
           <a:p>
             <a:pPr algn="l" indent="0" marL="0" eaLnBrk="1" latinLnBrk="0" hangingPunct="1">
@@ -33729,7 +33729,7 @@
           <a:ln/>
         </p:spPr>
         <p:txBody>
-          <a:bodyPr wrap="none" lIns="0" tIns="0" rIns="0" bIns="0" rtlCol="0" anchor="ctr"/>
+          <a:bodyPr wrap="none" lIns="0" tIns="0" rIns="0" bIns="0" rtlCol="0" anchor="t"/>
           <a:lstStyle/>
           <a:p>
             <a:pPr algn="just" indent="0" marL="0" eaLnBrk="1" latinLnBrk="0" hangingPunct="1">
@@ -33825,7 +33825,7 @@
           <a:ln/>
         </p:spPr>
         <p:txBody>
-          <a:bodyPr wrap="none" lIns="0" tIns="0" rIns="0" bIns="0" rtlCol="0" anchor="ctr"/>
+          <a:bodyPr wrap="none" lIns="0" tIns="0" rIns="0" bIns="0" rtlCol="0" anchor="t"/>
           <a:lstStyle/>
           <a:p>
             <a:pPr algn="l" indent="0" marL="0" eaLnBrk="1" latinLnBrk="0" hangingPunct="1">
@@ -33867,7 +33867,7 @@
           <a:ln/>
         </p:spPr>
         <p:txBody>
-          <a:bodyPr wrap="none" lIns="0" tIns="0" rIns="0" bIns="0" rtlCol="0" anchor="ctr"/>
+          <a:bodyPr wrap="none" lIns="0" tIns="0" rIns="0" bIns="0" rtlCol="0" anchor="t"/>
           <a:lstStyle/>
           <a:p>
             <a:pPr algn="just" indent="0" marL="0" eaLnBrk="1" latinLnBrk="0" hangingPunct="1">
@@ -33963,7 +33963,7 @@
           <a:ln/>
         </p:spPr>
         <p:txBody>
-          <a:bodyPr wrap="none" lIns="0" tIns="0" rIns="0" bIns="0" rtlCol="0" anchor="ctr"/>
+          <a:bodyPr wrap="none" lIns="0" tIns="0" rIns="0" bIns="0" rtlCol="0" anchor="t"/>
           <a:lstStyle/>
           <a:p>
             <a:pPr algn="l" indent="0" marL="0" eaLnBrk="1" latinLnBrk="0" hangingPunct="1">
@@ -34005,7 +34005,7 @@
           <a:ln/>
         </p:spPr>
         <p:txBody>
-          <a:bodyPr wrap="none" lIns="0" tIns="0" rIns="0" bIns="0" rtlCol="0" anchor="ctr"/>
+          <a:bodyPr wrap="none" lIns="0" tIns="0" rIns="0" bIns="0" rtlCol="0" anchor="t"/>
           <a:lstStyle/>
           <a:p>
             <a:pPr algn="just" indent="0" marL="0" eaLnBrk="1" latinLnBrk="0" hangingPunct="1">
@@ -34074,7 +34074,7 @@
           <a:ln/>
         </p:spPr>
         <p:txBody>
-          <a:bodyPr wrap="none" lIns="0" tIns="0" rIns="0" bIns="0" rtlCol="0" anchor="ctr"/>
+          <a:bodyPr wrap="none" lIns="0" tIns="0" rIns="0" bIns="0" rtlCol="0" anchor="t"/>
           <a:lstStyle/>
           <a:p>
             <a:pPr algn="ctr" indent="0" marL="0" eaLnBrk="1" latinLnBrk="0" hangingPunct="1">
@@ -34116,7 +34116,7 @@
           <a:ln/>
         </p:spPr>
         <p:txBody>
-          <a:bodyPr wrap="none" lIns="0" tIns="0" rIns="0" bIns="0" rtlCol="0" anchor="ctr"/>
+          <a:bodyPr wrap="none" lIns="0" tIns="0" rIns="0" bIns="0" rtlCol="0" anchor="t"/>
           <a:lstStyle/>
           <a:p>
             <a:pPr algn="l" indent="0" marL="0" eaLnBrk="1" latinLnBrk="0" hangingPunct="1">
@@ -34160,7 +34160,7 @@
           <a:ln/>
         </p:spPr>
         <p:txBody>
-          <a:bodyPr wrap="none" lIns="0" tIns="0" rIns="0" bIns="0" rtlCol="0" anchor="ctr"/>
+          <a:bodyPr wrap="none" lIns="0" tIns="0" rIns="0" bIns="0" rtlCol="0" anchor="t"/>
           <a:lstStyle/>
           <a:p>
             <a:pPr algn="r" indent="0" marL="0" eaLnBrk="1" latinLnBrk="0" hangingPunct="1">
@@ -34209,7 +34209,7 @@
           <a:ln/>
         </p:spPr>
         <p:txBody>
-          <a:bodyPr wrap="none" lIns="0" tIns="0" rIns="0" bIns="0" rtlCol="0" anchor="ctr"/>
+          <a:bodyPr wrap="none" lIns="0" tIns="0" rIns="0" bIns="0" rtlCol="0" anchor="t"/>
           <a:lstStyle/>
           <a:p>
             <a:pPr algn="l" indent="0" marL="0" eaLnBrk="1" latinLnBrk="0" hangingPunct="1">
@@ -34334,7 +34334,7 @@
           <a:ln/>
         </p:spPr>
         <p:txBody>
-          <a:bodyPr wrap="none" lIns="0" tIns="0" rIns="0" bIns="0" rtlCol="0" anchor="ctr"/>
+          <a:bodyPr wrap="none" lIns="0" tIns="0" rIns="0" bIns="0" rtlCol="0" anchor="t"/>
           <a:lstStyle/>
           <a:p>
             <a:pPr algn="l" indent="0" marL="0" eaLnBrk="1" latinLnBrk="0" hangingPunct="1">
@@ -34373,7 +34373,7 @@
           <a:ln/>
         </p:spPr>
         <p:txBody>
-          <a:bodyPr wrap="none" lIns="0" tIns="0" rIns="0" bIns="0" rtlCol="0" anchor="ctr"/>
+          <a:bodyPr wrap="none" lIns="0" tIns="0" rIns="0" bIns="0" rtlCol="0" anchor="t"/>
           <a:lstStyle/>
           <a:p>
             <a:pPr algn="l" indent="0" marL="0" eaLnBrk="1" latinLnBrk="0" hangingPunct="1">
@@ -34415,7 +34415,7 @@
           <a:ln/>
         </p:spPr>
         <p:txBody>
-          <a:bodyPr wrap="none" lIns="0" tIns="0" rIns="0" bIns="0" rtlCol="0" anchor="ctr"/>
+          <a:bodyPr wrap="none" lIns="0" tIns="0" rIns="0" bIns="0" rtlCol="0" anchor="t"/>
           <a:lstStyle/>
           <a:p>
             <a:pPr algn="l" indent="0" marL="0" eaLnBrk="1" latinLnBrk="0" hangingPunct="1">
@@ -34481,7 +34481,7 @@
           <a:ln/>
         </p:spPr>
         <p:txBody>
-          <a:bodyPr wrap="none" lIns="0" tIns="0" rIns="0" bIns="0" rtlCol="0" anchor="ctr"/>
+          <a:bodyPr wrap="none" lIns="0" tIns="0" rIns="0" bIns="0" rtlCol="0" anchor="t"/>
           <a:lstStyle/>
           <a:p>
             <a:pPr algn="l" indent="0" marL="0" eaLnBrk="1" latinLnBrk="0" hangingPunct="1">
@@ -34523,7 +34523,7 @@
           <a:ln/>
         </p:spPr>
         <p:txBody>
-          <a:bodyPr wrap="none" lIns="0" tIns="0" rIns="0" bIns="0" rtlCol="0" anchor="ctr"/>
+          <a:bodyPr wrap="none" lIns="0" tIns="0" rIns="0" bIns="0" rtlCol="0" anchor="t"/>
           <a:lstStyle/>
           <a:p>
             <a:pPr algn="l" indent="0" marL="0" eaLnBrk="1" latinLnBrk="0" hangingPunct="1">
@@ -34565,7 +34565,7 @@
           <a:ln/>
         </p:spPr>
         <p:txBody>
-          <a:bodyPr wrap="none" lIns="0" tIns="0" rIns="0" bIns="0" rtlCol="0" anchor="ctr"/>
+          <a:bodyPr wrap="none" lIns="0" tIns="0" rIns="0" bIns="0" rtlCol="0" anchor="t"/>
           <a:lstStyle/>
           <a:p>
             <a:pPr algn="just" indent="0" marL="0" eaLnBrk="1" latinLnBrk="0" hangingPunct="1">
@@ -34607,7 +34607,7 @@
           <a:ln/>
         </p:spPr>
         <p:txBody>
-          <a:bodyPr wrap="none" lIns="0" tIns="0" rIns="0" bIns="0" rtlCol="0" anchor="ctr"/>
+          <a:bodyPr wrap="none" lIns="0" tIns="0" rIns="0" bIns="0" rtlCol="0" anchor="t"/>
           <a:lstStyle/>
           <a:p>
             <a:pPr algn="l" indent="0" marL="0" eaLnBrk="1" latinLnBrk="0" hangingPunct="1">
@@ -34649,7 +34649,7 @@
           <a:ln/>
         </p:spPr>
         <p:txBody>
-          <a:bodyPr wrap="none" lIns="0" tIns="0" rIns="0" bIns="0" rtlCol="0" anchor="ctr"/>
+          <a:bodyPr wrap="none" lIns="0" tIns="0" rIns="0" bIns="0" rtlCol="0" anchor="t"/>
           <a:lstStyle/>
           <a:p>
             <a:pPr algn="just" indent="0" marL="0" eaLnBrk="1" latinLnBrk="0" hangingPunct="1">
@@ -34691,7 +34691,7 @@
           <a:ln/>
         </p:spPr>
         <p:txBody>
-          <a:bodyPr wrap="none" lIns="0" tIns="0" rIns="0" bIns="0" rtlCol="0" anchor="ctr"/>
+          <a:bodyPr wrap="none" lIns="0" tIns="0" rIns="0" bIns="0" rtlCol="0" anchor="t"/>
           <a:lstStyle/>
           <a:p>
             <a:pPr algn="l" indent="0" marL="0" eaLnBrk="1" latinLnBrk="0" hangingPunct="1">
@@ -34733,7 +34733,7 @@
           <a:ln/>
         </p:spPr>
         <p:txBody>
-          <a:bodyPr wrap="none" lIns="0" tIns="0" rIns="0" bIns="0" rtlCol="0" anchor="ctr"/>
+          <a:bodyPr wrap="none" lIns="0" tIns="0" rIns="0" bIns="0" rtlCol="0" anchor="t"/>
           <a:lstStyle/>
           <a:p>
             <a:pPr algn="just" indent="0" marL="0" eaLnBrk="1" latinLnBrk="0" hangingPunct="1">
@@ -34775,7 +34775,7 @@
           <a:ln/>
         </p:spPr>
         <p:txBody>
-          <a:bodyPr wrap="none" lIns="0" tIns="0" rIns="0" bIns="0" rtlCol="0" anchor="ctr"/>
+          <a:bodyPr wrap="none" lIns="0" tIns="0" rIns="0" bIns="0" rtlCol="0" anchor="t"/>
           <a:lstStyle/>
           <a:p>
             <a:pPr algn="l" indent="0" marL="0" eaLnBrk="1" latinLnBrk="0" hangingPunct="1">
@@ -34817,7 +34817,7 @@
           <a:ln/>
         </p:spPr>
         <p:txBody>
-          <a:bodyPr wrap="none" lIns="0" tIns="0" rIns="0" bIns="0" rtlCol="0" anchor="ctr"/>
+          <a:bodyPr wrap="none" lIns="0" tIns="0" rIns="0" bIns="0" rtlCol="0" anchor="t"/>
           <a:lstStyle/>
           <a:p>
             <a:pPr algn="just" indent="0" marL="0" eaLnBrk="1" latinLnBrk="0" hangingPunct="1">
@@ -34859,7 +34859,7 @@
           <a:ln/>
         </p:spPr>
         <p:txBody>
-          <a:bodyPr wrap="none" lIns="0" tIns="0" rIns="0" bIns="0" rtlCol="0" anchor="ctr"/>
+          <a:bodyPr wrap="none" lIns="0" tIns="0" rIns="0" bIns="0" rtlCol="0" anchor="t"/>
           <a:lstStyle/>
           <a:p>
             <a:pPr algn="l" indent="0" marL="0" eaLnBrk="1" latinLnBrk="0" hangingPunct="1">
@@ -34901,7 +34901,7 @@
           <a:ln/>
         </p:spPr>
         <p:txBody>
-          <a:bodyPr wrap="square" lIns="0" tIns="0" rIns="0" bIns="0" rtlCol="0" anchor="ctr"/>
+          <a:bodyPr wrap="square" lIns="0" tIns="0" rIns="0" bIns="0" rtlCol="0" anchor="t"/>
           <a:lstStyle/>
           <a:p>
             <a:pPr algn="just" indent="0" marL="0" eaLnBrk="1" latinLnBrk="0" hangingPunct="1">
@@ -34943,7 +34943,7 @@
           <a:ln/>
         </p:spPr>
         <p:txBody>
-          <a:bodyPr wrap="none" lIns="0" tIns="0" rIns="0" bIns="0" rtlCol="0" anchor="ctr"/>
+          <a:bodyPr wrap="none" lIns="0" tIns="0" rIns="0" bIns="0" rtlCol="0" anchor="t"/>
           <a:lstStyle/>
           <a:p>
             <a:pPr algn="l" indent="0" marL="0" eaLnBrk="1" latinLnBrk="0" hangingPunct="1">
@@ -34985,7 +34985,7 @@
           <a:ln/>
         </p:spPr>
         <p:txBody>
-          <a:bodyPr wrap="none" lIns="0" tIns="0" rIns="0" bIns="0" rtlCol="0" anchor="ctr"/>
+          <a:bodyPr wrap="none" lIns="0" tIns="0" rIns="0" bIns="0" rtlCol="0" anchor="t"/>
           <a:lstStyle/>
           <a:p>
             <a:pPr algn="just" indent="0" marL="0" eaLnBrk="1" latinLnBrk="0" hangingPunct="1">
@@ -35027,7 +35027,7 @@
           <a:ln/>
         </p:spPr>
         <p:txBody>
-          <a:bodyPr wrap="none" lIns="0" tIns="0" rIns="0" bIns="0" rtlCol="0" anchor="ctr"/>
+          <a:bodyPr wrap="none" lIns="0" tIns="0" rIns="0" bIns="0" rtlCol="0" anchor="t"/>
           <a:lstStyle/>
           <a:p>
             <a:pPr algn="l" indent="0" marL="0" eaLnBrk="1" latinLnBrk="0" hangingPunct="1">
@@ -35069,7 +35069,7 @@
           <a:ln/>
         </p:spPr>
         <p:txBody>
-          <a:bodyPr wrap="none" lIns="0" tIns="0" rIns="0" bIns="0" rtlCol="0" anchor="ctr"/>
+          <a:bodyPr wrap="none" lIns="0" tIns="0" rIns="0" bIns="0" rtlCol="0" anchor="t"/>
           <a:lstStyle/>
           <a:p>
             <a:pPr algn="just" indent="0" marL="0" eaLnBrk="1" latinLnBrk="0" hangingPunct="1">
@@ -35111,7 +35111,7 @@
           <a:ln/>
         </p:spPr>
         <p:txBody>
-          <a:bodyPr wrap="none" lIns="0" tIns="0" rIns="0" bIns="0" rtlCol="0" anchor="ctr"/>
+          <a:bodyPr wrap="none" lIns="0" tIns="0" rIns="0" bIns="0" rtlCol="0" anchor="t"/>
           <a:lstStyle/>
           <a:p>
             <a:pPr algn="l" indent="0" marL="0" eaLnBrk="1" latinLnBrk="0" hangingPunct="1">
@@ -35153,7 +35153,7 @@
           <a:ln/>
         </p:spPr>
         <p:txBody>
-          <a:bodyPr wrap="square" lIns="0" tIns="0" rIns="0" bIns="0" rtlCol="0" anchor="ctr"/>
+          <a:bodyPr wrap="square" lIns="0" tIns="0" rIns="0" bIns="0" rtlCol="0" anchor="t"/>
           <a:lstStyle/>
           <a:p>
             <a:pPr algn="just" indent="0" marL="0" eaLnBrk="1" latinLnBrk="0" hangingPunct="1">
@@ -35195,7 +35195,7 @@
           <a:ln/>
         </p:spPr>
         <p:txBody>
-          <a:bodyPr wrap="none" lIns="0" tIns="0" rIns="0" bIns="0" rtlCol="0" anchor="ctr"/>
+          <a:bodyPr wrap="none" lIns="0" tIns="0" rIns="0" bIns="0" rtlCol="0" anchor="t"/>
           <a:lstStyle/>
           <a:p>
             <a:pPr algn="l" indent="0" marL="0" eaLnBrk="1" latinLnBrk="0" hangingPunct="1">
@@ -35237,7 +35237,7 @@
           <a:ln/>
         </p:spPr>
         <p:txBody>
-          <a:bodyPr wrap="none" lIns="0" tIns="0" rIns="0" bIns="0" rtlCol="0" anchor="ctr"/>
+          <a:bodyPr wrap="none" lIns="0" tIns="0" rIns="0" bIns="0" rtlCol="0" anchor="t"/>
           <a:lstStyle/>
           <a:p>
             <a:pPr algn="just" indent="0" marL="0" eaLnBrk="1" latinLnBrk="0" hangingPunct="1">
@@ -35279,7 +35279,7 @@
           <a:ln/>
         </p:spPr>
         <p:txBody>
-          <a:bodyPr wrap="none" lIns="0" tIns="0" rIns="0" bIns="0" rtlCol="0" anchor="ctr"/>
+          <a:bodyPr wrap="none" lIns="0" tIns="0" rIns="0" bIns="0" rtlCol="0" anchor="t"/>
           <a:lstStyle/>
           <a:p>
             <a:pPr algn="l" indent="0" marL="0" eaLnBrk="1" latinLnBrk="0" hangingPunct="1">
@@ -35321,7 +35321,7 @@
           <a:ln/>
         </p:spPr>
         <p:txBody>
-          <a:bodyPr wrap="square" lIns="0" tIns="0" rIns="0" bIns="0" rtlCol="0" anchor="ctr"/>
+          <a:bodyPr wrap="square" lIns="0" tIns="0" rIns="0" bIns="0" rtlCol="0" anchor="t"/>
           <a:lstStyle/>
           <a:p>
             <a:pPr algn="just" indent="0" marL="0" eaLnBrk="1" latinLnBrk="0" hangingPunct="1">
@@ -35363,7 +35363,7 @@
           <a:ln/>
         </p:spPr>
         <p:txBody>
-          <a:bodyPr wrap="none" lIns="0" tIns="0" rIns="0" bIns="0" rtlCol="0" anchor="ctr"/>
+          <a:bodyPr wrap="none" lIns="0" tIns="0" rIns="0" bIns="0" rtlCol="0" anchor="t"/>
           <a:lstStyle/>
           <a:p>
             <a:pPr algn="l" indent="0" marL="0" eaLnBrk="1" latinLnBrk="0" hangingPunct="1">
@@ -35405,7 +35405,7 @@
           <a:ln/>
         </p:spPr>
         <p:txBody>
-          <a:bodyPr wrap="square" lIns="0" tIns="0" rIns="0" bIns="0" rtlCol="0" anchor="ctr"/>
+          <a:bodyPr wrap="square" lIns="0" tIns="0" rIns="0" bIns="0" rtlCol="0" anchor="t"/>
           <a:lstStyle/>
           <a:p>
             <a:pPr algn="just" indent="0" marL="0" eaLnBrk="1" latinLnBrk="0" hangingPunct="1">
@@ -35447,7 +35447,7 @@
           <a:ln/>
         </p:spPr>
         <p:txBody>
-          <a:bodyPr wrap="none" lIns="0" tIns="0" rIns="0" bIns="0" rtlCol="0" anchor="ctr"/>
+          <a:bodyPr wrap="none" lIns="0" tIns="0" rIns="0" bIns="0" rtlCol="0" anchor="t"/>
           <a:lstStyle/>
           <a:p>
             <a:pPr algn="l" indent="0" marL="0" eaLnBrk="1" latinLnBrk="0" hangingPunct="1">
@@ -35489,7 +35489,7 @@
           <a:ln/>
         </p:spPr>
         <p:txBody>
-          <a:bodyPr wrap="none" lIns="0" tIns="0" rIns="0" bIns="0" rtlCol="0" anchor="ctr"/>
+          <a:bodyPr wrap="none" lIns="0" tIns="0" rIns="0" bIns="0" rtlCol="0" anchor="t"/>
           <a:lstStyle/>
           <a:p>
             <a:pPr algn="l" indent="0" marL="0" eaLnBrk="1" latinLnBrk="0" hangingPunct="1">
@@ -35666,7 +35666,7 @@
           <a:ln/>
         </p:spPr>
         <p:txBody>
-          <a:bodyPr wrap="none" lIns="0" tIns="0" rIns="0" bIns="0" rtlCol="0" anchor="ctr"/>
+          <a:bodyPr wrap="none" lIns="0" tIns="0" rIns="0" bIns="0" rtlCol="0" anchor="t"/>
           <a:lstStyle/>
           <a:p>
             <a:pPr algn="l" indent="0" marL="0" eaLnBrk="1" latinLnBrk="0" hangingPunct="1">
@@ -35705,7 +35705,7 @@
           <a:ln/>
         </p:spPr>
         <p:txBody>
-          <a:bodyPr wrap="none" lIns="0" tIns="0" rIns="0" bIns="0" rtlCol="0" anchor="ctr"/>
+          <a:bodyPr wrap="none" lIns="0" tIns="0" rIns="0" bIns="0" rtlCol="0" anchor="t"/>
           <a:lstStyle/>
           <a:p>
             <a:pPr algn="l" indent="0" marL="0" eaLnBrk="1" latinLnBrk="0" hangingPunct="1">
@@ -35747,7 +35747,7 @@
           <a:ln/>
         </p:spPr>
         <p:txBody>
-          <a:bodyPr wrap="none" lIns="0" tIns="0" rIns="0" bIns="0" rtlCol="0" anchor="ctr"/>
+          <a:bodyPr wrap="none" lIns="0" tIns="0" rIns="0" bIns="0" rtlCol="0" anchor="t"/>
           <a:lstStyle/>
           <a:p>
             <a:pPr algn="l" indent="0" marL="0" eaLnBrk="1" latinLnBrk="0" hangingPunct="1">
@@ -35879,17 +35879,17 @@
         </p:nvSpPr>
         <p:spPr>
           <a:xfrm>
-            <a:off x="1229320" y="3421380"/>
-            <a:ext cx="1015960" cy="330041"/>
-          </a:xfrm>
-          <a:prstGeom prst="rect">
-            <a:avLst/>
-          </a:prstGeom>
-          <a:noFill/>
-          <a:ln/>
-        </p:spPr>
-        <p:txBody>
-          <a:bodyPr wrap="none" lIns="0" tIns="0" rIns="0" bIns="0" rtlCol="0" anchor="ctr"/>
+            <a:off x="601980" y="3421380"/>
+            <a:ext cx="2270760" cy="330041"/>
+          </a:xfrm>
+          <a:prstGeom prst="rect">
+            <a:avLst/>
+          </a:prstGeom>
+          <a:noFill/>
+          <a:ln/>
+        </p:spPr>
+        <p:txBody>
+          <a:bodyPr wrap="none" lIns="0" tIns="0" rIns="0" bIns="0" rtlCol="0" anchor="t"/>
           <a:lstStyle/>
           <a:p>
             <a:pPr algn="ctr" indent="0" marL="0" eaLnBrk="1" latinLnBrk="0" hangingPunct="1">
@@ -35921,17 +35921,17 @@
         </p:nvSpPr>
         <p:spPr>
           <a:xfrm>
-            <a:off x="1292900" y="3842861"/>
-            <a:ext cx="888921" cy="257651"/>
-          </a:xfrm>
-          <a:prstGeom prst="rect">
-            <a:avLst/>
-          </a:prstGeom>
-          <a:noFill/>
-          <a:ln/>
-        </p:spPr>
-        <p:txBody>
-          <a:bodyPr wrap="none" lIns="0" tIns="0" rIns="0" bIns="0" rtlCol="0" anchor="ctr"/>
+            <a:off x="601980" y="3842861"/>
+            <a:ext cx="2270760" cy="257651"/>
+          </a:xfrm>
+          <a:prstGeom prst="rect">
+            <a:avLst/>
+          </a:prstGeom>
+          <a:noFill/>
+          <a:ln/>
+        </p:spPr>
+        <p:txBody>
+          <a:bodyPr wrap="none" lIns="0" tIns="0" rIns="0" bIns="0" rtlCol="0" anchor="t"/>
           <a:lstStyle/>
           <a:p>
             <a:pPr algn="ctr" indent="0" marL="0" eaLnBrk="1" latinLnBrk="0" hangingPunct="1">
@@ -35963,17 +35963,17 @@
         </p:nvSpPr>
         <p:spPr>
           <a:xfrm>
-            <a:off x="1115139" y="4191952"/>
-            <a:ext cx="1244441" cy="515303"/>
-          </a:xfrm>
-          <a:prstGeom prst="rect">
-            <a:avLst/>
-          </a:prstGeom>
-          <a:noFill/>
-          <a:ln/>
-        </p:spPr>
-        <p:txBody>
-          <a:bodyPr wrap="square" lIns="0" tIns="0" rIns="0" bIns="0" rtlCol="0" anchor="ctr"/>
+            <a:off x="601980" y="4191952"/>
+            <a:ext cx="2270760" cy="515303"/>
+          </a:xfrm>
+          <a:prstGeom prst="rect">
+            <a:avLst/>
+          </a:prstGeom>
+          <a:noFill/>
+          <a:ln/>
+        </p:spPr>
+        <p:txBody>
+          <a:bodyPr wrap="none" lIns="0" tIns="0" rIns="0" bIns="0" rtlCol="0" anchor="t"/>
           <a:lstStyle/>
           <a:p>
             <a:pPr algn="ctr" indent="0" marL="0" eaLnBrk="1" latinLnBrk="0" hangingPunct="1">
@@ -36035,7 +36035,7 @@
           <a:ln/>
         </p:spPr>
         <p:txBody>
-          <a:bodyPr wrap="none" lIns="0" tIns="0" rIns="0" bIns="0" rtlCol="0" anchor="ctr"/>
+          <a:bodyPr wrap="none" lIns="0" tIns="0" rIns="0" bIns="0" rtlCol="0" anchor="t"/>
           <a:lstStyle/>
           <a:p>
             <a:pPr algn="ctr" indent="0" marL="0" eaLnBrk="1" latinLnBrk="0" hangingPunct="1">
@@ -36077,7 +36077,7 @@
           <a:ln/>
         </p:spPr>
         <p:txBody>
-          <a:bodyPr wrap="none" lIns="0" tIns="0" rIns="0" bIns="0" rtlCol="0" anchor="ctr"/>
+          <a:bodyPr wrap="none" lIns="0" tIns="0" rIns="0" bIns="0" rtlCol="0" anchor="t"/>
           <a:lstStyle/>
           <a:p>
             <a:pPr algn="ctr" indent="0" marL="0" eaLnBrk="1" latinLnBrk="0" hangingPunct="1">
@@ -36119,7 +36119,7 @@
           <a:ln/>
         </p:spPr>
         <p:txBody>
-          <a:bodyPr wrap="none" lIns="0" tIns="0" rIns="0" bIns="0" rtlCol="0" anchor="ctr"/>
+          <a:bodyPr wrap="none" lIns="0" tIns="0" rIns="0" bIns="0" rtlCol="0" anchor="t"/>
           <a:lstStyle/>
           <a:p>
             <a:pPr algn="ctr" indent="0" marL="0" eaLnBrk="1" latinLnBrk="0" hangingPunct="1">
@@ -36161,7 +36161,7 @@
           <a:ln/>
         </p:spPr>
         <p:txBody>
-          <a:bodyPr wrap="none" lIns="0" tIns="0" rIns="0" bIns="0" rtlCol="0" anchor="ctr"/>
+          <a:bodyPr wrap="none" lIns="0" tIns="0" rIns="0" bIns="0" rtlCol="0" anchor="t"/>
           <a:lstStyle/>
           <a:p>
             <a:pPr algn="ctr" indent="0" marL="0" eaLnBrk="1" latinLnBrk="0" hangingPunct="1">
@@ -36203,7 +36203,7 @@
           <a:ln/>
         </p:spPr>
         <p:txBody>
-          <a:bodyPr wrap="none" lIns="0" tIns="0" rIns="0" bIns="0" rtlCol="0" anchor="ctr"/>
+          <a:bodyPr wrap="none" lIns="0" tIns="0" rIns="0" bIns="0" rtlCol="0" anchor="t"/>
           <a:lstStyle/>
           <a:p>
             <a:pPr algn="ctr" indent="0" marL="0" eaLnBrk="1" latinLnBrk="0" hangingPunct="1">
@@ -36299,7 +36299,7 @@
           <a:ln/>
         </p:spPr>
         <p:txBody>
-          <a:bodyPr wrap="none" lIns="0" tIns="0" rIns="0" bIns="0" rtlCol="0" anchor="ctr"/>
+          <a:bodyPr wrap="none" lIns="0" tIns="0" rIns="0" bIns="0" rtlCol="0" anchor="t"/>
           <a:lstStyle/>
           <a:p>
             <a:pPr algn="l" indent="0" marL="0" eaLnBrk="1" latinLnBrk="0" hangingPunct="1">
@@ -36395,7 +36395,7 @@
           <a:ln/>
         </p:spPr>
         <p:txBody>
-          <a:bodyPr wrap="none" lIns="0" tIns="0" rIns="0" bIns="0" rtlCol="0" anchor="ctr"/>
+          <a:bodyPr wrap="none" lIns="0" tIns="0" rIns="0" bIns="0" rtlCol="0" anchor="t"/>
           <a:lstStyle/>
           <a:p>
             <a:pPr algn="ctr" indent="0" marL="0" eaLnBrk="1" latinLnBrk="0" hangingPunct="1">
@@ -36491,7 +36491,7 @@
           <a:ln/>
         </p:spPr>
         <p:txBody>
-          <a:bodyPr wrap="none" lIns="0" tIns="0" rIns="0" bIns="0" rtlCol="0" anchor="ctr"/>
+          <a:bodyPr wrap="none" lIns="0" tIns="0" rIns="0" bIns="0" rtlCol="0" anchor="t"/>
           <a:lstStyle/>
           <a:p>
             <a:pPr algn="ctr" indent="0" marL="0" eaLnBrk="1" latinLnBrk="0" hangingPunct="1">
@@ -36587,7 +36587,7 @@
           <a:ln/>
         </p:spPr>
         <p:txBody>
-          <a:bodyPr wrap="none" lIns="0" tIns="0" rIns="0" bIns="0" rtlCol="0" anchor="ctr"/>
+          <a:bodyPr wrap="none" lIns="0" tIns="0" rIns="0" bIns="0" rtlCol="0" anchor="t"/>
           <a:lstStyle/>
           <a:p>
             <a:pPr algn="ctr" indent="0" marL="0" eaLnBrk="1" latinLnBrk="0" hangingPunct="1">
@@ -36656,7 +36656,7 @@
           <a:ln/>
         </p:spPr>
         <p:txBody>
-          <a:bodyPr wrap="none" lIns="0" tIns="0" rIns="0" bIns="0" rtlCol="0" anchor="ctr"/>
+          <a:bodyPr wrap="none" lIns="0" tIns="0" rIns="0" bIns="0" rtlCol="0" anchor="t"/>
           <a:lstStyle/>
           <a:p>
             <a:pPr algn="ctr" indent="0" marL="0" eaLnBrk="1" latinLnBrk="0" hangingPunct="1">
@@ -36725,7 +36725,7 @@
           <a:ln/>
         </p:spPr>
         <p:txBody>
-          <a:bodyPr wrap="none" lIns="0" tIns="0" rIns="0" bIns="0" rtlCol="0" anchor="ctr"/>
+          <a:bodyPr wrap="none" lIns="0" tIns="0" rIns="0" bIns="0" rtlCol="0" anchor="t"/>
           <a:lstStyle/>
           <a:p>
             <a:pPr algn="ctr" indent="0" marL="0" eaLnBrk="1" latinLnBrk="0" hangingPunct="1">
@@ -36794,7 +36794,7 @@
           <a:ln/>
         </p:spPr>
         <p:txBody>
-          <a:bodyPr wrap="none" lIns="0" tIns="0" rIns="0" bIns="0" rtlCol="0" anchor="ctr"/>
+          <a:bodyPr wrap="none" lIns="0" tIns="0" rIns="0" bIns="0" rtlCol="0" anchor="t"/>
           <a:lstStyle/>
           <a:p>
             <a:pPr algn="ctr" indent="0" marL="0" eaLnBrk="1" latinLnBrk="0" hangingPunct="1">
@@ -36863,7 +36863,7 @@
           <a:ln/>
         </p:spPr>
         <p:txBody>
-          <a:bodyPr wrap="none" lIns="0" tIns="0" rIns="0" bIns="0" rtlCol="0" anchor="ctr"/>
+          <a:bodyPr wrap="none" lIns="0" tIns="0" rIns="0" bIns="0" rtlCol="0" anchor="t"/>
           <a:lstStyle/>
           <a:p>
             <a:pPr algn="ctr" indent="0" marL="0" eaLnBrk="1" latinLnBrk="0" hangingPunct="1">
@@ -36932,7 +36932,7 @@
           <a:ln/>
         </p:spPr>
         <p:txBody>
-          <a:bodyPr wrap="none" lIns="0" tIns="0" rIns="0" bIns="0" rtlCol="0" anchor="ctr"/>
+          <a:bodyPr wrap="none" lIns="0" tIns="0" rIns="0" bIns="0" rtlCol="0" anchor="t"/>
           <a:lstStyle/>
           <a:p>
             <a:pPr algn="ctr" indent="0" marL="0" eaLnBrk="1" latinLnBrk="0" hangingPunct="1">
@@ -37001,7 +37001,7 @@
           <a:ln/>
         </p:spPr>
         <p:txBody>
-          <a:bodyPr wrap="none" lIns="0" tIns="0" rIns="0" bIns="0" rtlCol="0" anchor="ctr"/>
+          <a:bodyPr wrap="none" lIns="0" tIns="0" rIns="0" bIns="0" rtlCol="0" anchor="t"/>
           <a:lstStyle/>
           <a:p>
             <a:pPr algn="ctr" indent="0" marL="0" eaLnBrk="1" latinLnBrk="0" hangingPunct="1">
@@ -37070,7 +37070,7 @@
           <a:ln/>
         </p:spPr>
         <p:txBody>
-          <a:bodyPr wrap="none" lIns="0" tIns="0" rIns="0" bIns="0" rtlCol="0" anchor="ctr"/>
+          <a:bodyPr wrap="none" lIns="0" tIns="0" rIns="0" bIns="0" rtlCol="0" anchor="t"/>
           <a:lstStyle/>
           <a:p>
             <a:pPr algn="ctr" indent="0" marL="0" eaLnBrk="1" latinLnBrk="0" hangingPunct="1">
@@ -37139,7 +37139,7 @@
           <a:ln/>
         </p:spPr>
         <p:txBody>
-          <a:bodyPr wrap="none" lIns="0" tIns="0" rIns="0" bIns="0" rtlCol="0" anchor="ctr"/>
+          <a:bodyPr wrap="none" lIns="0" tIns="0" rIns="0" bIns="0" rtlCol="0" anchor="t"/>
           <a:lstStyle/>
           <a:p>
             <a:pPr algn="ctr" indent="0" marL="0" eaLnBrk="1" latinLnBrk="0" hangingPunct="1">
@@ -37208,7 +37208,7 @@
           <a:ln/>
         </p:spPr>
         <p:txBody>
-          <a:bodyPr wrap="none" lIns="0" tIns="0" rIns="0" bIns="0" rtlCol="0" anchor="ctr"/>
+          <a:bodyPr wrap="none" lIns="0" tIns="0" rIns="0" bIns="0" rtlCol="0" anchor="t"/>
           <a:lstStyle/>
           <a:p>
             <a:pPr algn="ctr" indent="0" marL="0" eaLnBrk="1" latinLnBrk="0" hangingPunct="1">
@@ -37304,7 +37304,7 @@
           <a:ln/>
         </p:spPr>
         <p:txBody>
-          <a:bodyPr wrap="none" lIns="0" tIns="0" rIns="0" bIns="0" rtlCol="0" anchor="ctr"/>
+          <a:bodyPr wrap="none" lIns="0" tIns="0" rIns="0" bIns="0" rtlCol="0" anchor="t"/>
           <a:lstStyle/>
           <a:p>
             <a:pPr algn="l" indent="0" marL="0" eaLnBrk="1" latinLnBrk="0" hangingPunct="1">
@@ -37373,7 +37373,7 @@
           <a:ln/>
         </p:spPr>
         <p:txBody>
-          <a:bodyPr wrap="none" lIns="0" tIns="0" rIns="0" bIns="0" rtlCol="0" anchor="ctr"/>
+          <a:bodyPr wrap="none" lIns="0" tIns="0" rIns="0" bIns="0" rtlCol="0" anchor="t"/>
           <a:lstStyle/>
           <a:p>
             <a:pPr algn="l" indent="0" marL="0" eaLnBrk="1" latinLnBrk="0" hangingPunct="1">
@@ -37442,7 +37442,7 @@
           <a:ln/>
         </p:spPr>
         <p:txBody>
-          <a:bodyPr wrap="none" lIns="0" tIns="0" rIns="0" bIns="0" rtlCol="0" anchor="ctr"/>
+          <a:bodyPr wrap="none" lIns="0" tIns="0" rIns="0" bIns="0" rtlCol="0" anchor="t"/>
           <a:lstStyle/>
           <a:p>
             <a:pPr algn="l" indent="0" marL="0" eaLnBrk="1" latinLnBrk="0" hangingPunct="1">
@@ -37511,7 +37511,7 @@
           <a:ln/>
         </p:spPr>
         <p:txBody>
-          <a:bodyPr wrap="none" lIns="0" tIns="0" rIns="0" bIns="0" rtlCol="0" anchor="ctr"/>
+          <a:bodyPr wrap="none" lIns="0" tIns="0" rIns="0" bIns="0" rtlCol="0" anchor="t"/>
           <a:lstStyle/>
           <a:p>
             <a:pPr algn="l" indent="0" marL="0" eaLnBrk="1" latinLnBrk="0" hangingPunct="1">
@@ -37580,7 +37580,7 @@
           <a:ln/>
         </p:spPr>
         <p:txBody>
-          <a:bodyPr wrap="none" lIns="0" tIns="0" rIns="0" bIns="0" rtlCol="0" anchor="ctr"/>
+          <a:bodyPr wrap="none" lIns="0" tIns="0" rIns="0" bIns="0" rtlCol="0" anchor="t"/>
           <a:lstStyle/>
           <a:p>
             <a:pPr algn="l" indent="0" marL="0" eaLnBrk="1" latinLnBrk="0" hangingPunct="1">
@@ -37649,7 +37649,7 @@
           <a:ln/>
         </p:spPr>
         <p:txBody>
-          <a:bodyPr wrap="none" lIns="0" tIns="0" rIns="0" bIns="0" rtlCol="0" anchor="ctr"/>
+          <a:bodyPr wrap="none" lIns="0" tIns="0" rIns="0" bIns="0" rtlCol="0" anchor="t"/>
           <a:lstStyle/>
           <a:p>
             <a:pPr algn="l" indent="0" marL="0" eaLnBrk="1" latinLnBrk="0" hangingPunct="1">
@@ -37718,7 +37718,7 @@
           <a:ln/>
         </p:spPr>
         <p:txBody>
-          <a:bodyPr wrap="none" lIns="0" tIns="0" rIns="0" bIns="0" rtlCol="0" anchor="ctr"/>
+          <a:bodyPr wrap="none" lIns="0" tIns="0" rIns="0" bIns="0" rtlCol="0" anchor="t"/>
           <a:lstStyle/>
           <a:p>
             <a:pPr algn="l" indent="0" marL="0" eaLnBrk="1" latinLnBrk="0" hangingPunct="1">
@@ -37814,7 +37814,7 @@
           <a:ln/>
         </p:spPr>
         <p:txBody>
-          <a:bodyPr wrap="none" lIns="0" tIns="0" rIns="0" bIns="0" rtlCol="0" anchor="ctr"/>
+          <a:bodyPr wrap="none" lIns="0" tIns="0" rIns="0" bIns="0" rtlCol="0" anchor="t"/>
           <a:lstStyle/>
           <a:p>
             <a:pPr algn="l" indent="0" marL="0" eaLnBrk="1" latinLnBrk="0" hangingPunct="1">
@@ -37883,7 +37883,7 @@
           <a:ln/>
         </p:spPr>
         <p:txBody>
-          <a:bodyPr wrap="none" lIns="0" tIns="0" rIns="0" bIns="0" rtlCol="0" anchor="ctr"/>
+          <a:bodyPr wrap="none" lIns="0" tIns="0" rIns="0" bIns="0" rtlCol="0" anchor="t"/>
           <a:lstStyle/>
           <a:p>
             <a:pPr algn="l" indent="0" marL="0" eaLnBrk="1" latinLnBrk="0" hangingPunct="1">
@@ -37952,7 +37952,7 @@
           <a:ln/>
         </p:spPr>
         <p:txBody>
-          <a:bodyPr wrap="none" lIns="0" tIns="0" rIns="0" bIns="0" rtlCol="0" anchor="ctr"/>
+          <a:bodyPr wrap="none" lIns="0" tIns="0" rIns="0" bIns="0" rtlCol="0" anchor="t"/>
           <a:lstStyle/>
           <a:p>
             <a:pPr algn="l" indent="0" marL="0" eaLnBrk="1" latinLnBrk="0" hangingPunct="1">
@@ -38021,7 +38021,7 @@
           <a:ln/>
         </p:spPr>
         <p:txBody>
-          <a:bodyPr wrap="none" lIns="0" tIns="0" rIns="0" bIns="0" rtlCol="0" anchor="ctr"/>
+          <a:bodyPr wrap="none" lIns="0" tIns="0" rIns="0" bIns="0" rtlCol="0" anchor="t"/>
           <a:lstStyle/>
           <a:p>
             <a:pPr algn="l" indent="0" marL="0" eaLnBrk="1" latinLnBrk="0" hangingPunct="1">
@@ -38090,7 +38090,7 @@
           <a:ln/>
         </p:spPr>
         <p:txBody>
-          <a:bodyPr wrap="square" lIns="0" tIns="0" rIns="0" bIns="0" rtlCol="0" anchor="ctr"/>
+          <a:bodyPr wrap="square" lIns="0" tIns="0" rIns="0" bIns="0" rtlCol="0" anchor="t"/>
           <a:lstStyle/>
           <a:p>
             <a:pPr algn="l" indent="0" marL="0" eaLnBrk="1" latinLnBrk="0" hangingPunct="1">
@@ -38179,7 +38179,7 @@
           <a:ln/>
         </p:spPr>
         <p:txBody>
-          <a:bodyPr wrap="square" lIns="0" tIns="0" rIns="0" bIns="0" rtlCol="0" anchor="ctr"/>
+          <a:bodyPr wrap="square" lIns="0" tIns="0" rIns="0" bIns="0" rtlCol="0" anchor="t"/>
           <a:lstStyle/>
           <a:p>
             <a:pPr algn="l" indent="0" marL="0" eaLnBrk="1" latinLnBrk="0" hangingPunct="1">
@@ -38268,7 +38268,7 @@
           <a:ln/>
         </p:spPr>
         <p:txBody>
-          <a:bodyPr wrap="square" lIns="0" tIns="0" rIns="0" bIns="0" rtlCol="0" anchor="ctr"/>
+          <a:bodyPr wrap="square" lIns="0" tIns="0" rIns="0" bIns="0" rtlCol="0" anchor="t"/>
           <a:lstStyle/>
           <a:p>
             <a:pPr algn="l" indent="0" marL="0" eaLnBrk="1" latinLnBrk="0" hangingPunct="1">
@@ -38330,7 +38330,7 @@
           <a:ln/>
         </p:spPr>
         <p:txBody>
-          <a:bodyPr wrap="none" lIns="0" tIns="0" rIns="0" bIns="0" rtlCol="0" anchor="ctr"/>
+          <a:bodyPr wrap="none" lIns="0" tIns="0" rIns="0" bIns="0" rtlCol="0" anchor="t"/>
           <a:lstStyle/>
           <a:p>
             <a:pPr algn="l" indent="0" marL="0" eaLnBrk="1" latinLnBrk="0" hangingPunct="1">
@@ -38372,7 +38372,7 @@
           <a:ln/>
         </p:spPr>
         <p:txBody>
-          <a:bodyPr wrap="none" lIns="0" tIns="0" rIns="0" bIns="0" rtlCol="0" anchor="ctr"/>
+          <a:bodyPr wrap="none" lIns="0" tIns="0" rIns="0" bIns="0" rtlCol="0" anchor="t"/>
           <a:lstStyle/>
           <a:p>
             <a:pPr algn="r" indent="0" marL="0" eaLnBrk="1" latinLnBrk="0" hangingPunct="1">
@@ -38414,7 +38414,7 @@
           <a:ln/>
         </p:spPr>
         <p:txBody>
-          <a:bodyPr wrap="none" lIns="0" tIns="0" rIns="0" bIns="0" rtlCol="0" anchor="ctr"/>
+          <a:bodyPr wrap="none" lIns="0" tIns="0" rIns="0" bIns="0" rtlCol="0" anchor="t"/>
           <a:lstStyle/>
           <a:p>
             <a:pPr algn="l" indent="0" marL="0" eaLnBrk="1" latinLnBrk="0" hangingPunct="1">
@@ -38569,7 +38569,7 @@
           <a:ln/>
         </p:spPr>
         <p:txBody>
-          <a:bodyPr wrap="none" lIns="0" tIns="0" rIns="0" bIns="0" rtlCol="0" anchor="ctr"/>
+          <a:bodyPr wrap="none" lIns="0" tIns="0" rIns="0" bIns="0" rtlCol="0" anchor="t"/>
           <a:lstStyle/>
           <a:p>
             <a:pPr algn="ctr" indent="0" marL="0" eaLnBrk="1" latinLnBrk="0" hangingPunct="1">
@@ -38638,7 +38638,7 @@
           <a:ln/>
         </p:spPr>
         <p:txBody>
-          <a:bodyPr wrap="none" lIns="0" tIns="0" rIns="0" bIns="0" rtlCol="0" anchor="ctr"/>
+          <a:bodyPr wrap="none" lIns="0" tIns="0" rIns="0" bIns="0" rtlCol="0" anchor="t"/>
           <a:lstStyle/>
           <a:p>
             <a:pPr algn="ctr" indent="0" marL="0" eaLnBrk="1" latinLnBrk="0" hangingPunct="1">
@@ -38680,7 +38680,7 @@
           <a:ln/>
         </p:spPr>
         <p:txBody>
-          <a:bodyPr wrap="none" lIns="0" tIns="0" rIns="0" bIns="0" rtlCol="0" anchor="ctr"/>
+          <a:bodyPr wrap="none" lIns="0" tIns="0" rIns="0" bIns="0" rtlCol="0" anchor="t"/>
           <a:lstStyle/>
           <a:p>
             <a:pPr algn="ctr" indent="0" marL="0" eaLnBrk="1" latinLnBrk="0" hangingPunct="1">
@@ -38805,7 +38805,7 @@
           <a:ln/>
         </p:spPr>
         <p:txBody>
-          <a:bodyPr wrap="none" lIns="0" tIns="0" rIns="0" bIns="0" rtlCol="0" anchor="ctr"/>
+          <a:bodyPr wrap="none" lIns="0" tIns="0" rIns="0" bIns="0" rtlCol="0" anchor="t"/>
           <a:lstStyle/>
           <a:p>
             <a:pPr algn="ctr" indent="0" marL="0" eaLnBrk="1" latinLnBrk="0" hangingPunct="1">
@@ -38847,7 +38847,7 @@
           <a:ln/>
         </p:spPr>
         <p:txBody>
-          <a:bodyPr wrap="none" lIns="0" tIns="0" rIns="0" bIns="0" rtlCol="0" anchor="ctr"/>
+          <a:bodyPr wrap="none" lIns="0" tIns="0" rIns="0" bIns="0" rtlCol="0" anchor="t"/>
           <a:lstStyle/>
           <a:p>
             <a:pPr algn="ctr" indent="0" marL="0" eaLnBrk="1" latinLnBrk="0" hangingPunct="1">
@@ -38889,7 +38889,7 @@
           <a:ln/>
         </p:spPr>
         <p:txBody>
-          <a:bodyPr wrap="none" lIns="0" tIns="0" rIns="0" bIns="0" rtlCol="0" anchor="ctr"/>
+          <a:bodyPr wrap="none" lIns="0" tIns="0" rIns="0" bIns="0" rtlCol="0" anchor="t"/>
           <a:lstStyle/>
           <a:p>
             <a:pPr algn="just" indent="0" marL="0" eaLnBrk="1" latinLnBrk="0" hangingPunct="1">
@@ -38931,7 +38931,7 @@
           <a:ln/>
         </p:spPr>
         <p:txBody>
-          <a:bodyPr wrap="none" lIns="0" tIns="0" rIns="0" bIns="0" rtlCol="0" anchor="ctr"/>
+          <a:bodyPr wrap="none" lIns="0" tIns="0" rIns="0" bIns="0" rtlCol="0" anchor="t"/>
           <a:lstStyle/>
           <a:p>
             <a:pPr algn="l" indent="0" marL="0" eaLnBrk="1" latinLnBrk="0" hangingPunct="1">
@@ -38973,7 +38973,7 @@
           <a:ln/>
         </p:spPr>
         <p:txBody>
-          <a:bodyPr wrap="none" lIns="0" tIns="0" rIns="0" bIns="0" rtlCol="0" anchor="ctr"/>
+          <a:bodyPr wrap="none" lIns="0" tIns="0" rIns="0" bIns="0" rtlCol="0" anchor="t"/>
           <a:lstStyle/>
           <a:p>
             <a:pPr algn="just" indent="0" marL="0" eaLnBrk="1" latinLnBrk="0" hangingPunct="1">
@@ -39015,7 +39015,7 @@
           <a:ln/>
         </p:spPr>
         <p:txBody>
-          <a:bodyPr wrap="none" lIns="0" tIns="0" rIns="0" bIns="0" rtlCol="0" anchor="ctr"/>
+          <a:bodyPr wrap="none" lIns="0" tIns="0" rIns="0" bIns="0" rtlCol="0" anchor="t"/>
           <a:lstStyle/>
           <a:p>
             <a:pPr algn="l" indent="0" marL="0" eaLnBrk="1" latinLnBrk="0" hangingPunct="1">
@@ -39057,7 +39057,7 @@
           <a:ln/>
         </p:spPr>
         <p:txBody>
-          <a:bodyPr wrap="none" lIns="0" tIns="0" rIns="0" bIns="0" rtlCol="0" anchor="ctr"/>
+          <a:bodyPr wrap="none" lIns="0" tIns="0" rIns="0" bIns="0" rtlCol="0" anchor="t"/>
           <a:lstStyle/>
           <a:p>
             <a:pPr algn="just" indent="0" marL="0" eaLnBrk="1" latinLnBrk="0" hangingPunct="1">
@@ -39099,7 +39099,7 @@
           <a:ln/>
         </p:spPr>
         <p:txBody>
-          <a:bodyPr wrap="none" lIns="0" tIns="0" rIns="0" bIns="0" rtlCol="0" anchor="ctr"/>
+          <a:bodyPr wrap="none" lIns="0" tIns="0" rIns="0" bIns="0" rtlCol="0" anchor="t"/>
           <a:lstStyle/>
           <a:p>
             <a:pPr algn="l" indent="0" marL="0" eaLnBrk="1" latinLnBrk="0" hangingPunct="1">
@@ -39254,7 +39254,7 @@
           <a:ln/>
         </p:spPr>
         <p:txBody>
-          <a:bodyPr wrap="none" lIns="0" tIns="0" rIns="0" bIns="0" rtlCol="0" anchor="ctr"/>
+          <a:bodyPr wrap="none" lIns="0" tIns="0" rIns="0" bIns="0" rtlCol="0" anchor="t"/>
           <a:lstStyle/>
           <a:p>
             <a:pPr algn="l" indent="0" marL="0" eaLnBrk="1" latinLnBrk="0" hangingPunct="1">
@@ -39293,7 +39293,7 @@
           <a:ln/>
         </p:spPr>
         <p:txBody>
-          <a:bodyPr wrap="none" lIns="0" tIns="0" rIns="0" bIns="0" rtlCol="0" anchor="ctr"/>
+          <a:bodyPr wrap="none" lIns="0" tIns="0" rIns="0" bIns="0" rtlCol="0" anchor="t"/>
           <a:lstStyle/>
           <a:p>
             <a:pPr algn="l" indent="0" marL="0" eaLnBrk="1" latinLnBrk="0" hangingPunct="1">
@@ -39335,7 +39335,7 @@
           <a:ln/>
         </p:spPr>
         <p:txBody>
-          <a:bodyPr wrap="none" lIns="0" tIns="0" rIns="0" bIns="0" rtlCol="0" anchor="ctr"/>
+          <a:bodyPr wrap="none" lIns="0" tIns="0" rIns="0" bIns="0" rtlCol="0" anchor="t"/>
           <a:lstStyle/>
           <a:p>
             <a:pPr algn="l" indent="0" marL="0" eaLnBrk="1" latinLnBrk="0" hangingPunct="1">
@@ -39428,7 +39428,7 @@
           <a:ln/>
         </p:spPr>
         <p:txBody>
-          <a:bodyPr wrap="none" lIns="0" tIns="0" rIns="0" bIns="0" rtlCol="0" anchor="ctr"/>
+          <a:bodyPr wrap="none" lIns="0" tIns="0" rIns="0" bIns="0" rtlCol="0" anchor="t"/>
           <a:lstStyle/>
           <a:p>
             <a:pPr algn="l" indent="0" marL="0" eaLnBrk="1" latinLnBrk="0" hangingPunct="1">
@@ -39545,7 +39545,7 @@
           <a:ln/>
         </p:spPr>
         <p:txBody>
-          <a:bodyPr wrap="none" lIns="0" tIns="0" rIns="0" bIns="0" rtlCol="0" anchor="ctr"/>
+          <a:bodyPr wrap="none" lIns="0" tIns="0" rIns="0" bIns="0" rtlCol="0" anchor="t"/>
           <a:lstStyle/>
           <a:p>
             <a:pPr algn="l" indent="0" marL="0" eaLnBrk="1" latinLnBrk="0" hangingPunct="1">
@@ -39587,7 +39587,7 @@
           <a:ln/>
         </p:spPr>
         <p:txBody>
-          <a:bodyPr wrap="none" lIns="0" tIns="0" rIns="0" bIns="0" rtlCol="0" anchor="ctr"/>
+          <a:bodyPr wrap="none" lIns="0" tIns="0" rIns="0" bIns="0" rtlCol="0" anchor="t"/>
           <a:lstStyle/>
           <a:p>
             <a:pPr algn="l" indent="0" marL="0" eaLnBrk="1" latinLnBrk="0" hangingPunct="1">
@@ -39656,7 +39656,7 @@
           <a:ln/>
         </p:spPr>
         <p:txBody>
-          <a:bodyPr wrap="square" lIns="0" tIns="0" rIns="0" bIns="0" rtlCol="0" anchor="ctr"/>
+          <a:bodyPr wrap="square" lIns="0" tIns="0" rIns="0" bIns="0" rtlCol="0" anchor="t"/>
           <a:lstStyle/>
           <a:p>
             <a:pPr algn="just" marL="243840" indent="-243840" eaLnBrk="1" latinLnBrk="0" hangingPunct="1">
@@ -39699,7 +39699,7 @@
           <a:ln/>
         </p:spPr>
         <p:txBody>
-          <a:bodyPr wrap="square" lIns="0" tIns="0" rIns="0" bIns="0" rtlCol="0" anchor="ctr"/>
+          <a:bodyPr wrap="square" lIns="0" tIns="0" rIns="0" bIns="0" rtlCol="0" anchor="t"/>
           <a:lstStyle/>
           <a:p>
             <a:pPr algn="just" marL="243840" indent="-243840" eaLnBrk="1" latinLnBrk="0" hangingPunct="1">
@@ -39742,7 +39742,7 @@
           <a:ln/>
         </p:spPr>
         <p:txBody>
-          <a:bodyPr wrap="square" lIns="0" tIns="0" rIns="0" bIns="0" rtlCol="0" anchor="ctr"/>
+          <a:bodyPr wrap="square" lIns="0" tIns="0" rIns="0" bIns="0" rtlCol="0" anchor="t"/>
           <a:lstStyle/>
           <a:p>
             <a:pPr algn="just" marL="243840" indent="-243840" eaLnBrk="1" latinLnBrk="0" hangingPunct="1">
@@ -39785,7 +39785,7 @@
           <a:ln/>
         </p:spPr>
         <p:txBody>
-          <a:bodyPr wrap="none" lIns="0" tIns="0" rIns="0" bIns="0" rtlCol="0" anchor="ctr"/>
+          <a:bodyPr wrap="none" lIns="0" tIns="0" rIns="0" bIns="0" rtlCol="0" anchor="t"/>
           <a:lstStyle/>
           <a:p>
             <a:pPr algn="just" marL="243840" indent="-243840" eaLnBrk="1" latinLnBrk="0" hangingPunct="1">
@@ -39828,7 +39828,7 @@
           <a:ln/>
         </p:spPr>
         <p:txBody>
-          <a:bodyPr wrap="none" lIns="0" tIns="0" rIns="0" bIns="0" rtlCol="0" anchor="ctr"/>
+          <a:bodyPr wrap="none" lIns="0" tIns="0" rIns="0" bIns="0" rtlCol="0" anchor="t"/>
           <a:lstStyle/>
           <a:p>
             <a:pPr algn="l" indent="0" marL="0" eaLnBrk="1" latinLnBrk="0" hangingPunct="1">
@@ -39870,7 +39870,7 @@
           <a:ln/>
         </p:spPr>
         <p:txBody>
-          <a:bodyPr wrap="none" lIns="0" tIns="0" rIns="0" bIns="0" rtlCol="0" anchor="ctr"/>
+          <a:bodyPr wrap="none" lIns="0" tIns="0" rIns="0" bIns="0" rtlCol="0" anchor="t"/>
           <a:lstStyle/>
           <a:p>
             <a:pPr algn="l" indent="0" marL="0" eaLnBrk="1" latinLnBrk="0" hangingPunct="1">
@@ -39987,7 +39987,7 @@
           <a:ln/>
         </p:spPr>
         <p:txBody>
-          <a:bodyPr wrap="none" lIns="0" tIns="0" rIns="0" bIns="0" rtlCol="0" anchor="ctr"/>
+          <a:bodyPr wrap="none" lIns="0" tIns="0" rIns="0" bIns="0" rtlCol="0" anchor="t"/>
           <a:lstStyle/>
           <a:p>
             <a:pPr algn="l" indent="0" marL="0" eaLnBrk="1" latinLnBrk="0" hangingPunct="1">
@@ -40029,7 +40029,7 @@
           <a:ln/>
         </p:spPr>
         <p:txBody>
-          <a:bodyPr wrap="none" lIns="0" tIns="0" rIns="0" bIns="0" rtlCol="0" anchor="ctr"/>
+          <a:bodyPr wrap="none" lIns="0" tIns="0" rIns="0" bIns="0" rtlCol="0" anchor="t"/>
           <a:lstStyle/>
           <a:p>
             <a:pPr algn="l" indent="0" marL="0" eaLnBrk="1" latinLnBrk="0" hangingPunct="1">
@@ -40098,7 +40098,7 @@
           <a:ln/>
         </p:spPr>
         <p:txBody>
-          <a:bodyPr wrap="square" lIns="0" tIns="0" rIns="0" bIns="0" rtlCol="0" anchor="ctr"/>
+          <a:bodyPr wrap="square" lIns="0" tIns="0" rIns="0" bIns="0" rtlCol="0" anchor="t"/>
           <a:lstStyle/>
           <a:p>
             <a:pPr algn="just" marL="243840" indent="-243840" eaLnBrk="1" latinLnBrk="0" hangingPunct="1">
@@ -40141,7 +40141,7 @@
           <a:ln/>
         </p:spPr>
         <p:txBody>
-          <a:bodyPr wrap="square" lIns="0" tIns="0" rIns="0" bIns="0" rtlCol="0" anchor="ctr"/>
+          <a:bodyPr wrap="square" lIns="0" tIns="0" rIns="0" bIns="0" rtlCol="0" anchor="t"/>
           <a:lstStyle/>
           <a:p>
             <a:pPr algn="just" marL="243840" indent="-243840" eaLnBrk="1" latinLnBrk="0" hangingPunct="1">
@@ -40184,7 +40184,7 @@
           <a:ln/>
         </p:spPr>
         <p:txBody>
-          <a:bodyPr wrap="square" lIns="0" tIns="0" rIns="0" bIns="0" rtlCol="0" anchor="ctr"/>
+          <a:bodyPr wrap="square" lIns="0" tIns="0" rIns="0" bIns="0" rtlCol="0" anchor="t"/>
           <a:lstStyle/>
           <a:p>
             <a:pPr algn="just" marL="243840" indent="-243840" eaLnBrk="1" latinLnBrk="0" hangingPunct="1">
@@ -40227,7 +40227,7 @@
           <a:ln/>
         </p:spPr>
         <p:txBody>
-          <a:bodyPr wrap="none" lIns="0" tIns="0" rIns="0" bIns="0" rtlCol="0" anchor="ctr"/>
+          <a:bodyPr wrap="none" lIns="0" tIns="0" rIns="0" bIns="0" rtlCol="0" anchor="t"/>
           <a:lstStyle/>
           <a:p>
             <a:pPr algn="just" marL="243840" indent="-243840" eaLnBrk="1" latinLnBrk="0" hangingPunct="1">
@@ -40270,7 +40270,7 @@
           <a:ln/>
         </p:spPr>
         <p:txBody>
-          <a:bodyPr wrap="none" lIns="0" tIns="0" rIns="0" bIns="0" rtlCol="0" anchor="ctr"/>
+          <a:bodyPr wrap="none" lIns="0" tIns="0" rIns="0" bIns="0" rtlCol="0" anchor="t"/>
           <a:lstStyle/>
           <a:p>
             <a:pPr algn="l" indent="0" marL="0" eaLnBrk="1" latinLnBrk="0" hangingPunct="1">
@@ -40312,7 +40312,7 @@
           <a:ln/>
         </p:spPr>
         <p:txBody>
-          <a:bodyPr wrap="none" lIns="0" tIns="0" rIns="0" bIns="0" rtlCol="0" anchor="ctr"/>
+          <a:bodyPr wrap="none" lIns="0" tIns="0" rIns="0" bIns="0" rtlCol="0" anchor="t"/>
           <a:lstStyle/>
           <a:p>
             <a:pPr algn="l" indent="0" marL="0" eaLnBrk="1" latinLnBrk="0" hangingPunct="1">
@@ -40429,7 +40429,7 @@
           <a:ln/>
         </p:spPr>
         <p:txBody>
-          <a:bodyPr wrap="none" lIns="0" tIns="0" rIns="0" bIns="0" rtlCol="0" anchor="ctr"/>
+          <a:bodyPr wrap="none" lIns="0" tIns="0" rIns="0" bIns="0" rtlCol="0" anchor="t"/>
           <a:lstStyle/>
           <a:p>
             <a:pPr algn="l" indent="0" marL="0" eaLnBrk="1" latinLnBrk="0" hangingPunct="1">
@@ -40471,7 +40471,7 @@
           <a:ln/>
         </p:spPr>
         <p:txBody>
-          <a:bodyPr wrap="none" lIns="0" tIns="0" rIns="0" bIns="0" rtlCol="0" anchor="ctr"/>
+          <a:bodyPr wrap="none" lIns="0" tIns="0" rIns="0" bIns="0" rtlCol="0" anchor="t"/>
           <a:lstStyle/>
           <a:p>
             <a:pPr algn="l" indent="0" marL="0" eaLnBrk="1" latinLnBrk="0" hangingPunct="1">
@@ -40540,7 +40540,7 @@
           <a:ln/>
         </p:spPr>
         <p:txBody>
-          <a:bodyPr wrap="square" lIns="0" tIns="0" rIns="0" bIns="0" rtlCol="0" anchor="ctr"/>
+          <a:bodyPr wrap="square" lIns="0" tIns="0" rIns="0" bIns="0" rtlCol="0" anchor="t"/>
           <a:lstStyle/>
           <a:p>
             <a:pPr algn="just" marL="243840" indent="-243840" eaLnBrk="1" latinLnBrk="0" hangingPunct="1">
@@ -40583,7 +40583,7 @@
           <a:ln/>
         </p:spPr>
         <p:txBody>
-          <a:bodyPr wrap="square" lIns="0" tIns="0" rIns="0" bIns="0" rtlCol="0" anchor="ctr"/>
+          <a:bodyPr wrap="square" lIns="0" tIns="0" rIns="0" bIns="0" rtlCol="0" anchor="t"/>
           <a:lstStyle/>
           <a:p>
             <a:pPr algn="just" marL="243840" indent="-243840" eaLnBrk="1" latinLnBrk="0" hangingPunct="1">
@@ -40626,7 +40626,7 @@
           <a:ln/>
         </p:spPr>
         <p:txBody>
-          <a:bodyPr wrap="square" lIns="0" tIns="0" rIns="0" bIns="0" rtlCol="0" anchor="ctr"/>
+          <a:bodyPr wrap="square" lIns="0" tIns="0" rIns="0" bIns="0" rtlCol="0" anchor="t"/>
           <a:lstStyle/>
           <a:p>
             <a:pPr algn="just" marL="243840" indent="-243840" eaLnBrk="1" latinLnBrk="0" hangingPunct="1">
@@ -40669,7 +40669,7 @@
           <a:ln/>
         </p:spPr>
         <p:txBody>
-          <a:bodyPr wrap="none" lIns="0" tIns="0" rIns="0" bIns="0" rtlCol="0" anchor="ctr"/>
+          <a:bodyPr wrap="none" lIns="0" tIns="0" rIns="0" bIns="0" rtlCol="0" anchor="t"/>
           <a:lstStyle/>
           <a:p>
             <a:pPr algn="just" marL="243840" indent="-243840" eaLnBrk="1" latinLnBrk="0" hangingPunct="1">
@@ -40712,7 +40712,7 @@
           <a:ln/>
         </p:spPr>
         <p:txBody>
-          <a:bodyPr wrap="none" lIns="0" tIns="0" rIns="0" bIns="0" rtlCol="0" anchor="ctr"/>
+          <a:bodyPr wrap="none" lIns="0" tIns="0" rIns="0" bIns="0" rtlCol="0" anchor="t"/>
           <a:lstStyle/>
           <a:p>
             <a:pPr algn="l" indent="0" marL="0" eaLnBrk="1" latinLnBrk="0" hangingPunct="1">
@@ -40754,7 +40754,7 @@
           <a:ln/>
         </p:spPr>
         <p:txBody>
-          <a:bodyPr wrap="none" lIns="0" tIns="0" rIns="0" bIns="0" rtlCol="0" anchor="ctr"/>
+          <a:bodyPr wrap="none" lIns="0" tIns="0" rIns="0" bIns="0" rtlCol="0" anchor="t"/>
           <a:lstStyle/>
           <a:p>
             <a:pPr algn="l" indent="0" marL="0" eaLnBrk="1" latinLnBrk="0" hangingPunct="1">
@@ -40796,7 +40796,7 @@
           <a:ln/>
         </p:spPr>
         <p:txBody>
-          <a:bodyPr wrap="none" lIns="0" tIns="0" rIns="0" bIns="0" rtlCol="0" anchor="ctr"/>
+          <a:bodyPr wrap="none" lIns="0" tIns="0" rIns="0" bIns="0" rtlCol="0" anchor="t"/>
           <a:lstStyle/>
           <a:p>
             <a:pPr algn="l" indent="0" marL="0" eaLnBrk="1" latinLnBrk="0" hangingPunct="1">
@@ -40838,7 +40838,7 @@
           <a:ln/>
         </p:spPr>
         <p:txBody>
-          <a:bodyPr wrap="none" lIns="0" tIns="0" rIns="0" bIns="0" rtlCol="0" anchor="ctr"/>
+          <a:bodyPr wrap="none" lIns="0" tIns="0" rIns="0" bIns="0" rtlCol="0" anchor="t"/>
           <a:lstStyle/>
           <a:p>
             <a:pPr algn="r" indent="0" marL="0" eaLnBrk="1" latinLnBrk="0" hangingPunct="1">
@@ -40880,7 +40880,7 @@
           <a:ln/>
         </p:spPr>
         <p:txBody>
-          <a:bodyPr wrap="none" lIns="0" tIns="0" rIns="0" bIns="0" rtlCol="0" anchor="ctr"/>
+          <a:bodyPr wrap="none" lIns="0" tIns="0" rIns="0" bIns="0" rtlCol="0" anchor="t"/>
           <a:lstStyle/>
           <a:p>
             <a:pPr algn="l" indent="0" marL="0" eaLnBrk="1" latinLnBrk="0" hangingPunct="1">
@@ -41062,7 +41062,7 @@
           <a:ln/>
         </p:spPr>
         <p:txBody>
-          <a:bodyPr wrap="none" lIns="0" tIns="0" rIns="0" bIns="0" rtlCol="0" anchor="ctr"/>
+          <a:bodyPr wrap="none" lIns="0" tIns="0" rIns="0" bIns="0" rtlCol="0" anchor="t"/>
           <a:lstStyle/>
           <a:p>
             <a:pPr algn="l" indent="0" marL="0" eaLnBrk="1" latinLnBrk="0" hangingPunct="1">
@@ -41101,7 +41101,7 @@
           <a:ln/>
         </p:spPr>
         <p:txBody>
-          <a:bodyPr wrap="none" lIns="0" tIns="0" rIns="0" bIns="0" rtlCol="0" anchor="ctr"/>
+          <a:bodyPr wrap="none" lIns="0" tIns="0" rIns="0" bIns="0" rtlCol="0" anchor="t"/>
           <a:lstStyle/>
           <a:p>
             <a:pPr algn="l" indent="0" marL="0" eaLnBrk="1" latinLnBrk="0" hangingPunct="1">
@@ -41143,7 +41143,7 @@
           <a:ln/>
         </p:spPr>
         <p:txBody>
-          <a:bodyPr wrap="none" lIns="0" tIns="0" rIns="0" bIns="0" rtlCol="0" anchor="ctr"/>
+          <a:bodyPr wrap="none" lIns="0" tIns="0" rIns="0" bIns="0" rtlCol="0" anchor="t"/>
           <a:lstStyle/>
           <a:p>
             <a:pPr algn="l" indent="0" marL="0" eaLnBrk="1" latinLnBrk="0" hangingPunct="1">
@@ -41236,7 +41236,7 @@
           <a:ln/>
         </p:spPr>
         <p:txBody>
-          <a:bodyPr wrap="none" lIns="0" tIns="0" rIns="0" bIns="0" rtlCol="0" anchor="ctr"/>
+          <a:bodyPr wrap="none" lIns="0" tIns="0" rIns="0" bIns="0" rtlCol="0" anchor="t"/>
           <a:lstStyle/>
           <a:p>
             <a:pPr algn="l" indent="0" marL="0" eaLnBrk="1" latinLnBrk="0" hangingPunct="1">
@@ -41359,7 +41359,7 @@
           <a:ln/>
         </p:spPr>
         <p:txBody>
-          <a:bodyPr wrap="none" lIns="0" tIns="0" rIns="0" bIns="0" rtlCol="0" anchor="ctr"/>
+          <a:bodyPr wrap="none" lIns="0" tIns="0" rIns="0" bIns="0" rtlCol="0" anchor="t"/>
           <a:lstStyle/>
           <a:p>
             <a:pPr algn="l" indent="0" marL="0" eaLnBrk="1" latinLnBrk="0" hangingPunct="1">
@@ -41482,7 +41482,7 @@
           <a:ln/>
         </p:spPr>
         <p:txBody>
-          <a:bodyPr wrap="none" lIns="0" tIns="0" rIns="0" bIns="0" rtlCol="0" anchor="ctr"/>
+          <a:bodyPr wrap="none" lIns="0" tIns="0" rIns="0" bIns="0" rtlCol="0" anchor="t"/>
           <a:lstStyle/>
           <a:p>
             <a:pPr algn="ctr" indent="0" marL="0" eaLnBrk="1" latinLnBrk="0" hangingPunct="1">
@@ -41605,7 +41605,7 @@
           <a:ln/>
         </p:spPr>
         <p:txBody>
-          <a:bodyPr wrap="none" lIns="0" tIns="0" rIns="0" bIns="0" rtlCol="0" anchor="ctr"/>
+          <a:bodyPr wrap="none" lIns="0" tIns="0" rIns="0" bIns="0" rtlCol="0" anchor="t"/>
           <a:lstStyle/>
           <a:p>
             <a:pPr algn="ctr" indent="0" marL="0" eaLnBrk="1" latinLnBrk="0" hangingPunct="1">
@@ -41728,7 +41728,7 @@
           <a:ln/>
         </p:spPr>
         <p:txBody>
-          <a:bodyPr wrap="none" lIns="0" tIns="0" rIns="0" bIns="0" rtlCol="0" anchor="ctr"/>
+          <a:bodyPr wrap="none" lIns="0" tIns="0" rIns="0" bIns="0" rtlCol="0" anchor="t"/>
           <a:lstStyle/>
           <a:p>
             <a:pPr algn="l" indent="0" marL="0" eaLnBrk="1" latinLnBrk="0" hangingPunct="1">
@@ -41851,7 +41851,7 @@
           <a:ln/>
         </p:spPr>
         <p:txBody>
-          <a:bodyPr wrap="none" lIns="0" tIns="0" rIns="0" bIns="0" rtlCol="0" anchor="ctr"/>
+          <a:bodyPr wrap="none" lIns="0" tIns="0" rIns="0" bIns="0" rtlCol="0" anchor="t"/>
           <a:lstStyle/>
           <a:p>
             <a:pPr algn="ctr" indent="0" marL="0" eaLnBrk="1" latinLnBrk="0" hangingPunct="1">
@@ -41974,7 +41974,7 @@
           <a:ln/>
         </p:spPr>
         <p:txBody>
-          <a:bodyPr wrap="none" lIns="0" tIns="0" rIns="0" bIns="0" rtlCol="0" anchor="ctr"/>
+          <a:bodyPr wrap="none" lIns="0" tIns="0" rIns="0" bIns="0" rtlCol="0" anchor="t"/>
           <a:lstStyle/>
           <a:p>
             <a:pPr algn="ctr" indent="0" marL="0" eaLnBrk="1" latinLnBrk="0" hangingPunct="1">
@@ -42097,7 +42097,7 @@
           <a:ln/>
         </p:spPr>
         <p:txBody>
-          <a:bodyPr wrap="none" lIns="0" tIns="0" rIns="0" bIns="0" rtlCol="0" anchor="ctr"/>
+          <a:bodyPr wrap="none" lIns="0" tIns="0" rIns="0" bIns="0" rtlCol="0" anchor="t"/>
           <a:lstStyle/>
           <a:p>
             <a:pPr algn="l" indent="0" marL="0" eaLnBrk="1" latinLnBrk="0" hangingPunct="1">
@@ -42220,7 +42220,7 @@
           <a:ln/>
         </p:spPr>
         <p:txBody>
-          <a:bodyPr wrap="none" lIns="0" tIns="0" rIns="0" bIns="0" rtlCol="0" anchor="ctr"/>
+          <a:bodyPr wrap="none" lIns="0" tIns="0" rIns="0" bIns="0" rtlCol="0" anchor="t"/>
           <a:lstStyle/>
           <a:p>
             <a:pPr algn="ctr" indent="0" marL="0" eaLnBrk="1" latinLnBrk="0" hangingPunct="1">
@@ -42343,7 +42343,7 @@
           <a:ln/>
         </p:spPr>
         <p:txBody>
-          <a:bodyPr wrap="none" lIns="0" tIns="0" rIns="0" bIns="0" rtlCol="0" anchor="ctr"/>
+          <a:bodyPr wrap="none" lIns="0" tIns="0" rIns="0" bIns="0" rtlCol="0" anchor="t"/>
           <a:lstStyle/>
           <a:p>
             <a:pPr algn="ctr" indent="0" marL="0" eaLnBrk="1" latinLnBrk="0" hangingPunct="1">
@@ -42466,7 +42466,7 @@
           <a:ln/>
         </p:spPr>
         <p:txBody>
-          <a:bodyPr wrap="none" lIns="0" tIns="0" rIns="0" bIns="0" rtlCol="0" anchor="ctr"/>
+          <a:bodyPr wrap="none" lIns="0" tIns="0" rIns="0" bIns="0" rtlCol="0" anchor="t"/>
           <a:lstStyle/>
           <a:p>
             <a:pPr algn="l" indent="0" marL="0" eaLnBrk="1" latinLnBrk="0" hangingPunct="1">
@@ -42589,7 +42589,7 @@
           <a:ln/>
         </p:spPr>
         <p:txBody>
-          <a:bodyPr wrap="none" lIns="0" tIns="0" rIns="0" bIns="0" rtlCol="0" anchor="ctr"/>
+          <a:bodyPr wrap="none" lIns="0" tIns="0" rIns="0" bIns="0" rtlCol="0" anchor="t"/>
           <a:lstStyle/>
           <a:p>
             <a:pPr algn="ctr" indent="0" marL="0" eaLnBrk="1" latinLnBrk="0" hangingPunct="1">
@@ -42712,7 +42712,7 @@
           <a:ln/>
         </p:spPr>
         <p:txBody>
-          <a:bodyPr wrap="none" lIns="0" tIns="0" rIns="0" bIns="0" rtlCol="0" anchor="ctr"/>
+          <a:bodyPr wrap="none" lIns="0" tIns="0" rIns="0" bIns="0" rtlCol="0" anchor="t"/>
           <a:lstStyle/>
           <a:p>
             <a:pPr algn="ctr" indent="0" marL="0" eaLnBrk="1" latinLnBrk="0" hangingPunct="1">
@@ -42835,7 +42835,7 @@
           <a:ln/>
         </p:spPr>
         <p:txBody>
-          <a:bodyPr wrap="none" lIns="0" tIns="0" rIns="0" bIns="0" rtlCol="0" anchor="ctr"/>
+          <a:bodyPr wrap="none" lIns="0" tIns="0" rIns="0" bIns="0" rtlCol="0" anchor="t"/>
           <a:lstStyle/>
           <a:p>
             <a:pPr algn="l" indent="0" marL="0" eaLnBrk="1" latinLnBrk="0" hangingPunct="1">
@@ -42958,7 +42958,7 @@
           <a:ln/>
         </p:spPr>
         <p:txBody>
-          <a:bodyPr wrap="none" lIns="0" tIns="0" rIns="0" bIns="0" rtlCol="0" anchor="ctr"/>
+          <a:bodyPr wrap="none" lIns="0" tIns="0" rIns="0" bIns="0" rtlCol="0" anchor="t"/>
           <a:lstStyle/>
           <a:p>
             <a:pPr algn="ctr" indent="0" marL="0" eaLnBrk="1" latinLnBrk="0" hangingPunct="1">
@@ -43081,7 +43081,7 @@
           <a:ln/>
         </p:spPr>
         <p:txBody>
-          <a:bodyPr wrap="none" lIns="0" tIns="0" rIns="0" bIns="0" rtlCol="0" anchor="ctr"/>
+          <a:bodyPr wrap="none" lIns="0" tIns="0" rIns="0" bIns="0" rtlCol="0" anchor="t"/>
           <a:lstStyle/>
           <a:p>
             <a:pPr algn="ctr" indent="0" marL="0" eaLnBrk="1" latinLnBrk="0" hangingPunct="1">
@@ -43204,7 +43204,7 @@
           <a:ln/>
         </p:spPr>
         <p:txBody>
-          <a:bodyPr wrap="none" lIns="0" tIns="0" rIns="0" bIns="0" rtlCol="0" anchor="ctr"/>
+          <a:bodyPr wrap="none" lIns="0" tIns="0" rIns="0" bIns="0" rtlCol="0" anchor="t"/>
           <a:lstStyle/>
           <a:p>
             <a:pPr algn="l" indent="0" marL="0" eaLnBrk="1" latinLnBrk="0" hangingPunct="1">
@@ -43327,7 +43327,7 @@
           <a:ln/>
         </p:spPr>
         <p:txBody>
-          <a:bodyPr wrap="none" lIns="0" tIns="0" rIns="0" bIns="0" rtlCol="0" anchor="ctr"/>
+          <a:bodyPr wrap="none" lIns="0" tIns="0" rIns="0" bIns="0" rtlCol="0" anchor="t"/>
           <a:lstStyle/>
           <a:p>
             <a:pPr algn="ctr" indent="0" marL="0" eaLnBrk="1" latinLnBrk="0" hangingPunct="1">
@@ -43450,7 +43450,7 @@
           <a:ln/>
         </p:spPr>
         <p:txBody>
-          <a:bodyPr wrap="none" lIns="0" tIns="0" rIns="0" bIns="0" rtlCol="0" anchor="ctr"/>
+          <a:bodyPr wrap="none" lIns="0" tIns="0" rIns="0" bIns="0" rtlCol="0" anchor="t"/>
           <a:lstStyle/>
           <a:p>
             <a:pPr algn="ctr" indent="0" marL="0" eaLnBrk="1" latinLnBrk="0" hangingPunct="1">
@@ -43573,7 +43573,7 @@
           <a:ln/>
         </p:spPr>
         <p:txBody>
-          <a:bodyPr wrap="none" lIns="0" tIns="0" rIns="0" bIns="0" rtlCol="0" anchor="ctr"/>
+          <a:bodyPr wrap="none" lIns="0" tIns="0" rIns="0" bIns="0" rtlCol="0" anchor="t"/>
           <a:lstStyle/>
           <a:p>
             <a:pPr algn="l" indent="0" marL="0" eaLnBrk="1" latinLnBrk="0" hangingPunct="1">
@@ -43696,7 +43696,7 @@
           <a:ln/>
         </p:spPr>
         <p:txBody>
-          <a:bodyPr wrap="none" lIns="0" tIns="0" rIns="0" bIns="0" rtlCol="0" anchor="ctr"/>
+          <a:bodyPr wrap="none" lIns="0" tIns="0" rIns="0" bIns="0" rtlCol="0" anchor="t"/>
           <a:lstStyle/>
           <a:p>
             <a:pPr algn="ctr" indent="0" marL="0" eaLnBrk="1" latinLnBrk="0" hangingPunct="1">
@@ -43819,7 +43819,7 @@
           <a:ln/>
         </p:spPr>
         <p:txBody>
-          <a:bodyPr wrap="none" lIns="0" tIns="0" rIns="0" bIns="0" rtlCol="0" anchor="ctr"/>
+          <a:bodyPr wrap="none" lIns="0" tIns="0" rIns="0" bIns="0" rtlCol="0" anchor="t"/>
           <a:lstStyle/>
           <a:p>
             <a:pPr algn="ctr" indent="0" marL="0" eaLnBrk="1" latinLnBrk="0" hangingPunct="1">
@@ -43942,7 +43942,7 @@
           <a:ln/>
         </p:spPr>
         <p:txBody>
-          <a:bodyPr wrap="none" lIns="0" tIns="0" rIns="0" bIns="0" rtlCol="0" anchor="ctr"/>
+          <a:bodyPr wrap="none" lIns="0" tIns="0" rIns="0" bIns="0" rtlCol="0" anchor="t"/>
           <a:lstStyle/>
           <a:p>
             <a:pPr algn="l" indent="0" marL="0" eaLnBrk="1" latinLnBrk="0" hangingPunct="1">
@@ -44065,7 +44065,7 @@
           <a:ln/>
         </p:spPr>
         <p:txBody>
-          <a:bodyPr wrap="none" lIns="0" tIns="0" rIns="0" bIns="0" rtlCol="0" anchor="ctr"/>
+          <a:bodyPr wrap="none" lIns="0" tIns="0" rIns="0" bIns="0" rtlCol="0" anchor="t"/>
           <a:lstStyle/>
           <a:p>
             <a:pPr algn="ctr" indent="0" marL="0" eaLnBrk="1" latinLnBrk="0" hangingPunct="1">
@@ -44188,7 +44188,7 @@
           <a:ln/>
         </p:spPr>
         <p:txBody>
-          <a:bodyPr wrap="none" lIns="0" tIns="0" rIns="0" bIns="0" rtlCol="0" anchor="ctr"/>
+          <a:bodyPr wrap="none" lIns="0" tIns="0" rIns="0" bIns="0" rtlCol="0" anchor="t"/>
           <a:lstStyle/>
           <a:p>
             <a:pPr algn="ctr" indent="0" marL="0" eaLnBrk="1" latinLnBrk="0" hangingPunct="1">
@@ -44311,7 +44311,7 @@
           <a:ln/>
         </p:spPr>
         <p:txBody>
-          <a:bodyPr wrap="none" lIns="0" tIns="0" rIns="0" bIns="0" rtlCol="0" anchor="ctr"/>
+          <a:bodyPr wrap="none" lIns="0" tIns="0" rIns="0" bIns="0" rtlCol="0" anchor="t"/>
           <a:lstStyle/>
           <a:p>
             <a:pPr algn="l" indent="0" marL="0" eaLnBrk="1" latinLnBrk="0" hangingPunct="1">
@@ -44434,7 +44434,7 @@
           <a:ln/>
         </p:spPr>
         <p:txBody>
-          <a:bodyPr wrap="none" lIns="0" tIns="0" rIns="0" bIns="0" rtlCol="0" anchor="ctr"/>
+          <a:bodyPr wrap="none" lIns="0" tIns="0" rIns="0" bIns="0" rtlCol="0" anchor="t"/>
           <a:lstStyle/>
           <a:p>
             <a:pPr algn="ctr" indent="0" marL="0" eaLnBrk="1" latinLnBrk="0" hangingPunct="1">
@@ -44557,7 +44557,7 @@
           <a:ln/>
         </p:spPr>
         <p:txBody>
-          <a:bodyPr wrap="none" lIns="0" tIns="0" rIns="0" bIns="0" rtlCol="0" anchor="ctr"/>
+          <a:bodyPr wrap="none" lIns="0" tIns="0" rIns="0" bIns="0" rtlCol="0" anchor="t"/>
           <a:lstStyle/>
           <a:p>
             <a:pPr algn="ctr" indent="0" marL="0" eaLnBrk="1" latinLnBrk="0" hangingPunct="1">
@@ -44680,7 +44680,7 @@
           <a:ln/>
         </p:spPr>
         <p:txBody>
-          <a:bodyPr wrap="none" lIns="0" tIns="0" rIns="0" bIns="0" rtlCol="0" anchor="ctr"/>
+          <a:bodyPr wrap="none" lIns="0" tIns="0" rIns="0" bIns="0" rtlCol="0" anchor="t"/>
           <a:lstStyle/>
           <a:p>
             <a:pPr algn="l" indent="0" marL="0" eaLnBrk="1" latinLnBrk="0" hangingPunct="1">
@@ -44803,7 +44803,7 @@
           <a:ln/>
         </p:spPr>
         <p:txBody>
-          <a:bodyPr wrap="none" lIns="0" tIns="0" rIns="0" bIns="0" rtlCol="0" anchor="ctr"/>
+          <a:bodyPr wrap="none" lIns="0" tIns="0" rIns="0" bIns="0" rtlCol="0" anchor="t"/>
           <a:lstStyle/>
           <a:p>
             <a:pPr algn="ctr" indent="0" marL="0" eaLnBrk="1" latinLnBrk="0" hangingPunct="1">
@@ -44926,7 +44926,7 @@
           <a:ln/>
         </p:spPr>
         <p:txBody>
-          <a:bodyPr wrap="none" lIns="0" tIns="0" rIns="0" bIns="0" rtlCol="0" anchor="ctr"/>
+          <a:bodyPr wrap="none" lIns="0" tIns="0" rIns="0" bIns="0" rtlCol="0" anchor="t"/>
           <a:lstStyle/>
           <a:p>
             <a:pPr algn="ctr" indent="0" marL="0" eaLnBrk="1" latinLnBrk="0" hangingPunct="1">
@@ -44968,7 +44968,7 @@
           <a:ln/>
         </p:spPr>
         <p:txBody>
-          <a:bodyPr wrap="none" lIns="0" tIns="0" rIns="0" bIns="0" rtlCol="0" anchor="ctr"/>
+          <a:bodyPr wrap="none" lIns="0" tIns="0" rIns="0" bIns="0" rtlCol="0" anchor="t"/>
           <a:lstStyle/>
           <a:p>
             <a:pPr algn="l" indent="0" marL="0" eaLnBrk="1" latinLnBrk="0" hangingPunct="1">
@@ -45037,7 +45037,7 @@
           <a:ln/>
         </p:spPr>
         <p:txBody>
-          <a:bodyPr wrap="none" lIns="0" tIns="0" rIns="0" bIns="0" rtlCol="0" anchor="ctr"/>
+          <a:bodyPr wrap="none" lIns="0" tIns="0" rIns="0" bIns="0" rtlCol="0" anchor="t"/>
           <a:lstStyle/>
           <a:p>
             <a:pPr algn="l" indent="0" marL="0" eaLnBrk="1" latinLnBrk="0" hangingPunct="1">
@@ -45079,7 +45079,7 @@
           <a:ln/>
         </p:spPr>
         <p:txBody>
-          <a:bodyPr wrap="square" lIns="0" tIns="0" rIns="0" bIns="0" rtlCol="0" anchor="ctr"/>
+          <a:bodyPr wrap="square" lIns="0" tIns="0" rIns="0" bIns="0" rtlCol="0" anchor="t"/>
           <a:lstStyle/>
           <a:p>
             <a:pPr algn="just" indent="0" marL="0" eaLnBrk="1" latinLnBrk="0" hangingPunct="1">
@@ -45148,7 +45148,7 @@
           <a:ln/>
         </p:spPr>
         <p:txBody>
-          <a:bodyPr wrap="none" lIns="0" tIns="0" rIns="0" bIns="0" rtlCol="0" anchor="ctr"/>
+          <a:bodyPr wrap="none" lIns="0" tIns="0" rIns="0" bIns="0" rtlCol="0" anchor="t"/>
           <a:lstStyle/>
           <a:p>
             <a:pPr algn="l" indent="0" marL="0" eaLnBrk="1" latinLnBrk="0" hangingPunct="1">
@@ -45190,7 +45190,7 @@
           <a:ln/>
         </p:spPr>
         <p:txBody>
-          <a:bodyPr wrap="square" lIns="0" tIns="0" rIns="0" bIns="0" rtlCol="0" anchor="ctr"/>
+          <a:bodyPr wrap="square" lIns="0" tIns="0" rIns="0" bIns="0" rtlCol="0" anchor="t"/>
           <a:lstStyle/>
           <a:p>
             <a:pPr algn="just" indent="0" marL="0" eaLnBrk="1" latinLnBrk="0" hangingPunct="1">
@@ -45259,7 +45259,7 @@
           <a:ln/>
         </p:spPr>
         <p:txBody>
-          <a:bodyPr wrap="none" lIns="0" tIns="0" rIns="0" bIns="0" rtlCol="0" anchor="ctr"/>
+          <a:bodyPr wrap="none" lIns="0" tIns="0" rIns="0" bIns="0" rtlCol="0" anchor="t"/>
           <a:lstStyle/>
           <a:p>
             <a:pPr algn="l" indent="0" marL="0" eaLnBrk="1" latinLnBrk="0" hangingPunct="1">
@@ -45301,7 +45301,7 @@
           <a:ln/>
         </p:spPr>
         <p:txBody>
-          <a:bodyPr wrap="square" lIns="0" tIns="0" rIns="0" bIns="0" rtlCol="0" anchor="ctr"/>
+          <a:bodyPr wrap="square" lIns="0" tIns="0" rIns="0" bIns="0" rtlCol="0" anchor="t"/>
           <a:lstStyle/>
           <a:p>
             <a:pPr algn="just" indent="0" marL="0" eaLnBrk="1" latinLnBrk="0" hangingPunct="1">
@@ -45343,7 +45343,7 @@
           <a:ln/>
         </p:spPr>
         <p:txBody>
-          <a:bodyPr wrap="none" lIns="0" tIns="0" rIns="0" bIns="0" rtlCol="0" anchor="ctr"/>
+          <a:bodyPr wrap="none" lIns="0" tIns="0" rIns="0" bIns="0" rtlCol="0" anchor="t"/>
           <a:lstStyle/>
           <a:p>
             <a:pPr algn="l" indent="0" marL="0" eaLnBrk="1" latinLnBrk="0" hangingPunct="1">
@@ -45385,7 +45385,7 @@
           <a:ln/>
         </p:spPr>
         <p:txBody>
-          <a:bodyPr wrap="none" lIns="0" tIns="0" rIns="0" bIns="0" rtlCol="0" anchor="ctr"/>
+          <a:bodyPr wrap="none" lIns="0" tIns="0" rIns="0" bIns="0" rtlCol="0" anchor="t"/>
           <a:lstStyle/>
           <a:p>
             <a:pPr algn="r" indent="0" marL="0" eaLnBrk="1" latinLnBrk="0" hangingPunct="1">
@@ -45427,7 +45427,7 @@
           <a:ln/>
         </p:spPr>
         <p:txBody>
-          <a:bodyPr wrap="none" lIns="0" tIns="0" rIns="0" bIns="0" rtlCol="0" anchor="ctr"/>
+          <a:bodyPr wrap="none" lIns="0" tIns="0" rIns="0" bIns="0" rtlCol="0" anchor="t"/>
           <a:lstStyle/>
           <a:p>
             <a:pPr algn="l" indent="0" marL="0" eaLnBrk="1" latinLnBrk="0" hangingPunct="1">
@@ -45609,7 +45609,7 @@
           <a:ln/>
         </p:spPr>
         <p:txBody>
-          <a:bodyPr wrap="none" lIns="0" tIns="0" rIns="0" bIns="0" rtlCol="0" anchor="ctr"/>
+          <a:bodyPr wrap="none" lIns="0" tIns="0" rIns="0" bIns="0" rtlCol="0" anchor="t"/>
           <a:lstStyle/>
           <a:p>
             <a:pPr algn="l" indent="0" marL="0" eaLnBrk="1" latinLnBrk="0" hangingPunct="1">
@@ -45648,7 +45648,7 @@
           <a:ln/>
         </p:spPr>
         <p:txBody>
-          <a:bodyPr wrap="none" lIns="0" tIns="0" rIns="0" bIns="0" rtlCol="0" anchor="ctr"/>
+          <a:bodyPr wrap="none" lIns="0" tIns="0" rIns="0" bIns="0" rtlCol="0" anchor="t"/>
           <a:lstStyle/>
           <a:p>
             <a:pPr algn="l" indent="0" marL="0" eaLnBrk="1" latinLnBrk="0" hangingPunct="1">
@@ -45690,7 +45690,7 @@
           <a:ln/>
         </p:spPr>
         <p:txBody>
-          <a:bodyPr wrap="none" lIns="0" tIns="0" rIns="0" bIns="0" rtlCol="0" anchor="ctr"/>
+          <a:bodyPr wrap="none" lIns="0" tIns="0" rIns="0" bIns="0" rtlCol="0" anchor="t"/>
           <a:lstStyle/>
           <a:p>
             <a:pPr algn="l" indent="0" marL="0" eaLnBrk="1" latinLnBrk="0" hangingPunct="1">
@@ -45783,7 +45783,7 @@
           <a:ln/>
         </p:spPr>
         <p:txBody>
-          <a:bodyPr wrap="none" lIns="0" tIns="0" rIns="0" bIns="0" rtlCol="0" anchor="ctr"/>
+          <a:bodyPr wrap="none" lIns="0" tIns="0" rIns="0" bIns="0" rtlCol="0" anchor="t"/>
           <a:lstStyle/>
           <a:p>
             <a:pPr algn="l" indent="0" marL="0" eaLnBrk="1" latinLnBrk="0" hangingPunct="1">
@@ -45897,7 +45897,7 @@
           <a:ln/>
         </p:spPr>
         <p:txBody>
-          <a:bodyPr wrap="none" lIns="0" tIns="0" rIns="0" bIns="0" rtlCol="0" anchor="ctr"/>
+          <a:bodyPr wrap="none" lIns="0" tIns="0" rIns="0" bIns="0" rtlCol="0" anchor="t"/>
           <a:lstStyle/>
           <a:p>
             <a:pPr algn="ctr" indent="0" marL="0" eaLnBrk="1" latinLnBrk="0" hangingPunct="1">
@@ -45939,7 +45939,7 @@
           <a:ln/>
         </p:spPr>
         <p:txBody>
-          <a:bodyPr wrap="square" lIns="0" tIns="0" rIns="0" bIns="0" rtlCol="0" anchor="ctr"/>
+          <a:bodyPr wrap="square" lIns="0" tIns="0" rIns="0" bIns="0" rtlCol="0" anchor="t"/>
           <a:lstStyle/>
           <a:p>
             <a:pPr algn="just" marL="243840" indent="-243840" eaLnBrk="1" latinLnBrk="0" hangingPunct="1">
@@ -45982,7 +45982,7 @@
           <a:ln/>
         </p:spPr>
         <p:txBody>
-          <a:bodyPr wrap="none" lIns="0" tIns="0" rIns="0" bIns="0" rtlCol="0" anchor="ctr"/>
+          <a:bodyPr wrap="none" lIns="0" tIns="0" rIns="0" bIns="0" rtlCol="0" anchor="t"/>
           <a:lstStyle/>
           <a:p>
             <a:pPr algn="just" marL="243840" indent="-243840" eaLnBrk="1" latinLnBrk="0" hangingPunct="1">
@@ -46025,7 +46025,7 @@
           <a:ln/>
         </p:spPr>
         <p:txBody>
-          <a:bodyPr wrap="none" lIns="0" tIns="0" rIns="0" bIns="0" rtlCol="0" anchor="ctr"/>
+          <a:bodyPr wrap="none" lIns="0" tIns="0" rIns="0" bIns="0" rtlCol="0" anchor="t"/>
           <a:lstStyle/>
           <a:p>
             <a:pPr algn="just" marL="243840" indent="-243840" eaLnBrk="1" latinLnBrk="0" hangingPunct="1">
@@ -46068,7 +46068,7 @@
           <a:ln/>
         </p:spPr>
         <p:txBody>
-          <a:bodyPr wrap="none" lIns="0" tIns="0" rIns="0" bIns="0" rtlCol="0" anchor="ctr"/>
+          <a:bodyPr wrap="none" lIns="0" tIns="0" rIns="0" bIns="0" rtlCol="0" anchor="t"/>
           <a:lstStyle/>
           <a:p>
             <a:pPr algn="just" marL="243840" indent="-243840" eaLnBrk="1" latinLnBrk="0" hangingPunct="1">
@@ -46183,7 +46183,7 @@
           <a:ln/>
         </p:spPr>
         <p:txBody>
-          <a:bodyPr wrap="none" lIns="0" tIns="0" rIns="0" bIns="0" rtlCol="0" anchor="ctr"/>
+          <a:bodyPr wrap="none" lIns="0" tIns="0" rIns="0" bIns="0" rtlCol="0" anchor="t"/>
           <a:lstStyle/>
           <a:p>
             <a:pPr algn="ctr" indent="0" marL="0" eaLnBrk="1" latinLnBrk="0" hangingPunct="1">
@@ -46225,7 +46225,7 @@
           <a:ln/>
         </p:spPr>
         <p:txBody>
-          <a:bodyPr wrap="none" lIns="0" tIns="0" rIns="0" bIns="0" rtlCol="0" anchor="ctr"/>
+          <a:bodyPr wrap="none" lIns="0" tIns="0" rIns="0" bIns="0" rtlCol="0" anchor="t"/>
           <a:lstStyle/>
           <a:p>
             <a:pPr algn="just" marL="243840" indent="-243840" eaLnBrk="1" latinLnBrk="0" hangingPunct="1">
@@ -46268,7 +46268,7 @@
           <a:ln/>
         </p:spPr>
         <p:txBody>
-          <a:bodyPr wrap="none" lIns="0" tIns="0" rIns="0" bIns="0" rtlCol="0" anchor="ctr"/>
+          <a:bodyPr wrap="none" lIns="0" tIns="0" rIns="0" bIns="0" rtlCol="0" anchor="t"/>
           <a:lstStyle/>
           <a:p>
             <a:pPr algn="just" marL="243840" indent="-243840" eaLnBrk="1" latinLnBrk="0" hangingPunct="1">
@@ -46311,7 +46311,7 @@
           <a:ln/>
         </p:spPr>
         <p:txBody>
-          <a:bodyPr wrap="square" lIns="0" tIns="0" rIns="0" bIns="0" rtlCol="0" anchor="ctr"/>
+          <a:bodyPr wrap="square" lIns="0" tIns="0" rIns="0" bIns="0" rtlCol="0" anchor="t"/>
           <a:lstStyle/>
           <a:p>
             <a:pPr algn="just" marL="243840" indent="-243840" eaLnBrk="1" latinLnBrk="0" hangingPunct="1">
@@ -46354,7 +46354,7 @@
           <a:ln/>
         </p:spPr>
         <p:txBody>
-          <a:bodyPr wrap="none" lIns="0" tIns="0" rIns="0" bIns="0" rtlCol="0" anchor="ctr"/>
+          <a:bodyPr wrap="none" lIns="0" tIns="0" rIns="0" bIns="0" rtlCol="0" anchor="t"/>
           <a:lstStyle/>
           <a:p>
             <a:pPr algn="just" marL="243840" indent="-243840" eaLnBrk="1" latinLnBrk="0" hangingPunct="1">
@@ -46451,7 +46451,7 @@
           <a:ln/>
         </p:spPr>
         <p:txBody>
-          <a:bodyPr wrap="none" lIns="0" tIns="0" rIns="0" bIns="0" rtlCol="0" anchor="ctr"/>
+          <a:bodyPr wrap="none" lIns="0" tIns="0" rIns="0" bIns="0" rtlCol="0" anchor="t"/>
           <a:lstStyle/>
           <a:p>
             <a:pPr algn="just" indent="0" marL="0" eaLnBrk="1" latinLnBrk="0" hangingPunct="1">
@@ -46547,7 +46547,7 @@
           <a:ln/>
         </p:spPr>
         <p:txBody>
-          <a:bodyPr wrap="none" lIns="0" tIns="0" rIns="0" bIns="0" rtlCol="0" anchor="ctr"/>
+          <a:bodyPr wrap="none" lIns="0" tIns="0" rIns="0" bIns="0" rtlCol="0" anchor="t"/>
           <a:lstStyle/>
           <a:p>
             <a:pPr algn="just" indent="0" marL="0" eaLnBrk="1" latinLnBrk="0" hangingPunct="1">
@@ -46616,7 +46616,7 @@
           <a:ln/>
         </p:spPr>
         <p:txBody>
-          <a:bodyPr wrap="none" lIns="0" tIns="0" rIns="0" bIns="0" rtlCol="0" anchor="ctr"/>
+          <a:bodyPr wrap="none" lIns="0" tIns="0" rIns="0" bIns="0" rtlCol="0" anchor="t"/>
           <a:lstStyle/>
           <a:p>
             <a:pPr algn="ctr" indent="0" marL="0" eaLnBrk="1" latinLnBrk="0" hangingPunct="1">
@@ -46658,7 +46658,7 @@
           <a:ln/>
         </p:spPr>
         <p:txBody>
-          <a:bodyPr wrap="none" lIns="0" tIns="0" rIns="0" bIns="0" rtlCol="0" anchor="ctr"/>
+          <a:bodyPr wrap="none" lIns="0" tIns="0" rIns="0" bIns="0" rtlCol="0" anchor="t"/>
           <a:lstStyle/>
           <a:p>
             <a:pPr algn="l" indent="0" marL="0" eaLnBrk="1" latinLnBrk="0" hangingPunct="1">
@@ -46700,7 +46700,7 @@
           <a:ln/>
         </p:spPr>
         <p:txBody>
-          <a:bodyPr wrap="none" lIns="0" tIns="0" rIns="0" bIns="0" rtlCol="0" anchor="ctr"/>
+          <a:bodyPr wrap="none" lIns="0" tIns="0" rIns="0" bIns="0" rtlCol="0" anchor="t"/>
           <a:lstStyle/>
           <a:p>
             <a:pPr algn="r" indent="0" marL="0" eaLnBrk="1" latinLnBrk="0" hangingPunct="1">
@@ -46742,7 +46742,7 @@
           <a:ln/>
         </p:spPr>
         <p:txBody>
-          <a:bodyPr wrap="none" lIns="0" tIns="0" rIns="0" bIns="0" rtlCol="0" anchor="ctr"/>
+          <a:bodyPr wrap="none" lIns="0" tIns="0" rIns="0" bIns="0" rtlCol="0" anchor="t"/>
           <a:lstStyle/>
           <a:p>
             <a:pPr algn="l" indent="0" marL="0" eaLnBrk="1" latinLnBrk="0" hangingPunct="1">
@@ -46924,7 +46924,7 @@
           <a:ln/>
         </p:spPr>
         <p:txBody>
-          <a:bodyPr wrap="none" lIns="0" tIns="0" rIns="0" bIns="0" rtlCol="0" anchor="ctr"/>
+          <a:bodyPr wrap="none" lIns="0" tIns="0" rIns="0" bIns="0" rtlCol="0" anchor="t"/>
           <a:lstStyle/>
           <a:p>
             <a:pPr algn="l" indent="0" marL="0" eaLnBrk="1" latinLnBrk="0" hangingPunct="1">
@@ -46963,7 +46963,7 @@
           <a:ln/>
         </p:spPr>
         <p:txBody>
-          <a:bodyPr wrap="none" lIns="0" tIns="0" rIns="0" bIns="0" rtlCol="0" anchor="ctr"/>
+          <a:bodyPr wrap="none" lIns="0" tIns="0" rIns="0" bIns="0" rtlCol="0" anchor="t"/>
           <a:lstStyle/>
           <a:p>
             <a:pPr algn="l" indent="0" marL="0" eaLnBrk="1" latinLnBrk="0" hangingPunct="1">
@@ -47005,7 +47005,7 @@
           <a:ln/>
         </p:spPr>
         <p:txBody>
-          <a:bodyPr wrap="none" lIns="0" tIns="0" rIns="0" bIns="0" rtlCol="0" anchor="ctr"/>
+          <a:bodyPr wrap="none" lIns="0" tIns="0" rIns="0" bIns="0" rtlCol="0" anchor="t"/>
           <a:lstStyle/>
           <a:p>
             <a:pPr algn="l" indent="0" marL="0" eaLnBrk="1" latinLnBrk="0" hangingPunct="1">
@@ -47098,7 +47098,7 @@
           <a:ln/>
         </p:spPr>
         <p:txBody>
-          <a:bodyPr wrap="none" lIns="0" tIns="0" rIns="0" bIns="0" rtlCol="0" anchor="ctr"/>
+          <a:bodyPr wrap="none" lIns="0" tIns="0" rIns="0" bIns="0" rtlCol="0" anchor="t"/>
           <a:lstStyle/>
           <a:p>
             <a:pPr algn="l" indent="0" marL="0" eaLnBrk="1" latinLnBrk="0" hangingPunct="1">
@@ -47215,7 +47215,7 @@
           <a:ln/>
         </p:spPr>
         <p:txBody>
-          <a:bodyPr wrap="none" lIns="0" tIns="0" rIns="0" bIns="0" rtlCol="0" anchor="ctr"/>
+          <a:bodyPr wrap="none" lIns="0" tIns="0" rIns="0" bIns="0" rtlCol="0" anchor="t"/>
           <a:lstStyle/>
           <a:p>
             <a:pPr algn="l" indent="0" marL="0" eaLnBrk="1" latinLnBrk="0" hangingPunct="1">
@@ -47257,7 +47257,7 @@
           <a:ln/>
         </p:spPr>
         <p:txBody>
-          <a:bodyPr wrap="none" lIns="0" tIns="0" rIns="0" bIns="0" rtlCol="0" anchor="ctr"/>
+          <a:bodyPr wrap="none" lIns="0" tIns="0" rIns="0" bIns="0" rtlCol="0" anchor="t"/>
           <a:lstStyle/>
           <a:p>
             <a:pPr algn="l" indent="0" marL="0" eaLnBrk="1" latinLnBrk="0" hangingPunct="1">
@@ -47326,7 +47326,7 @@
           <a:ln/>
         </p:spPr>
         <p:txBody>
-          <a:bodyPr wrap="none" lIns="0" tIns="0" rIns="0" bIns="0" rtlCol="0" anchor="ctr"/>
+          <a:bodyPr wrap="none" lIns="0" tIns="0" rIns="0" bIns="0" rtlCol="0" anchor="t"/>
           <a:lstStyle/>
           <a:p>
             <a:pPr algn="just" marL="243840" indent="-243840" eaLnBrk="1" latinLnBrk="0" hangingPunct="1">
@@ -47369,7 +47369,7 @@
           <a:ln/>
         </p:spPr>
         <p:txBody>
-          <a:bodyPr wrap="none" lIns="0" tIns="0" rIns="0" bIns="0" rtlCol="0" anchor="ctr"/>
+          <a:bodyPr wrap="none" lIns="0" tIns="0" rIns="0" bIns="0" rtlCol="0" anchor="t"/>
           <a:lstStyle/>
           <a:p>
             <a:pPr algn="just" marL="243840" indent="-243840" eaLnBrk="1" latinLnBrk="0" hangingPunct="1">
@@ -47412,7 +47412,7 @@
           <a:ln/>
         </p:spPr>
         <p:txBody>
-          <a:bodyPr wrap="none" lIns="0" tIns="0" rIns="0" bIns="0" rtlCol="0" anchor="ctr"/>
+          <a:bodyPr wrap="none" lIns="0" tIns="0" rIns="0" bIns="0" rtlCol="0" anchor="t"/>
           <a:lstStyle/>
           <a:p>
             <a:pPr algn="just" marL="243840" indent="-243840" eaLnBrk="1" latinLnBrk="0" hangingPunct="1">
@@ -47455,7 +47455,7 @@
           <a:ln/>
         </p:spPr>
         <p:txBody>
-          <a:bodyPr wrap="none" lIns="0" tIns="0" rIns="0" bIns="0" rtlCol="0" anchor="ctr"/>
+          <a:bodyPr wrap="none" lIns="0" tIns="0" rIns="0" bIns="0" rtlCol="0" anchor="t"/>
           <a:lstStyle/>
           <a:p>
             <a:pPr algn="just" marL="243840" indent="-243840" eaLnBrk="1" latinLnBrk="0" hangingPunct="1">
@@ -47498,7 +47498,7 @@
           <a:ln/>
         </p:spPr>
         <p:txBody>
-          <a:bodyPr wrap="none" lIns="0" tIns="0" rIns="0" bIns="0" rtlCol="0" anchor="ctr"/>
+          <a:bodyPr wrap="none" lIns="0" tIns="0" rIns="0" bIns="0" rtlCol="0" anchor="t"/>
           <a:lstStyle/>
           <a:p>
             <a:pPr algn="l" indent="0" marL="0" eaLnBrk="1" latinLnBrk="0" hangingPunct="1">
@@ -47540,7 +47540,7 @@
           <a:ln/>
         </p:spPr>
         <p:txBody>
-          <a:bodyPr wrap="square" lIns="0" tIns="0" rIns="0" bIns="0" rtlCol="0" anchor="ctr"/>
+          <a:bodyPr wrap="square" lIns="0" tIns="0" rIns="0" bIns="0" rtlCol="0" anchor="t"/>
           <a:lstStyle/>
           <a:p>
             <a:pPr algn="l" indent="0" marL="0" eaLnBrk="1" latinLnBrk="0" hangingPunct="1">
@@ -47657,7 +47657,7 @@
           <a:ln/>
         </p:spPr>
         <p:txBody>
-          <a:bodyPr wrap="none" lIns="0" tIns="0" rIns="0" bIns="0" rtlCol="0" anchor="ctr"/>
+          <a:bodyPr wrap="none" lIns="0" tIns="0" rIns="0" bIns="0" rtlCol="0" anchor="t"/>
           <a:lstStyle/>
           <a:p>
             <a:pPr algn="l" indent="0" marL="0" eaLnBrk="1" latinLnBrk="0" hangingPunct="1">
@@ -47699,7 +47699,7 @@
           <a:ln/>
         </p:spPr>
         <p:txBody>
-          <a:bodyPr wrap="none" lIns="0" tIns="0" rIns="0" bIns="0" rtlCol="0" anchor="ctr"/>
+          <a:bodyPr wrap="none" lIns="0" tIns="0" rIns="0" bIns="0" rtlCol="0" anchor="t"/>
           <a:lstStyle/>
           <a:p>
             <a:pPr algn="l" indent="0" marL="0" eaLnBrk="1" latinLnBrk="0" hangingPunct="1">
@@ -47768,7 +47768,7 @@
           <a:ln/>
         </p:spPr>
         <p:txBody>
-          <a:bodyPr wrap="none" lIns="0" tIns="0" rIns="0" bIns="0" rtlCol="0" anchor="ctr"/>
+          <a:bodyPr wrap="none" lIns="0" tIns="0" rIns="0" bIns="0" rtlCol="0" anchor="t"/>
           <a:lstStyle/>
           <a:p>
             <a:pPr algn="just" marL="243840" indent="-243840" eaLnBrk="1" latinLnBrk="0" hangingPunct="1">
@@ -47811,7 +47811,7 @@
           <a:ln/>
         </p:spPr>
         <p:txBody>
-          <a:bodyPr wrap="none" lIns="0" tIns="0" rIns="0" bIns="0" rtlCol="0" anchor="ctr"/>
+          <a:bodyPr wrap="none" lIns="0" tIns="0" rIns="0" bIns="0" rtlCol="0" anchor="t"/>
           <a:lstStyle/>
           <a:p>
             <a:pPr algn="just" marL="243840" indent="-243840" eaLnBrk="1" latinLnBrk="0" hangingPunct="1">
@@ -47854,7 +47854,7 @@
           <a:ln/>
         </p:spPr>
         <p:txBody>
-          <a:bodyPr wrap="none" lIns="0" tIns="0" rIns="0" bIns="0" rtlCol="0" anchor="ctr"/>
+          <a:bodyPr wrap="none" lIns="0" tIns="0" rIns="0" bIns="0" rtlCol="0" anchor="t"/>
           <a:lstStyle/>
           <a:p>
             <a:pPr algn="just" marL="243840" indent="-243840" eaLnBrk="1" latinLnBrk="0" hangingPunct="1">
@@ -47897,7 +47897,7 @@
           <a:ln/>
         </p:spPr>
         <p:txBody>
-          <a:bodyPr wrap="none" lIns="0" tIns="0" rIns="0" bIns="0" rtlCol="0" anchor="ctr"/>
+          <a:bodyPr wrap="none" lIns="0" tIns="0" rIns="0" bIns="0" rtlCol="0" anchor="t"/>
           <a:lstStyle/>
           <a:p>
             <a:pPr algn="just" marL="243840" indent="-243840" eaLnBrk="1" latinLnBrk="0" hangingPunct="1">
@@ -47940,7 +47940,7 @@
           <a:ln/>
         </p:spPr>
         <p:txBody>
-          <a:bodyPr wrap="none" lIns="0" tIns="0" rIns="0" bIns="0" rtlCol="0" anchor="ctr"/>
+          <a:bodyPr wrap="none" lIns="0" tIns="0" rIns="0" bIns="0" rtlCol="0" anchor="t"/>
           <a:lstStyle/>
           <a:p>
             <a:pPr algn="l" indent="0" marL="0" eaLnBrk="1" latinLnBrk="0" hangingPunct="1">
@@ -47982,7 +47982,7 @@
           <a:ln/>
         </p:spPr>
         <p:txBody>
-          <a:bodyPr wrap="square" lIns="0" tIns="0" rIns="0" bIns="0" rtlCol="0" anchor="ctr"/>
+          <a:bodyPr wrap="square" lIns="0" tIns="0" rIns="0" bIns="0" rtlCol="0" anchor="t"/>
           <a:lstStyle/>
           <a:p>
             <a:pPr algn="l" indent="0" marL="0" eaLnBrk="1" latinLnBrk="0" hangingPunct="1">
@@ -48099,7 +48099,7 @@
           <a:ln/>
         </p:spPr>
         <p:txBody>
-          <a:bodyPr wrap="none" lIns="0" tIns="0" rIns="0" bIns="0" rtlCol="0" anchor="ctr"/>
+          <a:bodyPr wrap="none" lIns="0" tIns="0" rIns="0" bIns="0" rtlCol="0" anchor="t"/>
           <a:lstStyle/>
           <a:p>
             <a:pPr algn="l" indent="0" marL="0" eaLnBrk="1" latinLnBrk="0" hangingPunct="1">
@@ -48141,7 +48141,7 @@
           <a:ln/>
         </p:spPr>
         <p:txBody>
-          <a:bodyPr wrap="none" lIns="0" tIns="0" rIns="0" bIns="0" rtlCol="0" anchor="ctr"/>
+          <a:bodyPr wrap="none" lIns="0" tIns="0" rIns="0" bIns="0" rtlCol="0" anchor="t"/>
           <a:lstStyle/>
           <a:p>
             <a:pPr algn="l" indent="0" marL="0" eaLnBrk="1" latinLnBrk="0" hangingPunct="1">
@@ -48210,7 +48210,7 @@
           <a:ln/>
         </p:spPr>
         <p:txBody>
-          <a:bodyPr wrap="none" lIns="0" tIns="0" rIns="0" bIns="0" rtlCol="0" anchor="ctr"/>
+          <a:bodyPr wrap="none" lIns="0" tIns="0" rIns="0" bIns="0" rtlCol="0" anchor="t"/>
           <a:lstStyle/>
           <a:p>
             <a:pPr algn="just" marL="243840" indent="-243840" eaLnBrk="1" latinLnBrk="0" hangingPunct="1">
@@ -48253,7 +48253,7 @@
           <a:ln/>
         </p:spPr>
         <p:txBody>
-          <a:bodyPr wrap="none" lIns="0" tIns="0" rIns="0" bIns="0" rtlCol="0" anchor="ctr"/>
+          <a:bodyPr wrap="none" lIns="0" tIns="0" rIns="0" bIns="0" rtlCol="0" anchor="t"/>
           <a:lstStyle/>
           <a:p>
             <a:pPr algn="just" marL="243840" indent="-243840" eaLnBrk="1" latinLnBrk="0" hangingPunct="1">
@@ -48296,7 +48296,7 @@
           <a:ln/>
         </p:spPr>
         <p:txBody>
-          <a:bodyPr wrap="none" lIns="0" tIns="0" rIns="0" bIns="0" rtlCol="0" anchor="ctr"/>
+          <a:bodyPr wrap="none" lIns="0" tIns="0" rIns="0" bIns="0" rtlCol="0" anchor="t"/>
           <a:lstStyle/>
           <a:p>
             <a:pPr algn="just" marL="243840" indent="-243840" eaLnBrk="1" latinLnBrk="0" hangingPunct="1">
@@ -48339,7 +48339,7 @@
           <a:ln/>
         </p:spPr>
         <p:txBody>
-          <a:bodyPr wrap="none" lIns="0" tIns="0" rIns="0" bIns="0" rtlCol="0" anchor="ctr"/>
+          <a:bodyPr wrap="none" lIns="0" tIns="0" rIns="0" bIns="0" rtlCol="0" anchor="t"/>
           <a:lstStyle/>
           <a:p>
             <a:pPr algn="just" marL="243840" indent="-243840" eaLnBrk="1" latinLnBrk="0" hangingPunct="1">
@@ -48382,7 +48382,7 @@
           <a:ln/>
         </p:spPr>
         <p:txBody>
-          <a:bodyPr wrap="none" lIns="0" tIns="0" rIns="0" bIns="0" rtlCol="0" anchor="ctr"/>
+          <a:bodyPr wrap="none" lIns="0" tIns="0" rIns="0" bIns="0" rtlCol="0" anchor="t"/>
           <a:lstStyle/>
           <a:p>
             <a:pPr algn="l" indent="0" marL="0" eaLnBrk="1" latinLnBrk="0" hangingPunct="1">
@@ -48424,7 +48424,7 @@
           <a:ln/>
         </p:spPr>
         <p:txBody>
-          <a:bodyPr wrap="square" lIns="0" tIns="0" rIns="0" bIns="0" rtlCol="0" anchor="ctr"/>
+          <a:bodyPr wrap="square" lIns="0" tIns="0" rIns="0" bIns="0" rtlCol="0" anchor="t"/>
           <a:lstStyle/>
           <a:p>
             <a:pPr algn="l" indent="0" marL="0" eaLnBrk="1" latinLnBrk="0" hangingPunct="1">
@@ -48493,7 +48493,7 @@
           <a:ln/>
         </p:spPr>
         <p:txBody>
-          <a:bodyPr wrap="none" lIns="0" tIns="0" rIns="0" bIns="0" rtlCol="0" anchor="ctr"/>
+          <a:bodyPr wrap="none" lIns="0" tIns="0" rIns="0" bIns="0" rtlCol="0" anchor="t"/>
           <a:lstStyle/>
           <a:p>
             <a:pPr algn="ctr" indent="0" marL="0" eaLnBrk="1" latinLnBrk="0" hangingPunct="1">
@@ -48535,7 +48535,7 @@
           <a:ln/>
         </p:spPr>
         <p:txBody>
-          <a:bodyPr wrap="none" lIns="0" tIns="0" rIns="0" bIns="0" rtlCol="0" anchor="ctr"/>
+          <a:bodyPr wrap="none" lIns="0" tIns="0" rIns="0" bIns="0" rtlCol="0" anchor="t"/>
           <a:lstStyle/>
           <a:p>
             <a:pPr algn="l" indent="0" marL="0" eaLnBrk="1" latinLnBrk="0" hangingPunct="1">
@@ -48577,7 +48577,7 @@
           <a:ln/>
         </p:spPr>
         <p:txBody>
-          <a:bodyPr wrap="none" lIns="0" tIns="0" rIns="0" bIns="0" rtlCol="0" anchor="ctr"/>
+          <a:bodyPr wrap="none" lIns="0" tIns="0" rIns="0" bIns="0" rtlCol="0" anchor="t"/>
           <a:lstStyle/>
           <a:p>
             <a:pPr algn="r" indent="0" marL="0" eaLnBrk="1" latinLnBrk="0" hangingPunct="1">
@@ -48619,7 +48619,7 @@
           <a:ln/>
         </p:spPr>
         <p:txBody>
-          <a:bodyPr wrap="none" lIns="0" tIns="0" rIns="0" bIns="0" rtlCol="0" anchor="ctr"/>
+          <a:bodyPr wrap="none" lIns="0" tIns="0" rIns="0" bIns="0" rtlCol="0" anchor="t"/>
           <a:lstStyle/>
           <a:p>
             <a:pPr algn="l" indent="0" marL="0" eaLnBrk="1" latinLnBrk="0" hangingPunct="1">
@@ -48801,7 +48801,7 @@
           <a:ln/>
         </p:spPr>
         <p:txBody>
-          <a:bodyPr wrap="none" lIns="0" tIns="0" rIns="0" bIns="0" rtlCol="0" anchor="ctr"/>
+          <a:bodyPr wrap="none" lIns="0" tIns="0" rIns="0" bIns="0" rtlCol="0" anchor="t"/>
           <a:lstStyle/>
           <a:p>
             <a:pPr algn="l" indent="0" marL="0" eaLnBrk="1" latinLnBrk="0" hangingPunct="1">
@@ -48840,7 +48840,7 @@
           <a:ln/>
         </p:spPr>
         <p:txBody>
-          <a:bodyPr wrap="none" lIns="0" tIns="0" rIns="0" bIns="0" rtlCol="0" anchor="ctr"/>
+          <a:bodyPr wrap="none" lIns="0" tIns="0" rIns="0" bIns="0" rtlCol="0" anchor="t"/>
           <a:lstStyle/>
           <a:p>
             <a:pPr algn="l" indent="0" marL="0" eaLnBrk="1" latinLnBrk="0" hangingPunct="1">
@@ -48882,7 +48882,7 @@
           <a:ln/>
         </p:spPr>
         <p:txBody>
-          <a:bodyPr wrap="none" lIns="0" tIns="0" rIns="0" bIns="0" rtlCol="0" anchor="ctr"/>
+          <a:bodyPr wrap="none" lIns="0" tIns="0" rIns="0" bIns="0" rtlCol="0" anchor="t"/>
           <a:lstStyle/>
           <a:p>
             <a:pPr algn="l" indent="0" marL="0" eaLnBrk="1" latinLnBrk="0" hangingPunct="1">
@@ -48975,7 +48975,7 @@
           <a:ln/>
         </p:spPr>
         <p:txBody>
-          <a:bodyPr wrap="square" lIns="0" tIns="0" rIns="0" bIns="0" rtlCol="0" anchor="ctr"/>
+          <a:bodyPr wrap="square" lIns="0" tIns="0" rIns="0" bIns="0" rtlCol="0" anchor="t"/>
           <a:lstStyle/>
           <a:p>
             <a:pPr algn="l" indent="0" marL="0" eaLnBrk="1" latinLnBrk="0" hangingPunct="1">
@@ -49095,7 +49095,7 @@
           <a:ln/>
         </p:spPr>
         <p:txBody>
-          <a:bodyPr wrap="none" lIns="0" tIns="0" rIns="0" bIns="0" rtlCol="0" anchor="ctr"/>
+          <a:bodyPr wrap="none" lIns="0" tIns="0" rIns="0" bIns="0" rtlCol="0" anchor="t"/>
           <a:lstStyle/>
           <a:p>
             <a:pPr algn="l" indent="0" marL="0" eaLnBrk="1" latinLnBrk="0" hangingPunct="1">
@@ -49161,7 +49161,7 @@
           <a:ln/>
         </p:spPr>
         <p:txBody>
-          <a:bodyPr wrap="square" lIns="0" tIns="0" rIns="0" bIns="0" rtlCol="0" anchor="ctr"/>
+          <a:bodyPr wrap="square" lIns="0" tIns="0" rIns="0" bIns="0" rtlCol="0" anchor="t"/>
           <a:lstStyle/>
           <a:p>
             <a:pPr algn="just" indent="0" marL="0" eaLnBrk="1" latinLnBrk="0" hangingPunct="1">
@@ -49203,7 +49203,7 @@
           <a:ln/>
         </p:spPr>
         <p:txBody>
-          <a:bodyPr wrap="none" lIns="0" tIns="0" rIns="0" bIns="0" rtlCol="0" anchor="ctr"/>
+          <a:bodyPr wrap="none" lIns="0" tIns="0" rIns="0" bIns="0" rtlCol="0" anchor="t"/>
           <a:lstStyle/>
           <a:p>
             <a:pPr algn="l" indent="0" marL="0" eaLnBrk="1" latinLnBrk="0" hangingPunct="1">
@@ -49347,7 +49347,7 @@
           <a:ln/>
         </p:spPr>
         <p:txBody>
-          <a:bodyPr wrap="none" lIns="0" tIns="0" rIns="0" bIns="0" rtlCol="0" anchor="ctr"/>
+          <a:bodyPr wrap="none" lIns="0" tIns="0" rIns="0" bIns="0" rtlCol="0" anchor="t"/>
           <a:lstStyle/>
           <a:p>
             <a:pPr algn="l" indent="0" marL="0" eaLnBrk="1" latinLnBrk="0" hangingPunct="1">
@@ -49413,7 +49413,7 @@
           <a:ln/>
         </p:spPr>
         <p:txBody>
-          <a:bodyPr wrap="square" lIns="0" tIns="0" rIns="0" bIns="0" rtlCol="0" anchor="ctr"/>
+          <a:bodyPr wrap="square" lIns="0" tIns="0" rIns="0" bIns="0" rtlCol="0" anchor="t"/>
           <a:lstStyle/>
           <a:p>
             <a:pPr algn="just" indent="0" marL="0" eaLnBrk="1" latinLnBrk="0" hangingPunct="1">
@@ -49455,7 +49455,7 @@
           <a:ln/>
         </p:spPr>
         <p:txBody>
-          <a:bodyPr wrap="none" lIns="0" tIns="0" rIns="0" bIns="0" rtlCol="0" anchor="ctr"/>
+          <a:bodyPr wrap="none" lIns="0" tIns="0" rIns="0" bIns="0" rtlCol="0" anchor="t"/>
           <a:lstStyle/>
           <a:p>
             <a:pPr algn="l" indent="0" marL="0" eaLnBrk="1" latinLnBrk="0" hangingPunct="1">
@@ -49599,7 +49599,7 @@
           <a:ln/>
         </p:spPr>
         <p:txBody>
-          <a:bodyPr wrap="none" lIns="0" tIns="0" rIns="0" bIns="0" rtlCol="0" anchor="ctr"/>
+          <a:bodyPr wrap="none" lIns="0" tIns="0" rIns="0" bIns="0" rtlCol="0" anchor="t"/>
           <a:lstStyle/>
           <a:p>
             <a:pPr algn="l" indent="0" marL="0" eaLnBrk="1" latinLnBrk="0" hangingPunct="1">
@@ -49665,7 +49665,7 @@
           <a:ln/>
         </p:spPr>
         <p:txBody>
-          <a:bodyPr wrap="square" lIns="0" tIns="0" rIns="0" bIns="0" rtlCol="0" anchor="ctr"/>
+          <a:bodyPr wrap="square" lIns="0" tIns="0" rIns="0" bIns="0" rtlCol="0" anchor="t"/>
           <a:lstStyle/>
           <a:p>
             <a:pPr algn="just" indent="0" marL="0" eaLnBrk="1" latinLnBrk="0" hangingPunct="1">
@@ -49707,7 +49707,7 @@
           <a:ln/>
         </p:spPr>
         <p:txBody>
-          <a:bodyPr wrap="none" lIns="0" tIns="0" rIns="0" bIns="0" rtlCol="0" anchor="ctr"/>
+          <a:bodyPr wrap="none" lIns="0" tIns="0" rIns="0" bIns="0" rtlCol="0" anchor="t"/>
           <a:lstStyle/>
           <a:p>
             <a:pPr algn="l" indent="0" marL="0" eaLnBrk="1" latinLnBrk="0" hangingPunct="1">
@@ -49851,7 +49851,7 @@
           <a:ln/>
         </p:spPr>
         <p:txBody>
-          <a:bodyPr wrap="none" lIns="0" tIns="0" rIns="0" bIns="0" rtlCol="0" anchor="ctr"/>
+          <a:bodyPr wrap="none" lIns="0" tIns="0" rIns="0" bIns="0" rtlCol="0" anchor="t"/>
           <a:lstStyle/>
           <a:p>
             <a:pPr algn="l" indent="0" marL="0" eaLnBrk="1" latinLnBrk="0" hangingPunct="1">
@@ -49917,7 +49917,7 @@
           <a:ln/>
         </p:spPr>
         <p:txBody>
-          <a:bodyPr wrap="square" lIns="0" tIns="0" rIns="0" bIns="0" rtlCol="0" anchor="ctr"/>
+          <a:bodyPr wrap="square" lIns="0" tIns="0" rIns="0" bIns="0" rtlCol="0" anchor="t"/>
           <a:lstStyle/>
           <a:p>
             <a:pPr algn="just" indent="0" marL="0" eaLnBrk="1" latinLnBrk="0" hangingPunct="1">
@@ -49959,7 +49959,7 @@
           <a:ln/>
         </p:spPr>
         <p:txBody>
-          <a:bodyPr wrap="none" lIns="0" tIns="0" rIns="0" bIns="0" rtlCol="0" anchor="ctr"/>
+          <a:bodyPr wrap="none" lIns="0" tIns="0" rIns="0" bIns="0" rtlCol="0" anchor="t"/>
           <a:lstStyle/>
           <a:p>
             <a:pPr algn="l" indent="0" marL="0" eaLnBrk="1" latinLnBrk="0" hangingPunct="1">
@@ -50049,7 +50049,7 @@
           <a:ln/>
         </p:spPr>
         <p:txBody>
-          <a:bodyPr wrap="none" lIns="0" tIns="0" rIns="0" bIns="0" rtlCol="0" anchor="ctr"/>
+          <a:bodyPr wrap="none" lIns="0" tIns="0" rIns="0" bIns="0" rtlCol="0" anchor="t"/>
           <a:lstStyle/>
           <a:p>
             <a:pPr algn="l" indent="0" marL="0" eaLnBrk="1" latinLnBrk="0" hangingPunct="1">
@@ -50093,7 +50093,7 @@
           <a:ln/>
         </p:spPr>
         <p:txBody>
-          <a:bodyPr wrap="none" lIns="0" tIns="0" rIns="0" bIns="0" rtlCol="0" anchor="ctr"/>
+          <a:bodyPr wrap="none" lIns="0" tIns="0" rIns="0" bIns="0" rtlCol="0" anchor="t"/>
           <a:lstStyle/>
           <a:p>
             <a:pPr algn="r" indent="0" marL="0" eaLnBrk="1" latinLnBrk="0" hangingPunct="1">
@@ -50142,7 +50142,7 @@
           <a:ln/>
         </p:spPr>
         <p:txBody>
-          <a:bodyPr wrap="none" lIns="0" tIns="0" rIns="0" bIns="0" rtlCol="0" anchor="ctr"/>
+          <a:bodyPr wrap="none" lIns="0" tIns="0" rIns="0" bIns="0" rtlCol="0" anchor="t"/>
           <a:lstStyle/>
           <a:p>
             <a:pPr algn="l" indent="0" marL="0" eaLnBrk="1" latinLnBrk="0" hangingPunct="1">
@@ -50297,7 +50297,7 @@
           <a:ln/>
         </p:spPr>
         <p:txBody>
-          <a:bodyPr wrap="none" lIns="0" tIns="0" rIns="0" bIns="0" rtlCol="0" anchor="ctr"/>
+          <a:bodyPr wrap="none" lIns="0" tIns="0" rIns="0" bIns="0" rtlCol="0" anchor="t"/>
           <a:lstStyle/>
           <a:p>
             <a:pPr algn="ctr" indent="0" marL="0" eaLnBrk="1" latinLnBrk="0" hangingPunct="1">
@@ -50366,7 +50366,7 @@
           <a:ln/>
         </p:spPr>
         <p:txBody>
-          <a:bodyPr wrap="none" lIns="0" tIns="0" rIns="0" bIns="0" rtlCol="0" anchor="ctr"/>
+          <a:bodyPr wrap="none" lIns="0" tIns="0" rIns="0" bIns="0" rtlCol="0" anchor="t"/>
           <a:lstStyle/>
           <a:p>
             <a:pPr algn="ctr" indent="0" marL="0" eaLnBrk="1" latinLnBrk="0" hangingPunct="1">
@@ -50408,7 +50408,7 @@
           <a:ln/>
         </p:spPr>
         <p:txBody>
-          <a:bodyPr wrap="none" lIns="0" tIns="0" rIns="0" bIns="0" rtlCol="0" anchor="ctr"/>
+          <a:bodyPr wrap="none" lIns="0" tIns="0" rIns="0" bIns="0" rtlCol="0" anchor="t"/>
           <a:lstStyle/>
           <a:p>
             <a:pPr algn="ctr" indent="0" marL="0" eaLnBrk="1" latinLnBrk="0" hangingPunct="1">
